--- a/templates/de/cv_template.pptx
+++ b/templates/de/cv_template.pptx
@@ -14,6 +14,2501 @@
 </file>
 
 <file path=ppt/slideLayouts/slideLayout1.xml><?xml version="1.0" encoding="utf-8"?>
+<p:sldLayout xmlns:a="http://schemas.openxmlformats.org/drawingml/2006/main" xmlns:p="http://schemas.openxmlformats.org/presentationml/2006/main" xmlns:r="http://schemas.openxmlformats.org/officeDocument/2006/relationships" xmlns:p14="http://schemas.microsoft.com/office/powerpoint/2010/main" xmlns:p15="http://schemas.microsoft.com/office/powerpoint/2012/main" xmlns:mc="http://schemas.openxmlformats.org/markup-compatibility/2006" type="blank" preserve="1">
+  <p:cSld name="Leer">
+    <p:bg>
+      <p:bgPr>
+        <a:solidFill>
+          <a:srgbClr val="ffffff"/>
+        </a:solidFill>
+      </p:bgPr>
+    </p:bg>
+    <p:spTree>
+      <p:nvGrpSpPr>
+        <p:cNvPr id="1" name=""/>
+        <p:cNvGrpSpPr/>
+        <p:nvPr/>
+      </p:nvGrpSpPr>
+      <p:grpSpPr>
+        <a:xfrm>
+          <a:off x="0" y="0"/>
+          <a:ext cx="0" cy="0"/>
+          <a:chOff x="0" y="0"/>
+          <a:chExt cx="0" cy="0"/>
+        </a:xfrm>
+      </p:grpSpPr>
+      <p:sp>
+        <p:nvSpPr>
+          <p:cNvPr id="2" name="PlaceHolder 1"/>
+          <p:cNvSpPr>
+            <a:spLocks noGrp="1"/>
+          </p:cNvSpPr>
+          <p:nvPr>
+            <p:ph type="dt" idx="1"/>
+          </p:nvPr>
+        </p:nvSpPr>
+        <p:spPr>
+          <a:xfrm>
+            <a:off x="471600" y="9181440"/>
+            <a:ext cx="1538280" cy="522720"/>
+          </a:xfrm>
+          <a:prstGeom prst="rect">
+            <a:avLst/>
+          </a:prstGeom>
+          <a:noFill/>
+          <a:ln w="0">
+            <a:noFill/>
+          </a:ln>
+        </p:spPr>
+        <p:txBody>
+          <a:bodyPr lIns="91440" rIns="91440" tIns="45720" bIns="45720" anchor="ctr">
+            <a:noAutofit/>
+          </a:bodyPr>
+          <a:lstStyle>
+            <a:lvl1pPr indent="0" defTabSz="457200">
+              <a:lnSpc>
+                <a:spcPct val="100000"/>
+              </a:lnSpc>
+              <a:buNone/>
+              <a:tabLst>
+                <a:tab algn="l" pos="0"/>
+              </a:tabLst>
+              <a:defRPr lang="de-DE" sz="900" b="0" u="none" strike="noStrike">
+                <a:solidFill>
+                  <a:schemeClr val="dk1">
+                    <a:tint val="75000"/>
+                  </a:schemeClr>
+                </a:solidFill>
+                <a:effectLst/>
+                <a:uFillTx/>
+                <a:latin typeface="Calibri"/>
+              </a:defRPr>
+            </a:lvl1pPr>
+          </a:lstStyle>
+          <a:p>
+            <a:pPr indent="0" defTabSz="457200">
+              <a:lnSpc>
+                <a:spcPct val="100000"/>
+              </a:lnSpc>
+              <a:buNone/>
+              <a:tabLst>
+                <a:tab algn="l" pos="0"/>
+              </a:tabLst>
+            </a:pPr>
+            <a:r>
+              <a:rPr lang="de-DE" sz="900" b="0" u="none" strike="noStrike">
+                <a:solidFill>
+                  <a:schemeClr val="dk1">
+                    <a:tint val="75000"/>
+                  </a:schemeClr>
+                </a:solidFill>
+                <a:effectLst/>
+                <a:uFillTx/>
+                <a:latin typeface="Calibri"/>
+              </a:rPr>
+              <a:t>&lt;Datum/Uhrzeit&gt;</a:t>
+            </a:r>
+            <a:endParaRPr lang="de-DE" sz="900" b="0" u="none" strike="noStrike">
+              <a:solidFill>
+                <a:srgbClr val="000000"/>
+              </a:solidFill>
+              <a:effectLst/>
+              <a:uFillTx/>
+              <a:latin typeface="Times New Roman"/>
+            </a:endParaRPr>
+          </a:p>
+        </p:txBody>
+      </p:sp>
+      <p:sp>
+        <p:nvSpPr>
+          <p:cNvPr id="3" name="PlaceHolder 2"/>
+          <p:cNvSpPr>
+            <a:spLocks noGrp="1"/>
+          </p:cNvSpPr>
+          <p:nvPr>
+            <p:ph type="ftr" idx="2"/>
+          </p:nvPr>
+        </p:nvSpPr>
+        <p:spPr>
+          <a:xfrm>
+            <a:off x="2271600" y="9181440"/>
+            <a:ext cx="2309760" cy="522720"/>
+          </a:xfrm>
+          <a:prstGeom prst="rect">
+            <a:avLst/>
+          </a:prstGeom>
+          <a:noFill/>
+          <a:ln w="0">
+            <a:noFill/>
+          </a:ln>
+        </p:spPr>
+        <p:txBody>
+          <a:bodyPr lIns="91440" rIns="91440" tIns="45720" bIns="45720" anchor="ctr">
+            <a:noAutofit/>
+          </a:bodyPr>
+          <a:lstStyle>
+            <a:lvl1pPr indent="0" algn="ctr">
+              <a:lnSpc>
+                <a:spcPct val="100000"/>
+              </a:lnSpc>
+              <a:buNone/>
+              <a:tabLst>
+                <a:tab algn="l" pos="0"/>
+              </a:tabLst>
+              <a:defRPr lang="de-DE" sz="1400" b="0" u="none" strike="noStrike">
+                <a:solidFill>
+                  <a:srgbClr val="000000"/>
+                </a:solidFill>
+                <a:effectLst/>
+                <a:uFillTx/>
+                <a:latin typeface="Times New Roman"/>
+              </a:defRPr>
+            </a:lvl1pPr>
+          </a:lstStyle>
+          <a:p>
+            <a:pPr indent="0" algn="ctr">
+              <a:lnSpc>
+                <a:spcPct val="100000"/>
+              </a:lnSpc>
+              <a:buNone/>
+              <a:tabLst>
+                <a:tab algn="l" pos="0"/>
+              </a:tabLst>
+            </a:pPr>
+            <a:r>
+              <a:rPr lang="de-DE" sz="1400" b="0" u="none" strike="noStrike">
+                <a:solidFill>
+                  <a:srgbClr val="000000"/>
+                </a:solidFill>
+                <a:effectLst/>
+                <a:uFillTx/>
+                <a:latin typeface="Times New Roman"/>
+              </a:rPr>
+              <a:t>&lt;Fußzeile&gt;</a:t>
+            </a:r>
+            <a:endParaRPr lang="de-DE" sz="1400" b="0" u="none" strike="noStrike">
+              <a:solidFill>
+                <a:srgbClr val="000000"/>
+              </a:solidFill>
+              <a:effectLst/>
+              <a:uFillTx/>
+              <a:latin typeface="Times New Roman"/>
+            </a:endParaRPr>
+          </a:p>
+        </p:txBody>
+      </p:sp>
+      <p:sp>
+        <p:nvSpPr>
+          <p:cNvPr id="4" name="PlaceHolder 3"/>
+          <p:cNvSpPr>
+            <a:spLocks noGrp="1"/>
+          </p:cNvSpPr>
+          <p:nvPr>
+            <p:ph type="sldNum" idx="3"/>
+          </p:nvPr>
+        </p:nvSpPr>
+        <p:spPr>
+          <a:xfrm>
+            <a:off x="4843440" y="9181440"/>
+            <a:ext cx="1538280" cy="522720"/>
+          </a:xfrm>
+          <a:prstGeom prst="rect">
+            <a:avLst/>
+          </a:prstGeom>
+          <a:noFill/>
+          <a:ln w="0">
+            <a:noFill/>
+          </a:ln>
+        </p:spPr>
+        <p:txBody>
+          <a:bodyPr lIns="91440" rIns="91440" tIns="45720" bIns="45720" anchor="ctr">
+            <a:noAutofit/>
+          </a:bodyPr>
+          <a:lstStyle>
+            <a:lvl1pPr indent="0" algn="r" defTabSz="457200">
+              <a:lnSpc>
+                <a:spcPct val="100000"/>
+              </a:lnSpc>
+              <a:buNone/>
+              <a:tabLst>
+                <a:tab algn="l" pos="0"/>
+              </a:tabLst>
+              <a:defRPr lang="de-DE" sz="900" b="0" u="none" strike="noStrike">
+                <a:solidFill>
+                  <a:schemeClr val="dk1">
+                    <a:tint val="75000"/>
+                  </a:schemeClr>
+                </a:solidFill>
+                <a:effectLst/>
+                <a:uFillTx/>
+                <a:latin typeface="Calibri"/>
+              </a:defRPr>
+            </a:lvl1pPr>
+          </a:lstStyle>
+          <a:p>
+            <a:pPr indent="0" algn="r" defTabSz="457200">
+              <a:lnSpc>
+                <a:spcPct val="100000"/>
+              </a:lnSpc>
+              <a:buNone/>
+              <a:tabLst>
+                <a:tab algn="l" pos="0"/>
+              </a:tabLst>
+            </a:pPr>
+            <a:fld id="{DDFAA1F4-2C5E-4E33-B669-FC4A696E7A20}" type="slidenum">
+              <a:rPr lang="de-DE" sz="900" b="0" u="none" strike="noStrike">
+                <a:solidFill>
+                  <a:schemeClr val="dk1">
+                    <a:tint val="75000"/>
+                  </a:schemeClr>
+                </a:solidFill>
+                <a:effectLst/>
+                <a:uFillTx/>
+                <a:latin typeface="Calibri"/>
+              </a:rPr>
+              <a:t>&lt;Foliennummer&gt;</a:t>
+            </a:fld>
+            <a:endParaRPr lang="de-DE" sz="900" b="0" u="none" strike="noStrike">
+              <a:solidFill>
+                <a:srgbClr val="000000"/>
+              </a:solidFill>
+              <a:effectLst/>
+              <a:uFillTx/>
+              <a:latin typeface="Times New Roman"/>
+            </a:endParaRPr>
+          </a:p>
+        </p:txBody>
+      </p:sp>
+    </p:spTree>
+  </p:cSld>
+</p:sldLayout>
+</file>
+
+<file path=ppt/slideLayouts/slideLayout10.xml><?xml version="1.0" encoding="utf-8"?>
+<p:sldLayout xmlns:a="http://schemas.openxmlformats.org/drawingml/2006/main" xmlns:p="http://schemas.openxmlformats.org/presentationml/2006/main" xmlns:r="http://schemas.openxmlformats.org/officeDocument/2006/relationships" xmlns:p14="http://schemas.microsoft.com/office/powerpoint/2010/main" xmlns:p15="http://schemas.microsoft.com/office/powerpoint/2012/main" xmlns:mc="http://schemas.openxmlformats.org/markup-compatibility/2006" type="blank" preserve="1">
+  <p:cSld name="Vergleich">
+    <p:bg>
+      <p:bgPr>
+        <a:solidFill>
+          <a:srgbClr val="ffffff"/>
+        </a:solidFill>
+      </p:bgPr>
+    </p:bg>
+    <p:spTree>
+      <p:nvGrpSpPr>
+        <p:cNvPr id="1" name=""/>
+        <p:cNvGrpSpPr/>
+        <p:nvPr/>
+      </p:nvGrpSpPr>
+      <p:grpSpPr>
+        <a:xfrm>
+          <a:off x="0" y="0"/>
+          <a:ext cx="0" cy="0"/>
+          <a:chOff x="0" y="0"/>
+          <a:chExt cx="0" cy="0"/>
+        </a:xfrm>
+      </p:grpSpPr>
+      <p:sp>
+        <p:nvSpPr>
+          <p:cNvPr id="48" name="PlaceHolder 1"/>
+          <p:cNvSpPr>
+            <a:spLocks noGrp="1"/>
+          </p:cNvSpPr>
+          <p:nvPr>
+            <p:ph type="title"/>
+          </p:nvPr>
+        </p:nvSpPr>
+        <p:spPr>
+          <a:xfrm>
+            <a:off x="472320" y="527400"/>
+            <a:ext cx="5910480" cy="1910160"/>
+          </a:xfrm>
+          <a:prstGeom prst="rect">
+            <a:avLst/>
+          </a:prstGeom>
+          <a:noFill/>
+          <a:ln w="0">
+            <a:noFill/>
+          </a:ln>
+        </p:spPr>
+        <p:txBody>
+          <a:bodyPr lIns="91440" rIns="91440" tIns="45720" bIns="45720" anchor="ctr">
+            <a:noAutofit/>
+          </a:bodyPr>
+          <a:p>
+            <a:pPr indent="0" defTabSz="685800">
+              <a:lnSpc>
+                <a:spcPct val="90000"/>
+              </a:lnSpc>
+              <a:buNone/>
+              <a:tabLst>
+                <a:tab algn="l" pos="0"/>
+              </a:tabLst>
+            </a:pPr>
+            <a:r>
+              <a:rPr lang="de-DE" sz="3300" b="0" u="none" strike="noStrike">
+                <a:solidFill>
+                  <a:schemeClr val="dk1"/>
+                </a:solidFill>
+                <a:effectLst/>
+                <a:uFillTx/>
+                <a:latin typeface="Calibri Light"/>
+              </a:rPr>
+              <a:t>Mastertitelformat bearbeiten</a:t>
+            </a:r>
+            <a:endParaRPr lang="de-DE" sz="3300" b="0" u="none" strike="noStrike">
+              <a:solidFill>
+                <a:srgbClr val="000000"/>
+              </a:solidFill>
+              <a:effectLst/>
+              <a:uFillTx/>
+              <a:latin typeface="Arial"/>
+            </a:endParaRPr>
+          </a:p>
+        </p:txBody>
+      </p:sp>
+      <p:sp>
+        <p:nvSpPr>
+          <p:cNvPr id="49" name="PlaceHolder 2"/>
+          <p:cNvSpPr>
+            <a:spLocks noGrp="1"/>
+          </p:cNvSpPr>
+          <p:nvPr>
+            <p:ph type="body"/>
+          </p:nvPr>
+        </p:nvSpPr>
+        <p:spPr>
+          <a:xfrm>
+            <a:off x="472320" y="2428200"/>
+            <a:ext cx="2896560" cy="1185480"/>
+          </a:xfrm>
+          <a:prstGeom prst="rect">
+            <a:avLst/>
+          </a:prstGeom>
+          <a:noFill/>
+          <a:ln w="0">
+            <a:noFill/>
+          </a:ln>
+        </p:spPr>
+        <p:txBody>
+          <a:bodyPr lIns="91440" rIns="91440" tIns="45720" bIns="45720" anchor="b">
+            <a:noAutofit/>
+          </a:bodyPr>
+          <a:p>
+            <a:pPr indent="0" defTabSz="685800">
+              <a:lnSpc>
+                <a:spcPct val="90000"/>
+              </a:lnSpc>
+              <a:spcBef>
+                <a:spcPts val="751"/>
+              </a:spcBef>
+              <a:buNone/>
+              <a:tabLst>
+                <a:tab algn="l" pos="0"/>
+              </a:tabLst>
+            </a:pPr>
+            <a:r>
+              <a:rPr lang="de-DE" sz="1800" b="1" u="none" strike="noStrike">
+                <a:solidFill>
+                  <a:schemeClr val="dk1"/>
+                </a:solidFill>
+                <a:effectLst/>
+                <a:uFillTx/>
+                <a:latin typeface="Calibri"/>
+              </a:rPr>
+              <a:t>Mastertextformat bearbeiten</a:t>
+            </a:r>
+            <a:endParaRPr lang="de-DE" sz="1800" b="0" u="none" strike="noStrike">
+              <a:solidFill>
+                <a:srgbClr val="000000"/>
+              </a:solidFill>
+              <a:effectLst/>
+              <a:uFillTx/>
+              <a:latin typeface="Arial"/>
+            </a:endParaRPr>
+          </a:p>
+        </p:txBody>
+      </p:sp>
+      <p:sp>
+        <p:nvSpPr>
+          <p:cNvPr id="50" name="PlaceHolder 3"/>
+          <p:cNvSpPr>
+            <a:spLocks noGrp="1"/>
+          </p:cNvSpPr>
+          <p:nvPr>
+            <p:ph type="body"/>
+          </p:nvPr>
+        </p:nvSpPr>
+        <p:spPr>
+          <a:xfrm>
+            <a:off x="472320" y="3618360"/>
+            <a:ext cx="2896560" cy="5317560"/>
+          </a:xfrm>
+          <a:prstGeom prst="rect">
+            <a:avLst/>
+          </a:prstGeom>
+          <a:noFill/>
+          <a:ln w="0">
+            <a:noFill/>
+          </a:ln>
+        </p:spPr>
+        <p:txBody>
+          <a:bodyPr lIns="91440" rIns="91440" tIns="45720" bIns="45720" anchor="t">
+            <a:noAutofit/>
+          </a:bodyPr>
+          <a:p>
+            <a:pPr marL="171360" indent="-171360" defTabSz="685800">
+              <a:lnSpc>
+                <a:spcPct val="90000"/>
+              </a:lnSpc>
+              <a:spcBef>
+                <a:spcPts val="751"/>
+              </a:spcBef>
+              <a:buClr>
+                <a:srgbClr val="000000"/>
+              </a:buClr>
+              <a:buFont typeface="Arial"/>
+              <a:buChar char="•"/>
+            </a:pPr>
+            <a:r>
+              <a:rPr lang="de-DE" sz="2100" b="0" u="none" strike="noStrike">
+                <a:solidFill>
+                  <a:schemeClr val="dk1"/>
+                </a:solidFill>
+                <a:effectLst/>
+                <a:uFillTx/>
+                <a:latin typeface="Calibri"/>
+              </a:rPr>
+              <a:t>Mastertextformat bearbeiten</a:t>
+            </a:r>
+            <a:endParaRPr lang="de-DE" sz="2100" b="0" u="none" strike="noStrike">
+              <a:solidFill>
+                <a:srgbClr val="000000"/>
+              </a:solidFill>
+              <a:effectLst/>
+              <a:uFillTx/>
+              <a:latin typeface="Arial"/>
+            </a:endParaRPr>
+          </a:p>
+          <a:p>
+            <a:pPr marL="514440" lvl="1" indent="-171360" defTabSz="685800">
+              <a:lnSpc>
+                <a:spcPct val="90000"/>
+              </a:lnSpc>
+              <a:spcBef>
+                <a:spcPts val="374"/>
+              </a:spcBef>
+              <a:buClr>
+                <a:srgbClr val="000000"/>
+              </a:buClr>
+              <a:buFont typeface="Arial"/>
+              <a:buChar char="•"/>
+            </a:pPr>
+            <a:r>
+              <a:rPr lang="de-DE" sz="1800" b="0" u="none" strike="noStrike">
+                <a:solidFill>
+                  <a:schemeClr val="dk1"/>
+                </a:solidFill>
+                <a:effectLst/>
+                <a:uFillTx/>
+                <a:latin typeface="Calibri"/>
+              </a:rPr>
+              <a:t>Zweite Ebene</a:t>
+            </a:r>
+            <a:endParaRPr lang="de-DE" sz="1800" b="0" u="none" strike="noStrike">
+              <a:solidFill>
+                <a:srgbClr val="000000"/>
+              </a:solidFill>
+              <a:effectLst/>
+              <a:uFillTx/>
+              <a:latin typeface="Arial"/>
+            </a:endParaRPr>
+          </a:p>
+          <a:p>
+            <a:pPr marL="857160" lvl="2" indent="-171360" defTabSz="685800">
+              <a:lnSpc>
+                <a:spcPct val="90000"/>
+              </a:lnSpc>
+              <a:spcBef>
+                <a:spcPts val="374"/>
+              </a:spcBef>
+              <a:buClr>
+                <a:srgbClr val="000000"/>
+              </a:buClr>
+              <a:buFont typeface="Arial"/>
+              <a:buChar char="•"/>
+            </a:pPr>
+            <a:r>
+              <a:rPr lang="de-DE" sz="1500" b="0" u="none" strike="noStrike">
+                <a:solidFill>
+                  <a:schemeClr val="dk1"/>
+                </a:solidFill>
+                <a:effectLst/>
+                <a:uFillTx/>
+                <a:latin typeface="Calibri"/>
+              </a:rPr>
+              <a:t>Dritte Ebene</a:t>
+            </a:r>
+            <a:endParaRPr lang="de-DE" sz="1500" b="0" u="none" strike="noStrike">
+              <a:solidFill>
+                <a:srgbClr val="000000"/>
+              </a:solidFill>
+              <a:effectLst/>
+              <a:uFillTx/>
+              <a:latin typeface="Arial"/>
+            </a:endParaRPr>
+          </a:p>
+          <a:p>
+            <a:pPr marL="1200240" lvl="3" indent="-171360" defTabSz="685800">
+              <a:lnSpc>
+                <a:spcPct val="90000"/>
+              </a:lnSpc>
+              <a:spcBef>
+                <a:spcPts val="374"/>
+              </a:spcBef>
+              <a:buClr>
+                <a:srgbClr val="000000"/>
+              </a:buClr>
+              <a:buFont typeface="Arial"/>
+              <a:buChar char="•"/>
+            </a:pPr>
+            <a:r>
+              <a:rPr lang="de-DE" sz="1350" b="0" u="none" strike="noStrike">
+                <a:solidFill>
+                  <a:schemeClr val="dk1"/>
+                </a:solidFill>
+                <a:effectLst/>
+                <a:uFillTx/>
+                <a:latin typeface="Calibri"/>
+              </a:rPr>
+              <a:t>Vierte Ebene</a:t>
+            </a:r>
+            <a:endParaRPr lang="de-DE" sz="1350" b="0" u="none" strike="noStrike">
+              <a:solidFill>
+                <a:srgbClr val="000000"/>
+              </a:solidFill>
+              <a:effectLst/>
+              <a:uFillTx/>
+              <a:latin typeface="Arial"/>
+            </a:endParaRPr>
+          </a:p>
+          <a:p>
+            <a:pPr marL="1542960" lvl="4" indent="-171360" defTabSz="685800">
+              <a:lnSpc>
+                <a:spcPct val="90000"/>
+              </a:lnSpc>
+              <a:spcBef>
+                <a:spcPts val="374"/>
+              </a:spcBef>
+              <a:buClr>
+                <a:srgbClr val="000000"/>
+              </a:buClr>
+              <a:buFont typeface="Arial"/>
+              <a:buChar char="•"/>
+            </a:pPr>
+            <a:r>
+              <a:rPr lang="de-DE" sz="1350" b="0" u="none" strike="noStrike">
+                <a:solidFill>
+                  <a:schemeClr val="dk1"/>
+                </a:solidFill>
+                <a:effectLst/>
+                <a:uFillTx/>
+                <a:latin typeface="Calibri"/>
+              </a:rPr>
+              <a:t>Fünfte Ebene</a:t>
+            </a:r>
+            <a:endParaRPr lang="de-DE" sz="1350" b="0" u="none" strike="noStrike">
+              <a:solidFill>
+                <a:srgbClr val="000000"/>
+              </a:solidFill>
+              <a:effectLst/>
+              <a:uFillTx/>
+              <a:latin typeface="Arial"/>
+            </a:endParaRPr>
+          </a:p>
+        </p:txBody>
+      </p:sp>
+      <p:sp>
+        <p:nvSpPr>
+          <p:cNvPr id="51" name="PlaceHolder 4"/>
+          <p:cNvSpPr>
+            <a:spLocks noGrp="1"/>
+          </p:cNvSpPr>
+          <p:nvPr>
+            <p:ph type="body"/>
+          </p:nvPr>
+        </p:nvSpPr>
+        <p:spPr>
+          <a:xfrm>
+            <a:off x="3471840" y="2428200"/>
+            <a:ext cx="2910960" cy="1185480"/>
+          </a:xfrm>
+          <a:prstGeom prst="rect">
+            <a:avLst/>
+          </a:prstGeom>
+          <a:noFill/>
+          <a:ln w="0">
+            <a:noFill/>
+          </a:ln>
+        </p:spPr>
+        <p:txBody>
+          <a:bodyPr lIns="91440" rIns="91440" tIns="45720" bIns="45720" anchor="b">
+            <a:noAutofit/>
+          </a:bodyPr>
+          <a:p>
+            <a:pPr indent="0" defTabSz="685800">
+              <a:lnSpc>
+                <a:spcPct val="90000"/>
+              </a:lnSpc>
+              <a:spcBef>
+                <a:spcPts val="751"/>
+              </a:spcBef>
+              <a:buNone/>
+              <a:tabLst>
+                <a:tab algn="l" pos="0"/>
+              </a:tabLst>
+            </a:pPr>
+            <a:r>
+              <a:rPr lang="de-DE" sz="1800" b="1" u="none" strike="noStrike">
+                <a:solidFill>
+                  <a:schemeClr val="dk1"/>
+                </a:solidFill>
+                <a:effectLst/>
+                <a:uFillTx/>
+                <a:latin typeface="Calibri"/>
+              </a:rPr>
+              <a:t>Mastertextformat bearbeiten</a:t>
+            </a:r>
+            <a:endParaRPr lang="de-DE" sz="1800" b="0" u="none" strike="noStrike">
+              <a:solidFill>
+                <a:srgbClr val="000000"/>
+              </a:solidFill>
+              <a:effectLst/>
+              <a:uFillTx/>
+              <a:latin typeface="Arial"/>
+            </a:endParaRPr>
+          </a:p>
+        </p:txBody>
+      </p:sp>
+      <p:sp>
+        <p:nvSpPr>
+          <p:cNvPr id="52" name="PlaceHolder 5"/>
+          <p:cNvSpPr>
+            <a:spLocks noGrp="1"/>
+          </p:cNvSpPr>
+          <p:nvPr>
+            <p:ph type="body"/>
+          </p:nvPr>
+        </p:nvSpPr>
+        <p:spPr>
+          <a:xfrm>
+            <a:off x="3471840" y="3618360"/>
+            <a:ext cx="2910960" cy="5317560"/>
+          </a:xfrm>
+          <a:prstGeom prst="rect">
+            <a:avLst/>
+          </a:prstGeom>
+          <a:noFill/>
+          <a:ln w="0">
+            <a:noFill/>
+          </a:ln>
+        </p:spPr>
+        <p:txBody>
+          <a:bodyPr lIns="91440" rIns="91440" tIns="45720" bIns="45720" anchor="t">
+            <a:noAutofit/>
+          </a:bodyPr>
+          <a:p>
+            <a:pPr marL="171360" indent="-171360" defTabSz="685800">
+              <a:lnSpc>
+                <a:spcPct val="90000"/>
+              </a:lnSpc>
+              <a:spcBef>
+                <a:spcPts val="751"/>
+              </a:spcBef>
+              <a:buClr>
+                <a:srgbClr val="000000"/>
+              </a:buClr>
+              <a:buFont typeface="Arial"/>
+              <a:buChar char="•"/>
+            </a:pPr>
+            <a:r>
+              <a:rPr lang="de-DE" sz="2100" b="0" u="none" strike="noStrike">
+                <a:solidFill>
+                  <a:schemeClr val="dk1"/>
+                </a:solidFill>
+                <a:effectLst/>
+                <a:uFillTx/>
+                <a:latin typeface="Calibri"/>
+              </a:rPr>
+              <a:t>Mastertextformat bearbeiten</a:t>
+            </a:r>
+            <a:endParaRPr lang="de-DE" sz="2100" b="0" u="none" strike="noStrike">
+              <a:solidFill>
+                <a:srgbClr val="000000"/>
+              </a:solidFill>
+              <a:effectLst/>
+              <a:uFillTx/>
+              <a:latin typeface="Arial"/>
+            </a:endParaRPr>
+          </a:p>
+          <a:p>
+            <a:pPr marL="514440" lvl="1" indent="-171360" defTabSz="685800">
+              <a:lnSpc>
+                <a:spcPct val="90000"/>
+              </a:lnSpc>
+              <a:spcBef>
+                <a:spcPts val="374"/>
+              </a:spcBef>
+              <a:buClr>
+                <a:srgbClr val="000000"/>
+              </a:buClr>
+              <a:buFont typeface="Arial"/>
+              <a:buChar char="•"/>
+            </a:pPr>
+            <a:r>
+              <a:rPr lang="de-DE" sz="1800" b="0" u="none" strike="noStrike">
+                <a:solidFill>
+                  <a:schemeClr val="dk1"/>
+                </a:solidFill>
+                <a:effectLst/>
+                <a:uFillTx/>
+                <a:latin typeface="Calibri"/>
+              </a:rPr>
+              <a:t>Zweite Ebene</a:t>
+            </a:r>
+            <a:endParaRPr lang="de-DE" sz="1800" b="0" u="none" strike="noStrike">
+              <a:solidFill>
+                <a:srgbClr val="000000"/>
+              </a:solidFill>
+              <a:effectLst/>
+              <a:uFillTx/>
+              <a:latin typeface="Arial"/>
+            </a:endParaRPr>
+          </a:p>
+          <a:p>
+            <a:pPr marL="857160" lvl="2" indent="-171360" defTabSz="685800">
+              <a:lnSpc>
+                <a:spcPct val="90000"/>
+              </a:lnSpc>
+              <a:spcBef>
+                <a:spcPts val="374"/>
+              </a:spcBef>
+              <a:buClr>
+                <a:srgbClr val="000000"/>
+              </a:buClr>
+              <a:buFont typeface="Arial"/>
+              <a:buChar char="•"/>
+            </a:pPr>
+            <a:r>
+              <a:rPr lang="de-DE" sz="1500" b="0" u="none" strike="noStrike">
+                <a:solidFill>
+                  <a:schemeClr val="dk1"/>
+                </a:solidFill>
+                <a:effectLst/>
+                <a:uFillTx/>
+                <a:latin typeface="Calibri"/>
+              </a:rPr>
+              <a:t>Dritte Ebene</a:t>
+            </a:r>
+            <a:endParaRPr lang="de-DE" sz="1500" b="0" u="none" strike="noStrike">
+              <a:solidFill>
+                <a:srgbClr val="000000"/>
+              </a:solidFill>
+              <a:effectLst/>
+              <a:uFillTx/>
+              <a:latin typeface="Arial"/>
+            </a:endParaRPr>
+          </a:p>
+          <a:p>
+            <a:pPr marL="1200240" lvl="3" indent="-171360" defTabSz="685800">
+              <a:lnSpc>
+                <a:spcPct val="90000"/>
+              </a:lnSpc>
+              <a:spcBef>
+                <a:spcPts val="374"/>
+              </a:spcBef>
+              <a:buClr>
+                <a:srgbClr val="000000"/>
+              </a:buClr>
+              <a:buFont typeface="Arial"/>
+              <a:buChar char="•"/>
+            </a:pPr>
+            <a:r>
+              <a:rPr lang="de-DE" sz="1350" b="0" u="none" strike="noStrike">
+                <a:solidFill>
+                  <a:schemeClr val="dk1"/>
+                </a:solidFill>
+                <a:effectLst/>
+                <a:uFillTx/>
+                <a:latin typeface="Calibri"/>
+              </a:rPr>
+              <a:t>Vierte Ebene</a:t>
+            </a:r>
+            <a:endParaRPr lang="de-DE" sz="1350" b="0" u="none" strike="noStrike">
+              <a:solidFill>
+                <a:srgbClr val="000000"/>
+              </a:solidFill>
+              <a:effectLst/>
+              <a:uFillTx/>
+              <a:latin typeface="Arial"/>
+            </a:endParaRPr>
+          </a:p>
+          <a:p>
+            <a:pPr marL="1542960" lvl="4" indent="-171360" defTabSz="685800">
+              <a:lnSpc>
+                <a:spcPct val="90000"/>
+              </a:lnSpc>
+              <a:spcBef>
+                <a:spcPts val="374"/>
+              </a:spcBef>
+              <a:buClr>
+                <a:srgbClr val="000000"/>
+              </a:buClr>
+              <a:buFont typeface="Arial"/>
+              <a:buChar char="•"/>
+            </a:pPr>
+            <a:r>
+              <a:rPr lang="de-DE" sz="1350" b="0" u="none" strike="noStrike">
+                <a:solidFill>
+                  <a:schemeClr val="dk1"/>
+                </a:solidFill>
+                <a:effectLst/>
+                <a:uFillTx/>
+                <a:latin typeface="Calibri"/>
+              </a:rPr>
+              <a:t>Fünfte Ebene</a:t>
+            </a:r>
+            <a:endParaRPr lang="de-DE" sz="1350" b="0" u="none" strike="noStrike">
+              <a:solidFill>
+                <a:srgbClr val="000000"/>
+              </a:solidFill>
+              <a:effectLst/>
+              <a:uFillTx/>
+              <a:latin typeface="Arial"/>
+            </a:endParaRPr>
+          </a:p>
+        </p:txBody>
+      </p:sp>
+      <p:sp>
+        <p:nvSpPr>
+          <p:cNvPr id="53" name="PlaceHolder 6"/>
+          <p:cNvSpPr>
+            <a:spLocks noGrp="1"/>
+          </p:cNvSpPr>
+          <p:nvPr>
+            <p:ph type="dt" idx="28"/>
+          </p:nvPr>
+        </p:nvSpPr>
+        <p:spPr>
+          <a:xfrm>
+            <a:off x="471600" y="9181440"/>
+            <a:ext cx="1538280" cy="522720"/>
+          </a:xfrm>
+          <a:prstGeom prst="rect">
+            <a:avLst/>
+          </a:prstGeom>
+          <a:noFill/>
+          <a:ln w="0">
+            <a:noFill/>
+          </a:ln>
+        </p:spPr>
+        <p:txBody>
+          <a:bodyPr lIns="91440" rIns="91440" tIns="45720" bIns="45720" anchor="ctr">
+            <a:noAutofit/>
+          </a:bodyPr>
+          <a:lstStyle>
+            <a:lvl1pPr indent="0" defTabSz="457200">
+              <a:lnSpc>
+                <a:spcPct val="100000"/>
+              </a:lnSpc>
+              <a:buNone/>
+              <a:tabLst>
+                <a:tab algn="l" pos="0"/>
+              </a:tabLst>
+              <a:defRPr lang="de-DE" sz="900" b="0" u="none" strike="noStrike">
+                <a:solidFill>
+                  <a:schemeClr val="dk1">
+                    <a:tint val="75000"/>
+                  </a:schemeClr>
+                </a:solidFill>
+                <a:effectLst/>
+                <a:uFillTx/>
+                <a:latin typeface="Calibri"/>
+              </a:defRPr>
+            </a:lvl1pPr>
+          </a:lstStyle>
+          <a:p>
+            <a:pPr indent="0" defTabSz="457200">
+              <a:lnSpc>
+                <a:spcPct val="100000"/>
+              </a:lnSpc>
+              <a:buNone/>
+              <a:tabLst>
+                <a:tab algn="l" pos="0"/>
+              </a:tabLst>
+            </a:pPr>
+            <a:r>
+              <a:rPr lang="de-DE" sz="900" b="0" u="none" strike="noStrike">
+                <a:solidFill>
+                  <a:schemeClr val="dk1">
+                    <a:tint val="75000"/>
+                  </a:schemeClr>
+                </a:solidFill>
+                <a:effectLst/>
+                <a:uFillTx/>
+                <a:latin typeface="Calibri"/>
+              </a:rPr>
+              <a:t>&lt;Datum/Uhrzeit&gt;</a:t>
+            </a:r>
+            <a:endParaRPr lang="de-DE" sz="900" b="0" u="none" strike="noStrike">
+              <a:solidFill>
+                <a:srgbClr val="000000"/>
+              </a:solidFill>
+              <a:effectLst/>
+              <a:uFillTx/>
+              <a:latin typeface="Times New Roman"/>
+            </a:endParaRPr>
+          </a:p>
+        </p:txBody>
+      </p:sp>
+      <p:sp>
+        <p:nvSpPr>
+          <p:cNvPr id="54" name="PlaceHolder 7"/>
+          <p:cNvSpPr>
+            <a:spLocks noGrp="1"/>
+          </p:cNvSpPr>
+          <p:nvPr>
+            <p:ph type="ftr" idx="29"/>
+          </p:nvPr>
+        </p:nvSpPr>
+        <p:spPr>
+          <a:xfrm>
+            <a:off x="2271600" y="9181440"/>
+            <a:ext cx="2309760" cy="522720"/>
+          </a:xfrm>
+          <a:prstGeom prst="rect">
+            <a:avLst/>
+          </a:prstGeom>
+          <a:noFill/>
+          <a:ln w="0">
+            <a:noFill/>
+          </a:ln>
+        </p:spPr>
+        <p:txBody>
+          <a:bodyPr lIns="91440" rIns="91440" tIns="45720" bIns="45720" anchor="ctr">
+            <a:noAutofit/>
+          </a:bodyPr>
+          <a:lstStyle>
+            <a:lvl1pPr indent="0" algn="ctr">
+              <a:lnSpc>
+                <a:spcPct val="100000"/>
+              </a:lnSpc>
+              <a:buNone/>
+              <a:tabLst>
+                <a:tab algn="l" pos="0"/>
+              </a:tabLst>
+              <a:defRPr lang="de-DE" sz="1400" b="0" u="none" strike="noStrike">
+                <a:solidFill>
+                  <a:srgbClr val="000000"/>
+                </a:solidFill>
+                <a:effectLst/>
+                <a:uFillTx/>
+                <a:latin typeface="Times New Roman"/>
+              </a:defRPr>
+            </a:lvl1pPr>
+          </a:lstStyle>
+          <a:p>
+            <a:pPr indent="0" algn="ctr">
+              <a:lnSpc>
+                <a:spcPct val="100000"/>
+              </a:lnSpc>
+              <a:buNone/>
+              <a:tabLst>
+                <a:tab algn="l" pos="0"/>
+              </a:tabLst>
+            </a:pPr>
+            <a:r>
+              <a:rPr lang="de-DE" sz="1400" b="0" u="none" strike="noStrike">
+                <a:solidFill>
+                  <a:srgbClr val="000000"/>
+                </a:solidFill>
+                <a:effectLst/>
+                <a:uFillTx/>
+                <a:latin typeface="Times New Roman"/>
+              </a:rPr>
+              <a:t>&lt;Fußzeile&gt;</a:t>
+            </a:r>
+            <a:endParaRPr lang="de-DE" sz="1400" b="0" u="none" strike="noStrike">
+              <a:solidFill>
+                <a:srgbClr val="000000"/>
+              </a:solidFill>
+              <a:effectLst/>
+              <a:uFillTx/>
+              <a:latin typeface="Times New Roman"/>
+            </a:endParaRPr>
+          </a:p>
+        </p:txBody>
+      </p:sp>
+      <p:sp>
+        <p:nvSpPr>
+          <p:cNvPr id="55" name="PlaceHolder 8"/>
+          <p:cNvSpPr>
+            <a:spLocks noGrp="1"/>
+          </p:cNvSpPr>
+          <p:nvPr>
+            <p:ph type="sldNum" idx="30"/>
+          </p:nvPr>
+        </p:nvSpPr>
+        <p:spPr>
+          <a:xfrm>
+            <a:off x="4843440" y="9181440"/>
+            <a:ext cx="1538280" cy="522720"/>
+          </a:xfrm>
+          <a:prstGeom prst="rect">
+            <a:avLst/>
+          </a:prstGeom>
+          <a:noFill/>
+          <a:ln w="0">
+            <a:noFill/>
+          </a:ln>
+        </p:spPr>
+        <p:txBody>
+          <a:bodyPr lIns="91440" rIns="91440" tIns="45720" bIns="45720" anchor="ctr">
+            <a:noAutofit/>
+          </a:bodyPr>
+          <a:lstStyle>
+            <a:lvl1pPr indent="0" algn="r" defTabSz="457200">
+              <a:lnSpc>
+                <a:spcPct val="100000"/>
+              </a:lnSpc>
+              <a:buNone/>
+              <a:tabLst>
+                <a:tab algn="l" pos="0"/>
+              </a:tabLst>
+              <a:defRPr lang="de-DE" sz="900" b="0" u="none" strike="noStrike">
+                <a:solidFill>
+                  <a:schemeClr val="dk1">
+                    <a:tint val="75000"/>
+                  </a:schemeClr>
+                </a:solidFill>
+                <a:effectLst/>
+                <a:uFillTx/>
+                <a:latin typeface="Calibri"/>
+              </a:defRPr>
+            </a:lvl1pPr>
+          </a:lstStyle>
+          <a:p>
+            <a:pPr indent="0" algn="r" defTabSz="457200">
+              <a:lnSpc>
+                <a:spcPct val="100000"/>
+              </a:lnSpc>
+              <a:buNone/>
+              <a:tabLst>
+                <a:tab algn="l" pos="0"/>
+              </a:tabLst>
+            </a:pPr>
+            <a:fld id="{7C3EF77E-3409-4BD7-A8AC-3A19330F6FDA}" type="slidenum">
+              <a:rPr lang="de-DE" sz="900" b="0" u="none" strike="noStrike">
+                <a:solidFill>
+                  <a:schemeClr val="dk1">
+                    <a:tint val="75000"/>
+                  </a:schemeClr>
+                </a:solidFill>
+                <a:effectLst/>
+                <a:uFillTx/>
+                <a:latin typeface="Calibri"/>
+              </a:rPr>
+              <a:t>&lt;Foliennummer&gt;</a:t>
+            </a:fld>
+            <a:endParaRPr lang="de-DE" sz="900" b="0" u="none" strike="noStrike">
+              <a:solidFill>
+                <a:srgbClr val="000000"/>
+              </a:solidFill>
+              <a:effectLst/>
+              <a:uFillTx/>
+              <a:latin typeface="Times New Roman"/>
+            </a:endParaRPr>
+          </a:p>
+        </p:txBody>
+      </p:sp>
+    </p:spTree>
+  </p:cSld>
+</p:sldLayout>
+</file>
+
+<file path=ppt/slideLayouts/slideLayout11.xml><?xml version="1.0" encoding="utf-8"?>
+<p:sldLayout xmlns:a="http://schemas.openxmlformats.org/drawingml/2006/main" xmlns:p="http://schemas.openxmlformats.org/presentationml/2006/main" xmlns:r="http://schemas.openxmlformats.org/officeDocument/2006/relationships" xmlns:p14="http://schemas.microsoft.com/office/powerpoint/2010/main" xmlns:p15="http://schemas.microsoft.com/office/powerpoint/2012/main" xmlns:mc="http://schemas.openxmlformats.org/markup-compatibility/2006" type="titleOnly" preserve="1">
+  <p:cSld name="Nur Titel">
+    <p:bg>
+      <p:bgPr>
+        <a:solidFill>
+          <a:srgbClr val="ffffff"/>
+        </a:solidFill>
+      </p:bgPr>
+    </p:bg>
+    <p:spTree>
+      <p:nvGrpSpPr>
+        <p:cNvPr id="1" name=""/>
+        <p:cNvGrpSpPr/>
+        <p:nvPr/>
+      </p:nvGrpSpPr>
+      <p:grpSpPr>
+        <a:xfrm>
+          <a:off x="0" y="0"/>
+          <a:ext cx="0" cy="0"/>
+          <a:chOff x="0" y="0"/>
+          <a:chExt cx="0" cy="0"/>
+        </a:xfrm>
+      </p:grpSpPr>
+      <p:sp>
+        <p:nvSpPr>
+          <p:cNvPr id="56" name="PlaceHolder 1"/>
+          <p:cNvSpPr>
+            <a:spLocks noGrp="1"/>
+          </p:cNvSpPr>
+          <p:nvPr>
+            <p:ph type="title"/>
+          </p:nvPr>
+        </p:nvSpPr>
+        <p:spPr>
+          <a:xfrm>
+            <a:off x="471600" y="527400"/>
+            <a:ext cx="5910480" cy="1910160"/>
+          </a:xfrm>
+          <a:prstGeom prst="rect">
+            <a:avLst/>
+          </a:prstGeom>
+          <a:noFill/>
+          <a:ln w="0">
+            <a:noFill/>
+          </a:ln>
+        </p:spPr>
+        <p:txBody>
+          <a:bodyPr lIns="91440" rIns="91440" tIns="45720" bIns="45720" anchor="ctr">
+            <a:noAutofit/>
+          </a:bodyPr>
+          <a:p>
+            <a:pPr indent="0" defTabSz="685800">
+              <a:lnSpc>
+                <a:spcPct val="90000"/>
+              </a:lnSpc>
+              <a:buNone/>
+              <a:tabLst>
+                <a:tab algn="l" pos="0"/>
+              </a:tabLst>
+            </a:pPr>
+            <a:r>
+              <a:rPr lang="de-DE" sz="3300" b="0" u="none" strike="noStrike">
+                <a:solidFill>
+                  <a:schemeClr val="dk1"/>
+                </a:solidFill>
+                <a:effectLst/>
+                <a:uFillTx/>
+                <a:latin typeface="Calibri Light"/>
+              </a:rPr>
+              <a:t>Mastertitelformat bearbeiten</a:t>
+            </a:r>
+            <a:endParaRPr lang="de-DE" sz="3300" b="0" u="none" strike="noStrike">
+              <a:solidFill>
+                <a:srgbClr val="000000"/>
+              </a:solidFill>
+              <a:effectLst/>
+              <a:uFillTx/>
+              <a:latin typeface="Arial"/>
+            </a:endParaRPr>
+          </a:p>
+        </p:txBody>
+      </p:sp>
+      <p:sp>
+        <p:nvSpPr>
+          <p:cNvPr id="57" name="PlaceHolder 2"/>
+          <p:cNvSpPr>
+            <a:spLocks noGrp="1"/>
+          </p:cNvSpPr>
+          <p:nvPr>
+            <p:ph type="dt" idx="31"/>
+          </p:nvPr>
+        </p:nvSpPr>
+        <p:spPr>
+          <a:xfrm>
+            <a:off x="471600" y="9181440"/>
+            <a:ext cx="1538280" cy="522720"/>
+          </a:xfrm>
+          <a:prstGeom prst="rect">
+            <a:avLst/>
+          </a:prstGeom>
+          <a:noFill/>
+          <a:ln w="0">
+            <a:noFill/>
+          </a:ln>
+        </p:spPr>
+        <p:txBody>
+          <a:bodyPr lIns="91440" rIns="91440" tIns="45720" bIns="45720" anchor="ctr">
+            <a:noAutofit/>
+          </a:bodyPr>
+          <a:lstStyle>
+            <a:lvl1pPr indent="0" defTabSz="457200">
+              <a:lnSpc>
+                <a:spcPct val="100000"/>
+              </a:lnSpc>
+              <a:buNone/>
+              <a:tabLst>
+                <a:tab algn="l" pos="0"/>
+              </a:tabLst>
+              <a:defRPr lang="de-DE" sz="900" b="0" u="none" strike="noStrike">
+                <a:solidFill>
+                  <a:schemeClr val="dk1">
+                    <a:tint val="75000"/>
+                  </a:schemeClr>
+                </a:solidFill>
+                <a:effectLst/>
+                <a:uFillTx/>
+                <a:latin typeface="Calibri"/>
+              </a:defRPr>
+            </a:lvl1pPr>
+          </a:lstStyle>
+          <a:p>
+            <a:pPr indent="0" defTabSz="457200">
+              <a:lnSpc>
+                <a:spcPct val="100000"/>
+              </a:lnSpc>
+              <a:buNone/>
+              <a:tabLst>
+                <a:tab algn="l" pos="0"/>
+              </a:tabLst>
+            </a:pPr>
+            <a:r>
+              <a:rPr lang="de-DE" sz="900" b="0" u="none" strike="noStrike">
+                <a:solidFill>
+                  <a:schemeClr val="dk1">
+                    <a:tint val="75000"/>
+                  </a:schemeClr>
+                </a:solidFill>
+                <a:effectLst/>
+                <a:uFillTx/>
+                <a:latin typeface="Calibri"/>
+              </a:rPr>
+              <a:t>&lt;Datum/Uhrzeit&gt;</a:t>
+            </a:r>
+            <a:endParaRPr lang="de-DE" sz="900" b="0" u="none" strike="noStrike">
+              <a:solidFill>
+                <a:srgbClr val="000000"/>
+              </a:solidFill>
+              <a:effectLst/>
+              <a:uFillTx/>
+              <a:latin typeface="Times New Roman"/>
+            </a:endParaRPr>
+          </a:p>
+        </p:txBody>
+      </p:sp>
+      <p:sp>
+        <p:nvSpPr>
+          <p:cNvPr id="58" name="PlaceHolder 3"/>
+          <p:cNvSpPr>
+            <a:spLocks noGrp="1"/>
+          </p:cNvSpPr>
+          <p:nvPr>
+            <p:ph type="ftr" idx="32"/>
+          </p:nvPr>
+        </p:nvSpPr>
+        <p:spPr>
+          <a:xfrm>
+            <a:off x="2271600" y="9181440"/>
+            <a:ext cx="2309760" cy="522720"/>
+          </a:xfrm>
+          <a:prstGeom prst="rect">
+            <a:avLst/>
+          </a:prstGeom>
+          <a:noFill/>
+          <a:ln w="0">
+            <a:noFill/>
+          </a:ln>
+        </p:spPr>
+        <p:txBody>
+          <a:bodyPr lIns="91440" rIns="91440" tIns="45720" bIns="45720" anchor="ctr">
+            <a:noAutofit/>
+          </a:bodyPr>
+          <a:lstStyle>
+            <a:lvl1pPr indent="0" algn="ctr">
+              <a:lnSpc>
+                <a:spcPct val="100000"/>
+              </a:lnSpc>
+              <a:buNone/>
+              <a:tabLst>
+                <a:tab algn="l" pos="0"/>
+              </a:tabLst>
+              <a:defRPr lang="de-DE" sz="1400" b="0" u="none" strike="noStrike">
+                <a:solidFill>
+                  <a:srgbClr val="000000"/>
+                </a:solidFill>
+                <a:effectLst/>
+                <a:uFillTx/>
+                <a:latin typeface="Times New Roman"/>
+              </a:defRPr>
+            </a:lvl1pPr>
+          </a:lstStyle>
+          <a:p>
+            <a:pPr indent="0" algn="ctr">
+              <a:lnSpc>
+                <a:spcPct val="100000"/>
+              </a:lnSpc>
+              <a:buNone/>
+              <a:tabLst>
+                <a:tab algn="l" pos="0"/>
+              </a:tabLst>
+            </a:pPr>
+            <a:r>
+              <a:rPr lang="de-DE" sz="1400" b="0" u="none" strike="noStrike">
+                <a:solidFill>
+                  <a:srgbClr val="000000"/>
+                </a:solidFill>
+                <a:effectLst/>
+                <a:uFillTx/>
+                <a:latin typeface="Times New Roman"/>
+              </a:rPr>
+              <a:t>&lt;Fußzeile&gt;</a:t>
+            </a:r>
+            <a:endParaRPr lang="de-DE" sz="1400" b="0" u="none" strike="noStrike">
+              <a:solidFill>
+                <a:srgbClr val="000000"/>
+              </a:solidFill>
+              <a:effectLst/>
+              <a:uFillTx/>
+              <a:latin typeface="Times New Roman"/>
+            </a:endParaRPr>
+          </a:p>
+        </p:txBody>
+      </p:sp>
+      <p:sp>
+        <p:nvSpPr>
+          <p:cNvPr id="59" name="PlaceHolder 4"/>
+          <p:cNvSpPr>
+            <a:spLocks noGrp="1"/>
+          </p:cNvSpPr>
+          <p:nvPr>
+            <p:ph type="sldNum" idx="33"/>
+          </p:nvPr>
+        </p:nvSpPr>
+        <p:spPr>
+          <a:xfrm>
+            <a:off x="4843440" y="9181440"/>
+            <a:ext cx="1538280" cy="522720"/>
+          </a:xfrm>
+          <a:prstGeom prst="rect">
+            <a:avLst/>
+          </a:prstGeom>
+          <a:noFill/>
+          <a:ln w="0">
+            <a:noFill/>
+          </a:ln>
+        </p:spPr>
+        <p:txBody>
+          <a:bodyPr lIns="91440" rIns="91440" tIns="45720" bIns="45720" anchor="ctr">
+            <a:noAutofit/>
+          </a:bodyPr>
+          <a:lstStyle>
+            <a:lvl1pPr indent="0" algn="r" defTabSz="457200">
+              <a:lnSpc>
+                <a:spcPct val="100000"/>
+              </a:lnSpc>
+              <a:buNone/>
+              <a:tabLst>
+                <a:tab algn="l" pos="0"/>
+              </a:tabLst>
+              <a:defRPr lang="de-DE" sz="900" b="0" u="none" strike="noStrike">
+                <a:solidFill>
+                  <a:schemeClr val="dk1">
+                    <a:tint val="75000"/>
+                  </a:schemeClr>
+                </a:solidFill>
+                <a:effectLst/>
+                <a:uFillTx/>
+                <a:latin typeface="Calibri"/>
+              </a:defRPr>
+            </a:lvl1pPr>
+          </a:lstStyle>
+          <a:p>
+            <a:pPr indent="0" algn="r" defTabSz="457200">
+              <a:lnSpc>
+                <a:spcPct val="100000"/>
+              </a:lnSpc>
+              <a:buNone/>
+              <a:tabLst>
+                <a:tab algn="l" pos="0"/>
+              </a:tabLst>
+            </a:pPr>
+            <a:fld id="{9137A0F1-8D1C-4AB2-91DF-36294B984315}" type="slidenum">
+              <a:rPr lang="de-DE" sz="900" b="0" u="none" strike="noStrike">
+                <a:solidFill>
+                  <a:schemeClr val="dk1">
+                    <a:tint val="75000"/>
+                  </a:schemeClr>
+                </a:solidFill>
+                <a:effectLst/>
+                <a:uFillTx/>
+                <a:latin typeface="Calibri"/>
+              </a:rPr>
+              <a:t>&lt;Foliennummer&gt;</a:t>
+            </a:fld>
+            <a:endParaRPr lang="de-DE" sz="900" b="0" u="none" strike="noStrike">
+              <a:solidFill>
+                <a:srgbClr val="000000"/>
+              </a:solidFill>
+              <a:effectLst/>
+              <a:uFillTx/>
+              <a:latin typeface="Times New Roman"/>
+            </a:endParaRPr>
+          </a:p>
+        </p:txBody>
+      </p:sp>
+    </p:spTree>
+  </p:cSld>
+</p:sldLayout>
+</file>
+
+<file path=ppt/slideLayouts/slideLayout2.xml><?xml version="1.0" encoding="utf-8"?>
+<p:sldLayout xmlns:a="http://schemas.openxmlformats.org/drawingml/2006/main" xmlns:p="http://schemas.openxmlformats.org/presentationml/2006/main" xmlns:r="http://schemas.openxmlformats.org/officeDocument/2006/relationships" xmlns:p14="http://schemas.microsoft.com/office/powerpoint/2010/main" xmlns:p15="http://schemas.microsoft.com/office/powerpoint/2012/main" xmlns:mc="http://schemas.openxmlformats.org/markup-compatibility/2006" type="blank" preserve="1">
+  <p:cSld name="Inhalt mit Überschrift">
+    <p:bg>
+      <p:bgPr>
+        <a:solidFill>
+          <a:srgbClr val="ffffff"/>
+        </a:solidFill>
+      </p:bgPr>
+    </p:bg>
+    <p:spTree>
+      <p:nvGrpSpPr>
+        <p:cNvPr id="1" name=""/>
+        <p:cNvGrpSpPr/>
+        <p:nvPr/>
+      </p:nvGrpSpPr>
+      <p:grpSpPr>
+        <a:xfrm>
+          <a:off x="0" y="0"/>
+          <a:ext cx="0" cy="0"/>
+          <a:chOff x="0" y="0"/>
+          <a:chExt cx="0" cy="0"/>
+        </a:xfrm>
+      </p:grpSpPr>
+      <p:sp>
+        <p:nvSpPr>
+          <p:cNvPr id="5" name="PlaceHolder 1"/>
+          <p:cNvSpPr>
+            <a:spLocks noGrp="1"/>
+          </p:cNvSpPr>
+          <p:nvPr>
+            <p:ph type="title"/>
+          </p:nvPr>
+        </p:nvSpPr>
+        <p:spPr>
+          <a:xfrm>
+            <a:off x="472320" y="660240"/>
+            <a:ext cx="2207160" cy="2306880"/>
+          </a:xfrm>
+          <a:prstGeom prst="rect">
+            <a:avLst/>
+          </a:prstGeom>
+          <a:noFill/>
+          <a:ln w="0">
+            <a:noFill/>
+          </a:ln>
+        </p:spPr>
+        <p:txBody>
+          <a:bodyPr lIns="91440" rIns="91440" tIns="45720" bIns="45720" anchor="b">
+            <a:noAutofit/>
+          </a:bodyPr>
+          <a:p>
+            <a:pPr indent="0" defTabSz="685800">
+              <a:lnSpc>
+                <a:spcPct val="90000"/>
+              </a:lnSpc>
+              <a:buNone/>
+              <a:tabLst>
+                <a:tab algn="l" pos="0"/>
+              </a:tabLst>
+            </a:pPr>
+            <a:r>
+              <a:rPr lang="de-DE" sz="2400" b="0" u="none" strike="noStrike">
+                <a:solidFill>
+                  <a:schemeClr val="dk1"/>
+                </a:solidFill>
+                <a:effectLst/>
+                <a:uFillTx/>
+                <a:latin typeface="Calibri Light"/>
+              </a:rPr>
+              <a:t>Mastertitelformat bearbeiten</a:t>
+            </a:r>
+            <a:endParaRPr lang="de-DE" sz="2400" b="0" u="none" strike="noStrike">
+              <a:solidFill>
+                <a:srgbClr val="000000"/>
+              </a:solidFill>
+              <a:effectLst/>
+              <a:uFillTx/>
+              <a:latin typeface="Arial"/>
+            </a:endParaRPr>
+          </a:p>
+        </p:txBody>
+      </p:sp>
+      <p:sp>
+        <p:nvSpPr>
+          <p:cNvPr id="6" name="PlaceHolder 2"/>
+          <p:cNvSpPr>
+            <a:spLocks noGrp="1"/>
+          </p:cNvSpPr>
+          <p:nvPr>
+            <p:ph type="body"/>
+          </p:nvPr>
+        </p:nvSpPr>
+        <p:spPr>
+          <a:xfrm>
+            <a:off x="2915640" y="1426320"/>
+            <a:ext cx="3467160" cy="7035120"/>
+          </a:xfrm>
+          <a:prstGeom prst="rect">
+            <a:avLst/>
+          </a:prstGeom>
+          <a:noFill/>
+          <a:ln w="0">
+            <a:noFill/>
+          </a:ln>
+        </p:spPr>
+        <p:txBody>
+          <a:bodyPr lIns="91440" rIns="91440" tIns="45720" bIns="45720" anchor="t">
+            <a:noAutofit/>
+          </a:bodyPr>
+          <a:p>
+            <a:pPr marL="171360" indent="-171360" defTabSz="685800">
+              <a:lnSpc>
+                <a:spcPct val="90000"/>
+              </a:lnSpc>
+              <a:spcBef>
+                <a:spcPts val="751"/>
+              </a:spcBef>
+              <a:buClr>
+                <a:srgbClr val="000000"/>
+              </a:buClr>
+              <a:buFont typeface="Arial"/>
+              <a:buChar char="•"/>
+            </a:pPr>
+            <a:r>
+              <a:rPr lang="de-DE" sz="2400" b="0" u="none" strike="noStrike">
+                <a:solidFill>
+                  <a:schemeClr val="dk1"/>
+                </a:solidFill>
+                <a:effectLst/>
+                <a:uFillTx/>
+                <a:latin typeface="Calibri"/>
+              </a:rPr>
+              <a:t>Mastertextformat bearbeiten</a:t>
+            </a:r>
+            <a:endParaRPr lang="de-DE" sz="2400" b="0" u="none" strike="noStrike">
+              <a:solidFill>
+                <a:srgbClr val="000000"/>
+              </a:solidFill>
+              <a:effectLst/>
+              <a:uFillTx/>
+              <a:latin typeface="Arial"/>
+            </a:endParaRPr>
+          </a:p>
+          <a:p>
+            <a:pPr marL="514440" lvl="1" indent="-171360" defTabSz="685800">
+              <a:lnSpc>
+                <a:spcPct val="90000"/>
+              </a:lnSpc>
+              <a:spcBef>
+                <a:spcPts val="374"/>
+              </a:spcBef>
+              <a:buClr>
+                <a:srgbClr val="000000"/>
+              </a:buClr>
+              <a:buFont typeface="Arial"/>
+              <a:buChar char="•"/>
+            </a:pPr>
+            <a:r>
+              <a:rPr lang="de-DE" sz="2100" b="0" u="none" strike="noStrike">
+                <a:solidFill>
+                  <a:schemeClr val="dk1"/>
+                </a:solidFill>
+                <a:effectLst/>
+                <a:uFillTx/>
+                <a:latin typeface="Calibri"/>
+              </a:rPr>
+              <a:t>Zweite Ebene</a:t>
+            </a:r>
+            <a:endParaRPr lang="de-DE" sz="2100" b="0" u="none" strike="noStrike">
+              <a:solidFill>
+                <a:srgbClr val="000000"/>
+              </a:solidFill>
+              <a:effectLst/>
+              <a:uFillTx/>
+              <a:latin typeface="Arial"/>
+            </a:endParaRPr>
+          </a:p>
+          <a:p>
+            <a:pPr marL="857160" lvl="2" indent="-171360" defTabSz="685800">
+              <a:lnSpc>
+                <a:spcPct val="90000"/>
+              </a:lnSpc>
+              <a:spcBef>
+                <a:spcPts val="374"/>
+              </a:spcBef>
+              <a:buClr>
+                <a:srgbClr val="000000"/>
+              </a:buClr>
+              <a:buFont typeface="Arial"/>
+              <a:buChar char="•"/>
+            </a:pPr>
+            <a:r>
+              <a:rPr lang="de-DE" sz="1800" b="0" u="none" strike="noStrike">
+                <a:solidFill>
+                  <a:schemeClr val="dk1"/>
+                </a:solidFill>
+                <a:effectLst/>
+                <a:uFillTx/>
+                <a:latin typeface="Calibri"/>
+              </a:rPr>
+              <a:t>Dritte Ebene</a:t>
+            </a:r>
+            <a:endParaRPr lang="de-DE" sz="1800" b="0" u="none" strike="noStrike">
+              <a:solidFill>
+                <a:srgbClr val="000000"/>
+              </a:solidFill>
+              <a:effectLst/>
+              <a:uFillTx/>
+              <a:latin typeface="Arial"/>
+            </a:endParaRPr>
+          </a:p>
+          <a:p>
+            <a:pPr marL="1200240" lvl="3" indent="-171360" defTabSz="685800">
+              <a:lnSpc>
+                <a:spcPct val="90000"/>
+              </a:lnSpc>
+              <a:spcBef>
+                <a:spcPts val="374"/>
+              </a:spcBef>
+              <a:buClr>
+                <a:srgbClr val="000000"/>
+              </a:buClr>
+              <a:buFont typeface="Arial"/>
+              <a:buChar char="•"/>
+            </a:pPr>
+            <a:r>
+              <a:rPr lang="de-DE" sz="1500" b="0" u="none" strike="noStrike">
+                <a:solidFill>
+                  <a:schemeClr val="dk1"/>
+                </a:solidFill>
+                <a:effectLst/>
+                <a:uFillTx/>
+                <a:latin typeface="Calibri"/>
+              </a:rPr>
+              <a:t>Vierte Ebene</a:t>
+            </a:r>
+            <a:endParaRPr lang="de-DE" sz="1500" b="0" u="none" strike="noStrike">
+              <a:solidFill>
+                <a:srgbClr val="000000"/>
+              </a:solidFill>
+              <a:effectLst/>
+              <a:uFillTx/>
+              <a:latin typeface="Arial"/>
+            </a:endParaRPr>
+          </a:p>
+          <a:p>
+            <a:pPr marL="1542960" lvl="4" indent="-171360" defTabSz="685800">
+              <a:lnSpc>
+                <a:spcPct val="90000"/>
+              </a:lnSpc>
+              <a:spcBef>
+                <a:spcPts val="374"/>
+              </a:spcBef>
+              <a:buClr>
+                <a:srgbClr val="000000"/>
+              </a:buClr>
+              <a:buFont typeface="Arial"/>
+              <a:buChar char="•"/>
+            </a:pPr>
+            <a:r>
+              <a:rPr lang="de-DE" sz="1500" b="0" u="none" strike="noStrike">
+                <a:solidFill>
+                  <a:schemeClr val="dk1"/>
+                </a:solidFill>
+                <a:effectLst/>
+                <a:uFillTx/>
+                <a:latin typeface="Calibri"/>
+              </a:rPr>
+              <a:t>Fünfte Ebene</a:t>
+            </a:r>
+            <a:endParaRPr lang="de-DE" sz="1500" b="0" u="none" strike="noStrike">
+              <a:solidFill>
+                <a:srgbClr val="000000"/>
+              </a:solidFill>
+              <a:effectLst/>
+              <a:uFillTx/>
+              <a:latin typeface="Arial"/>
+            </a:endParaRPr>
+          </a:p>
+        </p:txBody>
+      </p:sp>
+      <p:sp>
+        <p:nvSpPr>
+          <p:cNvPr id="7" name="PlaceHolder 3"/>
+          <p:cNvSpPr>
+            <a:spLocks noGrp="1"/>
+          </p:cNvSpPr>
+          <p:nvPr>
+            <p:ph type="body"/>
+          </p:nvPr>
+        </p:nvSpPr>
+        <p:spPr>
+          <a:xfrm>
+            <a:off x="472320" y="2971800"/>
+            <a:ext cx="2207160" cy="5500800"/>
+          </a:xfrm>
+          <a:prstGeom prst="rect">
+            <a:avLst/>
+          </a:prstGeom>
+          <a:noFill/>
+          <a:ln w="0">
+            <a:noFill/>
+          </a:ln>
+        </p:spPr>
+        <p:txBody>
+          <a:bodyPr lIns="91440" rIns="91440" tIns="45720" bIns="45720" anchor="t">
+            <a:noAutofit/>
+          </a:bodyPr>
+          <a:p>
+            <a:pPr indent="0" defTabSz="685800">
+              <a:lnSpc>
+                <a:spcPct val="90000"/>
+              </a:lnSpc>
+              <a:spcBef>
+                <a:spcPts val="751"/>
+              </a:spcBef>
+              <a:buNone/>
+              <a:tabLst>
+                <a:tab algn="l" pos="0"/>
+              </a:tabLst>
+            </a:pPr>
+            <a:r>
+              <a:rPr lang="de-DE" sz="1200" b="0" u="none" strike="noStrike">
+                <a:solidFill>
+                  <a:schemeClr val="dk1"/>
+                </a:solidFill>
+                <a:effectLst/>
+                <a:uFillTx/>
+                <a:latin typeface="Calibri"/>
+              </a:rPr>
+              <a:t>Mastertextformat bearbeiten</a:t>
+            </a:r>
+            <a:endParaRPr lang="de-DE" sz="1200" b="0" u="none" strike="noStrike">
+              <a:solidFill>
+                <a:srgbClr val="000000"/>
+              </a:solidFill>
+              <a:effectLst/>
+              <a:uFillTx/>
+              <a:latin typeface="Arial"/>
+            </a:endParaRPr>
+          </a:p>
+        </p:txBody>
+      </p:sp>
+      <p:sp>
+        <p:nvSpPr>
+          <p:cNvPr id="8" name="PlaceHolder 4"/>
+          <p:cNvSpPr>
+            <a:spLocks noGrp="1"/>
+          </p:cNvSpPr>
+          <p:nvPr>
+            <p:ph type="dt" idx="4"/>
+          </p:nvPr>
+        </p:nvSpPr>
+        <p:spPr>
+          <a:xfrm>
+            <a:off x="471600" y="9181440"/>
+            <a:ext cx="1538280" cy="522720"/>
+          </a:xfrm>
+          <a:prstGeom prst="rect">
+            <a:avLst/>
+          </a:prstGeom>
+          <a:noFill/>
+          <a:ln w="0">
+            <a:noFill/>
+          </a:ln>
+        </p:spPr>
+        <p:txBody>
+          <a:bodyPr lIns="91440" rIns="91440" tIns="45720" bIns="45720" anchor="ctr">
+            <a:noAutofit/>
+          </a:bodyPr>
+          <a:lstStyle>
+            <a:lvl1pPr indent="0" defTabSz="457200">
+              <a:lnSpc>
+                <a:spcPct val="100000"/>
+              </a:lnSpc>
+              <a:buNone/>
+              <a:tabLst>
+                <a:tab algn="l" pos="0"/>
+              </a:tabLst>
+              <a:defRPr lang="de-DE" sz="900" b="0" u="none" strike="noStrike">
+                <a:solidFill>
+                  <a:schemeClr val="dk1">
+                    <a:tint val="75000"/>
+                  </a:schemeClr>
+                </a:solidFill>
+                <a:effectLst/>
+                <a:uFillTx/>
+                <a:latin typeface="Calibri"/>
+              </a:defRPr>
+            </a:lvl1pPr>
+          </a:lstStyle>
+          <a:p>
+            <a:pPr indent="0" defTabSz="457200">
+              <a:lnSpc>
+                <a:spcPct val="100000"/>
+              </a:lnSpc>
+              <a:buNone/>
+              <a:tabLst>
+                <a:tab algn="l" pos="0"/>
+              </a:tabLst>
+            </a:pPr>
+            <a:r>
+              <a:rPr lang="de-DE" sz="900" b="0" u="none" strike="noStrike">
+                <a:solidFill>
+                  <a:schemeClr val="dk1">
+                    <a:tint val="75000"/>
+                  </a:schemeClr>
+                </a:solidFill>
+                <a:effectLst/>
+                <a:uFillTx/>
+                <a:latin typeface="Calibri"/>
+              </a:rPr>
+              <a:t>&lt;Datum/Uhrzeit&gt;</a:t>
+            </a:r>
+            <a:endParaRPr lang="de-DE" sz="900" b="0" u="none" strike="noStrike">
+              <a:solidFill>
+                <a:srgbClr val="000000"/>
+              </a:solidFill>
+              <a:effectLst/>
+              <a:uFillTx/>
+              <a:latin typeface="Times New Roman"/>
+            </a:endParaRPr>
+          </a:p>
+        </p:txBody>
+      </p:sp>
+      <p:sp>
+        <p:nvSpPr>
+          <p:cNvPr id="9" name="PlaceHolder 5"/>
+          <p:cNvSpPr>
+            <a:spLocks noGrp="1"/>
+          </p:cNvSpPr>
+          <p:nvPr>
+            <p:ph type="ftr" idx="5"/>
+          </p:nvPr>
+        </p:nvSpPr>
+        <p:spPr>
+          <a:xfrm>
+            <a:off x="2271600" y="9181440"/>
+            <a:ext cx="2309760" cy="522720"/>
+          </a:xfrm>
+          <a:prstGeom prst="rect">
+            <a:avLst/>
+          </a:prstGeom>
+          <a:noFill/>
+          <a:ln w="0">
+            <a:noFill/>
+          </a:ln>
+        </p:spPr>
+        <p:txBody>
+          <a:bodyPr lIns="91440" rIns="91440" tIns="45720" bIns="45720" anchor="ctr">
+            <a:noAutofit/>
+          </a:bodyPr>
+          <a:lstStyle>
+            <a:lvl1pPr indent="0" algn="ctr">
+              <a:lnSpc>
+                <a:spcPct val="100000"/>
+              </a:lnSpc>
+              <a:buNone/>
+              <a:tabLst>
+                <a:tab algn="l" pos="0"/>
+              </a:tabLst>
+              <a:defRPr lang="de-DE" sz="1400" b="0" u="none" strike="noStrike">
+                <a:solidFill>
+                  <a:srgbClr val="000000"/>
+                </a:solidFill>
+                <a:effectLst/>
+                <a:uFillTx/>
+                <a:latin typeface="Times New Roman"/>
+              </a:defRPr>
+            </a:lvl1pPr>
+          </a:lstStyle>
+          <a:p>
+            <a:pPr indent="0" algn="ctr">
+              <a:lnSpc>
+                <a:spcPct val="100000"/>
+              </a:lnSpc>
+              <a:buNone/>
+              <a:tabLst>
+                <a:tab algn="l" pos="0"/>
+              </a:tabLst>
+            </a:pPr>
+            <a:r>
+              <a:rPr lang="de-DE" sz="1400" b="0" u="none" strike="noStrike">
+                <a:solidFill>
+                  <a:srgbClr val="000000"/>
+                </a:solidFill>
+                <a:effectLst/>
+                <a:uFillTx/>
+                <a:latin typeface="Times New Roman"/>
+              </a:rPr>
+              <a:t>&lt;Fußzeile&gt;</a:t>
+            </a:r>
+            <a:endParaRPr lang="de-DE" sz="1400" b="0" u="none" strike="noStrike">
+              <a:solidFill>
+                <a:srgbClr val="000000"/>
+              </a:solidFill>
+              <a:effectLst/>
+              <a:uFillTx/>
+              <a:latin typeface="Times New Roman"/>
+            </a:endParaRPr>
+          </a:p>
+        </p:txBody>
+      </p:sp>
+      <p:sp>
+        <p:nvSpPr>
+          <p:cNvPr id="10" name="PlaceHolder 6"/>
+          <p:cNvSpPr>
+            <a:spLocks noGrp="1"/>
+          </p:cNvSpPr>
+          <p:nvPr>
+            <p:ph type="sldNum" idx="6"/>
+          </p:nvPr>
+        </p:nvSpPr>
+        <p:spPr>
+          <a:xfrm>
+            <a:off x="4843440" y="9181440"/>
+            <a:ext cx="1538280" cy="522720"/>
+          </a:xfrm>
+          <a:prstGeom prst="rect">
+            <a:avLst/>
+          </a:prstGeom>
+          <a:noFill/>
+          <a:ln w="0">
+            <a:noFill/>
+          </a:ln>
+        </p:spPr>
+        <p:txBody>
+          <a:bodyPr lIns="91440" rIns="91440" tIns="45720" bIns="45720" anchor="ctr">
+            <a:noAutofit/>
+          </a:bodyPr>
+          <a:lstStyle>
+            <a:lvl1pPr indent="0" algn="r" defTabSz="457200">
+              <a:lnSpc>
+                <a:spcPct val="100000"/>
+              </a:lnSpc>
+              <a:buNone/>
+              <a:tabLst>
+                <a:tab algn="l" pos="0"/>
+              </a:tabLst>
+              <a:defRPr lang="de-DE" sz="900" b="0" u="none" strike="noStrike">
+                <a:solidFill>
+                  <a:schemeClr val="dk1">
+                    <a:tint val="75000"/>
+                  </a:schemeClr>
+                </a:solidFill>
+                <a:effectLst/>
+                <a:uFillTx/>
+                <a:latin typeface="Calibri"/>
+              </a:defRPr>
+            </a:lvl1pPr>
+          </a:lstStyle>
+          <a:p>
+            <a:pPr indent="0" algn="r" defTabSz="457200">
+              <a:lnSpc>
+                <a:spcPct val="100000"/>
+              </a:lnSpc>
+              <a:buNone/>
+              <a:tabLst>
+                <a:tab algn="l" pos="0"/>
+              </a:tabLst>
+            </a:pPr>
+            <a:fld id="{952DBE71-197D-4FD9-BF23-E11DCD34C5A4}" type="slidenum">
+              <a:rPr lang="de-DE" sz="900" b="0" u="none" strike="noStrike">
+                <a:solidFill>
+                  <a:schemeClr val="dk1">
+                    <a:tint val="75000"/>
+                  </a:schemeClr>
+                </a:solidFill>
+                <a:effectLst/>
+                <a:uFillTx/>
+                <a:latin typeface="Calibri"/>
+              </a:rPr>
+              <a:t>&lt;Foliennummer&gt;</a:t>
+            </a:fld>
+            <a:endParaRPr lang="de-DE" sz="900" b="0" u="none" strike="noStrike">
+              <a:solidFill>
+                <a:srgbClr val="000000"/>
+              </a:solidFill>
+              <a:effectLst/>
+              <a:uFillTx/>
+              <a:latin typeface="Times New Roman"/>
+            </a:endParaRPr>
+          </a:p>
+        </p:txBody>
+      </p:sp>
+    </p:spTree>
+  </p:cSld>
+</p:sldLayout>
+</file>
+
+<file path=ppt/slideLayouts/slideLayout3.xml><?xml version="1.0" encoding="utf-8"?>
+<p:sldLayout xmlns:a="http://schemas.openxmlformats.org/drawingml/2006/main" xmlns:p="http://schemas.openxmlformats.org/presentationml/2006/main" xmlns:r="http://schemas.openxmlformats.org/officeDocument/2006/relationships" xmlns:p14="http://schemas.microsoft.com/office/powerpoint/2010/main" xmlns:p15="http://schemas.microsoft.com/office/powerpoint/2012/main" xmlns:mc="http://schemas.openxmlformats.org/markup-compatibility/2006" type="blank" preserve="1">
+  <p:cSld name="Bild mit Überschrift">
+    <p:bg>
+      <p:bgPr>
+        <a:solidFill>
+          <a:srgbClr val="ffffff"/>
+        </a:solidFill>
+      </p:bgPr>
+    </p:bg>
+    <p:spTree>
+      <p:nvGrpSpPr>
+        <p:cNvPr id="1" name=""/>
+        <p:cNvGrpSpPr/>
+        <p:nvPr/>
+      </p:nvGrpSpPr>
+      <p:grpSpPr>
+        <a:xfrm>
+          <a:off x="0" y="0"/>
+          <a:ext cx="0" cy="0"/>
+          <a:chOff x="0" y="0"/>
+          <a:chExt cx="0" cy="0"/>
+        </a:xfrm>
+      </p:grpSpPr>
+      <p:sp>
+        <p:nvSpPr>
+          <p:cNvPr id="11" name="PlaceHolder 1"/>
+          <p:cNvSpPr>
+            <a:spLocks noGrp="1"/>
+          </p:cNvSpPr>
+          <p:nvPr>
+            <p:ph type="title"/>
+          </p:nvPr>
+        </p:nvSpPr>
+        <p:spPr>
+          <a:xfrm>
+            <a:off x="472320" y="660240"/>
+            <a:ext cx="2207160" cy="2306880"/>
+          </a:xfrm>
+          <a:prstGeom prst="rect">
+            <a:avLst/>
+          </a:prstGeom>
+          <a:noFill/>
+          <a:ln w="0">
+            <a:noFill/>
+          </a:ln>
+        </p:spPr>
+        <p:txBody>
+          <a:bodyPr lIns="91440" rIns="91440" tIns="45720" bIns="45720" anchor="b">
+            <a:noAutofit/>
+          </a:bodyPr>
+          <a:p>
+            <a:pPr indent="0" defTabSz="685800">
+              <a:lnSpc>
+                <a:spcPct val="90000"/>
+              </a:lnSpc>
+              <a:buNone/>
+              <a:tabLst>
+                <a:tab algn="l" pos="0"/>
+              </a:tabLst>
+            </a:pPr>
+            <a:r>
+              <a:rPr lang="de-DE" sz="2400" b="0" u="none" strike="noStrike">
+                <a:solidFill>
+                  <a:schemeClr val="dk1"/>
+                </a:solidFill>
+                <a:effectLst/>
+                <a:uFillTx/>
+                <a:latin typeface="Calibri Light"/>
+              </a:rPr>
+              <a:t>Mastertitelformat bearbeiten</a:t>
+            </a:r>
+            <a:endParaRPr lang="de-DE" sz="2400" b="0" u="none" strike="noStrike">
+              <a:solidFill>
+                <a:srgbClr val="000000"/>
+              </a:solidFill>
+              <a:effectLst/>
+              <a:uFillTx/>
+              <a:latin typeface="Arial"/>
+            </a:endParaRPr>
+          </a:p>
+        </p:txBody>
+      </p:sp>
+      <p:sp>
+        <p:nvSpPr>
+          <p:cNvPr id="12" name="PlaceHolder 2"/>
+          <p:cNvSpPr>
+            <a:spLocks noGrp="1"/>
+          </p:cNvSpPr>
+          <p:nvPr>
+            <p:ph type="body"/>
+          </p:nvPr>
+        </p:nvSpPr>
+        <p:spPr>
+          <a:xfrm>
+            <a:off x="2915640" y="1426320"/>
+            <a:ext cx="3467160" cy="7035120"/>
+          </a:xfrm>
+          <a:prstGeom prst="rect">
+            <a:avLst/>
+          </a:prstGeom>
+          <a:noFill/>
+          <a:ln w="0">
+            <a:noFill/>
+          </a:ln>
+        </p:spPr>
+        <p:txBody>
+          <a:bodyPr lIns="90000" rIns="90000" tIns="45000" bIns="45000" anchor="t">
+            <a:noAutofit/>
+          </a:bodyPr>
+          <a:p>
+            <a:pPr indent="0" defTabSz="457200">
+              <a:lnSpc>
+                <a:spcPct val="100000"/>
+              </a:lnSpc>
+              <a:buNone/>
+              <a:tabLst>
+                <a:tab algn="l" pos="0"/>
+              </a:tabLst>
+            </a:pPr>
+            <a:r>
+              <a:rPr lang="de-DE" sz="2400" b="0" u="none" strike="noStrike">
+                <a:solidFill>
+                  <a:schemeClr val="dk1"/>
+                </a:solidFill>
+                <a:effectLst/>
+                <a:uFillTx/>
+                <a:latin typeface="Calibri"/>
+              </a:rPr>
+              <a:t>Bild durch Klicken auf Symbol hinzufügen</a:t>
+            </a:r>
+            <a:endParaRPr lang="de-DE" sz="2400" b="0" u="none" strike="noStrike">
+              <a:solidFill>
+                <a:srgbClr val="000000"/>
+              </a:solidFill>
+              <a:effectLst/>
+              <a:uFillTx/>
+              <a:latin typeface="Arial"/>
+            </a:endParaRPr>
+          </a:p>
+        </p:txBody>
+      </p:sp>
+      <p:sp>
+        <p:nvSpPr>
+          <p:cNvPr id="13" name="PlaceHolder 3"/>
+          <p:cNvSpPr>
+            <a:spLocks noGrp="1"/>
+          </p:cNvSpPr>
+          <p:nvPr>
+            <p:ph type="body"/>
+          </p:nvPr>
+        </p:nvSpPr>
+        <p:spPr>
+          <a:xfrm>
+            <a:off x="472320" y="2971800"/>
+            <a:ext cx="2207160" cy="5500800"/>
+          </a:xfrm>
+          <a:prstGeom prst="rect">
+            <a:avLst/>
+          </a:prstGeom>
+          <a:noFill/>
+          <a:ln w="0">
+            <a:noFill/>
+          </a:ln>
+        </p:spPr>
+        <p:txBody>
+          <a:bodyPr lIns="91440" rIns="91440" tIns="45720" bIns="45720" anchor="t">
+            <a:noAutofit/>
+          </a:bodyPr>
+          <a:p>
+            <a:pPr indent="0" defTabSz="685800">
+              <a:lnSpc>
+                <a:spcPct val="90000"/>
+              </a:lnSpc>
+              <a:spcBef>
+                <a:spcPts val="751"/>
+              </a:spcBef>
+              <a:buNone/>
+              <a:tabLst>
+                <a:tab algn="l" pos="0"/>
+              </a:tabLst>
+            </a:pPr>
+            <a:r>
+              <a:rPr lang="de-DE" sz="1200" b="0" u="none" strike="noStrike">
+                <a:solidFill>
+                  <a:schemeClr val="dk1"/>
+                </a:solidFill>
+                <a:effectLst/>
+                <a:uFillTx/>
+                <a:latin typeface="Calibri"/>
+              </a:rPr>
+              <a:t>Mastertextformat bearbeiten</a:t>
+            </a:r>
+            <a:endParaRPr lang="de-DE" sz="1200" b="0" u="none" strike="noStrike">
+              <a:solidFill>
+                <a:srgbClr val="000000"/>
+              </a:solidFill>
+              <a:effectLst/>
+              <a:uFillTx/>
+              <a:latin typeface="Arial"/>
+            </a:endParaRPr>
+          </a:p>
+        </p:txBody>
+      </p:sp>
+      <p:sp>
+        <p:nvSpPr>
+          <p:cNvPr id="14" name="PlaceHolder 4"/>
+          <p:cNvSpPr>
+            <a:spLocks noGrp="1"/>
+          </p:cNvSpPr>
+          <p:nvPr>
+            <p:ph type="dt" idx="7"/>
+          </p:nvPr>
+        </p:nvSpPr>
+        <p:spPr>
+          <a:xfrm>
+            <a:off x="471600" y="9181440"/>
+            <a:ext cx="1538280" cy="522720"/>
+          </a:xfrm>
+          <a:prstGeom prst="rect">
+            <a:avLst/>
+          </a:prstGeom>
+          <a:noFill/>
+          <a:ln w="0">
+            <a:noFill/>
+          </a:ln>
+        </p:spPr>
+        <p:txBody>
+          <a:bodyPr lIns="91440" rIns="91440" tIns="45720" bIns="45720" anchor="ctr">
+            <a:noAutofit/>
+          </a:bodyPr>
+          <a:lstStyle>
+            <a:lvl1pPr indent="0" defTabSz="457200">
+              <a:lnSpc>
+                <a:spcPct val="100000"/>
+              </a:lnSpc>
+              <a:buNone/>
+              <a:tabLst>
+                <a:tab algn="l" pos="0"/>
+              </a:tabLst>
+              <a:defRPr lang="de-DE" sz="900" b="0" u="none" strike="noStrike">
+                <a:solidFill>
+                  <a:schemeClr val="dk1">
+                    <a:tint val="75000"/>
+                  </a:schemeClr>
+                </a:solidFill>
+                <a:effectLst/>
+                <a:uFillTx/>
+                <a:latin typeface="Calibri"/>
+              </a:defRPr>
+            </a:lvl1pPr>
+          </a:lstStyle>
+          <a:p>
+            <a:pPr indent="0" defTabSz="457200">
+              <a:lnSpc>
+                <a:spcPct val="100000"/>
+              </a:lnSpc>
+              <a:buNone/>
+              <a:tabLst>
+                <a:tab algn="l" pos="0"/>
+              </a:tabLst>
+            </a:pPr>
+            <a:r>
+              <a:rPr lang="de-DE" sz="900" b="0" u="none" strike="noStrike">
+                <a:solidFill>
+                  <a:schemeClr val="dk1">
+                    <a:tint val="75000"/>
+                  </a:schemeClr>
+                </a:solidFill>
+                <a:effectLst/>
+                <a:uFillTx/>
+                <a:latin typeface="Calibri"/>
+              </a:rPr>
+              <a:t>&lt;Datum/Uhrzeit&gt;</a:t>
+            </a:r>
+            <a:endParaRPr lang="de-DE" sz="900" b="0" u="none" strike="noStrike">
+              <a:solidFill>
+                <a:srgbClr val="000000"/>
+              </a:solidFill>
+              <a:effectLst/>
+              <a:uFillTx/>
+              <a:latin typeface="Times New Roman"/>
+            </a:endParaRPr>
+          </a:p>
+        </p:txBody>
+      </p:sp>
+      <p:sp>
+        <p:nvSpPr>
+          <p:cNvPr id="15" name="PlaceHolder 5"/>
+          <p:cNvSpPr>
+            <a:spLocks noGrp="1"/>
+          </p:cNvSpPr>
+          <p:nvPr>
+            <p:ph type="ftr" idx="8"/>
+          </p:nvPr>
+        </p:nvSpPr>
+        <p:spPr>
+          <a:xfrm>
+            <a:off x="2271600" y="9181440"/>
+            <a:ext cx="2309760" cy="522720"/>
+          </a:xfrm>
+          <a:prstGeom prst="rect">
+            <a:avLst/>
+          </a:prstGeom>
+          <a:noFill/>
+          <a:ln w="0">
+            <a:noFill/>
+          </a:ln>
+        </p:spPr>
+        <p:txBody>
+          <a:bodyPr lIns="91440" rIns="91440" tIns="45720" bIns="45720" anchor="ctr">
+            <a:noAutofit/>
+          </a:bodyPr>
+          <a:lstStyle>
+            <a:lvl1pPr indent="0" algn="ctr">
+              <a:lnSpc>
+                <a:spcPct val="100000"/>
+              </a:lnSpc>
+              <a:buNone/>
+              <a:tabLst>
+                <a:tab algn="l" pos="0"/>
+              </a:tabLst>
+              <a:defRPr lang="de-DE" sz="1400" b="0" u="none" strike="noStrike">
+                <a:solidFill>
+                  <a:srgbClr val="000000"/>
+                </a:solidFill>
+                <a:effectLst/>
+                <a:uFillTx/>
+                <a:latin typeface="Times New Roman"/>
+              </a:defRPr>
+            </a:lvl1pPr>
+          </a:lstStyle>
+          <a:p>
+            <a:pPr indent="0" algn="ctr">
+              <a:lnSpc>
+                <a:spcPct val="100000"/>
+              </a:lnSpc>
+              <a:buNone/>
+              <a:tabLst>
+                <a:tab algn="l" pos="0"/>
+              </a:tabLst>
+            </a:pPr>
+            <a:r>
+              <a:rPr lang="de-DE" sz="1400" b="0" u="none" strike="noStrike">
+                <a:solidFill>
+                  <a:srgbClr val="000000"/>
+                </a:solidFill>
+                <a:effectLst/>
+                <a:uFillTx/>
+                <a:latin typeface="Times New Roman"/>
+              </a:rPr>
+              <a:t>&lt;Fußzeile&gt;</a:t>
+            </a:r>
+            <a:endParaRPr lang="de-DE" sz="1400" b="0" u="none" strike="noStrike">
+              <a:solidFill>
+                <a:srgbClr val="000000"/>
+              </a:solidFill>
+              <a:effectLst/>
+              <a:uFillTx/>
+              <a:latin typeface="Times New Roman"/>
+            </a:endParaRPr>
+          </a:p>
+        </p:txBody>
+      </p:sp>
+      <p:sp>
+        <p:nvSpPr>
+          <p:cNvPr id="16" name="PlaceHolder 6"/>
+          <p:cNvSpPr>
+            <a:spLocks noGrp="1"/>
+          </p:cNvSpPr>
+          <p:nvPr>
+            <p:ph type="sldNum" idx="9"/>
+          </p:nvPr>
+        </p:nvSpPr>
+        <p:spPr>
+          <a:xfrm>
+            <a:off x="4843440" y="9181440"/>
+            <a:ext cx="1538280" cy="522720"/>
+          </a:xfrm>
+          <a:prstGeom prst="rect">
+            <a:avLst/>
+          </a:prstGeom>
+          <a:noFill/>
+          <a:ln w="0">
+            <a:noFill/>
+          </a:ln>
+        </p:spPr>
+        <p:txBody>
+          <a:bodyPr lIns="91440" rIns="91440" tIns="45720" bIns="45720" anchor="ctr">
+            <a:noAutofit/>
+          </a:bodyPr>
+          <a:lstStyle>
+            <a:lvl1pPr indent="0" algn="r" defTabSz="457200">
+              <a:lnSpc>
+                <a:spcPct val="100000"/>
+              </a:lnSpc>
+              <a:buNone/>
+              <a:tabLst>
+                <a:tab algn="l" pos="0"/>
+              </a:tabLst>
+              <a:defRPr lang="de-DE" sz="900" b="0" u="none" strike="noStrike">
+                <a:solidFill>
+                  <a:schemeClr val="dk1">
+                    <a:tint val="75000"/>
+                  </a:schemeClr>
+                </a:solidFill>
+                <a:effectLst/>
+                <a:uFillTx/>
+                <a:latin typeface="Calibri"/>
+              </a:defRPr>
+            </a:lvl1pPr>
+          </a:lstStyle>
+          <a:p>
+            <a:pPr indent="0" algn="r" defTabSz="457200">
+              <a:lnSpc>
+                <a:spcPct val="100000"/>
+              </a:lnSpc>
+              <a:buNone/>
+              <a:tabLst>
+                <a:tab algn="l" pos="0"/>
+              </a:tabLst>
+            </a:pPr>
+            <a:fld id="{D5861538-9CB2-4B24-A816-BC942E5363D9}" type="slidenum">
+              <a:rPr lang="de-DE" sz="900" b="0" u="none" strike="noStrike">
+                <a:solidFill>
+                  <a:schemeClr val="dk1">
+                    <a:tint val="75000"/>
+                  </a:schemeClr>
+                </a:solidFill>
+                <a:effectLst/>
+                <a:uFillTx/>
+                <a:latin typeface="Calibri"/>
+              </a:rPr>
+              <a:t>&lt;Foliennummer&gt;</a:t>
+            </a:fld>
+            <a:endParaRPr lang="de-DE" sz="900" b="0" u="none" strike="noStrike">
+              <a:solidFill>
+                <a:srgbClr val="000000"/>
+              </a:solidFill>
+              <a:effectLst/>
+              <a:uFillTx/>
+              <a:latin typeface="Times New Roman"/>
+            </a:endParaRPr>
+          </a:p>
+        </p:txBody>
+      </p:sp>
+    </p:spTree>
+  </p:cSld>
+</p:sldLayout>
+</file>
+
+<file path=ppt/slideLayouts/slideLayout4.xml><?xml version="1.0" encoding="utf-8"?>
 <p:sldLayout xmlns:a="http://schemas.openxmlformats.org/drawingml/2006/main" xmlns:p="http://schemas.openxmlformats.org/presentationml/2006/main" xmlns:r="http://schemas.openxmlformats.org/officeDocument/2006/relationships" xmlns:p14="http://schemas.microsoft.com/office/powerpoint/2010/main" xmlns:p15="http://schemas.microsoft.com/office/powerpoint/2012/main" xmlns:mc="http://schemas.openxmlformats.org/markup-compatibility/2006" type="title" preserve="1">
   <p:cSld name="Titelfolie">
     <p:bg>
@@ -39,7 +2534,7 @@
       </p:grpSpPr>
       <p:sp>
         <p:nvSpPr>
-          <p:cNvPr id="2" name="PlaceHolder 1"/>
+          <p:cNvPr id="17" name="PlaceHolder 1"/>
           <p:cNvSpPr>
             <a:spLocks noGrp="1"/>
           </p:cNvSpPr>
@@ -50,7 +2545,7 @@
         <p:spPr>
           <a:xfrm>
             <a:off x="514440" y="1621080"/>
-            <a:ext cx="5825160" cy="3444480"/>
+            <a:ext cx="5824800" cy="3444120"/>
           </a:xfrm>
           <a:prstGeom prst="rect">
             <a:avLst/>
@@ -98,18 +2593,18 @@
       </p:sp>
       <p:sp>
         <p:nvSpPr>
-          <p:cNvPr id="3" name="PlaceHolder 2"/>
+          <p:cNvPr id="18" name="PlaceHolder 2"/>
           <p:cNvSpPr>
             <a:spLocks noGrp="1"/>
           </p:cNvSpPr>
           <p:nvPr>
-            <p:ph type="dt" idx="1"/>
+            <p:ph type="dt" idx="10"/>
           </p:nvPr>
         </p:nvSpPr>
         <p:spPr>
           <a:xfrm>
             <a:off x="471600" y="9181440"/>
-            <a:ext cx="1538640" cy="523080"/>
+            <a:ext cx="1538280" cy="522720"/>
           </a:xfrm>
           <a:prstGeom prst="rect">
             <a:avLst/>
@@ -180,18 +2675,18 @@
       </p:sp>
       <p:sp>
         <p:nvSpPr>
-          <p:cNvPr id="4" name="PlaceHolder 3"/>
+          <p:cNvPr id="19" name="PlaceHolder 3"/>
           <p:cNvSpPr>
             <a:spLocks noGrp="1"/>
           </p:cNvSpPr>
           <p:nvPr>
-            <p:ph type="ftr" idx="2"/>
+            <p:ph type="ftr" idx="11"/>
           </p:nvPr>
         </p:nvSpPr>
         <p:spPr>
           <a:xfrm>
             <a:off x="2271600" y="9181440"/>
-            <a:ext cx="2310120" cy="523080"/>
+            <a:ext cx="2309760" cy="522720"/>
           </a:xfrm>
           <a:prstGeom prst="rect">
             <a:avLst/>
@@ -258,18 +2753,18 @@
       </p:sp>
       <p:sp>
         <p:nvSpPr>
-          <p:cNvPr id="5" name="PlaceHolder 4"/>
+          <p:cNvPr id="20" name="PlaceHolder 4"/>
           <p:cNvSpPr>
             <a:spLocks noGrp="1"/>
           </p:cNvSpPr>
           <p:nvPr>
-            <p:ph type="sldNum" idx="3"/>
+            <p:ph type="sldNum" idx="12"/>
           </p:nvPr>
         </p:nvSpPr>
         <p:spPr>
           <a:xfrm>
             <a:off x="4843440" y="9181440"/>
-            <a:ext cx="1538640" cy="523080"/>
+            <a:ext cx="1538280" cy="522720"/>
           </a:xfrm>
           <a:prstGeom prst="rect">
             <a:avLst/>
@@ -314,7 +2809,7 @@
                 <a:tab algn="l" pos="0"/>
               </a:tabLst>
             </a:pPr>
-            <a:fld id="{41C06199-0240-4CA2-88AA-04DDC73D7E93}" type="slidenum">
+            <a:fld id="{FFE26C46-A20B-4322-8357-636B91BFFA1C}" type="slidenum">
               <a:rPr lang="de-DE" sz="900" b="0" u="none" strike="noStrike">
                 <a:solidFill>
                   <a:schemeClr val="dk1">
@@ -340,7 +2835,7 @@
       </p:sp>
       <p:sp>
         <p:nvSpPr>
-          <p:cNvPr id="6" name="PlaceHolder 5"/>
+          <p:cNvPr id="21" name="PlaceHolder 5"/>
           <p:cNvSpPr>
             <a:spLocks noGrp="1"/>
           </p:cNvSpPr>
@@ -351,7 +2846,7 @@
         <p:spPr>
           <a:xfrm>
             <a:off x="342720" y="2317680"/>
-            <a:ext cx="6167880" cy="5740920"/>
+            <a:ext cx="6167520" cy="5740560"/>
           </a:xfrm>
           <a:prstGeom prst="rect">
             <a:avLst/>
@@ -617,1049 +3112,7 @@
 </p:sldLayout>
 </file>
 
-<file path=ppt/slideLayouts/slideLayout10.xml><?xml version="1.0" encoding="utf-8"?>
-<p:sldLayout xmlns:a="http://schemas.openxmlformats.org/drawingml/2006/main" xmlns:p="http://schemas.openxmlformats.org/presentationml/2006/main" xmlns:r="http://schemas.openxmlformats.org/officeDocument/2006/relationships" xmlns:p14="http://schemas.microsoft.com/office/powerpoint/2010/main" xmlns:p15="http://schemas.microsoft.com/office/powerpoint/2012/main" xmlns:mc="http://schemas.openxmlformats.org/markup-compatibility/2006" type="blank" preserve="1">
-  <p:cSld name="Inhalt mit Überschrift">
-    <p:bg>
-      <p:bgPr>
-        <a:solidFill>
-          <a:srgbClr val="ffffff"/>
-        </a:solidFill>
-      </p:bgPr>
-    </p:bg>
-    <p:spTree>
-      <p:nvGrpSpPr>
-        <p:cNvPr id="1" name=""/>
-        <p:cNvGrpSpPr/>
-        <p:nvPr/>
-      </p:nvGrpSpPr>
-      <p:grpSpPr>
-        <a:xfrm>
-          <a:off x="0" y="0"/>
-          <a:ext cx="0" cy="0"/>
-          <a:chOff x="0" y="0"/>
-          <a:chExt cx="0" cy="0"/>
-        </a:xfrm>
-      </p:grpSpPr>
-      <p:sp>
-        <p:nvSpPr>
-          <p:cNvPr id="48" name="PlaceHolder 1"/>
-          <p:cNvSpPr>
-            <a:spLocks noGrp="1"/>
-          </p:cNvSpPr>
-          <p:nvPr>
-            <p:ph type="title"/>
-          </p:nvPr>
-        </p:nvSpPr>
-        <p:spPr>
-          <a:xfrm>
-            <a:off x="472320" y="660240"/>
-            <a:ext cx="2207520" cy="2307240"/>
-          </a:xfrm>
-          <a:prstGeom prst="rect">
-            <a:avLst/>
-          </a:prstGeom>
-          <a:noFill/>
-          <a:ln w="0">
-            <a:noFill/>
-          </a:ln>
-        </p:spPr>
-        <p:txBody>
-          <a:bodyPr lIns="91440" rIns="91440" tIns="45720" bIns="45720" anchor="b">
-            <a:noAutofit/>
-          </a:bodyPr>
-          <a:p>
-            <a:pPr indent="0" defTabSz="685800">
-              <a:lnSpc>
-                <a:spcPct val="90000"/>
-              </a:lnSpc>
-              <a:buNone/>
-              <a:tabLst>
-                <a:tab algn="l" pos="0"/>
-              </a:tabLst>
-            </a:pPr>
-            <a:r>
-              <a:rPr lang="de-DE" sz="2400" b="0" u="none" strike="noStrike">
-                <a:solidFill>
-                  <a:schemeClr val="dk1"/>
-                </a:solidFill>
-                <a:effectLst/>
-                <a:uFillTx/>
-                <a:latin typeface="Calibri Light"/>
-              </a:rPr>
-              <a:t>Mastertitelformat bearbeiten</a:t>
-            </a:r>
-            <a:endParaRPr lang="de-DE" sz="2400" b="0" u="none" strike="noStrike">
-              <a:solidFill>
-                <a:srgbClr val="000000"/>
-              </a:solidFill>
-              <a:effectLst/>
-              <a:uFillTx/>
-              <a:latin typeface="Arial"/>
-            </a:endParaRPr>
-          </a:p>
-        </p:txBody>
-      </p:sp>
-      <p:sp>
-        <p:nvSpPr>
-          <p:cNvPr id="49" name="PlaceHolder 2"/>
-          <p:cNvSpPr>
-            <a:spLocks noGrp="1"/>
-          </p:cNvSpPr>
-          <p:nvPr>
-            <p:ph type="body"/>
-          </p:nvPr>
-        </p:nvSpPr>
-        <p:spPr>
-          <a:xfrm>
-            <a:off x="2915640" y="1426320"/>
-            <a:ext cx="3467520" cy="7035480"/>
-          </a:xfrm>
-          <a:prstGeom prst="rect">
-            <a:avLst/>
-          </a:prstGeom>
-          <a:noFill/>
-          <a:ln w="0">
-            <a:noFill/>
-          </a:ln>
-        </p:spPr>
-        <p:txBody>
-          <a:bodyPr lIns="91440" rIns="91440" tIns="45720" bIns="45720" anchor="t">
-            <a:noAutofit/>
-          </a:bodyPr>
-          <a:p>
-            <a:pPr marL="171360" indent="-171360" defTabSz="685800">
-              <a:lnSpc>
-                <a:spcPct val="90000"/>
-              </a:lnSpc>
-              <a:spcBef>
-                <a:spcPts val="751"/>
-              </a:spcBef>
-              <a:buClr>
-                <a:srgbClr val="000000"/>
-              </a:buClr>
-              <a:buFont typeface="Arial"/>
-              <a:buChar char="•"/>
-            </a:pPr>
-            <a:r>
-              <a:rPr lang="de-DE" sz="2400" b="0" u="none" strike="noStrike">
-                <a:solidFill>
-                  <a:schemeClr val="dk1"/>
-                </a:solidFill>
-                <a:effectLst/>
-                <a:uFillTx/>
-                <a:latin typeface="Calibri"/>
-              </a:rPr>
-              <a:t>Mastertextformat bearbeiten</a:t>
-            </a:r>
-            <a:endParaRPr lang="de-DE" sz="2400" b="0" u="none" strike="noStrike">
-              <a:solidFill>
-                <a:srgbClr val="000000"/>
-              </a:solidFill>
-              <a:effectLst/>
-              <a:uFillTx/>
-              <a:latin typeface="Arial"/>
-            </a:endParaRPr>
-          </a:p>
-          <a:p>
-            <a:pPr marL="514440" lvl="1" indent="-171360" defTabSz="685800">
-              <a:lnSpc>
-                <a:spcPct val="90000"/>
-              </a:lnSpc>
-              <a:spcBef>
-                <a:spcPts val="374"/>
-              </a:spcBef>
-              <a:buClr>
-                <a:srgbClr val="000000"/>
-              </a:buClr>
-              <a:buFont typeface="Arial"/>
-              <a:buChar char="•"/>
-            </a:pPr>
-            <a:r>
-              <a:rPr lang="de-DE" sz="2100" b="0" u="none" strike="noStrike">
-                <a:solidFill>
-                  <a:schemeClr val="dk1"/>
-                </a:solidFill>
-                <a:effectLst/>
-                <a:uFillTx/>
-                <a:latin typeface="Calibri"/>
-              </a:rPr>
-              <a:t>Zweite Ebene</a:t>
-            </a:r>
-            <a:endParaRPr lang="de-DE" sz="2100" b="0" u="none" strike="noStrike">
-              <a:solidFill>
-                <a:srgbClr val="000000"/>
-              </a:solidFill>
-              <a:effectLst/>
-              <a:uFillTx/>
-              <a:latin typeface="Arial"/>
-            </a:endParaRPr>
-          </a:p>
-          <a:p>
-            <a:pPr marL="857160" lvl="2" indent="-171360" defTabSz="685800">
-              <a:lnSpc>
-                <a:spcPct val="90000"/>
-              </a:lnSpc>
-              <a:spcBef>
-                <a:spcPts val="374"/>
-              </a:spcBef>
-              <a:buClr>
-                <a:srgbClr val="000000"/>
-              </a:buClr>
-              <a:buFont typeface="Arial"/>
-              <a:buChar char="•"/>
-            </a:pPr>
-            <a:r>
-              <a:rPr lang="de-DE" sz="1800" b="0" u="none" strike="noStrike">
-                <a:solidFill>
-                  <a:schemeClr val="dk1"/>
-                </a:solidFill>
-                <a:effectLst/>
-                <a:uFillTx/>
-                <a:latin typeface="Calibri"/>
-              </a:rPr>
-              <a:t>Dritte Ebene</a:t>
-            </a:r>
-            <a:endParaRPr lang="de-DE" sz="1800" b="0" u="none" strike="noStrike">
-              <a:solidFill>
-                <a:srgbClr val="000000"/>
-              </a:solidFill>
-              <a:effectLst/>
-              <a:uFillTx/>
-              <a:latin typeface="Arial"/>
-            </a:endParaRPr>
-          </a:p>
-          <a:p>
-            <a:pPr marL="1200240" lvl="3" indent="-171360" defTabSz="685800">
-              <a:lnSpc>
-                <a:spcPct val="90000"/>
-              </a:lnSpc>
-              <a:spcBef>
-                <a:spcPts val="374"/>
-              </a:spcBef>
-              <a:buClr>
-                <a:srgbClr val="000000"/>
-              </a:buClr>
-              <a:buFont typeface="Arial"/>
-              <a:buChar char="•"/>
-            </a:pPr>
-            <a:r>
-              <a:rPr lang="de-DE" sz="1500" b="0" u="none" strike="noStrike">
-                <a:solidFill>
-                  <a:schemeClr val="dk1"/>
-                </a:solidFill>
-                <a:effectLst/>
-                <a:uFillTx/>
-                <a:latin typeface="Calibri"/>
-              </a:rPr>
-              <a:t>Vierte Ebene</a:t>
-            </a:r>
-            <a:endParaRPr lang="de-DE" sz="1500" b="0" u="none" strike="noStrike">
-              <a:solidFill>
-                <a:srgbClr val="000000"/>
-              </a:solidFill>
-              <a:effectLst/>
-              <a:uFillTx/>
-              <a:latin typeface="Arial"/>
-            </a:endParaRPr>
-          </a:p>
-          <a:p>
-            <a:pPr marL="1542960" lvl="4" indent="-171360" defTabSz="685800">
-              <a:lnSpc>
-                <a:spcPct val="90000"/>
-              </a:lnSpc>
-              <a:spcBef>
-                <a:spcPts val="374"/>
-              </a:spcBef>
-              <a:buClr>
-                <a:srgbClr val="000000"/>
-              </a:buClr>
-              <a:buFont typeface="Arial"/>
-              <a:buChar char="•"/>
-            </a:pPr>
-            <a:r>
-              <a:rPr lang="de-DE" sz="1500" b="0" u="none" strike="noStrike">
-                <a:solidFill>
-                  <a:schemeClr val="dk1"/>
-                </a:solidFill>
-                <a:effectLst/>
-                <a:uFillTx/>
-                <a:latin typeface="Calibri"/>
-              </a:rPr>
-              <a:t>Fünfte Ebene</a:t>
-            </a:r>
-            <a:endParaRPr lang="de-DE" sz="1500" b="0" u="none" strike="noStrike">
-              <a:solidFill>
-                <a:srgbClr val="000000"/>
-              </a:solidFill>
-              <a:effectLst/>
-              <a:uFillTx/>
-              <a:latin typeface="Arial"/>
-            </a:endParaRPr>
-          </a:p>
-        </p:txBody>
-      </p:sp>
-      <p:sp>
-        <p:nvSpPr>
-          <p:cNvPr id="50" name="PlaceHolder 3"/>
-          <p:cNvSpPr>
-            <a:spLocks noGrp="1"/>
-          </p:cNvSpPr>
-          <p:nvPr>
-            <p:ph type="body"/>
-          </p:nvPr>
-        </p:nvSpPr>
-        <p:spPr>
-          <a:xfrm>
-            <a:off x="472320" y="2971800"/>
-            <a:ext cx="2207520" cy="5501160"/>
-          </a:xfrm>
-          <a:prstGeom prst="rect">
-            <a:avLst/>
-          </a:prstGeom>
-          <a:noFill/>
-          <a:ln w="0">
-            <a:noFill/>
-          </a:ln>
-        </p:spPr>
-        <p:txBody>
-          <a:bodyPr lIns="91440" rIns="91440" tIns="45720" bIns="45720" anchor="t">
-            <a:noAutofit/>
-          </a:bodyPr>
-          <a:p>
-            <a:pPr indent="0" defTabSz="685800">
-              <a:lnSpc>
-                <a:spcPct val="90000"/>
-              </a:lnSpc>
-              <a:spcBef>
-                <a:spcPts val="751"/>
-              </a:spcBef>
-              <a:buNone/>
-              <a:tabLst>
-                <a:tab algn="l" pos="0"/>
-              </a:tabLst>
-            </a:pPr>
-            <a:r>
-              <a:rPr lang="de-DE" sz="1200" b="0" u="none" strike="noStrike">
-                <a:solidFill>
-                  <a:schemeClr val="dk1"/>
-                </a:solidFill>
-                <a:effectLst/>
-                <a:uFillTx/>
-                <a:latin typeface="Calibri"/>
-              </a:rPr>
-              <a:t>Mastertextformat bearbeiten</a:t>
-            </a:r>
-            <a:endParaRPr lang="de-DE" sz="1200" b="0" u="none" strike="noStrike">
-              <a:solidFill>
-                <a:srgbClr val="000000"/>
-              </a:solidFill>
-              <a:effectLst/>
-              <a:uFillTx/>
-              <a:latin typeface="Arial"/>
-            </a:endParaRPr>
-          </a:p>
-        </p:txBody>
-      </p:sp>
-      <p:sp>
-        <p:nvSpPr>
-          <p:cNvPr id="51" name="PlaceHolder 4"/>
-          <p:cNvSpPr>
-            <a:spLocks noGrp="1"/>
-          </p:cNvSpPr>
-          <p:nvPr>
-            <p:ph type="dt" idx="28"/>
-          </p:nvPr>
-        </p:nvSpPr>
-        <p:spPr>
-          <a:xfrm>
-            <a:off x="471600" y="9181440"/>
-            <a:ext cx="1538640" cy="523080"/>
-          </a:xfrm>
-          <a:prstGeom prst="rect">
-            <a:avLst/>
-          </a:prstGeom>
-          <a:noFill/>
-          <a:ln w="0">
-            <a:noFill/>
-          </a:ln>
-        </p:spPr>
-        <p:txBody>
-          <a:bodyPr lIns="91440" rIns="91440" tIns="45720" bIns="45720" anchor="ctr">
-            <a:noAutofit/>
-          </a:bodyPr>
-          <a:lstStyle>
-            <a:lvl1pPr indent="0" defTabSz="457200">
-              <a:lnSpc>
-                <a:spcPct val="100000"/>
-              </a:lnSpc>
-              <a:buNone/>
-              <a:tabLst>
-                <a:tab algn="l" pos="0"/>
-              </a:tabLst>
-              <a:defRPr lang="de-DE" sz="900" b="0" u="none" strike="noStrike">
-                <a:solidFill>
-                  <a:schemeClr val="dk1">
-                    <a:tint val="75000"/>
-                  </a:schemeClr>
-                </a:solidFill>
-                <a:effectLst/>
-                <a:uFillTx/>
-                <a:latin typeface="Calibri"/>
-              </a:defRPr>
-            </a:lvl1pPr>
-          </a:lstStyle>
-          <a:p>
-            <a:pPr indent="0" defTabSz="457200">
-              <a:lnSpc>
-                <a:spcPct val="100000"/>
-              </a:lnSpc>
-              <a:buNone/>
-              <a:tabLst>
-                <a:tab algn="l" pos="0"/>
-              </a:tabLst>
-            </a:pPr>
-            <a:r>
-              <a:rPr lang="de-DE" sz="900" b="0" u="none" strike="noStrike">
-                <a:solidFill>
-                  <a:schemeClr val="dk1">
-                    <a:tint val="75000"/>
-                  </a:schemeClr>
-                </a:solidFill>
-                <a:effectLst/>
-                <a:uFillTx/>
-                <a:latin typeface="Calibri"/>
-              </a:rPr>
-              <a:t>&lt;Datum/Uhrzeit&gt;</a:t>
-            </a:r>
-            <a:endParaRPr lang="de-DE" sz="900" b="0" u="none" strike="noStrike">
-              <a:solidFill>
-                <a:srgbClr val="000000"/>
-              </a:solidFill>
-              <a:effectLst/>
-              <a:uFillTx/>
-              <a:latin typeface="Times New Roman"/>
-            </a:endParaRPr>
-          </a:p>
-        </p:txBody>
-      </p:sp>
-      <p:sp>
-        <p:nvSpPr>
-          <p:cNvPr id="52" name="PlaceHolder 5"/>
-          <p:cNvSpPr>
-            <a:spLocks noGrp="1"/>
-          </p:cNvSpPr>
-          <p:nvPr>
-            <p:ph type="ftr" idx="29"/>
-          </p:nvPr>
-        </p:nvSpPr>
-        <p:spPr>
-          <a:xfrm>
-            <a:off x="2271600" y="9181440"/>
-            <a:ext cx="2310120" cy="523080"/>
-          </a:xfrm>
-          <a:prstGeom prst="rect">
-            <a:avLst/>
-          </a:prstGeom>
-          <a:noFill/>
-          <a:ln w="0">
-            <a:noFill/>
-          </a:ln>
-        </p:spPr>
-        <p:txBody>
-          <a:bodyPr lIns="91440" rIns="91440" tIns="45720" bIns="45720" anchor="ctr">
-            <a:noAutofit/>
-          </a:bodyPr>
-          <a:lstStyle>
-            <a:lvl1pPr indent="0" algn="ctr">
-              <a:lnSpc>
-                <a:spcPct val="100000"/>
-              </a:lnSpc>
-              <a:buNone/>
-              <a:tabLst>
-                <a:tab algn="l" pos="0"/>
-              </a:tabLst>
-              <a:defRPr lang="de-DE" sz="1400" b="0" u="none" strike="noStrike">
-                <a:solidFill>
-                  <a:srgbClr val="000000"/>
-                </a:solidFill>
-                <a:effectLst/>
-                <a:uFillTx/>
-                <a:latin typeface="Times New Roman"/>
-              </a:defRPr>
-            </a:lvl1pPr>
-          </a:lstStyle>
-          <a:p>
-            <a:pPr indent="0" algn="ctr">
-              <a:lnSpc>
-                <a:spcPct val="100000"/>
-              </a:lnSpc>
-              <a:buNone/>
-              <a:tabLst>
-                <a:tab algn="l" pos="0"/>
-              </a:tabLst>
-            </a:pPr>
-            <a:r>
-              <a:rPr lang="de-DE" sz="1400" b="0" u="none" strike="noStrike">
-                <a:solidFill>
-                  <a:srgbClr val="000000"/>
-                </a:solidFill>
-                <a:effectLst/>
-                <a:uFillTx/>
-                <a:latin typeface="Times New Roman"/>
-              </a:rPr>
-              <a:t>&lt;Fußzeile&gt;</a:t>
-            </a:r>
-            <a:endParaRPr lang="de-DE" sz="1400" b="0" u="none" strike="noStrike">
-              <a:solidFill>
-                <a:srgbClr val="000000"/>
-              </a:solidFill>
-              <a:effectLst/>
-              <a:uFillTx/>
-              <a:latin typeface="Times New Roman"/>
-            </a:endParaRPr>
-          </a:p>
-        </p:txBody>
-      </p:sp>
-      <p:sp>
-        <p:nvSpPr>
-          <p:cNvPr id="53" name="PlaceHolder 6"/>
-          <p:cNvSpPr>
-            <a:spLocks noGrp="1"/>
-          </p:cNvSpPr>
-          <p:nvPr>
-            <p:ph type="sldNum" idx="30"/>
-          </p:nvPr>
-        </p:nvSpPr>
-        <p:spPr>
-          <a:xfrm>
-            <a:off x="4843440" y="9181440"/>
-            <a:ext cx="1538640" cy="523080"/>
-          </a:xfrm>
-          <a:prstGeom prst="rect">
-            <a:avLst/>
-          </a:prstGeom>
-          <a:noFill/>
-          <a:ln w="0">
-            <a:noFill/>
-          </a:ln>
-        </p:spPr>
-        <p:txBody>
-          <a:bodyPr lIns="91440" rIns="91440" tIns="45720" bIns="45720" anchor="ctr">
-            <a:noAutofit/>
-          </a:bodyPr>
-          <a:lstStyle>
-            <a:lvl1pPr indent="0" algn="r" defTabSz="457200">
-              <a:lnSpc>
-                <a:spcPct val="100000"/>
-              </a:lnSpc>
-              <a:buNone/>
-              <a:tabLst>
-                <a:tab algn="l" pos="0"/>
-              </a:tabLst>
-              <a:defRPr lang="de-DE" sz="900" b="0" u="none" strike="noStrike">
-                <a:solidFill>
-                  <a:schemeClr val="dk1">
-                    <a:tint val="75000"/>
-                  </a:schemeClr>
-                </a:solidFill>
-                <a:effectLst/>
-                <a:uFillTx/>
-                <a:latin typeface="Calibri"/>
-              </a:defRPr>
-            </a:lvl1pPr>
-          </a:lstStyle>
-          <a:p>
-            <a:pPr indent="0" algn="r" defTabSz="457200">
-              <a:lnSpc>
-                <a:spcPct val="100000"/>
-              </a:lnSpc>
-              <a:buNone/>
-              <a:tabLst>
-                <a:tab algn="l" pos="0"/>
-              </a:tabLst>
-            </a:pPr>
-            <a:fld id="{FE13F69F-252D-4C9B-B5AA-4367CC1E6BA0}" type="slidenum">
-              <a:rPr lang="de-DE" sz="900" b="0" u="none" strike="noStrike">
-                <a:solidFill>
-                  <a:schemeClr val="dk1">
-                    <a:tint val="75000"/>
-                  </a:schemeClr>
-                </a:solidFill>
-                <a:effectLst/>
-                <a:uFillTx/>
-                <a:latin typeface="Calibri"/>
-              </a:rPr>
-              <a:t>&lt;Foliennummer&gt;</a:t>
-            </a:fld>
-            <a:endParaRPr lang="de-DE" sz="900" b="0" u="none" strike="noStrike">
-              <a:solidFill>
-                <a:srgbClr val="000000"/>
-              </a:solidFill>
-              <a:effectLst/>
-              <a:uFillTx/>
-              <a:latin typeface="Times New Roman"/>
-            </a:endParaRPr>
-          </a:p>
-        </p:txBody>
-      </p:sp>
-    </p:spTree>
-  </p:cSld>
-</p:sldLayout>
-</file>
-
-<file path=ppt/slideLayouts/slideLayout11.xml><?xml version="1.0" encoding="utf-8"?>
-<p:sldLayout xmlns:a="http://schemas.openxmlformats.org/drawingml/2006/main" xmlns:p="http://schemas.openxmlformats.org/presentationml/2006/main" xmlns:r="http://schemas.openxmlformats.org/officeDocument/2006/relationships" xmlns:p14="http://schemas.microsoft.com/office/powerpoint/2010/main" xmlns:p15="http://schemas.microsoft.com/office/powerpoint/2012/main" xmlns:mc="http://schemas.openxmlformats.org/markup-compatibility/2006" type="blank" preserve="1">
-  <p:cSld name="Bild mit Überschrift">
-    <p:bg>
-      <p:bgPr>
-        <a:solidFill>
-          <a:srgbClr val="ffffff"/>
-        </a:solidFill>
-      </p:bgPr>
-    </p:bg>
-    <p:spTree>
-      <p:nvGrpSpPr>
-        <p:cNvPr id="1" name=""/>
-        <p:cNvGrpSpPr/>
-        <p:nvPr/>
-      </p:nvGrpSpPr>
-      <p:grpSpPr>
-        <a:xfrm>
-          <a:off x="0" y="0"/>
-          <a:ext cx="0" cy="0"/>
-          <a:chOff x="0" y="0"/>
-          <a:chExt cx="0" cy="0"/>
-        </a:xfrm>
-      </p:grpSpPr>
-      <p:sp>
-        <p:nvSpPr>
-          <p:cNvPr id="54" name="PlaceHolder 1"/>
-          <p:cNvSpPr>
-            <a:spLocks noGrp="1"/>
-          </p:cNvSpPr>
-          <p:nvPr>
-            <p:ph type="title"/>
-          </p:nvPr>
-        </p:nvSpPr>
-        <p:spPr>
-          <a:xfrm>
-            <a:off x="472320" y="660240"/>
-            <a:ext cx="2207520" cy="2307240"/>
-          </a:xfrm>
-          <a:prstGeom prst="rect">
-            <a:avLst/>
-          </a:prstGeom>
-          <a:noFill/>
-          <a:ln w="0">
-            <a:noFill/>
-          </a:ln>
-        </p:spPr>
-        <p:txBody>
-          <a:bodyPr lIns="91440" rIns="91440" tIns="45720" bIns="45720" anchor="b">
-            <a:noAutofit/>
-          </a:bodyPr>
-          <a:p>
-            <a:pPr indent="0" defTabSz="685800">
-              <a:lnSpc>
-                <a:spcPct val="90000"/>
-              </a:lnSpc>
-              <a:buNone/>
-              <a:tabLst>
-                <a:tab algn="l" pos="0"/>
-              </a:tabLst>
-            </a:pPr>
-            <a:r>
-              <a:rPr lang="de-DE" sz="2400" b="0" u="none" strike="noStrike">
-                <a:solidFill>
-                  <a:schemeClr val="dk1"/>
-                </a:solidFill>
-                <a:effectLst/>
-                <a:uFillTx/>
-                <a:latin typeface="Calibri Light"/>
-              </a:rPr>
-              <a:t>Mastertitelformat bearbeiten</a:t>
-            </a:r>
-            <a:endParaRPr lang="de-DE" sz="2400" b="0" u="none" strike="noStrike">
-              <a:solidFill>
-                <a:srgbClr val="000000"/>
-              </a:solidFill>
-              <a:effectLst/>
-              <a:uFillTx/>
-              <a:latin typeface="Arial"/>
-            </a:endParaRPr>
-          </a:p>
-        </p:txBody>
-      </p:sp>
-      <p:sp>
-        <p:nvSpPr>
-          <p:cNvPr id="55" name="PlaceHolder 2"/>
-          <p:cNvSpPr>
-            <a:spLocks noGrp="1"/>
-          </p:cNvSpPr>
-          <p:nvPr>
-            <p:ph type="body"/>
-          </p:nvPr>
-        </p:nvSpPr>
-        <p:spPr>
-          <a:xfrm>
-            <a:off x="2915640" y="1426320"/>
-            <a:ext cx="3467520" cy="7035480"/>
-          </a:xfrm>
-          <a:prstGeom prst="rect">
-            <a:avLst/>
-          </a:prstGeom>
-          <a:noFill/>
-          <a:ln w="0">
-            <a:noFill/>
-          </a:ln>
-        </p:spPr>
-        <p:txBody>
-          <a:bodyPr lIns="90000" rIns="90000" tIns="45000" bIns="45000" anchor="t">
-            <a:noAutofit/>
-          </a:bodyPr>
-          <a:p>
-            <a:pPr indent="0" defTabSz="457200">
-              <a:lnSpc>
-                <a:spcPct val="100000"/>
-              </a:lnSpc>
-              <a:buNone/>
-              <a:tabLst>
-                <a:tab algn="l" pos="0"/>
-              </a:tabLst>
-            </a:pPr>
-            <a:r>
-              <a:rPr lang="de-DE" sz="2400" b="0" u="none" strike="noStrike">
-                <a:solidFill>
-                  <a:schemeClr val="dk1"/>
-                </a:solidFill>
-                <a:effectLst/>
-                <a:uFillTx/>
-                <a:latin typeface="Calibri"/>
-              </a:rPr>
-              <a:t>Bild durch Klicken auf Symbol hinzufügen</a:t>
-            </a:r>
-            <a:endParaRPr lang="de-DE" sz="2400" b="0" u="none" strike="noStrike">
-              <a:solidFill>
-                <a:srgbClr val="000000"/>
-              </a:solidFill>
-              <a:effectLst/>
-              <a:uFillTx/>
-              <a:latin typeface="Arial"/>
-            </a:endParaRPr>
-          </a:p>
-        </p:txBody>
-      </p:sp>
-      <p:sp>
-        <p:nvSpPr>
-          <p:cNvPr id="56" name="PlaceHolder 3"/>
-          <p:cNvSpPr>
-            <a:spLocks noGrp="1"/>
-          </p:cNvSpPr>
-          <p:nvPr>
-            <p:ph type="body"/>
-          </p:nvPr>
-        </p:nvSpPr>
-        <p:spPr>
-          <a:xfrm>
-            <a:off x="472320" y="2971800"/>
-            <a:ext cx="2207520" cy="5501160"/>
-          </a:xfrm>
-          <a:prstGeom prst="rect">
-            <a:avLst/>
-          </a:prstGeom>
-          <a:noFill/>
-          <a:ln w="0">
-            <a:noFill/>
-          </a:ln>
-        </p:spPr>
-        <p:txBody>
-          <a:bodyPr lIns="91440" rIns="91440" tIns="45720" bIns="45720" anchor="t">
-            <a:noAutofit/>
-          </a:bodyPr>
-          <a:p>
-            <a:pPr indent="0" defTabSz="685800">
-              <a:lnSpc>
-                <a:spcPct val="90000"/>
-              </a:lnSpc>
-              <a:spcBef>
-                <a:spcPts val="751"/>
-              </a:spcBef>
-              <a:buNone/>
-              <a:tabLst>
-                <a:tab algn="l" pos="0"/>
-              </a:tabLst>
-            </a:pPr>
-            <a:r>
-              <a:rPr lang="de-DE" sz="1200" b="0" u="none" strike="noStrike">
-                <a:solidFill>
-                  <a:schemeClr val="dk1"/>
-                </a:solidFill>
-                <a:effectLst/>
-                <a:uFillTx/>
-                <a:latin typeface="Calibri"/>
-              </a:rPr>
-              <a:t>Mastertextformat bearbeiten</a:t>
-            </a:r>
-            <a:endParaRPr lang="de-DE" sz="1200" b="0" u="none" strike="noStrike">
-              <a:solidFill>
-                <a:srgbClr val="000000"/>
-              </a:solidFill>
-              <a:effectLst/>
-              <a:uFillTx/>
-              <a:latin typeface="Arial"/>
-            </a:endParaRPr>
-          </a:p>
-        </p:txBody>
-      </p:sp>
-      <p:sp>
-        <p:nvSpPr>
-          <p:cNvPr id="57" name="PlaceHolder 4"/>
-          <p:cNvSpPr>
-            <a:spLocks noGrp="1"/>
-          </p:cNvSpPr>
-          <p:nvPr>
-            <p:ph type="dt" idx="31"/>
-          </p:nvPr>
-        </p:nvSpPr>
-        <p:spPr>
-          <a:xfrm>
-            <a:off x="471600" y="9181440"/>
-            <a:ext cx="1538640" cy="523080"/>
-          </a:xfrm>
-          <a:prstGeom prst="rect">
-            <a:avLst/>
-          </a:prstGeom>
-          <a:noFill/>
-          <a:ln w="0">
-            <a:noFill/>
-          </a:ln>
-        </p:spPr>
-        <p:txBody>
-          <a:bodyPr lIns="91440" rIns="91440" tIns="45720" bIns="45720" anchor="ctr">
-            <a:noAutofit/>
-          </a:bodyPr>
-          <a:lstStyle>
-            <a:lvl1pPr indent="0" defTabSz="457200">
-              <a:lnSpc>
-                <a:spcPct val="100000"/>
-              </a:lnSpc>
-              <a:buNone/>
-              <a:tabLst>
-                <a:tab algn="l" pos="0"/>
-              </a:tabLst>
-              <a:defRPr lang="de-DE" sz="900" b="0" u="none" strike="noStrike">
-                <a:solidFill>
-                  <a:schemeClr val="dk1">
-                    <a:tint val="75000"/>
-                  </a:schemeClr>
-                </a:solidFill>
-                <a:effectLst/>
-                <a:uFillTx/>
-                <a:latin typeface="Calibri"/>
-              </a:defRPr>
-            </a:lvl1pPr>
-          </a:lstStyle>
-          <a:p>
-            <a:pPr indent="0" defTabSz="457200">
-              <a:lnSpc>
-                <a:spcPct val="100000"/>
-              </a:lnSpc>
-              <a:buNone/>
-              <a:tabLst>
-                <a:tab algn="l" pos="0"/>
-              </a:tabLst>
-            </a:pPr>
-            <a:r>
-              <a:rPr lang="de-DE" sz="900" b="0" u="none" strike="noStrike">
-                <a:solidFill>
-                  <a:schemeClr val="dk1">
-                    <a:tint val="75000"/>
-                  </a:schemeClr>
-                </a:solidFill>
-                <a:effectLst/>
-                <a:uFillTx/>
-                <a:latin typeface="Calibri"/>
-              </a:rPr>
-              <a:t>&lt;Datum/Uhrzeit&gt;</a:t>
-            </a:r>
-            <a:endParaRPr lang="de-DE" sz="900" b="0" u="none" strike="noStrike">
-              <a:solidFill>
-                <a:srgbClr val="000000"/>
-              </a:solidFill>
-              <a:effectLst/>
-              <a:uFillTx/>
-              <a:latin typeface="Times New Roman"/>
-            </a:endParaRPr>
-          </a:p>
-        </p:txBody>
-      </p:sp>
-      <p:sp>
-        <p:nvSpPr>
-          <p:cNvPr id="58" name="PlaceHolder 5"/>
-          <p:cNvSpPr>
-            <a:spLocks noGrp="1"/>
-          </p:cNvSpPr>
-          <p:nvPr>
-            <p:ph type="ftr" idx="32"/>
-          </p:nvPr>
-        </p:nvSpPr>
-        <p:spPr>
-          <a:xfrm>
-            <a:off x="2271600" y="9181440"/>
-            <a:ext cx="2310120" cy="523080"/>
-          </a:xfrm>
-          <a:prstGeom prst="rect">
-            <a:avLst/>
-          </a:prstGeom>
-          <a:noFill/>
-          <a:ln w="0">
-            <a:noFill/>
-          </a:ln>
-        </p:spPr>
-        <p:txBody>
-          <a:bodyPr lIns="91440" rIns="91440" tIns="45720" bIns="45720" anchor="ctr">
-            <a:noAutofit/>
-          </a:bodyPr>
-          <a:lstStyle>
-            <a:lvl1pPr indent="0" algn="ctr">
-              <a:lnSpc>
-                <a:spcPct val="100000"/>
-              </a:lnSpc>
-              <a:buNone/>
-              <a:tabLst>
-                <a:tab algn="l" pos="0"/>
-              </a:tabLst>
-              <a:defRPr lang="de-DE" sz="1400" b="0" u="none" strike="noStrike">
-                <a:solidFill>
-                  <a:srgbClr val="000000"/>
-                </a:solidFill>
-                <a:effectLst/>
-                <a:uFillTx/>
-                <a:latin typeface="Times New Roman"/>
-              </a:defRPr>
-            </a:lvl1pPr>
-          </a:lstStyle>
-          <a:p>
-            <a:pPr indent="0" algn="ctr">
-              <a:lnSpc>
-                <a:spcPct val="100000"/>
-              </a:lnSpc>
-              <a:buNone/>
-              <a:tabLst>
-                <a:tab algn="l" pos="0"/>
-              </a:tabLst>
-            </a:pPr>
-            <a:r>
-              <a:rPr lang="de-DE" sz="1400" b="0" u="none" strike="noStrike">
-                <a:solidFill>
-                  <a:srgbClr val="000000"/>
-                </a:solidFill>
-                <a:effectLst/>
-                <a:uFillTx/>
-                <a:latin typeface="Times New Roman"/>
-              </a:rPr>
-              <a:t>&lt;Fußzeile&gt;</a:t>
-            </a:r>
-            <a:endParaRPr lang="de-DE" sz="1400" b="0" u="none" strike="noStrike">
-              <a:solidFill>
-                <a:srgbClr val="000000"/>
-              </a:solidFill>
-              <a:effectLst/>
-              <a:uFillTx/>
-              <a:latin typeface="Times New Roman"/>
-            </a:endParaRPr>
-          </a:p>
-        </p:txBody>
-      </p:sp>
-      <p:sp>
-        <p:nvSpPr>
-          <p:cNvPr id="59" name="PlaceHolder 6"/>
-          <p:cNvSpPr>
-            <a:spLocks noGrp="1"/>
-          </p:cNvSpPr>
-          <p:nvPr>
-            <p:ph type="sldNum" idx="33"/>
-          </p:nvPr>
-        </p:nvSpPr>
-        <p:spPr>
-          <a:xfrm>
-            <a:off x="4843440" y="9181440"/>
-            <a:ext cx="1538640" cy="523080"/>
-          </a:xfrm>
-          <a:prstGeom prst="rect">
-            <a:avLst/>
-          </a:prstGeom>
-          <a:noFill/>
-          <a:ln w="0">
-            <a:noFill/>
-          </a:ln>
-        </p:spPr>
-        <p:txBody>
-          <a:bodyPr lIns="91440" rIns="91440" tIns="45720" bIns="45720" anchor="ctr">
-            <a:noAutofit/>
-          </a:bodyPr>
-          <a:lstStyle>
-            <a:lvl1pPr indent="0" algn="r" defTabSz="457200">
-              <a:lnSpc>
-                <a:spcPct val="100000"/>
-              </a:lnSpc>
-              <a:buNone/>
-              <a:tabLst>
-                <a:tab algn="l" pos="0"/>
-              </a:tabLst>
-              <a:defRPr lang="de-DE" sz="900" b="0" u="none" strike="noStrike">
-                <a:solidFill>
-                  <a:schemeClr val="dk1">
-                    <a:tint val="75000"/>
-                  </a:schemeClr>
-                </a:solidFill>
-                <a:effectLst/>
-                <a:uFillTx/>
-                <a:latin typeface="Calibri"/>
-              </a:defRPr>
-            </a:lvl1pPr>
-          </a:lstStyle>
-          <a:p>
-            <a:pPr indent="0" algn="r" defTabSz="457200">
-              <a:lnSpc>
-                <a:spcPct val="100000"/>
-              </a:lnSpc>
-              <a:buNone/>
-              <a:tabLst>
-                <a:tab algn="l" pos="0"/>
-              </a:tabLst>
-            </a:pPr>
-            <a:fld id="{AD53CFD9-C0F9-4131-8E93-E100DAE186E3}" type="slidenum">
-              <a:rPr lang="de-DE" sz="900" b="0" u="none" strike="noStrike">
-                <a:solidFill>
-                  <a:schemeClr val="dk1">
-                    <a:tint val="75000"/>
-                  </a:schemeClr>
-                </a:solidFill>
-                <a:effectLst/>
-                <a:uFillTx/>
-                <a:latin typeface="Calibri"/>
-              </a:rPr>
-              <a:t>&lt;Foliennummer&gt;</a:t>
-            </a:fld>
-            <a:endParaRPr lang="de-DE" sz="900" b="0" u="none" strike="noStrike">
-              <a:solidFill>
-                <a:srgbClr val="000000"/>
-              </a:solidFill>
-              <a:effectLst/>
-              <a:uFillTx/>
-              <a:latin typeface="Times New Roman"/>
-            </a:endParaRPr>
-          </a:p>
-        </p:txBody>
-      </p:sp>
-    </p:spTree>
-  </p:cSld>
-</p:sldLayout>
-</file>
-
-<file path=ppt/slideLayouts/slideLayout2.xml><?xml version="1.0" encoding="utf-8"?>
+<file path=ppt/slideLayouts/slideLayout5.xml><?xml version="1.0" encoding="utf-8"?>
 <p:sldLayout xmlns:a="http://schemas.openxmlformats.org/drawingml/2006/main" xmlns:p="http://schemas.openxmlformats.org/presentationml/2006/main" xmlns:r="http://schemas.openxmlformats.org/officeDocument/2006/relationships" xmlns:p14="http://schemas.microsoft.com/office/powerpoint/2010/main" xmlns:p15="http://schemas.microsoft.com/office/powerpoint/2012/main" xmlns:mc="http://schemas.openxmlformats.org/markup-compatibility/2006" type="vertTx" preserve="1">
   <p:cSld name="Titel und vertikaler Text">
     <p:bg>
@@ -1685,7 +3138,7 @@
       </p:grpSpPr>
       <p:sp>
         <p:nvSpPr>
-          <p:cNvPr id="7" name="PlaceHolder 1"/>
+          <p:cNvPr id="22" name="PlaceHolder 1"/>
           <p:cNvSpPr>
             <a:spLocks noGrp="1"/>
           </p:cNvSpPr>
@@ -1696,7 +3149,7 @@
         <p:spPr>
           <a:xfrm>
             <a:off x="471600" y="527400"/>
-            <a:ext cx="5910840" cy="1910520"/>
+            <a:ext cx="5910480" cy="1910160"/>
           </a:xfrm>
           <a:prstGeom prst="rect">
             <a:avLst/>
@@ -1744,7 +3197,7 @@
       </p:sp>
       <p:sp>
         <p:nvSpPr>
-          <p:cNvPr id="8" name="PlaceHolder 2"/>
+          <p:cNvPr id="23" name="PlaceHolder 2"/>
           <p:cNvSpPr>
             <a:spLocks noGrp="1"/>
           </p:cNvSpPr>
@@ -1755,7 +3208,7 @@
         <p:spPr>
           <a:xfrm>
             <a:off x="471600" y="2637000"/>
-            <a:ext cx="5910840" cy="6280920"/>
+            <a:ext cx="5910480" cy="6280560"/>
           </a:xfrm>
           <a:prstGeom prst="rect">
             <a:avLst/>
@@ -1943,18 +3396,18 @@
       </p:sp>
       <p:sp>
         <p:nvSpPr>
-          <p:cNvPr id="9" name="PlaceHolder 3"/>
+          <p:cNvPr id="24" name="PlaceHolder 3"/>
           <p:cNvSpPr>
             <a:spLocks noGrp="1"/>
           </p:cNvSpPr>
           <p:nvPr>
-            <p:ph type="dt" idx="4"/>
+            <p:ph type="dt" idx="13"/>
           </p:nvPr>
         </p:nvSpPr>
         <p:spPr>
           <a:xfrm>
             <a:off x="471600" y="9181440"/>
-            <a:ext cx="1538640" cy="523080"/>
+            <a:ext cx="1538280" cy="522720"/>
           </a:xfrm>
           <a:prstGeom prst="rect">
             <a:avLst/>
@@ -2025,18 +3478,18 @@
       </p:sp>
       <p:sp>
         <p:nvSpPr>
-          <p:cNvPr id="10" name="PlaceHolder 4"/>
+          <p:cNvPr id="25" name="PlaceHolder 4"/>
           <p:cNvSpPr>
             <a:spLocks noGrp="1"/>
           </p:cNvSpPr>
           <p:nvPr>
-            <p:ph type="ftr" idx="5"/>
+            <p:ph type="ftr" idx="14"/>
           </p:nvPr>
         </p:nvSpPr>
         <p:spPr>
           <a:xfrm>
             <a:off x="2271600" y="9181440"/>
-            <a:ext cx="2310120" cy="523080"/>
+            <a:ext cx="2309760" cy="522720"/>
           </a:xfrm>
           <a:prstGeom prst="rect">
             <a:avLst/>
@@ -2103,18 +3556,18 @@
       </p:sp>
       <p:sp>
         <p:nvSpPr>
-          <p:cNvPr id="11" name="PlaceHolder 5"/>
+          <p:cNvPr id="26" name="PlaceHolder 5"/>
           <p:cNvSpPr>
             <a:spLocks noGrp="1"/>
           </p:cNvSpPr>
           <p:nvPr>
-            <p:ph type="sldNum" idx="6"/>
+            <p:ph type="sldNum" idx="15"/>
           </p:nvPr>
         </p:nvSpPr>
         <p:spPr>
           <a:xfrm>
             <a:off x="4843440" y="9181440"/>
-            <a:ext cx="1538640" cy="523080"/>
+            <a:ext cx="1538280" cy="522720"/>
           </a:xfrm>
           <a:prstGeom prst="rect">
             <a:avLst/>
@@ -2159,7 +3612,7 @@
                 <a:tab algn="l" pos="0"/>
               </a:tabLst>
             </a:pPr>
-            <a:fld id="{01C42930-FB52-4B38-9F81-7863946BF99E}" type="slidenum">
+            <a:fld id="{23786F5E-A1A1-4418-A8F6-D41872DF00FF}" type="slidenum">
               <a:rPr lang="de-DE" sz="900" b="0" u="none" strike="noStrike">
                 <a:solidFill>
                   <a:schemeClr val="dk1">
@@ -2188,7 +3641,7 @@
 </p:sldLayout>
 </file>
 
-<file path=ppt/slideLayouts/slideLayout3.xml><?xml version="1.0" encoding="utf-8"?>
+<file path=ppt/slideLayouts/slideLayout6.xml><?xml version="1.0" encoding="utf-8"?>
 <p:sldLayout xmlns:a="http://schemas.openxmlformats.org/drawingml/2006/main" xmlns:p="http://schemas.openxmlformats.org/presentationml/2006/main" xmlns:r="http://schemas.openxmlformats.org/officeDocument/2006/relationships" xmlns:p14="http://schemas.microsoft.com/office/powerpoint/2010/main" xmlns:p15="http://schemas.microsoft.com/office/powerpoint/2012/main" xmlns:mc="http://schemas.openxmlformats.org/markup-compatibility/2006" type="vertTitleAndTx" preserve="1">
   <p:cSld name="Vertikaler Titel und Text">
     <p:bg>
@@ -2214,7 +3667,7 @@
       </p:grpSpPr>
       <p:sp>
         <p:nvSpPr>
-          <p:cNvPr id="12" name="PlaceHolder 1"/>
+          <p:cNvPr id="27" name="PlaceHolder 1"/>
           <p:cNvSpPr>
             <a:spLocks noGrp="1"/>
           </p:cNvSpPr>
@@ -2225,7 +3678,7 @@
         <p:spPr>
           <a:xfrm>
             <a:off x="4907880" y="527400"/>
-            <a:ext cx="1474560" cy="8390520"/>
+            <a:ext cx="1474200" cy="8390160"/>
           </a:xfrm>
           <a:prstGeom prst="rect">
             <a:avLst/>
@@ -2273,7 +3726,7 @@
       </p:sp>
       <p:sp>
         <p:nvSpPr>
-          <p:cNvPr id="13" name="PlaceHolder 2"/>
+          <p:cNvPr id="28" name="PlaceHolder 2"/>
           <p:cNvSpPr>
             <a:spLocks noGrp="1"/>
           </p:cNvSpPr>
@@ -2284,7 +3737,7 @@
         <p:spPr>
           <a:xfrm>
             <a:off x="471600" y="527400"/>
-            <a:ext cx="4346280" cy="8390520"/>
+            <a:ext cx="4345920" cy="8390160"/>
           </a:xfrm>
           <a:prstGeom prst="rect">
             <a:avLst/>
@@ -2472,18 +3925,18 @@
       </p:sp>
       <p:sp>
         <p:nvSpPr>
-          <p:cNvPr id="14" name="PlaceHolder 3"/>
+          <p:cNvPr id="29" name="PlaceHolder 3"/>
           <p:cNvSpPr>
             <a:spLocks noGrp="1"/>
           </p:cNvSpPr>
           <p:nvPr>
-            <p:ph type="dt" idx="7"/>
+            <p:ph type="dt" idx="16"/>
           </p:nvPr>
         </p:nvSpPr>
         <p:spPr>
           <a:xfrm>
             <a:off x="471600" y="9181440"/>
-            <a:ext cx="1538640" cy="523080"/>
+            <a:ext cx="1538280" cy="522720"/>
           </a:xfrm>
           <a:prstGeom prst="rect">
             <a:avLst/>
@@ -2554,18 +4007,18 @@
       </p:sp>
       <p:sp>
         <p:nvSpPr>
-          <p:cNvPr id="15" name="PlaceHolder 4"/>
+          <p:cNvPr id="30" name="PlaceHolder 4"/>
           <p:cNvSpPr>
             <a:spLocks noGrp="1"/>
           </p:cNvSpPr>
           <p:nvPr>
-            <p:ph type="ftr" idx="8"/>
+            <p:ph type="ftr" idx="17"/>
           </p:nvPr>
         </p:nvSpPr>
         <p:spPr>
           <a:xfrm>
             <a:off x="2271600" y="9181440"/>
-            <a:ext cx="2310120" cy="523080"/>
+            <a:ext cx="2309760" cy="522720"/>
           </a:xfrm>
           <a:prstGeom prst="rect">
             <a:avLst/>
@@ -2632,18 +4085,18 @@
       </p:sp>
       <p:sp>
         <p:nvSpPr>
-          <p:cNvPr id="16" name="PlaceHolder 5"/>
+          <p:cNvPr id="31" name="PlaceHolder 5"/>
           <p:cNvSpPr>
             <a:spLocks noGrp="1"/>
           </p:cNvSpPr>
           <p:nvPr>
-            <p:ph type="sldNum" idx="9"/>
+            <p:ph type="sldNum" idx="18"/>
           </p:nvPr>
         </p:nvSpPr>
         <p:spPr>
           <a:xfrm>
             <a:off x="4843440" y="9181440"/>
-            <a:ext cx="1538640" cy="523080"/>
+            <a:ext cx="1538280" cy="522720"/>
           </a:xfrm>
           <a:prstGeom prst="rect">
             <a:avLst/>
@@ -2688,7 +4141,7 @@
                 <a:tab algn="l" pos="0"/>
               </a:tabLst>
             </a:pPr>
-            <a:fld id="{D20B76B4-659E-4BEC-988D-875A211C9BC2}" type="slidenum">
+            <a:fld id="{FF0B0B0A-84FB-4AA2-BDCA-DBC3E32D69AE}" type="slidenum">
               <a:rPr lang="de-DE" sz="900" b="0" u="none" strike="noStrike">
                 <a:solidFill>
                   <a:schemeClr val="dk1">
@@ -2717,7 +4170,7 @@
 </p:sldLayout>
 </file>
 
-<file path=ppt/slideLayouts/slideLayout4.xml><?xml version="1.0" encoding="utf-8"?>
+<file path=ppt/slideLayouts/slideLayout7.xml><?xml version="1.0" encoding="utf-8"?>
 <p:sldLayout xmlns:a="http://schemas.openxmlformats.org/drawingml/2006/main" xmlns:p="http://schemas.openxmlformats.org/presentationml/2006/main" xmlns:r="http://schemas.openxmlformats.org/officeDocument/2006/relationships" xmlns:p14="http://schemas.microsoft.com/office/powerpoint/2010/main" xmlns:p15="http://schemas.microsoft.com/office/powerpoint/2012/main" xmlns:mc="http://schemas.openxmlformats.org/markup-compatibility/2006" type="obj" preserve="1">
   <p:cSld name="Titel und Inhalt">
     <p:bg>
@@ -2743,7 +4196,7 @@
       </p:grpSpPr>
       <p:sp>
         <p:nvSpPr>
-          <p:cNvPr id="17" name="PlaceHolder 1"/>
+          <p:cNvPr id="32" name="PlaceHolder 1"/>
           <p:cNvSpPr>
             <a:spLocks noGrp="1"/>
           </p:cNvSpPr>
@@ -2754,7 +4207,7 @@
         <p:spPr>
           <a:xfrm>
             <a:off x="471600" y="527400"/>
-            <a:ext cx="5910840" cy="1910520"/>
+            <a:ext cx="5910480" cy="1910160"/>
           </a:xfrm>
           <a:prstGeom prst="rect">
             <a:avLst/>
@@ -2802,7 +4255,7 @@
       </p:sp>
       <p:sp>
         <p:nvSpPr>
-          <p:cNvPr id="18" name="PlaceHolder 2"/>
+          <p:cNvPr id="33" name="PlaceHolder 2"/>
           <p:cNvSpPr>
             <a:spLocks noGrp="1"/>
           </p:cNvSpPr>
@@ -2813,7 +4266,7 @@
         <p:spPr>
           <a:xfrm>
             <a:off x="471600" y="2637000"/>
-            <a:ext cx="5910840" cy="6280920"/>
+            <a:ext cx="5910480" cy="6280560"/>
           </a:xfrm>
           <a:prstGeom prst="rect">
             <a:avLst/>
@@ -3001,18 +4454,18 @@
       </p:sp>
       <p:sp>
         <p:nvSpPr>
-          <p:cNvPr id="19" name="PlaceHolder 3"/>
+          <p:cNvPr id="34" name="PlaceHolder 3"/>
           <p:cNvSpPr>
             <a:spLocks noGrp="1"/>
           </p:cNvSpPr>
           <p:nvPr>
-            <p:ph type="dt" idx="10"/>
+            <p:ph type="dt" idx="19"/>
           </p:nvPr>
         </p:nvSpPr>
         <p:spPr>
           <a:xfrm>
             <a:off x="471600" y="9181440"/>
-            <a:ext cx="1538640" cy="523080"/>
+            <a:ext cx="1538280" cy="522720"/>
           </a:xfrm>
           <a:prstGeom prst="rect">
             <a:avLst/>
@@ -3083,18 +4536,18 @@
       </p:sp>
       <p:sp>
         <p:nvSpPr>
-          <p:cNvPr id="20" name="PlaceHolder 4"/>
+          <p:cNvPr id="35" name="PlaceHolder 4"/>
           <p:cNvSpPr>
             <a:spLocks noGrp="1"/>
           </p:cNvSpPr>
           <p:nvPr>
-            <p:ph type="ftr" idx="11"/>
+            <p:ph type="ftr" idx="20"/>
           </p:nvPr>
         </p:nvSpPr>
         <p:spPr>
           <a:xfrm>
             <a:off x="2271600" y="9181440"/>
-            <a:ext cx="2310120" cy="523080"/>
+            <a:ext cx="2309760" cy="522720"/>
           </a:xfrm>
           <a:prstGeom prst="rect">
             <a:avLst/>
@@ -3161,18 +4614,18 @@
       </p:sp>
       <p:sp>
         <p:nvSpPr>
-          <p:cNvPr id="21" name="PlaceHolder 5"/>
+          <p:cNvPr id="36" name="PlaceHolder 5"/>
           <p:cNvSpPr>
             <a:spLocks noGrp="1"/>
           </p:cNvSpPr>
           <p:nvPr>
-            <p:ph type="sldNum" idx="12"/>
+            <p:ph type="sldNum" idx="21"/>
           </p:nvPr>
         </p:nvSpPr>
         <p:spPr>
           <a:xfrm>
             <a:off x="4843440" y="9181440"/>
-            <a:ext cx="1538640" cy="523080"/>
+            <a:ext cx="1538280" cy="522720"/>
           </a:xfrm>
           <a:prstGeom prst="rect">
             <a:avLst/>
@@ -3217,7 +4670,7 @@
                 <a:tab algn="l" pos="0"/>
               </a:tabLst>
             </a:pPr>
-            <a:fld id="{F9F1470B-C548-4495-B4F8-BDF917C0264F}" type="slidenum">
+            <a:fld id="{7D7C5006-A67B-495F-B711-29E279E2A8D8}" type="slidenum">
               <a:rPr lang="de-DE" sz="900" b="0" u="none" strike="noStrike">
                 <a:solidFill>
                   <a:schemeClr val="dk1">
@@ -3246,7 +4699,7 @@
 </p:sldLayout>
 </file>
 
-<file path=ppt/slideLayouts/slideLayout5.xml><?xml version="1.0" encoding="utf-8"?>
+<file path=ppt/slideLayouts/slideLayout8.xml><?xml version="1.0" encoding="utf-8"?>
 <p:sldLayout xmlns:a="http://schemas.openxmlformats.org/drawingml/2006/main" xmlns:p="http://schemas.openxmlformats.org/presentationml/2006/main" xmlns:r="http://schemas.openxmlformats.org/officeDocument/2006/relationships" xmlns:p14="http://schemas.microsoft.com/office/powerpoint/2010/main" xmlns:p15="http://schemas.microsoft.com/office/powerpoint/2012/main" xmlns:mc="http://schemas.openxmlformats.org/markup-compatibility/2006" type="blank" preserve="1">
   <p:cSld name="Abschnitts-&#10;überschrift">
     <p:bg>
@@ -3272,7 +4725,7 @@
       </p:grpSpPr>
       <p:sp>
         <p:nvSpPr>
-          <p:cNvPr id="22" name="PlaceHolder 1"/>
+          <p:cNvPr id="37" name="PlaceHolder 1"/>
           <p:cNvSpPr>
             <a:spLocks noGrp="1"/>
           </p:cNvSpPr>
@@ -3283,7 +4736,7 @@
         <p:spPr>
           <a:xfrm>
             <a:off x="468000" y="2469600"/>
-            <a:ext cx="5910840" cy="4116240"/>
+            <a:ext cx="5910480" cy="4115880"/>
           </a:xfrm>
           <a:prstGeom prst="rect">
             <a:avLst/>
@@ -3331,7 +4784,7 @@
       </p:sp>
       <p:sp>
         <p:nvSpPr>
-          <p:cNvPr id="23" name="PlaceHolder 2"/>
+          <p:cNvPr id="38" name="PlaceHolder 2"/>
           <p:cNvSpPr>
             <a:spLocks noGrp="1"/>
           </p:cNvSpPr>
@@ -3342,7 +4795,7 @@
         <p:spPr>
           <a:xfrm>
             <a:off x="468000" y="6629400"/>
-            <a:ext cx="5910840" cy="2162520"/>
+            <a:ext cx="5910480" cy="2162160"/>
           </a:xfrm>
           <a:prstGeom prst="rect">
             <a:avLst/>
@@ -3393,18 +4846,18 @@
       </p:sp>
       <p:sp>
         <p:nvSpPr>
-          <p:cNvPr id="24" name="PlaceHolder 3"/>
+          <p:cNvPr id="39" name="PlaceHolder 3"/>
           <p:cNvSpPr>
             <a:spLocks noGrp="1"/>
           </p:cNvSpPr>
           <p:nvPr>
-            <p:ph type="dt" idx="13"/>
+            <p:ph type="dt" idx="22"/>
           </p:nvPr>
         </p:nvSpPr>
         <p:spPr>
           <a:xfrm>
             <a:off x="471600" y="9181440"/>
-            <a:ext cx="1538640" cy="523080"/>
+            <a:ext cx="1538280" cy="522720"/>
           </a:xfrm>
           <a:prstGeom prst="rect">
             <a:avLst/>
@@ -3475,18 +4928,18 @@
       </p:sp>
       <p:sp>
         <p:nvSpPr>
-          <p:cNvPr id="25" name="PlaceHolder 4"/>
+          <p:cNvPr id="40" name="PlaceHolder 4"/>
           <p:cNvSpPr>
             <a:spLocks noGrp="1"/>
           </p:cNvSpPr>
           <p:nvPr>
-            <p:ph type="ftr" idx="14"/>
+            <p:ph type="ftr" idx="23"/>
           </p:nvPr>
         </p:nvSpPr>
         <p:spPr>
           <a:xfrm>
             <a:off x="2271600" y="9181440"/>
-            <a:ext cx="2310120" cy="523080"/>
+            <a:ext cx="2309760" cy="522720"/>
           </a:xfrm>
           <a:prstGeom prst="rect">
             <a:avLst/>
@@ -3553,18 +5006,18 @@
       </p:sp>
       <p:sp>
         <p:nvSpPr>
-          <p:cNvPr id="26" name="PlaceHolder 5"/>
+          <p:cNvPr id="41" name="PlaceHolder 5"/>
           <p:cNvSpPr>
             <a:spLocks noGrp="1"/>
           </p:cNvSpPr>
           <p:nvPr>
-            <p:ph type="sldNum" idx="15"/>
+            <p:ph type="sldNum" idx="24"/>
           </p:nvPr>
         </p:nvSpPr>
         <p:spPr>
           <a:xfrm>
             <a:off x="4843440" y="9181440"/>
-            <a:ext cx="1538640" cy="523080"/>
+            <a:ext cx="1538280" cy="522720"/>
           </a:xfrm>
           <a:prstGeom prst="rect">
             <a:avLst/>
@@ -3609,7 +5062,7 @@
                 <a:tab algn="l" pos="0"/>
               </a:tabLst>
             </a:pPr>
-            <a:fld id="{04D2CCE1-DD5F-4F2B-A7BA-987BF3E302B2}" type="slidenum">
+            <a:fld id="{BF4E6299-5FEE-4A58-983A-32C8E34CD98B}" type="slidenum">
               <a:rPr lang="de-DE" sz="900" b="0" u="none" strike="noStrike">
                 <a:solidFill>
                   <a:schemeClr val="dk1">
@@ -3638,7 +5091,7 @@
 </p:sldLayout>
 </file>
 
-<file path=ppt/slideLayouts/slideLayout6.xml><?xml version="1.0" encoding="utf-8"?>
+<file path=ppt/slideLayouts/slideLayout9.xml><?xml version="1.0" encoding="utf-8"?>
 <p:sldLayout xmlns:a="http://schemas.openxmlformats.org/drawingml/2006/main" xmlns:p="http://schemas.openxmlformats.org/presentationml/2006/main" xmlns:r="http://schemas.openxmlformats.org/officeDocument/2006/relationships" xmlns:p14="http://schemas.microsoft.com/office/powerpoint/2010/main" xmlns:p15="http://schemas.microsoft.com/office/powerpoint/2012/main" xmlns:mc="http://schemas.openxmlformats.org/markup-compatibility/2006" type="twoObj" preserve="1">
   <p:cSld name="Zwei Inhalte">
     <p:bg>
@@ -3664,7 +5117,7 @@
       </p:grpSpPr>
       <p:sp>
         <p:nvSpPr>
-          <p:cNvPr id="27" name="PlaceHolder 1"/>
+          <p:cNvPr id="42" name="PlaceHolder 1"/>
           <p:cNvSpPr>
             <a:spLocks noGrp="1"/>
           </p:cNvSpPr>
@@ -3675,7 +5128,7 @@
         <p:spPr>
           <a:xfrm>
             <a:off x="471600" y="527400"/>
-            <a:ext cx="5910840" cy="1910520"/>
+            <a:ext cx="5910480" cy="1910160"/>
           </a:xfrm>
           <a:prstGeom prst="rect">
             <a:avLst/>
@@ -3723,7 +5176,7 @@
       </p:sp>
       <p:sp>
         <p:nvSpPr>
-          <p:cNvPr id="28" name="PlaceHolder 2"/>
+          <p:cNvPr id="43" name="PlaceHolder 2"/>
           <p:cNvSpPr>
             <a:spLocks noGrp="1"/>
           </p:cNvSpPr>
@@ -3734,7 +5187,7 @@
         <p:spPr>
           <a:xfrm>
             <a:off x="471600" y="2637000"/>
-            <a:ext cx="2910240" cy="6280920"/>
+            <a:ext cx="2909880" cy="6280560"/>
           </a:xfrm>
           <a:prstGeom prst="rect">
             <a:avLst/>
@@ -3922,7 +5375,7 @@
       </p:sp>
       <p:sp>
         <p:nvSpPr>
-          <p:cNvPr id="29" name="PlaceHolder 3"/>
+          <p:cNvPr id="44" name="PlaceHolder 3"/>
           <p:cNvSpPr>
             <a:spLocks noGrp="1"/>
           </p:cNvSpPr>
@@ -3933,7 +5386,7 @@
         <p:spPr>
           <a:xfrm>
             <a:off x="3471840" y="2637000"/>
-            <a:ext cx="2910240" cy="6280920"/>
+            <a:ext cx="2909880" cy="6280560"/>
           </a:xfrm>
           <a:prstGeom prst="rect">
             <a:avLst/>
@@ -4121,1460 +5574,7 @@
       </p:sp>
       <p:sp>
         <p:nvSpPr>
-          <p:cNvPr id="30" name="PlaceHolder 4"/>
-          <p:cNvSpPr>
-            <a:spLocks noGrp="1"/>
-          </p:cNvSpPr>
-          <p:nvPr>
-            <p:ph type="dt" idx="16"/>
-          </p:nvPr>
-        </p:nvSpPr>
-        <p:spPr>
-          <a:xfrm>
-            <a:off x="471600" y="9181440"/>
-            <a:ext cx="1538640" cy="523080"/>
-          </a:xfrm>
-          <a:prstGeom prst="rect">
-            <a:avLst/>
-          </a:prstGeom>
-          <a:noFill/>
-          <a:ln w="0">
-            <a:noFill/>
-          </a:ln>
-        </p:spPr>
-        <p:txBody>
-          <a:bodyPr lIns="91440" rIns="91440" tIns="45720" bIns="45720" anchor="ctr">
-            <a:noAutofit/>
-          </a:bodyPr>
-          <a:lstStyle>
-            <a:lvl1pPr indent="0" defTabSz="457200">
-              <a:lnSpc>
-                <a:spcPct val="100000"/>
-              </a:lnSpc>
-              <a:buNone/>
-              <a:tabLst>
-                <a:tab algn="l" pos="0"/>
-              </a:tabLst>
-              <a:defRPr lang="de-DE" sz="900" b="0" u="none" strike="noStrike">
-                <a:solidFill>
-                  <a:schemeClr val="dk1">
-                    <a:tint val="75000"/>
-                  </a:schemeClr>
-                </a:solidFill>
-                <a:effectLst/>
-                <a:uFillTx/>
-                <a:latin typeface="Calibri"/>
-              </a:defRPr>
-            </a:lvl1pPr>
-          </a:lstStyle>
-          <a:p>
-            <a:pPr indent="0" defTabSz="457200">
-              <a:lnSpc>
-                <a:spcPct val="100000"/>
-              </a:lnSpc>
-              <a:buNone/>
-              <a:tabLst>
-                <a:tab algn="l" pos="0"/>
-              </a:tabLst>
-            </a:pPr>
-            <a:r>
-              <a:rPr lang="de-DE" sz="900" b="0" u="none" strike="noStrike">
-                <a:solidFill>
-                  <a:schemeClr val="dk1">
-                    <a:tint val="75000"/>
-                  </a:schemeClr>
-                </a:solidFill>
-                <a:effectLst/>
-                <a:uFillTx/>
-                <a:latin typeface="Calibri"/>
-              </a:rPr>
-              <a:t>&lt;Datum/Uhrzeit&gt;</a:t>
-            </a:r>
-            <a:endParaRPr lang="de-DE" sz="900" b="0" u="none" strike="noStrike">
-              <a:solidFill>
-                <a:srgbClr val="000000"/>
-              </a:solidFill>
-              <a:effectLst/>
-              <a:uFillTx/>
-              <a:latin typeface="Times New Roman"/>
-            </a:endParaRPr>
-          </a:p>
-        </p:txBody>
-      </p:sp>
-      <p:sp>
-        <p:nvSpPr>
-          <p:cNvPr id="31" name="PlaceHolder 5"/>
-          <p:cNvSpPr>
-            <a:spLocks noGrp="1"/>
-          </p:cNvSpPr>
-          <p:nvPr>
-            <p:ph type="ftr" idx="17"/>
-          </p:nvPr>
-        </p:nvSpPr>
-        <p:spPr>
-          <a:xfrm>
-            <a:off x="2271600" y="9181440"/>
-            <a:ext cx="2310120" cy="523080"/>
-          </a:xfrm>
-          <a:prstGeom prst="rect">
-            <a:avLst/>
-          </a:prstGeom>
-          <a:noFill/>
-          <a:ln w="0">
-            <a:noFill/>
-          </a:ln>
-        </p:spPr>
-        <p:txBody>
-          <a:bodyPr lIns="91440" rIns="91440" tIns="45720" bIns="45720" anchor="ctr">
-            <a:noAutofit/>
-          </a:bodyPr>
-          <a:lstStyle>
-            <a:lvl1pPr indent="0" algn="ctr">
-              <a:lnSpc>
-                <a:spcPct val="100000"/>
-              </a:lnSpc>
-              <a:buNone/>
-              <a:tabLst>
-                <a:tab algn="l" pos="0"/>
-              </a:tabLst>
-              <a:defRPr lang="de-DE" sz="1400" b="0" u="none" strike="noStrike">
-                <a:solidFill>
-                  <a:srgbClr val="000000"/>
-                </a:solidFill>
-                <a:effectLst/>
-                <a:uFillTx/>
-                <a:latin typeface="Times New Roman"/>
-              </a:defRPr>
-            </a:lvl1pPr>
-          </a:lstStyle>
-          <a:p>
-            <a:pPr indent="0" algn="ctr">
-              <a:lnSpc>
-                <a:spcPct val="100000"/>
-              </a:lnSpc>
-              <a:buNone/>
-              <a:tabLst>
-                <a:tab algn="l" pos="0"/>
-              </a:tabLst>
-            </a:pPr>
-            <a:r>
-              <a:rPr lang="de-DE" sz="1400" b="0" u="none" strike="noStrike">
-                <a:solidFill>
-                  <a:srgbClr val="000000"/>
-                </a:solidFill>
-                <a:effectLst/>
-                <a:uFillTx/>
-                <a:latin typeface="Times New Roman"/>
-              </a:rPr>
-              <a:t>&lt;Fußzeile&gt;</a:t>
-            </a:r>
-            <a:endParaRPr lang="de-DE" sz="1400" b="0" u="none" strike="noStrike">
-              <a:solidFill>
-                <a:srgbClr val="000000"/>
-              </a:solidFill>
-              <a:effectLst/>
-              <a:uFillTx/>
-              <a:latin typeface="Times New Roman"/>
-            </a:endParaRPr>
-          </a:p>
-        </p:txBody>
-      </p:sp>
-      <p:sp>
-        <p:nvSpPr>
-          <p:cNvPr id="32" name="PlaceHolder 6"/>
-          <p:cNvSpPr>
-            <a:spLocks noGrp="1"/>
-          </p:cNvSpPr>
-          <p:nvPr>
-            <p:ph type="sldNum" idx="18"/>
-          </p:nvPr>
-        </p:nvSpPr>
-        <p:spPr>
-          <a:xfrm>
-            <a:off x="4843440" y="9181440"/>
-            <a:ext cx="1538640" cy="523080"/>
-          </a:xfrm>
-          <a:prstGeom prst="rect">
-            <a:avLst/>
-          </a:prstGeom>
-          <a:noFill/>
-          <a:ln w="0">
-            <a:noFill/>
-          </a:ln>
-        </p:spPr>
-        <p:txBody>
-          <a:bodyPr lIns="91440" rIns="91440" tIns="45720" bIns="45720" anchor="ctr">
-            <a:noAutofit/>
-          </a:bodyPr>
-          <a:lstStyle>
-            <a:lvl1pPr indent="0" algn="r" defTabSz="457200">
-              <a:lnSpc>
-                <a:spcPct val="100000"/>
-              </a:lnSpc>
-              <a:buNone/>
-              <a:tabLst>
-                <a:tab algn="l" pos="0"/>
-              </a:tabLst>
-              <a:defRPr lang="de-DE" sz="900" b="0" u="none" strike="noStrike">
-                <a:solidFill>
-                  <a:schemeClr val="dk1">
-                    <a:tint val="75000"/>
-                  </a:schemeClr>
-                </a:solidFill>
-                <a:effectLst/>
-                <a:uFillTx/>
-                <a:latin typeface="Calibri"/>
-              </a:defRPr>
-            </a:lvl1pPr>
-          </a:lstStyle>
-          <a:p>
-            <a:pPr indent="0" algn="r" defTabSz="457200">
-              <a:lnSpc>
-                <a:spcPct val="100000"/>
-              </a:lnSpc>
-              <a:buNone/>
-              <a:tabLst>
-                <a:tab algn="l" pos="0"/>
-              </a:tabLst>
-            </a:pPr>
-            <a:fld id="{22D98F21-9621-4A18-A75C-CFCFF4983928}" type="slidenum">
-              <a:rPr lang="de-DE" sz="900" b="0" u="none" strike="noStrike">
-                <a:solidFill>
-                  <a:schemeClr val="dk1">
-                    <a:tint val="75000"/>
-                  </a:schemeClr>
-                </a:solidFill>
-                <a:effectLst/>
-                <a:uFillTx/>
-                <a:latin typeface="Calibri"/>
-              </a:rPr>
-              <a:t>&lt;Foliennummer&gt;</a:t>
-            </a:fld>
-            <a:endParaRPr lang="de-DE" sz="900" b="0" u="none" strike="noStrike">
-              <a:solidFill>
-                <a:srgbClr val="000000"/>
-              </a:solidFill>
-              <a:effectLst/>
-              <a:uFillTx/>
-              <a:latin typeface="Times New Roman"/>
-            </a:endParaRPr>
-          </a:p>
-        </p:txBody>
-      </p:sp>
-    </p:spTree>
-  </p:cSld>
-</p:sldLayout>
-</file>
-
-<file path=ppt/slideLayouts/slideLayout7.xml><?xml version="1.0" encoding="utf-8"?>
-<p:sldLayout xmlns:a="http://schemas.openxmlformats.org/drawingml/2006/main" xmlns:p="http://schemas.openxmlformats.org/presentationml/2006/main" xmlns:r="http://schemas.openxmlformats.org/officeDocument/2006/relationships" xmlns:p14="http://schemas.microsoft.com/office/powerpoint/2010/main" xmlns:p15="http://schemas.microsoft.com/office/powerpoint/2012/main" xmlns:mc="http://schemas.openxmlformats.org/markup-compatibility/2006" type="blank" preserve="1">
-  <p:cSld name="Vergleich">
-    <p:bg>
-      <p:bgPr>
-        <a:solidFill>
-          <a:srgbClr val="ffffff"/>
-        </a:solidFill>
-      </p:bgPr>
-    </p:bg>
-    <p:spTree>
-      <p:nvGrpSpPr>
-        <p:cNvPr id="1" name=""/>
-        <p:cNvGrpSpPr/>
-        <p:nvPr/>
-      </p:nvGrpSpPr>
-      <p:grpSpPr>
-        <a:xfrm>
-          <a:off x="0" y="0"/>
-          <a:ext cx="0" cy="0"/>
-          <a:chOff x="0" y="0"/>
-          <a:chExt cx="0" cy="0"/>
-        </a:xfrm>
-      </p:grpSpPr>
-      <p:sp>
-        <p:nvSpPr>
-          <p:cNvPr id="33" name="PlaceHolder 1"/>
-          <p:cNvSpPr>
-            <a:spLocks noGrp="1"/>
-          </p:cNvSpPr>
-          <p:nvPr>
-            <p:ph type="title"/>
-          </p:nvPr>
-        </p:nvSpPr>
-        <p:spPr>
-          <a:xfrm>
-            <a:off x="472320" y="527400"/>
-            <a:ext cx="5910840" cy="1910520"/>
-          </a:xfrm>
-          <a:prstGeom prst="rect">
-            <a:avLst/>
-          </a:prstGeom>
-          <a:noFill/>
-          <a:ln w="0">
-            <a:noFill/>
-          </a:ln>
-        </p:spPr>
-        <p:txBody>
-          <a:bodyPr lIns="91440" rIns="91440" tIns="45720" bIns="45720" anchor="ctr">
-            <a:noAutofit/>
-          </a:bodyPr>
-          <a:p>
-            <a:pPr indent="0" defTabSz="685800">
-              <a:lnSpc>
-                <a:spcPct val="90000"/>
-              </a:lnSpc>
-              <a:buNone/>
-              <a:tabLst>
-                <a:tab algn="l" pos="0"/>
-              </a:tabLst>
-            </a:pPr>
-            <a:r>
-              <a:rPr lang="de-DE" sz="3300" b="0" u="none" strike="noStrike">
-                <a:solidFill>
-                  <a:schemeClr val="dk1"/>
-                </a:solidFill>
-                <a:effectLst/>
-                <a:uFillTx/>
-                <a:latin typeface="Calibri Light"/>
-              </a:rPr>
-              <a:t>Mastertitelformat bearbeiten</a:t>
-            </a:r>
-            <a:endParaRPr lang="de-DE" sz="3300" b="0" u="none" strike="noStrike">
-              <a:solidFill>
-                <a:srgbClr val="000000"/>
-              </a:solidFill>
-              <a:effectLst/>
-              <a:uFillTx/>
-              <a:latin typeface="Arial"/>
-            </a:endParaRPr>
-          </a:p>
-        </p:txBody>
-      </p:sp>
-      <p:sp>
-        <p:nvSpPr>
-          <p:cNvPr id="34" name="PlaceHolder 2"/>
-          <p:cNvSpPr>
-            <a:spLocks noGrp="1"/>
-          </p:cNvSpPr>
-          <p:nvPr>
-            <p:ph type="body"/>
-          </p:nvPr>
-        </p:nvSpPr>
-        <p:spPr>
-          <a:xfrm>
-            <a:off x="472320" y="2428200"/>
-            <a:ext cx="2896920" cy="1185840"/>
-          </a:xfrm>
-          <a:prstGeom prst="rect">
-            <a:avLst/>
-          </a:prstGeom>
-          <a:noFill/>
-          <a:ln w="0">
-            <a:noFill/>
-          </a:ln>
-        </p:spPr>
-        <p:txBody>
-          <a:bodyPr lIns="91440" rIns="91440" tIns="45720" bIns="45720" anchor="b">
-            <a:noAutofit/>
-          </a:bodyPr>
-          <a:p>
-            <a:pPr indent="0" defTabSz="685800">
-              <a:lnSpc>
-                <a:spcPct val="90000"/>
-              </a:lnSpc>
-              <a:spcBef>
-                <a:spcPts val="751"/>
-              </a:spcBef>
-              <a:buNone/>
-              <a:tabLst>
-                <a:tab algn="l" pos="0"/>
-              </a:tabLst>
-            </a:pPr>
-            <a:r>
-              <a:rPr lang="de-DE" sz="1800" b="1" u="none" strike="noStrike">
-                <a:solidFill>
-                  <a:schemeClr val="dk1"/>
-                </a:solidFill>
-                <a:effectLst/>
-                <a:uFillTx/>
-                <a:latin typeface="Calibri"/>
-              </a:rPr>
-              <a:t>Mastertextformat bearbeiten</a:t>
-            </a:r>
-            <a:endParaRPr lang="de-DE" sz="1800" b="0" u="none" strike="noStrike">
-              <a:solidFill>
-                <a:srgbClr val="000000"/>
-              </a:solidFill>
-              <a:effectLst/>
-              <a:uFillTx/>
-              <a:latin typeface="Arial"/>
-            </a:endParaRPr>
-          </a:p>
-        </p:txBody>
-      </p:sp>
-      <p:sp>
-        <p:nvSpPr>
-          <p:cNvPr id="35" name="PlaceHolder 3"/>
-          <p:cNvSpPr>
-            <a:spLocks noGrp="1"/>
-          </p:cNvSpPr>
-          <p:nvPr>
-            <p:ph type="body"/>
-          </p:nvPr>
-        </p:nvSpPr>
-        <p:spPr>
-          <a:xfrm>
-            <a:off x="472320" y="3618360"/>
-            <a:ext cx="2896920" cy="5317920"/>
-          </a:xfrm>
-          <a:prstGeom prst="rect">
-            <a:avLst/>
-          </a:prstGeom>
-          <a:noFill/>
-          <a:ln w="0">
-            <a:noFill/>
-          </a:ln>
-        </p:spPr>
-        <p:txBody>
-          <a:bodyPr lIns="91440" rIns="91440" tIns="45720" bIns="45720" anchor="t">
-            <a:noAutofit/>
-          </a:bodyPr>
-          <a:p>
-            <a:pPr marL="171360" indent="-171360" defTabSz="685800">
-              <a:lnSpc>
-                <a:spcPct val="90000"/>
-              </a:lnSpc>
-              <a:spcBef>
-                <a:spcPts val="751"/>
-              </a:spcBef>
-              <a:buClr>
-                <a:srgbClr val="000000"/>
-              </a:buClr>
-              <a:buFont typeface="Arial"/>
-              <a:buChar char="•"/>
-            </a:pPr>
-            <a:r>
-              <a:rPr lang="de-DE" sz="2100" b="0" u="none" strike="noStrike">
-                <a:solidFill>
-                  <a:schemeClr val="dk1"/>
-                </a:solidFill>
-                <a:effectLst/>
-                <a:uFillTx/>
-                <a:latin typeface="Calibri"/>
-              </a:rPr>
-              <a:t>Mastertextformat bearbeiten</a:t>
-            </a:r>
-            <a:endParaRPr lang="de-DE" sz="2100" b="0" u="none" strike="noStrike">
-              <a:solidFill>
-                <a:srgbClr val="000000"/>
-              </a:solidFill>
-              <a:effectLst/>
-              <a:uFillTx/>
-              <a:latin typeface="Arial"/>
-            </a:endParaRPr>
-          </a:p>
-          <a:p>
-            <a:pPr marL="514440" lvl="1" indent="-171360" defTabSz="685800">
-              <a:lnSpc>
-                <a:spcPct val="90000"/>
-              </a:lnSpc>
-              <a:spcBef>
-                <a:spcPts val="374"/>
-              </a:spcBef>
-              <a:buClr>
-                <a:srgbClr val="000000"/>
-              </a:buClr>
-              <a:buFont typeface="Arial"/>
-              <a:buChar char="•"/>
-            </a:pPr>
-            <a:r>
-              <a:rPr lang="de-DE" sz="1800" b="0" u="none" strike="noStrike">
-                <a:solidFill>
-                  <a:schemeClr val="dk1"/>
-                </a:solidFill>
-                <a:effectLst/>
-                <a:uFillTx/>
-                <a:latin typeface="Calibri"/>
-              </a:rPr>
-              <a:t>Zweite Ebene</a:t>
-            </a:r>
-            <a:endParaRPr lang="de-DE" sz="1800" b="0" u="none" strike="noStrike">
-              <a:solidFill>
-                <a:srgbClr val="000000"/>
-              </a:solidFill>
-              <a:effectLst/>
-              <a:uFillTx/>
-              <a:latin typeface="Arial"/>
-            </a:endParaRPr>
-          </a:p>
-          <a:p>
-            <a:pPr marL="857160" lvl="2" indent="-171360" defTabSz="685800">
-              <a:lnSpc>
-                <a:spcPct val="90000"/>
-              </a:lnSpc>
-              <a:spcBef>
-                <a:spcPts val="374"/>
-              </a:spcBef>
-              <a:buClr>
-                <a:srgbClr val="000000"/>
-              </a:buClr>
-              <a:buFont typeface="Arial"/>
-              <a:buChar char="•"/>
-            </a:pPr>
-            <a:r>
-              <a:rPr lang="de-DE" sz="1500" b="0" u="none" strike="noStrike">
-                <a:solidFill>
-                  <a:schemeClr val="dk1"/>
-                </a:solidFill>
-                <a:effectLst/>
-                <a:uFillTx/>
-                <a:latin typeface="Calibri"/>
-              </a:rPr>
-              <a:t>Dritte Ebene</a:t>
-            </a:r>
-            <a:endParaRPr lang="de-DE" sz="1500" b="0" u="none" strike="noStrike">
-              <a:solidFill>
-                <a:srgbClr val="000000"/>
-              </a:solidFill>
-              <a:effectLst/>
-              <a:uFillTx/>
-              <a:latin typeface="Arial"/>
-            </a:endParaRPr>
-          </a:p>
-          <a:p>
-            <a:pPr marL="1200240" lvl="3" indent="-171360" defTabSz="685800">
-              <a:lnSpc>
-                <a:spcPct val="90000"/>
-              </a:lnSpc>
-              <a:spcBef>
-                <a:spcPts val="374"/>
-              </a:spcBef>
-              <a:buClr>
-                <a:srgbClr val="000000"/>
-              </a:buClr>
-              <a:buFont typeface="Arial"/>
-              <a:buChar char="•"/>
-            </a:pPr>
-            <a:r>
-              <a:rPr lang="de-DE" sz="1350" b="0" u="none" strike="noStrike">
-                <a:solidFill>
-                  <a:schemeClr val="dk1"/>
-                </a:solidFill>
-                <a:effectLst/>
-                <a:uFillTx/>
-                <a:latin typeface="Calibri"/>
-              </a:rPr>
-              <a:t>Vierte Ebene</a:t>
-            </a:r>
-            <a:endParaRPr lang="de-DE" sz="1350" b="0" u="none" strike="noStrike">
-              <a:solidFill>
-                <a:srgbClr val="000000"/>
-              </a:solidFill>
-              <a:effectLst/>
-              <a:uFillTx/>
-              <a:latin typeface="Arial"/>
-            </a:endParaRPr>
-          </a:p>
-          <a:p>
-            <a:pPr marL="1542960" lvl="4" indent="-171360" defTabSz="685800">
-              <a:lnSpc>
-                <a:spcPct val="90000"/>
-              </a:lnSpc>
-              <a:spcBef>
-                <a:spcPts val="374"/>
-              </a:spcBef>
-              <a:buClr>
-                <a:srgbClr val="000000"/>
-              </a:buClr>
-              <a:buFont typeface="Arial"/>
-              <a:buChar char="•"/>
-            </a:pPr>
-            <a:r>
-              <a:rPr lang="de-DE" sz="1350" b="0" u="none" strike="noStrike">
-                <a:solidFill>
-                  <a:schemeClr val="dk1"/>
-                </a:solidFill>
-                <a:effectLst/>
-                <a:uFillTx/>
-                <a:latin typeface="Calibri"/>
-              </a:rPr>
-              <a:t>Fünfte Ebene</a:t>
-            </a:r>
-            <a:endParaRPr lang="de-DE" sz="1350" b="0" u="none" strike="noStrike">
-              <a:solidFill>
-                <a:srgbClr val="000000"/>
-              </a:solidFill>
-              <a:effectLst/>
-              <a:uFillTx/>
-              <a:latin typeface="Arial"/>
-            </a:endParaRPr>
-          </a:p>
-        </p:txBody>
-      </p:sp>
-      <p:sp>
-        <p:nvSpPr>
-          <p:cNvPr id="36" name="PlaceHolder 4"/>
-          <p:cNvSpPr>
-            <a:spLocks noGrp="1"/>
-          </p:cNvSpPr>
-          <p:nvPr>
-            <p:ph type="body"/>
-          </p:nvPr>
-        </p:nvSpPr>
-        <p:spPr>
-          <a:xfrm>
-            <a:off x="3471840" y="2428200"/>
-            <a:ext cx="2911320" cy="1185840"/>
-          </a:xfrm>
-          <a:prstGeom prst="rect">
-            <a:avLst/>
-          </a:prstGeom>
-          <a:noFill/>
-          <a:ln w="0">
-            <a:noFill/>
-          </a:ln>
-        </p:spPr>
-        <p:txBody>
-          <a:bodyPr lIns="91440" rIns="91440" tIns="45720" bIns="45720" anchor="b">
-            <a:noAutofit/>
-          </a:bodyPr>
-          <a:p>
-            <a:pPr indent="0" defTabSz="685800">
-              <a:lnSpc>
-                <a:spcPct val="90000"/>
-              </a:lnSpc>
-              <a:spcBef>
-                <a:spcPts val="751"/>
-              </a:spcBef>
-              <a:buNone/>
-              <a:tabLst>
-                <a:tab algn="l" pos="0"/>
-              </a:tabLst>
-            </a:pPr>
-            <a:r>
-              <a:rPr lang="de-DE" sz="1800" b="1" u="none" strike="noStrike">
-                <a:solidFill>
-                  <a:schemeClr val="dk1"/>
-                </a:solidFill>
-                <a:effectLst/>
-                <a:uFillTx/>
-                <a:latin typeface="Calibri"/>
-              </a:rPr>
-              <a:t>Mastertextformat bearbeiten</a:t>
-            </a:r>
-            <a:endParaRPr lang="de-DE" sz="1800" b="0" u="none" strike="noStrike">
-              <a:solidFill>
-                <a:srgbClr val="000000"/>
-              </a:solidFill>
-              <a:effectLst/>
-              <a:uFillTx/>
-              <a:latin typeface="Arial"/>
-            </a:endParaRPr>
-          </a:p>
-        </p:txBody>
-      </p:sp>
-      <p:sp>
-        <p:nvSpPr>
-          <p:cNvPr id="37" name="PlaceHolder 5"/>
-          <p:cNvSpPr>
-            <a:spLocks noGrp="1"/>
-          </p:cNvSpPr>
-          <p:nvPr>
-            <p:ph type="body"/>
-          </p:nvPr>
-        </p:nvSpPr>
-        <p:spPr>
-          <a:xfrm>
-            <a:off x="3471840" y="3618360"/>
-            <a:ext cx="2911320" cy="5317920"/>
-          </a:xfrm>
-          <a:prstGeom prst="rect">
-            <a:avLst/>
-          </a:prstGeom>
-          <a:noFill/>
-          <a:ln w="0">
-            <a:noFill/>
-          </a:ln>
-        </p:spPr>
-        <p:txBody>
-          <a:bodyPr lIns="91440" rIns="91440" tIns="45720" bIns="45720" anchor="t">
-            <a:noAutofit/>
-          </a:bodyPr>
-          <a:p>
-            <a:pPr marL="171360" indent="-171360" defTabSz="685800">
-              <a:lnSpc>
-                <a:spcPct val="90000"/>
-              </a:lnSpc>
-              <a:spcBef>
-                <a:spcPts val="751"/>
-              </a:spcBef>
-              <a:buClr>
-                <a:srgbClr val="000000"/>
-              </a:buClr>
-              <a:buFont typeface="Arial"/>
-              <a:buChar char="•"/>
-            </a:pPr>
-            <a:r>
-              <a:rPr lang="de-DE" sz="2100" b="0" u="none" strike="noStrike">
-                <a:solidFill>
-                  <a:schemeClr val="dk1"/>
-                </a:solidFill>
-                <a:effectLst/>
-                <a:uFillTx/>
-                <a:latin typeface="Calibri"/>
-              </a:rPr>
-              <a:t>Mastertextformat bearbeiten</a:t>
-            </a:r>
-            <a:endParaRPr lang="de-DE" sz="2100" b="0" u="none" strike="noStrike">
-              <a:solidFill>
-                <a:srgbClr val="000000"/>
-              </a:solidFill>
-              <a:effectLst/>
-              <a:uFillTx/>
-              <a:latin typeface="Arial"/>
-            </a:endParaRPr>
-          </a:p>
-          <a:p>
-            <a:pPr marL="514440" lvl="1" indent="-171360" defTabSz="685800">
-              <a:lnSpc>
-                <a:spcPct val="90000"/>
-              </a:lnSpc>
-              <a:spcBef>
-                <a:spcPts val="374"/>
-              </a:spcBef>
-              <a:buClr>
-                <a:srgbClr val="000000"/>
-              </a:buClr>
-              <a:buFont typeface="Arial"/>
-              <a:buChar char="•"/>
-            </a:pPr>
-            <a:r>
-              <a:rPr lang="de-DE" sz="1800" b="0" u="none" strike="noStrike">
-                <a:solidFill>
-                  <a:schemeClr val="dk1"/>
-                </a:solidFill>
-                <a:effectLst/>
-                <a:uFillTx/>
-                <a:latin typeface="Calibri"/>
-              </a:rPr>
-              <a:t>Zweite Ebene</a:t>
-            </a:r>
-            <a:endParaRPr lang="de-DE" sz="1800" b="0" u="none" strike="noStrike">
-              <a:solidFill>
-                <a:srgbClr val="000000"/>
-              </a:solidFill>
-              <a:effectLst/>
-              <a:uFillTx/>
-              <a:latin typeface="Arial"/>
-            </a:endParaRPr>
-          </a:p>
-          <a:p>
-            <a:pPr marL="857160" lvl="2" indent="-171360" defTabSz="685800">
-              <a:lnSpc>
-                <a:spcPct val="90000"/>
-              </a:lnSpc>
-              <a:spcBef>
-                <a:spcPts val="374"/>
-              </a:spcBef>
-              <a:buClr>
-                <a:srgbClr val="000000"/>
-              </a:buClr>
-              <a:buFont typeface="Arial"/>
-              <a:buChar char="•"/>
-            </a:pPr>
-            <a:r>
-              <a:rPr lang="de-DE" sz="1500" b="0" u="none" strike="noStrike">
-                <a:solidFill>
-                  <a:schemeClr val="dk1"/>
-                </a:solidFill>
-                <a:effectLst/>
-                <a:uFillTx/>
-                <a:latin typeface="Calibri"/>
-              </a:rPr>
-              <a:t>Dritte Ebene</a:t>
-            </a:r>
-            <a:endParaRPr lang="de-DE" sz="1500" b="0" u="none" strike="noStrike">
-              <a:solidFill>
-                <a:srgbClr val="000000"/>
-              </a:solidFill>
-              <a:effectLst/>
-              <a:uFillTx/>
-              <a:latin typeface="Arial"/>
-            </a:endParaRPr>
-          </a:p>
-          <a:p>
-            <a:pPr marL="1200240" lvl="3" indent="-171360" defTabSz="685800">
-              <a:lnSpc>
-                <a:spcPct val="90000"/>
-              </a:lnSpc>
-              <a:spcBef>
-                <a:spcPts val="374"/>
-              </a:spcBef>
-              <a:buClr>
-                <a:srgbClr val="000000"/>
-              </a:buClr>
-              <a:buFont typeface="Arial"/>
-              <a:buChar char="•"/>
-            </a:pPr>
-            <a:r>
-              <a:rPr lang="de-DE" sz="1350" b="0" u="none" strike="noStrike">
-                <a:solidFill>
-                  <a:schemeClr val="dk1"/>
-                </a:solidFill>
-                <a:effectLst/>
-                <a:uFillTx/>
-                <a:latin typeface="Calibri"/>
-              </a:rPr>
-              <a:t>Vierte Ebene</a:t>
-            </a:r>
-            <a:endParaRPr lang="de-DE" sz="1350" b="0" u="none" strike="noStrike">
-              <a:solidFill>
-                <a:srgbClr val="000000"/>
-              </a:solidFill>
-              <a:effectLst/>
-              <a:uFillTx/>
-              <a:latin typeface="Arial"/>
-            </a:endParaRPr>
-          </a:p>
-          <a:p>
-            <a:pPr marL="1542960" lvl="4" indent="-171360" defTabSz="685800">
-              <a:lnSpc>
-                <a:spcPct val="90000"/>
-              </a:lnSpc>
-              <a:spcBef>
-                <a:spcPts val="374"/>
-              </a:spcBef>
-              <a:buClr>
-                <a:srgbClr val="000000"/>
-              </a:buClr>
-              <a:buFont typeface="Arial"/>
-              <a:buChar char="•"/>
-            </a:pPr>
-            <a:r>
-              <a:rPr lang="de-DE" sz="1350" b="0" u="none" strike="noStrike">
-                <a:solidFill>
-                  <a:schemeClr val="dk1"/>
-                </a:solidFill>
-                <a:effectLst/>
-                <a:uFillTx/>
-                <a:latin typeface="Calibri"/>
-              </a:rPr>
-              <a:t>Fünfte Ebene</a:t>
-            </a:r>
-            <a:endParaRPr lang="de-DE" sz="1350" b="0" u="none" strike="noStrike">
-              <a:solidFill>
-                <a:srgbClr val="000000"/>
-              </a:solidFill>
-              <a:effectLst/>
-              <a:uFillTx/>
-              <a:latin typeface="Arial"/>
-            </a:endParaRPr>
-          </a:p>
-        </p:txBody>
-      </p:sp>
-      <p:sp>
-        <p:nvSpPr>
-          <p:cNvPr id="38" name="PlaceHolder 6"/>
-          <p:cNvSpPr>
-            <a:spLocks noGrp="1"/>
-          </p:cNvSpPr>
-          <p:nvPr>
-            <p:ph type="dt" idx="19"/>
-          </p:nvPr>
-        </p:nvSpPr>
-        <p:spPr>
-          <a:xfrm>
-            <a:off x="471600" y="9181440"/>
-            <a:ext cx="1538640" cy="523080"/>
-          </a:xfrm>
-          <a:prstGeom prst="rect">
-            <a:avLst/>
-          </a:prstGeom>
-          <a:noFill/>
-          <a:ln w="0">
-            <a:noFill/>
-          </a:ln>
-        </p:spPr>
-        <p:txBody>
-          <a:bodyPr lIns="91440" rIns="91440" tIns="45720" bIns="45720" anchor="ctr">
-            <a:noAutofit/>
-          </a:bodyPr>
-          <a:lstStyle>
-            <a:lvl1pPr indent="0" defTabSz="457200">
-              <a:lnSpc>
-                <a:spcPct val="100000"/>
-              </a:lnSpc>
-              <a:buNone/>
-              <a:tabLst>
-                <a:tab algn="l" pos="0"/>
-              </a:tabLst>
-              <a:defRPr lang="de-DE" sz="900" b="0" u="none" strike="noStrike">
-                <a:solidFill>
-                  <a:schemeClr val="dk1">
-                    <a:tint val="75000"/>
-                  </a:schemeClr>
-                </a:solidFill>
-                <a:effectLst/>
-                <a:uFillTx/>
-                <a:latin typeface="Calibri"/>
-              </a:defRPr>
-            </a:lvl1pPr>
-          </a:lstStyle>
-          <a:p>
-            <a:pPr indent="0" defTabSz="457200">
-              <a:lnSpc>
-                <a:spcPct val="100000"/>
-              </a:lnSpc>
-              <a:buNone/>
-              <a:tabLst>
-                <a:tab algn="l" pos="0"/>
-              </a:tabLst>
-            </a:pPr>
-            <a:r>
-              <a:rPr lang="de-DE" sz="900" b="0" u="none" strike="noStrike">
-                <a:solidFill>
-                  <a:schemeClr val="dk1">
-                    <a:tint val="75000"/>
-                  </a:schemeClr>
-                </a:solidFill>
-                <a:effectLst/>
-                <a:uFillTx/>
-                <a:latin typeface="Calibri"/>
-              </a:rPr>
-              <a:t>&lt;Datum/Uhrzeit&gt;</a:t>
-            </a:r>
-            <a:endParaRPr lang="de-DE" sz="900" b="0" u="none" strike="noStrike">
-              <a:solidFill>
-                <a:srgbClr val="000000"/>
-              </a:solidFill>
-              <a:effectLst/>
-              <a:uFillTx/>
-              <a:latin typeface="Times New Roman"/>
-            </a:endParaRPr>
-          </a:p>
-        </p:txBody>
-      </p:sp>
-      <p:sp>
-        <p:nvSpPr>
-          <p:cNvPr id="39" name="PlaceHolder 7"/>
-          <p:cNvSpPr>
-            <a:spLocks noGrp="1"/>
-          </p:cNvSpPr>
-          <p:nvPr>
-            <p:ph type="ftr" idx="20"/>
-          </p:nvPr>
-        </p:nvSpPr>
-        <p:spPr>
-          <a:xfrm>
-            <a:off x="2271600" y="9181440"/>
-            <a:ext cx="2310120" cy="523080"/>
-          </a:xfrm>
-          <a:prstGeom prst="rect">
-            <a:avLst/>
-          </a:prstGeom>
-          <a:noFill/>
-          <a:ln w="0">
-            <a:noFill/>
-          </a:ln>
-        </p:spPr>
-        <p:txBody>
-          <a:bodyPr lIns="91440" rIns="91440" tIns="45720" bIns="45720" anchor="ctr">
-            <a:noAutofit/>
-          </a:bodyPr>
-          <a:lstStyle>
-            <a:lvl1pPr indent="0" algn="ctr">
-              <a:lnSpc>
-                <a:spcPct val="100000"/>
-              </a:lnSpc>
-              <a:buNone/>
-              <a:tabLst>
-                <a:tab algn="l" pos="0"/>
-              </a:tabLst>
-              <a:defRPr lang="de-DE" sz="1400" b="0" u="none" strike="noStrike">
-                <a:solidFill>
-                  <a:srgbClr val="000000"/>
-                </a:solidFill>
-                <a:effectLst/>
-                <a:uFillTx/>
-                <a:latin typeface="Times New Roman"/>
-              </a:defRPr>
-            </a:lvl1pPr>
-          </a:lstStyle>
-          <a:p>
-            <a:pPr indent="0" algn="ctr">
-              <a:lnSpc>
-                <a:spcPct val="100000"/>
-              </a:lnSpc>
-              <a:buNone/>
-              <a:tabLst>
-                <a:tab algn="l" pos="0"/>
-              </a:tabLst>
-            </a:pPr>
-            <a:r>
-              <a:rPr lang="de-DE" sz="1400" b="0" u="none" strike="noStrike">
-                <a:solidFill>
-                  <a:srgbClr val="000000"/>
-                </a:solidFill>
-                <a:effectLst/>
-                <a:uFillTx/>
-                <a:latin typeface="Times New Roman"/>
-              </a:rPr>
-              <a:t>&lt;Fußzeile&gt;</a:t>
-            </a:r>
-            <a:endParaRPr lang="de-DE" sz="1400" b="0" u="none" strike="noStrike">
-              <a:solidFill>
-                <a:srgbClr val="000000"/>
-              </a:solidFill>
-              <a:effectLst/>
-              <a:uFillTx/>
-              <a:latin typeface="Times New Roman"/>
-            </a:endParaRPr>
-          </a:p>
-        </p:txBody>
-      </p:sp>
-      <p:sp>
-        <p:nvSpPr>
-          <p:cNvPr id="40" name="PlaceHolder 8"/>
-          <p:cNvSpPr>
-            <a:spLocks noGrp="1"/>
-          </p:cNvSpPr>
-          <p:nvPr>
-            <p:ph type="sldNum" idx="21"/>
-          </p:nvPr>
-        </p:nvSpPr>
-        <p:spPr>
-          <a:xfrm>
-            <a:off x="4843440" y="9181440"/>
-            <a:ext cx="1538640" cy="523080"/>
-          </a:xfrm>
-          <a:prstGeom prst="rect">
-            <a:avLst/>
-          </a:prstGeom>
-          <a:noFill/>
-          <a:ln w="0">
-            <a:noFill/>
-          </a:ln>
-        </p:spPr>
-        <p:txBody>
-          <a:bodyPr lIns="91440" rIns="91440" tIns="45720" bIns="45720" anchor="ctr">
-            <a:noAutofit/>
-          </a:bodyPr>
-          <a:lstStyle>
-            <a:lvl1pPr indent="0" algn="r" defTabSz="457200">
-              <a:lnSpc>
-                <a:spcPct val="100000"/>
-              </a:lnSpc>
-              <a:buNone/>
-              <a:tabLst>
-                <a:tab algn="l" pos="0"/>
-              </a:tabLst>
-              <a:defRPr lang="de-DE" sz="900" b="0" u="none" strike="noStrike">
-                <a:solidFill>
-                  <a:schemeClr val="dk1">
-                    <a:tint val="75000"/>
-                  </a:schemeClr>
-                </a:solidFill>
-                <a:effectLst/>
-                <a:uFillTx/>
-                <a:latin typeface="Calibri"/>
-              </a:defRPr>
-            </a:lvl1pPr>
-          </a:lstStyle>
-          <a:p>
-            <a:pPr indent="0" algn="r" defTabSz="457200">
-              <a:lnSpc>
-                <a:spcPct val="100000"/>
-              </a:lnSpc>
-              <a:buNone/>
-              <a:tabLst>
-                <a:tab algn="l" pos="0"/>
-              </a:tabLst>
-            </a:pPr>
-            <a:fld id="{F4ECCF29-E525-4BEE-98A3-202FA60B099C}" type="slidenum">
-              <a:rPr lang="de-DE" sz="900" b="0" u="none" strike="noStrike">
-                <a:solidFill>
-                  <a:schemeClr val="dk1">
-                    <a:tint val="75000"/>
-                  </a:schemeClr>
-                </a:solidFill>
-                <a:effectLst/>
-                <a:uFillTx/>
-                <a:latin typeface="Calibri"/>
-              </a:rPr>
-              <a:t>&lt;Foliennummer&gt;</a:t>
-            </a:fld>
-            <a:endParaRPr lang="de-DE" sz="900" b="0" u="none" strike="noStrike">
-              <a:solidFill>
-                <a:srgbClr val="000000"/>
-              </a:solidFill>
-              <a:effectLst/>
-              <a:uFillTx/>
-              <a:latin typeface="Times New Roman"/>
-            </a:endParaRPr>
-          </a:p>
-        </p:txBody>
-      </p:sp>
-    </p:spTree>
-  </p:cSld>
-</p:sldLayout>
-</file>
-
-<file path=ppt/slideLayouts/slideLayout8.xml><?xml version="1.0" encoding="utf-8"?>
-<p:sldLayout xmlns:a="http://schemas.openxmlformats.org/drawingml/2006/main" xmlns:p="http://schemas.openxmlformats.org/presentationml/2006/main" xmlns:r="http://schemas.openxmlformats.org/officeDocument/2006/relationships" xmlns:p14="http://schemas.microsoft.com/office/powerpoint/2010/main" xmlns:p15="http://schemas.microsoft.com/office/powerpoint/2012/main" xmlns:mc="http://schemas.openxmlformats.org/markup-compatibility/2006" type="titleOnly" preserve="1">
-  <p:cSld name="Nur Titel">
-    <p:bg>
-      <p:bgPr>
-        <a:solidFill>
-          <a:srgbClr val="ffffff"/>
-        </a:solidFill>
-      </p:bgPr>
-    </p:bg>
-    <p:spTree>
-      <p:nvGrpSpPr>
-        <p:cNvPr id="1" name=""/>
-        <p:cNvGrpSpPr/>
-        <p:nvPr/>
-      </p:nvGrpSpPr>
-      <p:grpSpPr>
-        <a:xfrm>
-          <a:off x="0" y="0"/>
-          <a:ext cx="0" cy="0"/>
-          <a:chOff x="0" y="0"/>
-          <a:chExt cx="0" cy="0"/>
-        </a:xfrm>
-      </p:grpSpPr>
-      <p:sp>
-        <p:nvSpPr>
-          <p:cNvPr id="41" name="PlaceHolder 1"/>
-          <p:cNvSpPr>
-            <a:spLocks noGrp="1"/>
-          </p:cNvSpPr>
-          <p:nvPr>
-            <p:ph type="title"/>
-          </p:nvPr>
-        </p:nvSpPr>
-        <p:spPr>
-          <a:xfrm>
-            <a:off x="471600" y="527400"/>
-            <a:ext cx="5910840" cy="1910520"/>
-          </a:xfrm>
-          <a:prstGeom prst="rect">
-            <a:avLst/>
-          </a:prstGeom>
-          <a:noFill/>
-          <a:ln w="0">
-            <a:noFill/>
-          </a:ln>
-        </p:spPr>
-        <p:txBody>
-          <a:bodyPr lIns="91440" rIns="91440" tIns="45720" bIns="45720" anchor="ctr">
-            <a:noAutofit/>
-          </a:bodyPr>
-          <a:p>
-            <a:pPr indent="0" defTabSz="685800">
-              <a:lnSpc>
-                <a:spcPct val="90000"/>
-              </a:lnSpc>
-              <a:buNone/>
-              <a:tabLst>
-                <a:tab algn="l" pos="0"/>
-              </a:tabLst>
-            </a:pPr>
-            <a:r>
-              <a:rPr lang="de-DE" sz="3300" b="0" u="none" strike="noStrike">
-                <a:solidFill>
-                  <a:schemeClr val="dk1"/>
-                </a:solidFill>
-                <a:effectLst/>
-                <a:uFillTx/>
-                <a:latin typeface="Calibri Light"/>
-              </a:rPr>
-              <a:t>Mastertitelformat bearbeiten</a:t>
-            </a:r>
-            <a:endParaRPr lang="de-DE" sz="3300" b="0" u="none" strike="noStrike">
-              <a:solidFill>
-                <a:srgbClr val="000000"/>
-              </a:solidFill>
-              <a:effectLst/>
-              <a:uFillTx/>
-              <a:latin typeface="Arial"/>
-            </a:endParaRPr>
-          </a:p>
-        </p:txBody>
-      </p:sp>
-      <p:sp>
-        <p:nvSpPr>
-          <p:cNvPr id="42" name="PlaceHolder 2"/>
-          <p:cNvSpPr>
-            <a:spLocks noGrp="1"/>
-          </p:cNvSpPr>
-          <p:nvPr>
-            <p:ph type="dt" idx="22"/>
-          </p:nvPr>
-        </p:nvSpPr>
-        <p:spPr>
-          <a:xfrm>
-            <a:off x="471600" y="9181440"/>
-            <a:ext cx="1538640" cy="523080"/>
-          </a:xfrm>
-          <a:prstGeom prst="rect">
-            <a:avLst/>
-          </a:prstGeom>
-          <a:noFill/>
-          <a:ln w="0">
-            <a:noFill/>
-          </a:ln>
-        </p:spPr>
-        <p:txBody>
-          <a:bodyPr lIns="91440" rIns="91440" tIns="45720" bIns="45720" anchor="ctr">
-            <a:noAutofit/>
-          </a:bodyPr>
-          <a:lstStyle>
-            <a:lvl1pPr indent="0" defTabSz="457200">
-              <a:lnSpc>
-                <a:spcPct val="100000"/>
-              </a:lnSpc>
-              <a:buNone/>
-              <a:tabLst>
-                <a:tab algn="l" pos="0"/>
-              </a:tabLst>
-              <a:defRPr lang="de-DE" sz="900" b="0" u="none" strike="noStrike">
-                <a:solidFill>
-                  <a:schemeClr val="dk1">
-                    <a:tint val="75000"/>
-                  </a:schemeClr>
-                </a:solidFill>
-                <a:effectLst/>
-                <a:uFillTx/>
-                <a:latin typeface="Calibri"/>
-              </a:defRPr>
-            </a:lvl1pPr>
-          </a:lstStyle>
-          <a:p>
-            <a:pPr indent="0" defTabSz="457200">
-              <a:lnSpc>
-                <a:spcPct val="100000"/>
-              </a:lnSpc>
-              <a:buNone/>
-              <a:tabLst>
-                <a:tab algn="l" pos="0"/>
-              </a:tabLst>
-            </a:pPr>
-            <a:r>
-              <a:rPr lang="de-DE" sz="900" b="0" u="none" strike="noStrike">
-                <a:solidFill>
-                  <a:schemeClr val="dk1">
-                    <a:tint val="75000"/>
-                  </a:schemeClr>
-                </a:solidFill>
-                <a:effectLst/>
-                <a:uFillTx/>
-                <a:latin typeface="Calibri"/>
-              </a:rPr>
-              <a:t>&lt;Datum/Uhrzeit&gt;</a:t>
-            </a:r>
-            <a:endParaRPr lang="de-DE" sz="900" b="0" u="none" strike="noStrike">
-              <a:solidFill>
-                <a:srgbClr val="000000"/>
-              </a:solidFill>
-              <a:effectLst/>
-              <a:uFillTx/>
-              <a:latin typeface="Times New Roman"/>
-            </a:endParaRPr>
-          </a:p>
-        </p:txBody>
-      </p:sp>
-      <p:sp>
-        <p:nvSpPr>
-          <p:cNvPr id="43" name="PlaceHolder 3"/>
-          <p:cNvSpPr>
-            <a:spLocks noGrp="1"/>
-          </p:cNvSpPr>
-          <p:nvPr>
-            <p:ph type="ftr" idx="23"/>
-          </p:nvPr>
-        </p:nvSpPr>
-        <p:spPr>
-          <a:xfrm>
-            <a:off x="2271600" y="9181440"/>
-            <a:ext cx="2310120" cy="523080"/>
-          </a:xfrm>
-          <a:prstGeom prst="rect">
-            <a:avLst/>
-          </a:prstGeom>
-          <a:noFill/>
-          <a:ln w="0">
-            <a:noFill/>
-          </a:ln>
-        </p:spPr>
-        <p:txBody>
-          <a:bodyPr lIns="91440" rIns="91440" tIns="45720" bIns="45720" anchor="ctr">
-            <a:noAutofit/>
-          </a:bodyPr>
-          <a:lstStyle>
-            <a:lvl1pPr indent="0" algn="ctr">
-              <a:lnSpc>
-                <a:spcPct val="100000"/>
-              </a:lnSpc>
-              <a:buNone/>
-              <a:tabLst>
-                <a:tab algn="l" pos="0"/>
-              </a:tabLst>
-              <a:defRPr lang="de-DE" sz="1400" b="0" u="none" strike="noStrike">
-                <a:solidFill>
-                  <a:srgbClr val="000000"/>
-                </a:solidFill>
-                <a:effectLst/>
-                <a:uFillTx/>
-                <a:latin typeface="Times New Roman"/>
-              </a:defRPr>
-            </a:lvl1pPr>
-          </a:lstStyle>
-          <a:p>
-            <a:pPr indent="0" algn="ctr">
-              <a:lnSpc>
-                <a:spcPct val="100000"/>
-              </a:lnSpc>
-              <a:buNone/>
-              <a:tabLst>
-                <a:tab algn="l" pos="0"/>
-              </a:tabLst>
-            </a:pPr>
-            <a:r>
-              <a:rPr lang="de-DE" sz="1400" b="0" u="none" strike="noStrike">
-                <a:solidFill>
-                  <a:srgbClr val="000000"/>
-                </a:solidFill>
-                <a:effectLst/>
-                <a:uFillTx/>
-                <a:latin typeface="Times New Roman"/>
-              </a:rPr>
-              <a:t>&lt;Fußzeile&gt;</a:t>
-            </a:r>
-            <a:endParaRPr lang="de-DE" sz="1400" b="0" u="none" strike="noStrike">
-              <a:solidFill>
-                <a:srgbClr val="000000"/>
-              </a:solidFill>
-              <a:effectLst/>
-              <a:uFillTx/>
-              <a:latin typeface="Times New Roman"/>
-            </a:endParaRPr>
-          </a:p>
-        </p:txBody>
-      </p:sp>
-      <p:sp>
-        <p:nvSpPr>
-          <p:cNvPr id="44" name="PlaceHolder 4"/>
-          <p:cNvSpPr>
-            <a:spLocks noGrp="1"/>
-          </p:cNvSpPr>
-          <p:nvPr>
-            <p:ph type="sldNum" idx="24"/>
-          </p:nvPr>
-        </p:nvSpPr>
-        <p:spPr>
-          <a:xfrm>
-            <a:off x="4843440" y="9181440"/>
-            <a:ext cx="1538640" cy="523080"/>
-          </a:xfrm>
-          <a:prstGeom prst="rect">
-            <a:avLst/>
-          </a:prstGeom>
-          <a:noFill/>
-          <a:ln w="0">
-            <a:noFill/>
-          </a:ln>
-        </p:spPr>
-        <p:txBody>
-          <a:bodyPr lIns="91440" rIns="91440" tIns="45720" bIns="45720" anchor="ctr">
-            <a:noAutofit/>
-          </a:bodyPr>
-          <a:lstStyle>
-            <a:lvl1pPr indent="0" algn="r" defTabSz="457200">
-              <a:lnSpc>
-                <a:spcPct val="100000"/>
-              </a:lnSpc>
-              <a:buNone/>
-              <a:tabLst>
-                <a:tab algn="l" pos="0"/>
-              </a:tabLst>
-              <a:defRPr lang="de-DE" sz="900" b="0" u="none" strike="noStrike">
-                <a:solidFill>
-                  <a:schemeClr val="dk1">
-                    <a:tint val="75000"/>
-                  </a:schemeClr>
-                </a:solidFill>
-                <a:effectLst/>
-                <a:uFillTx/>
-                <a:latin typeface="Calibri"/>
-              </a:defRPr>
-            </a:lvl1pPr>
-          </a:lstStyle>
-          <a:p>
-            <a:pPr indent="0" algn="r" defTabSz="457200">
-              <a:lnSpc>
-                <a:spcPct val="100000"/>
-              </a:lnSpc>
-              <a:buNone/>
-              <a:tabLst>
-                <a:tab algn="l" pos="0"/>
-              </a:tabLst>
-            </a:pPr>
-            <a:fld id="{0D4DDCCE-5E3D-4036-9D47-6FC052B7DD71}" type="slidenum">
-              <a:rPr lang="de-DE" sz="900" b="0" u="none" strike="noStrike">
-                <a:solidFill>
-                  <a:schemeClr val="dk1">
-                    <a:tint val="75000"/>
-                  </a:schemeClr>
-                </a:solidFill>
-                <a:effectLst/>
-                <a:uFillTx/>
-                <a:latin typeface="Calibri"/>
-              </a:rPr>
-              <a:t>&lt;Foliennummer&gt;</a:t>
-            </a:fld>
-            <a:endParaRPr lang="de-DE" sz="900" b="0" u="none" strike="noStrike">
-              <a:solidFill>
-                <a:srgbClr val="000000"/>
-              </a:solidFill>
-              <a:effectLst/>
-              <a:uFillTx/>
-              <a:latin typeface="Times New Roman"/>
-            </a:endParaRPr>
-          </a:p>
-        </p:txBody>
-      </p:sp>
-    </p:spTree>
-  </p:cSld>
-</p:sldLayout>
-</file>
-
-<file path=ppt/slideLayouts/slideLayout9.xml><?xml version="1.0" encoding="utf-8"?>
-<p:sldLayout xmlns:a="http://schemas.openxmlformats.org/drawingml/2006/main" xmlns:p="http://schemas.openxmlformats.org/presentationml/2006/main" xmlns:r="http://schemas.openxmlformats.org/officeDocument/2006/relationships" xmlns:p14="http://schemas.microsoft.com/office/powerpoint/2010/main" xmlns:p15="http://schemas.microsoft.com/office/powerpoint/2012/main" xmlns:mc="http://schemas.openxmlformats.org/markup-compatibility/2006" type="blank" preserve="1">
-  <p:cSld name="Leer">
-    <p:bg>
-      <p:bgPr>
-        <a:solidFill>
-          <a:srgbClr val="ffffff"/>
-        </a:solidFill>
-      </p:bgPr>
-    </p:bg>
-    <p:spTree>
-      <p:nvGrpSpPr>
-        <p:cNvPr id="1" name=""/>
-        <p:cNvGrpSpPr/>
-        <p:nvPr/>
-      </p:nvGrpSpPr>
-      <p:grpSpPr>
-        <a:xfrm>
-          <a:off x="0" y="0"/>
-          <a:ext cx="0" cy="0"/>
-          <a:chOff x="0" y="0"/>
-          <a:chExt cx="0" cy="0"/>
-        </a:xfrm>
-      </p:grpSpPr>
-      <p:sp>
-        <p:nvSpPr>
-          <p:cNvPr id="45" name="PlaceHolder 1"/>
+          <p:cNvPr id="45" name="PlaceHolder 4"/>
           <p:cNvSpPr>
             <a:spLocks noGrp="1"/>
           </p:cNvSpPr>
@@ -5585,7 +5585,7 @@
         <p:spPr>
           <a:xfrm>
             <a:off x="471600" y="9181440"/>
-            <a:ext cx="1538640" cy="523080"/>
+            <a:ext cx="1538280" cy="522720"/>
           </a:xfrm>
           <a:prstGeom prst="rect">
             <a:avLst/>
@@ -5656,7 +5656,7 @@
       </p:sp>
       <p:sp>
         <p:nvSpPr>
-          <p:cNvPr id="46" name="PlaceHolder 2"/>
+          <p:cNvPr id="46" name="PlaceHolder 5"/>
           <p:cNvSpPr>
             <a:spLocks noGrp="1"/>
           </p:cNvSpPr>
@@ -5667,7 +5667,7 @@
         <p:spPr>
           <a:xfrm>
             <a:off x="2271600" y="9181440"/>
-            <a:ext cx="2310120" cy="523080"/>
+            <a:ext cx="2309760" cy="522720"/>
           </a:xfrm>
           <a:prstGeom prst="rect">
             <a:avLst/>
@@ -5734,7 +5734,7 @@
       </p:sp>
       <p:sp>
         <p:nvSpPr>
-          <p:cNvPr id="47" name="PlaceHolder 3"/>
+          <p:cNvPr id="47" name="PlaceHolder 6"/>
           <p:cNvSpPr>
             <a:spLocks noGrp="1"/>
           </p:cNvSpPr>
@@ -5745,7 +5745,7 @@
         <p:spPr>
           <a:xfrm>
             <a:off x="4843440" y="9181440"/>
-            <a:ext cx="1538640" cy="523080"/>
+            <a:ext cx="1538280" cy="522720"/>
           </a:xfrm>
           <a:prstGeom prst="rect">
             <a:avLst/>
@@ -5790,7 +5790,7 @@
                 <a:tab algn="l" pos="0"/>
               </a:tabLst>
             </a:pPr>
-            <a:fld id="{64DBDD6A-1845-4FD7-9072-DB03ECB89D48}" type="slidenum">
+            <a:fld id="{8DECB0ED-18CE-4B8B-943E-BDB7CED7F7BD}" type="slidenum">
               <a:rPr lang="de-DE" sz="900" b="0" u="none" strike="noStrike">
                 <a:solidFill>
                   <a:schemeClr val="dk1">
@@ -5881,7 +5881,7 @@
         <p:spPr>
           <a:xfrm>
             <a:off x="2269080" y="153360"/>
-            <a:ext cx="3412080" cy="730080"/>
+            <a:ext cx="3411720" cy="730080"/>
           </a:xfrm>
           <a:prstGeom prst="rect">
             <a:avLst/>
@@ -5966,7 +5966,7 @@
         <p:spPr>
           <a:xfrm>
             <a:off x="2251440" y="1010880"/>
-            <a:ext cx="4186080" cy="1004040"/>
+            <a:ext cx="4185720" cy="1004040"/>
           </a:xfrm>
           <a:prstGeom prst="rect">
             <a:avLst/>
@@ -6294,7 +6294,7 @@
         <p:spPr>
           <a:xfrm>
             <a:off x="355320" y="2082600"/>
-            <a:ext cx="5960880" cy="4320"/>
+            <a:ext cx="5961240" cy="4680"/>
           </a:xfrm>
           <a:prstGeom prst="straightConnector1">
             <a:avLst/>
@@ -6315,7 +6315,7 @@
         <p:spPr>
           <a:xfrm>
             <a:off x="401400" y="2165040"/>
-            <a:ext cx="1138680" cy="303120"/>
+            <a:ext cx="1138320" cy="303120"/>
           </a:xfrm>
           <a:prstGeom prst="rect">
             <a:avLst/>
@@ -6372,8 +6372,8 @@
         </p:nvSpPr>
         <p:spPr>
           <a:xfrm>
-            <a:off x="751680" y="2457000"/>
-            <a:ext cx="5634360" cy="1004040"/>
+            <a:off x="540000" y="2457000"/>
+            <a:ext cx="5940000" cy="273240"/>
           </a:xfrm>
           <a:prstGeom prst="rect">
             <a:avLst/>
@@ -6398,6 +6398,12 @@
               <a:lnSpc>
                 <a:spcPct val="100000"/>
               </a:lnSpc>
+              <a:spcBef>
+                <a:spcPts val="1191"/>
+              </a:spcBef>
+              <a:spcAft>
+                <a:spcPts val="992"/>
+              </a:spcAft>
             </a:pPr>
             <a:r>
               <a:rPr lang="de-DE" sz="1200" b="0" u="none" strike="noStrike">
@@ -6409,7 +6415,7 @@
                 <a:latin typeface="Tahoma"/>
                 <a:ea typeface="Tahoma"/>
               </a:rPr>
-              <a:t>Maschinenbauingenieur mit Masterabschluss in Energie- und Verfahrenstechnik. Besondere Interessen liegen in Thermodynamik, mit Fokus auf Simulation, Modellierung und Auslegung technischer Systeme. Zudem verfüge ich über fundierte Kenntnisse in der Programmierung mit Python sowie in der Datenauswertung mit MATLAB. </a:t>
+              <a:t>[professional_summary] </a:t>
             </a:r>
             <a:endParaRPr lang="de-DE" sz="1200" b="0" u="none" strike="noStrike">
               <a:solidFill>
@@ -6431,7 +6437,7 @@
         <p:spPr>
           <a:xfrm>
             <a:off x="2895480" y="3520440"/>
-            <a:ext cx="1672200" cy="303120"/>
+            <a:ext cx="1671840" cy="303120"/>
           </a:xfrm>
           <a:prstGeom prst="rect">
             <a:avLst/>
@@ -6489,7 +6495,7 @@
         <p:spPr>
           <a:xfrm>
             <a:off x="1285200" y="3860640"/>
-            <a:ext cx="5326920" cy="5976720"/>
+            <a:ext cx="5326560" cy="5976720"/>
           </a:xfrm>
           <a:prstGeom prst="rect">
             <a:avLst/>
@@ -7132,7 +7138,7 @@
         <p:spPr>
           <a:xfrm>
             <a:off x="291960" y="126720"/>
-            <a:ext cx="6011280" cy="4320"/>
+            <a:ext cx="6011640" cy="4680"/>
           </a:xfrm>
           <a:prstGeom prst="straightConnector1">
             <a:avLst/>
@@ -7153,7 +7159,7 @@
         <p:spPr>
           <a:xfrm>
             <a:off x="3208320" y="9675000"/>
-            <a:ext cx="960480" cy="227160"/>
+            <a:ext cx="960120" cy="227160"/>
           </a:xfrm>
           <a:prstGeom prst="rect">
             <a:avLst/>
@@ -7210,13 +7216,13 @@
         </p:nvPicPr>
         <p:blipFill>
           <a:blip r:embed="rId3"/>
-          <a:srcRect l="17041" t="10276" r="8874" b="25717"/>
+          <a:srcRect l="17038" t="10276" r="8874" b="25713"/>
           <a:stretch/>
         </p:blipFill>
         <p:spPr>
           <a:xfrm>
             <a:off x="495360" y="213480"/>
-            <a:ext cx="1557720" cy="1795680"/>
+            <a:ext cx="1557360" cy="1795320"/>
           </a:xfrm>
           <a:prstGeom prst="rect">
             <a:avLst/>
@@ -7236,7 +7242,7 @@
         <p:spPr>
           <a:xfrm>
             <a:off x="0" y="5254200"/>
-            <a:ext cx="1341720" cy="641880"/>
+            <a:ext cx="1341360" cy="641520"/>
           </a:xfrm>
           <a:prstGeom prst="rect">
             <a:avLst/>
@@ -7294,7 +7300,7 @@
         <p:spPr>
           <a:xfrm>
             <a:off x="1281240" y="3974760"/>
-            <a:ext cx="5760" cy="5655960"/>
+            <a:ext cx="6120" cy="5656320"/>
           </a:xfrm>
           <a:prstGeom prst="straightConnector1">
             <a:avLst/>
@@ -7315,7 +7321,7 @@
         <p:spPr>
           <a:xfrm>
             <a:off x="0" y="7233120"/>
-            <a:ext cx="1341720" cy="641880"/>
+            <a:ext cx="1341360" cy="641520"/>
           </a:xfrm>
           <a:prstGeom prst="rect">
             <a:avLst/>
@@ -7373,7 +7379,7 @@
         <p:spPr>
           <a:xfrm>
             <a:off x="0" y="8687520"/>
-            <a:ext cx="1341720" cy="638280"/>
+            <a:ext cx="1341360" cy="638280"/>
           </a:xfrm>
           <a:prstGeom prst="rect">
             <a:avLst/>
@@ -7431,7 +7437,7 @@
         <p:spPr>
           <a:xfrm>
             <a:off x="2520" y="3897000"/>
-            <a:ext cx="1341720" cy="272520"/>
+            <a:ext cx="1341360" cy="272520"/>
           </a:xfrm>
           <a:prstGeom prst="rect">
             <a:avLst/>
@@ -7519,7 +7525,7 @@
         <p:spPr>
           <a:xfrm>
             <a:off x="3149640" y="88920"/>
-            <a:ext cx="1349640" cy="303120"/>
+            <a:ext cx="1349280" cy="303120"/>
           </a:xfrm>
           <a:prstGeom prst="rect">
             <a:avLst/>
@@ -7577,7 +7583,7 @@
         <p:spPr>
           <a:xfrm>
             <a:off x="1346040" y="445680"/>
-            <a:ext cx="5310720" cy="3659400"/>
+            <a:ext cx="5310360" cy="3658680"/>
           </a:xfrm>
           <a:prstGeom prst="rect">
             <a:avLst/>
@@ -7980,7 +7986,7 @@
         <p:spPr>
           <a:xfrm>
             <a:off x="2768760" y="4718160"/>
-            <a:ext cx="2103840" cy="303120"/>
+            <a:ext cx="2103480" cy="303120"/>
           </a:xfrm>
           <a:prstGeom prst="rect">
             <a:avLst/>
@@ -8038,7 +8044,7 @@
         <p:spPr>
           <a:xfrm>
             <a:off x="1346040" y="5037840"/>
-            <a:ext cx="5507640" cy="272520"/>
+            <a:ext cx="5507280" cy="272520"/>
           </a:xfrm>
           <a:prstGeom prst="rect">
             <a:avLst/>
@@ -8096,7 +8102,7 @@
         <p:spPr>
           <a:xfrm>
             <a:off x="1346040" y="5676840"/>
-            <a:ext cx="5609160" cy="826560"/>
+            <a:ext cx="5608800" cy="826200"/>
           </a:xfrm>
           <a:prstGeom prst="rect">
             <a:avLst/>
@@ -8213,7 +8219,7 @@
         <p:spPr>
           <a:xfrm>
             <a:off x="3208320" y="9675000"/>
-            <a:ext cx="960480" cy="227160"/>
+            <a:ext cx="960120" cy="227160"/>
           </a:xfrm>
           <a:prstGeom prst="rect">
             <a:avLst/>
@@ -8271,7 +8277,7 @@
         <p:spPr>
           <a:xfrm>
             <a:off x="3174840" y="6566040"/>
-            <a:ext cx="1303920" cy="303120"/>
+            <a:ext cx="1303560" cy="303120"/>
           </a:xfrm>
           <a:prstGeom prst="rect">
             <a:avLst/>
@@ -8329,7 +8335,7 @@
         <p:spPr>
           <a:xfrm>
             <a:off x="657360" y="6971040"/>
-            <a:ext cx="5787000" cy="1380600"/>
+            <a:ext cx="5786640" cy="1380240"/>
           </a:xfrm>
           <a:prstGeom prst="rect">
             <a:avLst/>
@@ -8777,7 +8783,7 @@
         <p:spPr>
           <a:xfrm>
             <a:off x="601200" y="8528400"/>
-            <a:ext cx="2128320" cy="1004040"/>
+            <a:ext cx="2127960" cy="1004040"/>
           </a:xfrm>
           <a:prstGeom prst="rect">
             <a:avLst/>
@@ -8934,7 +8940,7 @@
         <p:spPr>
           <a:xfrm>
             <a:off x="3491280" y="8546760"/>
-            <a:ext cx="2448360" cy="1011240"/>
+            <a:ext cx="2448000" cy="1010880"/>
           </a:xfrm>
           <a:prstGeom prst="rect">
             <a:avLst/>
@@ -9091,7 +9097,7 @@
         <p:spPr>
           <a:xfrm>
             <a:off x="1658160" y="7450920"/>
-            <a:ext cx="92520" cy="91440"/>
+            <a:ext cx="92160" cy="91080"/>
           </a:xfrm>
           <a:prstGeom prst="ellipse">
             <a:avLst/>
@@ -9149,7 +9155,7 @@
         <p:spPr>
           <a:xfrm>
             <a:off x="1803960" y="7446600"/>
-            <a:ext cx="92520" cy="91440"/>
+            <a:ext cx="92160" cy="91080"/>
           </a:xfrm>
           <a:prstGeom prst="ellipse">
             <a:avLst/>
@@ -9207,7 +9213,7 @@
         <p:spPr>
           <a:xfrm>
             <a:off x="1940400" y="7446600"/>
-            <a:ext cx="92520" cy="91440"/>
+            <a:ext cx="92160" cy="91080"/>
           </a:xfrm>
           <a:prstGeom prst="ellipse">
             <a:avLst/>
@@ -9265,7 +9271,7 @@
         <p:spPr>
           <a:xfrm>
             <a:off x="2076840" y="7446600"/>
-            <a:ext cx="92520" cy="91440"/>
+            <a:ext cx="92160" cy="91080"/>
           </a:xfrm>
           <a:prstGeom prst="ellipse">
             <a:avLst/>
@@ -9323,7 +9329,7 @@
         <p:spPr>
           <a:xfrm>
             <a:off x="2213280" y="7446600"/>
-            <a:ext cx="92520" cy="91440"/>
+            <a:ext cx="92160" cy="91080"/>
           </a:xfrm>
           <a:prstGeom prst="ellipse">
             <a:avLst/>
@@ -9381,7 +9387,7 @@
         <p:spPr>
           <a:xfrm>
             <a:off x="1663920" y="8152200"/>
-            <a:ext cx="92520" cy="91440"/>
+            <a:ext cx="92160" cy="91080"/>
           </a:xfrm>
           <a:prstGeom prst="ellipse">
             <a:avLst/>
@@ -9439,7 +9445,7 @@
         <p:spPr>
           <a:xfrm>
             <a:off x="1809360" y="8147880"/>
-            <a:ext cx="92520" cy="91440"/>
+            <a:ext cx="92160" cy="91080"/>
           </a:xfrm>
           <a:prstGeom prst="ellipse">
             <a:avLst/>
@@ -9497,7 +9503,7 @@
         <p:spPr>
           <a:xfrm>
             <a:off x="1945800" y="8147880"/>
-            <a:ext cx="92520" cy="91440"/>
+            <a:ext cx="92160" cy="91080"/>
           </a:xfrm>
           <a:prstGeom prst="ellipse">
             <a:avLst/>
@@ -9555,7 +9561,7 @@
         <p:spPr>
           <a:xfrm>
             <a:off x="2082240" y="8147880"/>
-            <a:ext cx="92520" cy="91440"/>
+            <a:ext cx="92160" cy="91080"/>
           </a:xfrm>
           <a:prstGeom prst="ellipse">
             <a:avLst/>
@@ -9611,7 +9617,7 @@
         <p:spPr>
           <a:xfrm>
             <a:off x="2218680" y="8147880"/>
-            <a:ext cx="92520" cy="91440"/>
+            <a:ext cx="92160" cy="91080"/>
           </a:xfrm>
           <a:prstGeom prst="ellipse">
             <a:avLst/>
@@ -9667,7 +9673,7 @@
         <p:spPr>
           <a:xfrm>
             <a:off x="3279600" y="8180280"/>
-            <a:ext cx="92520" cy="91440"/>
+            <a:ext cx="92160" cy="91080"/>
           </a:xfrm>
           <a:prstGeom prst="ellipse">
             <a:avLst/>
@@ -9725,7 +9731,7 @@
         <p:spPr>
           <a:xfrm>
             <a:off x="3425040" y="8175600"/>
-            <a:ext cx="92520" cy="91440"/>
+            <a:ext cx="92160" cy="91080"/>
           </a:xfrm>
           <a:prstGeom prst="ellipse">
             <a:avLst/>
@@ -9783,7 +9789,7 @@
         <p:spPr>
           <a:xfrm>
             <a:off x="3561480" y="8175600"/>
-            <a:ext cx="92520" cy="91440"/>
+            <a:ext cx="92160" cy="91080"/>
           </a:xfrm>
           <a:prstGeom prst="ellipse">
             <a:avLst/>
@@ -9841,7 +9847,7 @@
         <p:spPr>
           <a:xfrm>
             <a:off x="3697920" y="8175600"/>
-            <a:ext cx="92520" cy="91440"/>
+            <a:ext cx="92160" cy="91080"/>
           </a:xfrm>
           <a:prstGeom prst="ellipse">
             <a:avLst/>
@@ -9897,7 +9903,7 @@
         <p:spPr>
           <a:xfrm>
             <a:off x="3834360" y="8175600"/>
-            <a:ext cx="92520" cy="91440"/>
+            <a:ext cx="92160" cy="91080"/>
           </a:xfrm>
           <a:prstGeom prst="ellipse">
             <a:avLst/>
@@ -9953,7 +9959,7 @@
         <p:spPr>
           <a:xfrm>
             <a:off x="1658160" y="7793280"/>
-            <a:ext cx="92520" cy="91440"/>
+            <a:ext cx="92160" cy="91080"/>
           </a:xfrm>
           <a:prstGeom prst="ellipse">
             <a:avLst/>
@@ -10011,7 +10017,7 @@
         <p:spPr>
           <a:xfrm>
             <a:off x="1803960" y="7788600"/>
-            <a:ext cx="92520" cy="91440"/>
+            <a:ext cx="92160" cy="91080"/>
           </a:xfrm>
           <a:prstGeom prst="ellipse">
             <a:avLst/>
@@ -10069,7 +10075,7 @@
         <p:spPr>
           <a:xfrm>
             <a:off x="1940400" y="7788600"/>
-            <a:ext cx="92520" cy="91440"/>
+            <a:ext cx="92160" cy="91080"/>
           </a:xfrm>
           <a:prstGeom prst="ellipse">
             <a:avLst/>
@@ -10127,7 +10133,7 @@
         <p:spPr>
           <a:xfrm>
             <a:off x="2076840" y="7788600"/>
-            <a:ext cx="92520" cy="91440"/>
+            <a:ext cx="92160" cy="91080"/>
           </a:xfrm>
           <a:prstGeom prst="ellipse">
             <a:avLst/>
@@ -10185,7 +10191,7 @@
         <p:spPr>
           <a:xfrm>
             <a:off x="2213280" y="7788600"/>
-            <a:ext cx="92520" cy="91440"/>
+            <a:ext cx="92160" cy="91080"/>
           </a:xfrm>
           <a:prstGeom prst="ellipse">
             <a:avLst/>
@@ -10241,7 +10247,7 @@
         <p:spPr>
           <a:xfrm>
             <a:off x="3268080" y="7821360"/>
-            <a:ext cx="92520" cy="91440"/>
+            <a:ext cx="92160" cy="91080"/>
           </a:xfrm>
           <a:prstGeom prst="ellipse">
             <a:avLst/>
@@ -10299,7 +10305,7 @@
         <p:spPr>
           <a:xfrm>
             <a:off x="3413880" y="7816680"/>
-            <a:ext cx="92520" cy="91440"/>
+            <a:ext cx="92160" cy="91080"/>
           </a:xfrm>
           <a:prstGeom prst="ellipse">
             <a:avLst/>
@@ -10357,7 +10363,7 @@
         <p:spPr>
           <a:xfrm>
             <a:off x="3550320" y="7816680"/>
-            <a:ext cx="92520" cy="91440"/>
+            <a:ext cx="92160" cy="91080"/>
           </a:xfrm>
           <a:prstGeom prst="ellipse">
             <a:avLst/>
@@ -10415,7 +10421,7 @@
         <p:spPr>
           <a:xfrm>
             <a:off x="3686760" y="7816680"/>
-            <a:ext cx="92520" cy="91440"/>
+            <a:ext cx="92160" cy="91080"/>
           </a:xfrm>
           <a:prstGeom prst="ellipse">
             <a:avLst/>
@@ -10473,7 +10479,7 @@
         <p:spPr>
           <a:xfrm>
             <a:off x="3823200" y="7816680"/>
-            <a:ext cx="92520" cy="91440"/>
+            <a:ext cx="92160" cy="91080"/>
           </a:xfrm>
           <a:prstGeom prst="ellipse">
             <a:avLst/>
@@ -10529,7 +10535,7 @@
         <p:spPr>
           <a:xfrm>
             <a:off x="3279600" y="7450920"/>
-            <a:ext cx="92520" cy="91440"/>
+            <a:ext cx="92160" cy="91080"/>
           </a:xfrm>
           <a:prstGeom prst="ellipse">
             <a:avLst/>
@@ -10587,7 +10593,7 @@
         <p:spPr>
           <a:xfrm>
             <a:off x="3425040" y="7446600"/>
-            <a:ext cx="92520" cy="91440"/>
+            <a:ext cx="92160" cy="91080"/>
           </a:xfrm>
           <a:prstGeom prst="ellipse">
             <a:avLst/>
@@ -10645,7 +10651,7 @@
         <p:spPr>
           <a:xfrm>
             <a:off x="3561480" y="7446600"/>
-            <a:ext cx="92520" cy="91440"/>
+            <a:ext cx="92160" cy="91080"/>
           </a:xfrm>
           <a:prstGeom prst="ellipse">
             <a:avLst/>
@@ -10703,7 +10709,7 @@
         <p:spPr>
           <a:xfrm>
             <a:off x="3697920" y="7446600"/>
-            <a:ext cx="92520" cy="91440"/>
+            <a:ext cx="92160" cy="91080"/>
           </a:xfrm>
           <a:prstGeom prst="ellipse">
             <a:avLst/>
@@ -10761,7 +10767,7 @@
         <p:spPr>
           <a:xfrm>
             <a:off x="3834360" y="7446600"/>
-            <a:ext cx="92520" cy="91440"/>
+            <a:ext cx="92160" cy="91080"/>
           </a:xfrm>
           <a:prstGeom prst="ellipse">
             <a:avLst/>
@@ -10817,7 +10823,7 @@
         <p:spPr>
           <a:xfrm>
             <a:off x="5243040" y="7450200"/>
-            <a:ext cx="92520" cy="91440"/>
+            <a:ext cx="92160" cy="91080"/>
           </a:xfrm>
           <a:prstGeom prst="ellipse">
             <a:avLst/>
@@ -10875,7 +10881,7 @@
         <p:spPr>
           <a:xfrm>
             <a:off x="5388480" y="7445520"/>
-            <a:ext cx="92520" cy="91440"/>
+            <a:ext cx="92160" cy="91080"/>
           </a:xfrm>
           <a:prstGeom prst="ellipse">
             <a:avLst/>
@@ -10933,7 +10939,7 @@
         <p:spPr>
           <a:xfrm>
             <a:off x="5524920" y="7445520"/>
-            <a:ext cx="92520" cy="91440"/>
+            <a:ext cx="92160" cy="91080"/>
           </a:xfrm>
           <a:prstGeom prst="ellipse">
             <a:avLst/>
@@ -10991,7 +10997,7 @@
         <p:spPr>
           <a:xfrm>
             <a:off x="5661360" y="7445520"/>
-            <a:ext cx="92520" cy="91440"/>
+            <a:ext cx="92160" cy="91080"/>
           </a:xfrm>
           <a:prstGeom prst="ellipse">
             <a:avLst/>
@@ -11047,7 +11053,7 @@
         <p:spPr>
           <a:xfrm>
             <a:off x="5797800" y="7445520"/>
-            <a:ext cx="92520" cy="91440"/>
+            <a:ext cx="92160" cy="91080"/>
           </a:xfrm>
           <a:prstGeom prst="ellipse">
             <a:avLst/>
@@ -11103,7 +11109,7 @@
         <p:spPr>
           <a:xfrm>
             <a:off x="5243040" y="7793280"/>
-            <a:ext cx="92520" cy="91440"/>
+            <a:ext cx="92160" cy="91080"/>
           </a:xfrm>
           <a:prstGeom prst="ellipse">
             <a:avLst/>
@@ -11161,7 +11167,7 @@
         <p:spPr>
           <a:xfrm>
             <a:off x="5388480" y="7788600"/>
-            <a:ext cx="92520" cy="91440"/>
+            <a:ext cx="92160" cy="91080"/>
           </a:xfrm>
           <a:prstGeom prst="ellipse">
             <a:avLst/>
@@ -11219,7 +11225,7 @@
         <p:spPr>
           <a:xfrm>
             <a:off x="5524920" y="7788600"/>
-            <a:ext cx="92520" cy="91440"/>
+            <a:ext cx="92160" cy="91080"/>
           </a:xfrm>
           <a:prstGeom prst="ellipse">
             <a:avLst/>
@@ -11277,7 +11283,7 @@
         <p:spPr>
           <a:xfrm>
             <a:off x="5661360" y="7788600"/>
-            <a:ext cx="92520" cy="91440"/>
+            <a:ext cx="92160" cy="91080"/>
           </a:xfrm>
           <a:prstGeom prst="ellipse">
             <a:avLst/>
@@ -11335,7 +11341,7 @@
         <p:spPr>
           <a:xfrm>
             <a:off x="5797800" y="7788600"/>
-            <a:ext cx="92520" cy="91440"/>
+            <a:ext cx="92160" cy="91080"/>
           </a:xfrm>
           <a:prstGeom prst="ellipse">
             <a:avLst/>
@@ -11391,7 +11397,7 @@
         <p:spPr>
           <a:xfrm>
             <a:off x="5246280" y="8147520"/>
-            <a:ext cx="92520" cy="91440"/>
+            <a:ext cx="92160" cy="91080"/>
           </a:xfrm>
           <a:prstGeom prst="ellipse">
             <a:avLst/>
@@ -11449,7 +11455,7 @@
         <p:spPr>
           <a:xfrm>
             <a:off x="5392080" y="8143200"/>
-            <a:ext cx="92520" cy="91440"/>
+            <a:ext cx="92160" cy="91080"/>
           </a:xfrm>
           <a:prstGeom prst="ellipse">
             <a:avLst/>
@@ -11507,7 +11513,7 @@
         <p:spPr>
           <a:xfrm>
             <a:off x="5528520" y="8143200"/>
-            <a:ext cx="92520" cy="91440"/>
+            <a:ext cx="92160" cy="91080"/>
           </a:xfrm>
           <a:prstGeom prst="ellipse">
             <a:avLst/>
@@ -11565,7 +11571,7 @@
         <p:spPr>
           <a:xfrm>
             <a:off x="5664960" y="8143200"/>
-            <a:ext cx="92520" cy="91440"/>
+            <a:ext cx="92160" cy="91080"/>
           </a:xfrm>
           <a:prstGeom prst="ellipse">
             <a:avLst/>
@@ -11623,7 +11629,7 @@
         <p:spPr>
           <a:xfrm>
             <a:off x="5801400" y="8143200"/>
-            <a:ext cx="92520" cy="91440"/>
+            <a:ext cx="92160" cy="91080"/>
           </a:xfrm>
           <a:prstGeom prst="ellipse">
             <a:avLst/>
@@ -11679,7 +11685,7 @@
         <p:spPr>
           <a:xfrm>
             <a:off x="0" y="1242720"/>
-            <a:ext cx="1341720" cy="641880"/>
+            <a:ext cx="1341360" cy="641520"/>
           </a:xfrm>
           <a:prstGeom prst="rect">
             <a:avLst/>
@@ -11737,7 +11743,7 @@
         <p:spPr>
           <a:xfrm>
             <a:off x="1282680" y="444240"/>
-            <a:ext cx="4320" cy="5897160"/>
+            <a:ext cx="4680" cy="5897520"/>
           </a:xfrm>
           <a:prstGeom prst="straightConnector1">
             <a:avLst/>
@@ -11758,7 +11764,7 @@
         <p:spPr>
           <a:xfrm>
             <a:off x="0" y="3353040"/>
-            <a:ext cx="1341720" cy="641880"/>
+            <a:ext cx="1341360" cy="641520"/>
           </a:xfrm>
           <a:prstGeom prst="rect">
             <a:avLst/>
@@ -11816,7 +11822,7 @@
         <p:spPr>
           <a:xfrm>
             <a:off x="0" y="4940280"/>
-            <a:ext cx="1341720" cy="641880"/>
+            <a:ext cx="1341360" cy="641520"/>
           </a:xfrm>
           <a:prstGeom prst="rect">
             <a:avLst/>
@@ -11874,7 +11880,7 @@
         <p:spPr>
           <a:xfrm>
             <a:off x="0" y="5664240"/>
-            <a:ext cx="1341720" cy="641880"/>
+            <a:ext cx="1341360" cy="641520"/>
           </a:xfrm>
           <a:prstGeom prst="rect">
             <a:avLst/>
@@ -11959,7 +11965,7 @@
         <p:spPr>
           <a:xfrm>
             <a:off x="360" y="444960"/>
-            <a:ext cx="1341720" cy="455400"/>
+            <a:ext cx="1341360" cy="455400"/>
           </a:xfrm>
           <a:prstGeom prst="rect">
             <a:avLst/>

--- a/templates/de/cv_template.pptx
+++ b/templates/de/cv_template.pptx
@@ -14,6 +14,2837 @@
 </file>
 
 <file path=ppt/slideLayouts/slideLayout1.xml><?xml version="1.0" encoding="utf-8"?>
+<p:sldLayout xmlns:a="http://schemas.openxmlformats.org/drawingml/2006/main" xmlns:p="http://schemas.openxmlformats.org/presentationml/2006/main" xmlns:r="http://schemas.openxmlformats.org/officeDocument/2006/relationships" xmlns:p14="http://schemas.microsoft.com/office/powerpoint/2010/main" xmlns:p15="http://schemas.microsoft.com/office/powerpoint/2012/main" xmlns:mc="http://schemas.openxmlformats.org/markup-compatibility/2006" type="twoObj" preserve="1">
+  <p:cSld name="Zwei Inhalte">
+    <p:bg>
+      <p:bgPr>
+        <a:solidFill>
+          <a:srgbClr val="ffffff"/>
+        </a:solidFill>
+      </p:bgPr>
+    </p:bg>
+    <p:spTree>
+      <p:nvGrpSpPr>
+        <p:cNvPr id="1" name=""/>
+        <p:cNvGrpSpPr/>
+        <p:nvPr/>
+      </p:nvGrpSpPr>
+      <p:grpSpPr>
+        <a:xfrm>
+          <a:off x="0" y="0"/>
+          <a:ext cx="0" cy="0"/>
+          <a:chOff x="0" y="0"/>
+          <a:chExt cx="0" cy="0"/>
+        </a:xfrm>
+      </p:grpSpPr>
+      <p:sp>
+        <p:nvSpPr>
+          <p:cNvPr id="2" name="PlaceHolder 1"/>
+          <p:cNvSpPr>
+            <a:spLocks noGrp="1"/>
+          </p:cNvSpPr>
+          <p:nvPr>
+            <p:ph type="title"/>
+          </p:nvPr>
+        </p:nvSpPr>
+        <p:spPr>
+          <a:xfrm>
+            <a:off x="471600" y="527400"/>
+            <a:ext cx="5910120" cy="1909800"/>
+          </a:xfrm>
+          <a:prstGeom prst="rect">
+            <a:avLst/>
+          </a:prstGeom>
+          <a:noFill/>
+          <a:ln w="0">
+            <a:noFill/>
+          </a:ln>
+        </p:spPr>
+        <p:txBody>
+          <a:bodyPr lIns="91440" rIns="91440" tIns="45720" bIns="45720" anchor="ctr">
+            <a:noAutofit/>
+          </a:bodyPr>
+          <a:p>
+            <a:pPr indent="0" defTabSz="685800">
+              <a:lnSpc>
+                <a:spcPct val="90000"/>
+              </a:lnSpc>
+              <a:buNone/>
+              <a:tabLst>
+                <a:tab algn="l" pos="0"/>
+              </a:tabLst>
+            </a:pPr>
+            <a:r>
+              <a:rPr lang="de-DE" sz="3300" b="0" u="none" strike="noStrike">
+                <a:solidFill>
+                  <a:schemeClr val="dk1"/>
+                </a:solidFill>
+                <a:effectLst/>
+                <a:uFillTx/>
+                <a:latin typeface="Calibri Light"/>
+              </a:rPr>
+              <a:t>Mastertitelformat bearbeiten</a:t>
+            </a:r>
+            <a:endParaRPr lang="de-DE" sz="3300" b="0" u="none" strike="noStrike">
+              <a:solidFill>
+                <a:srgbClr val="000000"/>
+              </a:solidFill>
+              <a:effectLst/>
+              <a:uFillTx/>
+              <a:latin typeface="Arial"/>
+            </a:endParaRPr>
+          </a:p>
+        </p:txBody>
+      </p:sp>
+      <p:sp>
+        <p:nvSpPr>
+          <p:cNvPr id="3" name="PlaceHolder 2"/>
+          <p:cNvSpPr>
+            <a:spLocks noGrp="1"/>
+          </p:cNvSpPr>
+          <p:nvPr>
+            <p:ph type="body"/>
+          </p:nvPr>
+        </p:nvSpPr>
+        <p:spPr>
+          <a:xfrm>
+            <a:off x="471600" y="2637000"/>
+            <a:ext cx="2909520" cy="6280200"/>
+          </a:xfrm>
+          <a:prstGeom prst="rect">
+            <a:avLst/>
+          </a:prstGeom>
+          <a:noFill/>
+          <a:ln w="0">
+            <a:noFill/>
+          </a:ln>
+        </p:spPr>
+        <p:txBody>
+          <a:bodyPr lIns="91440" rIns="91440" tIns="45720" bIns="45720" anchor="t">
+            <a:noAutofit/>
+          </a:bodyPr>
+          <a:p>
+            <a:pPr marL="171360" indent="-171360" defTabSz="685800">
+              <a:lnSpc>
+                <a:spcPct val="90000"/>
+              </a:lnSpc>
+              <a:spcBef>
+                <a:spcPts val="751"/>
+              </a:spcBef>
+              <a:buClr>
+                <a:srgbClr val="000000"/>
+              </a:buClr>
+              <a:buFont typeface="Arial"/>
+              <a:buChar char="•"/>
+            </a:pPr>
+            <a:r>
+              <a:rPr lang="de-DE" sz="2100" b="0" u="none" strike="noStrike">
+                <a:solidFill>
+                  <a:schemeClr val="dk1"/>
+                </a:solidFill>
+                <a:effectLst/>
+                <a:uFillTx/>
+                <a:latin typeface="Calibri"/>
+              </a:rPr>
+              <a:t>Mastertextformat bearbeiten</a:t>
+            </a:r>
+            <a:endParaRPr lang="de-DE" sz="2100" b="0" u="none" strike="noStrike">
+              <a:solidFill>
+                <a:srgbClr val="000000"/>
+              </a:solidFill>
+              <a:effectLst/>
+              <a:uFillTx/>
+              <a:latin typeface="Arial"/>
+            </a:endParaRPr>
+          </a:p>
+          <a:p>
+            <a:pPr marL="514440" lvl="1" indent="-171360" defTabSz="685800">
+              <a:lnSpc>
+                <a:spcPct val="90000"/>
+              </a:lnSpc>
+              <a:spcBef>
+                <a:spcPts val="374"/>
+              </a:spcBef>
+              <a:buClr>
+                <a:srgbClr val="000000"/>
+              </a:buClr>
+              <a:buFont typeface="Arial"/>
+              <a:buChar char="•"/>
+            </a:pPr>
+            <a:r>
+              <a:rPr lang="de-DE" sz="1800" b="0" u="none" strike="noStrike">
+                <a:solidFill>
+                  <a:schemeClr val="dk1"/>
+                </a:solidFill>
+                <a:effectLst/>
+                <a:uFillTx/>
+                <a:latin typeface="Calibri"/>
+              </a:rPr>
+              <a:t>Zweite Ebene</a:t>
+            </a:r>
+            <a:endParaRPr lang="de-DE" sz="1800" b="0" u="none" strike="noStrike">
+              <a:solidFill>
+                <a:srgbClr val="000000"/>
+              </a:solidFill>
+              <a:effectLst/>
+              <a:uFillTx/>
+              <a:latin typeface="Arial"/>
+            </a:endParaRPr>
+          </a:p>
+          <a:p>
+            <a:pPr marL="857160" lvl="2" indent="-171360" defTabSz="685800">
+              <a:lnSpc>
+                <a:spcPct val="90000"/>
+              </a:lnSpc>
+              <a:spcBef>
+                <a:spcPts val="374"/>
+              </a:spcBef>
+              <a:buClr>
+                <a:srgbClr val="000000"/>
+              </a:buClr>
+              <a:buFont typeface="Arial"/>
+              <a:buChar char="•"/>
+            </a:pPr>
+            <a:r>
+              <a:rPr lang="de-DE" sz="1500" b="0" u="none" strike="noStrike">
+                <a:solidFill>
+                  <a:schemeClr val="dk1"/>
+                </a:solidFill>
+                <a:effectLst/>
+                <a:uFillTx/>
+                <a:latin typeface="Calibri"/>
+              </a:rPr>
+              <a:t>Dritte Ebene</a:t>
+            </a:r>
+            <a:endParaRPr lang="de-DE" sz="1500" b="0" u="none" strike="noStrike">
+              <a:solidFill>
+                <a:srgbClr val="000000"/>
+              </a:solidFill>
+              <a:effectLst/>
+              <a:uFillTx/>
+              <a:latin typeface="Arial"/>
+            </a:endParaRPr>
+          </a:p>
+          <a:p>
+            <a:pPr marL="1200240" lvl="3" indent="-171360" defTabSz="685800">
+              <a:lnSpc>
+                <a:spcPct val="90000"/>
+              </a:lnSpc>
+              <a:spcBef>
+                <a:spcPts val="374"/>
+              </a:spcBef>
+              <a:buClr>
+                <a:srgbClr val="000000"/>
+              </a:buClr>
+              <a:buFont typeface="Arial"/>
+              <a:buChar char="•"/>
+            </a:pPr>
+            <a:r>
+              <a:rPr lang="de-DE" sz="1350" b="0" u="none" strike="noStrike">
+                <a:solidFill>
+                  <a:schemeClr val="dk1"/>
+                </a:solidFill>
+                <a:effectLst/>
+                <a:uFillTx/>
+                <a:latin typeface="Calibri"/>
+              </a:rPr>
+              <a:t>Vierte Ebene</a:t>
+            </a:r>
+            <a:endParaRPr lang="de-DE" sz="1350" b="0" u="none" strike="noStrike">
+              <a:solidFill>
+                <a:srgbClr val="000000"/>
+              </a:solidFill>
+              <a:effectLst/>
+              <a:uFillTx/>
+              <a:latin typeface="Arial"/>
+            </a:endParaRPr>
+          </a:p>
+          <a:p>
+            <a:pPr marL="1542960" lvl="4" indent="-171360" defTabSz="685800">
+              <a:lnSpc>
+                <a:spcPct val="90000"/>
+              </a:lnSpc>
+              <a:spcBef>
+                <a:spcPts val="374"/>
+              </a:spcBef>
+              <a:buClr>
+                <a:srgbClr val="000000"/>
+              </a:buClr>
+              <a:buFont typeface="Arial"/>
+              <a:buChar char="•"/>
+            </a:pPr>
+            <a:r>
+              <a:rPr lang="de-DE" sz="1350" b="0" u="none" strike="noStrike">
+                <a:solidFill>
+                  <a:schemeClr val="dk1"/>
+                </a:solidFill>
+                <a:effectLst/>
+                <a:uFillTx/>
+                <a:latin typeface="Calibri"/>
+              </a:rPr>
+              <a:t>Fünfte Ebene</a:t>
+            </a:r>
+            <a:endParaRPr lang="de-DE" sz="1350" b="0" u="none" strike="noStrike">
+              <a:solidFill>
+                <a:srgbClr val="000000"/>
+              </a:solidFill>
+              <a:effectLst/>
+              <a:uFillTx/>
+              <a:latin typeface="Arial"/>
+            </a:endParaRPr>
+          </a:p>
+        </p:txBody>
+      </p:sp>
+      <p:sp>
+        <p:nvSpPr>
+          <p:cNvPr id="4" name="PlaceHolder 3"/>
+          <p:cNvSpPr>
+            <a:spLocks noGrp="1"/>
+          </p:cNvSpPr>
+          <p:nvPr>
+            <p:ph type="body"/>
+          </p:nvPr>
+        </p:nvSpPr>
+        <p:spPr>
+          <a:xfrm>
+            <a:off x="3471840" y="2637000"/>
+            <a:ext cx="2909520" cy="6280200"/>
+          </a:xfrm>
+          <a:prstGeom prst="rect">
+            <a:avLst/>
+          </a:prstGeom>
+          <a:noFill/>
+          <a:ln w="0">
+            <a:noFill/>
+          </a:ln>
+        </p:spPr>
+        <p:txBody>
+          <a:bodyPr lIns="91440" rIns="91440" tIns="45720" bIns="45720" anchor="t">
+            <a:noAutofit/>
+          </a:bodyPr>
+          <a:p>
+            <a:pPr marL="171360" indent="-171360" defTabSz="685800">
+              <a:lnSpc>
+                <a:spcPct val="90000"/>
+              </a:lnSpc>
+              <a:spcBef>
+                <a:spcPts val="751"/>
+              </a:spcBef>
+              <a:buClr>
+                <a:srgbClr val="000000"/>
+              </a:buClr>
+              <a:buFont typeface="Arial"/>
+              <a:buChar char="•"/>
+            </a:pPr>
+            <a:r>
+              <a:rPr lang="de-DE" sz="2100" b="0" u="none" strike="noStrike">
+                <a:solidFill>
+                  <a:schemeClr val="dk1"/>
+                </a:solidFill>
+                <a:effectLst/>
+                <a:uFillTx/>
+                <a:latin typeface="Calibri"/>
+              </a:rPr>
+              <a:t>Mastertextformat bearbeiten</a:t>
+            </a:r>
+            <a:endParaRPr lang="de-DE" sz="2100" b="0" u="none" strike="noStrike">
+              <a:solidFill>
+                <a:srgbClr val="000000"/>
+              </a:solidFill>
+              <a:effectLst/>
+              <a:uFillTx/>
+              <a:latin typeface="Arial"/>
+            </a:endParaRPr>
+          </a:p>
+          <a:p>
+            <a:pPr marL="514440" lvl="1" indent="-171360" defTabSz="685800">
+              <a:lnSpc>
+                <a:spcPct val="90000"/>
+              </a:lnSpc>
+              <a:spcBef>
+                <a:spcPts val="374"/>
+              </a:spcBef>
+              <a:buClr>
+                <a:srgbClr val="000000"/>
+              </a:buClr>
+              <a:buFont typeface="Arial"/>
+              <a:buChar char="•"/>
+            </a:pPr>
+            <a:r>
+              <a:rPr lang="de-DE" sz="1800" b="0" u="none" strike="noStrike">
+                <a:solidFill>
+                  <a:schemeClr val="dk1"/>
+                </a:solidFill>
+                <a:effectLst/>
+                <a:uFillTx/>
+                <a:latin typeface="Calibri"/>
+              </a:rPr>
+              <a:t>Zweite Ebene</a:t>
+            </a:r>
+            <a:endParaRPr lang="de-DE" sz="1800" b="0" u="none" strike="noStrike">
+              <a:solidFill>
+                <a:srgbClr val="000000"/>
+              </a:solidFill>
+              <a:effectLst/>
+              <a:uFillTx/>
+              <a:latin typeface="Arial"/>
+            </a:endParaRPr>
+          </a:p>
+          <a:p>
+            <a:pPr marL="857160" lvl="2" indent="-171360" defTabSz="685800">
+              <a:lnSpc>
+                <a:spcPct val="90000"/>
+              </a:lnSpc>
+              <a:spcBef>
+                <a:spcPts val="374"/>
+              </a:spcBef>
+              <a:buClr>
+                <a:srgbClr val="000000"/>
+              </a:buClr>
+              <a:buFont typeface="Arial"/>
+              <a:buChar char="•"/>
+            </a:pPr>
+            <a:r>
+              <a:rPr lang="de-DE" sz="1500" b="0" u="none" strike="noStrike">
+                <a:solidFill>
+                  <a:schemeClr val="dk1"/>
+                </a:solidFill>
+                <a:effectLst/>
+                <a:uFillTx/>
+                <a:latin typeface="Calibri"/>
+              </a:rPr>
+              <a:t>Dritte Ebene</a:t>
+            </a:r>
+            <a:endParaRPr lang="de-DE" sz="1500" b="0" u="none" strike="noStrike">
+              <a:solidFill>
+                <a:srgbClr val="000000"/>
+              </a:solidFill>
+              <a:effectLst/>
+              <a:uFillTx/>
+              <a:latin typeface="Arial"/>
+            </a:endParaRPr>
+          </a:p>
+          <a:p>
+            <a:pPr marL="1200240" lvl="3" indent="-171360" defTabSz="685800">
+              <a:lnSpc>
+                <a:spcPct val="90000"/>
+              </a:lnSpc>
+              <a:spcBef>
+                <a:spcPts val="374"/>
+              </a:spcBef>
+              <a:buClr>
+                <a:srgbClr val="000000"/>
+              </a:buClr>
+              <a:buFont typeface="Arial"/>
+              <a:buChar char="•"/>
+            </a:pPr>
+            <a:r>
+              <a:rPr lang="de-DE" sz="1350" b="0" u="none" strike="noStrike">
+                <a:solidFill>
+                  <a:schemeClr val="dk1"/>
+                </a:solidFill>
+                <a:effectLst/>
+                <a:uFillTx/>
+                <a:latin typeface="Calibri"/>
+              </a:rPr>
+              <a:t>Vierte Ebene</a:t>
+            </a:r>
+            <a:endParaRPr lang="de-DE" sz="1350" b="0" u="none" strike="noStrike">
+              <a:solidFill>
+                <a:srgbClr val="000000"/>
+              </a:solidFill>
+              <a:effectLst/>
+              <a:uFillTx/>
+              <a:latin typeface="Arial"/>
+            </a:endParaRPr>
+          </a:p>
+          <a:p>
+            <a:pPr marL="1542960" lvl="4" indent="-171360" defTabSz="685800">
+              <a:lnSpc>
+                <a:spcPct val="90000"/>
+              </a:lnSpc>
+              <a:spcBef>
+                <a:spcPts val="374"/>
+              </a:spcBef>
+              <a:buClr>
+                <a:srgbClr val="000000"/>
+              </a:buClr>
+              <a:buFont typeface="Arial"/>
+              <a:buChar char="•"/>
+            </a:pPr>
+            <a:r>
+              <a:rPr lang="de-DE" sz="1350" b="0" u="none" strike="noStrike">
+                <a:solidFill>
+                  <a:schemeClr val="dk1"/>
+                </a:solidFill>
+                <a:effectLst/>
+                <a:uFillTx/>
+                <a:latin typeface="Calibri"/>
+              </a:rPr>
+              <a:t>Fünfte Ebene</a:t>
+            </a:r>
+            <a:endParaRPr lang="de-DE" sz="1350" b="0" u="none" strike="noStrike">
+              <a:solidFill>
+                <a:srgbClr val="000000"/>
+              </a:solidFill>
+              <a:effectLst/>
+              <a:uFillTx/>
+              <a:latin typeface="Arial"/>
+            </a:endParaRPr>
+          </a:p>
+        </p:txBody>
+      </p:sp>
+      <p:sp>
+        <p:nvSpPr>
+          <p:cNvPr id="5" name="PlaceHolder 4"/>
+          <p:cNvSpPr>
+            <a:spLocks noGrp="1"/>
+          </p:cNvSpPr>
+          <p:nvPr>
+            <p:ph type="dt" idx="1"/>
+          </p:nvPr>
+        </p:nvSpPr>
+        <p:spPr>
+          <a:xfrm>
+            <a:off x="471600" y="9181440"/>
+            <a:ext cx="1537920" cy="522360"/>
+          </a:xfrm>
+          <a:prstGeom prst="rect">
+            <a:avLst/>
+          </a:prstGeom>
+          <a:noFill/>
+          <a:ln w="0">
+            <a:noFill/>
+          </a:ln>
+        </p:spPr>
+        <p:txBody>
+          <a:bodyPr lIns="91440" rIns="91440" tIns="45720" bIns="45720" anchor="ctr">
+            <a:noAutofit/>
+          </a:bodyPr>
+          <a:lstStyle>
+            <a:lvl1pPr indent="0" defTabSz="457200">
+              <a:lnSpc>
+                <a:spcPct val="100000"/>
+              </a:lnSpc>
+              <a:buNone/>
+              <a:tabLst>
+                <a:tab algn="l" pos="0"/>
+              </a:tabLst>
+              <a:defRPr lang="de-DE" sz="900" b="0" u="none" strike="noStrike">
+                <a:solidFill>
+                  <a:schemeClr val="dk1">
+                    <a:tint val="75000"/>
+                  </a:schemeClr>
+                </a:solidFill>
+                <a:effectLst/>
+                <a:uFillTx/>
+                <a:latin typeface="Calibri"/>
+              </a:defRPr>
+            </a:lvl1pPr>
+          </a:lstStyle>
+          <a:p>
+            <a:pPr indent="0" defTabSz="457200">
+              <a:lnSpc>
+                <a:spcPct val="100000"/>
+              </a:lnSpc>
+              <a:buNone/>
+              <a:tabLst>
+                <a:tab algn="l" pos="0"/>
+              </a:tabLst>
+            </a:pPr>
+            <a:r>
+              <a:rPr lang="de-DE" sz="900" b="0" u="none" strike="noStrike">
+                <a:solidFill>
+                  <a:schemeClr val="dk1">
+                    <a:tint val="75000"/>
+                  </a:schemeClr>
+                </a:solidFill>
+                <a:effectLst/>
+                <a:uFillTx/>
+                <a:latin typeface="Calibri"/>
+              </a:rPr>
+              <a:t>&lt;Datum/Uhrzeit&gt;</a:t>
+            </a:r>
+            <a:endParaRPr lang="de-DE" sz="900" b="0" u="none" strike="noStrike">
+              <a:solidFill>
+                <a:srgbClr val="000000"/>
+              </a:solidFill>
+              <a:effectLst/>
+              <a:uFillTx/>
+              <a:latin typeface="Times New Roman"/>
+            </a:endParaRPr>
+          </a:p>
+        </p:txBody>
+      </p:sp>
+      <p:sp>
+        <p:nvSpPr>
+          <p:cNvPr id="6" name="PlaceHolder 5"/>
+          <p:cNvSpPr>
+            <a:spLocks noGrp="1"/>
+          </p:cNvSpPr>
+          <p:nvPr>
+            <p:ph type="ftr" idx="2"/>
+          </p:nvPr>
+        </p:nvSpPr>
+        <p:spPr>
+          <a:xfrm>
+            <a:off x="2271600" y="9181440"/>
+            <a:ext cx="2309400" cy="522360"/>
+          </a:xfrm>
+          <a:prstGeom prst="rect">
+            <a:avLst/>
+          </a:prstGeom>
+          <a:noFill/>
+          <a:ln w="0">
+            <a:noFill/>
+          </a:ln>
+        </p:spPr>
+        <p:txBody>
+          <a:bodyPr lIns="91440" rIns="91440" tIns="45720" bIns="45720" anchor="ctr">
+            <a:noAutofit/>
+          </a:bodyPr>
+          <a:lstStyle>
+            <a:lvl1pPr indent="0" algn="ctr">
+              <a:lnSpc>
+                <a:spcPct val="100000"/>
+              </a:lnSpc>
+              <a:buNone/>
+              <a:tabLst>
+                <a:tab algn="l" pos="0"/>
+              </a:tabLst>
+              <a:defRPr lang="de-DE" sz="1400" b="0" u="none" strike="noStrike">
+                <a:solidFill>
+                  <a:srgbClr val="000000"/>
+                </a:solidFill>
+                <a:effectLst/>
+                <a:uFillTx/>
+                <a:latin typeface="Times New Roman"/>
+              </a:defRPr>
+            </a:lvl1pPr>
+          </a:lstStyle>
+          <a:p>
+            <a:pPr indent="0" algn="ctr">
+              <a:lnSpc>
+                <a:spcPct val="100000"/>
+              </a:lnSpc>
+              <a:buNone/>
+              <a:tabLst>
+                <a:tab algn="l" pos="0"/>
+              </a:tabLst>
+            </a:pPr>
+            <a:r>
+              <a:rPr lang="de-DE" sz="1400" b="0" u="none" strike="noStrike">
+                <a:solidFill>
+                  <a:srgbClr val="000000"/>
+                </a:solidFill>
+                <a:effectLst/>
+                <a:uFillTx/>
+                <a:latin typeface="Times New Roman"/>
+              </a:rPr>
+              <a:t>&lt;Fußzeile&gt;</a:t>
+            </a:r>
+            <a:endParaRPr lang="de-DE" sz="1400" b="0" u="none" strike="noStrike">
+              <a:solidFill>
+                <a:srgbClr val="000000"/>
+              </a:solidFill>
+              <a:effectLst/>
+              <a:uFillTx/>
+              <a:latin typeface="Times New Roman"/>
+            </a:endParaRPr>
+          </a:p>
+        </p:txBody>
+      </p:sp>
+      <p:sp>
+        <p:nvSpPr>
+          <p:cNvPr id="7" name="PlaceHolder 6"/>
+          <p:cNvSpPr>
+            <a:spLocks noGrp="1"/>
+          </p:cNvSpPr>
+          <p:nvPr>
+            <p:ph type="sldNum" idx="3"/>
+          </p:nvPr>
+        </p:nvSpPr>
+        <p:spPr>
+          <a:xfrm>
+            <a:off x="4843440" y="9181440"/>
+            <a:ext cx="1537920" cy="522360"/>
+          </a:xfrm>
+          <a:prstGeom prst="rect">
+            <a:avLst/>
+          </a:prstGeom>
+          <a:noFill/>
+          <a:ln w="0">
+            <a:noFill/>
+          </a:ln>
+        </p:spPr>
+        <p:txBody>
+          <a:bodyPr lIns="91440" rIns="91440" tIns="45720" bIns="45720" anchor="ctr">
+            <a:noAutofit/>
+          </a:bodyPr>
+          <a:lstStyle>
+            <a:lvl1pPr indent="0" algn="r" defTabSz="457200">
+              <a:lnSpc>
+                <a:spcPct val="100000"/>
+              </a:lnSpc>
+              <a:buNone/>
+              <a:tabLst>
+                <a:tab algn="l" pos="0"/>
+              </a:tabLst>
+              <a:defRPr lang="de-DE" sz="900" b="0" u="none" strike="noStrike">
+                <a:solidFill>
+                  <a:schemeClr val="dk1">
+                    <a:tint val="75000"/>
+                  </a:schemeClr>
+                </a:solidFill>
+                <a:effectLst/>
+                <a:uFillTx/>
+                <a:latin typeface="Calibri"/>
+              </a:defRPr>
+            </a:lvl1pPr>
+          </a:lstStyle>
+          <a:p>
+            <a:pPr indent="0" algn="r" defTabSz="457200">
+              <a:lnSpc>
+                <a:spcPct val="100000"/>
+              </a:lnSpc>
+              <a:buNone/>
+              <a:tabLst>
+                <a:tab algn="l" pos="0"/>
+              </a:tabLst>
+            </a:pPr>
+            <a:fld id="{326698E9-4CCC-40E5-A94C-B8BB67260F07}" type="slidenum">
+              <a:rPr lang="de-DE" sz="900" b="0" u="none" strike="noStrike">
+                <a:solidFill>
+                  <a:schemeClr val="dk1">
+                    <a:tint val="75000"/>
+                  </a:schemeClr>
+                </a:solidFill>
+                <a:effectLst/>
+                <a:uFillTx/>
+                <a:latin typeface="Calibri"/>
+              </a:rPr>
+              <a:t>&lt;Foliennummer&gt;</a:t>
+            </a:fld>
+            <a:endParaRPr lang="de-DE" sz="900" b="0" u="none" strike="noStrike">
+              <a:solidFill>
+                <a:srgbClr val="000000"/>
+              </a:solidFill>
+              <a:effectLst/>
+              <a:uFillTx/>
+              <a:latin typeface="Times New Roman"/>
+            </a:endParaRPr>
+          </a:p>
+        </p:txBody>
+      </p:sp>
+    </p:spTree>
+  </p:cSld>
+</p:sldLayout>
+</file>
+
+<file path=ppt/slideLayouts/slideLayout10.xml><?xml version="1.0" encoding="utf-8"?>
+<p:sldLayout xmlns:a="http://schemas.openxmlformats.org/drawingml/2006/main" xmlns:p="http://schemas.openxmlformats.org/presentationml/2006/main" xmlns:r="http://schemas.openxmlformats.org/officeDocument/2006/relationships" xmlns:p14="http://schemas.microsoft.com/office/powerpoint/2010/main" xmlns:p15="http://schemas.microsoft.com/office/powerpoint/2012/main" xmlns:mc="http://schemas.openxmlformats.org/markup-compatibility/2006" type="obj" preserve="1">
+  <p:cSld name="Titel und Inhalt">
+    <p:bg>
+      <p:bgPr>
+        <a:solidFill>
+          <a:srgbClr val="ffffff"/>
+        </a:solidFill>
+      </p:bgPr>
+    </p:bg>
+    <p:spTree>
+      <p:nvGrpSpPr>
+        <p:cNvPr id="1" name=""/>
+        <p:cNvGrpSpPr/>
+        <p:nvPr/>
+      </p:nvGrpSpPr>
+      <p:grpSpPr>
+        <a:xfrm>
+          <a:off x="0" y="0"/>
+          <a:ext cx="0" cy="0"/>
+          <a:chOff x="0" y="0"/>
+          <a:chExt cx="0" cy="0"/>
+        </a:xfrm>
+      </p:grpSpPr>
+      <p:sp>
+        <p:nvSpPr>
+          <p:cNvPr id="50" name="PlaceHolder 1"/>
+          <p:cNvSpPr>
+            <a:spLocks noGrp="1"/>
+          </p:cNvSpPr>
+          <p:nvPr>
+            <p:ph type="title"/>
+          </p:nvPr>
+        </p:nvSpPr>
+        <p:spPr>
+          <a:xfrm>
+            <a:off x="471600" y="527400"/>
+            <a:ext cx="5910120" cy="1909800"/>
+          </a:xfrm>
+          <a:prstGeom prst="rect">
+            <a:avLst/>
+          </a:prstGeom>
+          <a:noFill/>
+          <a:ln w="0">
+            <a:noFill/>
+          </a:ln>
+        </p:spPr>
+        <p:txBody>
+          <a:bodyPr lIns="91440" rIns="91440" tIns="45720" bIns="45720" anchor="ctr">
+            <a:noAutofit/>
+          </a:bodyPr>
+          <a:p>
+            <a:pPr indent="0" defTabSz="685800">
+              <a:lnSpc>
+                <a:spcPct val="90000"/>
+              </a:lnSpc>
+              <a:buNone/>
+              <a:tabLst>
+                <a:tab algn="l" pos="0"/>
+              </a:tabLst>
+            </a:pPr>
+            <a:r>
+              <a:rPr lang="de-DE" sz="3300" b="0" u="none" strike="noStrike">
+                <a:solidFill>
+                  <a:schemeClr val="dk1"/>
+                </a:solidFill>
+                <a:effectLst/>
+                <a:uFillTx/>
+                <a:latin typeface="Calibri Light"/>
+              </a:rPr>
+              <a:t>Mastertitelformat bearbeiten</a:t>
+            </a:r>
+            <a:endParaRPr lang="de-DE" sz="3300" b="0" u="none" strike="noStrike">
+              <a:solidFill>
+                <a:srgbClr val="000000"/>
+              </a:solidFill>
+              <a:effectLst/>
+              <a:uFillTx/>
+              <a:latin typeface="Arial"/>
+            </a:endParaRPr>
+          </a:p>
+        </p:txBody>
+      </p:sp>
+      <p:sp>
+        <p:nvSpPr>
+          <p:cNvPr id="51" name="PlaceHolder 2"/>
+          <p:cNvSpPr>
+            <a:spLocks noGrp="1"/>
+          </p:cNvSpPr>
+          <p:nvPr>
+            <p:ph type="body"/>
+          </p:nvPr>
+        </p:nvSpPr>
+        <p:spPr>
+          <a:xfrm>
+            <a:off x="471600" y="2637000"/>
+            <a:ext cx="5910120" cy="6280200"/>
+          </a:xfrm>
+          <a:prstGeom prst="rect">
+            <a:avLst/>
+          </a:prstGeom>
+          <a:noFill/>
+          <a:ln w="0">
+            <a:noFill/>
+          </a:ln>
+        </p:spPr>
+        <p:txBody>
+          <a:bodyPr lIns="91440" rIns="91440" tIns="45720" bIns="45720" anchor="t">
+            <a:noAutofit/>
+          </a:bodyPr>
+          <a:p>
+            <a:pPr marL="171360" indent="-171360" defTabSz="685800">
+              <a:lnSpc>
+                <a:spcPct val="90000"/>
+              </a:lnSpc>
+              <a:spcBef>
+                <a:spcPts val="751"/>
+              </a:spcBef>
+              <a:buClr>
+                <a:srgbClr val="000000"/>
+              </a:buClr>
+              <a:buFont typeface="Arial"/>
+              <a:buChar char="•"/>
+            </a:pPr>
+            <a:r>
+              <a:rPr lang="de-DE" sz="2100" b="0" u="none" strike="noStrike">
+                <a:solidFill>
+                  <a:schemeClr val="dk1"/>
+                </a:solidFill>
+                <a:effectLst/>
+                <a:uFillTx/>
+                <a:latin typeface="Calibri"/>
+              </a:rPr>
+              <a:t>Mastertextformat bearbeiten</a:t>
+            </a:r>
+            <a:endParaRPr lang="de-DE" sz="2100" b="0" u="none" strike="noStrike">
+              <a:solidFill>
+                <a:srgbClr val="000000"/>
+              </a:solidFill>
+              <a:effectLst/>
+              <a:uFillTx/>
+              <a:latin typeface="Arial"/>
+            </a:endParaRPr>
+          </a:p>
+          <a:p>
+            <a:pPr marL="514440" lvl="1" indent="-171360" defTabSz="685800">
+              <a:lnSpc>
+                <a:spcPct val="90000"/>
+              </a:lnSpc>
+              <a:spcBef>
+                <a:spcPts val="374"/>
+              </a:spcBef>
+              <a:buClr>
+                <a:srgbClr val="000000"/>
+              </a:buClr>
+              <a:buFont typeface="Arial"/>
+              <a:buChar char="•"/>
+            </a:pPr>
+            <a:r>
+              <a:rPr lang="de-DE" sz="1800" b="0" u="none" strike="noStrike">
+                <a:solidFill>
+                  <a:schemeClr val="dk1"/>
+                </a:solidFill>
+                <a:effectLst/>
+                <a:uFillTx/>
+                <a:latin typeface="Calibri"/>
+              </a:rPr>
+              <a:t>Zweite Ebene</a:t>
+            </a:r>
+            <a:endParaRPr lang="de-DE" sz="1800" b="0" u="none" strike="noStrike">
+              <a:solidFill>
+                <a:srgbClr val="000000"/>
+              </a:solidFill>
+              <a:effectLst/>
+              <a:uFillTx/>
+              <a:latin typeface="Arial"/>
+            </a:endParaRPr>
+          </a:p>
+          <a:p>
+            <a:pPr marL="857160" lvl="2" indent="-171360" defTabSz="685800">
+              <a:lnSpc>
+                <a:spcPct val="90000"/>
+              </a:lnSpc>
+              <a:spcBef>
+                <a:spcPts val="374"/>
+              </a:spcBef>
+              <a:buClr>
+                <a:srgbClr val="000000"/>
+              </a:buClr>
+              <a:buFont typeface="Arial"/>
+              <a:buChar char="•"/>
+            </a:pPr>
+            <a:r>
+              <a:rPr lang="de-DE" sz="1500" b="0" u="none" strike="noStrike">
+                <a:solidFill>
+                  <a:schemeClr val="dk1"/>
+                </a:solidFill>
+                <a:effectLst/>
+                <a:uFillTx/>
+                <a:latin typeface="Calibri"/>
+              </a:rPr>
+              <a:t>Dritte Ebene</a:t>
+            </a:r>
+            <a:endParaRPr lang="de-DE" sz="1500" b="0" u="none" strike="noStrike">
+              <a:solidFill>
+                <a:srgbClr val="000000"/>
+              </a:solidFill>
+              <a:effectLst/>
+              <a:uFillTx/>
+              <a:latin typeface="Arial"/>
+            </a:endParaRPr>
+          </a:p>
+          <a:p>
+            <a:pPr marL="1200240" lvl="3" indent="-171360" defTabSz="685800">
+              <a:lnSpc>
+                <a:spcPct val="90000"/>
+              </a:lnSpc>
+              <a:spcBef>
+                <a:spcPts val="374"/>
+              </a:spcBef>
+              <a:buClr>
+                <a:srgbClr val="000000"/>
+              </a:buClr>
+              <a:buFont typeface="Arial"/>
+              <a:buChar char="•"/>
+            </a:pPr>
+            <a:r>
+              <a:rPr lang="de-DE" sz="1350" b="0" u="none" strike="noStrike">
+                <a:solidFill>
+                  <a:schemeClr val="dk1"/>
+                </a:solidFill>
+                <a:effectLst/>
+                <a:uFillTx/>
+                <a:latin typeface="Calibri"/>
+              </a:rPr>
+              <a:t>Vierte Ebene</a:t>
+            </a:r>
+            <a:endParaRPr lang="de-DE" sz="1350" b="0" u="none" strike="noStrike">
+              <a:solidFill>
+                <a:srgbClr val="000000"/>
+              </a:solidFill>
+              <a:effectLst/>
+              <a:uFillTx/>
+              <a:latin typeface="Arial"/>
+            </a:endParaRPr>
+          </a:p>
+          <a:p>
+            <a:pPr marL="1542960" lvl="4" indent="-171360" defTabSz="685800">
+              <a:lnSpc>
+                <a:spcPct val="90000"/>
+              </a:lnSpc>
+              <a:spcBef>
+                <a:spcPts val="374"/>
+              </a:spcBef>
+              <a:buClr>
+                <a:srgbClr val="000000"/>
+              </a:buClr>
+              <a:buFont typeface="Arial"/>
+              <a:buChar char="•"/>
+            </a:pPr>
+            <a:r>
+              <a:rPr lang="de-DE" sz="1350" b="0" u="none" strike="noStrike">
+                <a:solidFill>
+                  <a:schemeClr val="dk1"/>
+                </a:solidFill>
+                <a:effectLst/>
+                <a:uFillTx/>
+                <a:latin typeface="Calibri"/>
+              </a:rPr>
+              <a:t>Fünfte Ebene</a:t>
+            </a:r>
+            <a:endParaRPr lang="de-DE" sz="1350" b="0" u="none" strike="noStrike">
+              <a:solidFill>
+                <a:srgbClr val="000000"/>
+              </a:solidFill>
+              <a:effectLst/>
+              <a:uFillTx/>
+              <a:latin typeface="Arial"/>
+            </a:endParaRPr>
+          </a:p>
+        </p:txBody>
+      </p:sp>
+      <p:sp>
+        <p:nvSpPr>
+          <p:cNvPr id="52" name="PlaceHolder 3"/>
+          <p:cNvSpPr>
+            <a:spLocks noGrp="1"/>
+          </p:cNvSpPr>
+          <p:nvPr>
+            <p:ph type="dt" idx="28"/>
+          </p:nvPr>
+        </p:nvSpPr>
+        <p:spPr>
+          <a:xfrm>
+            <a:off x="471600" y="9181440"/>
+            <a:ext cx="1537920" cy="522360"/>
+          </a:xfrm>
+          <a:prstGeom prst="rect">
+            <a:avLst/>
+          </a:prstGeom>
+          <a:noFill/>
+          <a:ln w="0">
+            <a:noFill/>
+          </a:ln>
+        </p:spPr>
+        <p:txBody>
+          <a:bodyPr lIns="91440" rIns="91440" tIns="45720" bIns="45720" anchor="ctr">
+            <a:noAutofit/>
+          </a:bodyPr>
+          <a:lstStyle>
+            <a:lvl1pPr indent="0" defTabSz="457200">
+              <a:lnSpc>
+                <a:spcPct val="100000"/>
+              </a:lnSpc>
+              <a:buNone/>
+              <a:tabLst>
+                <a:tab algn="l" pos="0"/>
+              </a:tabLst>
+              <a:defRPr lang="de-DE" sz="900" b="0" u="none" strike="noStrike">
+                <a:solidFill>
+                  <a:schemeClr val="dk1">
+                    <a:tint val="75000"/>
+                  </a:schemeClr>
+                </a:solidFill>
+                <a:effectLst/>
+                <a:uFillTx/>
+                <a:latin typeface="Calibri"/>
+              </a:defRPr>
+            </a:lvl1pPr>
+          </a:lstStyle>
+          <a:p>
+            <a:pPr indent="0" defTabSz="457200">
+              <a:lnSpc>
+                <a:spcPct val="100000"/>
+              </a:lnSpc>
+              <a:buNone/>
+              <a:tabLst>
+                <a:tab algn="l" pos="0"/>
+              </a:tabLst>
+            </a:pPr>
+            <a:r>
+              <a:rPr lang="de-DE" sz="900" b="0" u="none" strike="noStrike">
+                <a:solidFill>
+                  <a:schemeClr val="dk1">
+                    <a:tint val="75000"/>
+                  </a:schemeClr>
+                </a:solidFill>
+                <a:effectLst/>
+                <a:uFillTx/>
+                <a:latin typeface="Calibri"/>
+              </a:rPr>
+              <a:t>&lt;Datum/Uhrzeit&gt;</a:t>
+            </a:r>
+            <a:endParaRPr lang="de-DE" sz="900" b="0" u="none" strike="noStrike">
+              <a:solidFill>
+                <a:srgbClr val="000000"/>
+              </a:solidFill>
+              <a:effectLst/>
+              <a:uFillTx/>
+              <a:latin typeface="Times New Roman"/>
+            </a:endParaRPr>
+          </a:p>
+        </p:txBody>
+      </p:sp>
+      <p:sp>
+        <p:nvSpPr>
+          <p:cNvPr id="53" name="PlaceHolder 4"/>
+          <p:cNvSpPr>
+            <a:spLocks noGrp="1"/>
+          </p:cNvSpPr>
+          <p:nvPr>
+            <p:ph type="ftr" idx="29"/>
+          </p:nvPr>
+        </p:nvSpPr>
+        <p:spPr>
+          <a:xfrm>
+            <a:off x="2271600" y="9181440"/>
+            <a:ext cx="2309400" cy="522360"/>
+          </a:xfrm>
+          <a:prstGeom prst="rect">
+            <a:avLst/>
+          </a:prstGeom>
+          <a:noFill/>
+          <a:ln w="0">
+            <a:noFill/>
+          </a:ln>
+        </p:spPr>
+        <p:txBody>
+          <a:bodyPr lIns="91440" rIns="91440" tIns="45720" bIns="45720" anchor="ctr">
+            <a:noAutofit/>
+          </a:bodyPr>
+          <a:lstStyle>
+            <a:lvl1pPr indent="0" algn="ctr">
+              <a:lnSpc>
+                <a:spcPct val="100000"/>
+              </a:lnSpc>
+              <a:buNone/>
+              <a:tabLst>
+                <a:tab algn="l" pos="0"/>
+              </a:tabLst>
+              <a:defRPr lang="de-DE" sz="1400" b="0" u="none" strike="noStrike">
+                <a:solidFill>
+                  <a:srgbClr val="000000"/>
+                </a:solidFill>
+                <a:effectLst/>
+                <a:uFillTx/>
+                <a:latin typeface="Times New Roman"/>
+              </a:defRPr>
+            </a:lvl1pPr>
+          </a:lstStyle>
+          <a:p>
+            <a:pPr indent="0" algn="ctr">
+              <a:lnSpc>
+                <a:spcPct val="100000"/>
+              </a:lnSpc>
+              <a:buNone/>
+              <a:tabLst>
+                <a:tab algn="l" pos="0"/>
+              </a:tabLst>
+            </a:pPr>
+            <a:r>
+              <a:rPr lang="de-DE" sz="1400" b="0" u="none" strike="noStrike">
+                <a:solidFill>
+                  <a:srgbClr val="000000"/>
+                </a:solidFill>
+                <a:effectLst/>
+                <a:uFillTx/>
+                <a:latin typeface="Times New Roman"/>
+              </a:rPr>
+              <a:t>&lt;Fußzeile&gt;</a:t>
+            </a:r>
+            <a:endParaRPr lang="de-DE" sz="1400" b="0" u="none" strike="noStrike">
+              <a:solidFill>
+                <a:srgbClr val="000000"/>
+              </a:solidFill>
+              <a:effectLst/>
+              <a:uFillTx/>
+              <a:latin typeface="Times New Roman"/>
+            </a:endParaRPr>
+          </a:p>
+        </p:txBody>
+      </p:sp>
+      <p:sp>
+        <p:nvSpPr>
+          <p:cNvPr id="54" name="PlaceHolder 5"/>
+          <p:cNvSpPr>
+            <a:spLocks noGrp="1"/>
+          </p:cNvSpPr>
+          <p:nvPr>
+            <p:ph type="sldNum" idx="30"/>
+          </p:nvPr>
+        </p:nvSpPr>
+        <p:spPr>
+          <a:xfrm>
+            <a:off x="4843440" y="9181440"/>
+            <a:ext cx="1537920" cy="522360"/>
+          </a:xfrm>
+          <a:prstGeom prst="rect">
+            <a:avLst/>
+          </a:prstGeom>
+          <a:noFill/>
+          <a:ln w="0">
+            <a:noFill/>
+          </a:ln>
+        </p:spPr>
+        <p:txBody>
+          <a:bodyPr lIns="91440" rIns="91440" tIns="45720" bIns="45720" anchor="ctr">
+            <a:noAutofit/>
+          </a:bodyPr>
+          <a:lstStyle>
+            <a:lvl1pPr indent="0" algn="r" defTabSz="457200">
+              <a:lnSpc>
+                <a:spcPct val="100000"/>
+              </a:lnSpc>
+              <a:buNone/>
+              <a:tabLst>
+                <a:tab algn="l" pos="0"/>
+              </a:tabLst>
+              <a:defRPr lang="de-DE" sz="900" b="0" u="none" strike="noStrike">
+                <a:solidFill>
+                  <a:schemeClr val="dk1">
+                    <a:tint val="75000"/>
+                  </a:schemeClr>
+                </a:solidFill>
+                <a:effectLst/>
+                <a:uFillTx/>
+                <a:latin typeface="Calibri"/>
+              </a:defRPr>
+            </a:lvl1pPr>
+          </a:lstStyle>
+          <a:p>
+            <a:pPr indent="0" algn="r" defTabSz="457200">
+              <a:lnSpc>
+                <a:spcPct val="100000"/>
+              </a:lnSpc>
+              <a:buNone/>
+              <a:tabLst>
+                <a:tab algn="l" pos="0"/>
+              </a:tabLst>
+            </a:pPr>
+            <a:fld id="{F234B2BC-C731-4016-9DBD-727E0F313CCC}" type="slidenum">
+              <a:rPr lang="de-DE" sz="900" b="0" u="none" strike="noStrike">
+                <a:solidFill>
+                  <a:schemeClr val="dk1">
+                    <a:tint val="75000"/>
+                  </a:schemeClr>
+                </a:solidFill>
+                <a:effectLst/>
+                <a:uFillTx/>
+                <a:latin typeface="Calibri"/>
+              </a:rPr>
+              <a:t>&lt;Foliennummer&gt;</a:t>
+            </a:fld>
+            <a:endParaRPr lang="de-DE" sz="900" b="0" u="none" strike="noStrike">
+              <a:solidFill>
+                <a:srgbClr val="000000"/>
+              </a:solidFill>
+              <a:effectLst/>
+              <a:uFillTx/>
+              <a:latin typeface="Times New Roman"/>
+            </a:endParaRPr>
+          </a:p>
+        </p:txBody>
+      </p:sp>
+    </p:spTree>
+  </p:cSld>
+</p:sldLayout>
+</file>
+
+<file path=ppt/slideLayouts/slideLayout11.xml><?xml version="1.0" encoding="utf-8"?>
+<p:sldLayout xmlns:a="http://schemas.openxmlformats.org/drawingml/2006/main" xmlns:p="http://schemas.openxmlformats.org/presentationml/2006/main" xmlns:r="http://schemas.openxmlformats.org/officeDocument/2006/relationships" xmlns:p14="http://schemas.microsoft.com/office/powerpoint/2010/main" xmlns:p15="http://schemas.microsoft.com/office/powerpoint/2012/main" xmlns:mc="http://schemas.openxmlformats.org/markup-compatibility/2006" type="blank" preserve="1">
+  <p:cSld name="Abschnitts-&#10;überschrift">
+    <p:bg>
+      <p:bgPr>
+        <a:solidFill>
+          <a:srgbClr val="ffffff"/>
+        </a:solidFill>
+      </p:bgPr>
+    </p:bg>
+    <p:spTree>
+      <p:nvGrpSpPr>
+        <p:cNvPr id="1" name=""/>
+        <p:cNvGrpSpPr/>
+        <p:nvPr/>
+      </p:nvGrpSpPr>
+      <p:grpSpPr>
+        <a:xfrm>
+          <a:off x="0" y="0"/>
+          <a:ext cx="0" cy="0"/>
+          <a:chOff x="0" y="0"/>
+          <a:chExt cx="0" cy="0"/>
+        </a:xfrm>
+      </p:grpSpPr>
+      <p:sp>
+        <p:nvSpPr>
+          <p:cNvPr id="55" name="PlaceHolder 1"/>
+          <p:cNvSpPr>
+            <a:spLocks noGrp="1"/>
+          </p:cNvSpPr>
+          <p:nvPr>
+            <p:ph type="title"/>
+          </p:nvPr>
+        </p:nvSpPr>
+        <p:spPr>
+          <a:xfrm>
+            <a:off x="468000" y="2469600"/>
+            <a:ext cx="5910120" cy="4115520"/>
+          </a:xfrm>
+          <a:prstGeom prst="rect">
+            <a:avLst/>
+          </a:prstGeom>
+          <a:noFill/>
+          <a:ln w="0">
+            <a:noFill/>
+          </a:ln>
+        </p:spPr>
+        <p:txBody>
+          <a:bodyPr lIns="91440" rIns="91440" tIns="45720" bIns="45720" anchor="b">
+            <a:noAutofit/>
+          </a:bodyPr>
+          <a:p>
+            <a:pPr indent="0" defTabSz="685800">
+              <a:lnSpc>
+                <a:spcPct val="90000"/>
+              </a:lnSpc>
+              <a:buNone/>
+              <a:tabLst>
+                <a:tab algn="l" pos="0"/>
+              </a:tabLst>
+            </a:pPr>
+            <a:r>
+              <a:rPr lang="de-DE" sz="4500" b="0" u="none" strike="noStrike">
+                <a:solidFill>
+                  <a:schemeClr val="dk1"/>
+                </a:solidFill>
+                <a:effectLst/>
+                <a:uFillTx/>
+                <a:latin typeface="Calibri Light"/>
+              </a:rPr>
+              <a:t>Mastertitelformat bearbeiten</a:t>
+            </a:r>
+            <a:endParaRPr lang="de-DE" sz="4500" b="0" u="none" strike="noStrike">
+              <a:solidFill>
+                <a:srgbClr val="000000"/>
+              </a:solidFill>
+              <a:effectLst/>
+              <a:uFillTx/>
+              <a:latin typeface="Arial"/>
+            </a:endParaRPr>
+          </a:p>
+        </p:txBody>
+      </p:sp>
+      <p:sp>
+        <p:nvSpPr>
+          <p:cNvPr id="56" name="PlaceHolder 2"/>
+          <p:cNvSpPr>
+            <a:spLocks noGrp="1"/>
+          </p:cNvSpPr>
+          <p:nvPr>
+            <p:ph type="body"/>
+          </p:nvPr>
+        </p:nvSpPr>
+        <p:spPr>
+          <a:xfrm>
+            <a:off x="468000" y="6629400"/>
+            <a:ext cx="5910120" cy="2161800"/>
+          </a:xfrm>
+          <a:prstGeom prst="rect">
+            <a:avLst/>
+          </a:prstGeom>
+          <a:noFill/>
+          <a:ln w="0">
+            <a:noFill/>
+          </a:ln>
+        </p:spPr>
+        <p:txBody>
+          <a:bodyPr lIns="91440" rIns="91440" tIns="45720" bIns="45720" anchor="t">
+            <a:noAutofit/>
+          </a:bodyPr>
+          <a:p>
+            <a:pPr indent="0" defTabSz="685800">
+              <a:lnSpc>
+                <a:spcPct val="90000"/>
+              </a:lnSpc>
+              <a:spcBef>
+                <a:spcPts val="751"/>
+              </a:spcBef>
+              <a:buNone/>
+              <a:tabLst>
+                <a:tab algn="l" pos="0"/>
+              </a:tabLst>
+            </a:pPr>
+            <a:r>
+              <a:rPr lang="de-DE" sz="1800" b="0" u="none" strike="noStrike">
+                <a:solidFill>
+                  <a:schemeClr val="dk1"/>
+                </a:solidFill>
+                <a:effectLst/>
+                <a:uFillTx/>
+                <a:latin typeface="Calibri"/>
+              </a:rPr>
+              <a:t>Mastertextformat bearbeiten</a:t>
+            </a:r>
+            <a:endParaRPr lang="de-DE" sz="1800" b="0" u="none" strike="noStrike">
+              <a:solidFill>
+                <a:srgbClr val="000000"/>
+              </a:solidFill>
+              <a:effectLst/>
+              <a:uFillTx/>
+              <a:latin typeface="Arial"/>
+            </a:endParaRPr>
+          </a:p>
+        </p:txBody>
+      </p:sp>
+      <p:sp>
+        <p:nvSpPr>
+          <p:cNvPr id="57" name="PlaceHolder 3"/>
+          <p:cNvSpPr>
+            <a:spLocks noGrp="1"/>
+          </p:cNvSpPr>
+          <p:nvPr>
+            <p:ph type="dt" idx="31"/>
+          </p:nvPr>
+        </p:nvSpPr>
+        <p:spPr>
+          <a:xfrm>
+            <a:off x="471600" y="9181440"/>
+            <a:ext cx="1537920" cy="522360"/>
+          </a:xfrm>
+          <a:prstGeom prst="rect">
+            <a:avLst/>
+          </a:prstGeom>
+          <a:noFill/>
+          <a:ln w="0">
+            <a:noFill/>
+          </a:ln>
+        </p:spPr>
+        <p:txBody>
+          <a:bodyPr lIns="91440" rIns="91440" tIns="45720" bIns="45720" anchor="ctr">
+            <a:noAutofit/>
+          </a:bodyPr>
+          <a:lstStyle>
+            <a:lvl1pPr indent="0" defTabSz="457200">
+              <a:lnSpc>
+                <a:spcPct val="100000"/>
+              </a:lnSpc>
+              <a:buNone/>
+              <a:tabLst>
+                <a:tab algn="l" pos="0"/>
+              </a:tabLst>
+              <a:defRPr lang="de-DE" sz="900" b="0" u="none" strike="noStrike">
+                <a:solidFill>
+                  <a:schemeClr val="dk1">
+                    <a:tint val="75000"/>
+                  </a:schemeClr>
+                </a:solidFill>
+                <a:effectLst/>
+                <a:uFillTx/>
+                <a:latin typeface="Calibri"/>
+              </a:defRPr>
+            </a:lvl1pPr>
+          </a:lstStyle>
+          <a:p>
+            <a:pPr indent="0" defTabSz="457200">
+              <a:lnSpc>
+                <a:spcPct val="100000"/>
+              </a:lnSpc>
+              <a:buNone/>
+              <a:tabLst>
+                <a:tab algn="l" pos="0"/>
+              </a:tabLst>
+            </a:pPr>
+            <a:r>
+              <a:rPr lang="de-DE" sz="900" b="0" u="none" strike="noStrike">
+                <a:solidFill>
+                  <a:schemeClr val="dk1">
+                    <a:tint val="75000"/>
+                  </a:schemeClr>
+                </a:solidFill>
+                <a:effectLst/>
+                <a:uFillTx/>
+                <a:latin typeface="Calibri"/>
+              </a:rPr>
+              <a:t>&lt;Datum/Uhrzeit&gt;</a:t>
+            </a:r>
+            <a:endParaRPr lang="de-DE" sz="900" b="0" u="none" strike="noStrike">
+              <a:solidFill>
+                <a:srgbClr val="000000"/>
+              </a:solidFill>
+              <a:effectLst/>
+              <a:uFillTx/>
+              <a:latin typeface="Times New Roman"/>
+            </a:endParaRPr>
+          </a:p>
+        </p:txBody>
+      </p:sp>
+      <p:sp>
+        <p:nvSpPr>
+          <p:cNvPr id="58" name="PlaceHolder 4"/>
+          <p:cNvSpPr>
+            <a:spLocks noGrp="1"/>
+          </p:cNvSpPr>
+          <p:nvPr>
+            <p:ph type="ftr" idx="32"/>
+          </p:nvPr>
+        </p:nvSpPr>
+        <p:spPr>
+          <a:xfrm>
+            <a:off x="2271600" y="9181440"/>
+            <a:ext cx="2309400" cy="522360"/>
+          </a:xfrm>
+          <a:prstGeom prst="rect">
+            <a:avLst/>
+          </a:prstGeom>
+          <a:noFill/>
+          <a:ln w="0">
+            <a:noFill/>
+          </a:ln>
+        </p:spPr>
+        <p:txBody>
+          <a:bodyPr lIns="91440" rIns="91440" tIns="45720" bIns="45720" anchor="ctr">
+            <a:noAutofit/>
+          </a:bodyPr>
+          <a:lstStyle>
+            <a:lvl1pPr indent="0" algn="ctr">
+              <a:lnSpc>
+                <a:spcPct val="100000"/>
+              </a:lnSpc>
+              <a:buNone/>
+              <a:tabLst>
+                <a:tab algn="l" pos="0"/>
+              </a:tabLst>
+              <a:defRPr lang="de-DE" sz="1400" b="0" u="none" strike="noStrike">
+                <a:solidFill>
+                  <a:srgbClr val="000000"/>
+                </a:solidFill>
+                <a:effectLst/>
+                <a:uFillTx/>
+                <a:latin typeface="Times New Roman"/>
+              </a:defRPr>
+            </a:lvl1pPr>
+          </a:lstStyle>
+          <a:p>
+            <a:pPr indent="0" algn="ctr">
+              <a:lnSpc>
+                <a:spcPct val="100000"/>
+              </a:lnSpc>
+              <a:buNone/>
+              <a:tabLst>
+                <a:tab algn="l" pos="0"/>
+              </a:tabLst>
+            </a:pPr>
+            <a:r>
+              <a:rPr lang="de-DE" sz="1400" b="0" u="none" strike="noStrike">
+                <a:solidFill>
+                  <a:srgbClr val="000000"/>
+                </a:solidFill>
+                <a:effectLst/>
+                <a:uFillTx/>
+                <a:latin typeface="Times New Roman"/>
+              </a:rPr>
+              <a:t>&lt;Fußzeile&gt;</a:t>
+            </a:r>
+            <a:endParaRPr lang="de-DE" sz="1400" b="0" u="none" strike="noStrike">
+              <a:solidFill>
+                <a:srgbClr val="000000"/>
+              </a:solidFill>
+              <a:effectLst/>
+              <a:uFillTx/>
+              <a:latin typeface="Times New Roman"/>
+            </a:endParaRPr>
+          </a:p>
+        </p:txBody>
+      </p:sp>
+      <p:sp>
+        <p:nvSpPr>
+          <p:cNvPr id="59" name="PlaceHolder 5"/>
+          <p:cNvSpPr>
+            <a:spLocks noGrp="1"/>
+          </p:cNvSpPr>
+          <p:nvPr>
+            <p:ph type="sldNum" idx="33"/>
+          </p:nvPr>
+        </p:nvSpPr>
+        <p:spPr>
+          <a:xfrm>
+            <a:off x="4843440" y="9181440"/>
+            <a:ext cx="1537920" cy="522360"/>
+          </a:xfrm>
+          <a:prstGeom prst="rect">
+            <a:avLst/>
+          </a:prstGeom>
+          <a:noFill/>
+          <a:ln w="0">
+            <a:noFill/>
+          </a:ln>
+        </p:spPr>
+        <p:txBody>
+          <a:bodyPr lIns="91440" rIns="91440" tIns="45720" bIns="45720" anchor="ctr">
+            <a:noAutofit/>
+          </a:bodyPr>
+          <a:lstStyle>
+            <a:lvl1pPr indent="0" algn="r" defTabSz="457200">
+              <a:lnSpc>
+                <a:spcPct val="100000"/>
+              </a:lnSpc>
+              <a:buNone/>
+              <a:tabLst>
+                <a:tab algn="l" pos="0"/>
+              </a:tabLst>
+              <a:defRPr lang="de-DE" sz="900" b="0" u="none" strike="noStrike">
+                <a:solidFill>
+                  <a:schemeClr val="dk1">
+                    <a:tint val="75000"/>
+                  </a:schemeClr>
+                </a:solidFill>
+                <a:effectLst/>
+                <a:uFillTx/>
+                <a:latin typeface="Calibri"/>
+              </a:defRPr>
+            </a:lvl1pPr>
+          </a:lstStyle>
+          <a:p>
+            <a:pPr indent="0" algn="r" defTabSz="457200">
+              <a:lnSpc>
+                <a:spcPct val="100000"/>
+              </a:lnSpc>
+              <a:buNone/>
+              <a:tabLst>
+                <a:tab algn="l" pos="0"/>
+              </a:tabLst>
+            </a:pPr>
+            <a:fld id="{EC71273B-DE2A-4BF5-8393-EA4F2C7C2099}" type="slidenum">
+              <a:rPr lang="de-DE" sz="900" b="0" u="none" strike="noStrike">
+                <a:solidFill>
+                  <a:schemeClr val="dk1">
+                    <a:tint val="75000"/>
+                  </a:schemeClr>
+                </a:solidFill>
+                <a:effectLst/>
+                <a:uFillTx/>
+                <a:latin typeface="Calibri"/>
+              </a:rPr>
+              <a:t>&lt;Foliennummer&gt;</a:t>
+            </a:fld>
+            <a:endParaRPr lang="de-DE" sz="900" b="0" u="none" strike="noStrike">
+              <a:solidFill>
+                <a:srgbClr val="000000"/>
+              </a:solidFill>
+              <a:effectLst/>
+              <a:uFillTx/>
+              <a:latin typeface="Times New Roman"/>
+            </a:endParaRPr>
+          </a:p>
+        </p:txBody>
+      </p:sp>
+    </p:spTree>
+  </p:cSld>
+</p:sldLayout>
+</file>
+
+<file path=ppt/slideLayouts/slideLayout2.xml><?xml version="1.0" encoding="utf-8"?>
+<p:sldLayout xmlns:a="http://schemas.openxmlformats.org/drawingml/2006/main" xmlns:p="http://schemas.openxmlformats.org/presentationml/2006/main" xmlns:r="http://schemas.openxmlformats.org/officeDocument/2006/relationships" xmlns:p14="http://schemas.microsoft.com/office/powerpoint/2010/main" xmlns:p15="http://schemas.microsoft.com/office/powerpoint/2012/main" xmlns:mc="http://schemas.openxmlformats.org/markup-compatibility/2006" type="blank" preserve="1">
+  <p:cSld name="Vergleich">
+    <p:bg>
+      <p:bgPr>
+        <a:solidFill>
+          <a:srgbClr val="ffffff"/>
+        </a:solidFill>
+      </p:bgPr>
+    </p:bg>
+    <p:spTree>
+      <p:nvGrpSpPr>
+        <p:cNvPr id="1" name=""/>
+        <p:cNvGrpSpPr/>
+        <p:nvPr/>
+      </p:nvGrpSpPr>
+      <p:grpSpPr>
+        <a:xfrm>
+          <a:off x="0" y="0"/>
+          <a:ext cx="0" cy="0"/>
+          <a:chOff x="0" y="0"/>
+          <a:chExt cx="0" cy="0"/>
+        </a:xfrm>
+      </p:grpSpPr>
+      <p:sp>
+        <p:nvSpPr>
+          <p:cNvPr id="8" name="PlaceHolder 1"/>
+          <p:cNvSpPr>
+            <a:spLocks noGrp="1"/>
+          </p:cNvSpPr>
+          <p:nvPr>
+            <p:ph type="title"/>
+          </p:nvPr>
+        </p:nvSpPr>
+        <p:spPr>
+          <a:xfrm>
+            <a:off x="472320" y="527400"/>
+            <a:ext cx="5910120" cy="1909800"/>
+          </a:xfrm>
+          <a:prstGeom prst="rect">
+            <a:avLst/>
+          </a:prstGeom>
+          <a:noFill/>
+          <a:ln w="0">
+            <a:noFill/>
+          </a:ln>
+        </p:spPr>
+        <p:txBody>
+          <a:bodyPr lIns="91440" rIns="91440" tIns="45720" bIns="45720" anchor="ctr">
+            <a:noAutofit/>
+          </a:bodyPr>
+          <a:p>
+            <a:pPr indent="0" defTabSz="685800">
+              <a:lnSpc>
+                <a:spcPct val="90000"/>
+              </a:lnSpc>
+              <a:buNone/>
+              <a:tabLst>
+                <a:tab algn="l" pos="0"/>
+              </a:tabLst>
+            </a:pPr>
+            <a:r>
+              <a:rPr lang="de-DE" sz="3300" b="0" u="none" strike="noStrike">
+                <a:solidFill>
+                  <a:schemeClr val="dk1"/>
+                </a:solidFill>
+                <a:effectLst/>
+                <a:uFillTx/>
+                <a:latin typeface="Calibri Light"/>
+              </a:rPr>
+              <a:t>Mastertitelformat bearbeiten</a:t>
+            </a:r>
+            <a:endParaRPr lang="de-DE" sz="3300" b="0" u="none" strike="noStrike">
+              <a:solidFill>
+                <a:srgbClr val="000000"/>
+              </a:solidFill>
+              <a:effectLst/>
+              <a:uFillTx/>
+              <a:latin typeface="Arial"/>
+            </a:endParaRPr>
+          </a:p>
+        </p:txBody>
+      </p:sp>
+      <p:sp>
+        <p:nvSpPr>
+          <p:cNvPr id="9" name="PlaceHolder 2"/>
+          <p:cNvSpPr>
+            <a:spLocks noGrp="1"/>
+          </p:cNvSpPr>
+          <p:nvPr>
+            <p:ph type="body"/>
+          </p:nvPr>
+        </p:nvSpPr>
+        <p:spPr>
+          <a:xfrm>
+            <a:off x="472320" y="2428200"/>
+            <a:ext cx="2896200" cy="1185120"/>
+          </a:xfrm>
+          <a:prstGeom prst="rect">
+            <a:avLst/>
+          </a:prstGeom>
+          <a:noFill/>
+          <a:ln w="0">
+            <a:noFill/>
+          </a:ln>
+        </p:spPr>
+        <p:txBody>
+          <a:bodyPr lIns="91440" rIns="91440" tIns="45720" bIns="45720" anchor="b">
+            <a:noAutofit/>
+          </a:bodyPr>
+          <a:p>
+            <a:pPr indent="0" defTabSz="685800">
+              <a:lnSpc>
+                <a:spcPct val="90000"/>
+              </a:lnSpc>
+              <a:spcBef>
+                <a:spcPts val="751"/>
+              </a:spcBef>
+              <a:buNone/>
+              <a:tabLst>
+                <a:tab algn="l" pos="0"/>
+              </a:tabLst>
+            </a:pPr>
+            <a:r>
+              <a:rPr lang="de-DE" sz="1800" b="1" u="none" strike="noStrike">
+                <a:solidFill>
+                  <a:schemeClr val="dk1"/>
+                </a:solidFill>
+                <a:effectLst/>
+                <a:uFillTx/>
+                <a:latin typeface="Calibri"/>
+              </a:rPr>
+              <a:t>Mastertextformat bearbeiten</a:t>
+            </a:r>
+            <a:endParaRPr lang="de-DE" sz="1800" b="0" u="none" strike="noStrike">
+              <a:solidFill>
+                <a:srgbClr val="000000"/>
+              </a:solidFill>
+              <a:effectLst/>
+              <a:uFillTx/>
+              <a:latin typeface="Arial"/>
+            </a:endParaRPr>
+          </a:p>
+        </p:txBody>
+      </p:sp>
+      <p:sp>
+        <p:nvSpPr>
+          <p:cNvPr id="10" name="PlaceHolder 3"/>
+          <p:cNvSpPr>
+            <a:spLocks noGrp="1"/>
+          </p:cNvSpPr>
+          <p:nvPr>
+            <p:ph type="body"/>
+          </p:nvPr>
+        </p:nvSpPr>
+        <p:spPr>
+          <a:xfrm>
+            <a:off x="472320" y="3618360"/>
+            <a:ext cx="2896200" cy="5317200"/>
+          </a:xfrm>
+          <a:prstGeom prst="rect">
+            <a:avLst/>
+          </a:prstGeom>
+          <a:noFill/>
+          <a:ln w="0">
+            <a:noFill/>
+          </a:ln>
+        </p:spPr>
+        <p:txBody>
+          <a:bodyPr lIns="91440" rIns="91440" tIns="45720" bIns="45720" anchor="t">
+            <a:noAutofit/>
+          </a:bodyPr>
+          <a:p>
+            <a:pPr marL="171360" indent="-171360" defTabSz="685800">
+              <a:lnSpc>
+                <a:spcPct val="90000"/>
+              </a:lnSpc>
+              <a:spcBef>
+                <a:spcPts val="751"/>
+              </a:spcBef>
+              <a:buClr>
+                <a:srgbClr val="000000"/>
+              </a:buClr>
+              <a:buFont typeface="Arial"/>
+              <a:buChar char="•"/>
+            </a:pPr>
+            <a:r>
+              <a:rPr lang="de-DE" sz="2100" b="0" u="none" strike="noStrike">
+                <a:solidFill>
+                  <a:schemeClr val="dk1"/>
+                </a:solidFill>
+                <a:effectLst/>
+                <a:uFillTx/>
+                <a:latin typeface="Calibri"/>
+              </a:rPr>
+              <a:t>Mastertextformat bearbeiten</a:t>
+            </a:r>
+            <a:endParaRPr lang="de-DE" sz="2100" b="0" u="none" strike="noStrike">
+              <a:solidFill>
+                <a:srgbClr val="000000"/>
+              </a:solidFill>
+              <a:effectLst/>
+              <a:uFillTx/>
+              <a:latin typeface="Arial"/>
+            </a:endParaRPr>
+          </a:p>
+          <a:p>
+            <a:pPr marL="514440" lvl="1" indent="-171360" defTabSz="685800">
+              <a:lnSpc>
+                <a:spcPct val="90000"/>
+              </a:lnSpc>
+              <a:spcBef>
+                <a:spcPts val="374"/>
+              </a:spcBef>
+              <a:buClr>
+                <a:srgbClr val="000000"/>
+              </a:buClr>
+              <a:buFont typeface="Arial"/>
+              <a:buChar char="•"/>
+            </a:pPr>
+            <a:r>
+              <a:rPr lang="de-DE" sz="1800" b="0" u="none" strike="noStrike">
+                <a:solidFill>
+                  <a:schemeClr val="dk1"/>
+                </a:solidFill>
+                <a:effectLst/>
+                <a:uFillTx/>
+                <a:latin typeface="Calibri"/>
+              </a:rPr>
+              <a:t>Zweite Ebene</a:t>
+            </a:r>
+            <a:endParaRPr lang="de-DE" sz="1800" b="0" u="none" strike="noStrike">
+              <a:solidFill>
+                <a:srgbClr val="000000"/>
+              </a:solidFill>
+              <a:effectLst/>
+              <a:uFillTx/>
+              <a:latin typeface="Arial"/>
+            </a:endParaRPr>
+          </a:p>
+          <a:p>
+            <a:pPr marL="857160" lvl="2" indent="-171360" defTabSz="685800">
+              <a:lnSpc>
+                <a:spcPct val="90000"/>
+              </a:lnSpc>
+              <a:spcBef>
+                <a:spcPts val="374"/>
+              </a:spcBef>
+              <a:buClr>
+                <a:srgbClr val="000000"/>
+              </a:buClr>
+              <a:buFont typeface="Arial"/>
+              <a:buChar char="•"/>
+            </a:pPr>
+            <a:r>
+              <a:rPr lang="de-DE" sz="1500" b="0" u="none" strike="noStrike">
+                <a:solidFill>
+                  <a:schemeClr val="dk1"/>
+                </a:solidFill>
+                <a:effectLst/>
+                <a:uFillTx/>
+                <a:latin typeface="Calibri"/>
+              </a:rPr>
+              <a:t>Dritte Ebene</a:t>
+            </a:r>
+            <a:endParaRPr lang="de-DE" sz="1500" b="0" u="none" strike="noStrike">
+              <a:solidFill>
+                <a:srgbClr val="000000"/>
+              </a:solidFill>
+              <a:effectLst/>
+              <a:uFillTx/>
+              <a:latin typeface="Arial"/>
+            </a:endParaRPr>
+          </a:p>
+          <a:p>
+            <a:pPr marL="1200240" lvl="3" indent="-171360" defTabSz="685800">
+              <a:lnSpc>
+                <a:spcPct val="90000"/>
+              </a:lnSpc>
+              <a:spcBef>
+                <a:spcPts val="374"/>
+              </a:spcBef>
+              <a:buClr>
+                <a:srgbClr val="000000"/>
+              </a:buClr>
+              <a:buFont typeface="Arial"/>
+              <a:buChar char="•"/>
+            </a:pPr>
+            <a:r>
+              <a:rPr lang="de-DE" sz="1350" b="0" u="none" strike="noStrike">
+                <a:solidFill>
+                  <a:schemeClr val="dk1"/>
+                </a:solidFill>
+                <a:effectLst/>
+                <a:uFillTx/>
+                <a:latin typeface="Calibri"/>
+              </a:rPr>
+              <a:t>Vierte Ebene</a:t>
+            </a:r>
+            <a:endParaRPr lang="de-DE" sz="1350" b="0" u="none" strike="noStrike">
+              <a:solidFill>
+                <a:srgbClr val="000000"/>
+              </a:solidFill>
+              <a:effectLst/>
+              <a:uFillTx/>
+              <a:latin typeface="Arial"/>
+            </a:endParaRPr>
+          </a:p>
+          <a:p>
+            <a:pPr marL="1542960" lvl="4" indent="-171360" defTabSz="685800">
+              <a:lnSpc>
+                <a:spcPct val="90000"/>
+              </a:lnSpc>
+              <a:spcBef>
+                <a:spcPts val="374"/>
+              </a:spcBef>
+              <a:buClr>
+                <a:srgbClr val="000000"/>
+              </a:buClr>
+              <a:buFont typeface="Arial"/>
+              <a:buChar char="•"/>
+            </a:pPr>
+            <a:r>
+              <a:rPr lang="de-DE" sz="1350" b="0" u="none" strike="noStrike">
+                <a:solidFill>
+                  <a:schemeClr val="dk1"/>
+                </a:solidFill>
+                <a:effectLst/>
+                <a:uFillTx/>
+                <a:latin typeface="Calibri"/>
+              </a:rPr>
+              <a:t>Fünfte Ebene</a:t>
+            </a:r>
+            <a:endParaRPr lang="de-DE" sz="1350" b="0" u="none" strike="noStrike">
+              <a:solidFill>
+                <a:srgbClr val="000000"/>
+              </a:solidFill>
+              <a:effectLst/>
+              <a:uFillTx/>
+              <a:latin typeface="Arial"/>
+            </a:endParaRPr>
+          </a:p>
+        </p:txBody>
+      </p:sp>
+      <p:sp>
+        <p:nvSpPr>
+          <p:cNvPr id="11" name="PlaceHolder 4"/>
+          <p:cNvSpPr>
+            <a:spLocks noGrp="1"/>
+          </p:cNvSpPr>
+          <p:nvPr>
+            <p:ph type="body"/>
+          </p:nvPr>
+        </p:nvSpPr>
+        <p:spPr>
+          <a:xfrm>
+            <a:off x="3471840" y="2428200"/>
+            <a:ext cx="2910600" cy="1185120"/>
+          </a:xfrm>
+          <a:prstGeom prst="rect">
+            <a:avLst/>
+          </a:prstGeom>
+          <a:noFill/>
+          <a:ln w="0">
+            <a:noFill/>
+          </a:ln>
+        </p:spPr>
+        <p:txBody>
+          <a:bodyPr lIns="91440" rIns="91440" tIns="45720" bIns="45720" anchor="b">
+            <a:noAutofit/>
+          </a:bodyPr>
+          <a:p>
+            <a:pPr indent="0" defTabSz="685800">
+              <a:lnSpc>
+                <a:spcPct val="90000"/>
+              </a:lnSpc>
+              <a:spcBef>
+                <a:spcPts val="751"/>
+              </a:spcBef>
+              <a:buNone/>
+              <a:tabLst>
+                <a:tab algn="l" pos="0"/>
+              </a:tabLst>
+            </a:pPr>
+            <a:r>
+              <a:rPr lang="de-DE" sz="1800" b="1" u="none" strike="noStrike">
+                <a:solidFill>
+                  <a:schemeClr val="dk1"/>
+                </a:solidFill>
+                <a:effectLst/>
+                <a:uFillTx/>
+                <a:latin typeface="Calibri"/>
+              </a:rPr>
+              <a:t>Mastertextformat bearbeiten</a:t>
+            </a:r>
+            <a:endParaRPr lang="de-DE" sz="1800" b="0" u="none" strike="noStrike">
+              <a:solidFill>
+                <a:srgbClr val="000000"/>
+              </a:solidFill>
+              <a:effectLst/>
+              <a:uFillTx/>
+              <a:latin typeface="Arial"/>
+            </a:endParaRPr>
+          </a:p>
+        </p:txBody>
+      </p:sp>
+      <p:sp>
+        <p:nvSpPr>
+          <p:cNvPr id="12" name="PlaceHolder 5"/>
+          <p:cNvSpPr>
+            <a:spLocks noGrp="1"/>
+          </p:cNvSpPr>
+          <p:nvPr>
+            <p:ph type="body"/>
+          </p:nvPr>
+        </p:nvSpPr>
+        <p:spPr>
+          <a:xfrm>
+            <a:off x="3471840" y="3618360"/>
+            <a:ext cx="2910600" cy="5317200"/>
+          </a:xfrm>
+          <a:prstGeom prst="rect">
+            <a:avLst/>
+          </a:prstGeom>
+          <a:noFill/>
+          <a:ln w="0">
+            <a:noFill/>
+          </a:ln>
+        </p:spPr>
+        <p:txBody>
+          <a:bodyPr lIns="91440" rIns="91440" tIns="45720" bIns="45720" anchor="t">
+            <a:noAutofit/>
+          </a:bodyPr>
+          <a:p>
+            <a:pPr marL="171360" indent="-171360" defTabSz="685800">
+              <a:lnSpc>
+                <a:spcPct val="90000"/>
+              </a:lnSpc>
+              <a:spcBef>
+                <a:spcPts val="751"/>
+              </a:spcBef>
+              <a:buClr>
+                <a:srgbClr val="000000"/>
+              </a:buClr>
+              <a:buFont typeface="Arial"/>
+              <a:buChar char="•"/>
+            </a:pPr>
+            <a:r>
+              <a:rPr lang="de-DE" sz="2100" b="0" u="none" strike="noStrike">
+                <a:solidFill>
+                  <a:schemeClr val="dk1"/>
+                </a:solidFill>
+                <a:effectLst/>
+                <a:uFillTx/>
+                <a:latin typeface="Calibri"/>
+              </a:rPr>
+              <a:t>Mastertextformat bearbeiten</a:t>
+            </a:r>
+            <a:endParaRPr lang="de-DE" sz="2100" b="0" u="none" strike="noStrike">
+              <a:solidFill>
+                <a:srgbClr val="000000"/>
+              </a:solidFill>
+              <a:effectLst/>
+              <a:uFillTx/>
+              <a:latin typeface="Arial"/>
+            </a:endParaRPr>
+          </a:p>
+          <a:p>
+            <a:pPr marL="514440" lvl="1" indent="-171360" defTabSz="685800">
+              <a:lnSpc>
+                <a:spcPct val="90000"/>
+              </a:lnSpc>
+              <a:spcBef>
+                <a:spcPts val="374"/>
+              </a:spcBef>
+              <a:buClr>
+                <a:srgbClr val="000000"/>
+              </a:buClr>
+              <a:buFont typeface="Arial"/>
+              <a:buChar char="•"/>
+            </a:pPr>
+            <a:r>
+              <a:rPr lang="de-DE" sz="1800" b="0" u="none" strike="noStrike">
+                <a:solidFill>
+                  <a:schemeClr val="dk1"/>
+                </a:solidFill>
+                <a:effectLst/>
+                <a:uFillTx/>
+                <a:latin typeface="Calibri"/>
+              </a:rPr>
+              <a:t>Zweite Ebene</a:t>
+            </a:r>
+            <a:endParaRPr lang="de-DE" sz="1800" b="0" u="none" strike="noStrike">
+              <a:solidFill>
+                <a:srgbClr val="000000"/>
+              </a:solidFill>
+              <a:effectLst/>
+              <a:uFillTx/>
+              <a:latin typeface="Arial"/>
+            </a:endParaRPr>
+          </a:p>
+          <a:p>
+            <a:pPr marL="857160" lvl="2" indent="-171360" defTabSz="685800">
+              <a:lnSpc>
+                <a:spcPct val="90000"/>
+              </a:lnSpc>
+              <a:spcBef>
+                <a:spcPts val="374"/>
+              </a:spcBef>
+              <a:buClr>
+                <a:srgbClr val="000000"/>
+              </a:buClr>
+              <a:buFont typeface="Arial"/>
+              <a:buChar char="•"/>
+            </a:pPr>
+            <a:r>
+              <a:rPr lang="de-DE" sz="1500" b="0" u="none" strike="noStrike">
+                <a:solidFill>
+                  <a:schemeClr val="dk1"/>
+                </a:solidFill>
+                <a:effectLst/>
+                <a:uFillTx/>
+                <a:latin typeface="Calibri"/>
+              </a:rPr>
+              <a:t>Dritte Ebene</a:t>
+            </a:r>
+            <a:endParaRPr lang="de-DE" sz="1500" b="0" u="none" strike="noStrike">
+              <a:solidFill>
+                <a:srgbClr val="000000"/>
+              </a:solidFill>
+              <a:effectLst/>
+              <a:uFillTx/>
+              <a:latin typeface="Arial"/>
+            </a:endParaRPr>
+          </a:p>
+          <a:p>
+            <a:pPr marL="1200240" lvl="3" indent="-171360" defTabSz="685800">
+              <a:lnSpc>
+                <a:spcPct val="90000"/>
+              </a:lnSpc>
+              <a:spcBef>
+                <a:spcPts val="374"/>
+              </a:spcBef>
+              <a:buClr>
+                <a:srgbClr val="000000"/>
+              </a:buClr>
+              <a:buFont typeface="Arial"/>
+              <a:buChar char="•"/>
+            </a:pPr>
+            <a:r>
+              <a:rPr lang="de-DE" sz="1350" b="0" u="none" strike="noStrike">
+                <a:solidFill>
+                  <a:schemeClr val="dk1"/>
+                </a:solidFill>
+                <a:effectLst/>
+                <a:uFillTx/>
+                <a:latin typeface="Calibri"/>
+              </a:rPr>
+              <a:t>Vierte Ebene</a:t>
+            </a:r>
+            <a:endParaRPr lang="de-DE" sz="1350" b="0" u="none" strike="noStrike">
+              <a:solidFill>
+                <a:srgbClr val="000000"/>
+              </a:solidFill>
+              <a:effectLst/>
+              <a:uFillTx/>
+              <a:latin typeface="Arial"/>
+            </a:endParaRPr>
+          </a:p>
+          <a:p>
+            <a:pPr marL="1542960" lvl="4" indent="-171360" defTabSz="685800">
+              <a:lnSpc>
+                <a:spcPct val="90000"/>
+              </a:lnSpc>
+              <a:spcBef>
+                <a:spcPts val="374"/>
+              </a:spcBef>
+              <a:buClr>
+                <a:srgbClr val="000000"/>
+              </a:buClr>
+              <a:buFont typeface="Arial"/>
+              <a:buChar char="•"/>
+            </a:pPr>
+            <a:r>
+              <a:rPr lang="de-DE" sz="1350" b="0" u="none" strike="noStrike">
+                <a:solidFill>
+                  <a:schemeClr val="dk1"/>
+                </a:solidFill>
+                <a:effectLst/>
+                <a:uFillTx/>
+                <a:latin typeface="Calibri"/>
+              </a:rPr>
+              <a:t>Fünfte Ebene</a:t>
+            </a:r>
+            <a:endParaRPr lang="de-DE" sz="1350" b="0" u="none" strike="noStrike">
+              <a:solidFill>
+                <a:srgbClr val="000000"/>
+              </a:solidFill>
+              <a:effectLst/>
+              <a:uFillTx/>
+              <a:latin typeface="Arial"/>
+            </a:endParaRPr>
+          </a:p>
+        </p:txBody>
+      </p:sp>
+      <p:sp>
+        <p:nvSpPr>
+          <p:cNvPr id="13" name="PlaceHolder 6"/>
+          <p:cNvSpPr>
+            <a:spLocks noGrp="1"/>
+          </p:cNvSpPr>
+          <p:nvPr>
+            <p:ph type="dt" idx="4"/>
+          </p:nvPr>
+        </p:nvSpPr>
+        <p:spPr>
+          <a:xfrm>
+            <a:off x="471600" y="9181440"/>
+            <a:ext cx="1537920" cy="522360"/>
+          </a:xfrm>
+          <a:prstGeom prst="rect">
+            <a:avLst/>
+          </a:prstGeom>
+          <a:noFill/>
+          <a:ln w="0">
+            <a:noFill/>
+          </a:ln>
+        </p:spPr>
+        <p:txBody>
+          <a:bodyPr lIns="91440" rIns="91440" tIns="45720" bIns="45720" anchor="ctr">
+            <a:noAutofit/>
+          </a:bodyPr>
+          <a:lstStyle>
+            <a:lvl1pPr indent="0" defTabSz="457200">
+              <a:lnSpc>
+                <a:spcPct val="100000"/>
+              </a:lnSpc>
+              <a:buNone/>
+              <a:tabLst>
+                <a:tab algn="l" pos="0"/>
+              </a:tabLst>
+              <a:defRPr lang="de-DE" sz="900" b="0" u="none" strike="noStrike">
+                <a:solidFill>
+                  <a:schemeClr val="dk1">
+                    <a:tint val="75000"/>
+                  </a:schemeClr>
+                </a:solidFill>
+                <a:effectLst/>
+                <a:uFillTx/>
+                <a:latin typeface="Calibri"/>
+              </a:defRPr>
+            </a:lvl1pPr>
+          </a:lstStyle>
+          <a:p>
+            <a:pPr indent="0" defTabSz="457200">
+              <a:lnSpc>
+                <a:spcPct val="100000"/>
+              </a:lnSpc>
+              <a:buNone/>
+              <a:tabLst>
+                <a:tab algn="l" pos="0"/>
+              </a:tabLst>
+            </a:pPr>
+            <a:r>
+              <a:rPr lang="de-DE" sz="900" b="0" u="none" strike="noStrike">
+                <a:solidFill>
+                  <a:schemeClr val="dk1">
+                    <a:tint val="75000"/>
+                  </a:schemeClr>
+                </a:solidFill>
+                <a:effectLst/>
+                <a:uFillTx/>
+                <a:latin typeface="Calibri"/>
+              </a:rPr>
+              <a:t>&lt;Datum/Uhrzeit&gt;</a:t>
+            </a:r>
+            <a:endParaRPr lang="de-DE" sz="900" b="0" u="none" strike="noStrike">
+              <a:solidFill>
+                <a:srgbClr val="000000"/>
+              </a:solidFill>
+              <a:effectLst/>
+              <a:uFillTx/>
+              <a:latin typeface="Times New Roman"/>
+            </a:endParaRPr>
+          </a:p>
+        </p:txBody>
+      </p:sp>
+      <p:sp>
+        <p:nvSpPr>
+          <p:cNvPr id="14" name="PlaceHolder 7"/>
+          <p:cNvSpPr>
+            <a:spLocks noGrp="1"/>
+          </p:cNvSpPr>
+          <p:nvPr>
+            <p:ph type="ftr" idx="5"/>
+          </p:nvPr>
+        </p:nvSpPr>
+        <p:spPr>
+          <a:xfrm>
+            <a:off x="2271600" y="9181440"/>
+            <a:ext cx="2309400" cy="522360"/>
+          </a:xfrm>
+          <a:prstGeom prst="rect">
+            <a:avLst/>
+          </a:prstGeom>
+          <a:noFill/>
+          <a:ln w="0">
+            <a:noFill/>
+          </a:ln>
+        </p:spPr>
+        <p:txBody>
+          <a:bodyPr lIns="91440" rIns="91440" tIns="45720" bIns="45720" anchor="ctr">
+            <a:noAutofit/>
+          </a:bodyPr>
+          <a:lstStyle>
+            <a:lvl1pPr indent="0" algn="ctr">
+              <a:lnSpc>
+                <a:spcPct val="100000"/>
+              </a:lnSpc>
+              <a:buNone/>
+              <a:tabLst>
+                <a:tab algn="l" pos="0"/>
+              </a:tabLst>
+              <a:defRPr lang="de-DE" sz="1400" b="0" u="none" strike="noStrike">
+                <a:solidFill>
+                  <a:srgbClr val="000000"/>
+                </a:solidFill>
+                <a:effectLst/>
+                <a:uFillTx/>
+                <a:latin typeface="Times New Roman"/>
+              </a:defRPr>
+            </a:lvl1pPr>
+          </a:lstStyle>
+          <a:p>
+            <a:pPr indent="0" algn="ctr">
+              <a:lnSpc>
+                <a:spcPct val="100000"/>
+              </a:lnSpc>
+              <a:buNone/>
+              <a:tabLst>
+                <a:tab algn="l" pos="0"/>
+              </a:tabLst>
+            </a:pPr>
+            <a:r>
+              <a:rPr lang="de-DE" sz="1400" b="0" u="none" strike="noStrike">
+                <a:solidFill>
+                  <a:srgbClr val="000000"/>
+                </a:solidFill>
+                <a:effectLst/>
+                <a:uFillTx/>
+                <a:latin typeface="Times New Roman"/>
+              </a:rPr>
+              <a:t>&lt;Fußzeile&gt;</a:t>
+            </a:r>
+            <a:endParaRPr lang="de-DE" sz="1400" b="0" u="none" strike="noStrike">
+              <a:solidFill>
+                <a:srgbClr val="000000"/>
+              </a:solidFill>
+              <a:effectLst/>
+              <a:uFillTx/>
+              <a:latin typeface="Times New Roman"/>
+            </a:endParaRPr>
+          </a:p>
+        </p:txBody>
+      </p:sp>
+      <p:sp>
+        <p:nvSpPr>
+          <p:cNvPr id="15" name="PlaceHolder 8"/>
+          <p:cNvSpPr>
+            <a:spLocks noGrp="1"/>
+          </p:cNvSpPr>
+          <p:nvPr>
+            <p:ph type="sldNum" idx="6"/>
+          </p:nvPr>
+        </p:nvSpPr>
+        <p:spPr>
+          <a:xfrm>
+            <a:off x="4843440" y="9181440"/>
+            <a:ext cx="1537920" cy="522360"/>
+          </a:xfrm>
+          <a:prstGeom prst="rect">
+            <a:avLst/>
+          </a:prstGeom>
+          <a:noFill/>
+          <a:ln w="0">
+            <a:noFill/>
+          </a:ln>
+        </p:spPr>
+        <p:txBody>
+          <a:bodyPr lIns="91440" rIns="91440" tIns="45720" bIns="45720" anchor="ctr">
+            <a:noAutofit/>
+          </a:bodyPr>
+          <a:lstStyle>
+            <a:lvl1pPr indent="0" algn="r" defTabSz="457200">
+              <a:lnSpc>
+                <a:spcPct val="100000"/>
+              </a:lnSpc>
+              <a:buNone/>
+              <a:tabLst>
+                <a:tab algn="l" pos="0"/>
+              </a:tabLst>
+              <a:defRPr lang="de-DE" sz="900" b="0" u="none" strike="noStrike">
+                <a:solidFill>
+                  <a:schemeClr val="dk1">
+                    <a:tint val="75000"/>
+                  </a:schemeClr>
+                </a:solidFill>
+                <a:effectLst/>
+                <a:uFillTx/>
+                <a:latin typeface="Calibri"/>
+              </a:defRPr>
+            </a:lvl1pPr>
+          </a:lstStyle>
+          <a:p>
+            <a:pPr indent="0" algn="r" defTabSz="457200">
+              <a:lnSpc>
+                <a:spcPct val="100000"/>
+              </a:lnSpc>
+              <a:buNone/>
+              <a:tabLst>
+                <a:tab algn="l" pos="0"/>
+              </a:tabLst>
+            </a:pPr>
+            <a:fld id="{FA9E473F-8368-4415-A160-48054DEC582B}" type="slidenum">
+              <a:rPr lang="de-DE" sz="900" b="0" u="none" strike="noStrike">
+                <a:solidFill>
+                  <a:schemeClr val="dk1">
+                    <a:tint val="75000"/>
+                  </a:schemeClr>
+                </a:solidFill>
+                <a:effectLst/>
+                <a:uFillTx/>
+                <a:latin typeface="Calibri"/>
+              </a:rPr>
+              <a:t>&lt;Foliennummer&gt;</a:t>
+            </a:fld>
+            <a:endParaRPr lang="de-DE" sz="900" b="0" u="none" strike="noStrike">
+              <a:solidFill>
+                <a:srgbClr val="000000"/>
+              </a:solidFill>
+              <a:effectLst/>
+              <a:uFillTx/>
+              <a:latin typeface="Times New Roman"/>
+            </a:endParaRPr>
+          </a:p>
+        </p:txBody>
+      </p:sp>
+    </p:spTree>
+  </p:cSld>
+</p:sldLayout>
+</file>
+
+<file path=ppt/slideLayouts/slideLayout3.xml><?xml version="1.0" encoding="utf-8"?>
+<p:sldLayout xmlns:a="http://schemas.openxmlformats.org/drawingml/2006/main" xmlns:p="http://schemas.openxmlformats.org/presentationml/2006/main" xmlns:r="http://schemas.openxmlformats.org/officeDocument/2006/relationships" xmlns:p14="http://schemas.microsoft.com/office/powerpoint/2010/main" xmlns:p15="http://schemas.microsoft.com/office/powerpoint/2012/main" xmlns:mc="http://schemas.openxmlformats.org/markup-compatibility/2006" type="titleOnly" preserve="1">
+  <p:cSld name="Nur Titel">
+    <p:bg>
+      <p:bgPr>
+        <a:solidFill>
+          <a:srgbClr val="ffffff"/>
+        </a:solidFill>
+      </p:bgPr>
+    </p:bg>
+    <p:spTree>
+      <p:nvGrpSpPr>
+        <p:cNvPr id="1" name=""/>
+        <p:cNvGrpSpPr/>
+        <p:nvPr/>
+      </p:nvGrpSpPr>
+      <p:grpSpPr>
+        <a:xfrm>
+          <a:off x="0" y="0"/>
+          <a:ext cx="0" cy="0"/>
+          <a:chOff x="0" y="0"/>
+          <a:chExt cx="0" cy="0"/>
+        </a:xfrm>
+      </p:grpSpPr>
+      <p:sp>
+        <p:nvSpPr>
+          <p:cNvPr id="16" name="PlaceHolder 1"/>
+          <p:cNvSpPr>
+            <a:spLocks noGrp="1"/>
+          </p:cNvSpPr>
+          <p:nvPr>
+            <p:ph type="title"/>
+          </p:nvPr>
+        </p:nvSpPr>
+        <p:spPr>
+          <a:xfrm>
+            <a:off x="471600" y="527400"/>
+            <a:ext cx="5910120" cy="1909800"/>
+          </a:xfrm>
+          <a:prstGeom prst="rect">
+            <a:avLst/>
+          </a:prstGeom>
+          <a:noFill/>
+          <a:ln w="0">
+            <a:noFill/>
+          </a:ln>
+        </p:spPr>
+        <p:txBody>
+          <a:bodyPr lIns="91440" rIns="91440" tIns="45720" bIns="45720" anchor="ctr">
+            <a:noAutofit/>
+          </a:bodyPr>
+          <a:p>
+            <a:pPr indent="0" defTabSz="685800">
+              <a:lnSpc>
+                <a:spcPct val="90000"/>
+              </a:lnSpc>
+              <a:buNone/>
+              <a:tabLst>
+                <a:tab algn="l" pos="0"/>
+              </a:tabLst>
+            </a:pPr>
+            <a:r>
+              <a:rPr lang="de-DE" sz="3300" b="0" u="none" strike="noStrike">
+                <a:solidFill>
+                  <a:schemeClr val="dk1"/>
+                </a:solidFill>
+                <a:effectLst/>
+                <a:uFillTx/>
+                <a:latin typeface="Calibri Light"/>
+              </a:rPr>
+              <a:t>Mastertitelformat bearbeiten</a:t>
+            </a:r>
+            <a:endParaRPr lang="de-DE" sz="3300" b="0" u="none" strike="noStrike">
+              <a:solidFill>
+                <a:srgbClr val="000000"/>
+              </a:solidFill>
+              <a:effectLst/>
+              <a:uFillTx/>
+              <a:latin typeface="Arial"/>
+            </a:endParaRPr>
+          </a:p>
+        </p:txBody>
+      </p:sp>
+      <p:sp>
+        <p:nvSpPr>
+          <p:cNvPr id="17" name="PlaceHolder 2"/>
+          <p:cNvSpPr>
+            <a:spLocks noGrp="1"/>
+          </p:cNvSpPr>
+          <p:nvPr>
+            <p:ph type="dt" idx="7"/>
+          </p:nvPr>
+        </p:nvSpPr>
+        <p:spPr>
+          <a:xfrm>
+            <a:off x="471600" y="9181440"/>
+            <a:ext cx="1537920" cy="522360"/>
+          </a:xfrm>
+          <a:prstGeom prst="rect">
+            <a:avLst/>
+          </a:prstGeom>
+          <a:noFill/>
+          <a:ln w="0">
+            <a:noFill/>
+          </a:ln>
+        </p:spPr>
+        <p:txBody>
+          <a:bodyPr lIns="91440" rIns="91440" tIns="45720" bIns="45720" anchor="ctr">
+            <a:noAutofit/>
+          </a:bodyPr>
+          <a:lstStyle>
+            <a:lvl1pPr indent="0" defTabSz="457200">
+              <a:lnSpc>
+                <a:spcPct val="100000"/>
+              </a:lnSpc>
+              <a:buNone/>
+              <a:tabLst>
+                <a:tab algn="l" pos="0"/>
+              </a:tabLst>
+              <a:defRPr lang="de-DE" sz="900" b="0" u="none" strike="noStrike">
+                <a:solidFill>
+                  <a:schemeClr val="dk1">
+                    <a:tint val="75000"/>
+                  </a:schemeClr>
+                </a:solidFill>
+                <a:effectLst/>
+                <a:uFillTx/>
+                <a:latin typeface="Calibri"/>
+              </a:defRPr>
+            </a:lvl1pPr>
+          </a:lstStyle>
+          <a:p>
+            <a:pPr indent="0" defTabSz="457200">
+              <a:lnSpc>
+                <a:spcPct val="100000"/>
+              </a:lnSpc>
+              <a:buNone/>
+              <a:tabLst>
+                <a:tab algn="l" pos="0"/>
+              </a:tabLst>
+            </a:pPr>
+            <a:r>
+              <a:rPr lang="de-DE" sz="900" b="0" u="none" strike="noStrike">
+                <a:solidFill>
+                  <a:schemeClr val="dk1">
+                    <a:tint val="75000"/>
+                  </a:schemeClr>
+                </a:solidFill>
+                <a:effectLst/>
+                <a:uFillTx/>
+                <a:latin typeface="Calibri"/>
+              </a:rPr>
+              <a:t>&lt;Datum/Uhrzeit&gt;</a:t>
+            </a:r>
+            <a:endParaRPr lang="de-DE" sz="900" b="0" u="none" strike="noStrike">
+              <a:solidFill>
+                <a:srgbClr val="000000"/>
+              </a:solidFill>
+              <a:effectLst/>
+              <a:uFillTx/>
+              <a:latin typeface="Times New Roman"/>
+            </a:endParaRPr>
+          </a:p>
+        </p:txBody>
+      </p:sp>
+      <p:sp>
+        <p:nvSpPr>
+          <p:cNvPr id="18" name="PlaceHolder 3"/>
+          <p:cNvSpPr>
+            <a:spLocks noGrp="1"/>
+          </p:cNvSpPr>
+          <p:nvPr>
+            <p:ph type="ftr" idx="8"/>
+          </p:nvPr>
+        </p:nvSpPr>
+        <p:spPr>
+          <a:xfrm>
+            <a:off x="2271600" y="9181440"/>
+            <a:ext cx="2309400" cy="522360"/>
+          </a:xfrm>
+          <a:prstGeom prst="rect">
+            <a:avLst/>
+          </a:prstGeom>
+          <a:noFill/>
+          <a:ln w="0">
+            <a:noFill/>
+          </a:ln>
+        </p:spPr>
+        <p:txBody>
+          <a:bodyPr lIns="91440" rIns="91440" tIns="45720" bIns="45720" anchor="ctr">
+            <a:noAutofit/>
+          </a:bodyPr>
+          <a:lstStyle>
+            <a:lvl1pPr indent="0" algn="ctr">
+              <a:lnSpc>
+                <a:spcPct val="100000"/>
+              </a:lnSpc>
+              <a:buNone/>
+              <a:tabLst>
+                <a:tab algn="l" pos="0"/>
+              </a:tabLst>
+              <a:defRPr lang="de-DE" sz="1400" b="0" u="none" strike="noStrike">
+                <a:solidFill>
+                  <a:srgbClr val="000000"/>
+                </a:solidFill>
+                <a:effectLst/>
+                <a:uFillTx/>
+                <a:latin typeface="Times New Roman"/>
+              </a:defRPr>
+            </a:lvl1pPr>
+          </a:lstStyle>
+          <a:p>
+            <a:pPr indent="0" algn="ctr">
+              <a:lnSpc>
+                <a:spcPct val="100000"/>
+              </a:lnSpc>
+              <a:buNone/>
+              <a:tabLst>
+                <a:tab algn="l" pos="0"/>
+              </a:tabLst>
+            </a:pPr>
+            <a:r>
+              <a:rPr lang="de-DE" sz="1400" b="0" u="none" strike="noStrike">
+                <a:solidFill>
+                  <a:srgbClr val="000000"/>
+                </a:solidFill>
+                <a:effectLst/>
+                <a:uFillTx/>
+                <a:latin typeface="Times New Roman"/>
+              </a:rPr>
+              <a:t>&lt;Fußzeile&gt;</a:t>
+            </a:r>
+            <a:endParaRPr lang="de-DE" sz="1400" b="0" u="none" strike="noStrike">
+              <a:solidFill>
+                <a:srgbClr val="000000"/>
+              </a:solidFill>
+              <a:effectLst/>
+              <a:uFillTx/>
+              <a:latin typeface="Times New Roman"/>
+            </a:endParaRPr>
+          </a:p>
+        </p:txBody>
+      </p:sp>
+      <p:sp>
+        <p:nvSpPr>
+          <p:cNvPr id="19" name="PlaceHolder 4"/>
+          <p:cNvSpPr>
+            <a:spLocks noGrp="1"/>
+          </p:cNvSpPr>
+          <p:nvPr>
+            <p:ph type="sldNum" idx="9"/>
+          </p:nvPr>
+        </p:nvSpPr>
+        <p:spPr>
+          <a:xfrm>
+            <a:off x="4843440" y="9181440"/>
+            <a:ext cx="1537920" cy="522360"/>
+          </a:xfrm>
+          <a:prstGeom prst="rect">
+            <a:avLst/>
+          </a:prstGeom>
+          <a:noFill/>
+          <a:ln w="0">
+            <a:noFill/>
+          </a:ln>
+        </p:spPr>
+        <p:txBody>
+          <a:bodyPr lIns="91440" rIns="91440" tIns="45720" bIns="45720" anchor="ctr">
+            <a:noAutofit/>
+          </a:bodyPr>
+          <a:lstStyle>
+            <a:lvl1pPr indent="0" algn="r" defTabSz="457200">
+              <a:lnSpc>
+                <a:spcPct val="100000"/>
+              </a:lnSpc>
+              <a:buNone/>
+              <a:tabLst>
+                <a:tab algn="l" pos="0"/>
+              </a:tabLst>
+              <a:defRPr lang="de-DE" sz="900" b="0" u="none" strike="noStrike">
+                <a:solidFill>
+                  <a:schemeClr val="dk1">
+                    <a:tint val="75000"/>
+                  </a:schemeClr>
+                </a:solidFill>
+                <a:effectLst/>
+                <a:uFillTx/>
+                <a:latin typeface="Calibri"/>
+              </a:defRPr>
+            </a:lvl1pPr>
+          </a:lstStyle>
+          <a:p>
+            <a:pPr indent="0" algn="r" defTabSz="457200">
+              <a:lnSpc>
+                <a:spcPct val="100000"/>
+              </a:lnSpc>
+              <a:buNone/>
+              <a:tabLst>
+                <a:tab algn="l" pos="0"/>
+              </a:tabLst>
+            </a:pPr>
+            <a:fld id="{12DFBC8E-7C08-4D5A-98CF-8EAD8BB693F2}" type="slidenum">
+              <a:rPr lang="de-DE" sz="900" b="0" u="none" strike="noStrike">
+                <a:solidFill>
+                  <a:schemeClr val="dk1">
+                    <a:tint val="75000"/>
+                  </a:schemeClr>
+                </a:solidFill>
+                <a:effectLst/>
+                <a:uFillTx/>
+                <a:latin typeface="Calibri"/>
+              </a:rPr>
+              <a:t>&lt;Foliennummer&gt;</a:t>
+            </a:fld>
+            <a:endParaRPr lang="de-DE" sz="900" b="0" u="none" strike="noStrike">
+              <a:solidFill>
+                <a:srgbClr val="000000"/>
+              </a:solidFill>
+              <a:effectLst/>
+              <a:uFillTx/>
+              <a:latin typeface="Times New Roman"/>
+            </a:endParaRPr>
+          </a:p>
+        </p:txBody>
+      </p:sp>
+    </p:spTree>
+  </p:cSld>
+</p:sldLayout>
+</file>
+
+<file path=ppt/slideLayouts/slideLayout4.xml><?xml version="1.0" encoding="utf-8"?>
 <p:sldLayout xmlns:a="http://schemas.openxmlformats.org/drawingml/2006/main" xmlns:p="http://schemas.openxmlformats.org/presentationml/2006/main" xmlns:r="http://schemas.openxmlformats.org/officeDocument/2006/relationships" xmlns:p14="http://schemas.microsoft.com/office/powerpoint/2010/main" xmlns:p15="http://schemas.microsoft.com/office/powerpoint/2012/main" xmlns:mc="http://schemas.openxmlformats.org/markup-compatibility/2006" type="blank" preserve="1">
   <p:cSld name="Leer">
     <p:bg>
@@ -39,18 +2870,18 @@
       </p:grpSpPr>
       <p:sp>
         <p:nvSpPr>
-          <p:cNvPr id="2" name="PlaceHolder 1"/>
+          <p:cNvPr id="20" name="PlaceHolder 1"/>
           <p:cNvSpPr>
             <a:spLocks noGrp="1"/>
           </p:cNvSpPr>
           <p:nvPr>
-            <p:ph type="dt" idx="1"/>
+            <p:ph type="dt" idx="10"/>
           </p:nvPr>
         </p:nvSpPr>
         <p:spPr>
           <a:xfrm>
             <a:off x="471600" y="9181440"/>
-            <a:ext cx="1538280" cy="522720"/>
+            <a:ext cx="1537920" cy="522360"/>
           </a:xfrm>
           <a:prstGeom prst="rect">
             <a:avLst/>
@@ -121,18 +2952,18 @@
       </p:sp>
       <p:sp>
         <p:nvSpPr>
-          <p:cNvPr id="3" name="PlaceHolder 2"/>
+          <p:cNvPr id="21" name="PlaceHolder 2"/>
           <p:cNvSpPr>
             <a:spLocks noGrp="1"/>
           </p:cNvSpPr>
           <p:nvPr>
-            <p:ph type="ftr" idx="2"/>
+            <p:ph type="ftr" idx="11"/>
           </p:nvPr>
         </p:nvSpPr>
         <p:spPr>
           <a:xfrm>
             <a:off x="2271600" y="9181440"/>
-            <a:ext cx="2309760" cy="522720"/>
+            <a:ext cx="2309400" cy="522360"/>
           </a:xfrm>
           <a:prstGeom prst="rect">
             <a:avLst/>
@@ -199,18 +3030,18 @@
       </p:sp>
       <p:sp>
         <p:nvSpPr>
-          <p:cNvPr id="4" name="PlaceHolder 3"/>
+          <p:cNvPr id="22" name="PlaceHolder 3"/>
           <p:cNvSpPr>
             <a:spLocks noGrp="1"/>
           </p:cNvSpPr>
           <p:nvPr>
-            <p:ph type="sldNum" idx="3"/>
+            <p:ph type="sldNum" idx="12"/>
           </p:nvPr>
         </p:nvSpPr>
         <p:spPr>
           <a:xfrm>
             <a:off x="4843440" y="9181440"/>
-            <a:ext cx="1538280" cy="522720"/>
+            <a:ext cx="1537920" cy="522360"/>
           </a:xfrm>
           <a:prstGeom prst="rect">
             <a:avLst/>
@@ -255,7 +3086,7 @@
                 <a:tab algn="l" pos="0"/>
               </a:tabLst>
             </a:pPr>
-            <a:fld id="{DDFAA1F4-2C5E-4E33-B669-FC4A696E7A20}" type="slidenum">
+            <a:fld id="{E3CEECCA-C776-47F8-8304-FB9D72CEC527}" type="slidenum">
               <a:rPr lang="de-DE" sz="900" b="0" u="none" strike="noStrike">
                 <a:solidFill>
                   <a:schemeClr val="dk1">
@@ -284,1189 +3115,7 @@
 </p:sldLayout>
 </file>
 
-<file path=ppt/slideLayouts/slideLayout10.xml><?xml version="1.0" encoding="utf-8"?>
-<p:sldLayout xmlns:a="http://schemas.openxmlformats.org/drawingml/2006/main" xmlns:p="http://schemas.openxmlformats.org/presentationml/2006/main" xmlns:r="http://schemas.openxmlformats.org/officeDocument/2006/relationships" xmlns:p14="http://schemas.microsoft.com/office/powerpoint/2010/main" xmlns:p15="http://schemas.microsoft.com/office/powerpoint/2012/main" xmlns:mc="http://schemas.openxmlformats.org/markup-compatibility/2006" type="blank" preserve="1">
-  <p:cSld name="Vergleich">
-    <p:bg>
-      <p:bgPr>
-        <a:solidFill>
-          <a:srgbClr val="ffffff"/>
-        </a:solidFill>
-      </p:bgPr>
-    </p:bg>
-    <p:spTree>
-      <p:nvGrpSpPr>
-        <p:cNvPr id="1" name=""/>
-        <p:cNvGrpSpPr/>
-        <p:nvPr/>
-      </p:nvGrpSpPr>
-      <p:grpSpPr>
-        <a:xfrm>
-          <a:off x="0" y="0"/>
-          <a:ext cx="0" cy="0"/>
-          <a:chOff x="0" y="0"/>
-          <a:chExt cx="0" cy="0"/>
-        </a:xfrm>
-      </p:grpSpPr>
-      <p:sp>
-        <p:nvSpPr>
-          <p:cNvPr id="48" name="PlaceHolder 1"/>
-          <p:cNvSpPr>
-            <a:spLocks noGrp="1"/>
-          </p:cNvSpPr>
-          <p:nvPr>
-            <p:ph type="title"/>
-          </p:nvPr>
-        </p:nvSpPr>
-        <p:spPr>
-          <a:xfrm>
-            <a:off x="472320" y="527400"/>
-            <a:ext cx="5910480" cy="1910160"/>
-          </a:xfrm>
-          <a:prstGeom prst="rect">
-            <a:avLst/>
-          </a:prstGeom>
-          <a:noFill/>
-          <a:ln w="0">
-            <a:noFill/>
-          </a:ln>
-        </p:spPr>
-        <p:txBody>
-          <a:bodyPr lIns="91440" rIns="91440" tIns="45720" bIns="45720" anchor="ctr">
-            <a:noAutofit/>
-          </a:bodyPr>
-          <a:p>
-            <a:pPr indent="0" defTabSz="685800">
-              <a:lnSpc>
-                <a:spcPct val="90000"/>
-              </a:lnSpc>
-              <a:buNone/>
-              <a:tabLst>
-                <a:tab algn="l" pos="0"/>
-              </a:tabLst>
-            </a:pPr>
-            <a:r>
-              <a:rPr lang="de-DE" sz="3300" b="0" u="none" strike="noStrike">
-                <a:solidFill>
-                  <a:schemeClr val="dk1"/>
-                </a:solidFill>
-                <a:effectLst/>
-                <a:uFillTx/>
-                <a:latin typeface="Calibri Light"/>
-              </a:rPr>
-              <a:t>Mastertitelformat bearbeiten</a:t>
-            </a:r>
-            <a:endParaRPr lang="de-DE" sz="3300" b="0" u="none" strike="noStrike">
-              <a:solidFill>
-                <a:srgbClr val="000000"/>
-              </a:solidFill>
-              <a:effectLst/>
-              <a:uFillTx/>
-              <a:latin typeface="Arial"/>
-            </a:endParaRPr>
-          </a:p>
-        </p:txBody>
-      </p:sp>
-      <p:sp>
-        <p:nvSpPr>
-          <p:cNvPr id="49" name="PlaceHolder 2"/>
-          <p:cNvSpPr>
-            <a:spLocks noGrp="1"/>
-          </p:cNvSpPr>
-          <p:nvPr>
-            <p:ph type="body"/>
-          </p:nvPr>
-        </p:nvSpPr>
-        <p:spPr>
-          <a:xfrm>
-            <a:off x="472320" y="2428200"/>
-            <a:ext cx="2896560" cy="1185480"/>
-          </a:xfrm>
-          <a:prstGeom prst="rect">
-            <a:avLst/>
-          </a:prstGeom>
-          <a:noFill/>
-          <a:ln w="0">
-            <a:noFill/>
-          </a:ln>
-        </p:spPr>
-        <p:txBody>
-          <a:bodyPr lIns="91440" rIns="91440" tIns="45720" bIns="45720" anchor="b">
-            <a:noAutofit/>
-          </a:bodyPr>
-          <a:p>
-            <a:pPr indent="0" defTabSz="685800">
-              <a:lnSpc>
-                <a:spcPct val="90000"/>
-              </a:lnSpc>
-              <a:spcBef>
-                <a:spcPts val="751"/>
-              </a:spcBef>
-              <a:buNone/>
-              <a:tabLst>
-                <a:tab algn="l" pos="0"/>
-              </a:tabLst>
-            </a:pPr>
-            <a:r>
-              <a:rPr lang="de-DE" sz="1800" b="1" u="none" strike="noStrike">
-                <a:solidFill>
-                  <a:schemeClr val="dk1"/>
-                </a:solidFill>
-                <a:effectLst/>
-                <a:uFillTx/>
-                <a:latin typeface="Calibri"/>
-              </a:rPr>
-              <a:t>Mastertextformat bearbeiten</a:t>
-            </a:r>
-            <a:endParaRPr lang="de-DE" sz="1800" b="0" u="none" strike="noStrike">
-              <a:solidFill>
-                <a:srgbClr val="000000"/>
-              </a:solidFill>
-              <a:effectLst/>
-              <a:uFillTx/>
-              <a:latin typeface="Arial"/>
-            </a:endParaRPr>
-          </a:p>
-        </p:txBody>
-      </p:sp>
-      <p:sp>
-        <p:nvSpPr>
-          <p:cNvPr id="50" name="PlaceHolder 3"/>
-          <p:cNvSpPr>
-            <a:spLocks noGrp="1"/>
-          </p:cNvSpPr>
-          <p:nvPr>
-            <p:ph type="body"/>
-          </p:nvPr>
-        </p:nvSpPr>
-        <p:spPr>
-          <a:xfrm>
-            <a:off x="472320" y="3618360"/>
-            <a:ext cx="2896560" cy="5317560"/>
-          </a:xfrm>
-          <a:prstGeom prst="rect">
-            <a:avLst/>
-          </a:prstGeom>
-          <a:noFill/>
-          <a:ln w="0">
-            <a:noFill/>
-          </a:ln>
-        </p:spPr>
-        <p:txBody>
-          <a:bodyPr lIns="91440" rIns="91440" tIns="45720" bIns="45720" anchor="t">
-            <a:noAutofit/>
-          </a:bodyPr>
-          <a:p>
-            <a:pPr marL="171360" indent="-171360" defTabSz="685800">
-              <a:lnSpc>
-                <a:spcPct val="90000"/>
-              </a:lnSpc>
-              <a:spcBef>
-                <a:spcPts val="751"/>
-              </a:spcBef>
-              <a:buClr>
-                <a:srgbClr val="000000"/>
-              </a:buClr>
-              <a:buFont typeface="Arial"/>
-              <a:buChar char="•"/>
-            </a:pPr>
-            <a:r>
-              <a:rPr lang="de-DE" sz="2100" b="0" u="none" strike="noStrike">
-                <a:solidFill>
-                  <a:schemeClr val="dk1"/>
-                </a:solidFill>
-                <a:effectLst/>
-                <a:uFillTx/>
-                <a:latin typeface="Calibri"/>
-              </a:rPr>
-              <a:t>Mastertextformat bearbeiten</a:t>
-            </a:r>
-            <a:endParaRPr lang="de-DE" sz="2100" b="0" u="none" strike="noStrike">
-              <a:solidFill>
-                <a:srgbClr val="000000"/>
-              </a:solidFill>
-              <a:effectLst/>
-              <a:uFillTx/>
-              <a:latin typeface="Arial"/>
-            </a:endParaRPr>
-          </a:p>
-          <a:p>
-            <a:pPr marL="514440" lvl="1" indent="-171360" defTabSz="685800">
-              <a:lnSpc>
-                <a:spcPct val="90000"/>
-              </a:lnSpc>
-              <a:spcBef>
-                <a:spcPts val="374"/>
-              </a:spcBef>
-              <a:buClr>
-                <a:srgbClr val="000000"/>
-              </a:buClr>
-              <a:buFont typeface="Arial"/>
-              <a:buChar char="•"/>
-            </a:pPr>
-            <a:r>
-              <a:rPr lang="de-DE" sz="1800" b="0" u="none" strike="noStrike">
-                <a:solidFill>
-                  <a:schemeClr val="dk1"/>
-                </a:solidFill>
-                <a:effectLst/>
-                <a:uFillTx/>
-                <a:latin typeface="Calibri"/>
-              </a:rPr>
-              <a:t>Zweite Ebene</a:t>
-            </a:r>
-            <a:endParaRPr lang="de-DE" sz="1800" b="0" u="none" strike="noStrike">
-              <a:solidFill>
-                <a:srgbClr val="000000"/>
-              </a:solidFill>
-              <a:effectLst/>
-              <a:uFillTx/>
-              <a:latin typeface="Arial"/>
-            </a:endParaRPr>
-          </a:p>
-          <a:p>
-            <a:pPr marL="857160" lvl="2" indent="-171360" defTabSz="685800">
-              <a:lnSpc>
-                <a:spcPct val="90000"/>
-              </a:lnSpc>
-              <a:spcBef>
-                <a:spcPts val="374"/>
-              </a:spcBef>
-              <a:buClr>
-                <a:srgbClr val="000000"/>
-              </a:buClr>
-              <a:buFont typeface="Arial"/>
-              <a:buChar char="•"/>
-            </a:pPr>
-            <a:r>
-              <a:rPr lang="de-DE" sz="1500" b="0" u="none" strike="noStrike">
-                <a:solidFill>
-                  <a:schemeClr val="dk1"/>
-                </a:solidFill>
-                <a:effectLst/>
-                <a:uFillTx/>
-                <a:latin typeface="Calibri"/>
-              </a:rPr>
-              <a:t>Dritte Ebene</a:t>
-            </a:r>
-            <a:endParaRPr lang="de-DE" sz="1500" b="0" u="none" strike="noStrike">
-              <a:solidFill>
-                <a:srgbClr val="000000"/>
-              </a:solidFill>
-              <a:effectLst/>
-              <a:uFillTx/>
-              <a:latin typeface="Arial"/>
-            </a:endParaRPr>
-          </a:p>
-          <a:p>
-            <a:pPr marL="1200240" lvl="3" indent="-171360" defTabSz="685800">
-              <a:lnSpc>
-                <a:spcPct val="90000"/>
-              </a:lnSpc>
-              <a:spcBef>
-                <a:spcPts val="374"/>
-              </a:spcBef>
-              <a:buClr>
-                <a:srgbClr val="000000"/>
-              </a:buClr>
-              <a:buFont typeface="Arial"/>
-              <a:buChar char="•"/>
-            </a:pPr>
-            <a:r>
-              <a:rPr lang="de-DE" sz="1350" b="0" u="none" strike="noStrike">
-                <a:solidFill>
-                  <a:schemeClr val="dk1"/>
-                </a:solidFill>
-                <a:effectLst/>
-                <a:uFillTx/>
-                <a:latin typeface="Calibri"/>
-              </a:rPr>
-              <a:t>Vierte Ebene</a:t>
-            </a:r>
-            <a:endParaRPr lang="de-DE" sz="1350" b="0" u="none" strike="noStrike">
-              <a:solidFill>
-                <a:srgbClr val="000000"/>
-              </a:solidFill>
-              <a:effectLst/>
-              <a:uFillTx/>
-              <a:latin typeface="Arial"/>
-            </a:endParaRPr>
-          </a:p>
-          <a:p>
-            <a:pPr marL="1542960" lvl="4" indent="-171360" defTabSz="685800">
-              <a:lnSpc>
-                <a:spcPct val="90000"/>
-              </a:lnSpc>
-              <a:spcBef>
-                <a:spcPts val="374"/>
-              </a:spcBef>
-              <a:buClr>
-                <a:srgbClr val="000000"/>
-              </a:buClr>
-              <a:buFont typeface="Arial"/>
-              <a:buChar char="•"/>
-            </a:pPr>
-            <a:r>
-              <a:rPr lang="de-DE" sz="1350" b="0" u="none" strike="noStrike">
-                <a:solidFill>
-                  <a:schemeClr val="dk1"/>
-                </a:solidFill>
-                <a:effectLst/>
-                <a:uFillTx/>
-                <a:latin typeface="Calibri"/>
-              </a:rPr>
-              <a:t>Fünfte Ebene</a:t>
-            </a:r>
-            <a:endParaRPr lang="de-DE" sz="1350" b="0" u="none" strike="noStrike">
-              <a:solidFill>
-                <a:srgbClr val="000000"/>
-              </a:solidFill>
-              <a:effectLst/>
-              <a:uFillTx/>
-              <a:latin typeface="Arial"/>
-            </a:endParaRPr>
-          </a:p>
-        </p:txBody>
-      </p:sp>
-      <p:sp>
-        <p:nvSpPr>
-          <p:cNvPr id="51" name="PlaceHolder 4"/>
-          <p:cNvSpPr>
-            <a:spLocks noGrp="1"/>
-          </p:cNvSpPr>
-          <p:nvPr>
-            <p:ph type="body"/>
-          </p:nvPr>
-        </p:nvSpPr>
-        <p:spPr>
-          <a:xfrm>
-            <a:off x="3471840" y="2428200"/>
-            <a:ext cx="2910960" cy="1185480"/>
-          </a:xfrm>
-          <a:prstGeom prst="rect">
-            <a:avLst/>
-          </a:prstGeom>
-          <a:noFill/>
-          <a:ln w="0">
-            <a:noFill/>
-          </a:ln>
-        </p:spPr>
-        <p:txBody>
-          <a:bodyPr lIns="91440" rIns="91440" tIns="45720" bIns="45720" anchor="b">
-            <a:noAutofit/>
-          </a:bodyPr>
-          <a:p>
-            <a:pPr indent="0" defTabSz="685800">
-              <a:lnSpc>
-                <a:spcPct val="90000"/>
-              </a:lnSpc>
-              <a:spcBef>
-                <a:spcPts val="751"/>
-              </a:spcBef>
-              <a:buNone/>
-              <a:tabLst>
-                <a:tab algn="l" pos="0"/>
-              </a:tabLst>
-            </a:pPr>
-            <a:r>
-              <a:rPr lang="de-DE" sz="1800" b="1" u="none" strike="noStrike">
-                <a:solidFill>
-                  <a:schemeClr val="dk1"/>
-                </a:solidFill>
-                <a:effectLst/>
-                <a:uFillTx/>
-                <a:latin typeface="Calibri"/>
-              </a:rPr>
-              <a:t>Mastertextformat bearbeiten</a:t>
-            </a:r>
-            <a:endParaRPr lang="de-DE" sz="1800" b="0" u="none" strike="noStrike">
-              <a:solidFill>
-                <a:srgbClr val="000000"/>
-              </a:solidFill>
-              <a:effectLst/>
-              <a:uFillTx/>
-              <a:latin typeface="Arial"/>
-            </a:endParaRPr>
-          </a:p>
-        </p:txBody>
-      </p:sp>
-      <p:sp>
-        <p:nvSpPr>
-          <p:cNvPr id="52" name="PlaceHolder 5"/>
-          <p:cNvSpPr>
-            <a:spLocks noGrp="1"/>
-          </p:cNvSpPr>
-          <p:nvPr>
-            <p:ph type="body"/>
-          </p:nvPr>
-        </p:nvSpPr>
-        <p:spPr>
-          <a:xfrm>
-            <a:off x="3471840" y="3618360"/>
-            <a:ext cx="2910960" cy="5317560"/>
-          </a:xfrm>
-          <a:prstGeom prst="rect">
-            <a:avLst/>
-          </a:prstGeom>
-          <a:noFill/>
-          <a:ln w="0">
-            <a:noFill/>
-          </a:ln>
-        </p:spPr>
-        <p:txBody>
-          <a:bodyPr lIns="91440" rIns="91440" tIns="45720" bIns="45720" anchor="t">
-            <a:noAutofit/>
-          </a:bodyPr>
-          <a:p>
-            <a:pPr marL="171360" indent="-171360" defTabSz="685800">
-              <a:lnSpc>
-                <a:spcPct val="90000"/>
-              </a:lnSpc>
-              <a:spcBef>
-                <a:spcPts val="751"/>
-              </a:spcBef>
-              <a:buClr>
-                <a:srgbClr val="000000"/>
-              </a:buClr>
-              <a:buFont typeface="Arial"/>
-              <a:buChar char="•"/>
-            </a:pPr>
-            <a:r>
-              <a:rPr lang="de-DE" sz="2100" b="0" u="none" strike="noStrike">
-                <a:solidFill>
-                  <a:schemeClr val="dk1"/>
-                </a:solidFill>
-                <a:effectLst/>
-                <a:uFillTx/>
-                <a:latin typeface="Calibri"/>
-              </a:rPr>
-              <a:t>Mastertextformat bearbeiten</a:t>
-            </a:r>
-            <a:endParaRPr lang="de-DE" sz="2100" b="0" u="none" strike="noStrike">
-              <a:solidFill>
-                <a:srgbClr val="000000"/>
-              </a:solidFill>
-              <a:effectLst/>
-              <a:uFillTx/>
-              <a:latin typeface="Arial"/>
-            </a:endParaRPr>
-          </a:p>
-          <a:p>
-            <a:pPr marL="514440" lvl="1" indent="-171360" defTabSz="685800">
-              <a:lnSpc>
-                <a:spcPct val="90000"/>
-              </a:lnSpc>
-              <a:spcBef>
-                <a:spcPts val="374"/>
-              </a:spcBef>
-              <a:buClr>
-                <a:srgbClr val="000000"/>
-              </a:buClr>
-              <a:buFont typeface="Arial"/>
-              <a:buChar char="•"/>
-            </a:pPr>
-            <a:r>
-              <a:rPr lang="de-DE" sz="1800" b="0" u="none" strike="noStrike">
-                <a:solidFill>
-                  <a:schemeClr val="dk1"/>
-                </a:solidFill>
-                <a:effectLst/>
-                <a:uFillTx/>
-                <a:latin typeface="Calibri"/>
-              </a:rPr>
-              <a:t>Zweite Ebene</a:t>
-            </a:r>
-            <a:endParaRPr lang="de-DE" sz="1800" b="0" u="none" strike="noStrike">
-              <a:solidFill>
-                <a:srgbClr val="000000"/>
-              </a:solidFill>
-              <a:effectLst/>
-              <a:uFillTx/>
-              <a:latin typeface="Arial"/>
-            </a:endParaRPr>
-          </a:p>
-          <a:p>
-            <a:pPr marL="857160" lvl="2" indent="-171360" defTabSz="685800">
-              <a:lnSpc>
-                <a:spcPct val="90000"/>
-              </a:lnSpc>
-              <a:spcBef>
-                <a:spcPts val="374"/>
-              </a:spcBef>
-              <a:buClr>
-                <a:srgbClr val="000000"/>
-              </a:buClr>
-              <a:buFont typeface="Arial"/>
-              <a:buChar char="•"/>
-            </a:pPr>
-            <a:r>
-              <a:rPr lang="de-DE" sz="1500" b="0" u="none" strike="noStrike">
-                <a:solidFill>
-                  <a:schemeClr val="dk1"/>
-                </a:solidFill>
-                <a:effectLst/>
-                <a:uFillTx/>
-                <a:latin typeface="Calibri"/>
-              </a:rPr>
-              <a:t>Dritte Ebene</a:t>
-            </a:r>
-            <a:endParaRPr lang="de-DE" sz="1500" b="0" u="none" strike="noStrike">
-              <a:solidFill>
-                <a:srgbClr val="000000"/>
-              </a:solidFill>
-              <a:effectLst/>
-              <a:uFillTx/>
-              <a:latin typeface="Arial"/>
-            </a:endParaRPr>
-          </a:p>
-          <a:p>
-            <a:pPr marL="1200240" lvl="3" indent="-171360" defTabSz="685800">
-              <a:lnSpc>
-                <a:spcPct val="90000"/>
-              </a:lnSpc>
-              <a:spcBef>
-                <a:spcPts val="374"/>
-              </a:spcBef>
-              <a:buClr>
-                <a:srgbClr val="000000"/>
-              </a:buClr>
-              <a:buFont typeface="Arial"/>
-              <a:buChar char="•"/>
-            </a:pPr>
-            <a:r>
-              <a:rPr lang="de-DE" sz="1350" b="0" u="none" strike="noStrike">
-                <a:solidFill>
-                  <a:schemeClr val="dk1"/>
-                </a:solidFill>
-                <a:effectLst/>
-                <a:uFillTx/>
-                <a:latin typeface="Calibri"/>
-              </a:rPr>
-              <a:t>Vierte Ebene</a:t>
-            </a:r>
-            <a:endParaRPr lang="de-DE" sz="1350" b="0" u="none" strike="noStrike">
-              <a:solidFill>
-                <a:srgbClr val="000000"/>
-              </a:solidFill>
-              <a:effectLst/>
-              <a:uFillTx/>
-              <a:latin typeface="Arial"/>
-            </a:endParaRPr>
-          </a:p>
-          <a:p>
-            <a:pPr marL="1542960" lvl="4" indent="-171360" defTabSz="685800">
-              <a:lnSpc>
-                <a:spcPct val="90000"/>
-              </a:lnSpc>
-              <a:spcBef>
-                <a:spcPts val="374"/>
-              </a:spcBef>
-              <a:buClr>
-                <a:srgbClr val="000000"/>
-              </a:buClr>
-              <a:buFont typeface="Arial"/>
-              <a:buChar char="•"/>
-            </a:pPr>
-            <a:r>
-              <a:rPr lang="de-DE" sz="1350" b="0" u="none" strike="noStrike">
-                <a:solidFill>
-                  <a:schemeClr val="dk1"/>
-                </a:solidFill>
-                <a:effectLst/>
-                <a:uFillTx/>
-                <a:latin typeface="Calibri"/>
-              </a:rPr>
-              <a:t>Fünfte Ebene</a:t>
-            </a:r>
-            <a:endParaRPr lang="de-DE" sz="1350" b="0" u="none" strike="noStrike">
-              <a:solidFill>
-                <a:srgbClr val="000000"/>
-              </a:solidFill>
-              <a:effectLst/>
-              <a:uFillTx/>
-              <a:latin typeface="Arial"/>
-            </a:endParaRPr>
-          </a:p>
-        </p:txBody>
-      </p:sp>
-      <p:sp>
-        <p:nvSpPr>
-          <p:cNvPr id="53" name="PlaceHolder 6"/>
-          <p:cNvSpPr>
-            <a:spLocks noGrp="1"/>
-          </p:cNvSpPr>
-          <p:nvPr>
-            <p:ph type="dt" idx="28"/>
-          </p:nvPr>
-        </p:nvSpPr>
-        <p:spPr>
-          <a:xfrm>
-            <a:off x="471600" y="9181440"/>
-            <a:ext cx="1538280" cy="522720"/>
-          </a:xfrm>
-          <a:prstGeom prst="rect">
-            <a:avLst/>
-          </a:prstGeom>
-          <a:noFill/>
-          <a:ln w="0">
-            <a:noFill/>
-          </a:ln>
-        </p:spPr>
-        <p:txBody>
-          <a:bodyPr lIns="91440" rIns="91440" tIns="45720" bIns="45720" anchor="ctr">
-            <a:noAutofit/>
-          </a:bodyPr>
-          <a:lstStyle>
-            <a:lvl1pPr indent="0" defTabSz="457200">
-              <a:lnSpc>
-                <a:spcPct val="100000"/>
-              </a:lnSpc>
-              <a:buNone/>
-              <a:tabLst>
-                <a:tab algn="l" pos="0"/>
-              </a:tabLst>
-              <a:defRPr lang="de-DE" sz="900" b="0" u="none" strike="noStrike">
-                <a:solidFill>
-                  <a:schemeClr val="dk1">
-                    <a:tint val="75000"/>
-                  </a:schemeClr>
-                </a:solidFill>
-                <a:effectLst/>
-                <a:uFillTx/>
-                <a:latin typeface="Calibri"/>
-              </a:defRPr>
-            </a:lvl1pPr>
-          </a:lstStyle>
-          <a:p>
-            <a:pPr indent="0" defTabSz="457200">
-              <a:lnSpc>
-                <a:spcPct val="100000"/>
-              </a:lnSpc>
-              <a:buNone/>
-              <a:tabLst>
-                <a:tab algn="l" pos="0"/>
-              </a:tabLst>
-            </a:pPr>
-            <a:r>
-              <a:rPr lang="de-DE" sz="900" b="0" u="none" strike="noStrike">
-                <a:solidFill>
-                  <a:schemeClr val="dk1">
-                    <a:tint val="75000"/>
-                  </a:schemeClr>
-                </a:solidFill>
-                <a:effectLst/>
-                <a:uFillTx/>
-                <a:latin typeface="Calibri"/>
-              </a:rPr>
-              <a:t>&lt;Datum/Uhrzeit&gt;</a:t>
-            </a:r>
-            <a:endParaRPr lang="de-DE" sz="900" b="0" u="none" strike="noStrike">
-              <a:solidFill>
-                <a:srgbClr val="000000"/>
-              </a:solidFill>
-              <a:effectLst/>
-              <a:uFillTx/>
-              <a:latin typeface="Times New Roman"/>
-            </a:endParaRPr>
-          </a:p>
-        </p:txBody>
-      </p:sp>
-      <p:sp>
-        <p:nvSpPr>
-          <p:cNvPr id="54" name="PlaceHolder 7"/>
-          <p:cNvSpPr>
-            <a:spLocks noGrp="1"/>
-          </p:cNvSpPr>
-          <p:nvPr>
-            <p:ph type="ftr" idx="29"/>
-          </p:nvPr>
-        </p:nvSpPr>
-        <p:spPr>
-          <a:xfrm>
-            <a:off x="2271600" y="9181440"/>
-            <a:ext cx="2309760" cy="522720"/>
-          </a:xfrm>
-          <a:prstGeom prst="rect">
-            <a:avLst/>
-          </a:prstGeom>
-          <a:noFill/>
-          <a:ln w="0">
-            <a:noFill/>
-          </a:ln>
-        </p:spPr>
-        <p:txBody>
-          <a:bodyPr lIns="91440" rIns="91440" tIns="45720" bIns="45720" anchor="ctr">
-            <a:noAutofit/>
-          </a:bodyPr>
-          <a:lstStyle>
-            <a:lvl1pPr indent="0" algn="ctr">
-              <a:lnSpc>
-                <a:spcPct val="100000"/>
-              </a:lnSpc>
-              <a:buNone/>
-              <a:tabLst>
-                <a:tab algn="l" pos="0"/>
-              </a:tabLst>
-              <a:defRPr lang="de-DE" sz="1400" b="0" u="none" strike="noStrike">
-                <a:solidFill>
-                  <a:srgbClr val="000000"/>
-                </a:solidFill>
-                <a:effectLst/>
-                <a:uFillTx/>
-                <a:latin typeface="Times New Roman"/>
-              </a:defRPr>
-            </a:lvl1pPr>
-          </a:lstStyle>
-          <a:p>
-            <a:pPr indent="0" algn="ctr">
-              <a:lnSpc>
-                <a:spcPct val="100000"/>
-              </a:lnSpc>
-              <a:buNone/>
-              <a:tabLst>
-                <a:tab algn="l" pos="0"/>
-              </a:tabLst>
-            </a:pPr>
-            <a:r>
-              <a:rPr lang="de-DE" sz="1400" b="0" u="none" strike="noStrike">
-                <a:solidFill>
-                  <a:srgbClr val="000000"/>
-                </a:solidFill>
-                <a:effectLst/>
-                <a:uFillTx/>
-                <a:latin typeface="Times New Roman"/>
-              </a:rPr>
-              <a:t>&lt;Fußzeile&gt;</a:t>
-            </a:r>
-            <a:endParaRPr lang="de-DE" sz="1400" b="0" u="none" strike="noStrike">
-              <a:solidFill>
-                <a:srgbClr val="000000"/>
-              </a:solidFill>
-              <a:effectLst/>
-              <a:uFillTx/>
-              <a:latin typeface="Times New Roman"/>
-            </a:endParaRPr>
-          </a:p>
-        </p:txBody>
-      </p:sp>
-      <p:sp>
-        <p:nvSpPr>
-          <p:cNvPr id="55" name="PlaceHolder 8"/>
-          <p:cNvSpPr>
-            <a:spLocks noGrp="1"/>
-          </p:cNvSpPr>
-          <p:nvPr>
-            <p:ph type="sldNum" idx="30"/>
-          </p:nvPr>
-        </p:nvSpPr>
-        <p:spPr>
-          <a:xfrm>
-            <a:off x="4843440" y="9181440"/>
-            <a:ext cx="1538280" cy="522720"/>
-          </a:xfrm>
-          <a:prstGeom prst="rect">
-            <a:avLst/>
-          </a:prstGeom>
-          <a:noFill/>
-          <a:ln w="0">
-            <a:noFill/>
-          </a:ln>
-        </p:spPr>
-        <p:txBody>
-          <a:bodyPr lIns="91440" rIns="91440" tIns="45720" bIns="45720" anchor="ctr">
-            <a:noAutofit/>
-          </a:bodyPr>
-          <a:lstStyle>
-            <a:lvl1pPr indent="0" algn="r" defTabSz="457200">
-              <a:lnSpc>
-                <a:spcPct val="100000"/>
-              </a:lnSpc>
-              <a:buNone/>
-              <a:tabLst>
-                <a:tab algn="l" pos="0"/>
-              </a:tabLst>
-              <a:defRPr lang="de-DE" sz="900" b="0" u="none" strike="noStrike">
-                <a:solidFill>
-                  <a:schemeClr val="dk1">
-                    <a:tint val="75000"/>
-                  </a:schemeClr>
-                </a:solidFill>
-                <a:effectLst/>
-                <a:uFillTx/>
-                <a:latin typeface="Calibri"/>
-              </a:defRPr>
-            </a:lvl1pPr>
-          </a:lstStyle>
-          <a:p>
-            <a:pPr indent="0" algn="r" defTabSz="457200">
-              <a:lnSpc>
-                <a:spcPct val="100000"/>
-              </a:lnSpc>
-              <a:buNone/>
-              <a:tabLst>
-                <a:tab algn="l" pos="0"/>
-              </a:tabLst>
-            </a:pPr>
-            <a:fld id="{7C3EF77E-3409-4BD7-A8AC-3A19330F6FDA}" type="slidenum">
-              <a:rPr lang="de-DE" sz="900" b="0" u="none" strike="noStrike">
-                <a:solidFill>
-                  <a:schemeClr val="dk1">
-                    <a:tint val="75000"/>
-                  </a:schemeClr>
-                </a:solidFill>
-                <a:effectLst/>
-                <a:uFillTx/>
-                <a:latin typeface="Calibri"/>
-              </a:rPr>
-              <a:t>&lt;Foliennummer&gt;</a:t>
-            </a:fld>
-            <a:endParaRPr lang="de-DE" sz="900" b="0" u="none" strike="noStrike">
-              <a:solidFill>
-                <a:srgbClr val="000000"/>
-              </a:solidFill>
-              <a:effectLst/>
-              <a:uFillTx/>
-              <a:latin typeface="Times New Roman"/>
-            </a:endParaRPr>
-          </a:p>
-        </p:txBody>
-      </p:sp>
-    </p:spTree>
-  </p:cSld>
-</p:sldLayout>
-</file>
-
-<file path=ppt/slideLayouts/slideLayout11.xml><?xml version="1.0" encoding="utf-8"?>
-<p:sldLayout xmlns:a="http://schemas.openxmlformats.org/drawingml/2006/main" xmlns:p="http://schemas.openxmlformats.org/presentationml/2006/main" xmlns:r="http://schemas.openxmlformats.org/officeDocument/2006/relationships" xmlns:p14="http://schemas.microsoft.com/office/powerpoint/2010/main" xmlns:p15="http://schemas.microsoft.com/office/powerpoint/2012/main" xmlns:mc="http://schemas.openxmlformats.org/markup-compatibility/2006" type="titleOnly" preserve="1">
-  <p:cSld name="Nur Titel">
-    <p:bg>
-      <p:bgPr>
-        <a:solidFill>
-          <a:srgbClr val="ffffff"/>
-        </a:solidFill>
-      </p:bgPr>
-    </p:bg>
-    <p:spTree>
-      <p:nvGrpSpPr>
-        <p:cNvPr id="1" name=""/>
-        <p:cNvGrpSpPr/>
-        <p:nvPr/>
-      </p:nvGrpSpPr>
-      <p:grpSpPr>
-        <a:xfrm>
-          <a:off x="0" y="0"/>
-          <a:ext cx="0" cy="0"/>
-          <a:chOff x="0" y="0"/>
-          <a:chExt cx="0" cy="0"/>
-        </a:xfrm>
-      </p:grpSpPr>
-      <p:sp>
-        <p:nvSpPr>
-          <p:cNvPr id="56" name="PlaceHolder 1"/>
-          <p:cNvSpPr>
-            <a:spLocks noGrp="1"/>
-          </p:cNvSpPr>
-          <p:nvPr>
-            <p:ph type="title"/>
-          </p:nvPr>
-        </p:nvSpPr>
-        <p:spPr>
-          <a:xfrm>
-            <a:off x="471600" y="527400"/>
-            <a:ext cx="5910480" cy="1910160"/>
-          </a:xfrm>
-          <a:prstGeom prst="rect">
-            <a:avLst/>
-          </a:prstGeom>
-          <a:noFill/>
-          <a:ln w="0">
-            <a:noFill/>
-          </a:ln>
-        </p:spPr>
-        <p:txBody>
-          <a:bodyPr lIns="91440" rIns="91440" tIns="45720" bIns="45720" anchor="ctr">
-            <a:noAutofit/>
-          </a:bodyPr>
-          <a:p>
-            <a:pPr indent="0" defTabSz="685800">
-              <a:lnSpc>
-                <a:spcPct val="90000"/>
-              </a:lnSpc>
-              <a:buNone/>
-              <a:tabLst>
-                <a:tab algn="l" pos="0"/>
-              </a:tabLst>
-            </a:pPr>
-            <a:r>
-              <a:rPr lang="de-DE" sz="3300" b="0" u="none" strike="noStrike">
-                <a:solidFill>
-                  <a:schemeClr val="dk1"/>
-                </a:solidFill>
-                <a:effectLst/>
-                <a:uFillTx/>
-                <a:latin typeface="Calibri Light"/>
-              </a:rPr>
-              <a:t>Mastertitelformat bearbeiten</a:t>
-            </a:r>
-            <a:endParaRPr lang="de-DE" sz="3300" b="0" u="none" strike="noStrike">
-              <a:solidFill>
-                <a:srgbClr val="000000"/>
-              </a:solidFill>
-              <a:effectLst/>
-              <a:uFillTx/>
-              <a:latin typeface="Arial"/>
-            </a:endParaRPr>
-          </a:p>
-        </p:txBody>
-      </p:sp>
-      <p:sp>
-        <p:nvSpPr>
-          <p:cNvPr id="57" name="PlaceHolder 2"/>
-          <p:cNvSpPr>
-            <a:spLocks noGrp="1"/>
-          </p:cNvSpPr>
-          <p:nvPr>
-            <p:ph type="dt" idx="31"/>
-          </p:nvPr>
-        </p:nvSpPr>
-        <p:spPr>
-          <a:xfrm>
-            <a:off x="471600" y="9181440"/>
-            <a:ext cx="1538280" cy="522720"/>
-          </a:xfrm>
-          <a:prstGeom prst="rect">
-            <a:avLst/>
-          </a:prstGeom>
-          <a:noFill/>
-          <a:ln w="0">
-            <a:noFill/>
-          </a:ln>
-        </p:spPr>
-        <p:txBody>
-          <a:bodyPr lIns="91440" rIns="91440" tIns="45720" bIns="45720" anchor="ctr">
-            <a:noAutofit/>
-          </a:bodyPr>
-          <a:lstStyle>
-            <a:lvl1pPr indent="0" defTabSz="457200">
-              <a:lnSpc>
-                <a:spcPct val="100000"/>
-              </a:lnSpc>
-              <a:buNone/>
-              <a:tabLst>
-                <a:tab algn="l" pos="0"/>
-              </a:tabLst>
-              <a:defRPr lang="de-DE" sz="900" b="0" u="none" strike="noStrike">
-                <a:solidFill>
-                  <a:schemeClr val="dk1">
-                    <a:tint val="75000"/>
-                  </a:schemeClr>
-                </a:solidFill>
-                <a:effectLst/>
-                <a:uFillTx/>
-                <a:latin typeface="Calibri"/>
-              </a:defRPr>
-            </a:lvl1pPr>
-          </a:lstStyle>
-          <a:p>
-            <a:pPr indent="0" defTabSz="457200">
-              <a:lnSpc>
-                <a:spcPct val="100000"/>
-              </a:lnSpc>
-              <a:buNone/>
-              <a:tabLst>
-                <a:tab algn="l" pos="0"/>
-              </a:tabLst>
-            </a:pPr>
-            <a:r>
-              <a:rPr lang="de-DE" sz="900" b="0" u="none" strike="noStrike">
-                <a:solidFill>
-                  <a:schemeClr val="dk1">
-                    <a:tint val="75000"/>
-                  </a:schemeClr>
-                </a:solidFill>
-                <a:effectLst/>
-                <a:uFillTx/>
-                <a:latin typeface="Calibri"/>
-              </a:rPr>
-              <a:t>&lt;Datum/Uhrzeit&gt;</a:t>
-            </a:r>
-            <a:endParaRPr lang="de-DE" sz="900" b="0" u="none" strike="noStrike">
-              <a:solidFill>
-                <a:srgbClr val="000000"/>
-              </a:solidFill>
-              <a:effectLst/>
-              <a:uFillTx/>
-              <a:latin typeface="Times New Roman"/>
-            </a:endParaRPr>
-          </a:p>
-        </p:txBody>
-      </p:sp>
-      <p:sp>
-        <p:nvSpPr>
-          <p:cNvPr id="58" name="PlaceHolder 3"/>
-          <p:cNvSpPr>
-            <a:spLocks noGrp="1"/>
-          </p:cNvSpPr>
-          <p:nvPr>
-            <p:ph type="ftr" idx="32"/>
-          </p:nvPr>
-        </p:nvSpPr>
-        <p:spPr>
-          <a:xfrm>
-            <a:off x="2271600" y="9181440"/>
-            <a:ext cx="2309760" cy="522720"/>
-          </a:xfrm>
-          <a:prstGeom prst="rect">
-            <a:avLst/>
-          </a:prstGeom>
-          <a:noFill/>
-          <a:ln w="0">
-            <a:noFill/>
-          </a:ln>
-        </p:spPr>
-        <p:txBody>
-          <a:bodyPr lIns="91440" rIns="91440" tIns="45720" bIns="45720" anchor="ctr">
-            <a:noAutofit/>
-          </a:bodyPr>
-          <a:lstStyle>
-            <a:lvl1pPr indent="0" algn="ctr">
-              <a:lnSpc>
-                <a:spcPct val="100000"/>
-              </a:lnSpc>
-              <a:buNone/>
-              <a:tabLst>
-                <a:tab algn="l" pos="0"/>
-              </a:tabLst>
-              <a:defRPr lang="de-DE" sz="1400" b="0" u="none" strike="noStrike">
-                <a:solidFill>
-                  <a:srgbClr val="000000"/>
-                </a:solidFill>
-                <a:effectLst/>
-                <a:uFillTx/>
-                <a:latin typeface="Times New Roman"/>
-              </a:defRPr>
-            </a:lvl1pPr>
-          </a:lstStyle>
-          <a:p>
-            <a:pPr indent="0" algn="ctr">
-              <a:lnSpc>
-                <a:spcPct val="100000"/>
-              </a:lnSpc>
-              <a:buNone/>
-              <a:tabLst>
-                <a:tab algn="l" pos="0"/>
-              </a:tabLst>
-            </a:pPr>
-            <a:r>
-              <a:rPr lang="de-DE" sz="1400" b="0" u="none" strike="noStrike">
-                <a:solidFill>
-                  <a:srgbClr val="000000"/>
-                </a:solidFill>
-                <a:effectLst/>
-                <a:uFillTx/>
-                <a:latin typeface="Times New Roman"/>
-              </a:rPr>
-              <a:t>&lt;Fußzeile&gt;</a:t>
-            </a:r>
-            <a:endParaRPr lang="de-DE" sz="1400" b="0" u="none" strike="noStrike">
-              <a:solidFill>
-                <a:srgbClr val="000000"/>
-              </a:solidFill>
-              <a:effectLst/>
-              <a:uFillTx/>
-              <a:latin typeface="Times New Roman"/>
-            </a:endParaRPr>
-          </a:p>
-        </p:txBody>
-      </p:sp>
-      <p:sp>
-        <p:nvSpPr>
-          <p:cNvPr id="59" name="PlaceHolder 4"/>
-          <p:cNvSpPr>
-            <a:spLocks noGrp="1"/>
-          </p:cNvSpPr>
-          <p:nvPr>
-            <p:ph type="sldNum" idx="33"/>
-          </p:nvPr>
-        </p:nvSpPr>
-        <p:spPr>
-          <a:xfrm>
-            <a:off x="4843440" y="9181440"/>
-            <a:ext cx="1538280" cy="522720"/>
-          </a:xfrm>
-          <a:prstGeom prst="rect">
-            <a:avLst/>
-          </a:prstGeom>
-          <a:noFill/>
-          <a:ln w="0">
-            <a:noFill/>
-          </a:ln>
-        </p:spPr>
-        <p:txBody>
-          <a:bodyPr lIns="91440" rIns="91440" tIns="45720" bIns="45720" anchor="ctr">
-            <a:noAutofit/>
-          </a:bodyPr>
-          <a:lstStyle>
-            <a:lvl1pPr indent="0" algn="r" defTabSz="457200">
-              <a:lnSpc>
-                <a:spcPct val="100000"/>
-              </a:lnSpc>
-              <a:buNone/>
-              <a:tabLst>
-                <a:tab algn="l" pos="0"/>
-              </a:tabLst>
-              <a:defRPr lang="de-DE" sz="900" b="0" u="none" strike="noStrike">
-                <a:solidFill>
-                  <a:schemeClr val="dk1">
-                    <a:tint val="75000"/>
-                  </a:schemeClr>
-                </a:solidFill>
-                <a:effectLst/>
-                <a:uFillTx/>
-                <a:latin typeface="Calibri"/>
-              </a:defRPr>
-            </a:lvl1pPr>
-          </a:lstStyle>
-          <a:p>
-            <a:pPr indent="0" algn="r" defTabSz="457200">
-              <a:lnSpc>
-                <a:spcPct val="100000"/>
-              </a:lnSpc>
-              <a:buNone/>
-              <a:tabLst>
-                <a:tab algn="l" pos="0"/>
-              </a:tabLst>
-            </a:pPr>
-            <a:fld id="{9137A0F1-8D1C-4AB2-91DF-36294B984315}" type="slidenum">
-              <a:rPr lang="de-DE" sz="900" b="0" u="none" strike="noStrike">
-                <a:solidFill>
-                  <a:schemeClr val="dk1">
-                    <a:tint val="75000"/>
-                  </a:schemeClr>
-                </a:solidFill>
-                <a:effectLst/>
-                <a:uFillTx/>
-                <a:latin typeface="Calibri"/>
-              </a:rPr>
-              <a:t>&lt;Foliennummer&gt;</a:t>
-            </a:fld>
-            <a:endParaRPr lang="de-DE" sz="900" b="0" u="none" strike="noStrike">
-              <a:solidFill>
-                <a:srgbClr val="000000"/>
-              </a:solidFill>
-              <a:effectLst/>
-              <a:uFillTx/>
-              <a:latin typeface="Times New Roman"/>
-            </a:endParaRPr>
-          </a:p>
-        </p:txBody>
-      </p:sp>
-    </p:spTree>
-  </p:cSld>
-</p:sldLayout>
-</file>
-
-<file path=ppt/slideLayouts/slideLayout2.xml><?xml version="1.0" encoding="utf-8"?>
+<file path=ppt/slideLayouts/slideLayout5.xml><?xml version="1.0" encoding="utf-8"?>
 <p:sldLayout xmlns:a="http://schemas.openxmlformats.org/drawingml/2006/main" xmlns:p="http://schemas.openxmlformats.org/presentationml/2006/main" xmlns:r="http://schemas.openxmlformats.org/officeDocument/2006/relationships" xmlns:p14="http://schemas.microsoft.com/office/powerpoint/2010/main" xmlns:p15="http://schemas.microsoft.com/office/powerpoint/2012/main" xmlns:mc="http://schemas.openxmlformats.org/markup-compatibility/2006" type="blank" preserve="1">
   <p:cSld name="Inhalt mit Überschrift">
     <p:bg>
@@ -1492,7 +3141,7 @@
       </p:grpSpPr>
       <p:sp>
         <p:nvSpPr>
-          <p:cNvPr id="5" name="PlaceHolder 1"/>
+          <p:cNvPr id="23" name="PlaceHolder 1"/>
           <p:cNvSpPr>
             <a:spLocks noGrp="1"/>
           </p:cNvSpPr>
@@ -1503,7 +3152,7 @@
         <p:spPr>
           <a:xfrm>
             <a:off x="472320" y="660240"/>
-            <a:ext cx="2207160" cy="2306880"/>
+            <a:ext cx="2206800" cy="2306520"/>
           </a:xfrm>
           <a:prstGeom prst="rect">
             <a:avLst/>
@@ -1551,7 +3200,7 @@
       </p:sp>
       <p:sp>
         <p:nvSpPr>
-          <p:cNvPr id="6" name="PlaceHolder 2"/>
+          <p:cNvPr id="24" name="PlaceHolder 2"/>
           <p:cNvSpPr>
             <a:spLocks noGrp="1"/>
           </p:cNvSpPr>
@@ -1562,7 +3211,7 @@
         <p:spPr>
           <a:xfrm>
             <a:off x="2915640" y="1426320"/>
-            <a:ext cx="3467160" cy="7035120"/>
+            <a:ext cx="3466800" cy="7034760"/>
           </a:xfrm>
           <a:prstGeom prst="rect">
             <a:avLst/>
@@ -1750,7 +3399,7 @@
       </p:sp>
       <p:sp>
         <p:nvSpPr>
-          <p:cNvPr id="7" name="PlaceHolder 3"/>
+          <p:cNvPr id="25" name="PlaceHolder 3"/>
           <p:cNvSpPr>
             <a:spLocks noGrp="1"/>
           </p:cNvSpPr>
@@ -1761,7 +3410,7 @@
         <p:spPr>
           <a:xfrm>
             <a:off x="472320" y="2971800"/>
-            <a:ext cx="2207160" cy="5500800"/>
+            <a:ext cx="2206800" cy="5500440"/>
           </a:xfrm>
           <a:prstGeom prst="rect">
             <a:avLst/>
@@ -1812,18 +3461,18 @@
       </p:sp>
       <p:sp>
         <p:nvSpPr>
-          <p:cNvPr id="8" name="PlaceHolder 4"/>
+          <p:cNvPr id="26" name="PlaceHolder 4"/>
           <p:cNvSpPr>
             <a:spLocks noGrp="1"/>
           </p:cNvSpPr>
           <p:nvPr>
-            <p:ph type="dt" idx="4"/>
+            <p:ph type="dt" idx="13"/>
           </p:nvPr>
         </p:nvSpPr>
         <p:spPr>
           <a:xfrm>
             <a:off x="471600" y="9181440"/>
-            <a:ext cx="1538280" cy="522720"/>
+            <a:ext cx="1537920" cy="522360"/>
           </a:xfrm>
           <a:prstGeom prst="rect">
             <a:avLst/>
@@ -1894,18 +3543,18 @@
       </p:sp>
       <p:sp>
         <p:nvSpPr>
-          <p:cNvPr id="9" name="PlaceHolder 5"/>
+          <p:cNvPr id="27" name="PlaceHolder 5"/>
           <p:cNvSpPr>
             <a:spLocks noGrp="1"/>
           </p:cNvSpPr>
           <p:nvPr>
-            <p:ph type="ftr" idx="5"/>
+            <p:ph type="ftr" idx="14"/>
           </p:nvPr>
         </p:nvSpPr>
         <p:spPr>
           <a:xfrm>
             <a:off x="2271600" y="9181440"/>
-            <a:ext cx="2309760" cy="522720"/>
+            <a:ext cx="2309400" cy="522360"/>
           </a:xfrm>
           <a:prstGeom prst="rect">
             <a:avLst/>
@@ -1972,18 +3621,18 @@
       </p:sp>
       <p:sp>
         <p:nvSpPr>
-          <p:cNvPr id="10" name="PlaceHolder 6"/>
+          <p:cNvPr id="28" name="PlaceHolder 6"/>
           <p:cNvSpPr>
             <a:spLocks noGrp="1"/>
           </p:cNvSpPr>
           <p:nvPr>
-            <p:ph type="sldNum" idx="6"/>
+            <p:ph type="sldNum" idx="15"/>
           </p:nvPr>
         </p:nvSpPr>
         <p:spPr>
           <a:xfrm>
             <a:off x="4843440" y="9181440"/>
-            <a:ext cx="1538280" cy="522720"/>
+            <a:ext cx="1537920" cy="522360"/>
           </a:xfrm>
           <a:prstGeom prst="rect">
             <a:avLst/>
@@ -2028,7 +3677,7 @@
                 <a:tab algn="l" pos="0"/>
               </a:tabLst>
             </a:pPr>
-            <a:fld id="{952DBE71-197D-4FD9-BF23-E11DCD34C5A4}" type="slidenum">
+            <a:fld id="{2B91829D-47BC-4594-8853-1FE0399E2EF9}" type="slidenum">
               <a:rPr lang="de-DE" sz="900" b="0" u="none" strike="noStrike">
                 <a:solidFill>
                   <a:schemeClr val="dk1">
@@ -2057,7 +3706,7 @@
 </p:sldLayout>
 </file>
 
-<file path=ppt/slideLayouts/slideLayout3.xml><?xml version="1.0" encoding="utf-8"?>
+<file path=ppt/slideLayouts/slideLayout6.xml><?xml version="1.0" encoding="utf-8"?>
 <p:sldLayout xmlns:a="http://schemas.openxmlformats.org/drawingml/2006/main" xmlns:p="http://schemas.openxmlformats.org/presentationml/2006/main" xmlns:r="http://schemas.openxmlformats.org/officeDocument/2006/relationships" xmlns:p14="http://schemas.microsoft.com/office/powerpoint/2010/main" xmlns:p15="http://schemas.microsoft.com/office/powerpoint/2012/main" xmlns:mc="http://schemas.openxmlformats.org/markup-compatibility/2006" type="blank" preserve="1">
   <p:cSld name="Bild mit Überschrift">
     <p:bg>
@@ -2083,7 +3732,7 @@
       </p:grpSpPr>
       <p:sp>
         <p:nvSpPr>
-          <p:cNvPr id="11" name="PlaceHolder 1"/>
+          <p:cNvPr id="29" name="PlaceHolder 1"/>
           <p:cNvSpPr>
             <a:spLocks noGrp="1"/>
           </p:cNvSpPr>
@@ -2094,7 +3743,7 @@
         <p:spPr>
           <a:xfrm>
             <a:off x="472320" y="660240"/>
-            <a:ext cx="2207160" cy="2306880"/>
+            <a:ext cx="2206800" cy="2306520"/>
           </a:xfrm>
           <a:prstGeom prst="rect">
             <a:avLst/>
@@ -2142,7 +3791,7 @@
       </p:sp>
       <p:sp>
         <p:nvSpPr>
-          <p:cNvPr id="12" name="PlaceHolder 2"/>
+          <p:cNvPr id="30" name="PlaceHolder 2"/>
           <p:cNvSpPr>
             <a:spLocks noGrp="1"/>
           </p:cNvSpPr>
@@ -2153,7 +3802,7 @@
         <p:spPr>
           <a:xfrm>
             <a:off x="2915640" y="1426320"/>
-            <a:ext cx="3467160" cy="7035120"/>
+            <a:ext cx="3466800" cy="7034760"/>
           </a:xfrm>
           <a:prstGeom prst="rect">
             <a:avLst/>
@@ -2201,7 +3850,7 @@
       </p:sp>
       <p:sp>
         <p:nvSpPr>
-          <p:cNvPr id="13" name="PlaceHolder 3"/>
+          <p:cNvPr id="31" name="PlaceHolder 3"/>
           <p:cNvSpPr>
             <a:spLocks noGrp="1"/>
           </p:cNvSpPr>
@@ -2212,7 +3861,7 @@
         <p:spPr>
           <a:xfrm>
             <a:off x="472320" y="2971800"/>
-            <a:ext cx="2207160" cy="5500800"/>
+            <a:ext cx="2206800" cy="5500440"/>
           </a:xfrm>
           <a:prstGeom prst="rect">
             <a:avLst/>
@@ -2263,18 +3912,18 @@
       </p:sp>
       <p:sp>
         <p:nvSpPr>
-          <p:cNvPr id="14" name="PlaceHolder 4"/>
+          <p:cNvPr id="32" name="PlaceHolder 4"/>
           <p:cNvSpPr>
             <a:spLocks noGrp="1"/>
           </p:cNvSpPr>
           <p:nvPr>
-            <p:ph type="dt" idx="7"/>
+            <p:ph type="dt" idx="16"/>
           </p:nvPr>
         </p:nvSpPr>
         <p:spPr>
           <a:xfrm>
             <a:off x="471600" y="9181440"/>
-            <a:ext cx="1538280" cy="522720"/>
+            <a:ext cx="1537920" cy="522360"/>
           </a:xfrm>
           <a:prstGeom prst="rect">
             <a:avLst/>
@@ -2345,18 +3994,18 @@
       </p:sp>
       <p:sp>
         <p:nvSpPr>
-          <p:cNvPr id="15" name="PlaceHolder 5"/>
+          <p:cNvPr id="33" name="PlaceHolder 5"/>
           <p:cNvSpPr>
             <a:spLocks noGrp="1"/>
           </p:cNvSpPr>
           <p:nvPr>
-            <p:ph type="ftr" idx="8"/>
+            <p:ph type="ftr" idx="17"/>
           </p:nvPr>
         </p:nvSpPr>
         <p:spPr>
           <a:xfrm>
             <a:off x="2271600" y="9181440"/>
-            <a:ext cx="2309760" cy="522720"/>
+            <a:ext cx="2309400" cy="522360"/>
           </a:xfrm>
           <a:prstGeom prst="rect">
             <a:avLst/>
@@ -2423,18 +4072,18 @@
       </p:sp>
       <p:sp>
         <p:nvSpPr>
-          <p:cNvPr id="16" name="PlaceHolder 6"/>
+          <p:cNvPr id="34" name="PlaceHolder 6"/>
           <p:cNvSpPr>
             <a:spLocks noGrp="1"/>
           </p:cNvSpPr>
           <p:nvPr>
-            <p:ph type="sldNum" idx="9"/>
+            <p:ph type="sldNum" idx="18"/>
           </p:nvPr>
         </p:nvSpPr>
         <p:spPr>
           <a:xfrm>
             <a:off x="4843440" y="9181440"/>
-            <a:ext cx="1538280" cy="522720"/>
+            <a:ext cx="1537920" cy="522360"/>
           </a:xfrm>
           <a:prstGeom prst="rect">
             <a:avLst/>
@@ -2479,7 +4128,7 @@
                 <a:tab algn="l" pos="0"/>
               </a:tabLst>
             </a:pPr>
-            <a:fld id="{D5861538-9CB2-4B24-A816-BC942E5363D9}" type="slidenum">
+            <a:fld id="{7A2D6E97-2B3C-4A9D-A1D6-0A6E02719867}" type="slidenum">
               <a:rPr lang="de-DE" sz="900" b="0" u="none" strike="noStrike">
                 <a:solidFill>
                   <a:schemeClr val="dk1">
@@ -2508,7 +4157,7 @@
 </p:sldLayout>
 </file>
 
-<file path=ppt/slideLayouts/slideLayout4.xml><?xml version="1.0" encoding="utf-8"?>
+<file path=ppt/slideLayouts/slideLayout7.xml><?xml version="1.0" encoding="utf-8"?>
 <p:sldLayout xmlns:a="http://schemas.openxmlformats.org/drawingml/2006/main" xmlns:p="http://schemas.openxmlformats.org/presentationml/2006/main" xmlns:r="http://schemas.openxmlformats.org/officeDocument/2006/relationships" xmlns:p14="http://schemas.microsoft.com/office/powerpoint/2010/main" xmlns:p15="http://schemas.microsoft.com/office/powerpoint/2012/main" xmlns:mc="http://schemas.openxmlformats.org/markup-compatibility/2006" type="title" preserve="1">
   <p:cSld name="Titelfolie">
     <p:bg>
@@ -2534,7 +4183,7 @@
       </p:grpSpPr>
       <p:sp>
         <p:nvSpPr>
-          <p:cNvPr id="17" name="PlaceHolder 1"/>
+          <p:cNvPr id="35" name="PlaceHolder 1"/>
           <p:cNvSpPr>
             <a:spLocks noGrp="1"/>
           </p:cNvSpPr>
@@ -2545,7 +4194,7 @@
         <p:spPr>
           <a:xfrm>
             <a:off x="514440" y="1621080"/>
-            <a:ext cx="5824800" cy="3444120"/>
+            <a:ext cx="5824440" cy="3443760"/>
           </a:xfrm>
           <a:prstGeom prst="rect">
             <a:avLst/>
@@ -2593,18 +4242,18 @@
       </p:sp>
       <p:sp>
         <p:nvSpPr>
-          <p:cNvPr id="18" name="PlaceHolder 2"/>
+          <p:cNvPr id="36" name="PlaceHolder 2"/>
           <p:cNvSpPr>
             <a:spLocks noGrp="1"/>
           </p:cNvSpPr>
           <p:nvPr>
-            <p:ph type="dt" idx="10"/>
+            <p:ph type="dt" idx="19"/>
           </p:nvPr>
         </p:nvSpPr>
         <p:spPr>
           <a:xfrm>
             <a:off x="471600" y="9181440"/>
-            <a:ext cx="1538280" cy="522720"/>
+            <a:ext cx="1537920" cy="522360"/>
           </a:xfrm>
           <a:prstGeom prst="rect">
             <a:avLst/>
@@ -2675,18 +4324,18 @@
       </p:sp>
       <p:sp>
         <p:nvSpPr>
-          <p:cNvPr id="19" name="PlaceHolder 3"/>
+          <p:cNvPr id="37" name="PlaceHolder 3"/>
           <p:cNvSpPr>
             <a:spLocks noGrp="1"/>
           </p:cNvSpPr>
           <p:nvPr>
-            <p:ph type="ftr" idx="11"/>
+            <p:ph type="ftr" idx="20"/>
           </p:nvPr>
         </p:nvSpPr>
         <p:spPr>
           <a:xfrm>
             <a:off x="2271600" y="9181440"/>
-            <a:ext cx="2309760" cy="522720"/>
+            <a:ext cx="2309400" cy="522360"/>
           </a:xfrm>
           <a:prstGeom prst="rect">
             <a:avLst/>
@@ -2753,18 +4402,18 @@
       </p:sp>
       <p:sp>
         <p:nvSpPr>
-          <p:cNvPr id="20" name="PlaceHolder 4"/>
+          <p:cNvPr id="38" name="PlaceHolder 4"/>
           <p:cNvSpPr>
             <a:spLocks noGrp="1"/>
           </p:cNvSpPr>
           <p:nvPr>
-            <p:ph type="sldNum" idx="12"/>
+            <p:ph type="sldNum" idx="21"/>
           </p:nvPr>
         </p:nvSpPr>
         <p:spPr>
           <a:xfrm>
             <a:off x="4843440" y="9181440"/>
-            <a:ext cx="1538280" cy="522720"/>
+            <a:ext cx="1537920" cy="522360"/>
           </a:xfrm>
           <a:prstGeom prst="rect">
             <a:avLst/>
@@ -2809,7 +4458,7 @@
                 <a:tab algn="l" pos="0"/>
               </a:tabLst>
             </a:pPr>
-            <a:fld id="{FFE26C46-A20B-4322-8357-636B91BFFA1C}" type="slidenum">
+            <a:fld id="{8611A401-F5EB-46BF-9D09-431DD90934EA}" type="slidenum">
               <a:rPr lang="de-DE" sz="900" b="0" u="none" strike="noStrike">
                 <a:solidFill>
                   <a:schemeClr val="dk1">
@@ -2835,7 +4484,7 @@
       </p:sp>
       <p:sp>
         <p:nvSpPr>
-          <p:cNvPr id="21" name="PlaceHolder 5"/>
+          <p:cNvPr id="39" name="PlaceHolder 5"/>
           <p:cNvSpPr>
             <a:spLocks noGrp="1"/>
           </p:cNvSpPr>
@@ -2846,7 +4495,7 @@
         <p:spPr>
           <a:xfrm>
             <a:off x="342720" y="2317680"/>
-            <a:ext cx="6167520" cy="5740560"/>
+            <a:ext cx="6167160" cy="5740200"/>
           </a:xfrm>
           <a:prstGeom prst="rect">
             <a:avLst/>
@@ -3112,7 +4761,7 @@
 </p:sldLayout>
 </file>
 
-<file path=ppt/slideLayouts/slideLayout5.xml><?xml version="1.0" encoding="utf-8"?>
+<file path=ppt/slideLayouts/slideLayout8.xml><?xml version="1.0" encoding="utf-8"?>
 <p:sldLayout xmlns:a="http://schemas.openxmlformats.org/drawingml/2006/main" xmlns:p="http://schemas.openxmlformats.org/presentationml/2006/main" xmlns:r="http://schemas.openxmlformats.org/officeDocument/2006/relationships" xmlns:p14="http://schemas.microsoft.com/office/powerpoint/2010/main" xmlns:p15="http://schemas.microsoft.com/office/powerpoint/2012/main" xmlns:mc="http://schemas.openxmlformats.org/markup-compatibility/2006" type="vertTx" preserve="1">
   <p:cSld name="Titel und vertikaler Text">
     <p:bg>
@@ -3138,7 +4787,7 @@
       </p:grpSpPr>
       <p:sp>
         <p:nvSpPr>
-          <p:cNvPr id="22" name="PlaceHolder 1"/>
+          <p:cNvPr id="40" name="PlaceHolder 1"/>
           <p:cNvSpPr>
             <a:spLocks noGrp="1"/>
           </p:cNvSpPr>
@@ -3149,7 +4798,7 @@
         <p:spPr>
           <a:xfrm>
             <a:off x="471600" y="527400"/>
-            <a:ext cx="5910480" cy="1910160"/>
+            <a:ext cx="5910120" cy="1909800"/>
           </a:xfrm>
           <a:prstGeom prst="rect">
             <a:avLst/>
@@ -3197,7 +4846,7 @@
       </p:sp>
       <p:sp>
         <p:nvSpPr>
-          <p:cNvPr id="23" name="PlaceHolder 2"/>
+          <p:cNvPr id="41" name="PlaceHolder 2"/>
           <p:cNvSpPr>
             <a:spLocks noGrp="1"/>
           </p:cNvSpPr>
@@ -3208,7 +4857,7 @@
         <p:spPr>
           <a:xfrm>
             <a:off x="471600" y="2637000"/>
-            <a:ext cx="5910480" cy="6280560"/>
+            <a:ext cx="5910120" cy="6280200"/>
           </a:xfrm>
           <a:prstGeom prst="rect">
             <a:avLst/>
@@ -3396,18 +5045,18 @@
       </p:sp>
       <p:sp>
         <p:nvSpPr>
-          <p:cNvPr id="24" name="PlaceHolder 3"/>
+          <p:cNvPr id="42" name="PlaceHolder 3"/>
           <p:cNvSpPr>
             <a:spLocks noGrp="1"/>
           </p:cNvSpPr>
           <p:nvPr>
-            <p:ph type="dt" idx="13"/>
+            <p:ph type="dt" idx="22"/>
           </p:nvPr>
         </p:nvSpPr>
         <p:spPr>
           <a:xfrm>
             <a:off x="471600" y="9181440"/>
-            <a:ext cx="1538280" cy="522720"/>
+            <a:ext cx="1537920" cy="522360"/>
           </a:xfrm>
           <a:prstGeom prst="rect">
             <a:avLst/>
@@ -3478,18 +5127,18 @@
       </p:sp>
       <p:sp>
         <p:nvSpPr>
-          <p:cNvPr id="25" name="PlaceHolder 4"/>
+          <p:cNvPr id="43" name="PlaceHolder 4"/>
           <p:cNvSpPr>
             <a:spLocks noGrp="1"/>
           </p:cNvSpPr>
           <p:nvPr>
-            <p:ph type="ftr" idx="14"/>
+            <p:ph type="ftr" idx="23"/>
           </p:nvPr>
         </p:nvSpPr>
         <p:spPr>
           <a:xfrm>
             <a:off x="2271600" y="9181440"/>
-            <a:ext cx="2309760" cy="522720"/>
+            <a:ext cx="2309400" cy="522360"/>
           </a:xfrm>
           <a:prstGeom prst="rect">
             <a:avLst/>
@@ -3556,18 +5205,18 @@
       </p:sp>
       <p:sp>
         <p:nvSpPr>
-          <p:cNvPr id="26" name="PlaceHolder 5"/>
+          <p:cNvPr id="44" name="PlaceHolder 5"/>
           <p:cNvSpPr>
             <a:spLocks noGrp="1"/>
           </p:cNvSpPr>
           <p:nvPr>
-            <p:ph type="sldNum" idx="15"/>
+            <p:ph type="sldNum" idx="24"/>
           </p:nvPr>
         </p:nvSpPr>
         <p:spPr>
           <a:xfrm>
             <a:off x="4843440" y="9181440"/>
-            <a:ext cx="1538280" cy="522720"/>
+            <a:ext cx="1537920" cy="522360"/>
           </a:xfrm>
           <a:prstGeom prst="rect">
             <a:avLst/>
@@ -3612,7 +5261,7 @@
                 <a:tab algn="l" pos="0"/>
               </a:tabLst>
             </a:pPr>
-            <a:fld id="{23786F5E-A1A1-4418-A8F6-D41872DF00FF}" type="slidenum">
+            <a:fld id="{37CED88C-BD9E-436E-A472-697681CF71EC}" type="slidenum">
               <a:rPr lang="de-DE" sz="900" b="0" u="none" strike="noStrike">
                 <a:solidFill>
                   <a:schemeClr val="dk1">
@@ -3641,7 +5290,7 @@
 </p:sldLayout>
 </file>
 
-<file path=ppt/slideLayouts/slideLayout6.xml><?xml version="1.0" encoding="utf-8"?>
+<file path=ppt/slideLayouts/slideLayout9.xml><?xml version="1.0" encoding="utf-8"?>
 <p:sldLayout xmlns:a="http://schemas.openxmlformats.org/drawingml/2006/main" xmlns:p="http://schemas.openxmlformats.org/presentationml/2006/main" xmlns:r="http://schemas.openxmlformats.org/officeDocument/2006/relationships" xmlns:p14="http://schemas.microsoft.com/office/powerpoint/2010/main" xmlns:p15="http://schemas.microsoft.com/office/powerpoint/2012/main" xmlns:mc="http://schemas.openxmlformats.org/markup-compatibility/2006" type="vertTitleAndTx" preserve="1">
   <p:cSld name="Vertikaler Titel und Text">
     <p:bg>
@@ -3667,7 +5316,7 @@
       </p:grpSpPr>
       <p:sp>
         <p:nvSpPr>
-          <p:cNvPr id="27" name="PlaceHolder 1"/>
+          <p:cNvPr id="45" name="PlaceHolder 1"/>
           <p:cNvSpPr>
             <a:spLocks noGrp="1"/>
           </p:cNvSpPr>
@@ -3678,7 +5327,7 @@
         <p:spPr>
           <a:xfrm>
             <a:off x="4907880" y="527400"/>
-            <a:ext cx="1474200" cy="8390160"/>
+            <a:ext cx="1473840" cy="8389800"/>
           </a:xfrm>
           <a:prstGeom prst="rect">
             <a:avLst/>
@@ -3726,7 +5375,7 @@
       </p:sp>
       <p:sp>
         <p:nvSpPr>
-          <p:cNvPr id="28" name="PlaceHolder 2"/>
+          <p:cNvPr id="46" name="PlaceHolder 2"/>
           <p:cNvSpPr>
             <a:spLocks noGrp="1"/>
           </p:cNvSpPr>
@@ -3737,7 +5386,7 @@
         <p:spPr>
           <a:xfrm>
             <a:off x="471600" y="527400"/>
-            <a:ext cx="4345920" cy="8390160"/>
+            <a:ext cx="4345560" cy="8389800"/>
           </a:xfrm>
           <a:prstGeom prst="rect">
             <a:avLst/>
@@ -3925,1656 +5574,7 @@
       </p:sp>
       <p:sp>
         <p:nvSpPr>
-          <p:cNvPr id="29" name="PlaceHolder 3"/>
-          <p:cNvSpPr>
-            <a:spLocks noGrp="1"/>
-          </p:cNvSpPr>
-          <p:nvPr>
-            <p:ph type="dt" idx="16"/>
-          </p:nvPr>
-        </p:nvSpPr>
-        <p:spPr>
-          <a:xfrm>
-            <a:off x="471600" y="9181440"/>
-            <a:ext cx="1538280" cy="522720"/>
-          </a:xfrm>
-          <a:prstGeom prst="rect">
-            <a:avLst/>
-          </a:prstGeom>
-          <a:noFill/>
-          <a:ln w="0">
-            <a:noFill/>
-          </a:ln>
-        </p:spPr>
-        <p:txBody>
-          <a:bodyPr lIns="91440" rIns="91440" tIns="45720" bIns="45720" anchor="ctr">
-            <a:noAutofit/>
-          </a:bodyPr>
-          <a:lstStyle>
-            <a:lvl1pPr indent="0" defTabSz="457200">
-              <a:lnSpc>
-                <a:spcPct val="100000"/>
-              </a:lnSpc>
-              <a:buNone/>
-              <a:tabLst>
-                <a:tab algn="l" pos="0"/>
-              </a:tabLst>
-              <a:defRPr lang="de-DE" sz="900" b="0" u="none" strike="noStrike">
-                <a:solidFill>
-                  <a:schemeClr val="dk1">
-                    <a:tint val="75000"/>
-                  </a:schemeClr>
-                </a:solidFill>
-                <a:effectLst/>
-                <a:uFillTx/>
-                <a:latin typeface="Calibri"/>
-              </a:defRPr>
-            </a:lvl1pPr>
-          </a:lstStyle>
-          <a:p>
-            <a:pPr indent="0" defTabSz="457200">
-              <a:lnSpc>
-                <a:spcPct val="100000"/>
-              </a:lnSpc>
-              <a:buNone/>
-              <a:tabLst>
-                <a:tab algn="l" pos="0"/>
-              </a:tabLst>
-            </a:pPr>
-            <a:r>
-              <a:rPr lang="de-DE" sz="900" b="0" u="none" strike="noStrike">
-                <a:solidFill>
-                  <a:schemeClr val="dk1">
-                    <a:tint val="75000"/>
-                  </a:schemeClr>
-                </a:solidFill>
-                <a:effectLst/>
-                <a:uFillTx/>
-                <a:latin typeface="Calibri"/>
-              </a:rPr>
-              <a:t>&lt;Datum/Uhrzeit&gt;</a:t>
-            </a:r>
-            <a:endParaRPr lang="de-DE" sz="900" b="0" u="none" strike="noStrike">
-              <a:solidFill>
-                <a:srgbClr val="000000"/>
-              </a:solidFill>
-              <a:effectLst/>
-              <a:uFillTx/>
-              <a:latin typeface="Times New Roman"/>
-            </a:endParaRPr>
-          </a:p>
-        </p:txBody>
-      </p:sp>
-      <p:sp>
-        <p:nvSpPr>
-          <p:cNvPr id="30" name="PlaceHolder 4"/>
-          <p:cNvSpPr>
-            <a:spLocks noGrp="1"/>
-          </p:cNvSpPr>
-          <p:nvPr>
-            <p:ph type="ftr" idx="17"/>
-          </p:nvPr>
-        </p:nvSpPr>
-        <p:spPr>
-          <a:xfrm>
-            <a:off x="2271600" y="9181440"/>
-            <a:ext cx="2309760" cy="522720"/>
-          </a:xfrm>
-          <a:prstGeom prst="rect">
-            <a:avLst/>
-          </a:prstGeom>
-          <a:noFill/>
-          <a:ln w="0">
-            <a:noFill/>
-          </a:ln>
-        </p:spPr>
-        <p:txBody>
-          <a:bodyPr lIns="91440" rIns="91440" tIns="45720" bIns="45720" anchor="ctr">
-            <a:noAutofit/>
-          </a:bodyPr>
-          <a:lstStyle>
-            <a:lvl1pPr indent="0" algn="ctr">
-              <a:lnSpc>
-                <a:spcPct val="100000"/>
-              </a:lnSpc>
-              <a:buNone/>
-              <a:tabLst>
-                <a:tab algn="l" pos="0"/>
-              </a:tabLst>
-              <a:defRPr lang="de-DE" sz="1400" b="0" u="none" strike="noStrike">
-                <a:solidFill>
-                  <a:srgbClr val="000000"/>
-                </a:solidFill>
-                <a:effectLst/>
-                <a:uFillTx/>
-                <a:latin typeface="Times New Roman"/>
-              </a:defRPr>
-            </a:lvl1pPr>
-          </a:lstStyle>
-          <a:p>
-            <a:pPr indent="0" algn="ctr">
-              <a:lnSpc>
-                <a:spcPct val="100000"/>
-              </a:lnSpc>
-              <a:buNone/>
-              <a:tabLst>
-                <a:tab algn="l" pos="0"/>
-              </a:tabLst>
-            </a:pPr>
-            <a:r>
-              <a:rPr lang="de-DE" sz="1400" b="0" u="none" strike="noStrike">
-                <a:solidFill>
-                  <a:srgbClr val="000000"/>
-                </a:solidFill>
-                <a:effectLst/>
-                <a:uFillTx/>
-                <a:latin typeface="Times New Roman"/>
-              </a:rPr>
-              <a:t>&lt;Fußzeile&gt;</a:t>
-            </a:r>
-            <a:endParaRPr lang="de-DE" sz="1400" b="0" u="none" strike="noStrike">
-              <a:solidFill>
-                <a:srgbClr val="000000"/>
-              </a:solidFill>
-              <a:effectLst/>
-              <a:uFillTx/>
-              <a:latin typeface="Times New Roman"/>
-            </a:endParaRPr>
-          </a:p>
-        </p:txBody>
-      </p:sp>
-      <p:sp>
-        <p:nvSpPr>
-          <p:cNvPr id="31" name="PlaceHolder 5"/>
-          <p:cNvSpPr>
-            <a:spLocks noGrp="1"/>
-          </p:cNvSpPr>
-          <p:nvPr>
-            <p:ph type="sldNum" idx="18"/>
-          </p:nvPr>
-        </p:nvSpPr>
-        <p:spPr>
-          <a:xfrm>
-            <a:off x="4843440" y="9181440"/>
-            <a:ext cx="1538280" cy="522720"/>
-          </a:xfrm>
-          <a:prstGeom prst="rect">
-            <a:avLst/>
-          </a:prstGeom>
-          <a:noFill/>
-          <a:ln w="0">
-            <a:noFill/>
-          </a:ln>
-        </p:spPr>
-        <p:txBody>
-          <a:bodyPr lIns="91440" rIns="91440" tIns="45720" bIns="45720" anchor="ctr">
-            <a:noAutofit/>
-          </a:bodyPr>
-          <a:lstStyle>
-            <a:lvl1pPr indent="0" algn="r" defTabSz="457200">
-              <a:lnSpc>
-                <a:spcPct val="100000"/>
-              </a:lnSpc>
-              <a:buNone/>
-              <a:tabLst>
-                <a:tab algn="l" pos="0"/>
-              </a:tabLst>
-              <a:defRPr lang="de-DE" sz="900" b="0" u="none" strike="noStrike">
-                <a:solidFill>
-                  <a:schemeClr val="dk1">
-                    <a:tint val="75000"/>
-                  </a:schemeClr>
-                </a:solidFill>
-                <a:effectLst/>
-                <a:uFillTx/>
-                <a:latin typeface="Calibri"/>
-              </a:defRPr>
-            </a:lvl1pPr>
-          </a:lstStyle>
-          <a:p>
-            <a:pPr indent="0" algn="r" defTabSz="457200">
-              <a:lnSpc>
-                <a:spcPct val="100000"/>
-              </a:lnSpc>
-              <a:buNone/>
-              <a:tabLst>
-                <a:tab algn="l" pos="0"/>
-              </a:tabLst>
-            </a:pPr>
-            <a:fld id="{FF0B0B0A-84FB-4AA2-BDCA-DBC3E32D69AE}" type="slidenum">
-              <a:rPr lang="de-DE" sz="900" b="0" u="none" strike="noStrike">
-                <a:solidFill>
-                  <a:schemeClr val="dk1">
-                    <a:tint val="75000"/>
-                  </a:schemeClr>
-                </a:solidFill>
-                <a:effectLst/>
-                <a:uFillTx/>
-                <a:latin typeface="Calibri"/>
-              </a:rPr>
-              <a:t>&lt;Foliennummer&gt;</a:t>
-            </a:fld>
-            <a:endParaRPr lang="de-DE" sz="900" b="0" u="none" strike="noStrike">
-              <a:solidFill>
-                <a:srgbClr val="000000"/>
-              </a:solidFill>
-              <a:effectLst/>
-              <a:uFillTx/>
-              <a:latin typeface="Times New Roman"/>
-            </a:endParaRPr>
-          </a:p>
-        </p:txBody>
-      </p:sp>
-    </p:spTree>
-  </p:cSld>
-</p:sldLayout>
-</file>
-
-<file path=ppt/slideLayouts/slideLayout7.xml><?xml version="1.0" encoding="utf-8"?>
-<p:sldLayout xmlns:a="http://schemas.openxmlformats.org/drawingml/2006/main" xmlns:p="http://schemas.openxmlformats.org/presentationml/2006/main" xmlns:r="http://schemas.openxmlformats.org/officeDocument/2006/relationships" xmlns:p14="http://schemas.microsoft.com/office/powerpoint/2010/main" xmlns:p15="http://schemas.microsoft.com/office/powerpoint/2012/main" xmlns:mc="http://schemas.openxmlformats.org/markup-compatibility/2006" type="obj" preserve="1">
-  <p:cSld name="Titel und Inhalt">
-    <p:bg>
-      <p:bgPr>
-        <a:solidFill>
-          <a:srgbClr val="ffffff"/>
-        </a:solidFill>
-      </p:bgPr>
-    </p:bg>
-    <p:spTree>
-      <p:nvGrpSpPr>
-        <p:cNvPr id="1" name=""/>
-        <p:cNvGrpSpPr/>
-        <p:nvPr/>
-      </p:nvGrpSpPr>
-      <p:grpSpPr>
-        <a:xfrm>
-          <a:off x="0" y="0"/>
-          <a:ext cx="0" cy="0"/>
-          <a:chOff x="0" y="0"/>
-          <a:chExt cx="0" cy="0"/>
-        </a:xfrm>
-      </p:grpSpPr>
-      <p:sp>
-        <p:nvSpPr>
-          <p:cNvPr id="32" name="PlaceHolder 1"/>
-          <p:cNvSpPr>
-            <a:spLocks noGrp="1"/>
-          </p:cNvSpPr>
-          <p:nvPr>
-            <p:ph type="title"/>
-          </p:nvPr>
-        </p:nvSpPr>
-        <p:spPr>
-          <a:xfrm>
-            <a:off x="471600" y="527400"/>
-            <a:ext cx="5910480" cy="1910160"/>
-          </a:xfrm>
-          <a:prstGeom prst="rect">
-            <a:avLst/>
-          </a:prstGeom>
-          <a:noFill/>
-          <a:ln w="0">
-            <a:noFill/>
-          </a:ln>
-        </p:spPr>
-        <p:txBody>
-          <a:bodyPr lIns="91440" rIns="91440" tIns="45720" bIns="45720" anchor="ctr">
-            <a:noAutofit/>
-          </a:bodyPr>
-          <a:p>
-            <a:pPr indent="0" defTabSz="685800">
-              <a:lnSpc>
-                <a:spcPct val="90000"/>
-              </a:lnSpc>
-              <a:buNone/>
-              <a:tabLst>
-                <a:tab algn="l" pos="0"/>
-              </a:tabLst>
-            </a:pPr>
-            <a:r>
-              <a:rPr lang="de-DE" sz="3300" b="0" u="none" strike="noStrike">
-                <a:solidFill>
-                  <a:schemeClr val="dk1"/>
-                </a:solidFill>
-                <a:effectLst/>
-                <a:uFillTx/>
-                <a:latin typeface="Calibri Light"/>
-              </a:rPr>
-              <a:t>Mastertitelformat bearbeiten</a:t>
-            </a:r>
-            <a:endParaRPr lang="de-DE" sz="3300" b="0" u="none" strike="noStrike">
-              <a:solidFill>
-                <a:srgbClr val="000000"/>
-              </a:solidFill>
-              <a:effectLst/>
-              <a:uFillTx/>
-              <a:latin typeface="Arial"/>
-            </a:endParaRPr>
-          </a:p>
-        </p:txBody>
-      </p:sp>
-      <p:sp>
-        <p:nvSpPr>
-          <p:cNvPr id="33" name="PlaceHolder 2"/>
-          <p:cNvSpPr>
-            <a:spLocks noGrp="1"/>
-          </p:cNvSpPr>
-          <p:nvPr>
-            <p:ph type="body"/>
-          </p:nvPr>
-        </p:nvSpPr>
-        <p:spPr>
-          <a:xfrm>
-            <a:off x="471600" y="2637000"/>
-            <a:ext cx="5910480" cy="6280560"/>
-          </a:xfrm>
-          <a:prstGeom prst="rect">
-            <a:avLst/>
-          </a:prstGeom>
-          <a:noFill/>
-          <a:ln w="0">
-            <a:noFill/>
-          </a:ln>
-        </p:spPr>
-        <p:txBody>
-          <a:bodyPr lIns="91440" rIns="91440" tIns="45720" bIns="45720" anchor="t">
-            <a:noAutofit/>
-          </a:bodyPr>
-          <a:p>
-            <a:pPr marL="171360" indent="-171360" defTabSz="685800">
-              <a:lnSpc>
-                <a:spcPct val="90000"/>
-              </a:lnSpc>
-              <a:spcBef>
-                <a:spcPts val="751"/>
-              </a:spcBef>
-              <a:buClr>
-                <a:srgbClr val="000000"/>
-              </a:buClr>
-              <a:buFont typeface="Arial"/>
-              <a:buChar char="•"/>
-            </a:pPr>
-            <a:r>
-              <a:rPr lang="de-DE" sz="2100" b="0" u="none" strike="noStrike">
-                <a:solidFill>
-                  <a:schemeClr val="dk1"/>
-                </a:solidFill>
-                <a:effectLst/>
-                <a:uFillTx/>
-                <a:latin typeface="Calibri"/>
-              </a:rPr>
-              <a:t>Mastertextformat bearbeiten</a:t>
-            </a:r>
-            <a:endParaRPr lang="de-DE" sz="2100" b="0" u="none" strike="noStrike">
-              <a:solidFill>
-                <a:srgbClr val="000000"/>
-              </a:solidFill>
-              <a:effectLst/>
-              <a:uFillTx/>
-              <a:latin typeface="Arial"/>
-            </a:endParaRPr>
-          </a:p>
-          <a:p>
-            <a:pPr marL="514440" lvl="1" indent="-171360" defTabSz="685800">
-              <a:lnSpc>
-                <a:spcPct val="90000"/>
-              </a:lnSpc>
-              <a:spcBef>
-                <a:spcPts val="374"/>
-              </a:spcBef>
-              <a:buClr>
-                <a:srgbClr val="000000"/>
-              </a:buClr>
-              <a:buFont typeface="Arial"/>
-              <a:buChar char="•"/>
-            </a:pPr>
-            <a:r>
-              <a:rPr lang="de-DE" sz="1800" b="0" u="none" strike="noStrike">
-                <a:solidFill>
-                  <a:schemeClr val="dk1"/>
-                </a:solidFill>
-                <a:effectLst/>
-                <a:uFillTx/>
-                <a:latin typeface="Calibri"/>
-              </a:rPr>
-              <a:t>Zweite Ebene</a:t>
-            </a:r>
-            <a:endParaRPr lang="de-DE" sz="1800" b="0" u="none" strike="noStrike">
-              <a:solidFill>
-                <a:srgbClr val="000000"/>
-              </a:solidFill>
-              <a:effectLst/>
-              <a:uFillTx/>
-              <a:latin typeface="Arial"/>
-            </a:endParaRPr>
-          </a:p>
-          <a:p>
-            <a:pPr marL="857160" lvl="2" indent="-171360" defTabSz="685800">
-              <a:lnSpc>
-                <a:spcPct val="90000"/>
-              </a:lnSpc>
-              <a:spcBef>
-                <a:spcPts val="374"/>
-              </a:spcBef>
-              <a:buClr>
-                <a:srgbClr val="000000"/>
-              </a:buClr>
-              <a:buFont typeface="Arial"/>
-              <a:buChar char="•"/>
-            </a:pPr>
-            <a:r>
-              <a:rPr lang="de-DE" sz="1500" b="0" u="none" strike="noStrike">
-                <a:solidFill>
-                  <a:schemeClr val="dk1"/>
-                </a:solidFill>
-                <a:effectLst/>
-                <a:uFillTx/>
-                <a:latin typeface="Calibri"/>
-              </a:rPr>
-              <a:t>Dritte Ebene</a:t>
-            </a:r>
-            <a:endParaRPr lang="de-DE" sz="1500" b="0" u="none" strike="noStrike">
-              <a:solidFill>
-                <a:srgbClr val="000000"/>
-              </a:solidFill>
-              <a:effectLst/>
-              <a:uFillTx/>
-              <a:latin typeface="Arial"/>
-            </a:endParaRPr>
-          </a:p>
-          <a:p>
-            <a:pPr marL="1200240" lvl="3" indent="-171360" defTabSz="685800">
-              <a:lnSpc>
-                <a:spcPct val="90000"/>
-              </a:lnSpc>
-              <a:spcBef>
-                <a:spcPts val="374"/>
-              </a:spcBef>
-              <a:buClr>
-                <a:srgbClr val="000000"/>
-              </a:buClr>
-              <a:buFont typeface="Arial"/>
-              <a:buChar char="•"/>
-            </a:pPr>
-            <a:r>
-              <a:rPr lang="de-DE" sz="1350" b="0" u="none" strike="noStrike">
-                <a:solidFill>
-                  <a:schemeClr val="dk1"/>
-                </a:solidFill>
-                <a:effectLst/>
-                <a:uFillTx/>
-                <a:latin typeface="Calibri"/>
-              </a:rPr>
-              <a:t>Vierte Ebene</a:t>
-            </a:r>
-            <a:endParaRPr lang="de-DE" sz="1350" b="0" u="none" strike="noStrike">
-              <a:solidFill>
-                <a:srgbClr val="000000"/>
-              </a:solidFill>
-              <a:effectLst/>
-              <a:uFillTx/>
-              <a:latin typeface="Arial"/>
-            </a:endParaRPr>
-          </a:p>
-          <a:p>
-            <a:pPr marL="1542960" lvl="4" indent="-171360" defTabSz="685800">
-              <a:lnSpc>
-                <a:spcPct val="90000"/>
-              </a:lnSpc>
-              <a:spcBef>
-                <a:spcPts val="374"/>
-              </a:spcBef>
-              <a:buClr>
-                <a:srgbClr val="000000"/>
-              </a:buClr>
-              <a:buFont typeface="Arial"/>
-              <a:buChar char="•"/>
-            </a:pPr>
-            <a:r>
-              <a:rPr lang="de-DE" sz="1350" b="0" u="none" strike="noStrike">
-                <a:solidFill>
-                  <a:schemeClr val="dk1"/>
-                </a:solidFill>
-                <a:effectLst/>
-                <a:uFillTx/>
-                <a:latin typeface="Calibri"/>
-              </a:rPr>
-              <a:t>Fünfte Ebene</a:t>
-            </a:r>
-            <a:endParaRPr lang="de-DE" sz="1350" b="0" u="none" strike="noStrike">
-              <a:solidFill>
-                <a:srgbClr val="000000"/>
-              </a:solidFill>
-              <a:effectLst/>
-              <a:uFillTx/>
-              <a:latin typeface="Arial"/>
-            </a:endParaRPr>
-          </a:p>
-        </p:txBody>
-      </p:sp>
-      <p:sp>
-        <p:nvSpPr>
-          <p:cNvPr id="34" name="PlaceHolder 3"/>
-          <p:cNvSpPr>
-            <a:spLocks noGrp="1"/>
-          </p:cNvSpPr>
-          <p:nvPr>
-            <p:ph type="dt" idx="19"/>
-          </p:nvPr>
-        </p:nvSpPr>
-        <p:spPr>
-          <a:xfrm>
-            <a:off x="471600" y="9181440"/>
-            <a:ext cx="1538280" cy="522720"/>
-          </a:xfrm>
-          <a:prstGeom prst="rect">
-            <a:avLst/>
-          </a:prstGeom>
-          <a:noFill/>
-          <a:ln w="0">
-            <a:noFill/>
-          </a:ln>
-        </p:spPr>
-        <p:txBody>
-          <a:bodyPr lIns="91440" rIns="91440" tIns="45720" bIns="45720" anchor="ctr">
-            <a:noAutofit/>
-          </a:bodyPr>
-          <a:lstStyle>
-            <a:lvl1pPr indent="0" defTabSz="457200">
-              <a:lnSpc>
-                <a:spcPct val="100000"/>
-              </a:lnSpc>
-              <a:buNone/>
-              <a:tabLst>
-                <a:tab algn="l" pos="0"/>
-              </a:tabLst>
-              <a:defRPr lang="de-DE" sz="900" b="0" u="none" strike="noStrike">
-                <a:solidFill>
-                  <a:schemeClr val="dk1">
-                    <a:tint val="75000"/>
-                  </a:schemeClr>
-                </a:solidFill>
-                <a:effectLst/>
-                <a:uFillTx/>
-                <a:latin typeface="Calibri"/>
-              </a:defRPr>
-            </a:lvl1pPr>
-          </a:lstStyle>
-          <a:p>
-            <a:pPr indent="0" defTabSz="457200">
-              <a:lnSpc>
-                <a:spcPct val="100000"/>
-              </a:lnSpc>
-              <a:buNone/>
-              <a:tabLst>
-                <a:tab algn="l" pos="0"/>
-              </a:tabLst>
-            </a:pPr>
-            <a:r>
-              <a:rPr lang="de-DE" sz="900" b="0" u="none" strike="noStrike">
-                <a:solidFill>
-                  <a:schemeClr val="dk1">
-                    <a:tint val="75000"/>
-                  </a:schemeClr>
-                </a:solidFill>
-                <a:effectLst/>
-                <a:uFillTx/>
-                <a:latin typeface="Calibri"/>
-              </a:rPr>
-              <a:t>&lt;Datum/Uhrzeit&gt;</a:t>
-            </a:r>
-            <a:endParaRPr lang="de-DE" sz="900" b="0" u="none" strike="noStrike">
-              <a:solidFill>
-                <a:srgbClr val="000000"/>
-              </a:solidFill>
-              <a:effectLst/>
-              <a:uFillTx/>
-              <a:latin typeface="Times New Roman"/>
-            </a:endParaRPr>
-          </a:p>
-        </p:txBody>
-      </p:sp>
-      <p:sp>
-        <p:nvSpPr>
-          <p:cNvPr id="35" name="PlaceHolder 4"/>
-          <p:cNvSpPr>
-            <a:spLocks noGrp="1"/>
-          </p:cNvSpPr>
-          <p:nvPr>
-            <p:ph type="ftr" idx="20"/>
-          </p:nvPr>
-        </p:nvSpPr>
-        <p:spPr>
-          <a:xfrm>
-            <a:off x="2271600" y="9181440"/>
-            <a:ext cx="2309760" cy="522720"/>
-          </a:xfrm>
-          <a:prstGeom prst="rect">
-            <a:avLst/>
-          </a:prstGeom>
-          <a:noFill/>
-          <a:ln w="0">
-            <a:noFill/>
-          </a:ln>
-        </p:spPr>
-        <p:txBody>
-          <a:bodyPr lIns="91440" rIns="91440" tIns="45720" bIns="45720" anchor="ctr">
-            <a:noAutofit/>
-          </a:bodyPr>
-          <a:lstStyle>
-            <a:lvl1pPr indent="0" algn="ctr">
-              <a:lnSpc>
-                <a:spcPct val="100000"/>
-              </a:lnSpc>
-              <a:buNone/>
-              <a:tabLst>
-                <a:tab algn="l" pos="0"/>
-              </a:tabLst>
-              <a:defRPr lang="de-DE" sz="1400" b="0" u="none" strike="noStrike">
-                <a:solidFill>
-                  <a:srgbClr val="000000"/>
-                </a:solidFill>
-                <a:effectLst/>
-                <a:uFillTx/>
-                <a:latin typeface="Times New Roman"/>
-              </a:defRPr>
-            </a:lvl1pPr>
-          </a:lstStyle>
-          <a:p>
-            <a:pPr indent="0" algn="ctr">
-              <a:lnSpc>
-                <a:spcPct val="100000"/>
-              </a:lnSpc>
-              <a:buNone/>
-              <a:tabLst>
-                <a:tab algn="l" pos="0"/>
-              </a:tabLst>
-            </a:pPr>
-            <a:r>
-              <a:rPr lang="de-DE" sz="1400" b="0" u="none" strike="noStrike">
-                <a:solidFill>
-                  <a:srgbClr val="000000"/>
-                </a:solidFill>
-                <a:effectLst/>
-                <a:uFillTx/>
-                <a:latin typeface="Times New Roman"/>
-              </a:rPr>
-              <a:t>&lt;Fußzeile&gt;</a:t>
-            </a:r>
-            <a:endParaRPr lang="de-DE" sz="1400" b="0" u="none" strike="noStrike">
-              <a:solidFill>
-                <a:srgbClr val="000000"/>
-              </a:solidFill>
-              <a:effectLst/>
-              <a:uFillTx/>
-              <a:latin typeface="Times New Roman"/>
-            </a:endParaRPr>
-          </a:p>
-        </p:txBody>
-      </p:sp>
-      <p:sp>
-        <p:nvSpPr>
-          <p:cNvPr id="36" name="PlaceHolder 5"/>
-          <p:cNvSpPr>
-            <a:spLocks noGrp="1"/>
-          </p:cNvSpPr>
-          <p:nvPr>
-            <p:ph type="sldNum" idx="21"/>
-          </p:nvPr>
-        </p:nvSpPr>
-        <p:spPr>
-          <a:xfrm>
-            <a:off x="4843440" y="9181440"/>
-            <a:ext cx="1538280" cy="522720"/>
-          </a:xfrm>
-          <a:prstGeom prst="rect">
-            <a:avLst/>
-          </a:prstGeom>
-          <a:noFill/>
-          <a:ln w="0">
-            <a:noFill/>
-          </a:ln>
-        </p:spPr>
-        <p:txBody>
-          <a:bodyPr lIns="91440" rIns="91440" tIns="45720" bIns="45720" anchor="ctr">
-            <a:noAutofit/>
-          </a:bodyPr>
-          <a:lstStyle>
-            <a:lvl1pPr indent="0" algn="r" defTabSz="457200">
-              <a:lnSpc>
-                <a:spcPct val="100000"/>
-              </a:lnSpc>
-              <a:buNone/>
-              <a:tabLst>
-                <a:tab algn="l" pos="0"/>
-              </a:tabLst>
-              <a:defRPr lang="de-DE" sz="900" b="0" u="none" strike="noStrike">
-                <a:solidFill>
-                  <a:schemeClr val="dk1">
-                    <a:tint val="75000"/>
-                  </a:schemeClr>
-                </a:solidFill>
-                <a:effectLst/>
-                <a:uFillTx/>
-                <a:latin typeface="Calibri"/>
-              </a:defRPr>
-            </a:lvl1pPr>
-          </a:lstStyle>
-          <a:p>
-            <a:pPr indent="0" algn="r" defTabSz="457200">
-              <a:lnSpc>
-                <a:spcPct val="100000"/>
-              </a:lnSpc>
-              <a:buNone/>
-              <a:tabLst>
-                <a:tab algn="l" pos="0"/>
-              </a:tabLst>
-            </a:pPr>
-            <a:fld id="{7D7C5006-A67B-495F-B711-29E279E2A8D8}" type="slidenum">
-              <a:rPr lang="de-DE" sz="900" b="0" u="none" strike="noStrike">
-                <a:solidFill>
-                  <a:schemeClr val="dk1">
-                    <a:tint val="75000"/>
-                  </a:schemeClr>
-                </a:solidFill>
-                <a:effectLst/>
-                <a:uFillTx/>
-                <a:latin typeface="Calibri"/>
-              </a:rPr>
-              <a:t>&lt;Foliennummer&gt;</a:t>
-            </a:fld>
-            <a:endParaRPr lang="de-DE" sz="900" b="0" u="none" strike="noStrike">
-              <a:solidFill>
-                <a:srgbClr val="000000"/>
-              </a:solidFill>
-              <a:effectLst/>
-              <a:uFillTx/>
-              <a:latin typeface="Times New Roman"/>
-            </a:endParaRPr>
-          </a:p>
-        </p:txBody>
-      </p:sp>
-    </p:spTree>
-  </p:cSld>
-</p:sldLayout>
-</file>
-
-<file path=ppt/slideLayouts/slideLayout8.xml><?xml version="1.0" encoding="utf-8"?>
-<p:sldLayout xmlns:a="http://schemas.openxmlformats.org/drawingml/2006/main" xmlns:p="http://schemas.openxmlformats.org/presentationml/2006/main" xmlns:r="http://schemas.openxmlformats.org/officeDocument/2006/relationships" xmlns:p14="http://schemas.microsoft.com/office/powerpoint/2010/main" xmlns:p15="http://schemas.microsoft.com/office/powerpoint/2012/main" xmlns:mc="http://schemas.openxmlformats.org/markup-compatibility/2006" type="blank" preserve="1">
-  <p:cSld name="Abschnitts-&#10;überschrift">
-    <p:bg>
-      <p:bgPr>
-        <a:solidFill>
-          <a:srgbClr val="ffffff"/>
-        </a:solidFill>
-      </p:bgPr>
-    </p:bg>
-    <p:spTree>
-      <p:nvGrpSpPr>
-        <p:cNvPr id="1" name=""/>
-        <p:cNvGrpSpPr/>
-        <p:nvPr/>
-      </p:nvGrpSpPr>
-      <p:grpSpPr>
-        <a:xfrm>
-          <a:off x="0" y="0"/>
-          <a:ext cx="0" cy="0"/>
-          <a:chOff x="0" y="0"/>
-          <a:chExt cx="0" cy="0"/>
-        </a:xfrm>
-      </p:grpSpPr>
-      <p:sp>
-        <p:nvSpPr>
-          <p:cNvPr id="37" name="PlaceHolder 1"/>
-          <p:cNvSpPr>
-            <a:spLocks noGrp="1"/>
-          </p:cNvSpPr>
-          <p:nvPr>
-            <p:ph type="title"/>
-          </p:nvPr>
-        </p:nvSpPr>
-        <p:spPr>
-          <a:xfrm>
-            <a:off x="468000" y="2469600"/>
-            <a:ext cx="5910480" cy="4115880"/>
-          </a:xfrm>
-          <a:prstGeom prst="rect">
-            <a:avLst/>
-          </a:prstGeom>
-          <a:noFill/>
-          <a:ln w="0">
-            <a:noFill/>
-          </a:ln>
-        </p:spPr>
-        <p:txBody>
-          <a:bodyPr lIns="91440" rIns="91440" tIns="45720" bIns="45720" anchor="b">
-            <a:noAutofit/>
-          </a:bodyPr>
-          <a:p>
-            <a:pPr indent="0" defTabSz="685800">
-              <a:lnSpc>
-                <a:spcPct val="90000"/>
-              </a:lnSpc>
-              <a:buNone/>
-              <a:tabLst>
-                <a:tab algn="l" pos="0"/>
-              </a:tabLst>
-            </a:pPr>
-            <a:r>
-              <a:rPr lang="de-DE" sz="4500" b="0" u="none" strike="noStrike">
-                <a:solidFill>
-                  <a:schemeClr val="dk1"/>
-                </a:solidFill>
-                <a:effectLst/>
-                <a:uFillTx/>
-                <a:latin typeface="Calibri Light"/>
-              </a:rPr>
-              <a:t>Mastertitelformat bearbeiten</a:t>
-            </a:r>
-            <a:endParaRPr lang="de-DE" sz="4500" b="0" u="none" strike="noStrike">
-              <a:solidFill>
-                <a:srgbClr val="000000"/>
-              </a:solidFill>
-              <a:effectLst/>
-              <a:uFillTx/>
-              <a:latin typeface="Arial"/>
-            </a:endParaRPr>
-          </a:p>
-        </p:txBody>
-      </p:sp>
-      <p:sp>
-        <p:nvSpPr>
-          <p:cNvPr id="38" name="PlaceHolder 2"/>
-          <p:cNvSpPr>
-            <a:spLocks noGrp="1"/>
-          </p:cNvSpPr>
-          <p:nvPr>
-            <p:ph type="body"/>
-          </p:nvPr>
-        </p:nvSpPr>
-        <p:spPr>
-          <a:xfrm>
-            <a:off x="468000" y="6629400"/>
-            <a:ext cx="5910480" cy="2162160"/>
-          </a:xfrm>
-          <a:prstGeom prst="rect">
-            <a:avLst/>
-          </a:prstGeom>
-          <a:noFill/>
-          <a:ln w="0">
-            <a:noFill/>
-          </a:ln>
-        </p:spPr>
-        <p:txBody>
-          <a:bodyPr lIns="91440" rIns="91440" tIns="45720" bIns="45720" anchor="t">
-            <a:noAutofit/>
-          </a:bodyPr>
-          <a:p>
-            <a:pPr indent="0" defTabSz="685800">
-              <a:lnSpc>
-                <a:spcPct val="90000"/>
-              </a:lnSpc>
-              <a:spcBef>
-                <a:spcPts val="751"/>
-              </a:spcBef>
-              <a:buNone/>
-              <a:tabLst>
-                <a:tab algn="l" pos="0"/>
-              </a:tabLst>
-            </a:pPr>
-            <a:r>
-              <a:rPr lang="de-DE" sz="1800" b="0" u="none" strike="noStrike">
-                <a:solidFill>
-                  <a:schemeClr val="dk1"/>
-                </a:solidFill>
-                <a:effectLst/>
-                <a:uFillTx/>
-                <a:latin typeface="Calibri"/>
-              </a:rPr>
-              <a:t>Mastertextformat bearbeiten</a:t>
-            </a:r>
-            <a:endParaRPr lang="de-DE" sz="1800" b="0" u="none" strike="noStrike">
-              <a:solidFill>
-                <a:srgbClr val="000000"/>
-              </a:solidFill>
-              <a:effectLst/>
-              <a:uFillTx/>
-              <a:latin typeface="Arial"/>
-            </a:endParaRPr>
-          </a:p>
-        </p:txBody>
-      </p:sp>
-      <p:sp>
-        <p:nvSpPr>
-          <p:cNvPr id="39" name="PlaceHolder 3"/>
-          <p:cNvSpPr>
-            <a:spLocks noGrp="1"/>
-          </p:cNvSpPr>
-          <p:nvPr>
-            <p:ph type="dt" idx="22"/>
-          </p:nvPr>
-        </p:nvSpPr>
-        <p:spPr>
-          <a:xfrm>
-            <a:off x="471600" y="9181440"/>
-            <a:ext cx="1538280" cy="522720"/>
-          </a:xfrm>
-          <a:prstGeom prst="rect">
-            <a:avLst/>
-          </a:prstGeom>
-          <a:noFill/>
-          <a:ln w="0">
-            <a:noFill/>
-          </a:ln>
-        </p:spPr>
-        <p:txBody>
-          <a:bodyPr lIns="91440" rIns="91440" tIns="45720" bIns="45720" anchor="ctr">
-            <a:noAutofit/>
-          </a:bodyPr>
-          <a:lstStyle>
-            <a:lvl1pPr indent="0" defTabSz="457200">
-              <a:lnSpc>
-                <a:spcPct val="100000"/>
-              </a:lnSpc>
-              <a:buNone/>
-              <a:tabLst>
-                <a:tab algn="l" pos="0"/>
-              </a:tabLst>
-              <a:defRPr lang="de-DE" sz="900" b="0" u="none" strike="noStrike">
-                <a:solidFill>
-                  <a:schemeClr val="dk1">
-                    <a:tint val="75000"/>
-                  </a:schemeClr>
-                </a:solidFill>
-                <a:effectLst/>
-                <a:uFillTx/>
-                <a:latin typeface="Calibri"/>
-              </a:defRPr>
-            </a:lvl1pPr>
-          </a:lstStyle>
-          <a:p>
-            <a:pPr indent="0" defTabSz="457200">
-              <a:lnSpc>
-                <a:spcPct val="100000"/>
-              </a:lnSpc>
-              <a:buNone/>
-              <a:tabLst>
-                <a:tab algn="l" pos="0"/>
-              </a:tabLst>
-            </a:pPr>
-            <a:r>
-              <a:rPr lang="de-DE" sz="900" b="0" u="none" strike="noStrike">
-                <a:solidFill>
-                  <a:schemeClr val="dk1">
-                    <a:tint val="75000"/>
-                  </a:schemeClr>
-                </a:solidFill>
-                <a:effectLst/>
-                <a:uFillTx/>
-                <a:latin typeface="Calibri"/>
-              </a:rPr>
-              <a:t>&lt;Datum/Uhrzeit&gt;</a:t>
-            </a:r>
-            <a:endParaRPr lang="de-DE" sz="900" b="0" u="none" strike="noStrike">
-              <a:solidFill>
-                <a:srgbClr val="000000"/>
-              </a:solidFill>
-              <a:effectLst/>
-              <a:uFillTx/>
-              <a:latin typeface="Times New Roman"/>
-            </a:endParaRPr>
-          </a:p>
-        </p:txBody>
-      </p:sp>
-      <p:sp>
-        <p:nvSpPr>
-          <p:cNvPr id="40" name="PlaceHolder 4"/>
-          <p:cNvSpPr>
-            <a:spLocks noGrp="1"/>
-          </p:cNvSpPr>
-          <p:nvPr>
-            <p:ph type="ftr" idx="23"/>
-          </p:nvPr>
-        </p:nvSpPr>
-        <p:spPr>
-          <a:xfrm>
-            <a:off x="2271600" y="9181440"/>
-            <a:ext cx="2309760" cy="522720"/>
-          </a:xfrm>
-          <a:prstGeom prst="rect">
-            <a:avLst/>
-          </a:prstGeom>
-          <a:noFill/>
-          <a:ln w="0">
-            <a:noFill/>
-          </a:ln>
-        </p:spPr>
-        <p:txBody>
-          <a:bodyPr lIns="91440" rIns="91440" tIns="45720" bIns="45720" anchor="ctr">
-            <a:noAutofit/>
-          </a:bodyPr>
-          <a:lstStyle>
-            <a:lvl1pPr indent="0" algn="ctr">
-              <a:lnSpc>
-                <a:spcPct val="100000"/>
-              </a:lnSpc>
-              <a:buNone/>
-              <a:tabLst>
-                <a:tab algn="l" pos="0"/>
-              </a:tabLst>
-              <a:defRPr lang="de-DE" sz="1400" b="0" u="none" strike="noStrike">
-                <a:solidFill>
-                  <a:srgbClr val="000000"/>
-                </a:solidFill>
-                <a:effectLst/>
-                <a:uFillTx/>
-                <a:latin typeface="Times New Roman"/>
-              </a:defRPr>
-            </a:lvl1pPr>
-          </a:lstStyle>
-          <a:p>
-            <a:pPr indent="0" algn="ctr">
-              <a:lnSpc>
-                <a:spcPct val="100000"/>
-              </a:lnSpc>
-              <a:buNone/>
-              <a:tabLst>
-                <a:tab algn="l" pos="0"/>
-              </a:tabLst>
-            </a:pPr>
-            <a:r>
-              <a:rPr lang="de-DE" sz="1400" b="0" u="none" strike="noStrike">
-                <a:solidFill>
-                  <a:srgbClr val="000000"/>
-                </a:solidFill>
-                <a:effectLst/>
-                <a:uFillTx/>
-                <a:latin typeface="Times New Roman"/>
-              </a:rPr>
-              <a:t>&lt;Fußzeile&gt;</a:t>
-            </a:r>
-            <a:endParaRPr lang="de-DE" sz="1400" b="0" u="none" strike="noStrike">
-              <a:solidFill>
-                <a:srgbClr val="000000"/>
-              </a:solidFill>
-              <a:effectLst/>
-              <a:uFillTx/>
-              <a:latin typeface="Times New Roman"/>
-            </a:endParaRPr>
-          </a:p>
-        </p:txBody>
-      </p:sp>
-      <p:sp>
-        <p:nvSpPr>
-          <p:cNvPr id="41" name="PlaceHolder 5"/>
-          <p:cNvSpPr>
-            <a:spLocks noGrp="1"/>
-          </p:cNvSpPr>
-          <p:nvPr>
-            <p:ph type="sldNum" idx="24"/>
-          </p:nvPr>
-        </p:nvSpPr>
-        <p:spPr>
-          <a:xfrm>
-            <a:off x="4843440" y="9181440"/>
-            <a:ext cx="1538280" cy="522720"/>
-          </a:xfrm>
-          <a:prstGeom prst="rect">
-            <a:avLst/>
-          </a:prstGeom>
-          <a:noFill/>
-          <a:ln w="0">
-            <a:noFill/>
-          </a:ln>
-        </p:spPr>
-        <p:txBody>
-          <a:bodyPr lIns="91440" rIns="91440" tIns="45720" bIns="45720" anchor="ctr">
-            <a:noAutofit/>
-          </a:bodyPr>
-          <a:lstStyle>
-            <a:lvl1pPr indent="0" algn="r" defTabSz="457200">
-              <a:lnSpc>
-                <a:spcPct val="100000"/>
-              </a:lnSpc>
-              <a:buNone/>
-              <a:tabLst>
-                <a:tab algn="l" pos="0"/>
-              </a:tabLst>
-              <a:defRPr lang="de-DE" sz="900" b="0" u="none" strike="noStrike">
-                <a:solidFill>
-                  <a:schemeClr val="dk1">
-                    <a:tint val="75000"/>
-                  </a:schemeClr>
-                </a:solidFill>
-                <a:effectLst/>
-                <a:uFillTx/>
-                <a:latin typeface="Calibri"/>
-              </a:defRPr>
-            </a:lvl1pPr>
-          </a:lstStyle>
-          <a:p>
-            <a:pPr indent="0" algn="r" defTabSz="457200">
-              <a:lnSpc>
-                <a:spcPct val="100000"/>
-              </a:lnSpc>
-              <a:buNone/>
-              <a:tabLst>
-                <a:tab algn="l" pos="0"/>
-              </a:tabLst>
-            </a:pPr>
-            <a:fld id="{BF4E6299-5FEE-4A58-983A-32C8E34CD98B}" type="slidenum">
-              <a:rPr lang="de-DE" sz="900" b="0" u="none" strike="noStrike">
-                <a:solidFill>
-                  <a:schemeClr val="dk1">
-                    <a:tint val="75000"/>
-                  </a:schemeClr>
-                </a:solidFill>
-                <a:effectLst/>
-                <a:uFillTx/>
-                <a:latin typeface="Calibri"/>
-              </a:rPr>
-              <a:t>&lt;Foliennummer&gt;</a:t>
-            </a:fld>
-            <a:endParaRPr lang="de-DE" sz="900" b="0" u="none" strike="noStrike">
-              <a:solidFill>
-                <a:srgbClr val="000000"/>
-              </a:solidFill>
-              <a:effectLst/>
-              <a:uFillTx/>
-              <a:latin typeface="Times New Roman"/>
-            </a:endParaRPr>
-          </a:p>
-        </p:txBody>
-      </p:sp>
-    </p:spTree>
-  </p:cSld>
-</p:sldLayout>
-</file>
-
-<file path=ppt/slideLayouts/slideLayout9.xml><?xml version="1.0" encoding="utf-8"?>
-<p:sldLayout xmlns:a="http://schemas.openxmlformats.org/drawingml/2006/main" xmlns:p="http://schemas.openxmlformats.org/presentationml/2006/main" xmlns:r="http://schemas.openxmlformats.org/officeDocument/2006/relationships" xmlns:p14="http://schemas.microsoft.com/office/powerpoint/2010/main" xmlns:p15="http://schemas.microsoft.com/office/powerpoint/2012/main" xmlns:mc="http://schemas.openxmlformats.org/markup-compatibility/2006" type="twoObj" preserve="1">
-  <p:cSld name="Zwei Inhalte">
-    <p:bg>
-      <p:bgPr>
-        <a:solidFill>
-          <a:srgbClr val="ffffff"/>
-        </a:solidFill>
-      </p:bgPr>
-    </p:bg>
-    <p:spTree>
-      <p:nvGrpSpPr>
-        <p:cNvPr id="1" name=""/>
-        <p:cNvGrpSpPr/>
-        <p:nvPr/>
-      </p:nvGrpSpPr>
-      <p:grpSpPr>
-        <a:xfrm>
-          <a:off x="0" y="0"/>
-          <a:ext cx="0" cy="0"/>
-          <a:chOff x="0" y="0"/>
-          <a:chExt cx="0" cy="0"/>
-        </a:xfrm>
-      </p:grpSpPr>
-      <p:sp>
-        <p:nvSpPr>
-          <p:cNvPr id="42" name="PlaceHolder 1"/>
-          <p:cNvSpPr>
-            <a:spLocks noGrp="1"/>
-          </p:cNvSpPr>
-          <p:nvPr>
-            <p:ph type="title"/>
-          </p:nvPr>
-        </p:nvSpPr>
-        <p:spPr>
-          <a:xfrm>
-            <a:off x="471600" y="527400"/>
-            <a:ext cx="5910480" cy="1910160"/>
-          </a:xfrm>
-          <a:prstGeom prst="rect">
-            <a:avLst/>
-          </a:prstGeom>
-          <a:noFill/>
-          <a:ln w="0">
-            <a:noFill/>
-          </a:ln>
-        </p:spPr>
-        <p:txBody>
-          <a:bodyPr lIns="91440" rIns="91440" tIns="45720" bIns="45720" anchor="ctr">
-            <a:noAutofit/>
-          </a:bodyPr>
-          <a:p>
-            <a:pPr indent="0" defTabSz="685800">
-              <a:lnSpc>
-                <a:spcPct val="90000"/>
-              </a:lnSpc>
-              <a:buNone/>
-              <a:tabLst>
-                <a:tab algn="l" pos="0"/>
-              </a:tabLst>
-            </a:pPr>
-            <a:r>
-              <a:rPr lang="de-DE" sz="3300" b="0" u="none" strike="noStrike">
-                <a:solidFill>
-                  <a:schemeClr val="dk1"/>
-                </a:solidFill>
-                <a:effectLst/>
-                <a:uFillTx/>
-                <a:latin typeface="Calibri Light"/>
-              </a:rPr>
-              <a:t>Mastertitelformat bearbeiten</a:t>
-            </a:r>
-            <a:endParaRPr lang="de-DE" sz="3300" b="0" u="none" strike="noStrike">
-              <a:solidFill>
-                <a:srgbClr val="000000"/>
-              </a:solidFill>
-              <a:effectLst/>
-              <a:uFillTx/>
-              <a:latin typeface="Arial"/>
-            </a:endParaRPr>
-          </a:p>
-        </p:txBody>
-      </p:sp>
-      <p:sp>
-        <p:nvSpPr>
-          <p:cNvPr id="43" name="PlaceHolder 2"/>
-          <p:cNvSpPr>
-            <a:spLocks noGrp="1"/>
-          </p:cNvSpPr>
-          <p:nvPr>
-            <p:ph type="body"/>
-          </p:nvPr>
-        </p:nvSpPr>
-        <p:spPr>
-          <a:xfrm>
-            <a:off x="471600" y="2637000"/>
-            <a:ext cx="2909880" cy="6280560"/>
-          </a:xfrm>
-          <a:prstGeom prst="rect">
-            <a:avLst/>
-          </a:prstGeom>
-          <a:noFill/>
-          <a:ln w="0">
-            <a:noFill/>
-          </a:ln>
-        </p:spPr>
-        <p:txBody>
-          <a:bodyPr lIns="91440" rIns="91440" tIns="45720" bIns="45720" anchor="t">
-            <a:noAutofit/>
-          </a:bodyPr>
-          <a:p>
-            <a:pPr marL="171360" indent="-171360" defTabSz="685800">
-              <a:lnSpc>
-                <a:spcPct val="90000"/>
-              </a:lnSpc>
-              <a:spcBef>
-                <a:spcPts val="751"/>
-              </a:spcBef>
-              <a:buClr>
-                <a:srgbClr val="000000"/>
-              </a:buClr>
-              <a:buFont typeface="Arial"/>
-              <a:buChar char="•"/>
-            </a:pPr>
-            <a:r>
-              <a:rPr lang="de-DE" sz="2100" b="0" u="none" strike="noStrike">
-                <a:solidFill>
-                  <a:schemeClr val="dk1"/>
-                </a:solidFill>
-                <a:effectLst/>
-                <a:uFillTx/>
-                <a:latin typeface="Calibri"/>
-              </a:rPr>
-              <a:t>Mastertextformat bearbeiten</a:t>
-            </a:r>
-            <a:endParaRPr lang="de-DE" sz="2100" b="0" u="none" strike="noStrike">
-              <a:solidFill>
-                <a:srgbClr val="000000"/>
-              </a:solidFill>
-              <a:effectLst/>
-              <a:uFillTx/>
-              <a:latin typeface="Arial"/>
-            </a:endParaRPr>
-          </a:p>
-          <a:p>
-            <a:pPr marL="514440" lvl="1" indent="-171360" defTabSz="685800">
-              <a:lnSpc>
-                <a:spcPct val="90000"/>
-              </a:lnSpc>
-              <a:spcBef>
-                <a:spcPts val="374"/>
-              </a:spcBef>
-              <a:buClr>
-                <a:srgbClr val="000000"/>
-              </a:buClr>
-              <a:buFont typeface="Arial"/>
-              <a:buChar char="•"/>
-            </a:pPr>
-            <a:r>
-              <a:rPr lang="de-DE" sz="1800" b="0" u="none" strike="noStrike">
-                <a:solidFill>
-                  <a:schemeClr val="dk1"/>
-                </a:solidFill>
-                <a:effectLst/>
-                <a:uFillTx/>
-                <a:latin typeface="Calibri"/>
-              </a:rPr>
-              <a:t>Zweite Ebene</a:t>
-            </a:r>
-            <a:endParaRPr lang="de-DE" sz="1800" b="0" u="none" strike="noStrike">
-              <a:solidFill>
-                <a:srgbClr val="000000"/>
-              </a:solidFill>
-              <a:effectLst/>
-              <a:uFillTx/>
-              <a:latin typeface="Arial"/>
-            </a:endParaRPr>
-          </a:p>
-          <a:p>
-            <a:pPr marL="857160" lvl="2" indent="-171360" defTabSz="685800">
-              <a:lnSpc>
-                <a:spcPct val="90000"/>
-              </a:lnSpc>
-              <a:spcBef>
-                <a:spcPts val="374"/>
-              </a:spcBef>
-              <a:buClr>
-                <a:srgbClr val="000000"/>
-              </a:buClr>
-              <a:buFont typeface="Arial"/>
-              <a:buChar char="•"/>
-            </a:pPr>
-            <a:r>
-              <a:rPr lang="de-DE" sz="1500" b="0" u="none" strike="noStrike">
-                <a:solidFill>
-                  <a:schemeClr val="dk1"/>
-                </a:solidFill>
-                <a:effectLst/>
-                <a:uFillTx/>
-                <a:latin typeface="Calibri"/>
-              </a:rPr>
-              <a:t>Dritte Ebene</a:t>
-            </a:r>
-            <a:endParaRPr lang="de-DE" sz="1500" b="0" u="none" strike="noStrike">
-              <a:solidFill>
-                <a:srgbClr val="000000"/>
-              </a:solidFill>
-              <a:effectLst/>
-              <a:uFillTx/>
-              <a:latin typeface="Arial"/>
-            </a:endParaRPr>
-          </a:p>
-          <a:p>
-            <a:pPr marL="1200240" lvl="3" indent="-171360" defTabSz="685800">
-              <a:lnSpc>
-                <a:spcPct val="90000"/>
-              </a:lnSpc>
-              <a:spcBef>
-                <a:spcPts val="374"/>
-              </a:spcBef>
-              <a:buClr>
-                <a:srgbClr val="000000"/>
-              </a:buClr>
-              <a:buFont typeface="Arial"/>
-              <a:buChar char="•"/>
-            </a:pPr>
-            <a:r>
-              <a:rPr lang="de-DE" sz="1350" b="0" u="none" strike="noStrike">
-                <a:solidFill>
-                  <a:schemeClr val="dk1"/>
-                </a:solidFill>
-                <a:effectLst/>
-                <a:uFillTx/>
-                <a:latin typeface="Calibri"/>
-              </a:rPr>
-              <a:t>Vierte Ebene</a:t>
-            </a:r>
-            <a:endParaRPr lang="de-DE" sz="1350" b="0" u="none" strike="noStrike">
-              <a:solidFill>
-                <a:srgbClr val="000000"/>
-              </a:solidFill>
-              <a:effectLst/>
-              <a:uFillTx/>
-              <a:latin typeface="Arial"/>
-            </a:endParaRPr>
-          </a:p>
-          <a:p>
-            <a:pPr marL="1542960" lvl="4" indent="-171360" defTabSz="685800">
-              <a:lnSpc>
-                <a:spcPct val="90000"/>
-              </a:lnSpc>
-              <a:spcBef>
-                <a:spcPts val="374"/>
-              </a:spcBef>
-              <a:buClr>
-                <a:srgbClr val="000000"/>
-              </a:buClr>
-              <a:buFont typeface="Arial"/>
-              <a:buChar char="•"/>
-            </a:pPr>
-            <a:r>
-              <a:rPr lang="de-DE" sz="1350" b="0" u="none" strike="noStrike">
-                <a:solidFill>
-                  <a:schemeClr val="dk1"/>
-                </a:solidFill>
-                <a:effectLst/>
-                <a:uFillTx/>
-                <a:latin typeface="Calibri"/>
-              </a:rPr>
-              <a:t>Fünfte Ebene</a:t>
-            </a:r>
-            <a:endParaRPr lang="de-DE" sz="1350" b="0" u="none" strike="noStrike">
-              <a:solidFill>
-                <a:srgbClr val="000000"/>
-              </a:solidFill>
-              <a:effectLst/>
-              <a:uFillTx/>
-              <a:latin typeface="Arial"/>
-            </a:endParaRPr>
-          </a:p>
-        </p:txBody>
-      </p:sp>
-      <p:sp>
-        <p:nvSpPr>
-          <p:cNvPr id="44" name="PlaceHolder 3"/>
-          <p:cNvSpPr>
-            <a:spLocks noGrp="1"/>
-          </p:cNvSpPr>
-          <p:nvPr>
-            <p:ph type="body"/>
-          </p:nvPr>
-        </p:nvSpPr>
-        <p:spPr>
-          <a:xfrm>
-            <a:off x="3471840" y="2637000"/>
-            <a:ext cx="2909880" cy="6280560"/>
-          </a:xfrm>
-          <a:prstGeom prst="rect">
-            <a:avLst/>
-          </a:prstGeom>
-          <a:noFill/>
-          <a:ln w="0">
-            <a:noFill/>
-          </a:ln>
-        </p:spPr>
-        <p:txBody>
-          <a:bodyPr lIns="91440" rIns="91440" tIns="45720" bIns="45720" anchor="t">
-            <a:noAutofit/>
-          </a:bodyPr>
-          <a:p>
-            <a:pPr marL="171360" indent="-171360" defTabSz="685800">
-              <a:lnSpc>
-                <a:spcPct val="90000"/>
-              </a:lnSpc>
-              <a:spcBef>
-                <a:spcPts val="751"/>
-              </a:spcBef>
-              <a:buClr>
-                <a:srgbClr val="000000"/>
-              </a:buClr>
-              <a:buFont typeface="Arial"/>
-              <a:buChar char="•"/>
-            </a:pPr>
-            <a:r>
-              <a:rPr lang="de-DE" sz="2100" b="0" u="none" strike="noStrike">
-                <a:solidFill>
-                  <a:schemeClr val="dk1"/>
-                </a:solidFill>
-                <a:effectLst/>
-                <a:uFillTx/>
-                <a:latin typeface="Calibri"/>
-              </a:rPr>
-              <a:t>Mastertextformat bearbeiten</a:t>
-            </a:r>
-            <a:endParaRPr lang="de-DE" sz="2100" b="0" u="none" strike="noStrike">
-              <a:solidFill>
-                <a:srgbClr val="000000"/>
-              </a:solidFill>
-              <a:effectLst/>
-              <a:uFillTx/>
-              <a:latin typeface="Arial"/>
-            </a:endParaRPr>
-          </a:p>
-          <a:p>
-            <a:pPr marL="514440" lvl="1" indent="-171360" defTabSz="685800">
-              <a:lnSpc>
-                <a:spcPct val="90000"/>
-              </a:lnSpc>
-              <a:spcBef>
-                <a:spcPts val="374"/>
-              </a:spcBef>
-              <a:buClr>
-                <a:srgbClr val="000000"/>
-              </a:buClr>
-              <a:buFont typeface="Arial"/>
-              <a:buChar char="•"/>
-            </a:pPr>
-            <a:r>
-              <a:rPr lang="de-DE" sz="1800" b="0" u="none" strike="noStrike">
-                <a:solidFill>
-                  <a:schemeClr val="dk1"/>
-                </a:solidFill>
-                <a:effectLst/>
-                <a:uFillTx/>
-                <a:latin typeface="Calibri"/>
-              </a:rPr>
-              <a:t>Zweite Ebene</a:t>
-            </a:r>
-            <a:endParaRPr lang="de-DE" sz="1800" b="0" u="none" strike="noStrike">
-              <a:solidFill>
-                <a:srgbClr val="000000"/>
-              </a:solidFill>
-              <a:effectLst/>
-              <a:uFillTx/>
-              <a:latin typeface="Arial"/>
-            </a:endParaRPr>
-          </a:p>
-          <a:p>
-            <a:pPr marL="857160" lvl="2" indent="-171360" defTabSz="685800">
-              <a:lnSpc>
-                <a:spcPct val="90000"/>
-              </a:lnSpc>
-              <a:spcBef>
-                <a:spcPts val="374"/>
-              </a:spcBef>
-              <a:buClr>
-                <a:srgbClr val="000000"/>
-              </a:buClr>
-              <a:buFont typeface="Arial"/>
-              <a:buChar char="•"/>
-            </a:pPr>
-            <a:r>
-              <a:rPr lang="de-DE" sz="1500" b="0" u="none" strike="noStrike">
-                <a:solidFill>
-                  <a:schemeClr val="dk1"/>
-                </a:solidFill>
-                <a:effectLst/>
-                <a:uFillTx/>
-                <a:latin typeface="Calibri"/>
-              </a:rPr>
-              <a:t>Dritte Ebene</a:t>
-            </a:r>
-            <a:endParaRPr lang="de-DE" sz="1500" b="0" u="none" strike="noStrike">
-              <a:solidFill>
-                <a:srgbClr val="000000"/>
-              </a:solidFill>
-              <a:effectLst/>
-              <a:uFillTx/>
-              <a:latin typeface="Arial"/>
-            </a:endParaRPr>
-          </a:p>
-          <a:p>
-            <a:pPr marL="1200240" lvl="3" indent="-171360" defTabSz="685800">
-              <a:lnSpc>
-                <a:spcPct val="90000"/>
-              </a:lnSpc>
-              <a:spcBef>
-                <a:spcPts val="374"/>
-              </a:spcBef>
-              <a:buClr>
-                <a:srgbClr val="000000"/>
-              </a:buClr>
-              <a:buFont typeface="Arial"/>
-              <a:buChar char="•"/>
-            </a:pPr>
-            <a:r>
-              <a:rPr lang="de-DE" sz="1350" b="0" u="none" strike="noStrike">
-                <a:solidFill>
-                  <a:schemeClr val="dk1"/>
-                </a:solidFill>
-                <a:effectLst/>
-                <a:uFillTx/>
-                <a:latin typeface="Calibri"/>
-              </a:rPr>
-              <a:t>Vierte Ebene</a:t>
-            </a:r>
-            <a:endParaRPr lang="de-DE" sz="1350" b="0" u="none" strike="noStrike">
-              <a:solidFill>
-                <a:srgbClr val="000000"/>
-              </a:solidFill>
-              <a:effectLst/>
-              <a:uFillTx/>
-              <a:latin typeface="Arial"/>
-            </a:endParaRPr>
-          </a:p>
-          <a:p>
-            <a:pPr marL="1542960" lvl="4" indent="-171360" defTabSz="685800">
-              <a:lnSpc>
-                <a:spcPct val="90000"/>
-              </a:lnSpc>
-              <a:spcBef>
-                <a:spcPts val="374"/>
-              </a:spcBef>
-              <a:buClr>
-                <a:srgbClr val="000000"/>
-              </a:buClr>
-              <a:buFont typeface="Arial"/>
-              <a:buChar char="•"/>
-            </a:pPr>
-            <a:r>
-              <a:rPr lang="de-DE" sz="1350" b="0" u="none" strike="noStrike">
-                <a:solidFill>
-                  <a:schemeClr val="dk1"/>
-                </a:solidFill>
-                <a:effectLst/>
-                <a:uFillTx/>
-                <a:latin typeface="Calibri"/>
-              </a:rPr>
-              <a:t>Fünfte Ebene</a:t>
-            </a:r>
-            <a:endParaRPr lang="de-DE" sz="1350" b="0" u="none" strike="noStrike">
-              <a:solidFill>
-                <a:srgbClr val="000000"/>
-              </a:solidFill>
-              <a:effectLst/>
-              <a:uFillTx/>
-              <a:latin typeface="Arial"/>
-            </a:endParaRPr>
-          </a:p>
-        </p:txBody>
-      </p:sp>
-      <p:sp>
-        <p:nvSpPr>
-          <p:cNvPr id="45" name="PlaceHolder 4"/>
+          <p:cNvPr id="47" name="PlaceHolder 3"/>
           <p:cNvSpPr>
             <a:spLocks noGrp="1"/>
           </p:cNvSpPr>
@@ -5585,7 +5585,7 @@
         <p:spPr>
           <a:xfrm>
             <a:off x="471600" y="9181440"/>
-            <a:ext cx="1538280" cy="522720"/>
+            <a:ext cx="1537920" cy="522360"/>
           </a:xfrm>
           <a:prstGeom prst="rect">
             <a:avLst/>
@@ -5656,7 +5656,7 @@
       </p:sp>
       <p:sp>
         <p:nvSpPr>
-          <p:cNvPr id="46" name="PlaceHolder 5"/>
+          <p:cNvPr id="48" name="PlaceHolder 4"/>
           <p:cNvSpPr>
             <a:spLocks noGrp="1"/>
           </p:cNvSpPr>
@@ -5667,7 +5667,7 @@
         <p:spPr>
           <a:xfrm>
             <a:off x="2271600" y="9181440"/>
-            <a:ext cx="2309760" cy="522720"/>
+            <a:ext cx="2309400" cy="522360"/>
           </a:xfrm>
           <a:prstGeom prst="rect">
             <a:avLst/>
@@ -5734,7 +5734,7 @@
       </p:sp>
       <p:sp>
         <p:nvSpPr>
-          <p:cNvPr id="47" name="PlaceHolder 6"/>
+          <p:cNvPr id="49" name="PlaceHolder 5"/>
           <p:cNvSpPr>
             <a:spLocks noGrp="1"/>
           </p:cNvSpPr>
@@ -5745,7 +5745,7 @@
         <p:spPr>
           <a:xfrm>
             <a:off x="4843440" y="9181440"/>
-            <a:ext cx="1538280" cy="522720"/>
+            <a:ext cx="1537920" cy="522360"/>
           </a:xfrm>
           <a:prstGeom prst="rect">
             <a:avLst/>
@@ -5790,7 +5790,7 @@
                 <a:tab algn="l" pos="0"/>
               </a:tabLst>
             </a:pPr>
-            <a:fld id="{8DECB0ED-18CE-4B8B-943E-BDB7CED7F7BD}" type="slidenum">
+            <a:fld id="{9C9F8442-03BA-431D-A90A-74099F4C5C84}" type="slidenum">
               <a:rPr lang="de-DE" sz="900" b="0" u="none" strike="noStrike">
                 <a:solidFill>
                   <a:schemeClr val="dk1">
@@ -5881,7 +5881,7 @@
         <p:spPr>
           <a:xfrm>
             <a:off x="2269080" y="153360"/>
-            <a:ext cx="3411720" cy="730080"/>
+            <a:ext cx="3411360" cy="730080"/>
           </a:xfrm>
           <a:prstGeom prst="rect">
             <a:avLst/>
@@ -5966,7 +5966,7 @@
         <p:spPr>
           <a:xfrm>
             <a:off x="2251440" y="1010880"/>
-            <a:ext cx="4185720" cy="1004040"/>
+            <a:ext cx="4185360" cy="1004040"/>
           </a:xfrm>
           <a:prstGeom prst="rect">
             <a:avLst/>
@@ -6294,7 +6294,7 @@
         <p:spPr>
           <a:xfrm>
             <a:off x="355320" y="2082600"/>
-            <a:ext cx="5961240" cy="4680"/>
+            <a:ext cx="5961600" cy="5040"/>
           </a:xfrm>
           <a:prstGeom prst="straightConnector1">
             <a:avLst/>
@@ -6315,7 +6315,7 @@
         <p:spPr>
           <a:xfrm>
             <a:off x="401400" y="2165040"/>
-            <a:ext cx="1138320" cy="303120"/>
+            <a:ext cx="1137960" cy="303120"/>
           </a:xfrm>
           <a:prstGeom prst="rect">
             <a:avLst/>
@@ -6373,7 +6373,7 @@
         <p:spPr>
           <a:xfrm>
             <a:off x="540000" y="2457000"/>
-            <a:ext cx="5940000" cy="273240"/>
+            <a:ext cx="5939640" cy="272520"/>
           </a:xfrm>
           <a:prstGeom prst="rect">
             <a:avLst/>
@@ -6437,7 +6437,7 @@
         <p:spPr>
           <a:xfrm>
             <a:off x="2895480" y="3520440"/>
-            <a:ext cx="1671840" cy="303120"/>
+            <a:ext cx="1671480" cy="303120"/>
           </a:xfrm>
           <a:prstGeom prst="rect">
             <a:avLst/>
@@ -6495,7 +6495,7 @@
         <p:spPr>
           <a:xfrm>
             <a:off x="1285200" y="3860640"/>
-            <a:ext cx="5326560" cy="5976720"/>
+            <a:ext cx="5326200" cy="5976720"/>
           </a:xfrm>
           <a:prstGeom prst="rect">
             <a:avLst/>
@@ -7138,7 +7138,7 @@
         <p:spPr>
           <a:xfrm>
             <a:off x="291960" y="126720"/>
-            <a:ext cx="6011640" cy="4680"/>
+            <a:ext cx="6012000" cy="5040"/>
           </a:xfrm>
           <a:prstGeom prst="straightConnector1">
             <a:avLst/>
@@ -7159,7 +7159,7 @@
         <p:spPr>
           <a:xfrm>
             <a:off x="3208320" y="9675000"/>
-            <a:ext cx="960120" cy="227160"/>
+            <a:ext cx="959760" cy="227160"/>
           </a:xfrm>
           <a:prstGeom prst="rect">
             <a:avLst/>
@@ -7216,13 +7216,13 @@
         </p:nvPicPr>
         <p:blipFill>
           <a:blip r:embed="rId3"/>
-          <a:srcRect l="17038" t="10276" r="8874" b="25713"/>
+          <a:srcRect l="17036" t="10276" r="8874" b="25709"/>
           <a:stretch/>
         </p:blipFill>
         <p:spPr>
           <a:xfrm>
             <a:off x="495360" y="213480"/>
-            <a:ext cx="1557360" cy="1795320"/>
+            <a:ext cx="1557000" cy="1794960"/>
           </a:xfrm>
           <a:prstGeom prst="rect">
             <a:avLst/>
@@ -7242,7 +7242,7 @@
         <p:spPr>
           <a:xfrm>
             <a:off x="0" y="5254200"/>
-            <a:ext cx="1341360" cy="641520"/>
+            <a:ext cx="1341000" cy="641160"/>
           </a:xfrm>
           <a:prstGeom prst="rect">
             <a:avLst/>
@@ -7300,7 +7300,7 @@
         <p:spPr>
           <a:xfrm>
             <a:off x="1281240" y="3974760"/>
-            <a:ext cx="6120" cy="5656320"/>
+            <a:ext cx="6480" cy="5656680"/>
           </a:xfrm>
           <a:prstGeom prst="straightConnector1">
             <a:avLst/>
@@ -7321,7 +7321,7 @@
         <p:spPr>
           <a:xfrm>
             <a:off x="0" y="7233120"/>
-            <a:ext cx="1341360" cy="641520"/>
+            <a:ext cx="1341000" cy="641160"/>
           </a:xfrm>
           <a:prstGeom prst="rect">
             <a:avLst/>
@@ -7379,7 +7379,7 @@
         <p:spPr>
           <a:xfrm>
             <a:off x="0" y="8687520"/>
-            <a:ext cx="1341360" cy="638280"/>
+            <a:ext cx="1341000" cy="638280"/>
           </a:xfrm>
           <a:prstGeom prst="rect">
             <a:avLst/>
@@ -7437,7 +7437,7 @@
         <p:spPr>
           <a:xfrm>
             <a:off x="2520" y="3897000"/>
-            <a:ext cx="1341360" cy="272520"/>
+            <a:ext cx="1341000" cy="272520"/>
           </a:xfrm>
           <a:prstGeom prst="rect">
             <a:avLst/>
@@ -7525,7 +7525,7 @@
         <p:spPr>
           <a:xfrm>
             <a:off x="3149640" y="88920"/>
-            <a:ext cx="1349280" cy="303120"/>
+            <a:ext cx="1348920" cy="303120"/>
           </a:xfrm>
           <a:prstGeom prst="rect">
             <a:avLst/>
@@ -7583,7 +7583,7 @@
         <p:spPr>
           <a:xfrm>
             <a:off x="1346040" y="445680"/>
-            <a:ext cx="5310360" cy="3658680"/>
+            <a:ext cx="5310000" cy="3658680"/>
           </a:xfrm>
           <a:prstGeom prst="rect">
             <a:avLst/>
@@ -7986,7 +7986,7 @@
         <p:spPr>
           <a:xfrm>
             <a:off x="2768760" y="4718160"/>
-            <a:ext cx="2103480" cy="303120"/>
+            <a:ext cx="2103120" cy="303120"/>
           </a:xfrm>
           <a:prstGeom prst="rect">
             <a:avLst/>
@@ -8044,7 +8044,7 @@
         <p:spPr>
           <a:xfrm>
             <a:off x="1346040" y="5037840"/>
-            <a:ext cx="5507280" cy="272520"/>
+            <a:ext cx="5506920" cy="272520"/>
           </a:xfrm>
           <a:prstGeom prst="rect">
             <a:avLst/>
@@ -8102,7 +8102,7 @@
         <p:spPr>
           <a:xfrm>
             <a:off x="1346040" y="5676840"/>
-            <a:ext cx="5608800" cy="826200"/>
+            <a:ext cx="5608440" cy="825840"/>
           </a:xfrm>
           <a:prstGeom prst="rect">
             <a:avLst/>
@@ -8219,7 +8219,7 @@
         <p:spPr>
           <a:xfrm>
             <a:off x="3208320" y="9675000"/>
-            <a:ext cx="960120" cy="227160"/>
+            <a:ext cx="959760" cy="227160"/>
           </a:xfrm>
           <a:prstGeom prst="rect">
             <a:avLst/>
@@ -8277,7 +8277,7 @@
         <p:spPr>
           <a:xfrm>
             <a:off x="3174840" y="6566040"/>
-            <a:ext cx="1303560" cy="303120"/>
+            <a:ext cx="1303200" cy="303120"/>
           </a:xfrm>
           <a:prstGeom prst="rect">
             <a:avLst/>
@@ -8335,7 +8335,7 @@
         <p:spPr>
           <a:xfrm>
             <a:off x="657360" y="6971040"/>
-            <a:ext cx="5786640" cy="1380240"/>
+            <a:ext cx="5786280" cy="1379880"/>
           </a:xfrm>
           <a:prstGeom prst="rect">
             <a:avLst/>
@@ -8783,7 +8783,7 @@
         <p:spPr>
           <a:xfrm>
             <a:off x="601200" y="8528400"/>
-            <a:ext cx="2127960" cy="1004040"/>
+            <a:ext cx="2127600" cy="1004040"/>
           </a:xfrm>
           <a:prstGeom prst="rect">
             <a:avLst/>
@@ -8940,7 +8940,7 @@
         <p:spPr>
           <a:xfrm>
             <a:off x="3491280" y="8546760"/>
-            <a:ext cx="2448000" cy="1010880"/>
+            <a:ext cx="2447640" cy="1010520"/>
           </a:xfrm>
           <a:prstGeom prst="rect">
             <a:avLst/>
@@ -9097,7 +9097,7 @@
         <p:spPr>
           <a:xfrm>
             <a:off x="1658160" y="7450920"/>
-            <a:ext cx="92160" cy="91080"/>
+            <a:ext cx="91800" cy="90720"/>
           </a:xfrm>
           <a:prstGeom prst="ellipse">
             <a:avLst/>
@@ -9155,7 +9155,7 @@
         <p:spPr>
           <a:xfrm>
             <a:off x="1803960" y="7446600"/>
-            <a:ext cx="92160" cy="91080"/>
+            <a:ext cx="91800" cy="90720"/>
           </a:xfrm>
           <a:prstGeom prst="ellipse">
             <a:avLst/>
@@ -9213,7 +9213,7 @@
         <p:spPr>
           <a:xfrm>
             <a:off x="1940400" y="7446600"/>
-            <a:ext cx="92160" cy="91080"/>
+            <a:ext cx="91800" cy="90720"/>
           </a:xfrm>
           <a:prstGeom prst="ellipse">
             <a:avLst/>
@@ -9271,7 +9271,7 @@
         <p:spPr>
           <a:xfrm>
             <a:off x="2076840" y="7446600"/>
-            <a:ext cx="92160" cy="91080"/>
+            <a:ext cx="91800" cy="90720"/>
           </a:xfrm>
           <a:prstGeom prst="ellipse">
             <a:avLst/>
@@ -9329,7 +9329,7 @@
         <p:spPr>
           <a:xfrm>
             <a:off x="2213280" y="7446600"/>
-            <a:ext cx="92160" cy="91080"/>
+            <a:ext cx="91800" cy="90720"/>
           </a:xfrm>
           <a:prstGeom prst="ellipse">
             <a:avLst/>
@@ -9387,7 +9387,7 @@
         <p:spPr>
           <a:xfrm>
             <a:off x="1663920" y="8152200"/>
-            <a:ext cx="92160" cy="91080"/>
+            <a:ext cx="91800" cy="90720"/>
           </a:xfrm>
           <a:prstGeom prst="ellipse">
             <a:avLst/>
@@ -9445,7 +9445,7 @@
         <p:spPr>
           <a:xfrm>
             <a:off x="1809360" y="8147880"/>
-            <a:ext cx="92160" cy="91080"/>
+            <a:ext cx="91800" cy="90720"/>
           </a:xfrm>
           <a:prstGeom prst="ellipse">
             <a:avLst/>
@@ -9503,7 +9503,7 @@
         <p:spPr>
           <a:xfrm>
             <a:off x="1945800" y="8147880"/>
-            <a:ext cx="92160" cy="91080"/>
+            <a:ext cx="91800" cy="90720"/>
           </a:xfrm>
           <a:prstGeom prst="ellipse">
             <a:avLst/>
@@ -9561,7 +9561,7 @@
         <p:spPr>
           <a:xfrm>
             <a:off x="2082240" y="8147880"/>
-            <a:ext cx="92160" cy="91080"/>
+            <a:ext cx="91800" cy="90720"/>
           </a:xfrm>
           <a:prstGeom prst="ellipse">
             <a:avLst/>
@@ -9617,7 +9617,7 @@
         <p:spPr>
           <a:xfrm>
             <a:off x="2218680" y="8147880"/>
-            <a:ext cx="92160" cy="91080"/>
+            <a:ext cx="91800" cy="90720"/>
           </a:xfrm>
           <a:prstGeom prst="ellipse">
             <a:avLst/>
@@ -9673,7 +9673,7 @@
         <p:spPr>
           <a:xfrm>
             <a:off x="3279600" y="8180280"/>
-            <a:ext cx="92160" cy="91080"/>
+            <a:ext cx="91800" cy="90720"/>
           </a:xfrm>
           <a:prstGeom prst="ellipse">
             <a:avLst/>
@@ -9731,7 +9731,7 @@
         <p:spPr>
           <a:xfrm>
             <a:off x="3425040" y="8175600"/>
-            <a:ext cx="92160" cy="91080"/>
+            <a:ext cx="91800" cy="90720"/>
           </a:xfrm>
           <a:prstGeom prst="ellipse">
             <a:avLst/>
@@ -9789,7 +9789,7 @@
         <p:spPr>
           <a:xfrm>
             <a:off x="3561480" y="8175600"/>
-            <a:ext cx="92160" cy="91080"/>
+            <a:ext cx="91800" cy="90720"/>
           </a:xfrm>
           <a:prstGeom prst="ellipse">
             <a:avLst/>
@@ -9847,7 +9847,7 @@
         <p:spPr>
           <a:xfrm>
             <a:off x="3697920" y="8175600"/>
-            <a:ext cx="92160" cy="91080"/>
+            <a:ext cx="91800" cy="90720"/>
           </a:xfrm>
           <a:prstGeom prst="ellipse">
             <a:avLst/>
@@ -9903,7 +9903,7 @@
         <p:spPr>
           <a:xfrm>
             <a:off x="3834360" y="8175600"/>
-            <a:ext cx="92160" cy="91080"/>
+            <a:ext cx="91800" cy="90720"/>
           </a:xfrm>
           <a:prstGeom prst="ellipse">
             <a:avLst/>
@@ -9959,7 +9959,7 @@
         <p:spPr>
           <a:xfrm>
             <a:off x="1658160" y="7793280"/>
-            <a:ext cx="92160" cy="91080"/>
+            <a:ext cx="91800" cy="90720"/>
           </a:xfrm>
           <a:prstGeom prst="ellipse">
             <a:avLst/>
@@ -10017,7 +10017,7 @@
         <p:spPr>
           <a:xfrm>
             <a:off x="1803960" y="7788600"/>
-            <a:ext cx="92160" cy="91080"/>
+            <a:ext cx="91800" cy="90720"/>
           </a:xfrm>
           <a:prstGeom prst="ellipse">
             <a:avLst/>
@@ -10075,7 +10075,7 @@
         <p:spPr>
           <a:xfrm>
             <a:off x="1940400" y="7788600"/>
-            <a:ext cx="92160" cy="91080"/>
+            <a:ext cx="91800" cy="90720"/>
           </a:xfrm>
           <a:prstGeom prst="ellipse">
             <a:avLst/>
@@ -10133,7 +10133,7 @@
         <p:spPr>
           <a:xfrm>
             <a:off x="2076840" y="7788600"/>
-            <a:ext cx="92160" cy="91080"/>
+            <a:ext cx="91800" cy="90720"/>
           </a:xfrm>
           <a:prstGeom prst="ellipse">
             <a:avLst/>
@@ -10191,7 +10191,7 @@
         <p:spPr>
           <a:xfrm>
             <a:off x="2213280" y="7788600"/>
-            <a:ext cx="92160" cy="91080"/>
+            <a:ext cx="91800" cy="90720"/>
           </a:xfrm>
           <a:prstGeom prst="ellipse">
             <a:avLst/>
@@ -10247,7 +10247,7 @@
         <p:spPr>
           <a:xfrm>
             <a:off x="3268080" y="7821360"/>
-            <a:ext cx="92160" cy="91080"/>
+            <a:ext cx="91800" cy="90720"/>
           </a:xfrm>
           <a:prstGeom prst="ellipse">
             <a:avLst/>
@@ -10305,7 +10305,7 @@
         <p:spPr>
           <a:xfrm>
             <a:off x="3413880" y="7816680"/>
-            <a:ext cx="92160" cy="91080"/>
+            <a:ext cx="91800" cy="90720"/>
           </a:xfrm>
           <a:prstGeom prst="ellipse">
             <a:avLst/>
@@ -10363,7 +10363,7 @@
         <p:spPr>
           <a:xfrm>
             <a:off x="3550320" y="7816680"/>
-            <a:ext cx="92160" cy="91080"/>
+            <a:ext cx="91800" cy="90720"/>
           </a:xfrm>
           <a:prstGeom prst="ellipse">
             <a:avLst/>
@@ -10421,7 +10421,7 @@
         <p:spPr>
           <a:xfrm>
             <a:off x="3686760" y="7816680"/>
-            <a:ext cx="92160" cy="91080"/>
+            <a:ext cx="91800" cy="90720"/>
           </a:xfrm>
           <a:prstGeom prst="ellipse">
             <a:avLst/>
@@ -10479,7 +10479,7 @@
         <p:spPr>
           <a:xfrm>
             <a:off x="3823200" y="7816680"/>
-            <a:ext cx="92160" cy="91080"/>
+            <a:ext cx="91800" cy="90720"/>
           </a:xfrm>
           <a:prstGeom prst="ellipse">
             <a:avLst/>
@@ -10535,7 +10535,7 @@
         <p:spPr>
           <a:xfrm>
             <a:off x="3279600" y="7450920"/>
-            <a:ext cx="92160" cy="91080"/>
+            <a:ext cx="91800" cy="90720"/>
           </a:xfrm>
           <a:prstGeom prst="ellipse">
             <a:avLst/>
@@ -10593,7 +10593,7 @@
         <p:spPr>
           <a:xfrm>
             <a:off x="3425040" y="7446600"/>
-            <a:ext cx="92160" cy="91080"/>
+            <a:ext cx="91800" cy="90720"/>
           </a:xfrm>
           <a:prstGeom prst="ellipse">
             <a:avLst/>
@@ -10651,7 +10651,7 @@
         <p:spPr>
           <a:xfrm>
             <a:off x="3561480" y="7446600"/>
-            <a:ext cx="92160" cy="91080"/>
+            <a:ext cx="91800" cy="90720"/>
           </a:xfrm>
           <a:prstGeom prst="ellipse">
             <a:avLst/>
@@ -10709,7 +10709,7 @@
         <p:spPr>
           <a:xfrm>
             <a:off x="3697920" y="7446600"/>
-            <a:ext cx="92160" cy="91080"/>
+            <a:ext cx="91800" cy="90720"/>
           </a:xfrm>
           <a:prstGeom prst="ellipse">
             <a:avLst/>
@@ -10767,7 +10767,7 @@
         <p:spPr>
           <a:xfrm>
             <a:off x="3834360" y="7446600"/>
-            <a:ext cx="92160" cy="91080"/>
+            <a:ext cx="91800" cy="90720"/>
           </a:xfrm>
           <a:prstGeom prst="ellipse">
             <a:avLst/>
@@ -10823,7 +10823,7 @@
         <p:spPr>
           <a:xfrm>
             <a:off x="5243040" y="7450200"/>
-            <a:ext cx="92160" cy="91080"/>
+            <a:ext cx="91800" cy="90720"/>
           </a:xfrm>
           <a:prstGeom prst="ellipse">
             <a:avLst/>
@@ -10881,7 +10881,7 @@
         <p:spPr>
           <a:xfrm>
             <a:off x="5388480" y="7445520"/>
-            <a:ext cx="92160" cy="91080"/>
+            <a:ext cx="91800" cy="90720"/>
           </a:xfrm>
           <a:prstGeom prst="ellipse">
             <a:avLst/>
@@ -10939,7 +10939,7 @@
         <p:spPr>
           <a:xfrm>
             <a:off x="5524920" y="7445520"/>
-            <a:ext cx="92160" cy="91080"/>
+            <a:ext cx="91800" cy="90720"/>
           </a:xfrm>
           <a:prstGeom prst="ellipse">
             <a:avLst/>
@@ -10997,7 +10997,7 @@
         <p:spPr>
           <a:xfrm>
             <a:off x="5661360" y="7445520"/>
-            <a:ext cx="92160" cy="91080"/>
+            <a:ext cx="91800" cy="90720"/>
           </a:xfrm>
           <a:prstGeom prst="ellipse">
             <a:avLst/>
@@ -11053,7 +11053,7 @@
         <p:spPr>
           <a:xfrm>
             <a:off x="5797800" y="7445520"/>
-            <a:ext cx="92160" cy="91080"/>
+            <a:ext cx="91800" cy="90720"/>
           </a:xfrm>
           <a:prstGeom prst="ellipse">
             <a:avLst/>
@@ -11109,7 +11109,7 @@
         <p:spPr>
           <a:xfrm>
             <a:off x="5243040" y="7793280"/>
-            <a:ext cx="92160" cy="91080"/>
+            <a:ext cx="91800" cy="90720"/>
           </a:xfrm>
           <a:prstGeom prst="ellipse">
             <a:avLst/>
@@ -11167,7 +11167,7 @@
         <p:spPr>
           <a:xfrm>
             <a:off x="5388480" y="7788600"/>
-            <a:ext cx="92160" cy="91080"/>
+            <a:ext cx="91800" cy="90720"/>
           </a:xfrm>
           <a:prstGeom prst="ellipse">
             <a:avLst/>
@@ -11225,7 +11225,7 @@
         <p:spPr>
           <a:xfrm>
             <a:off x="5524920" y="7788600"/>
-            <a:ext cx="92160" cy="91080"/>
+            <a:ext cx="91800" cy="90720"/>
           </a:xfrm>
           <a:prstGeom prst="ellipse">
             <a:avLst/>
@@ -11283,7 +11283,7 @@
         <p:spPr>
           <a:xfrm>
             <a:off x="5661360" y="7788600"/>
-            <a:ext cx="92160" cy="91080"/>
+            <a:ext cx="91800" cy="90720"/>
           </a:xfrm>
           <a:prstGeom prst="ellipse">
             <a:avLst/>
@@ -11341,7 +11341,7 @@
         <p:spPr>
           <a:xfrm>
             <a:off x="5797800" y="7788600"/>
-            <a:ext cx="92160" cy="91080"/>
+            <a:ext cx="91800" cy="90720"/>
           </a:xfrm>
           <a:prstGeom prst="ellipse">
             <a:avLst/>
@@ -11397,7 +11397,7 @@
         <p:spPr>
           <a:xfrm>
             <a:off x="5246280" y="8147520"/>
-            <a:ext cx="92160" cy="91080"/>
+            <a:ext cx="91800" cy="90720"/>
           </a:xfrm>
           <a:prstGeom prst="ellipse">
             <a:avLst/>
@@ -11455,7 +11455,7 @@
         <p:spPr>
           <a:xfrm>
             <a:off x="5392080" y="8143200"/>
-            <a:ext cx="92160" cy="91080"/>
+            <a:ext cx="91800" cy="90720"/>
           </a:xfrm>
           <a:prstGeom prst="ellipse">
             <a:avLst/>
@@ -11513,7 +11513,7 @@
         <p:spPr>
           <a:xfrm>
             <a:off x="5528520" y="8143200"/>
-            <a:ext cx="92160" cy="91080"/>
+            <a:ext cx="91800" cy="90720"/>
           </a:xfrm>
           <a:prstGeom prst="ellipse">
             <a:avLst/>
@@ -11571,7 +11571,7 @@
         <p:spPr>
           <a:xfrm>
             <a:off x="5664960" y="8143200"/>
-            <a:ext cx="92160" cy="91080"/>
+            <a:ext cx="91800" cy="90720"/>
           </a:xfrm>
           <a:prstGeom prst="ellipse">
             <a:avLst/>
@@ -11629,7 +11629,7 @@
         <p:spPr>
           <a:xfrm>
             <a:off x="5801400" y="8143200"/>
-            <a:ext cx="92160" cy="91080"/>
+            <a:ext cx="91800" cy="90720"/>
           </a:xfrm>
           <a:prstGeom prst="ellipse">
             <a:avLst/>
@@ -11685,7 +11685,7 @@
         <p:spPr>
           <a:xfrm>
             <a:off x="0" y="1242720"/>
-            <a:ext cx="1341360" cy="641520"/>
+            <a:ext cx="1341000" cy="641160"/>
           </a:xfrm>
           <a:prstGeom prst="rect">
             <a:avLst/>
@@ -11743,7 +11743,7 @@
         <p:spPr>
           <a:xfrm>
             <a:off x="1282680" y="444240"/>
-            <a:ext cx="4680" cy="5897520"/>
+            <a:ext cx="5040" cy="5897880"/>
           </a:xfrm>
           <a:prstGeom prst="straightConnector1">
             <a:avLst/>
@@ -11764,7 +11764,7 @@
         <p:spPr>
           <a:xfrm>
             <a:off x="0" y="3353040"/>
-            <a:ext cx="1341360" cy="641520"/>
+            <a:ext cx="1341000" cy="641160"/>
           </a:xfrm>
           <a:prstGeom prst="rect">
             <a:avLst/>
@@ -11822,7 +11822,7 @@
         <p:spPr>
           <a:xfrm>
             <a:off x="0" y="4940280"/>
-            <a:ext cx="1341360" cy="641520"/>
+            <a:ext cx="1341000" cy="641160"/>
           </a:xfrm>
           <a:prstGeom prst="rect">
             <a:avLst/>
@@ -11880,7 +11880,7 @@
         <p:spPr>
           <a:xfrm>
             <a:off x="0" y="5664240"/>
-            <a:ext cx="1341360" cy="641520"/>
+            <a:ext cx="1341000" cy="641160"/>
           </a:xfrm>
           <a:prstGeom prst="rect">
             <a:avLst/>
@@ -11965,7 +11965,7 @@
         <p:spPr>
           <a:xfrm>
             <a:off x="360" y="444960"/>
-            <a:ext cx="1341360" cy="455400"/>
+            <a:ext cx="1341000" cy="455400"/>
           </a:xfrm>
           <a:prstGeom prst="rect">
             <a:avLst/>

--- a/templates/de/cv_template.pptx
+++ b/templates/de/cv_template.pptx
@@ -14,6 +14,3902 @@
 </file>
 
 <file path=ppt/slideLayouts/slideLayout1.xml><?xml version="1.0" encoding="utf-8"?>
+<p:sldLayout xmlns:a="http://schemas.openxmlformats.org/drawingml/2006/main" xmlns:p="http://schemas.openxmlformats.org/presentationml/2006/main" xmlns:r="http://schemas.openxmlformats.org/officeDocument/2006/relationships" xmlns:p14="http://schemas.microsoft.com/office/powerpoint/2010/main" xmlns:p15="http://schemas.microsoft.com/office/powerpoint/2012/main" xmlns:mc="http://schemas.openxmlformats.org/markup-compatibility/2006" type="blank" preserve="1">
+  <p:cSld name="Bild mit Überschrift">
+    <p:bg>
+      <p:bgPr>
+        <a:solidFill>
+          <a:srgbClr val="ffffff"/>
+        </a:solidFill>
+      </p:bgPr>
+    </p:bg>
+    <p:spTree>
+      <p:nvGrpSpPr>
+        <p:cNvPr id="1" name=""/>
+        <p:cNvGrpSpPr/>
+        <p:nvPr/>
+      </p:nvGrpSpPr>
+      <p:grpSpPr>
+        <a:xfrm>
+          <a:off x="0" y="0"/>
+          <a:ext cx="0" cy="0"/>
+          <a:chOff x="0" y="0"/>
+          <a:chExt cx="0" cy="0"/>
+        </a:xfrm>
+      </p:grpSpPr>
+      <p:sp>
+        <p:nvSpPr>
+          <p:cNvPr id="2" name="PlaceHolder 1"/>
+          <p:cNvSpPr>
+            <a:spLocks noGrp="1"/>
+          </p:cNvSpPr>
+          <p:nvPr>
+            <p:ph type="title"/>
+          </p:nvPr>
+        </p:nvSpPr>
+        <p:spPr>
+          <a:xfrm>
+            <a:off x="472320" y="660240"/>
+            <a:ext cx="2206080" cy="2305800"/>
+          </a:xfrm>
+          <a:prstGeom prst="rect">
+            <a:avLst/>
+          </a:prstGeom>
+          <a:noFill/>
+          <a:ln w="0">
+            <a:noFill/>
+          </a:ln>
+        </p:spPr>
+        <p:txBody>
+          <a:bodyPr lIns="91440" rIns="91440" tIns="45720" bIns="45720" anchor="b">
+            <a:noAutofit/>
+          </a:bodyPr>
+          <a:p>
+            <a:pPr indent="0" defTabSz="685800">
+              <a:lnSpc>
+                <a:spcPct val="90000"/>
+              </a:lnSpc>
+              <a:buNone/>
+              <a:tabLst>
+                <a:tab algn="l" pos="0"/>
+              </a:tabLst>
+            </a:pPr>
+            <a:r>
+              <a:rPr lang="de-DE" sz="2400" b="0" u="none" strike="noStrike">
+                <a:solidFill>
+                  <a:schemeClr val="dk1"/>
+                </a:solidFill>
+                <a:effectLst/>
+                <a:uFillTx/>
+                <a:latin typeface="Calibri Light"/>
+              </a:rPr>
+              <a:t>Mastertitelformat bearbeiten</a:t>
+            </a:r>
+            <a:endParaRPr lang="de-DE" sz="2400" b="0" u="none" strike="noStrike">
+              <a:solidFill>
+                <a:srgbClr val="000000"/>
+              </a:solidFill>
+              <a:effectLst/>
+              <a:uFillTx/>
+              <a:latin typeface="Arial"/>
+            </a:endParaRPr>
+          </a:p>
+        </p:txBody>
+      </p:sp>
+      <p:sp>
+        <p:nvSpPr>
+          <p:cNvPr id="3" name="PlaceHolder 2"/>
+          <p:cNvSpPr>
+            <a:spLocks noGrp="1"/>
+          </p:cNvSpPr>
+          <p:nvPr>
+            <p:ph type="body"/>
+          </p:nvPr>
+        </p:nvSpPr>
+        <p:spPr>
+          <a:xfrm>
+            <a:off x="2915640" y="1426320"/>
+            <a:ext cx="3466080" cy="7034040"/>
+          </a:xfrm>
+          <a:prstGeom prst="rect">
+            <a:avLst/>
+          </a:prstGeom>
+          <a:noFill/>
+          <a:ln w="0">
+            <a:noFill/>
+          </a:ln>
+        </p:spPr>
+        <p:txBody>
+          <a:bodyPr lIns="90000" rIns="90000" tIns="45000" bIns="45000" anchor="t">
+            <a:noAutofit/>
+          </a:bodyPr>
+          <a:p>
+            <a:pPr indent="0" defTabSz="457200">
+              <a:lnSpc>
+                <a:spcPct val="100000"/>
+              </a:lnSpc>
+              <a:buNone/>
+              <a:tabLst>
+                <a:tab algn="l" pos="0"/>
+              </a:tabLst>
+            </a:pPr>
+            <a:r>
+              <a:rPr lang="de-DE" sz="2400" b="0" u="none" strike="noStrike">
+                <a:solidFill>
+                  <a:schemeClr val="dk1"/>
+                </a:solidFill>
+                <a:effectLst/>
+                <a:uFillTx/>
+                <a:latin typeface="Calibri"/>
+              </a:rPr>
+              <a:t>Bild durch Klicken auf Symbol hinzufügen</a:t>
+            </a:r>
+            <a:endParaRPr lang="de-DE" sz="2400" b="0" u="none" strike="noStrike">
+              <a:solidFill>
+                <a:srgbClr val="000000"/>
+              </a:solidFill>
+              <a:effectLst/>
+              <a:uFillTx/>
+              <a:latin typeface="Arial"/>
+            </a:endParaRPr>
+          </a:p>
+        </p:txBody>
+      </p:sp>
+      <p:sp>
+        <p:nvSpPr>
+          <p:cNvPr id="4" name="PlaceHolder 3"/>
+          <p:cNvSpPr>
+            <a:spLocks noGrp="1"/>
+          </p:cNvSpPr>
+          <p:nvPr>
+            <p:ph type="body"/>
+          </p:nvPr>
+        </p:nvSpPr>
+        <p:spPr>
+          <a:xfrm>
+            <a:off x="472320" y="2971800"/>
+            <a:ext cx="2206080" cy="5499720"/>
+          </a:xfrm>
+          <a:prstGeom prst="rect">
+            <a:avLst/>
+          </a:prstGeom>
+          <a:noFill/>
+          <a:ln w="0">
+            <a:noFill/>
+          </a:ln>
+        </p:spPr>
+        <p:txBody>
+          <a:bodyPr lIns="91440" rIns="91440" tIns="45720" bIns="45720" anchor="t">
+            <a:noAutofit/>
+          </a:bodyPr>
+          <a:p>
+            <a:pPr indent="0" defTabSz="685800">
+              <a:lnSpc>
+                <a:spcPct val="90000"/>
+              </a:lnSpc>
+              <a:spcBef>
+                <a:spcPts val="751"/>
+              </a:spcBef>
+              <a:buNone/>
+              <a:tabLst>
+                <a:tab algn="l" pos="0"/>
+              </a:tabLst>
+            </a:pPr>
+            <a:r>
+              <a:rPr lang="de-DE" sz="1200" b="0" u="none" strike="noStrike">
+                <a:solidFill>
+                  <a:schemeClr val="dk1"/>
+                </a:solidFill>
+                <a:effectLst/>
+                <a:uFillTx/>
+                <a:latin typeface="Calibri"/>
+              </a:rPr>
+              <a:t>Mastertextformat bearbeiten</a:t>
+            </a:r>
+            <a:endParaRPr lang="de-DE" sz="1200" b="0" u="none" strike="noStrike">
+              <a:solidFill>
+                <a:srgbClr val="000000"/>
+              </a:solidFill>
+              <a:effectLst/>
+              <a:uFillTx/>
+              <a:latin typeface="Arial"/>
+            </a:endParaRPr>
+          </a:p>
+        </p:txBody>
+      </p:sp>
+      <p:sp>
+        <p:nvSpPr>
+          <p:cNvPr id="5" name="PlaceHolder 4"/>
+          <p:cNvSpPr>
+            <a:spLocks noGrp="1"/>
+          </p:cNvSpPr>
+          <p:nvPr>
+            <p:ph type="dt" idx="1"/>
+          </p:nvPr>
+        </p:nvSpPr>
+        <p:spPr>
+          <a:xfrm>
+            <a:off x="471600" y="9181440"/>
+            <a:ext cx="1537200" cy="521640"/>
+          </a:xfrm>
+          <a:prstGeom prst="rect">
+            <a:avLst/>
+          </a:prstGeom>
+          <a:noFill/>
+          <a:ln w="0">
+            <a:noFill/>
+          </a:ln>
+        </p:spPr>
+        <p:txBody>
+          <a:bodyPr lIns="91440" rIns="91440" tIns="45720" bIns="45720" anchor="ctr">
+            <a:noAutofit/>
+          </a:bodyPr>
+          <a:lstStyle>
+            <a:lvl1pPr indent="0" defTabSz="457200">
+              <a:lnSpc>
+                <a:spcPct val="100000"/>
+              </a:lnSpc>
+              <a:buNone/>
+              <a:tabLst>
+                <a:tab algn="l" pos="0"/>
+              </a:tabLst>
+              <a:defRPr lang="de-DE" sz="900" b="0" u="none" strike="noStrike">
+                <a:solidFill>
+                  <a:schemeClr val="dk1">
+                    <a:tint val="75000"/>
+                  </a:schemeClr>
+                </a:solidFill>
+                <a:effectLst/>
+                <a:uFillTx/>
+                <a:latin typeface="Calibri"/>
+              </a:defRPr>
+            </a:lvl1pPr>
+          </a:lstStyle>
+          <a:p>
+            <a:pPr indent="0" defTabSz="457200">
+              <a:lnSpc>
+                <a:spcPct val="100000"/>
+              </a:lnSpc>
+              <a:buNone/>
+              <a:tabLst>
+                <a:tab algn="l" pos="0"/>
+              </a:tabLst>
+            </a:pPr>
+            <a:r>
+              <a:rPr lang="de-DE" sz="900" b="0" u="none" strike="noStrike">
+                <a:solidFill>
+                  <a:schemeClr val="dk1">
+                    <a:tint val="75000"/>
+                  </a:schemeClr>
+                </a:solidFill>
+                <a:effectLst/>
+                <a:uFillTx/>
+                <a:latin typeface="Calibri"/>
+              </a:rPr>
+              <a:t>&lt;Datum/Uhrzeit&gt;</a:t>
+            </a:r>
+            <a:endParaRPr lang="de-DE" sz="900" b="0" u="none" strike="noStrike">
+              <a:solidFill>
+                <a:srgbClr val="000000"/>
+              </a:solidFill>
+              <a:effectLst/>
+              <a:uFillTx/>
+              <a:latin typeface="Times New Roman"/>
+            </a:endParaRPr>
+          </a:p>
+        </p:txBody>
+      </p:sp>
+      <p:sp>
+        <p:nvSpPr>
+          <p:cNvPr id="6" name="PlaceHolder 5"/>
+          <p:cNvSpPr>
+            <a:spLocks noGrp="1"/>
+          </p:cNvSpPr>
+          <p:nvPr>
+            <p:ph type="ftr" idx="2"/>
+          </p:nvPr>
+        </p:nvSpPr>
+        <p:spPr>
+          <a:xfrm>
+            <a:off x="2271600" y="9181440"/>
+            <a:ext cx="2308680" cy="521640"/>
+          </a:xfrm>
+          <a:prstGeom prst="rect">
+            <a:avLst/>
+          </a:prstGeom>
+          <a:noFill/>
+          <a:ln w="0">
+            <a:noFill/>
+          </a:ln>
+        </p:spPr>
+        <p:txBody>
+          <a:bodyPr lIns="91440" rIns="91440" tIns="45720" bIns="45720" anchor="ctr">
+            <a:noAutofit/>
+          </a:bodyPr>
+          <a:lstStyle>
+            <a:lvl1pPr indent="0" algn="ctr">
+              <a:lnSpc>
+                <a:spcPct val="100000"/>
+              </a:lnSpc>
+              <a:buNone/>
+              <a:tabLst>
+                <a:tab algn="l" pos="0"/>
+              </a:tabLst>
+              <a:defRPr lang="de-DE" sz="1400" b="0" u="none" strike="noStrike">
+                <a:solidFill>
+                  <a:srgbClr val="000000"/>
+                </a:solidFill>
+                <a:effectLst/>
+                <a:uFillTx/>
+                <a:latin typeface="Times New Roman"/>
+              </a:defRPr>
+            </a:lvl1pPr>
+          </a:lstStyle>
+          <a:p>
+            <a:pPr indent="0" algn="ctr">
+              <a:lnSpc>
+                <a:spcPct val="100000"/>
+              </a:lnSpc>
+              <a:buNone/>
+              <a:tabLst>
+                <a:tab algn="l" pos="0"/>
+              </a:tabLst>
+            </a:pPr>
+            <a:r>
+              <a:rPr lang="de-DE" sz="1400" b="0" u="none" strike="noStrike">
+                <a:solidFill>
+                  <a:srgbClr val="000000"/>
+                </a:solidFill>
+                <a:effectLst/>
+                <a:uFillTx/>
+                <a:latin typeface="Times New Roman"/>
+              </a:rPr>
+              <a:t>&lt;Fußzeile&gt;</a:t>
+            </a:r>
+            <a:endParaRPr lang="de-DE" sz="1400" b="0" u="none" strike="noStrike">
+              <a:solidFill>
+                <a:srgbClr val="000000"/>
+              </a:solidFill>
+              <a:effectLst/>
+              <a:uFillTx/>
+              <a:latin typeface="Times New Roman"/>
+            </a:endParaRPr>
+          </a:p>
+        </p:txBody>
+      </p:sp>
+      <p:sp>
+        <p:nvSpPr>
+          <p:cNvPr id="7" name="PlaceHolder 6"/>
+          <p:cNvSpPr>
+            <a:spLocks noGrp="1"/>
+          </p:cNvSpPr>
+          <p:nvPr>
+            <p:ph type="sldNum" idx="3"/>
+          </p:nvPr>
+        </p:nvSpPr>
+        <p:spPr>
+          <a:xfrm>
+            <a:off x="4843440" y="9181440"/>
+            <a:ext cx="1537200" cy="521640"/>
+          </a:xfrm>
+          <a:prstGeom prst="rect">
+            <a:avLst/>
+          </a:prstGeom>
+          <a:noFill/>
+          <a:ln w="0">
+            <a:noFill/>
+          </a:ln>
+        </p:spPr>
+        <p:txBody>
+          <a:bodyPr lIns="91440" rIns="91440" tIns="45720" bIns="45720" anchor="ctr">
+            <a:noAutofit/>
+          </a:bodyPr>
+          <a:lstStyle>
+            <a:lvl1pPr indent="0" algn="r" defTabSz="457200">
+              <a:lnSpc>
+                <a:spcPct val="100000"/>
+              </a:lnSpc>
+              <a:buNone/>
+              <a:tabLst>
+                <a:tab algn="l" pos="0"/>
+              </a:tabLst>
+              <a:defRPr lang="de-DE" sz="900" b="0" u="none" strike="noStrike">
+                <a:solidFill>
+                  <a:schemeClr val="dk1">
+                    <a:tint val="75000"/>
+                  </a:schemeClr>
+                </a:solidFill>
+                <a:effectLst/>
+                <a:uFillTx/>
+                <a:latin typeface="Calibri"/>
+              </a:defRPr>
+            </a:lvl1pPr>
+          </a:lstStyle>
+          <a:p>
+            <a:pPr indent="0" algn="r" defTabSz="457200">
+              <a:lnSpc>
+                <a:spcPct val="100000"/>
+              </a:lnSpc>
+              <a:buNone/>
+              <a:tabLst>
+                <a:tab algn="l" pos="0"/>
+              </a:tabLst>
+            </a:pPr>
+            <a:fld id="{4A4449EF-2760-4839-8041-9EBE4162FF4B}" type="slidenum">
+              <a:rPr lang="de-DE" sz="900" b="0" u="none" strike="noStrike">
+                <a:solidFill>
+                  <a:schemeClr val="dk1">
+                    <a:tint val="75000"/>
+                  </a:schemeClr>
+                </a:solidFill>
+                <a:effectLst/>
+                <a:uFillTx/>
+                <a:latin typeface="Calibri"/>
+              </a:rPr>
+              <a:t>&lt;Foliennummer&gt;</a:t>
+            </a:fld>
+            <a:endParaRPr lang="de-DE" sz="900" b="0" u="none" strike="noStrike">
+              <a:solidFill>
+                <a:srgbClr val="000000"/>
+              </a:solidFill>
+              <a:effectLst/>
+              <a:uFillTx/>
+              <a:latin typeface="Times New Roman"/>
+            </a:endParaRPr>
+          </a:p>
+        </p:txBody>
+      </p:sp>
+    </p:spTree>
+  </p:cSld>
+</p:sldLayout>
+</file>
+
+<file path=ppt/slideLayouts/slideLayout10.xml><?xml version="1.0" encoding="utf-8"?>
+<p:sldLayout xmlns:a="http://schemas.openxmlformats.org/drawingml/2006/main" xmlns:p="http://schemas.openxmlformats.org/presentationml/2006/main" xmlns:r="http://schemas.openxmlformats.org/officeDocument/2006/relationships" xmlns:p14="http://schemas.microsoft.com/office/powerpoint/2010/main" xmlns:p15="http://schemas.microsoft.com/office/powerpoint/2012/main" xmlns:mc="http://schemas.openxmlformats.org/markup-compatibility/2006" type="blank" preserve="1">
+  <p:cSld name="Leer">
+    <p:bg>
+      <p:bgPr>
+        <a:solidFill>
+          <a:srgbClr val="ffffff"/>
+        </a:solidFill>
+      </p:bgPr>
+    </p:bg>
+    <p:spTree>
+      <p:nvGrpSpPr>
+        <p:cNvPr id="1" name=""/>
+        <p:cNvGrpSpPr/>
+        <p:nvPr/>
+      </p:nvGrpSpPr>
+      <p:grpSpPr>
+        <a:xfrm>
+          <a:off x="0" y="0"/>
+          <a:ext cx="0" cy="0"/>
+          <a:chOff x="0" y="0"/>
+          <a:chExt cx="0" cy="0"/>
+        </a:xfrm>
+      </p:grpSpPr>
+      <p:sp>
+        <p:nvSpPr>
+          <p:cNvPr id="51" name="PlaceHolder 1"/>
+          <p:cNvSpPr>
+            <a:spLocks noGrp="1"/>
+          </p:cNvSpPr>
+          <p:nvPr>
+            <p:ph type="dt" idx="28"/>
+          </p:nvPr>
+        </p:nvSpPr>
+        <p:spPr>
+          <a:xfrm>
+            <a:off x="471600" y="9181440"/>
+            <a:ext cx="1537200" cy="521640"/>
+          </a:xfrm>
+          <a:prstGeom prst="rect">
+            <a:avLst/>
+          </a:prstGeom>
+          <a:noFill/>
+          <a:ln w="0">
+            <a:noFill/>
+          </a:ln>
+        </p:spPr>
+        <p:txBody>
+          <a:bodyPr lIns="91440" rIns="91440" tIns="45720" bIns="45720" anchor="ctr">
+            <a:noAutofit/>
+          </a:bodyPr>
+          <a:lstStyle>
+            <a:lvl1pPr indent="0" defTabSz="457200">
+              <a:lnSpc>
+                <a:spcPct val="100000"/>
+              </a:lnSpc>
+              <a:buNone/>
+              <a:tabLst>
+                <a:tab algn="l" pos="0"/>
+              </a:tabLst>
+              <a:defRPr lang="de-DE" sz="900" b="0" u="none" strike="noStrike">
+                <a:solidFill>
+                  <a:schemeClr val="dk1">
+                    <a:tint val="75000"/>
+                  </a:schemeClr>
+                </a:solidFill>
+                <a:effectLst/>
+                <a:uFillTx/>
+                <a:latin typeface="Calibri"/>
+              </a:defRPr>
+            </a:lvl1pPr>
+          </a:lstStyle>
+          <a:p>
+            <a:pPr indent="0" defTabSz="457200">
+              <a:lnSpc>
+                <a:spcPct val="100000"/>
+              </a:lnSpc>
+              <a:buNone/>
+              <a:tabLst>
+                <a:tab algn="l" pos="0"/>
+              </a:tabLst>
+            </a:pPr>
+            <a:r>
+              <a:rPr lang="de-DE" sz="900" b="0" u="none" strike="noStrike">
+                <a:solidFill>
+                  <a:schemeClr val="dk1">
+                    <a:tint val="75000"/>
+                  </a:schemeClr>
+                </a:solidFill>
+                <a:effectLst/>
+                <a:uFillTx/>
+                <a:latin typeface="Calibri"/>
+              </a:rPr>
+              <a:t>&lt;Datum/Uhrzeit&gt;</a:t>
+            </a:r>
+            <a:endParaRPr lang="de-DE" sz="900" b="0" u="none" strike="noStrike">
+              <a:solidFill>
+                <a:srgbClr val="000000"/>
+              </a:solidFill>
+              <a:effectLst/>
+              <a:uFillTx/>
+              <a:latin typeface="Times New Roman"/>
+            </a:endParaRPr>
+          </a:p>
+        </p:txBody>
+      </p:sp>
+      <p:sp>
+        <p:nvSpPr>
+          <p:cNvPr id="52" name="PlaceHolder 2"/>
+          <p:cNvSpPr>
+            <a:spLocks noGrp="1"/>
+          </p:cNvSpPr>
+          <p:nvPr>
+            <p:ph type="ftr" idx="29"/>
+          </p:nvPr>
+        </p:nvSpPr>
+        <p:spPr>
+          <a:xfrm>
+            <a:off x="2271600" y="9181440"/>
+            <a:ext cx="2308680" cy="521640"/>
+          </a:xfrm>
+          <a:prstGeom prst="rect">
+            <a:avLst/>
+          </a:prstGeom>
+          <a:noFill/>
+          <a:ln w="0">
+            <a:noFill/>
+          </a:ln>
+        </p:spPr>
+        <p:txBody>
+          <a:bodyPr lIns="91440" rIns="91440" tIns="45720" bIns="45720" anchor="ctr">
+            <a:noAutofit/>
+          </a:bodyPr>
+          <a:lstStyle>
+            <a:lvl1pPr indent="0" algn="ctr">
+              <a:lnSpc>
+                <a:spcPct val="100000"/>
+              </a:lnSpc>
+              <a:buNone/>
+              <a:tabLst>
+                <a:tab algn="l" pos="0"/>
+              </a:tabLst>
+              <a:defRPr lang="de-DE" sz="1400" b="0" u="none" strike="noStrike">
+                <a:solidFill>
+                  <a:srgbClr val="000000"/>
+                </a:solidFill>
+                <a:effectLst/>
+                <a:uFillTx/>
+                <a:latin typeface="Times New Roman"/>
+              </a:defRPr>
+            </a:lvl1pPr>
+          </a:lstStyle>
+          <a:p>
+            <a:pPr indent="0" algn="ctr">
+              <a:lnSpc>
+                <a:spcPct val="100000"/>
+              </a:lnSpc>
+              <a:buNone/>
+              <a:tabLst>
+                <a:tab algn="l" pos="0"/>
+              </a:tabLst>
+            </a:pPr>
+            <a:r>
+              <a:rPr lang="de-DE" sz="1400" b="0" u="none" strike="noStrike">
+                <a:solidFill>
+                  <a:srgbClr val="000000"/>
+                </a:solidFill>
+                <a:effectLst/>
+                <a:uFillTx/>
+                <a:latin typeface="Times New Roman"/>
+              </a:rPr>
+              <a:t>&lt;Fußzeile&gt;</a:t>
+            </a:r>
+            <a:endParaRPr lang="de-DE" sz="1400" b="0" u="none" strike="noStrike">
+              <a:solidFill>
+                <a:srgbClr val="000000"/>
+              </a:solidFill>
+              <a:effectLst/>
+              <a:uFillTx/>
+              <a:latin typeface="Times New Roman"/>
+            </a:endParaRPr>
+          </a:p>
+        </p:txBody>
+      </p:sp>
+      <p:sp>
+        <p:nvSpPr>
+          <p:cNvPr id="53" name="PlaceHolder 3"/>
+          <p:cNvSpPr>
+            <a:spLocks noGrp="1"/>
+          </p:cNvSpPr>
+          <p:nvPr>
+            <p:ph type="sldNum" idx="30"/>
+          </p:nvPr>
+        </p:nvSpPr>
+        <p:spPr>
+          <a:xfrm>
+            <a:off x="4843440" y="9181440"/>
+            <a:ext cx="1537200" cy="521640"/>
+          </a:xfrm>
+          <a:prstGeom prst="rect">
+            <a:avLst/>
+          </a:prstGeom>
+          <a:noFill/>
+          <a:ln w="0">
+            <a:noFill/>
+          </a:ln>
+        </p:spPr>
+        <p:txBody>
+          <a:bodyPr lIns="91440" rIns="91440" tIns="45720" bIns="45720" anchor="ctr">
+            <a:noAutofit/>
+          </a:bodyPr>
+          <a:lstStyle>
+            <a:lvl1pPr indent="0" algn="r" defTabSz="457200">
+              <a:lnSpc>
+                <a:spcPct val="100000"/>
+              </a:lnSpc>
+              <a:buNone/>
+              <a:tabLst>
+                <a:tab algn="l" pos="0"/>
+              </a:tabLst>
+              <a:defRPr lang="de-DE" sz="900" b="0" u="none" strike="noStrike">
+                <a:solidFill>
+                  <a:schemeClr val="dk1">
+                    <a:tint val="75000"/>
+                  </a:schemeClr>
+                </a:solidFill>
+                <a:effectLst/>
+                <a:uFillTx/>
+                <a:latin typeface="Calibri"/>
+              </a:defRPr>
+            </a:lvl1pPr>
+          </a:lstStyle>
+          <a:p>
+            <a:pPr indent="0" algn="r" defTabSz="457200">
+              <a:lnSpc>
+                <a:spcPct val="100000"/>
+              </a:lnSpc>
+              <a:buNone/>
+              <a:tabLst>
+                <a:tab algn="l" pos="0"/>
+              </a:tabLst>
+            </a:pPr>
+            <a:fld id="{47BEF351-0069-4C75-B8EA-C190574F8556}" type="slidenum">
+              <a:rPr lang="de-DE" sz="900" b="0" u="none" strike="noStrike">
+                <a:solidFill>
+                  <a:schemeClr val="dk1">
+                    <a:tint val="75000"/>
+                  </a:schemeClr>
+                </a:solidFill>
+                <a:effectLst/>
+                <a:uFillTx/>
+                <a:latin typeface="Calibri"/>
+              </a:rPr>
+              <a:t>&lt;Foliennummer&gt;</a:t>
+            </a:fld>
+            <a:endParaRPr lang="de-DE" sz="900" b="0" u="none" strike="noStrike">
+              <a:solidFill>
+                <a:srgbClr val="000000"/>
+              </a:solidFill>
+              <a:effectLst/>
+              <a:uFillTx/>
+              <a:latin typeface="Times New Roman"/>
+            </a:endParaRPr>
+          </a:p>
+        </p:txBody>
+      </p:sp>
+    </p:spTree>
+  </p:cSld>
+</p:sldLayout>
+</file>
+
+<file path=ppt/slideLayouts/slideLayout11.xml><?xml version="1.0" encoding="utf-8"?>
+<p:sldLayout xmlns:a="http://schemas.openxmlformats.org/drawingml/2006/main" xmlns:p="http://schemas.openxmlformats.org/presentationml/2006/main" xmlns:r="http://schemas.openxmlformats.org/officeDocument/2006/relationships" xmlns:p14="http://schemas.microsoft.com/office/powerpoint/2010/main" xmlns:p15="http://schemas.microsoft.com/office/powerpoint/2012/main" xmlns:mc="http://schemas.openxmlformats.org/markup-compatibility/2006" type="blank" preserve="1">
+  <p:cSld name="Inhalt mit Überschrift">
+    <p:bg>
+      <p:bgPr>
+        <a:solidFill>
+          <a:srgbClr val="ffffff"/>
+        </a:solidFill>
+      </p:bgPr>
+    </p:bg>
+    <p:spTree>
+      <p:nvGrpSpPr>
+        <p:cNvPr id="1" name=""/>
+        <p:cNvGrpSpPr/>
+        <p:nvPr/>
+      </p:nvGrpSpPr>
+      <p:grpSpPr>
+        <a:xfrm>
+          <a:off x="0" y="0"/>
+          <a:ext cx="0" cy="0"/>
+          <a:chOff x="0" y="0"/>
+          <a:chExt cx="0" cy="0"/>
+        </a:xfrm>
+      </p:grpSpPr>
+      <p:sp>
+        <p:nvSpPr>
+          <p:cNvPr id="54" name="PlaceHolder 1"/>
+          <p:cNvSpPr>
+            <a:spLocks noGrp="1"/>
+          </p:cNvSpPr>
+          <p:nvPr>
+            <p:ph type="title"/>
+          </p:nvPr>
+        </p:nvSpPr>
+        <p:spPr>
+          <a:xfrm>
+            <a:off x="472320" y="660240"/>
+            <a:ext cx="2206080" cy="2305800"/>
+          </a:xfrm>
+          <a:prstGeom prst="rect">
+            <a:avLst/>
+          </a:prstGeom>
+          <a:noFill/>
+          <a:ln w="0">
+            <a:noFill/>
+          </a:ln>
+        </p:spPr>
+        <p:txBody>
+          <a:bodyPr lIns="91440" rIns="91440" tIns="45720" bIns="45720" anchor="b">
+            <a:noAutofit/>
+          </a:bodyPr>
+          <a:p>
+            <a:pPr indent="0" defTabSz="685800">
+              <a:lnSpc>
+                <a:spcPct val="90000"/>
+              </a:lnSpc>
+              <a:buNone/>
+              <a:tabLst>
+                <a:tab algn="l" pos="0"/>
+              </a:tabLst>
+            </a:pPr>
+            <a:r>
+              <a:rPr lang="de-DE" sz="2400" b="0" u="none" strike="noStrike">
+                <a:solidFill>
+                  <a:schemeClr val="dk1"/>
+                </a:solidFill>
+                <a:effectLst/>
+                <a:uFillTx/>
+                <a:latin typeface="Calibri Light"/>
+              </a:rPr>
+              <a:t>Mastertitelformat bearbeiten</a:t>
+            </a:r>
+            <a:endParaRPr lang="de-DE" sz="2400" b="0" u="none" strike="noStrike">
+              <a:solidFill>
+                <a:srgbClr val="000000"/>
+              </a:solidFill>
+              <a:effectLst/>
+              <a:uFillTx/>
+              <a:latin typeface="Arial"/>
+            </a:endParaRPr>
+          </a:p>
+        </p:txBody>
+      </p:sp>
+      <p:sp>
+        <p:nvSpPr>
+          <p:cNvPr id="55" name="PlaceHolder 2"/>
+          <p:cNvSpPr>
+            <a:spLocks noGrp="1"/>
+          </p:cNvSpPr>
+          <p:nvPr>
+            <p:ph type="body"/>
+          </p:nvPr>
+        </p:nvSpPr>
+        <p:spPr>
+          <a:xfrm>
+            <a:off x="2915640" y="1426320"/>
+            <a:ext cx="3466080" cy="7034040"/>
+          </a:xfrm>
+          <a:prstGeom prst="rect">
+            <a:avLst/>
+          </a:prstGeom>
+          <a:noFill/>
+          <a:ln w="0">
+            <a:noFill/>
+          </a:ln>
+        </p:spPr>
+        <p:txBody>
+          <a:bodyPr lIns="91440" rIns="91440" tIns="45720" bIns="45720" anchor="t">
+            <a:noAutofit/>
+          </a:bodyPr>
+          <a:p>
+            <a:pPr marL="171360" indent="-171360" defTabSz="685800">
+              <a:lnSpc>
+                <a:spcPct val="90000"/>
+              </a:lnSpc>
+              <a:spcBef>
+                <a:spcPts val="751"/>
+              </a:spcBef>
+              <a:buClr>
+                <a:srgbClr val="000000"/>
+              </a:buClr>
+              <a:buFont typeface="Arial"/>
+              <a:buChar char="•"/>
+            </a:pPr>
+            <a:r>
+              <a:rPr lang="de-DE" sz="2400" b="0" u="none" strike="noStrike">
+                <a:solidFill>
+                  <a:schemeClr val="dk1"/>
+                </a:solidFill>
+                <a:effectLst/>
+                <a:uFillTx/>
+                <a:latin typeface="Calibri"/>
+              </a:rPr>
+              <a:t>Mastertextformat bearbeiten</a:t>
+            </a:r>
+            <a:endParaRPr lang="de-DE" sz="2400" b="0" u="none" strike="noStrike">
+              <a:solidFill>
+                <a:srgbClr val="000000"/>
+              </a:solidFill>
+              <a:effectLst/>
+              <a:uFillTx/>
+              <a:latin typeface="Arial"/>
+            </a:endParaRPr>
+          </a:p>
+          <a:p>
+            <a:pPr marL="514440" lvl="1" indent="-171360" defTabSz="685800">
+              <a:lnSpc>
+                <a:spcPct val="90000"/>
+              </a:lnSpc>
+              <a:spcBef>
+                <a:spcPts val="374"/>
+              </a:spcBef>
+              <a:buClr>
+                <a:srgbClr val="000000"/>
+              </a:buClr>
+              <a:buFont typeface="Arial"/>
+              <a:buChar char="•"/>
+            </a:pPr>
+            <a:r>
+              <a:rPr lang="de-DE" sz="2100" b="0" u="none" strike="noStrike">
+                <a:solidFill>
+                  <a:schemeClr val="dk1"/>
+                </a:solidFill>
+                <a:effectLst/>
+                <a:uFillTx/>
+                <a:latin typeface="Calibri"/>
+              </a:rPr>
+              <a:t>Zweite Ebene</a:t>
+            </a:r>
+            <a:endParaRPr lang="de-DE" sz="2100" b="0" u="none" strike="noStrike">
+              <a:solidFill>
+                <a:srgbClr val="000000"/>
+              </a:solidFill>
+              <a:effectLst/>
+              <a:uFillTx/>
+              <a:latin typeface="Arial"/>
+            </a:endParaRPr>
+          </a:p>
+          <a:p>
+            <a:pPr marL="857160" lvl="2" indent="-171360" defTabSz="685800">
+              <a:lnSpc>
+                <a:spcPct val="90000"/>
+              </a:lnSpc>
+              <a:spcBef>
+                <a:spcPts val="374"/>
+              </a:spcBef>
+              <a:buClr>
+                <a:srgbClr val="000000"/>
+              </a:buClr>
+              <a:buFont typeface="Arial"/>
+              <a:buChar char="•"/>
+            </a:pPr>
+            <a:r>
+              <a:rPr lang="de-DE" sz="1800" b="0" u="none" strike="noStrike">
+                <a:solidFill>
+                  <a:schemeClr val="dk1"/>
+                </a:solidFill>
+                <a:effectLst/>
+                <a:uFillTx/>
+                <a:latin typeface="Calibri"/>
+              </a:rPr>
+              <a:t>Dritte Ebene</a:t>
+            </a:r>
+            <a:endParaRPr lang="de-DE" sz="1800" b="0" u="none" strike="noStrike">
+              <a:solidFill>
+                <a:srgbClr val="000000"/>
+              </a:solidFill>
+              <a:effectLst/>
+              <a:uFillTx/>
+              <a:latin typeface="Arial"/>
+            </a:endParaRPr>
+          </a:p>
+          <a:p>
+            <a:pPr marL="1200240" lvl="3" indent="-171360" defTabSz="685800">
+              <a:lnSpc>
+                <a:spcPct val="90000"/>
+              </a:lnSpc>
+              <a:spcBef>
+                <a:spcPts val="374"/>
+              </a:spcBef>
+              <a:buClr>
+                <a:srgbClr val="000000"/>
+              </a:buClr>
+              <a:buFont typeface="Arial"/>
+              <a:buChar char="•"/>
+            </a:pPr>
+            <a:r>
+              <a:rPr lang="de-DE" sz="1500" b="0" u="none" strike="noStrike">
+                <a:solidFill>
+                  <a:schemeClr val="dk1"/>
+                </a:solidFill>
+                <a:effectLst/>
+                <a:uFillTx/>
+                <a:latin typeface="Calibri"/>
+              </a:rPr>
+              <a:t>Vierte Ebene</a:t>
+            </a:r>
+            <a:endParaRPr lang="de-DE" sz="1500" b="0" u="none" strike="noStrike">
+              <a:solidFill>
+                <a:srgbClr val="000000"/>
+              </a:solidFill>
+              <a:effectLst/>
+              <a:uFillTx/>
+              <a:latin typeface="Arial"/>
+            </a:endParaRPr>
+          </a:p>
+          <a:p>
+            <a:pPr marL="1542960" lvl="4" indent="-171360" defTabSz="685800">
+              <a:lnSpc>
+                <a:spcPct val="90000"/>
+              </a:lnSpc>
+              <a:spcBef>
+                <a:spcPts val="374"/>
+              </a:spcBef>
+              <a:buClr>
+                <a:srgbClr val="000000"/>
+              </a:buClr>
+              <a:buFont typeface="Arial"/>
+              <a:buChar char="•"/>
+            </a:pPr>
+            <a:r>
+              <a:rPr lang="de-DE" sz="1500" b="0" u="none" strike="noStrike">
+                <a:solidFill>
+                  <a:schemeClr val="dk1"/>
+                </a:solidFill>
+                <a:effectLst/>
+                <a:uFillTx/>
+                <a:latin typeface="Calibri"/>
+              </a:rPr>
+              <a:t>Fünfte Ebene</a:t>
+            </a:r>
+            <a:endParaRPr lang="de-DE" sz="1500" b="0" u="none" strike="noStrike">
+              <a:solidFill>
+                <a:srgbClr val="000000"/>
+              </a:solidFill>
+              <a:effectLst/>
+              <a:uFillTx/>
+              <a:latin typeface="Arial"/>
+            </a:endParaRPr>
+          </a:p>
+        </p:txBody>
+      </p:sp>
+      <p:sp>
+        <p:nvSpPr>
+          <p:cNvPr id="56" name="PlaceHolder 3"/>
+          <p:cNvSpPr>
+            <a:spLocks noGrp="1"/>
+          </p:cNvSpPr>
+          <p:nvPr>
+            <p:ph type="body"/>
+          </p:nvPr>
+        </p:nvSpPr>
+        <p:spPr>
+          <a:xfrm>
+            <a:off x="472320" y="2971800"/>
+            <a:ext cx="2206080" cy="5499720"/>
+          </a:xfrm>
+          <a:prstGeom prst="rect">
+            <a:avLst/>
+          </a:prstGeom>
+          <a:noFill/>
+          <a:ln w="0">
+            <a:noFill/>
+          </a:ln>
+        </p:spPr>
+        <p:txBody>
+          <a:bodyPr lIns="91440" rIns="91440" tIns="45720" bIns="45720" anchor="t">
+            <a:noAutofit/>
+          </a:bodyPr>
+          <a:p>
+            <a:pPr indent="0" defTabSz="685800">
+              <a:lnSpc>
+                <a:spcPct val="90000"/>
+              </a:lnSpc>
+              <a:spcBef>
+                <a:spcPts val="751"/>
+              </a:spcBef>
+              <a:buNone/>
+              <a:tabLst>
+                <a:tab algn="l" pos="0"/>
+              </a:tabLst>
+            </a:pPr>
+            <a:r>
+              <a:rPr lang="de-DE" sz="1200" b="0" u="none" strike="noStrike">
+                <a:solidFill>
+                  <a:schemeClr val="dk1"/>
+                </a:solidFill>
+                <a:effectLst/>
+                <a:uFillTx/>
+                <a:latin typeface="Calibri"/>
+              </a:rPr>
+              <a:t>Mastertextformat bearbeiten</a:t>
+            </a:r>
+            <a:endParaRPr lang="de-DE" sz="1200" b="0" u="none" strike="noStrike">
+              <a:solidFill>
+                <a:srgbClr val="000000"/>
+              </a:solidFill>
+              <a:effectLst/>
+              <a:uFillTx/>
+              <a:latin typeface="Arial"/>
+            </a:endParaRPr>
+          </a:p>
+        </p:txBody>
+      </p:sp>
+      <p:sp>
+        <p:nvSpPr>
+          <p:cNvPr id="57" name="PlaceHolder 4"/>
+          <p:cNvSpPr>
+            <a:spLocks noGrp="1"/>
+          </p:cNvSpPr>
+          <p:nvPr>
+            <p:ph type="dt" idx="31"/>
+          </p:nvPr>
+        </p:nvSpPr>
+        <p:spPr>
+          <a:xfrm>
+            <a:off x="471600" y="9181440"/>
+            <a:ext cx="1537200" cy="521640"/>
+          </a:xfrm>
+          <a:prstGeom prst="rect">
+            <a:avLst/>
+          </a:prstGeom>
+          <a:noFill/>
+          <a:ln w="0">
+            <a:noFill/>
+          </a:ln>
+        </p:spPr>
+        <p:txBody>
+          <a:bodyPr lIns="91440" rIns="91440" tIns="45720" bIns="45720" anchor="ctr">
+            <a:noAutofit/>
+          </a:bodyPr>
+          <a:lstStyle>
+            <a:lvl1pPr indent="0" defTabSz="457200">
+              <a:lnSpc>
+                <a:spcPct val="100000"/>
+              </a:lnSpc>
+              <a:buNone/>
+              <a:tabLst>
+                <a:tab algn="l" pos="0"/>
+              </a:tabLst>
+              <a:defRPr lang="de-DE" sz="900" b="0" u="none" strike="noStrike">
+                <a:solidFill>
+                  <a:schemeClr val="dk1">
+                    <a:tint val="75000"/>
+                  </a:schemeClr>
+                </a:solidFill>
+                <a:effectLst/>
+                <a:uFillTx/>
+                <a:latin typeface="Calibri"/>
+              </a:defRPr>
+            </a:lvl1pPr>
+          </a:lstStyle>
+          <a:p>
+            <a:pPr indent="0" defTabSz="457200">
+              <a:lnSpc>
+                <a:spcPct val="100000"/>
+              </a:lnSpc>
+              <a:buNone/>
+              <a:tabLst>
+                <a:tab algn="l" pos="0"/>
+              </a:tabLst>
+            </a:pPr>
+            <a:r>
+              <a:rPr lang="de-DE" sz="900" b="0" u="none" strike="noStrike">
+                <a:solidFill>
+                  <a:schemeClr val="dk1">
+                    <a:tint val="75000"/>
+                  </a:schemeClr>
+                </a:solidFill>
+                <a:effectLst/>
+                <a:uFillTx/>
+                <a:latin typeface="Calibri"/>
+              </a:rPr>
+              <a:t>&lt;Datum/Uhrzeit&gt;</a:t>
+            </a:r>
+            <a:endParaRPr lang="de-DE" sz="900" b="0" u="none" strike="noStrike">
+              <a:solidFill>
+                <a:srgbClr val="000000"/>
+              </a:solidFill>
+              <a:effectLst/>
+              <a:uFillTx/>
+              <a:latin typeface="Times New Roman"/>
+            </a:endParaRPr>
+          </a:p>
+        </p:txBody>
+      </p:sp>
+      <p:sp>
+        <p:nvSpPr>
+          <p:cNvPr id="58" name="PlaceHolder 5"/>
+          <p:cNvSpPr>
+            <a:spLocks noGrp="1"/>
+          </p:cNvSpPr>
+          <p:nvPr>
+            <p:ph type="ftr" idx="32"/>
+          </p:nvPr>
+        </p:nvSpPr>
+        <p:spPr>
+          <a:xfrm>
+            <a:off x="2271600" y="9181440"/>
+            <a:ext cx="2308680" cy="521640"/>
+          </a:xfrm>
+          <a:prstGeom prst="rect">
+            <a:avLst/>
+          </a:prstGeom>
+          <a:noFill/>
+          <a:ln w="0">
+            <a:noFill/>
+          </a:ln>
+        </p:spPr>
+        <p:txBody>
+          <a:bodyPr lIns="91440" rIns="91440" tIns="45720" bIns="45720" anchor="ctr">
+            <a:noAutofit/>
+          </a:bodyPr>
+          <a:lstStyle>
+            <a:lvl1pPr indent="0" algn="ctr">
+              <a:lnSpc>
+                <a:spcPct val="100000"/>
+              </a:lnSpc>
+              <a:buNone/>
+              <a:tabLst>
+                <a:tab algn="l" pos="0"/>
+              </a:tabLst>
+              <a:defRPr lang="de-DE" sz="1400" b="0" u="none" strike="noStrike">
+                <a:solidFill>
+                  <a:srgbClr val="000000"/>
+                </a:solidFill>
+                <a:effectLst/>
+                <a:uFillTx/>
+                <a:latin typeface="Times New Roman"/>
+              </a:defRPr>
+            </a:lvl1pPr>
+          </a:lstStyle>
+          <a:p>
+            <a:pPr indent="0" algn="ctr">
+              <a:lnSpc>
+                <a:spcPct val="100000"/>
+              </a:lnSpc>
+              <a:buNone/>
+              <a:tabLst>
+                <a:tab algn="l" pos="0"/>
+              </a:tabLst>
+            </a:pPr>
+            <a:r>
+              <a:rPr lang="de-DE" sz="1400" b="0" u="none" strike="noStrike">
+                <a:solidFill>
+                  <a:srgbClr val="000000"/>
+                </a:solidFill>
+                <a:effectLst/>
+                <a:uFillTx/>
+                <a:latin typeface="Times New Roman"/>
+              </a:rPr>
+              <a:t>&lt;Fußzeile&gt;</a:t>
+            </a:r>
+            <a:endParaRPr lang="de-DE" sz="1400" b="0" u="none" strike="noStrike">
+              <a:solidFill>
+                <a:srgbClr val="000000"/>
+              </a:solidFill>
+              <a:effectLst/>
+              <a:uFillTx/>
+              <a:latin typeface="Times New Roman"/>
+            </a:endParaRPr>
+          </a:p>
+        </p:txBody>
+      </p:sp>
+      <p:sp>
+        <p:nvSpPr>
+          <p:cNvPr id="59" name="PlaceHolder 6"/>
+          <p:cNvSpPr>
+            <a:spLocks noGrp="1"/>
+          </p:cNvSpPr>
+          <p:nvPr>
+            <p:ph type="sldNum" idx="33"/>
+          </p:nvPr>
+        </p:nvSpPr>
+        <p:spPr>
+          <a:xfrm>
+            <a:off x="4843440" y="9181440"/>
+            <a:ext cx="1537200" cy="521640"/>
+          </a:xfrm>
+          <a:prstGeom prst="rect">
+            <a:avLst/>
+          </a:prstGeom>
+          <a:noFill/>
+          <a:ln w="0">
+            <a:noFill/>
+          </a:ln>
+        </p:spPr>
+        <p:txBody>
+          <a:bodyPr lIns="91440" rIns="91440" tIns="45720" bIns="45720" anchor="ctr">
+            <a:noAutofit/>
+          </a:bodyPr>
+          <a:lstStyle>
+            <a:lvl1pPr indent="0" algn="r" defTabSz="457200">
+              <a:lnSpc>
+                <a:spcPct val="100000"/>
+              </a:lnSpc>
+              <a:buNone/>
+              <a:tabLst>
+                <a:tab algn="l" pos="0"/>
+              </a:tabLst>
+              <a:defRPr lang="de-DE" sz="900" b="0" u="none" strike="noStrike">
+                <a:solidFill>
+                  <a:schemeClr val="dk1">
+                    <a:tint val="75000"/>
+                  </a:schemeClr>
+                </a:solidFill>
+                <a:effectLst/>
+                <a:uFillTx/>
+                <a:latin typeface="Calibri"/>
+              </a:defRPr>
+            </a:lvl1pPr>
+          </a:lstStyle>
+          <a:p>
+            <a:pPr indent="0" algn="r" defTabSz="457200">
+              <a:lnSpc>
+                <a:spcPct val="100000"/>
+              </a:lnSpc>
+              <a:buNone/>
+              <a:tabLst>
+                <a:tab algn="l" pos="0"/>
+              </a:tabLst>
+            </a:pPr>
+            <a:fld id="{2629A7B4-79B2-4A1B-B472-5AEC1120B6EE}" type="slidenum">
+              <a:rPr lang="de-DE" sz="900" b="0" u="none" strike="noStrike">
+                <a:solidFill>
+                  <a:schemeClr val="dk1">
+                    <a:tint val="75000"/>
+                  </a:schemeClr>
+                </a:solidFill>
+                <a:effectLst/>
+                <a:uFillTx/>
+                <a:latin typeface="Calibri"/>
+              </a:rPr>
+              <a:t>&lt;Foliennummer&gt;</a:t>
+            </a:fld>
+            <a:endParaRPr lang="de-DE" sz="900" b="0" u="none" strike="noStrike">
+              <a:solidFill>
+                <a:srgbClr val="000000"/>
+              </a:solidFill>
+              <a:effectLst/>
+              <a:uFillTx/>
+              <a:latin typeface="Times New Roman"/>
+            </a:endParaRPr>
+          </a:p>
+        </p:txBody>
+      </p:sp>
+    </p:spTree>
+  </p:cSld>
+</p:sldLayout>
+</file>
+
+<file path=ppt/slideLayouts/slideLayout2.xml><?xml version="1.0" encoding="utf-8"?>
+<p:sldLayout xmlns:a="http://schemas.openxmlformats.org/drawingml/2006/main" xmlns:p="http://schemas.openxmlformats.org/presentationml/2006/main" xmlns:r="http://schemas.openxmlformats.org/officeDocument/2006/relationships" xmlns:p14="http://schemas.microsoft.com/office/powerpoint/2010/main" xmlns:p15="http://schemas.microsoft.com/office/powerpoint/2012/main" xmlns:mc="http://schemas.openxmlformats.org/markup-compatibility/2006" type="title" preserve="1">
+  <p:cSld name="Titelfolie">
+    <p:bg>
+      <p:bgPr>
+        <a:solidFill>
+          <a:srgbClr val="ffffff"/>
+        </a:solidFill>
+      </p:bgPr>
+    </p:bg>
+    <p:spTree>
+      <p:nvGrpSpPr>
+        <p:cNvPr id="1" name=""/>
+        <p:cNvGrpSpPr/>
+        <p:nvPr/>
+      </p:nvGrpSpPr>
+      <p:grpSpPr>
+        <a:xfrm>
+          <a:off x="0" y="0"/>
+          <a:ext cx="0" cy="0"/>
+          <a:chOff x="0" y="0"/>
+          <a:chExt cx="0" cy="0"/>
+        </a:xfrm>
+      </p:grpSpPr>
+      <p:sp>
+        <p:nvSpPr>
+          <p:cNvPr id="8" name="PlaceHolder 1"/>
+          <p:cNvSpPr>
+            <a:spLocks noGrp="1"/>
+          </p:cNvSpPr>
+          <p:nvPr>
+            <p:ph type="title"/>
+          </p:nvPr>
+        </p:nvSpPr>
+        <p:spPr>
+          <a:xfrm>
+            <a:off x="514440" y="1621080"/>
+            <a:ext cx="5823720" cy="3443040"/>
+          </a:xfrm>
+          <a:prstGeom prst="rect">
+            <a:avLst/>
+          </a:prstGeom>
+          <a:noFill/>
+          <a:ln w="0">
+            <a:noFill/>
+          </a:ln>
+        </p:spPr>
+        <p:txBody>
+          <a:bodyPr lIns="91440" rIns="91440" tIns="45720" bIns="45720" anchor="b">
+            <a:noAutofit/>
+          </a:bodyPr>
+          <a:p>
+            <a:pPr indent="0" algn="ctr" defTabSz="685800">
+              <a:lnSpc>
+                <a:spcPct val="90000"/>
+              </a:lnSpc>
+              <a:buNone/>
+              <a:tabLst>
+                <a:tab algn="l" pos="0"/>
+              </a:tabLst>
+            </a:pPr>
+            <a:r>
+              <a:rPr lang="de-DE" sz="4500" b="0" u="none" strike="noStrike">
+                <a:solidFill>
+                  <a:schemeClr val="dk1"/>
+                </a:solidFill>
+                <a:effectLst/>
+                <a:uFillTx/>
+                <a:latin typeface="Calibri Light"/>
+              </a:rPr>
+              <a:t>Mastertitelformat bearbeiten</a:t>
+            </a:r>
+            <a:endParaRPr lang="de-DE" sz="4500" b="0" u="none" strike="noStrike">
+              <a:solidFill>
+                <a:srgbClr val="000000"/>
+              </a:solidFill>
+              <a:effectLst/>
+              <a:uFillTx/>
+              <a:latin typeface="Arial"/>
+            </a:endParaRPr>
+          </a:p>
+        </p:txBody>
+      </p:sp>
+      <p:sp>
+        <p:nvSpPr>
+          <p:cNvPr id="9" name="PlaceHolder 2"/>
+          <p:cNvSpPr>
+            <a:spLocks noGrp="1"/>
+          </p:cNvSpPr>
+          <p:nvPr>
+            <p:ph type="dt" idx="4"/>
+          </p:nvPr>
+        </p:nvSpPr>
+        <p:spPr>
+          <a:xfrm>
+            <a:off x="471600" y="9181440"/>
+            <a:ext cx="1537200" cy="521640"/>
+          </a:xfrm>
+          <a:prstGeom prst="rect">
+            <a:avLst/>
+          </a:prstGeom>
+          <a:noFill/>
+          <a:ln w="0">
+            <a:noFill/>
+          </a:ln>
+        </p:spPr>
+        <p:txBody>
+          <a:bodyPr lIns="91440" rIns="91440" tIns="45720" bIns="45720" anchor="ctr">
+            <a:noAutofit/>
+          </a:bodyPr>
+          <a:lstStyle>
+            <a:lvl1pPr indent="0" defTabSz="457200">
+              <a:lnSpc>
+                <a:spcPct val="100000"/>
+              </a:lnSpc>
+              <a:buNone/>
+              <a:tabLst>
+                <a:tab algn="l" pos="0"/>
+              </a:tabLst>
+              <a:defRPr lang="de-DE" sz="900" b="0" u="none" strike="noStrike">
+                <a:solidFill>
+                  <a:schemeClr val="dk1">
+                    <a:tint val="75000"/>
+                  </a:schemeClr>
+                </a:solidFill>
+                <a:effectLst/>
+                <a:uFillTx/>
+                <a:latin typeface="Calibri"/>
+              </a:defRPr>
+            </a:lvl1pPr>
+          </a:lstStyle>
+          <a:p>
+            <a:pPr indent="0" defTabSz="457200">
+              <a:lnSpc>
+                <a:spcPct val="100000"/>
+              </a:lnSpc>
+              <a:buNone/>
+              <a:tabLst>
+                <a:tab algn="l" pos="0"/>
+              </a:tabLst>
+            </a:pPr>
+            <a:r>
+              <a:rPr lang="de-DE" sz="900" b="0" u="none" strike="noStrike">
+                <a:solidFill>
+                  <a:schemeClr val="dk1">
+                    <a:tint val="75000"/>
+                  </a:schemeClr>
+                </a:solidFill>
+                <a:effectLst/>
+                <a:uFillTx/>
+                <a:latin typeface="Calibri"/>
+              </a:rPr>
+              <a:t>&lt;Datum/Uhrzeit&gt;</a:t>
+            </a:r>
+            <a:endParaRPr lang="de-DE" sz="900" b="0" u="none" strike="noStrike">
+              <a:solidFill>
+                <a:srgbClr val="000000"/>
+              </a:solidFill>
+              <a:effectLst/>
+              <a:uFillTx/>
+              <a:latin typeface="Times New Roman"/>
+            </a:endParaRPr>
+          </a:p>
+        </p:txBody>
+      </p:sp>
+      <p:sp>
+        <p:nvSpPr>
+          <p:cNvPr id="10" name="PlaceHolder 3"/>
+          <p:cNvSpPr>
+            <a:spLocks noGrp="1"/>
+          </p:cNvSpPr>
+          <p:nvPr>
+            <p:ph type="ftr" idx="5"/>
+          </p:nvPr>
+        </p:nvSpPr>
+        <p:spPr>
+          <a:xfrm>
+            <a:off x="2271600" y="9181440"/>
+            <a:ext cx="2308680" cy="521640"/>
+          </a:xfrm>
+          <a:prstGeom prst="rect">
+            <a:avLst/>
+          </a:prstGeom>
+          <a:noFill/>
+          <a:ln w="0">
+            <a:noFill/>
+          </a:ln>
+        </p:spPr>
+        <p:txBody>
+          <a:bodyPr lIns="91440" rIns="91440" tIns="45720" bIns="45720" anchor="ctr">
+            <a:noAutofit/>
+          </a:bodyPr>
+          <a:lstStyle>
+            <a:lvl1pPr indent="0" algn="ctr">
+              <a:lnSpc>
+                <a:spcPct val="100000"/>
+              </a:lnSpc>
+              <a:buNone/>
+              <a:tabLst>
+                <a:tab algn="l" pos="0"/>
+              </a:tabLst>
+              <a:defRPr lang="de-DE" sz="1400" b="0" u="none" strike="noStrike">
+                <a:solidFill>
+                  <a:srgbClr val="000000"/>
+                </a:solidFill>
+                <a:effectLst/>
+                <a:uFillTx/>
+                <a:latin typeface="Times New Roman"/>
+              </a:defRPr>
+            </a:lvl1pPr>
+          </a:lstStyle>
+          <a:p>
+            <a:pPr indent="0" algn="ctr">
+              <a:lnSpc>
+                <a:spcPct val="100000"/>
+              </a:lnSpc>
+              <a:buNone/>
+              <a:tabLst>
+                <a:tab algn="l" pos="0"/>
+              </a:tabLst>
+            </a:pPr>
+            <a:r>
+              <a:rPr lang="de-DE" sz="1400" b="0" u="none" strike="noStrike">
+                <a:solidFill>
+                  <a:srgbClr val="000000"/>
+                </a:solidFill>
+                <a:effectLst/>
+                <a:uFillTx/>
+                <a:latin typeface="Times New Roman"/>
+              </a:rPr>
+              <a:t>&lt;Fußzeile&gt;</a:t>
+            </a:r>
+            <a:endParaRPr lang="de-DE" sz="1400" b="0" u="none" strike="noStrike">
+              <a:solidFill>
+                <a:srgbClr val="000000"/>
+              </a:solidFill>
+              <a:effectLst/>
+              <a:uFillTx/>
+              <a:latin typeface="Times New Roman"/>
+            </a:endParaRPr>
+          </a:p>
+        </p:txBody>
+      </p:sp>
+      <p:sp>
+        <p:nvSpPr>
+          <p:cNvPr id="11" name="PlaceHolder 4"/>
+          <p:cNvSpPr>
+            <a:spLocks noGrp="1"/>
+          </p:cNvSpPr>
+          <p:nvPr>
+            <p:ph type="sldNum" idx="6"/>
+          </p:nvPr>
+        </p:nvSpPr>
+        <p:spPr>
+          <a:xfrm>
+            <a:off x="4843440" y="9181440"/>
+            <a:ext cx="1537200" cy="521640"/>
+          </a:xfrm>
+          <a:prstGeom prst="rect">
+            <a:avLst/>
+          </a:prstGeom>
+          <a:noFill/>
+          <a:ln w="0">
+            <a:noFill/>
+          </a:ln>
+        </p:spPr>
+        <p:txBody>
+          <a:bodyPr lIns="91440" rIns="91440" tIns="45720" bIns="45720" anchor="ctr">
+            <a:noAutofit/>
+          </a:bodyPr>
+          <a:lstStyle>
+            <a:lvl1pPr indent="0" algn="r" defTabSz="457200">
+              <a:lnSpc>
+                <a:spcPct val="100000"/>
+              </a:lnSpc>
+              <a:buNone/>
+              <a:tabLst>
+                <a:tab algn="l" pos="0"/>
+              </a:tabLst>
+              <a:defRPr lang="de-DE" sz="900" b="0" u="none" strike="noStrike">
+                <a:solidFill>
+                  <a:schemeClr val="dk1">
+                    <a:tint val="75000"/>
+                  </a:schemeClr>
+                </a:solidFill>
+                <a:effectLst/>
+                <a:uFillTx/>
+                <a:latin typeface="Calibri"/>
+              </a:defRPr>
+            </a:lvl1pPr>
+          </a:lstStyle>
+          <a:p>
+            <a:pPr indent="0" algn="r" defTabSz="457200">
+              <a:lnSpc>
+                <a:spcPct val="100000"/>
+              </a:lnSpc>
+              <a:buNone/>
+              <a:tabLst>
+                <a:tab algn="l" pos="0"/>
+              </a:tabLst>
+            </a:pPr>
+            <a:fld id="{453FE635-40C5-4071-A78D-9340D38B55DD}" type="slidenum">
+              <a:rPr lang="de-DE" sz="900" b="0" u="none" strike="noStrike">
+                <a:solidFill>
+                  <a:schemeClr val="dk1">
+                    <a:tint val="75000"/>
+                  </a:schemeClr>
+                </a:solidFill>
+                <a:effectLst/>
+                <a:uFillTx/>
+                <a:latin typeface="Calibri"/>
+              </a:rPr>
+              <a:t>&lt;Foliennummer&gt;</a:t>
+            </a:fld>
+            <a:endParaRPr lang="de-DE" sz="900" b="0" u="none" strike="noStrike">
+              <a:solidFill>
+                <a:srgbClr val="000000"/>
+              </a:solidFill>
+              <a:effectLst/>
+              <a:uFillTx/>
+              <a:latin typeface="Times New Roman"/>
+            </a:endParaRPr>
+          </a:p>
+        </p:txBody>
+      </p:sp>
+      <p:sp>
+        <p:nvSpPr>
+          <p:cNvPr id="12" name="PlaceHolder 5"/>
+          <p:cNvSpPr>
+            <a:spLocks noGrp="1"/>
+          </p:cNvSpPr>
+          <p:nvPr>
+            <p:ph type="body"/>
+          </p:nvPr>
+        </p:nvSpPr>
+        <p:spPr>
+          <a:xfrm>
+            <a:off x="342720" y="2317680"/>
+            <a:ext cx="6166440" cy="5739480"/>
+          </a:xfrm>
+          <a:prstGeom prst="rect">
+            <a:avLst/>
+          </a:prstGeom>
+          <a:noFill/>
+          <a:ln w="0">
+            <a:noFill/>
+          </a:ln>
+        </p:spPr>
+        <p:txBody>
+          <a:bodyPr lIns="0" rIns="0" tIns="0" bIns="0" anchor="t">
+            <a:normAutofit/>
+          </a:bodyPr>
+          <a:p>
+            <a:pPr marL="432000" indent="-324000">
+              <a:lnSpc>
+                <a:spcPct val="90000"/>
+              </a:lnSpc>
+              <a:spcBef>
+                <a:spcPts val="1417"/>
+              </a:spcBef>
+              <a:buClr>
+                <a:srgbClr val="000000"/>
+              </a:buClr>
+              <a:buSzPct val="45000"/>
+              <a:buFont typeface="Wingdings" charset="2"/>
+              <a:buChar char=""/>
+            </a:pPr>
+            <a:r>
+              <a:rPr lang="en-US" sz="2100" b="0" u="none" strike="noStrike">
+                <a:solidFill>
+                  <a:schemeClr val="dk1"/>
+                </a:solidFill>
+                <a:effectLst/>
+                <a:uFillTx/>
+                <a:latin typeface="Calibri"/>
+              </a:rPr>
+              <a:t>Format des Gliederungstextes durch Klicken bearbeiten</a:t>
+            </a:r>
+            <a:endParaRPr lang="de-DE" sz="2100" b="0" u="none" strike="noStrike">
+              <a:solidFill>
+                <a:srgbClr val="000000"/>
+              </a:solidFill>
+              <a:effectLst/>
+              <a:uFillTx/>
+              <a:latin typeface="Arial"/>
+            </a:endParaRPr>
+          </a:p>
+          <a:p>
+            <a:pPr marL="864000" lvl="1" indent="-324000">
+              <a:lnSpc>
+                <a:spcPct val="90000"/>
+              </a:lnSpc>
+              <a:spcBef>
+                <a:spcPts val="1134"/>
+              </a:spcBef>
+              <a:buClr>
+                <a:srgbClr val="000000"/>
+              </a:buClr>
+              <a:buSzPct val="75000"/>
+              <a:buFont typeface="Symbol" charset="2"/>
+              <a:buChar char=""/>
+            </a:pPr>
+            <a:r>
+              <a:rPr lang="en-US" sz="1500" b="0" u="none" strike="noStrike">
+                <a:solidFill>
+                  <a:schemeClr val="dk1"/>
+                </a:solidFill>
+                <a:effectLst/>
+                <a:uFillTx/>
+                <a:latin typeface="Calibri"/>
+              </a:rPr>
+              <a:t>Zweite Gliederungsebene</a:t>
+            </a:r>
+            <a:endParaRPr lang="de-DE" sz="1500" b="0" u="none" strike="noStrike">
+              <a:solidFill>
+                <a:srgbClr val="000000"/>
+              </a:solidFill>
+              <a:effectLst/>
+              <a:uFillTx/>
+              <a:latin typeface="Arial"/>
+            </a:endParaRPr>
+          </a:p>
+          <a:p>
+            <a:pPr marL="1296000" lvl="2" indent="-288000">
+              <a:lnSpc>
+                <a:spcPct val="90000"/>
+              </a:lnSpc>
+              <a:spcBef>
+                <a:spcPts val="850"/>
+              </a:spcBef>
+              <a:buClr>
+                <a:srgbClr val="000000"/>
+              </a:buClr>
+              <a:buSzPct val="45000"/>
+              <a:buFont typeface="Wingdings" charset="2"/>
+              <a:buChar char=""/>
+            </a:pPr>
+            <a:r>
+              <a:rPr lang="en-US" sz="1350" b="0" u="none" strike="noStrike">
+                <a:solidFill>
+                  <a:schemeClr val="dk1"/>
+                </a:solidFill>
+                <a:effectLst/>
+                <a:uFillTx/>
+                <a:latin typeface="Calibri"/>
+              </a:rPr>
+              <a:t>Dritte Gliederungsebene</a:t>
+            </a:r>
+            <a:endParaRPr lang="de-DE" sz="1350" b="0" u="none" strike="noStrike">
+              <a:solidFill>
+                <a:srgbClr val="000000"/>
+              </a:solidFill>
+              <a:effectLst/>
+              <a:uFillTx/>
+              <a:latin typeface="Arial"/>
+            </a:endParaRPr>
+          </a:p>
+          <a:p>
+            <a:pPr marL="1728000" lvl="3" indent="-216000">
+              <a:lnSpc>
+                <a:spcPct val="90000"/>
+              </a:lnSpc>
+              <a:spcBef>
+                <a:spcPts val="567"/>
+              </a:spcBef>
+              <a:buClr>
+                <a:srgbClr val="000000"/>
+              </a:buClr>
+              <a:buSzPct val="75000"/>
+              <a:buFont typeface="Symbol" charset="2"/>
+              <a:buChar char=""/>
+            </a:pPr>
+            <a:r>
+              <a:rPr lang="en-US" sz="1350" b="0" u="none" strike="noStrike">
+                <a:solidFill>
+                  <a:schemeClr val="dk1"/>
+                </a:solidFill>
+                <a:effectLst/>
+                <a:uFillTx/>
+                <a:latin typeface="Calibri"/>
+              </a:rPr>
+              <a:t>Vierte Gliederungsebene</a:t>
+            </a:r>
+            <a:endParaRPr lang="de-DE" sz="1350" b="0" u="none" strike="noStrike">
+              <a:solidFill>
+                <a:srgbClr val="000000"/>
+              </a:solidFill>
+              <a:effectLst/>
+              <a:uFillTx/>
+              <a:latin typeface="Arial"/>
+            </a:endParaRPr>
+          </a:p>
+          <a:p>
+            <a:pPr marL="2160000" lvl="4" indent="-216000">
+              <a:lnSpc>
+                <a:spcPct val="90000"/>
+              </a:lnSpc>
+              <a:spcBef>
+                <a:spcPts val="283"/>
+              </a:spcBef>
+              <a:buClr>
+                <a:srgbClr val="000000"/>
+              </a:buClr>
+              <a:buSzPct val="45000"/>
+              <a:buFont typeface="Wingdings" charset="2"/>
+              <a:buChar char=""/>
+            </a:pPr>
+            <a:r>
+              <a:rPr lang="en-US" sz="2000" b="0" u="none" strike="noStrike">
+                <a:solidFill>
+                  <a:schemeClr val="dk1"/>
+                </a:solidFill>
+                <a:effectLst/>
+                <a:uFillTx/>
+                <a:latin typeface="Calibri"/>
+              </a:rPr>
+              <a:t>Fünfte Gliederungsebene</a:t>
+            </a:r>
+            <a:endParaRPr lang="de-DE" sz="2000" b="0" u="none" strike="noStrike">
+              <a:solidFill>
+                <a:srgbClr val="000000"/>
+              </a:solidFill>
+              <a:effectLst/>
+              <a:uFillTx/>
+              <a:latin typeface="Arial"/>
+            </a:endParaRPr>
+          </a:p>
+          <a:p>
+            <a:pPr marL="2592000" lvl="5" indent="-216000">
+              <a:lnSpc>
+                <a:spcPct val="90000"/>
+              </a:lnSpc>
+              <a:spcBef>
+                <a:spcPts val="283"/>
+              </a:spcBef>
+              <a:buClr>
+                <a:srgbClr val="000000"/>
+              </a:buClr>
+              <a:buSzPct val="45000"/>
+              <a:buFont typeface="Wingdings" charset="2"/>
+              <a:buChar char=""/>
+            </a:pPr>
+            <a:r>
+              <a:rPr lang="en-US" sz="2000" b="0" u="none" strike="noStrike">
+                <a:solidFill>
+                  <a:schemeClr val="dk1"/>
+                </a:solidFill>
+                <a:effectLst/>
+                <a:uFillTx/>
+                <a:latin typeface="Calibri"/>
+              </a:rPr>
+              <a:t>Sechste Gliederungsebene</a:t>
+            </a:r>
+            <a:endParaRPr lang="de-DE" sz="2000" b="0" u="none" strike="noStrike">
+              <a:solidFill>
+                <a:srgbClr val="000000"/>
+              </a:solidFill>
+              <a:effectLst/>
+              <a:uFillTx/>
+              <a:latin typeface="Arial"/>
+            </a:endParaRPr>
+          </a:p>
+          <a:p>
+            <a:pPr marL="3024000" lvl="6" indent="-216000">
+              <a:lnSpc>
+                <a:spcPct val="90000"/>
+              </a:lnSpc>
+              <a:spcBef>
+                <a:spcPts val="283"/>
+              </a:spcBef>
+              <a:buClr>
+                <a:srgbClr val="000000"/>
+              </a:buClr>
+              <a:buSzPct val="45000"/>
+              <a:buFont typeface="Wingdings" charset="2"/>
+              <a:buChar char=""/>
+            </a:pPr>
+            <a:r>
+              <a:rPr lang="en-US" sz="2000" b="0" u="none" strike="noStrike">
+                <a:solidFill>
+                  <a:schemeClr val="dk1"/>
+                </a:solidFill>
+                <a:effectLst/>
+                <a:uFillTx/>
+                <a:latin typeface="Calibri"/>
+              </a:rPr>
+              <a:t>Siebte Gliederungsebene</a:t>
+            </a:r>
+            <a:endParaRPr lang="de-DE" sz="2000" b="0" u="none" strike="noStrike">
+              <a:solidFill>
+                <a:srgbClr val="000000"/>
+              </a:solidFill>
+              <a:effectLst/>
+              <a:uFillTx/>
+              <a:latin typeface="Arial"/>
+            </a:endParaRPr>
+          </a:p>
+        </p:txBody>
+      </p:sp>
+    </p:spTree>
+  </p:cSld>
+</p:sldLayout>
+</file>
+
+<file path=ppt/slideLayouts/slideLayout3.xml><?xml version="1.0" encoding="utf-8"?>
+<p:sldLayout xmlns:a="http://schemas.openxmlformats.org/drawingml/2006/main" xmlns:p="http://schemas.openxmlformats.org/presentationml/2006/main" xmlns:r="http://schemas.openxmlformats.org/officeDocument/2006/relationships" xmlns:p14="http://schemas.microsoft.com/office/powerpoint/2010/main" xmlns:p15="http://schemas.microsoft.com/office/powerpoint/2012/main" xmlns:mc="http://schemas.openxmlformats.org/markup-compatibility/2006" type="vertTx" preserve="1">
+  <p:cSld name="Titel und vertikaler Text">
+    <p:bg>
+      <p:bgPr>
+        <a:solidFill>
+          <a:srgbClr val="ffffff"/>
+        </a:solidFill>
+      </p:bgPr>
+    </p:bg>
+    <p:spTree>
+      <p:nvGrpSpPr>
+        <p:cNvPr id="1" name=""/>
+        <p:cNvGrpSpPr/>
+        <p:nvPr/>
+      </p:nvGrpSpPr>
+      <p:grpSpPr>
+        <a:xfrm>
+          <a:off x="0" y="0"/>
+          <a:ext cx="0" cy="0"/>
+          <a:chOff x="0" y="0"/>
+          <a:chExt cx="0" cy="0"/>
+        </a:xfrm>
+      </p:grpSpPr>
+      <p:sp>
+        <p:nvSpPr>
+          <p:cNvPr id="13" name="PlaceHolder 1"/>
+          <p:cNvSpPr>
+            <a:spLocks noGrp="1"/>
+          </p:cNvSpPr>
+          <p:nvPr>
+            <p:ph type="title"/>
+          </p:nvPr>
+        </p:nvSpPr>
+        <p:spPr>
+          <a:xfrm>
+            <a:off x="471600" y="527400"/>
+            <a:ext cx="5909400" cy="1909080"/>
+          </a:xfrm>
+          <a:prstGeom prst="rect">
+            <a:avLst/>
+          </a:prstGeom>
+          <a:noFill/>
+          <a:ln w="0">
+            <a:noFill/>
+          </a:ln>
+        </p:spPr>
+        <p:txBody>
+          <a:bodyPr lIns="91440" rIns="91440" tIns="45720" bIns="45720" anchor="ctr">
+            <a:noAutofit/>
+          </a:bodyPr>
+          <a:p>
+            <a:pPr indent="0" defTabSz="685800">
+              <a:lnSpc>
+                <a:spcPct val="90000"/>
+              </a:lnSpc>
+              <a:buNone/>
+              <a:tabLst>
+                <a:tab algn="l" pos="0"/>
+              </a:tabLst>
+            </a:pPr>
+            <a:r>
+              <a:rPr lang="de-DE" sz="3300" b="0" u="none" strike="noStrike">
+                <a:solidFill>
+                  <a:schemeClr val="dk1"/>
+                </a:solidFill>
+                <a:effectLst/>
+                <a:uFillTx/>
+                <a:latin typeface="Calibri Light"/>
+              </a:rPr>
+              <a:t>Mastertitelformat bearbeiten</a:t>
+            </a:r>
+            <a:endParaRPr lang="de-DE" sz="3300" b="0" u="none" strike="noStrike">
+              <a:solidFill>
+                <a:srgbClr val="000000"/>
+              </a:solidFill>
+              <a:effectLst/>
+              <a:uFillTx/>
+              <a:latin typeface="Arial"/>
+            </a:endParaRPr>
+          </a:p>
+        </p:txBody>
+      </p:sp>
+      <p:sp>
+        <p:nvSpPr>
+          <p:cNvPr id="14" name="PlaceHolder 2"/>
+          <p:cNvSpPr>
+            <a:spLocks noGrp="1"/>
+          </p:cNvSpPr>
+          <p:nvPr>
+            <p:ph type="body"/>
+          </p:nvPr>
+        </p:nvSpPr>
+        <p:spPr>
+          <a:xfrm>
+            <a:off x="471600" y="2637000"/>
+            <a:ext cx="5909400" cy="6279480"/>
+          </a:xfrm>
+          <a:prstGeom prst="rect">
+            <a:avLst/>
+          </a:prstGeom>
+          <a:noFill/>
+          <a:ln w="0">
+            <a:noFill/>
+          </a:ln>
+        </p:spPr>
+        <p:txBody>
+          <a:bodyPr lIns="91440" rIns="91440" tIns="45720" bIns="45720" anchor="t" vert="eaVert">
+            <a:noAutofit/>
+          </a:bodyPr>
+          <a:p>
+            <a:pPr marL="171360" indent="-171360" defTabSz="685800">
+              <a:lnSpc>
+                <a:spcPct val="90000"/>
+              </a:lnSpc>
+              <a:spcBef>
+                <a:spcPts val="751"/>
+              </a:spcBef>
+              <a:buClr>
+                <a:srgbClr val="000000"/>
+              </a:buClr>
+              <a:buFont typeface="Arial"/>
+              <a:buChar char="•"/>
+            </a:pPr>
+            <a:r>
+              <a:rPr lang="de-DE" sz="2100" b="0" u="none" strike="noStrike">
+                <a:solidFill>
+                  <a:schemeClr val="dk1"/>
+                </a:solidFill>
+                <a:effectLst/>
+                <a:uFillTx/>
+                <a:latin typeface="Calibri"/>
+              </a:rPr>
+              <a:t>Mastertextformat bearbeiten</a:t>
+            </a:r>
+            <a:endParaRPr lang="de-DE" sz="2100" b="0" u="none" strike="noStrike">
+              <a:solidFill>
+                <a:srgbClr val="000000"/>
+              </a:solidFill>
+              <a:effectLst/>
+              <a:uFillTx/>
+              <a:latin typeface="Arial"/>
+            </a:endParaRPr>
+          </a:p>
+          <a:p>
+            <a:pPr marL="514440" lvl="1" indent="-171360" defTabSz="685800">
+              <a:lnSpc>
+                <a:spcPct val="90000"/>
+              </a:lnSpc>
+              <a:spcBef>
+                <a:spcPts val="374"/>
+              </a:spcBef>
+              <a:buClr>
+                <a:srgbClr val="000000"/>
+              </a:buClr>
+              <a:buFont typeface="Arial"/>
+              <a:buChar char="•"/>
+            </a:pPr>
+            <a:r>
+              <a:rPr lang="de-DE" sz="1800" b="0" u="none" strike="noStrike">
+                <a:solidFill>
+                  <a:schemeClr val="dk1"/>
+                </a:solidFill>
+                <a:effectLst/>
+                <a:uFillTx/>
+                <a:latin typeface="Calibri"/>
+              </a:rPr>
+              <a:t>Zweite Ebene</a:t>
+            </a:r>
+            <a:endParaRPr lang="de-DE" sz="1800" b="0" u="none" strike="noStrike">
+              <a:solidFill>
+                <a:srgbClr val="000000"/>
+              </a:solidFill>
+              <a:effectLst/>
+              <a:uFillTx/>
+              <a:latin typeface="Arial"/>
+            </a:endParaRPr>
+          </a:p>
+          <a:p>
+            <a:pPr marL="857160" lvl="2" indent="-171360" defTabSz="685800">
+              <a:lnSpc>
+                <a:spcPct val="90000"/>
+              </a:lnSpc>
+              <a:spcBef>
+                <a:spcPts val="374"/>
+              </a:spcBef>
+              <a:buClr>
+                <a:srgbClr val="000000"/>
+              </a:buClr>
+              <a:buFont typeface="Arial"/>
+              <a:buChar char="•"/>
+            </a:pPr>
+            <a:r>
+              <a:rPr lang="de-DE" sz="1500" b="0" u="none" strike="noStrike">
+                <a:solidFill>
+                  <a:schemeClr val="dk1"/>
+                </a:solidFill>
+                <a:effectLst/>
+                <a:uFillTx/>
+                <a:latin typeface="Calibri"/>
+              </a:rPr>
+              <a:t>Dritte Ebene</a:t>
+            </a:r>
+            <a:endParaRPr lang="de-DE" sz="1500" b="0" u="none" strike="noStrike">
+              <a:solidFill>
+                <a:srgbClr val="000000"/>
+              </a:solidFill>
+              <a:effectLst/>
+              <a:uFillTx/>
+              <a:latin typeface="Arial"/>
+            </a:endParaRPr>
+          </a:p>
+          <a:p>
+            <a:pPr marL="1200240" lvl="3" indent="-171360" defTabSz="685800">
+              <a:lnSpc>
+                <a:spcPct val="90000"/>
+              </a:lnSpc>
+              <a:spcBef>
+                <a:spcPts val="374"/>
+              </a:spcBef>
+              <a:buClr>
+                <a:srgbClr val="000000"/>
+              </a:buClr>
+              <a:buFont typeface="Arial"/>
+              <a:buChar char="•"/>
+            </a:pPr>
+            <a:r>
+              <a:rPr lang="de-DE" sz="1350" b="0" u="none" strike="noStrike">
+                <a:solidFill>
+                  <a:schemeClr val="dk1"/>
+                </a:solidFill>
+                <a:effectLst/>
+                <a:uFillTx/>
+                <a:latin typeface="Calibri"/>
+              </a:rPr>
+              <a:t>Vierte Ebene</a:t>
+            </a:r>
+            <a:endParaRPr lang="de-DE" sz="1350" b="0" u="none" strike="noStrike">
+              <a:solidFill>
+                <a:srgbClr val="000000"/>
+              </a:solidFill>
+              <a:effectLst/>
+              <a:uFillTx/>
+              <a:latin typeface="Arial"/>
+            </a:endParaRPr>
+          </a:p>
+          <a:p>
+            <a:pPr marL="1542960" lvl="4" indent="-171360" defTabSz="685800">
+              <a:lnSpc>
+                <a:spcPct val="90000"/>
+              </a:lnSpc>
+              <a:spcBef>
+                <a:spcPts val="374"/>
+              </a:spcBef>
+              <a:buClr>
+                <a:srgbClr val="000000"/>
+              </a:buClr>
+              <a:buFont typeface="Arial"/>
+              <a:buChar char="•"/>
+            </a:pPr>
+            <a:r>
+              <a:rPr lang="de-DE" sz="1350" b="0" u="none" strike="noStrike">
+                <a:solidFill>
+                  <a:schemeClr val="dk1"/>
+                </a:solidFill>
+                <a:effectLst/>
+                <a:uFillTx/>
+                <a:latin typeface="Calibri"/>
+              </a:rPr>
+              <a:t>Fünfte Ebene</a:t>
+            </a:r>
+            <a:endParaRPr lang="de-DE" sz="1350" b="0" u="none" strike="noStrike">
+              <a:solidFill>
+                <a:srgbClr val="000000"/>
+              </a:solidFill>
+              <a:effectLst/>
+              <a:uFillTx/>
+              <a:latin typeface="Arial"/>
+            </a:endParaRPr>
+          </a:p>
+        </p:txBody>
+      </p:sp>
+      <p:sp>
+        <p:nvSpPr>
+          <p:cNvPr id="15" name="PlaceHolder 3"/>
+          <p:cNvSpPr>
+            <a:spLocks noGrp="1"/>
+          </p:cNvSpPr>
+          <p:nvPr>
+            <p:ph type="dt" idx="7"/>
+          </p:nvPr>
+        </p:nvSpPr>
+        <p:spPr>
+          <a:xfrm>
+            <a:off x="471600" y="9181440"/>
+            <a:ext cx="1537200" cy="521640"/>
+          </a:xfrm>
+          <a:prstGeom prst="rect">
+            <a:avLst/>
+          </a:prstGeom>
+          <a:noFill/>
+          <a:ln w="0">
+            <a:noFill/>
+          </a:ln>
+        </p:spPr>
+        <p:txBody>
+          <a:bodyPr lIns="91440" rIns="91440" tIns="45720" bIns="45720" anchor="ctr">
+            <a:noAutofit/>
+          </a:bodyPr>
+          <a:lstStyle>
+            <a:lvl1pPr indent="0" defTabSz="457200">
+              <a:lnSpc>
+                <a:spcPct val="100000"/>
+              </a:lnSpc>
+              <a:buNone/>
+              <a:tabLst>
+                <a:tab algn="l" pos="0"/>
+              </a:tabLst>
+              <a:defRPr lang="de-DE" sz="900" b="0" u="none" strike="noStrike">
+                <a:solidFill>
+                  <a:schemeClr val="dk1">
+                    <a:tint val="75000"/>
+                  </a:schemeClr>
+                </a:solidFill>
+                <a:effectLst/>
+                <a:uFillTx/>
+                <a:latin typeface="Calibri"/>
+              </a:defRPr>
+            </a:lvl1pPr>
+          </a:lstStyle>
+          <a:p>
+            <a:pPr indent="0" defTabSz="457200">
+              <a:lnSpc>
+                <a:spcPct val="100000"/>
+              </a:lnSpc>
+              <a:buNone/>
+              <a:tabLst>
+                <a:tab algn="l" pos="0"/>
+              </a:tabLst>
+            </a:pPr>
+            <a:r>
+              <a:rPr lang="de-DE" sz="900" b="0" u="none" strike="noStrike">
+                <a:solidFill>
+                  <a:schemeClr val="dk1">
+                    <a:tint val="75000"/>
+                  </a:schemeClr>
+                </a:solidFill>
+                <a:effectLst/>
+                <a:uFillTx/>
+                <a:latin typeface="Calibri"/>
+              </a:rPr>
+              <a:t>&lt;Datum/Uhrzeit&gt;</a:t>
+            </a:r>
+            <a:endParaRPr lang="de-DE" sz="900" b="0" u="none" strike="noStrike">
+              <a:solidFill>
+                <a:srgbClr val="000000"/>
+              </a:solidFill>
+              <a:effectLst/>
+              <a:uFillTx/>
+              <a:latin typeface="Times New Roman"/>
+            </a:endParaRPr>
+          </a:p>
+        </p:txBody>
+      </p:sp>
+      <p:sp>
+        <p:nvSpPr>
+          <p:cNvPr id="16" name="PlaceHolder 4"/>
+          <p:cNvSpPr>
+            <a:spLocks noGrp="1"/>
+          </p:cNvSpPr>
+          <p:nvPr>
+            <p:ph type="ftr" idx="8"/>
+          </p:nvPr>
+        </p:nvSpPr>
+        <p:spPr>
+          <a:xfrm>
+            <a:off x="2271600" y="9181440"/>
+            <a:ext cx="2308680" cy="521640"/>
+          </a:xfrm>
+          <a:prstGeom prst="rect">
+            <a:avLst/>
+          </a:prstGeom>
+          <a:noFill/>
+          <a:ln w="0">
+            <a:noFill/>
+          </a:ln>
+        </p:spPr>
+        <p:txBody>
+          <a:bodyPr lIns="91440" rIns="91440" tIns="45720" bIns="45720" anchor="ctr">
+            <a:noAutofit/>
+          </a:bodyPr>
+          <a:lstStyle>
+            <a:lvl1pPr indent="0" algn="ctr">
+              <a:lnSpc>
+                <a:spcPct val="100000"/>
+              </a:lnSpc>
+              <a:buNone/>
+              <a:tabLst>
+                <a:tab algn="l" pos="0"/>
+              </a:tabLst>
+              <a:defRPr lang="de-DE" sz="1400" b="0" u="none" strike="noStrike">
+                <a:solidFill>
+                  <a:srgbClr val="000000"/>
+                </a:solidFill>
+                <a:effectLst/>
+                <a:uFillTx/>
+                <a:latin typeface="Times New Roman"/>
+              </a:defRPr>
+            </a:lvl1pPr>
+          </a:lstStyle>
+          <a:p>
+            <a:pPr indent="0" algn="ctr">
+              <a:lnSpc>
+                <a:spcPct val="100000"/>
+              </a:lnSpc>
+              <a:buNone/>
+              <a:tabLst>
+                <a:tab algn="l" pos="0"/>
+              </a:tabLst>
+            </a:pPr>
+            <a:r>
+              <a:rPr lang="de-DE" sz="1400" b="0" u="none" strike="noStrike">
+                <a:solidFill>
+                  <a:srgbClr val="000000"/>
+                </a:solidFill>
+                <a:effectLst/>
+                <a:uFillTx/>
+                <a:latin typeface="Times New Roman"/>
+              </a:rPr>
+              <a:t>&lt;Fußzeile&gt;</a:t>
+            </a:r>
+            <a:endParaRPr lang="de-DE" sz="1400" b="0" u="none" strike="noStrike">
+              <a:solidFill>
+                <a:srgbClr val="000000"/>
+              </a:solidFill>
+              <a:effectLst/>
+              <a:uFillTx/>
+              <a:latin typeface="Times New Roman"/>
+            </a:endParaRPr>
+          </a:p>
+        </p:txBody>
+      </p:sp>
+      <p:sp>
+        <p:nvSpPr>
+          <p:cNvPr id="17" name="PlaceHolder 5"/>
+          <p:cNvSpPr>
+            <a:spLocks noGrp="1"/>
+          </p:cNvSpPr>
+          <p:nvPr>
+            <p:ph type="sldNum" idx="9"/>
+          </p:nvPr>
+        </p:nvSpPr>
+        <p:spPr>
+          <a:xfrm>
+            <a:off x="4843440" y="9181440"/>
+            <a:ext cx="1537200" cy="521640"/>
+          </a:xfrm>
+          <a:prstGeom prst="rect">
+            <a:avLst/>
+          </a:prstGeom>
+          <a:noFill/>
+          <a:ln w="0">
+            <a:noFill/>
+          </a:ln>
+        </p:spPr>
+        <p:txBody>
+          <a:bodyPr lIns="91440" rIns="91440" tIns="45720" bIns="45720" anchor="ctr">
+            <a:noAutofit/>
+          </a:bodyPr>
+          <a:lstStyle>
+            <a:lvl1pPr indent="0" algn="r" defTabSz="457200">
+              <a:lnSpc>
+                <a:spcPct val="100000"/>
+              </a:lnSpc>
+              <a:buNone/>
+              <a:tabLst>
+                <a:tab algn="l" pos="0"/>
+              </a:tabLst>
+              <a:defRPr lang="de-DE" sz="900" b="0" u="none" strike="noStrike">
+                <a:solidFill>
+                  <a:schemeClr val="dk1">
+                    <a:tint val="75000"/>
+                  </a:schemeClr>
+                </a:solidFill>
+                <a:effectLst/>
+                <a:uFillTx/>
+                <a:latin typeface="Calibri"/>
+              </a:defRPr>
+            </a:lvl1pPr>
+          </a:lstStyle>
+          <a:p>
+            <a:pPr indent="0" algn="r" defTabSz="457200">
+              <a:lnSpc>
+                <a:spcPct val="100000"/>
+              </a:lnSpc>
+              <a:buNone/>
+              <a:tabLst>
+                <a:tab algn="l" pos="0"/>
+              </a:tabLst>
+            </a:pPr>
+            <a:fld id="{37811BCE-7B02-4BA1-99E3-F7A515270A27}" type="slidenum">
+              <a:rPr lang="de-DE" sz="900" b="0" u="none" strike="noStrike">
+                <a:solidFill>
+                  <a:schemeClr val="dk1">
+                    <a:tint val="75000"/>
+                  </a:schemeClr>
+                </a:solidFill>
+                <a:effectLst/>
+                <a:uFillTx/>
+                <a:latin typeface="Calibri"/>
+              </a:rPr>
+              <a:t>&lt;Foliennummer&gt;</a:t>
+            </a:fld>
+            <a:endParaRPr lang="de-DE" sz="900" b="0" u="none" strike="noStrike">
+              <a:solidFill>
+                <a:srgbClr val="000000"/>
+              </a:solidFill>
+              <a:effectLst/>
+              <a:uFillTx/>
+              <a:latin typeface="Times New Roman"/>
+            </a:endParaRPr>
+          </a:p>
+        </p:txBody>
+      </p:sp>
+    </p:spTree>
+  </p:cSld>
+</p:sldLayout>
+</file>
+
+<file path=ppt/slideLayouts/slideLayout4.xml><?xml version="1.0" encoding="utf-8"?>
+<p:sldLayout xmlns:a="http://schemas.openxmlformats.org/drawingml/2006/main" xmlns:p="http://schemas.openxmlformats.org/presentationml/2006/main" xmlns:r="http://schemas.openxmlformats.org/officeDocument/2006/relationships" xmlns:p14="http://schemas.microsoft.com/office/powerpoint/2010/main" xmlns:p15="http://schemas.microsoft.com/office/powerpoint/2012/main" xmlns:mc="http://schemas.openxmlformats.org/markup-compatibility/2006" type="vertTitleAndTx" preserve="1">
+  <p:cSld name="Vertikaler Titel und Text">
+    <p:bg>
+      <p:bgPr>
+        <a:solidFill>
+          <a:srgbClr val="ffffff"/>
+        </a:solidFill>
+      </p:bgPr>
+    </p:bg>
+    <p:spTree>
+      <p:nvGrpSpPr>
+        <p:cNvPr id="1" name=""/>
+        <p:cNvGrpSpPr/>
+        <p:nvPr/>
+      </p:nvGrpSpPr>
+      <p:grpSpPr>
+        <a:xfrm>
+          <a:off x="0" y="0"/>
+          <a:ext cx="0" cy="0"/>
+          <a:chOff x="0" y="0"/>
+          <a:chExt cx="0" cy="0"/>
+        </a:xfrm>
+      </p:grpSpPr>
+      <p:sp>
+        <p:nvSpPr>
+          <p:cNvPr id="18" name="PlaceHolder 1"/>
+          <p:cNvSpPr>
+            <a:spLocks noGrp="1"/>
+          </p:cNvSpPr>
+          <p:nvPr>
+            <p:ph type="title"/>
+          </p:nvPr>
+        </p:nvSpPr>
+        <p:spPr>
+          <a:xfrm>
+            <a:off x="4907880" y="527400"/>
+            <a:ext cx="1473120" cy="8389080"/>
+          </a:xfrm>
+          <a:prstGeom prst="rect">
+            <a:avLst/>
+          </a:prstGeom>
+          <a:noFill/>
+          <a:ln w="0">
+            <a:noFill/>
+          </a:ln>
+        </p:spPr>
+        <p:txBody>
+          <a:bodyPr lIns="91440" rIns="91440" tIns="45720" bIns="45720" anchor="ctr" vert="eaVert">
+            <a:noAutofit/>
+          </a:bodyPr>
+          <a:p>
+            <a:pPr indent="0" defTabSz="685800">
+              <a:lnSpc>
+                <a:spcPct val="90000"/>
+              </a:lnSpc>
+              <a:buNone/>
+              <a:tabLst>
+                <a:tab algn="l" pos="0"/>
+              </a:tabLst>
+            </a:pPr>
+            <a:r>
+              <a:rPr lang="de-DE" sz="3300" b="0" u="none" strike="noStrike">
+                <a:solidFill>
+                  <a:schemeClr val="dk1"/>
+                </a:solidFill>
+                <a:effectLst/>
+                <a:uFillTx/>
+                <a:latin typeface="Calibri Light"/>
+              </a:rPr>
+              <a:t>Mastertitelformat bearbeiten</a:t>
+            </a:r>
+            <a:endParaRPr lang="de-DE" sz="3300" b="0" u="none" strike="noStrike">
+              <a:solidFill>
+                <a:srgbClr val="000000"/>
+              </a:solidFill>
+              <a:effectLst/>
+              <a:uFillTx/>
+              <a:latin typeface="Arial"/>
+            </a:endParaRPr>
+          </a:p>
+        </p:txBody>
+      </p:sp>
+      <p:sp>
+        <p:nvSpPr>
+          <p:cNvPr id="19" name="PlaceHolder 2"/>
+          <p:cNvSpPr>
+            <a:spLocks noGrp="1"/>
+          </p:cNvSpPr>
+          <p:nvPr>
+            <p:ph type="body"/>
+          </p:nvPr>
+        </p:nvSpPr>
+        <p:spPr>
+          <a:xfrm>
+            <a:off x="471600" y="527400"/>
+            <a:ext cx="4344840" cy="8389080"/>
+          </a:xfrm>
+          <a:prstGeom prst="rect">
+            <a:avLst/>
+          </a:prstGeom>
+          <a:noFill/>
+          <a:ln w="0">
+            <a:noFill/>
+          </a:ln>
+        </p:spPr>
+        <p:txBody>
+          <a:bodyPr lIns="91440" rIns="91440" tIns="45720" bIns="45720" anchor="t" vert="eaVert">
+            <a:noAutofit/>
+          </a:bodyPr>
+          <a:p>
+            <a:pPr marL="171360" indent="-171360" defTabSz="685800">
+              <a:lnSpc>
+                <a:spcPct val="90000"/>
+              </a:lnSpc>
+              <a:spcBef>
+                <a:spcPts val="751"/>
+              </a:spcBef>
+              <a:buClr>
+                <a:srgbClr val="000000"/>
+              </a:buClr>
+              <a:buFont typeface="Arial"/>
+              <a:buChar char="•"/>
+            </a:pPr>
+            <a:r>
+              <a:rPr lang="de-DE" sz="2100" b="0" u="none" strike="noStrike">
+                <a:solidFill>
+                  <a:schemeClr val="dk1"/>
+                </a:solidFill>
+                <a:effectLst/>
+                <a:uFillTx/>
+                <a:latin typeface="Calibri"/>
+              </a:rPr>
+              <a:t>Mastertextformat bearbeiten</a:t>
+            </a:r>
+            <a:endParaRPr lang="de-DE" sz="2100" b="0" u="none" strike="noStrike">
+              <a:solidFill>
+                <a:srgbClr val="000000"/>
+              </a:solidFill>
+              <a:effectLst/>
+              <a:uFillTx/>
+              <a:latin typeface="Arial"/>
+            </a:endParaRPr>
+          </a:p>
+          <a:p>
+            <a:pPr marL="514440" lvl="1" indent="-171360" defTabSz="685800">
+              <a:lnSpc>
+                <a:spcPct val="90000"/>
+              </a:lnSpc>
+              <a:spcBef>
+                <a:spcPts val="374"/>
+              </a:spcBef>
+              <a:buClr>
+                <a:srgbClr val="000000"/>
+              </a:buClr>
+              <a:buFont typeface="Arial"/>
+              <a:buChar char="•"/>
+            </a:pPr>
+            <a:r>
+              <a:rPr lang="de-DE" sz="1800" b="0" u="none" strike="noStrike">
+                <a:solidFill>
+                  <a:schemeClr val="dk1"/>
+                </a:solidFill>
+                <a:effectLst/>
+                <a:uFillTx/>
+                <a:latin typeface="Calibri"/>
+              </a:rPr>
+              <a:t>Zweite Ebene</a:t>
+            </a:r>
+            <a:endParaRPr lang="de-DE" sz="1800" b="0" u="none" strike="noStrike">
+              <a:solidFill>
+                <a:srgbClr val="000000"/>
+              </a:solidFill>
+              <a:effectLst/>
+              <a:uFillTx/>
+              <a:latin typeface="Arial"/>
+            </a:endParaRPr>
+          </a:p>
+          <a:p>
+            <a:pPr marL="857160" lvl="2" indent="-171360" defTabSz="685800">
+              <a:lnSpc>
+                <a:spcPct val="90000"/>
+              </a:lnSpc>
+              <a:spcBef>
+                <a:spcPts val="374"/>
+              </a:spcBef>
+              <a:buClr>
+                <a:srgbClr val="000000"/>
+              </a:buClr>
+              <a:buFont typeface="Arial"/>
+              <a:buChar char="•"/>
+            </a:pPr>
+            <a:r>
+              <a:rPr lang="de-DE" sz="1500" b="0" u="none" strike="noStrike">
+                <a:solidFill>
+                  <a:schemeClr val="dk1"/>
+                </a:solidFill>
+                <a:effectLst/>
+                <a:uFillTx/>
+                <a:latin typeface="Calibri"/>
+              </a:rPr>
+              <a:t>Dritte Ebene</a:t>
+            </a:r>
+            <a:endParaRPr lang="de-DE" sz="1500" b="0" u="none" strike="noStrike">
+              <a:solidFill>
+                <a:srgbClr val="000000"/>
+              </a:solidFill>
+              <a:effectLst/>
+              <a:uFillTx/>
+              <a:latin typeface="Arial"/>
+            </a:endParaRPr>
+          </a:p>
+          <a:p>
+            <a:pPr marL="1200240" lvl="3" indent="-171360" defTabSz="685800">
+              <a:lnSpc>
+                <a:spcPct val="90000"/>
+              </a:lnSpc>
+              <a:spcBef>
+                <a:spcPts val="374"/>
+              </a:spcBef>
+              <a:buClr>
+                <a:srgbClr val="000000"/>
+              </a:buClr>
+              <a:buFont typeface="Arial"/>
+              <a:buChar char="•"/>
+            </a:pPr>
+            <a:r>
+              <a:rPr lang="de-DE" sz="1350" b="0" u="none" strike="noStrike">
+                <a:solidFill>
+                  <a:schemeClr val="dk1"/>
+                </a:solidFill>
+                <a:effectLst/>
+                <a:uFillTx/>
+                <a:latin typeface="Calibri"/>
+              </a:rPr>
+              <a:t>Vierte Ebene</a:t>
+            </a:r>
+            <a:endParaRPr lang="de-DE" sz="1350" b="0" u="none" strike="noStrike">
+              <a:solidFill>
+                <a:srgbClr val="000000"/>
+              </a:solidFill>
+              <a:effectLst/>
+              <a:uFillTx/>
+              <a:latin typeface="Arial"/>
+            </a:endParaRPr>
+          </a:p>
+          <a:p>
+            <a:pPr marL="1542960" lvl="4" indent="-171360" defTabSz="685800">
+              <a:lnSpc>
+                <a:spcPct val="90000"/>
+              </a:lnSpc>
+              <a:spcBef>
+                <a:spcPts val="374"/>
+              </a:spcBef>
+              <a:buClr>
+                <a:srgbClr val="000000"/>
+              </a:buClr>
+              <a:buFont typeface="Arial"/>
+              <a:buChar char="•"/>
+            </a:pPr>
+            <a:r>
+              <a:rPr lang="de-DE" sz="1350" b="0" u="none" strike="noStrike">
+                <a:solidFill>
+                  <a:schemeClr val="dk1"/>
+                </a:solidFill>
+                <a:effectLst/>
+                <a:uFillTx/>
+                <a:latin typeface="Calibri"/>
+              </a:rPr>
+              <a:t>Fünfte Ebene</a:t>
+            </a:r>
+            <a:endParaRPr lang="de-DE" sz="1350" b="0" u="none" strike="noStrike">
+              <a:solidFill>
+                <a:srgbClr val="000000"/>
+              </a:solidFill>
+              <a:effectLst/>
+              <a:uFillTx/>
+              <a:latin typeface="Arial"/>
+            </a:endParaRPr>
+          </a:p>
+        </p:txBody>
+      </p:sp>
+      <p:sp>
+        <p:nvSpPr>
+          <p:cNvPr id="20" name="PlaceHolder 3"/>
+          <p:cNvSpPr>
+            <a:spLocks noGrp="1"/>
+          </p:cNvSpPr>
+          <p:nvPr>
+            <p:ph type="dt" idx="10"/>
+          </p:nvPr>
+        </p:nvSpPr>
+        <p:spPr>
+          <a:xfrm>
+            <a:off x="471600" y="9181440"/>
+            <a:ext cx="1537200" cy="521640"/>
+          </a:xfrm>
+          <a:prstGeom prst="rect">
+            <a:avLst/>
+          </a:prstGeom>
+          <a:noFill/>
+          <a:ln w="0">
+            <a:noFill/>
+          </a:ln>
+        </p:spPr>
+        <p:txBody>
+          <a:bodyPr lIns="91440" rIns="91440" tIns="45720" bIns="45720" anchor="ctr">
+            <a:noAutofit/>
+          </a:bodyPr>
+          <a:lstStyle>
+            <a:lvl1pPr indent="0" defTabSz="457200">
+              <a:lnSpc>
+                <a:spcPct val="100000"/>
+              </a:lnSpc>
+              <a:buNone/>
+              <a:tabLst>
+                <a:tab algn="l" pos="0"/>
+              </a:tabLst>
+              <a:defRPr lang="de-DE" sz="900" b="0" u="none" strike="noStrike">
+                <a:solidFill>
+                  <a:schemeClr val="dk1">
+                    <a:tint val="75000"/>
+                  </a:schemeClr>
+                </a:solidFill>
+                <a:effectLst/>
+                <a:uFillTx/>
+                <a:latin typeface="Calibri"/>
+              </a:defRPr>
+            </a:lvl1pPr>
+          </a:lstStyle>
+          <a:p>
+            <a:pPr indent="0" defTabSz="457200">
+              <a:lnSpc>
+                <a:spcPct val="100000"/>
+              </a:lnSpc>
+              <a:buNone/>
+              <a:tabLst>
+                <a:tab algn="l" pos="0"/>
+              </a:tabLst>
+            </a:pPr>
+            <a:r>
+              <a:rPr lang="de-DE" sz="900" b="0" u="none" strike="noStrike">
+                <a:solidFill>
+                  <a:schemeClr val="dk1">
+                    <a:tint val="75000"/>
+                  </a:schemeClr>
+                </a:solidFill>
+                <a:effectLst/>
+                <a:uFillTx/>
+                <a:latin typeface="Calibri"/>
+              </a:rPr>
+              <a:t>&lt;Datum/Uhrzeit&gt;</a:t>
+            </a:r>
+            <a:endParaRPr lang="de-DE" sz="900" b="0" u="none" strike="noStrike">
+              <a:solidFill>
+                <a:srgbClr val="000000"/>
+              </a:solidFill>
+              <a:effectLst/>
+              <a:uFillTx/>
+              <a:latin typeface="Times New Roman"/>
+            </a:endParaRPr>
+          </a:p>
+        </p:txBody>
+      </p:sp>
+      <p:sp>
+        <p:nvSpPr>
+          <p:cNvPr id="21" name="PlaceHolder 4"/>
+          <p:cNvSpPr>
+            <a:spLocks noGrp="1"/>
+          </p:cNvSpPr>
+          <p:nvPr>
+            <p:ph type="ftr" idx="11"/>
+          </p:nvPr>
+        </p:nvSpPr>
+        <p:spPr>
+          <a:xfrm>
+            <a:off x="2271600" y="9181440"/>
+            <a:ext cx="2308680" cy="521640"/>
+          </a:xfrm>
+          <a:prstGeom prst="rect">
+            <a:avLst/>
+          </a:prstGeom>
+          <a:noFill/>
+          <a:ln w="0">
+            <a:noFill/>
+          </a:ln>
+        </p:spPr>
+        <p:txBody>
+          <a:bodyPr lIns="91440" rIns="91440" tIns="45720" bIns="45720" anchor="ctr">
+            <a:noAutofit/>
+          </a:bodyPr>
+          <a:lstStyle>
+            <a:lvl1pPr indent="0" algn="ctr">
+              <a:lnSpc>
+                <a:spcPct val="100000"/>
+              </a:lnSpc>
+              <a:buNone/>
+              <a:tabLst>
+                <a:tab algn="l" pos="0"/>
+              </a:tabLst>
+              <a:defRPr lang="de-DE" sz="1400" b="0" u="none" strike="noStrike">
+                <a:solidFill>
+                  <a:srgbClr val="000000"/>
+                </a:solidFill>
+                <a:effectLst/>
+                <a:uFillTx/>
+                <a:latin typeface="Times New Roman"/>
+              </a:defRPr>
+            </a:lvl1pPr>
+          </a:lstStyle>
+          <a:p>
+            <a:pPr indent="0" algn="ctr">
+              <a:lnSpc>
+                <a:spcPct val="100000"/>
+              </a:lnSpc>
+              <a:buNone/>
+              <a:tabLst>
+                <a:tab algn="l" pos="0"/>
+              </a:tabLst>
+            </a:pPr>
+            <a:r>
+              <a:rPr lang="de-DE" sz="1400" b="0" u="none" strike="noStrike">
+                <a:solidFill>
+                  <a:srgbClr val="000000"/>
+                </a:solidFill>
+                <a:effectLst/>
+                <a:uFillTx/>
+                <a:latin typeface="Times New Roman"/>
+              </a:rPr>
+              <a:t>&lt;Fußzeile&gt;</a:t>
+            </a:r>
+            <a:endParaRPr lang="de-DE" sz="1400" b="0" u="none" strike="noStrike">
+              <a:solidFill>
+                <a:srgbClr val="000000"/>
+              </a:solidFill>
+              <a:effectLst/>
+              <a:uFillTx/>
+              <a:latin typeface="Times New Roman"/>
+            </a:endParaRPr>
+          </a:p>
+        </p:txBody>
+      </p:sp>
+      <p:sp>
+        <p:nvSpPr>
+          <p:cNvPr id="22" name="PlaceHolder 5"/>
+          <p:cNvSpPr>
+            <a:spLocks noGrp="1"/>
+          </p:cNvSpPr>
+          <p:nvPr>
+            <p:ph type="sldNum" idx="12"/>
+          </p:nvPr>
+        </p:nvSpPr>
+        <p:spPr>
+          <a:xfrm>
+            <a:off x="4843440" y="9181440"/>
+            <a:ext cx="1537200" cy="521640"/>
+          </a:xfrm>
+          <a:prstGeom prst="rect">
+            <a:avLst/>
+          </a:prstGeom>
+          <a:noFill/>
+          <a:ln w="0">
+            <a:noFill/>
+          </a:ln>
+        </p:spPr>
+        <p:txBody>
+          <a:bodyPr lIns="91440" rIns="91440" tIns="45720" bIns="45720" anchor="ctr">
+            <a:noAutofit/>
+          </a:bodyPr>
+          <a:lstStyle>
+            <a:lvl1pPr indent="0" algn="r" defTabSz="457200">
+              <a:lnSpc>
+                <a:spcPct val="100000"/>
+              </a:lnSpc>
+              <a:buNone/>
+              <a:tabLst>
+                <a:tab algn="l" pos="0"/>
+              </a:tabLst>
+              <a:defRPr lang="de-DE" sz="900" b="0" u="none" strike="noStrike">
+                <a:solidFill>
+                  <a:schemeClr val="dk1">
+                    <a:tint val="75000"/>
+                  </a:schemeClr>
+                </a:solidFill>
+                <a:effectLst/>
+                <a:uFillTx/>
+                <a:latin typeface="Calibri"/>
+              </a:defRPr>
+            </a:lvl1pPr>
+          </a:lstStyle>
+          <a:p>
+            <a:pPr indent="0" algn="r" defTabSz="457200">
+              <a:lnSpc>
+                <a:spcPct val="100000"/>
+              </a:lnSpc>
+              <a:buNone/>
+              <a:tabLst>
+                <a:tab algn="l" pos="0"/>
+              </a:tabLst>
+            </a:pPr>
+            <a:fld id="{996E7A8F-BC43-41E5-B2B9-C0596293D45E}" type="slidenum">
+              <a:rPr lang="de-DE" sz="900" b="0" u="none" strike="noStrike">
+                <a:solidFill>
+                  <a:schemeClr val="dk1">
+                    <a:tint val="75000"/>
+                  </a:schemeClr>
+                </a:solidFill>
+                <a:effectLst/>
+                <a:uFillTx/>
+                <a:latin typeface="Calibri"/>
+              </a:rPr>
+              <a:t>&lt;Foliennummer&gt;</a:t>
+            </a:fld>
+            <a:endParaRPr lang="de-DE" sz="900" b="0" u="none" strike="noStrike">
+              <a:solidFill>
+                <a:srgbClr val="000000"/>
+              </a:solidFill>
+              <a:effectLst/>
+              <a:uFillTx/>
+              <a:latin typeface="Times New Roman"/>
+            </a:endParaRPr>
+          </a:p>
+        </p:txBody>
+      </p:sp>
+    </p:spTree>
+  </p:cSld>
+</p:sldLayout>
+</file>
+
+<file path=ppt/slideLayouts/slideLayout5.xml><?xml version="1.0" encoding="utf-8"?>
+<p:sldLayout xmlns:a="http://schemas.openxmlformats.org/drawingml/2006/main" xmlns:p="http://schemas.openxmlformats.org/presentationml/2006/main" xmlns:r="http://schemas.openxmlformats.org/officeDocument/2006/relationships" xmlns:p14="http://schemas.microsoft.com/office/powerpoint/2010/main" xmlns:p15="http://schemas.microsoft.com/office/powerpoint/2012/main" xmlns:mc="http://schemas.openxmlformats.org/markup-compatibility/2006" type="obj" preserve="1">
+  <p:cSld name="Titel und Inhalt">
+    <p:bg>
+      <p:bgPr>
+        <a:solidFill>
+          <a:srgbClr val="ffffff"/>
+        </a:solidFill>
+      </p:bgPr>
+    </p:bg>
+    <p:spTree>
+      <p:nvGrpSpPr>
+        <p:cNvPr id="1" name=""/>
+        <p:cNvGrpSpPr/>
+        <p:nvPr/>
+      </p:nvGrpSpPr>
+      <p:grpSpPr>
+        <a:xfrm>
+          <a:off x="0" y="0"/>
+          <a:ext cx="0" cy="0"/>
+          <a:chOff x="0" y="0"/>
+          <a:chExt cx="0" cy="0"/>
+        </a:xfrm>
+      </p:grpSpPr>
+      <p:sp>
+        <p:nvSpPr>
+          <p:cNvPr id="23" name="PlaceHolder 1"/>
+          <p:cNvSpPr>
+            <a:spLocks noGrp="1"/>
+          </p:cNvSpPr>
+          <p:nvPr>
+            <p:ph type="title"/>
+          </p:nvPr>
+        </p:nvSpPr>
+        <p:spPr>
+          <a:xfrm>
+            <a:off x="471600" y="527400"/>
+            <a:ext cx="5909400" cy="1909080"/>
+          </a:xfrm>
+          <a:prstGeom prst="rect">
+            <a:avLst/>
+          </a:prstGeom>
+          <a:noFill/>
+          <a:ln w="0">
+            <a:noFill/>
+          </a:ln>
+        </p:spPr>
+        <p:txBody>
+          <a:bodyPr lIns="91440" rIns="91440" tIns="45720" bIns="45720" anchor="ctr">
+            <a:noAutofit/>
+          </a:bodyPr>
+          <a:p>
+            <a:pPr indent="0" defTabSz="685800">
+              <a:lnSpc>
+                <a:spcPct val="90000"/>
+              </a:lnSpc>
+              <a:buNone/>
+              <a:tabLst>
+                <a:tab algn="l" pos="0"/>
+              </a:tabLst>
+            </a:pPr>
+            <a:r>
+              <a:rPr lang="de-DE" sz="3300" b="0" u="none" strike="noStrike">
+                <a:solidFill>
+                  <a:schemeClr val="dk1"/>
+                </a:solidFill>
+                <a:effectLst/>
+                <a:uFillTx/>
+                <a:latin typeface="Calibri Light"/>
+              </a:rPr>
+              <a:t>Mastertitelformat bearbeiten</a:t>
+            </a:r>
+            <a:endParaRPr lang="de-DE" sz="3300" b="0" u="none" strike="noStrike">
+              <a:solidFill>
+                <a:srgbClr val="000000"/>
+              </a:solidFill>
+              <a:effectLst/>
+              <a:uFillTx/>
+              <a:latin typeface="Arial"/>
+            </a:endParaRPr>
+          </a:p>
+        </p:txBody>
+      </p:sp>
+      <p:sp>
+        <p:nvSpPr>
+          <p:cNvPr id="24" name="PlaceHolder 2"/>
+          <p:cNvSpPr>
+            <a:spLocks noGrp="1"/>
+          </p:cNvSpPr>
+          <p:nvPr>
+            <p:ph type="body"/>
+          </p:nvPr>
+        </p:nvSpPr>
+        <p:spPr>
+          <a:xfrm>
+            <a:off x="471600" y="2637000"/>
+            <a:ext cx="5909400" cy="6279480"/>
+          </a:xfrm>
+          <a:prstGeom prst="rect">
+            <a:avLst/>
+          </a:prstGeom>
+          <a:noFill/>
+          <a:ln w="0">
+            <a:noFill/>
+          </a:ln>
+        </p:spPr>
+        <p:txBody>
+          <a:bodyPr lIns="91440" rIns="91440" tIns="45720" bIns="45720" anchor="t">
+            <a:noAutofit/>
+          </a:bodyPr>
+          <a:p>
+            <a:pPr marL="171360" indent="-171360" defTabSz="685800">
+              <a:lnSpc>
+                <a:spcPct val="90000"/>
+              </a:lnSpc>
+              <a:spcBef>
+                <a:spcPts val="751"/>
+              </a:spcBef>
+              <a:buClr>
+                <a:srgbClr val="000000"/>
+              </a:buClr>
+              <a:buFont typeface="Arial"/>
+              <a:buChar char="•"/>
+            </a:pPr>
+            <a:r>
+              <a:rPr lang="de-DE" sz="2100" b="0" u="none" strike="noStrike">
+                <a:solidFill>
+                  <a:schemeClr val="dk1"/>
+                </a:solidFill>
+                <a:effectLst/>
+                <a:uFillTx/>
+                <a:latin typeface="Calibri"/>
+              </a:rPr>
+              <a:t>Mastertextformat bearbeiten</a:t>
+            </a:r>
+            <a:endParaRPr lang="de-DE" sz="2100" b="0" u="none" strike="noStrike">
+              <a:solidFill>
+                <a:srgbClr val="000000"/>
+              </a:solidFill>
+              <a:effectLst/>
+              <a:uFillTx/>
+              <a:latin typeface="Arial"/>
+            </a:endParaRPr>
+          </a:p>
+          <a:p>
+            <a:pPr marL="514440" lvl="1" indent="-171360" defTabSz="685800">
+              <a:lnSpc>
+                <a:spcPct val="90000"/>
+              </a:lnSpc>
+              <a:spcBef>
+                <a:spcPts val="374"/>
+              </a:spcBef>
+              <a:buClr>
+                <a:srgbClr val="000000"/>
+              </a:buClr>
+              <a:buFont typeface="Arial"/>
+              <a:buChar char="•"/>
+            </a:pPr>
+            <a:r>
+              <a:rPr lang="de-DE" sz="1800" b="0" u="none" strike="noStrike">
+                <a:solidFill>
+                  <a:schemeClr val="dk1"/>
+                </a:solidFill>
+                <a:effectLst/>
+                <a:uFillTx/>
+                <a:latin typeface="Calibri"/>
+              </a:rPr>
+              <a:t>Zweite Ebene</a:t>
+            </a:r>
+            <a:endParaRPr lang="de-DE" sz="1800" b="0" u="none" strike="noStrike">
+              <a:solidFill>
+                <a:srgbClr val="000000"/>
+              </a:solidFill>
+              <a:effectLst/>
+              <a:uFillTx/>
+              <a:latin typeface="Arial"/>
+            </a:endParaRPr>
+          </a:p>
+          <a:p>
+            <a:pPr marL="857160" lvl="2" indent="-171360" defTabSz="685800">
+              <a:lnSpc>
+                <a:spcPct val="90000"/>
+              </a:lnSpc>
+              <a:spcBef>
+                <a:spcPts val="374"/>
+              </a:spcBef>
+              <a:buClr>
+                <a:srgbClr val="000000"/>
+              </a:buClr>
+              <a:buFont typeface="Arial"/>
+              <a:buChar char="•"/>
+            </a:pPr>
+            <a:r>
+              <a:rPr lang="de-DE" sz="1500" b="0" u="none" strike="noStrike">
+                <a:solidFill>
+                  <a:schemeClr val="dk1"/>
+                </a:solidFill>
+                <a:effectLst/>
+                <a:uFillTx/>
+                <a:latin typeface="Calibri"/>
+              </a:rPr>
+              <a:t>Dritte Ebene</a:t>
+            </a:r>
+            <a:endParaRPr lang="de-DE" sz="1500" b="0" u="none" strike="noStrike">
+              <a:solidFill>
+                <a:srgbClr val="000000"/>
+              </a:solidFill>
+              <a:effectLst/>
+              <a:uFillTx/>
+              <a:latin typeface="Arial"/>
+            </a:endParaRPr>
+          </a:p>
+          <a:p>
+            <a:pPr marL="1200240" lvl="3" indent="-171360" defTabSz="685800">
+              <a:lnSpc>
+                <a:spcPct val="90000"/>
+              </a:lnSpc>
+              <a:spcBef>
+                <a:spcPts val="374"/>
+              </a:spcBef>
+              <a:buClr>
+                <a:srgbClr val="000000"/>
+              </a:buClr>
+              <a:buFont typeface="Arial"/>
+              <a:buChar char="•"/>
+            </a:pPr>
+            <a:r>
+              <a:rPr lang="de-DE" sz="1350" b="0" u="none" strike="noStrike">
+                <a:solidFill>
+                  <a:schemeClr val="dk1"/>
+                </a:solidFill>
+                <a:effectLst/>
+                <a:uFillTx/>
+                <a:latin typeface="Calibri"/>
+              </a:rPr>
+              <a:t>Vierte Ebene</a:t>
+            </a:r>
+            <a:endParaRPr lang="de-DE" sz="1350" b="0" u="none" strike="noStrike">
+              <a:solidFill>
+                <a:srgbClr val="000000"/>
+              </a:solidFill>
+              <a:effectLst/>
+              <a:uFillTx/>
+              <a:latin typeface="Arial"/>
+            </a:endParaRPr>
+          </a:p>
+          <a:p>
+            <a:pPr marL="1542960" lvl="4" indent="-171360" defTabSz="685800">
+              <a:lnSpc>
+                <a:spcPct val="90000"/>
+              </a:lnSpc>
+              <a:spcBef>
+                <a:spcPts val="374"/>
+              </a:spcBef>
+              <a:buClr>
+                <a:srgbClr val="000000"/>
+              </a:buClr>
+              <a:buFont typeface="Arial"/>
+              <a:buChar char="•"/>
+            </a:pPr>
+            <a:r>
+              <a:rPr lang="de-DE" sz="1350" b="0" u="none" strike="noStrike">
+                <a:solidFill>
+                  <a:schemeClr val="dk1"/>
+                </a:solidFill>
+                <a:effectLst/>
+                <a:uFillTx/>
+                <a:latin typeface="Calibri"/>
+              </a:rPr>
+              <a:t>Fünfte Ebene</a:t>
+            </a:r>
+            <a:endParaRPr lang="de-DE" sz="1350" b="0" u="none" strike="noStrike">
+              <a:solidFill>
+                <a:srgbClr val="000000"/>
+              </a:solidFill>
+              <a:effectLst/>
+              <a:uFillTx/>
+              <a:latin typeface="Arial"/>
+            </a:endParaRPr>
+          </a:p>
+        </p:txBody>
+      </p:sp>
+      <p:sp>
+        <p:nvSpPr>
+          <p:cNvPr id="25" name="PlaceHolder 3"/>
+          <p:cNvSpPr>
+            <a:spLocks noGrp="1"/>
+          </p:cNvSpPr>
+          <p:nvPr>
+            <p:ph type="dt" idx="13"/>
+          </p:nvPr>
+        </p:nvSpPr>
+        <p:spPr>
+          <a:xfrm>
+            <a:off x="471600" y="9181440"/>
+            <a:ext cx="1537200" cy="521640"/>
+          </a:xfrm>
+          <a:prstGeom prst="rect">
+            <a:avLst/>
+          </a:prstGeom>
+          <a:noFill/>
+          <a:ln w="0">
+            <a:noFill/>
+          </a:ln>
+        </p:spPr>
+        <p:txBody>
+          <a:bodyPr lIns="91440" rIns="91440" tIns="45720" bIns="45720" anchor="ctr">
+            <a:noAutofit/>
+          </a:bodyPr>
+          <a:lstStyle>
+            <a:lvl1pPr indent="0" defTabSz="457200">
+              <a:lnSpc>
+                <a:spcPct val="100000"/>
+              </a:lnSpc>
+              <a:buNone/>
+              <a:tabLst>
+                <a:tab algn="l" pos="0"/>
+              </a:tabLst>
+              <a:defRPr lang="de-DE" sz="900" b="0" u="none" strike="noStrike">
+                <a:solidFill>
+                  <a:schemeClr val="dk1">
+                    <a:tint val="75000"/>
+                  </a:schemeClr>
+                </a:solidFill>
+                <a:effectLst/>
+                <a:uFillTx/>
+                <a:latin typeface="Calibri"/>
+              </a:defRPr>
+            </a:lvl1pPr>
+          </a:lstStyle>
+          <a:p>
+            <a:pPr indent="0" defTabSz="457200">
+              <a:lnSpc>
+                <a:spcPct val="100000"/>
+              </a:lnSpc>
+              <a:buNone/>
+              <a:tabLst>
+                <a:tab algn="l" pos="0"/>
+              </a:tabLst>
+            </a:pPr>
+            <a:r>
+              <a:rPr lang="de-DE" sz="900" b="0" u="none" strike="noStrike">
+                <a:solidFill>
+                  <a:schemeClr val="dk1">
+                    <a:tint val="75000"/>
+                  </a:schemeClr>
+                </a:solidFill>
+                <a:effectLst/>
+                <a:uFillTx/>
+                <a:latin typeface="Calibri"/>
+              </a:rPr>
+              <a:t>&lt;Datum/Uhrzeit&gt;</a:t>
+            </a:r>
+            <a:endParaRPr lang="de-DE" sz="900" b="0" u="none" strike="noStrike">
+              <a:solidFill>
+                <a:srgbClr val="000000"/>
+              </a:solidFill>
+              <a:effectLst/>
+              <a:uFillTx/>
+              <a:latin typeface="Times New Roman"/>
+            </a:endParaRPr>
+          </a:p>
+        </p:txBody>
+      </p:sp>
+      <p:sp>
+        <p:nvSpPr>
+          <p:cNvPr id="26" name="PlaceHolder 4"/>
+          <p:cNvSpPr>
+            <a:spLocks noGrp="1"/>
+          </p:cNvSpPr>
+          <p:nvPr>
+            <p:ph type="ftr" idx="14"/>
+          </p:nvPr>
+        </p:nvSpPr>
+        <p:spPr>
+          <a:xfrm>
+            <a:off x="2271600" y="9181440"/>
+            <a:ext cx="2308680" cy="521640"/>
+          </a:xfrm>
+          <a:prstGeom prst="rect">
+            <a:avLst/>
+          </a:prstGeom>
+          <a:noFill/>
+          <a:ln w="0">
+            <a:noFill/>
+          </a:ln>
+        </p:spPr>
+        <p:txBody>
+          <a:bodyPr lIns="91440" rIns="91440" tIns="45720" bIns="45720" anchor="ctr">
+            <a:noAutofit/>
+          </a:bodyPr>
+          <a:lstStyle>
+            <a:lvl1pPr indent="0" algn="ctr">
+              <a:lnSpc>
+                <a:spcPct val="100000"/>
+              </a:lnSpc>
+              <a:buNone/>
+              <a:tabLst>
+                <a:tab algn="l" pos="0"/>
+              </a:tabLst>
+              <a:defRPr lang="de-DE" sz="1400" b="0" u="none" strike="noStrike">
+                <a:solidFill>
+                  <a:srgbClr val="000000"/>
+                </a:solidFill>
+                <a:effectLst/>
+                <a:uFillTx/>
+                <a:latin typeface="Times New Roman"/>
+              </a:defRPr>
+            </a:lvl1pPr>
+          </a:lstStyle>
+          <a:p>
+            <a:pPr indent="0" algn="ctr">
+              <a:lnSpc>
+                <a:spcPct val="100000"/>
+              </a:lnSpc>
+              <a:buNone/>
+              <a:tabLst>
+                <a:tab algn="l" pos="0"/>
+              </a:tabLst>
+            </a:pPr>
+            <a:r>
+              <a:rPr lang="de-DE" sz="1400" b="0" u="none" strike="noStrike">
+                <a:solidFill>
+                  <a:srgbClr val="000000"/>
+                </a:solidFill>
+                <a:effectLst/>
+                <a:uFillTx/>
+                <a:latin typeface="Times New Roman"/>
+              </a:rPr>
+              <a:t>&lt;Fußzeile&gt;</a:t>
+            </a:r>
+            <a:endParaRPr lang="de-DE" sz="1400" b="0" u="none" strike="noStrike">
+              <a:solidFill>
+                <a:srgbClr val="000000"/>
+              </a:solidFill>
+              <a:effectLst/>
+              <a:uFillTx/>
+              <a:latin typeface="Times New Roman"/>
+            </a:endParaRPr>
+          </a:p>
+        </p:txBody>
+      </p:sp>
+      <p:sp>
+        <p:nvSpPr>
+          <p:cNvPr id="27" name="PlaceHolder 5"/>
+          <p:cNvSpPr>
+            <a:spLocks noGrp="1"/>
+          </p:cNvSpPr>
+          <p:nvPr>
+            <p:ph type="sldNum" idx="15"/>
+          </p:nvPr>
+        </p:nvSpPr>
+        <p:spPr>
+          <a:xfrm>
+            <a:off x="4843440" y="9181440"/>
+            <a:ext cx="1537200" cy="521640"/>
+          </a:xfrm>
+          <a:prstGeom prst="rect">
+            <a:avLst/>
+          </a:prstGeom>
+          <a:noFill/>
+          <a:ln w="0">
+            <a:noFill/>
+          </a:ln>
+        </p:spPr>
+        <p:txBody>
+          <a:bodyPr lIns="91440" rIns="91440" tIns="45720" bIns="45720" anchor="ctr">
+            <a:noAutofit/>
+          </a:bodyPr>
+          <a:lstStyle>
+            <a:lvl1pPr indent="0" algn="r" defTabSz="457200">
+              <a:lnSpc>
+                <a:spcPct val="100000"/>
+              </a:lnSpc>
+              <a:buNone/>
+              <a:tabLst>
+                <a:tab algn="l" pos="0"/>
+              </a:tabLst>
+              <a:defRPr lang="de-DE" sz="900" b="0" u="none" strike="noStrike">
+                <a:solidFill>
+                  <a:schemeClr val="dk1">
+                    <a:tint val="75000"/>
+                  </a:schemeClr>
+                </a:solidFill>
+                <a:effectLst/>
+                <a:uFillTx/>
+                <a:latin typeface="Calibri"/>
+              </a:defRPr>
+            </a:lvl1pPr>
+          </a:lstStyle>
+          <a:p>
+            <a:pPr indent="0" algn="r" defTabSz="457200">
+              <a:lnSpc>
+                <a:spcPct val="100000"/>
+              </a:lnSpc>
+              <a:buNone/>
+              <a:tabLst>
+                <a:tab algn="l" pos="0"/>
+              </a:tabLst>
+            </a:pPr>
+            <a:fld id="{E35A834C-6951-4B0D-9F20-AD4646F877CF}" type="slidenum">
+              <a:rPr lang="de-DE" sz="900" b="0" u="none" strike="noStrike">
+                <a:solidFill>
+                  <a:schemeClr val="dk1">
+                    <a:tint val="75000"/>
+                  </a:schemeClr>
+                </a:solidFill>
+                <a:effectLst/>
+                <a:uFillTx/>
+                <a:latin typeface="Calibri"/>
+              </a:rPr>
+              <a:t>&lt;Foliennummer&gt;</a:t>
+            </a:fld>
+            <a:endParaRPr lang="de-DE" sz="900" b="0" u="none" strike="noStrike">
+              <a:solidFill>
+                <a:srgbClr val="000000"/>
+              </a:solidFill>
+              <a:effectLst/>
+              <a:uFillTx/>
+              <a:latin typeface="Times New Roman"/>
+            </a:endParaRPr>
+          </a:p>
+        </p:txBody>
+      </p:sp>
+    </p:spTree>
+  </p:cSld>
+</p:sldLayout>
+</file>
+
+<file path=ppt/slideLayouts/slideLayout6.xml><?xml version="1.0" encoding="utf-8"?>
+<p:sldLayout xmlns:a="http://schemas.openxmlformats.org/drawingml/2006/main" xmlns:p="http://schemas.openxmlformats.org/presentationml/2006/main" xmlns:r="http://schemas.openxmlformats.org/officeDocument/2006/relationships" xmlns:p14="http://schemas.microsoft.com/office/powerpoint/2010/main" xmlns:p15="http://schemas.microsoft.com/office/powerpoint/2012/main" xmlns:mc="http://schemas.openxmlformats.org/markup-compatibility/2006" type="blank" preserve="1">
+  <p:cSld name="Abschnitts-&#10;überschrift">
+    <p:bg>
+      <p:bgPr>
+        <a:solidFill>
+          <a:srgbClr val="ffffff"/>
+        </a:solidFill>
+      </p:bgPr>
+    </p:bg>
+    <p:spTree>
+      <p:nvGrpSpPr>
+        <p:cNvPr id="1" name=""/>
+        <p:cNvGrpSpPr/>
+        <p:nvPr/>
+      </p:nvGrpSpPr>
+      <p:grpSpPr>
+        <a:xfrm>
+          <a:off x="0" y="0"/>
+          <a:ext cx="0" cy="0"/>
+          <a:chOff x="0" y="0"/>
+          <a:chExt cx="0" cy="0"/>
+        </a:xfrm>
+      </p:grpSpPr>
+      <p:sp>
+        <p:nvSpPr>
+          <p:cNvPr id="28" name="PlaceHolder 1"/>
+          <p:cNvSpPr>
+            <a:spLocks noGrp="1"/>
+          </p:cNvSpPr>
+          <p:nvPr>
+            <p:ph type="title"/>
+          </p:nvPr>
+        </p:nvSpPr>
+        <p:spPr>
+          <a:xfrm>
+            <a:off x="468000" y="2469600"/>
+            <a:ext cx="5909400" cy="4114800"/>
+          </a:xfrm>
+          <a:prstGeom prst="rect">
+            <a:avLst/>
+          </a:prstGeom>
+          <a:noFill/>
+          <a:ln w="0">
+            <a:noFill/>
+          </a:ln>
+        </p:spPr>
+        <p:txBody>
+          <a:bodyPr lIns="91440" rIns="91440" tIns="45720" bIns="45720" anchor="b">
+            <a:noAutofit/>
+          </a:bodyPr>
+          <a:p>
+            <a:pPr indent="0" defTabSz="685800">
+              <a:lnSpc>
+                <a:spcPct val="90000"/>
+              </a:lnSpc>
+              <a:buNone/>
+              <a:tabLst>
+                <a:tab algn="l" pos="0"/>
+              </a:tabLst>
+            </a:pPr>
+            <a:r>
+              <a:rPr lang="de-DE" sz="4500" b="0" u="none" strike="noStrike">
+                <a:solidFill>
+                  <a:schemeClr val="dk1"/>
+                </a:solidFill>
+                <a:effectLst/>
+                <a:uFillTx/>
+                <a:latin typeface="Calibri Light"/>
+              </a:rPr>
+              <a:t>Mastertitelformat bearbeiten</a:t>
+            </a:r>
+            <a:endParaRPr lang="de-DE" sz="4500" b="0" u="none" strike="noStrike">
+              <a:solidFill>
+                <a:srgbClr val="000000"/>
+              </a:solidFill>
+              <a:effectLst/>
+              <a:uFillTx/>
+              <a:latin typeface="Arial"/>
+            </a:endParaRPr>
+          </a:p>
+        </p:txBody>
+      </p:sp>
+      <p:sp>
+        <p:nvSpPr>
+          <p:cNvPr id="29" name="PlaceHolder 2"/>
+          <p:cNvSpPr>
+            <a:spLocks noGrp="1"/>
+          </p:cNvSpPr>
+          <p:nvPr>
+            <p:ph type="body"/>
+          </p:nvPr>
+        </p:nvSpPr>
+        <p:spPr>
+          <a:xfrm>
+            <a:off x="468000" y="6629400"/>
+            <a:ext cx="5909400" cy="2161080"/>
+          </a:xfrm>
+          <a:prstGeom prst="rect">
+            <a:avLst/>
+          </a:prstGeom>
+          <a:noFill/>
+          <a:ln w="0">
+            <a:noFill/>
+          </a:ln>
+        </p:spPr>
+        <p:txBody>
+          <a:bodyPr lIns="91440" rIns="91440" tIns="45720" bIns="45720" anchor="t">
+            <a:noAutofit/>
+          </a:bodyPr>
+          <a:p>
+            <a:pPr indent="0" defTabSz="685800">
+              <a:lnSpc>
+                <a:spcPct val="90000"/>
+              </a:lnSpc>
+              <a:spcBef>
+                <a:spcPts val="751"/>
+              </a:spcBef>
+              <a:buNone/>
+              <a:tabLst>
+                <a:tab algn="l" pos="0"/>
+              </a:tabLst>
+            </a:pPr>
+            <a:r>
+              <a:rPr lang="de-DE" sz="1800" b="0" u="none" strike="noStrike">
+                <a:solidFill>
+                  <a:schemeClr val="dk1"/>
+                </a:solidFill>
+                <a:effectLst/>
+                <a:uFillTx/>
+                <a:latin typeface="Calibri"/>
+              </a:rPr>
+              <a:t>Mastertextformat bearbeiten</a:t>
+            </a:r>
+            <a:endParaRPr lang="de-DE" sz="1800" b="0" u="none" strike="noStrike">
+              <a:solidFill>
+                <a:srgbClr val="000000"/>
+              </a:solidFill>
+              <a:effectLst/>
+              <a:uFillTx/>
+              <a:latin typeface="Arial"/>
+            </a:endParaRPr>
+          </a:p>
+        </p:txBody>
+      </p:sp>
+      <p:sp>
+        <p:nvSpPr>
+          <p:cNvPr id="30" name="PlaceHolder 3"/>
+          <p:cNvSpPr>
+            <a:spLocks noGrp="1"/>
+          </p:cNvSpPr>
+          <p:nvPr>
+            <p:ph type="dt" idx="16"/>
+          </p:nvPr>
+        </p:nvSpPr>
+        <p:spPr>
+          <a:xfrm>
+            <a:off x="471600" y="9181440"/>
+            <a:ext cx="1537200" cy="521640"/>
+          </a:xfrm>
+          <a:prstGeom prst="rect">
+            <a:avLst/>
+          </a:prstGeom>
+          <a:noFill/>
+          <a:ln w="0">
+            <a:noFill/>
+          </a:ln>
+        </p:spPr>
+        <p:txBody>
+          <a:bodyPr lIns="91440" rIns="91440" tIns="45720" bIns="45720" anchor="ctr">
+            <a:noAutofit/>
+          </a:bodyPr>
+          <a:lstStyle>
+            <a:lvl1pPr indent="0" defTabSz="457200">
+              <a:lnSpc>
+                <a:spcPct val="100000"/>
+              </a:lnSpc>
+              <a:buNone/>
+              <a:tabLst>
+                <a:tab algn="l" pos="0"/>
+              </a:tabLst>
+              <a:defRPr lang="de-DE" sz="900" b="0" u="none" strike="noStrike">
+                <a:solidFill>
+                  <a:schemeClr val="dk1">
+                    <a:tint val="75000"/>
+                  </a:schemeClr>
+                </a:solidFill>
+                <a:effectLst/>
+                <a:uFillTx/>
+                <a:latin typeface="Calibri"/>
+              </a:defRPr>
+            </a:lvl1pPr>
+          </a:lstStyle>
+          <a:p>
+            <a:pPr indent="0" defTabSz="457200">
+              <a:lnSpc>
+                <a:spcPct val="100000"/>
+              </a:lnSpc>
+              <a:buNone/>
+              <a:tabLst>
+                <a:tab algn="l" pos="0"/>
+              </a:tabLst>
+            </a:pPr>
+            <a:r>
+              <a:rPr lang="de-DE" sz="900" b="0" u="none" strike="noStrike">
+                <a:solidFill>
+                  <a:schemeClr val="dk1">
+                    <a:tint val="75000"/>
+                  </a:schemeClr>
+                </a:solidFill>
+                <a:effectLst/>
+                <a:uFillTx/>
+                <a:latin typeface="Calibri"/>
+              </a:rPr>
+              <a:t>&lt;Datum/Uhrzeit&gt;</a:t>
+            </a:r>
+            <a:endParaRPr lang="de-DE" sz="900" b="0" u="none" strike="noStrike">
+              <a:solidFill>
+                <a:srgbClr val="000000"/>
+              </a:solidFill>
+              <a:effectLst/>
+              <a:uFillTx/>
+              <a:latin typeface="Times New Roman"/>
+            </a:endParaRPr>
+          </a:p>
+        </p:txBody>
+      </p:sp>
+      <p:sp>
+        <p:nvSpPr>
+          <p:cNvPr id="31" name="PlaceHolder 4"/>
+          <p:cNvSpPr>
+            <a:spLocks noGrp="1"/>
+          </p:cNvSpPr>
+          <p:nvPr>
+            <p:ph type="ftr" idx="17"/>
+          </p:nvPr>
+        </p:nvSpPr>
+        <p:spPr>
+          <a:xfrm>
+            <a:off x="2271600" y="9181440"/>
+            <a:ext cx="2308680" cy="521640"/>
+          </a:xfrm>
+          <a:prstGeom prst="rect">
+            <a:avLst/>
+          </a:prstGeom>
+          <a:noFill/>
+          <a:ln w="0">
+            <a:noFill/>
+          </a:ln>
+        </p:spPr>
+        <p:txBody>
+          <a:bodyPr lIns="91440" rIns="91440" tIns="45720" bIns="45720" anchor="ctr">
+            <a:noAutofit/>
+          </a:bodyPr>
+          <a:lstStyle>
+            <a:lvl1pPr indent="0" algn="ctr">
+              <a:lnSpc>
+                <a:spcPct val="100000"/>
+              </a:lnSpc>
+              <a:buNone/>
+              <a:tabLst>
+                <a:tab algn="l" pos="0"/>
+              </a:tabLst>
+              <a:defRPr lang="de-DE" sz="1400" b="0" u="none" strike="noStrike">
+                <a:solidFill>
+                  <a:srgbClr val="000000"/>
+                </a:solidFill>
+                <a:effectLst/>
+                <a:uFillTx/>
+                <a:latin typeface="Times New Roman"/>
+              </a:defRPr>
+            </a:lvl1pPr>
+          </a:lstStyle>
+          <a:p>
+            <a:pPr indent="0" algn="ctr">
+              <a:lnSpc>
+                <a:spcPct val="100000"/>
+              </a:lnSpc>
+              <a:buNone/>
+              <a:tabLst>
+                <a:tab algn="l" pos="0"/>
+              </a:tabLst>
+            </a:pPr>
+            <a:r>
+              <a:rPr lang="de-DE" sz="1400" b="0" u="none" strike="noStrike">
+                <a:solidFill>
+                  <a:srgbClr val="000000"/>
+                </a:solidFill>
+                <a:effectLst/>
+                <a:uFillTx/>
+                <a:latin typeface="Times New Roman"/>
+              </a:rPr>
+              <a:t>&lt;Fußzeile&gt;</a:t>
+            </a:r>
+            <a:endParaRPr lang="de-DE" sz="1400" b="0" u="none" strike="noStrike">
+              <a:solidFill>
+                <a:srgbClr val="000000"/>
+              </a:solidFill>
+              <a:effectLst/>
+              <a:uFillTx/>
+              <a:latin typeface="Times New Roman"/>
+            </a:endParaRPr>
+          </a:p>
+        </p:txBody>
+      </p:sp>
+      <p:sp>
+        <p:nvSpPr>
+          <p:cNvPr id="32" name="PlaceHolder 5"/>
+          <p:cNvSpPr>
+            <a:spLocks noGrp="1"/>
+          </p:cNvSpPr>
+          <p:nvPr>
+            <p:ph type="sldNum" idx="18"/>
+          </p:nvPr>
+        </p:nvSpPr>
+        <p:spPr>
+          <a:xfrm>
+            <a:off x="4843440" y="9181440"/>
+            <a:ext cx="1537200" cy="521640"/>
+          </a:xfrm>
+          <a:prstGeom prst="rect">
+            <a:avLst/>
+          </a:prstGeom>
+          <a:noFill/>
+          <a:ln w="0">
+            <a:noFill/>
+          </a:ln>
+        </p:spPr>
+        <p:txBody>
+          <a:bodyPr lIns="91440" rIns="91440" tIns="45720" bIns="45720" anchor="ctr">
+            <a:noAutofit/>
+          </a:bodyPr>
+          <a:lstStyle>
+            <a:lvl1pPr indent="0" algn="r" defTabSz="457200">
+              <a:lnSpc>
+                <a:spcPct val="100000"/>
+              </a:lnSpc>
+              <a:buNone/>
+              <a:tabLst>
+                <a:tab algn="l" pos="0"/>
+              </a:tabLst>
+              <a:defRPr lang="de-DE" sz="900" b="0" u="none" strike="noStrike">
+                <a:solidFill>
+                  <a:schemeClr val="dk1">
+                    <a:tint val="75000"/>
+                  </a:schemeClr>
+                </a:solidFill>
+                <a:effectLst/>
+                <a:uFillTx/>
+                <a:latin typeface="Calibri"/>
+              </a:defRPr>
+            </a:lvl1pPr>
+          </a:lstStyle>
+          <a:p>
+            <a:pPr indent="0" algn="r" defTabSz="457200">
+              <a:lnSpc>
+                <a:spcPct val="100000"/>
+              </a:lnSpc>
+              <a:buNone/>
+              <a:tabLst>
+                <a:tab algn="l" pos="0"/>
+              </a:tabLst>
+            </a:pPr>
+            <a:fld id="{07BAEDF7-3DEA-4DCA-B284-79850E45ED91}" type="slidenum">
+              <a:rPr lang="de-DE" sz="900" b="0" u="none" strike="noStrike">
+                <a:solidFill>
+                  <a:schemeClr val="dk1">
+                    <a:tint val="75000"/>
+                  </a:schemeClr>
+                </a:solidFill>
+                <a:effectLst/>
+                <a:uFillTx/>
+                <a:latin typeface="Calibri"/>
+              </a:rPr>
+              <a:t>&lt;Foliennummer&gt;</a:t>
+            </a:fld>
+            <a:endParaRPr lang="de-DE" sz="900" b="0" u="none" strike="noStrike">
+              <a:solidFill>
+                <a:srgbClr val="000000"/>
+              </a:solidFill>
+              <a:effectLst/>
+              <a:uFillTx/>
+              <a:latin typeface="Times New Roman"/>
+            </a:endParaRPr>
+          </a:p>
+        </p:txBody>
+      </p:sp>
+    </p:spTree>
+  </p:cSld>
+</p:sldLayout>
+</file>
+
+<file path=ppt/slideLayouts/slideLayout7.xml><?xml version="1.0" encoding="utf-8"?>
 <p:sldLayout xmlns:a="http://schemas.openxmlformats.org/drawingml/2006/main" xmlns:p="http://schemas.openxmlformats.org/presentationml/2006/main" xmlns:r="http://schemas.openxmlformats.org/officeDocument/2006/relationships" xmlns:p14="http://schemas.microsoft.com/office/powerpoint/2010/main" xmlns:p15="http://schemas.microsoft.com/office/powerpoint/2012/main" xmlns:mc="http://schemas.openxmlformats.org/markup-compatibility/2006" type="twoObj" preserve="1">
   <p:cSld name="Zwei Inhalte">
     <p:bg>
@@ -39,7 +3935,7 @@
       </p:grpSpPr>
       <p:sp>
         <p:nvSpPr>
-          <p:cNvPr id="2" name="PlaceHolder 1"/>
+          <p:cNvPr id="33" name="PlaceHolder 1"/>
           <p:cNvSpPr>
             <a:spLocks noGrp="1"/>
           </p:cNvSpPr>
@@ -50,7 +3946,7 @@
         <p:spPr>
           <a:xfrm>
             <a:off x="471600" y="527400"/>
-            <a:ext cx="5910120" cy="1909800"/>
+            <a:ext cx="5909400" cy="1909080"/>
           </a:xfrm>
           <a:prstGeom prst="rect">
             <a:avLst/>
@@ -98,7 +3994,7 @@
       </p:sp>
       <p:sp>
         <p:nvSpPr>
-          <p:cNvPr id="3" name="PlaceHolder 2"/>
+          <p:cNvPr id="34" name="PlaceHolder 2"/>
           <p:cNvSpPr>
             <a:spLocks noGrp="1"/>
           </p:cNvSpPr>
@@ -109,7 +4005,7 @@
         <p:spPr>
           <a:xfrm>
             <a:off x="471600" y="2637000"/>
-            <a:ext cx="2909520" cy="6280200"/>
+            <a:ext cx="2908800" cy="6279480"/>
           </a:xfrm>
           <a:prstGeom prst="rect">
             <a:avLst/>
@@ -297,7 +4193,7 @@
       </p:sp>
       <p:sp>
         <p:nvSpPr>
-          <p:cNvPr id="4" name="PlaceHolder 3"/>
+          <p:cNvPr id="35" name="PlaceHolder 3"/>
           <p:cNvSpPr>
             <a:spLocks noGrp="1"/>
           </p:cNvSpPr>
@@ -308,7 +4204,7 @@
         <p:spPr>
           <a:xfrm>
             <a:off x="3471840" y="2637000"/>
-            <a:ext cx="2909520" cy="6280200"/>
+            <a:ext cx="2908800" cy="6279480"/>
           </a:xfrm>
           <a:prstGeom prst="rect">
             <a:avLst/>
@@ -496,18 +4392,18 @@
       </p:sp>
       <p:sp>
         <p:nvSpPr>
-          <p:cNvPr id="5" name="PlaceHolder 4"/>
+          <p:cNvPr id="36" name="PlaceHolder 4"/>
           <p:cNvSpPr>
             <a:spLocks noGrp="1"/>
           </p:cNvSpPr>
           <p:nvPr>
-            <p:ph type="dt" idx="1"/>
+            <p:ph type="dt" idx="19"/>
           </p:nvPr>
         </p:nvSpPr>
         <p:spPr>
           <a:xfrm>
             <a:off x="471600" y="9181440"/>
-            <a:ext cx="1537920" cy="522360"/>
+            <a:ext cx="1537200" cy="521640"/>
           </a:xfrm>
           <a:prstGeom prst="rect">
             <a:avLst/>
@@ -578,18 +4474,18 @@
       </p:sp>
       <p:sp>
         <p:nvSpPr>
-          <p:cNvPr id="6" name="PlaceHolder 5"/>
+          <p:cNvPr id="37" name="PlaceHolder 5"/>
           <p:cNvSpPr>
             <a:spLocks noGrp="1"/>
           </p:cNvSpPr>
           <p:nvPr>
-            <p:ph type="ftr" idx="2"/>
+            <p:ph type="ftr" idx="20"/>
           </p:nvPr>
         </p:nvSpPr>
         <p:spPr>
           <a:xfrm>
             <a:off x="2271600" y="9181440"/>
-            <a:ext cx="2309400" cy="522360"/>
+            <a:ext cx="2308680" cy="521640"/>
           </a:xfrm>
           <a:prstGeom prst="rect">
             <a:avLst/>
@@ -656,18 +4552,18 @@
       </p:sp>
       <p:sp>
         <p:nvSpPr>
-          <p:cNvPr id="7" name="PlaceHolder 6"/>
+          <p:cNvPr id="38" name="PlaceHolder 6"/>
           <p:cNvSpPr>
             <a:spLocks noGrp="1"/>
           </p:cNvSpPr>
           <p:nvPr>
-            <p:ph type="sldNum" idx="3"/>
+            <p:ph type="sldNum" idx="21"/>
           </p:nvPr>
         </p:nvSpPr>
         <p:spPr>
           <a:xfrm>
             <a:off x="4843440" y="9181440"/>
-            <a:ext cx="1537920" cy="522360"/>
+            <a:ext cx="1537200" cy="521640"/>
           </a:xfrm>
           <a:prstGeom prst="rect">
             <a:avLst/>
@@ -712,7 +4608,7 @@
                 <a:tab algn="l" pos="0"/>
               </a:tabLst>
             </a:pPr>
-            <a:fld id="{326698E9-4CCC-40E5-A94C-B8BB67260F07}" type="slidenum">
+            <a:fld id="{362DD992-7578-4764-9DC7-0A7262FD3B40}" type="slidenum">
               <a:rPr lang="de-DE" sz="900" b="0" u="none" strike="noStrike">
                 <a:solidFill>
                   <a:schemeClr val="dk1">
@@ -741,928 +4637,7 @@
 </p:sldLayout>
 </file>
 
-<file path=ppt/slideLayouts/slideLayout10.xml><?xml version="1.0" encoding="utf-8"?>
-<p:sldLayout xmlns:a="http://schemas.openxmlformats.org/drawingml/2006/main" xmlns:p="http://schemas.openxmlformats.org/presentationml/2006/main" xmlns:r="http://schemas.openxmlformats.org/officeDocument/2006/relationships" xmlns:p14="http://schemas.microsoft.com/office/powerpoint/2010/main" xmlns:p15="http://schemas.microsoft.com/office/powerpoint/2012/main" xmlns:mc="http://schemas.openxmlformats.org/markup-compatibility/2006" type="obj" preserve="1">
-  <p:cSld name="Titel und Inhalt">
-    <p:bg>
-      <p:bgPr>
-        <a:solidFill>
-          <a:srgbClr val="ffffff"/>
-        </a:solidFill>
-      </p:bgPr>
-    </p:bg>
-    <p:spTree>
-      <p:nvGrpSpPr>
-        <p:cNvPr id="1" name=""/>
-        <p:cNvGrpSpPr/>
-        <p:nvPr/>
-      </p:nvGrpSpPr>
-      <p:grpSpPr>
-        <a:xfrm>
-          <a:off x="0" y="0"/>
-          <a:ext cx="0" cy="0"/>
-          <a:chOff x="0" y="0"/>
-          <a:chExt cx="0" cy="0"/>
-        </a:xfrm>
-      </p:grpSpPr>
-      <p:sp>
-        <p:nvSpPr>
-          <p:cNvPr id="50" name="PlaceHolder 1"/>
-          <p:cNvSpPr>
-            <a:spLocks noGrp="1"/>
-          </p:cNvSpPr>
-          <p:nvPr>
-            <p:ph type="title"/>
-          </p:nvPr>
-        </p:nvSpPr>
-        <p:spPr>
-          <a:xfrm>
-            <a:off x="471600" y="527400"/>
-            <a:ext cx="5910120" cy="1909800"/>
-          </a:xfrm>
-          <a:prstGeom prst="rect">
-            <a:avLst/>
-          </a:prstGeom>
-          <a:noFill/>
-          <a:ln w="0">
-            <a:noFill/>
-          </a:ln>
-        </p:spPr>
-        <p:txBody>
-          <a:bodyPr lIns="91440" rIns="91440" tIns="45720" bIns="45720" anchor="ctr">
-            <a:noAutofit/>
-          </a:bodyPr>
-          <a:p>
-            <a:pPr indent="0" defTabSz="685800">
-              <a:lnSpc>
-                <a:spcPct val="90000"/>
-              </a:lnSpc>
-              <a:buNone/>
-              <a:tabLst>
-                <a:tab algn="l" pos="0"/>
-              </a:tabLst>
-            </a:pPr>
-            <a:r>
-              <a:rPr lang="de-DE" sz="3300" b="0" u="none" strike="noStrike">
-                <a:solidFill>
-                  <a:schemeClr val="dk1"/>
-                </a:solidFill>
-                <a:effectLst/>
-                <a:uFillTx/>
-                <a:latin typeface="Calibri Light"/>
-              </a:rPr>
-              <a:t>Mastertitelformat bearbeiten</a:t>
-            </a:r>
-            <a:endParaRPr lang="de-DE" sz="3300" b="0" u="none" strike="noStrike">
-              <a:solidFill>
-                <a:srgbClr val="000000"/>
-              </a:solidFill>
-              <a:effectLst/>
-              <a:uFillTx/>
-              <a:latin typeface="Arial"/>
-            </a:endParaRPr>
-          </a:p>
-        </p:txBody>
-      </p:sp>
-      <p:sp>
-        <p:nvSpPr>
-          <p:cNvPr id="51" name="PlaceHolder 2"/>
-          <p:cNvSpPr>
-            <a:spLocks noGrp="1"/>
-          </p:cNvSpPr>
-          <p:nvPr>
-            <p:ph type="body"/>
-          </p:nvPr>
-        </p:nvSpPr>
-        <p:spPr>
-          <a:xfrm>
-            <a:off x="471600" y="2637000"/>
-            <a:ext cx="5910120" cy="6280200"/>
-          </a:xfrm>
-          <a:prstGeom prst="rect">
-            <a:avLst/>
-          </a:prstGeom>
-          <a:noFill/>
-          <a:ln w="0">
-            <a:noFill/>
-          </a:ln>
-        </p:spPr>
-        <p:txBody>
-          <a:bodyPr lIns="91440" rIns="91440" tIns="45720" bIns="45720" anchor="t">
-            <a:noAutofit/>
-          </a:bodyPr>
-          <a:p>
-            <a:pPr marL="171360" indent="-171360" defTabSz="685800">
-              <a:lnSpc>
-                <a:spcPct val="90000"/>
-              </a:lnSpc>
-              <a:spcBef>
-                <a:spcPts val="751"/>
-              </a:spcBef>
-              <a:buClr>
-                <a:srgbClr val="000000"/>
-              </a:buClr>
-              <a:buFont typeface="Arial"/>
-              <a:buChar char="•"/>
-            </a:pPr>
-            <a:r>
-              <a:rPr lang="de-DE" sz="2100" b="0" u="none" strike="noStrike">
-                <a:solidFill>
-                  <a:schemeClr val="dk1"/>
-                </a:solidFill>
-                <a:effectLst/>
-                <a:uFillTx/>
-                <a:latin typeface="Calibri"/>
-              </a:rPr>
-              <a:t>Mastertextformat bearbeiten</a:t>
-            </a:r>
-            <a:endParaRPr lang="de-DE" sz="2100" b="0" u="none" strike="noStrike">
-              <a:solidFill>
-                <a:srgbClr val="000000"/>
-              </a:solidFill>
-              <a:effectLst/>
-              <a:uFillTx/>
-              <a:latin typeface="Arial"/>
-            </a:endParaRPr>
-          </a:p>
-          <a:p>
-            <a:pPr marL="514440" lvl="1" indent="-171360" defTabSz="685800">
-              <a:lnSpc>
-                <a:spcPct val="90000"/>
-              </a:lnSpc>
-              <a:spcBef>
-                <a:spcPts val="374"/>
-              </a:spcBef>
-              <a:buClr>
-                <a:srgbClr val="000000"/>
-              </a:buClr>
-              <a:buFont typeface="Arial"/>
-              <a:buChar char="•"/>
-            </a:pPr>
-            <a:r>
-              <a:rPr lang="de-DE" sz="1800" b="0" u="none" strike="noStrike">
-                <a:solidFill>
-                  <a:schemeClr val="dk1"/>
-                </a:solidFill>
-                <a:effectLst/>
-                <a:uFillTx/>
-                <a:latin typeface="Calibri"/>
-              </a:rPr>
-              <a:t>Zweite Ebene</a:t>
-            </a:r>
-            <a:endParaRPr lang="de-DE" sz="1800" b="0" u="none" strike="noStrike">
-              <a:solidFill>
-                <a:srgbClr val="000000"/>
-              </a:solidFill>
-              <a:effectLst/>
-              <a:uFillTx/>
-              <a:latin typeface="Arial"/>
-            </a:endParaRPr>
-          </a:p>
-          <a:p>
-            <a:pPr marL="857160" lvl="2" indent="-171360" defTabSz="685800">
-              <a:lnSpc>
-                <a:spcPct val="90000"/>
-              </a:lnSpc>
-              <a:spcBef>
-                <a:spcPts val="374"/>
-              </a:spcBef>
-              <a:buClr>
-                <a:srgbClr val="000000"/>
-              </a:buClr>
-              <a:buFont typeface="Arial"/>
-              <a:buChar char="•"/>
-            </a:pPr>
-            <a:r>
-              <a:rPr lang="de-DE" sz="1500" b="0" u="none" strike="noStrike">
-                <a:solidFill>
-                  <a:schemeClr val="dk1"/>
-                </a:solidFill>
-                <a:effectLst/>
-                <a:uFillTx/>
-                <a:latin typeface="Calibri"/>
-              </a:rPr>
-              <a:t>Dritte Ebene</a:t>
-            </a:r>
-            <a:endParaRPr lang="de-DE" sz="1500" b="0" u="none" strike="noStrike">
-              <a:solidFill>
-                <a:srgbClr val="000000"/>
-              </a:solidFill>
-              <a:effectLst/>
-              <a:uFillTx/>
-              <a:latin typeface="Arial"/>
-            </a:endParaRPr>
-          </a:p>
-          <a:p>
-            <a:pPr marL="1200240" lvl="3" indent="-171360" defTabSz="685800">
-              <a:lnSpc>
-                <a:spcPct val="90000"/>
-              </a:lnSpc>
-              <a:spcBef>
-                <a:spcPts val="374"/>
-              </a:spcBef>
-              <a:buClr>
-                <a:srgbClr val="000000"/>
-              </a:buClr>
-              <a:buFont typeface="Arial"/>
-              <a:buChar char="•"/>
-            </a:pPr>
-            <a:r>
-              <a:rPr lang="de-DE" sz="1350" b="0" u="none" strike="noStrike">
-                <a:solidFill>
-                  <a:schemeClr val="dk1"/>
-                </a:solidFill>
-                <a:effectLst/>
-                <a:uFillTx/>
-                <a:latin typeface="Calibri"/>
-              </a:rPr>
-              <a:t>Vierte Ebene</a:t>
-            </a:r>
-            <a:endParaRPr lang="de-DE" sz="1350" b="0" u="none" strike="noStrike">
-              <a:solidFill>
-                <a:srgbClr val="000000"/>
-              </a:solidFill>
-              <a:effectLst/>
-              <a:uFillTx/>
-              <a:latin typeface="Arial"/>
-            </a:endParaRPr>
-          </a:p>
-          <a:p>
-            <a:pPr marL="1542960" lvl="4" indent="-171360" defTabSz="685800">
-              <a:lnSpc>
-                <a:spcPct val="90000"/>
-              </a:lnSpc>
-              <a:spcBef>
-                <a:spcPts val="374"/>
-              </a:spcBef>
-              <a:buClr>
-                <a:srgbClr val="000000"/>
-              </a:buClr>
-              <a:buFont typeface="Arial"/>
-              <a:buChar char="•"/>
-            </a:pPr>
-            <a:r>
-              <a:rPr lang="de-DE" sz="1350" b="0" u="none" strike="noStrike">
-                <a:solidFill>
-                  <a:schemeClr val="dk1"/>
-                </a:solidFill>
-                <a:effectLst/>
-                <a:uFillTx/>
-                <a:latin typeface="Calibri"/>
-              </a:rPr>
-              <a:t>Fünfte Ebene</a:t>
-            </a:r>
-            <a:endParaRPr lang="de-DE" sz="1350" b="0" u="none" strike="noStrike">
-              <a:solidFill>
-                <a:srgbClr val="000000"/>
-              </a:solidFill>
-              <a:effectLst/>
-              <a:uFillTx/>
-              <a:latin typeface="Arial"/>
-            </a:endParaRPr>
-          </a:p>
-        </p:txBody>
-      </p:sp>
-      <p:sp>
-        <p:nvSpPr>
-          <p:cNvPr id="52" name="PlaceHolder 3"/>
-          <p:cNvSpPr>
-            <a:spLocks noGrp="1"/>
-          </p:cNvSpPr>
-          <p:nvPr>
-            <p:ph type="dt" idx="28"/>
-          </p:nvPr>
-        </p:nvSpPr>
-        <p:spPr>
-          <a:xfrm>
-            <a:off x="471600" y="9181440"/>
-            <a:ext cx="1537920" cy="522360"/>
-          </a:xfrm>
-          <a:prstGeom prst="rect">
-            <a:avLst/>
-          </a:prstGeom>
-          <a:noFill/>
-          <a:ln w="0">
-            <a:noFill/>
-          </a:ln>
-        </p:spPr>
-        <p:txBody>
-          <a:bodyPr lIns="91440" rIns="91440" tIns="45720" bIns="45720" anchor="ctr">
-            <a:noAutofit/>
-          </a:bodyPr>
-          <a:lstStyle>
-            <a:lvl1pPr indent="0" defTabSz="457200">
-              <a:lnSpc>
-                <a:spcPct val="100000"/>
-              </a:lnSpc>
-              <a:buNone/>
-              <a:tabLst>
-                <a:tab algn="l" pos="0"/>
-              </a:tabLst>
-              <a:defRPr lang="de-DE" sz="900" b="0" u="none" strike="noStrike">
-                <a:solidFill>
-                  <a:schemeClr val="dk1">
-                    <a:tint val="75000"/>
-                  </a:schemeClr>
-                </a:solidFill>
-                <a:effectLst/>
-                <a:uFillTx/>
-                <a:latin typeface="Calibri"/>
-              </a:defRPr>
-            </a:lvl1pPr>
-          </a:lstStyle>
-          <a:p>
-            <a:pPr indent="0" defTabSz="457200">
-              <a:lnSpc>
-                <a:spcPct val="100000"/>
-              </a:lnSpc>
-              <a:buNone/>
-              <a:tabLst>
-                <a:tab algn="l" pos="0"/>
-              </a:tabLst>
-            </a:pPr>
-            <a:r>
-              <a:rPr lang="de-DE" sz="900" b="0" u="none" strike="noStrike">
-                <a:solidFill>
-                  <a:schemeClr val="dk1">
-                    <a:tint val="75000"/>
-                  </a:schemeClr>
-                </a:solidFill>
-                <a:effectLst/>
-                <a:uFillTx/>
-                <a:latin typeface="Calibri"/>
-              </a:rPr>
-              <a:t>&lt;Datum/Uhrzeit&gt;</a:t>
-            </a:r>
-            <a:endParaRPr lang="de-DE" sz="900" b="0" u="none" strike="noStrike">
-              <a:solidFill>
-                <a:srgbClr val="000000"/>
-              </a:solidFill>
-              <a:effectLst/>
-              <a:uFillTx/>
-              <a:latin typeface="Times New Roman"/>
-            </a:endParaRPr>
-          </a:p>
-        </p:txBody>
-      </p:sp>
-      <p:sp>
-        <p:nvSpPr>
-          <p:cNvPr id="53" name="PlaceHolder 4"/>
-          <p:cNvSpPr>
-            <a:spLocks noGrp="1"/>
-          </p:cNvSpPr>
-          <p:nvPr>
-            <p:ph type="ftr" idx="29"/>
-          </p:nvPr>
-        </p:nvSpPr>
-        <p:spPr>
-          <a:xfrm>
-            <a:off x="2271600" y="9181440"/>
-            <a:ext cx="2309400" cy="522360"/>
-          </a:xfrm>
-          <a:prstGeom prst="rect">
-            <a:avLst/>
-          </a:prstGeom>
-          <a:noFill/>
-          <a:ln w="0">
-            <a:noFill/>
-          </a:ln>
-        </p:spPr>
-        <p:txBody>
-          <a:bodyPr lIns="91440" rIns="91440" tIns="45720" bIns="45720" anchor="ctr">
-            <a:noAutofit/>
-          </a:bodyPr>
-          <a:lstStyle>
-            <a:lvl1pPr indent="0" algn="ctr">
-              <a:lnSpc>
-                <a:spcPct val="100000"/>
-              </a:lnSpc>
-              <a:buNone/>
-              <a:tabLst>
-                <a:tab algn="l" pos="0"/>
-              </a:tabLst>
-              <a:defRPr lang="de-DE" sz="1400" b="0" u="none" strike="noStrike">
-                <a:solidFill>
-                  <a:srgbClr val="000000"/>
-                </a:solidFill>
-                <a:effectLst/>
-                <a:uFillTx/>
-                <a:latin typeface="Times New Roman"/>
-              </a:defRPr>
-            </a:lvl1pPr>
-          </a:lstStyle>
-          <a:p>
-            <a:pPr indent="0" algn="ctr">
-              <a:lnSpc>
-                <a:spcPct val="100000"/>
-              </a:lnSpc>
-              <a:buNone/>
-              <a:tabLst>
-                <a:tab algn="l" pos="0"/>
-              </a:tabLst>
-            </a:pPr>
-            <a:r>
-              <a:rPr lang="de-DE" sz="1400" b="0" u="none" strike="noStrike">
-                <a:solidFill>
-                  <a:srgbClr val="000000"/>
-                </a:solidFill>
-                <a:effectLst/>
-                <a:uFillTx/>
-                <a:latin typeface="Times New Roman"/>
-              </a:rPr>
-              <a:t>&lt;Fußzeile&gt;</a:t>
-            </a:r>
-            <a:endParaRPr lang="de-DE" sz="1400" b="0" u="none" strike="noStrike">
-              <a:solidFill>
-                <a:srgbClr val="000000"/>
-              </a:solidFill>
-              <a:effectLst/>
-              <a:uFillTx/>
-              <a:latin typeface="Times New Roman"/>
-            </a:endParaRPr>
-          </a:p>
-        </p:txBody>
-      </p:sp>
-      <p:sp>
-        <p:nvSpPr>
-          <p:cNvPr id="54" name="PlaceHolder 5"/>
-          <p:cNvSpPr>
-            <a:spLocks noGrp="1"/>
-          </p:cNvSpPr>
-          <p:nvPr>
-            <p:ph type="sldNum" idx="30"/>
-          </p:nvPr>
-        </p:nvSpPr>
-        <p:spPr>
-          <a:xfrm>
-            <a:off x="4843440" y="9181440"/>
-            <a:ext cx="1537920" cy="522360"/>
-          </a:xfrm>
-          <a:prstGeom prst="rect">
-            <a:avLst/>
-          </a:prstGeom>
-          <a:noFill/>
-          <a:ln w="0">
-            <a:noFill/>
-          </a:ln>
-        </p:spPr>
-        <p:txBody>
-          <a:bodyPr lIns="91440" rIns="91440" tIns="45720" bIns="45720" anchor="ctr">
-            <a:noAutofit/>
-          </a:bodyPr>
-          <a:lstStyle>
-            <a:lvl1pPr indent="0" algn="r" defTabSz="457200">
-              <a:lnSpc>
-                <a:spcPct val="100000"/>
-              </a:lnSpc>
-              <a:buNone/>
-              <a:tabLst>
-                <a:tab algn="l" pos="0"/>
-              </a:tabLst>
-              <a:defRPr lang="de-DE" sz="900" b="0" u="none" strike="noStrike">
-                <a:solidFill>
-                  <a:schemeClr val="dk1">
-                    <a:tint val="75000"/>
-                  </a:schemeClr>
-                </a:solidFill>
-                <a:effectLst/>
-                <a:uFillTx/>
-                <a:latin typeface="Calibri"/>
-              </a:defRPr>
-            </a:lvl1pPr>
-          </a:lstStyle>
-          <a:p>
-            <a:pPr indent="0" algn="r" defTabSz="457200">
-              <a:lnSpc>
-                <a:spcPct val="100000"/>
-              </a:lnSpc>
-              <a:buNone/>
-              <a:tabLst>
-                <a:tab algn="l" pos="0"/>
-              </a:tabLst>
-            </a:pPr>
-            <a:fld id="{F234B2BC-C731-4016-9DBD-727E0F313CCC}" type="slidenum">
-              <a:rPr lang="de-DE" sz="900" b="0" u="none" strike="noStrike">
-                <a:solidFill>
-                  <a:schemeClr val="dk1">
-                    <a:tint val="75000"/>
-                  </a:schemeClr>
-                </a:solidFill>
-                <a:effectLst/>
-                <a:uFillTx/>
-                <a:latin typeface="Calibri"/>
-              </a:rPr>
-              <a:t>&lt;Foliennummer&gt;</a:t>
-            </a:fld>
-            <a:endParaRPr lang="de-DE" sz="900" b="0" u="none" strike="noStrike">
-              <a:solidFill>
-                <a:srgbClr val="000000"/>
-              </a:solidFill>
-              <a:effectLst/>
-              <a:uFillTx/>
-              <a:latin typeface="Times New Roman"/>
-            </a:endParaRPr>
-          </a:p>
-        </p:txBody>
-      </p:sp>
-    </p:spTree>
-  </p:cSld>
-</p:sldLayout>
-</file>
-
-<file path=ppt/slideLayouts/slideLayout11.xml><?xml version="1.0" encoding="utf-8"?>
-<p:sldLayout xmlns:a="http://schemas.openxmlformats.org/drawingml/2006/main" xmlns:p="http://schemas.openxmlformats.org/presentationml/2006/main" xmlns:r="http://schemas.openxmlformats.org/officeDocument/2006/relationships" xmlns:p14="http://schemas.microsoft.com/office/powerpoint/2010/main" xmlns:p15="http://schemas.microsoft.com/office/powerpoint/2012/main" xmlns:mc="http://schemas.openxmlformats.org/markup-compatibility/2006" type="blank" preserve="1">
-  <p:cSld name="Abschnitts-&#10;überschrift">
-    <p:bg>
-      <p:bgPr>
-        <a:solidFill>
-          <a:srgbClr val="ffffff"/>
-        </a:solidFill>
-      </p:bgPr>
-    </p:bg>
-    <p:spTree>
-      <p:nvGrpSpPr>
-        <p:cNvPr id="1" name=""/>
-        <p:cNvGrpSpPr/>
-        <p:nvPr/>
-      </p:nvGrpSpPr>
-      <p:grpSpPr>
-        <a:xfrm>
-          <a:off x="0" y="0"/>
-          <a:ext cx="0" cy="0"/>
-          <a:chOff x="0" y="0"/>
-          <a:chExt cx="0" cy="0"/>
-        </a:xfrm>
-      </p:grpSpPr>
-      <p:sp>
-        <p:nvSpPr>
-          <p:cNvPr id="55" name="PlaceHolder 1"/>
-          <p:cNvSpPr>
-            <a:spLocks noGrp="1"/>
-          </p:cNvSpPr>
-          <p:nvPr>
-            <p:ph type="title"/>
-          </p:nvPr>
-        </p:nvSpPr>
-        <p:spPr>
-          <a:xfrm>
-            <a:off x="468000" y="2469600"/>
-            <a:ext cx="5910120" cy="4115520"/>
-          </a:xfrm>
-          <a:prstGeom prst="rect">
-            <a:avLst/>
-          </a:prstGeom>
-          <a:noFill/>
-          <a:ln w="0">
-            <a:noFill/>
-          </a:ln>
-        </p:spPr>
-        <p:txBody>
-          <a:bodyPr lIns="91440" rIns="91440" tIns="45720" bIns="45720" anchor="b">
-            <a:noAutofit/>
-          </a:bodyPr>
-          <a:p>
-            <a:pPr indent="0" defTabSz="685800">
-              <a:lnSpc>
-                <a:spcPct val="90000"/>
-              </a:lnSpc>
-              <a:buNone/>
-              <a:tabLst>
-                <a:tab algn="l" pos="0"/>
-              </a:tabLst>
-            </a:pPr>
-            <a:r>
-              <a:rPr lang="de-DE" sz="4500" b="0" u="none" strike="noStrike">
-                <a:solidFill>
-                  <a:schemeClr val="dk1"/>
-                </a:solidFill>
-                <a:effectLst/>
-                <a:uFillTx/>
-                <a:latin typeface="Calibri Light"/>
-              </a:rPr>
-              <a:t>Mastertitelformat bearbeiten</a:t>
-            </a:r>
-            <a:endParaRPr lang="de-DE" sz="4500" b="0" u="none" strike="noStrike">
-              <a:solidFill>
-                <a:srgbClr val="000000"/>
-              </a:solidFill>
-              <a:effectLst/>
-              <a:uFillTx/>
-              <a:latin typeface="Arial"/>
-            </a:endParaRPr>
-          </a:p>
-        </p:txBody>
-      </p:sp>
-      <p:sp>
-        <p:nvSpPr>
-          <p:cNvPr id="56" name="PlaceHolder 2"/>
-          <p:cNvSpPr>
-            <a:spLocks noGrp="1"/>
-          </p:cNvSpPr>
-          <p:nvPr>
-            <p:ph type="body"/>
-          </p:nvPr>
-        </p:nvSpPr>
-        <p:spPr>
-          <a:xfrm>
-            <a:off x="468000" y="6629400"/>
-            <a:ext cx="5910120" cy="2161800"/>
-          </a:xfrm>
-          <a:prstGeom prst="rect">
-            <a:avLst/>
-          </a:prstGeom>
-          <a:noFill/>
-          <a:ln w="0">
-            <a:noFill/>
-          </a:ln>
-        </p:spPr>
-        <p:txBody>
-          <a:bodyPr lIns="91440" rIns="91440" tIns="45720" bIns="45720" anchor="t">
-            <a:noAutofit/>
-          </a:bodyPr>
-          <a:p>
-            <a:pPr indent="0" defTabSz="685800">
-              <a:lnSpc>
-                <a:spcPct val="90000"/>
-              </a:lnSpc>
-              <a:spcBef>
-                <a:spcPts val="751"/>
-              </a:spcBef>
-              <a:buNone/>
-              <a:tabLst>
-                <a:tab algn="l" pos="0"/>
-              </a:tabLst>
-            </a:pPr>
-            <a:r>
-              <a:rPr lang="de-DE" sz="1800" b="0" u="none" strike="noStrike">
-                <a:solidFill>
-                  <a:schemeClr val="dk1"/>
-                </a:solidFill>
-                <a:effectLst/>
-                <a:uFillTx/>
-                <a:latin typeface="Calibri"/>
-              </a:rPr>
-              <a:t>Mastertextformat bearbeiten</a:t>
-            </a:r>
-            <a:endParaRPr lang="de-DE" sz="1800" b="0" u="none" strike="noStrike">
-              <a:solidFill>
-                <a:srgbClr val="000000"/>
-              </a:solidFill>
-              <a:effectLst/>
-              <a:uFillTx/>
-              <a:latin typeface="Arial"/>
-            </a:endParaRPr>
-          </a:p>
-        </p:txBody>
-      </p:sp>
-      <p:sp>
-        <p:nvSpPr>
-          <p:cNvPr id="57" name="PlaceHolder 3"/>
-          <p:cNvSpPr>
-            <a:spLocks noGrp="1"/>
-          </p:cNvSpPr>
-          <p:nvPr>
-            <p:ph type="dt" idx="31"/>
-          </p:nvPr>
-        </p:nvSpPr>
-        <p:spPr>
-          <a:xfrm>
-            <a:off x="471600" y="9181440"/>
-            <a:ext cx="1537920" cy="522360"/>
-          </a:xfrm>
-          <a:prstGeom prst="rect">
-            <a:avLst/>
-          </a:prstGeom>
-          <a:noFill/>
-          <a:ln w="0">
-            <a:noFill/>
-          </a:ln>
-        </p:spPr>
-        <p:txBody>
-          <a:bodyPr lIns="91440" rIns="91440" tIns="45720" bIns="45720" anchor="ctr">
-            <a:noAutofit/>
-          </a:bodyPr>
-          <a:lstStyle>
-            <a:lvl1pPr indent="0" defTabSz="457200">
-              <a:lnSpc>
-                <a:spcPct val="100000"/>
-              </a:lnSpc>
-              <a:buNone/>
-              <a:tabLst>
-                <a:tab algn="l" pos="0"/>
-              </a:tabLst>
-              <a:defRPr lang="de-DE" sz="900" b="0" u="none" strike="noStrike">
-                <a:solidFill>
-                  <a:schemeClr val="dk1">
-                    <a:tint val="75000"/>
-                  </a:schemeClr>
-                </a:solidFill>
-                <a:effectLst/>
-                <a:uFillTx/>
-                <a:latin typeface="Calibri"/>
-              </a:defRPr>
-            </a:lvl1pPr>
-          </a:lstStyle>
-          <a:p>
-            <a:pPr indent="0" defTabSz="457200">
-              <a:lnSpc>
-                <a:spcPct val="100000"/>
-              </a:lnSpc>
-              <a:buNone/>
-              <a:tabLst>
-                <a:tab algn="l" pos="0"/>
-              </a:tabLst>
-            </a:pPr>
-            <a:r>
-              <a:rPr lang="de-DE" sz="900" b="0" u="none" strike="noStrike">
-                <a:solidFill>
-                  <a:schemeClr val="dk1">
-                    <a:tint val="75000"/>
-                  </a:schemeClr>
-                </a:solidFill>
-                <a:effectLst/>
-                <a:uFillTx/>
-                <a:latin typeface="Calibri"/>
-              </a:rPr>
-              <a:t>&lt;Datum/Uhrzeit&gt;</a:t>
-            </a:r>
-            <a:endParaRPr lang="de-DE" sz="900" b="0" u="none" strike="noStrike">
-              <a:solidFill>
-                <a:srgbClr val="000000"/>
-              </a:solidFill>
-              <a:effectLst/>
-              <a:uFillTx/>
-              <a:latin typeface="Times New Roman"/>
-            </a:endParaRPr>
-          </a:p>
-        </p:txBody>
-      </p:sp>
-      <p:sp>
-        <p:nvSpPr>
-          <p:cNvPr id="58" name="PlaceHolder 4"/>
-          <p:cNvSpPr>
-            <a:spLocks noGrp="1"/>
-          </p:cNvSpPr>
-          <p:nvPr>
-            <p:ph type="ftr" idx="32"/>
-          </p:nvPr>
-        </p:nvSpPr>
-        <p:spPr>
-          <a:xfrm>
-            <a:off x="2271600" y="9181440"/>
-            <a:ext cx="2309400" cy="522360"/>
-          </a:xfrm>
-          <a:prstGeom prst="rect">
-            <a:avLst/>
-          </a:prstGeom>
-          <a:noFill/>
-          <a:ln w="0">
-            <a:noFill/>
-          </a:ln>
-        </p:spPr>
-        <p:txBody>
-          <a:bodyPr lIns="91440" rIns="91440" tIns="45720" bIns="45720" anchor="ctr">
-            <a:noAutofit/>
-          </a:bodyPr>
-          <a:lstStyle>
-            <a:lvl1pPr indent="0" algn="ctr">
-              <a:lnSpc>
-                <a:spcPct val="100000"/>
-              </a:lnSpc>
-              <a:buNone/>
-              <a:tabLst>
-                <a:tab algn="l" pos="0"/>
-              </a:tabLst>
-              <a:defRPr lang="de-DE" sz="1400" b="0" u="none" strike="noStrike">
-                <a:solidFill>
-                  <a:srgbClr val="000000"/>
-                </a:solidFill>
-                <a:effectLst/>
-                <a:uFillTx/>
-                <a:latin typeface="Times New Roman"/>
-              </a:defRPr>
-            </a:lvl1pPr>
-          </a:lstStyle>
-          <a:p>
-            <a:pPr indent="0" algn="ctr">
-              <a:lnSpc>
-                <a:spcPct val="100000"/>
-              </a:lnSpc>
-              <a:buNone/>
-              <a:tabLst>
-                <a:tab algn="l" pos="0"/>
-              </a:tabLst>
-            </a:pPr>
-            <a:r>
-              <a:rPr lang="de-DE" sz="1400" b="0" u="none" strike="noStrike">
-                <a:solidFill>
-                  <a:srgbClr val="000000"/>
-                </a:solidFill>
-                <a:effectLst/>
-                <a:uFillTx/>
-                <a:latin typeface="Times New Roman"/>
-              </a:rPr>
-              <a:t>&lt;Fußzeile&gt;</a:t>
-            </a:r>
-            <a:endParaRPr lang="de-DE" sz="1400" b="0" u="none" strike="noStrike">
-              <a:solidFill>
-                <a:srgbClr val="000000"/>
-              </a:solidFill>
-              <a:effectLst/>
-              <a:uFillTx/>
-              <a:latin typeface="Times New Roman"/>
-            </a:endParaRPr>
-          </a:p>
-        </p:txBody>
-      </p:sp>
-      <p:sp>
-        <p:nvSpPr>
-          <p:cNvPr id="59" name="PlaceHolder 5"/>
-          <p:cNvSpPr>
-            <a:spLocks noGrp="1"/>
-          </p:cNvSpPr>
-          <p:nvPr>
-            <p:ph type="sldNum" idx="33"/>
-          </p:nvPr>
-        </p:nvSpPr>
-        <p:spPr>
-          <a:xfrm>
-            <a:off x="4843440" y="9181440"/>
-            <a:ext cx="1537920" cy="522360"/>
-          </a:xfrm>
-          <a:prstGeom prst="rect">
-            <a:avLst/>
-          </a:prstGeom>
-          <a:noFill/>
-          <a:ln w="0">
-            <a:noFill/>
-          </a:ln>
-        </p:spPr>
-        <p:txBody>
-          <a:bodyPr lIns="91440" rIns="91440" tIns="45720" bIns="45720" anchor="ctr">
-            <a:noAutofit/>
-          </a:bodyPr>
-          <a:lstStyle>
-            <a:lvl1pPr indent="0" algn="r" defTabSz="457200">
-              <a:lnSpc>
-                <a:spcPct val="100000"/>
-              </a:lnSpc>
-              <a:buNone/>
-              <a:tabLst>
-                <a:tab algn="l" pos="0"/>
-              </a:tabLst>
-              <a:defRPr lang="de-DE" sz="900" b="0" u="none" strike="noStrike">
-                <a:solidFill>
-                  <a:schemeClr val="dk1">
-                    <a:tint val="75000"/>
-                  </a:schemeClr>
-                </a:solidFill>
-                <a:effectLst/>
-                <a:uFillTx/>
-                <a:latin typeface="Calibri"/>
-              </a:defRPr>
-            </a:lvl1pPr>
-          </a:lstStyle>
-          <a:p>
-            <a:pPr indent="0" algn="r" defTabSz="457200">
-              <a:lnSpc>
-                <a:spcPct val="100000"/>
-              </a:lnSpc>
-              <a:buNone/>
-              <a:tabLst>
-                <a:tab algn="l" pos="0"/>
-              </a:tabLst>
-            </a:pPr>
-            <a:fld id="{EC71273B-DE2A-4BF5-8393-EA4F2C7C2099}" type="slidenum">
-              <a:rPr lang="de-DE" sz="900" b="0" u="none" strike="noStrike">
-                <a:solidFill>
-                  <a:schemeClr val="dk1">
-                    <a:tint val="75000"/>
-                  </a:schemeClr>
-                </a:solidFill>
-                <a:effectLst/>
-                <a:uFillTx/>
-                <a:latin typeface="Calibri"/>
-              </a:rPr>
-              <a:t>&lt;Foliennummer&gt;</a:t>
-            </a:fld>
-            <a:endParaRPr lang="de-DE" sz="900" b="0" u="none" strike="noStrike">
-              <a:solidFill>
-                <a:srgbClr val="000000"/>
-              </a:solidFill>
-              <a:effectLst/>
-              <a:uFillTx/>
-              <a:latin typeface="Times New Roman"/>
-            </a:endParaRPr>
-          </a:p>
-        </p:txBody>
-      </p:sp>
-    </p:spTree>
-  </p:cSld>
-</p:sldLayout>
-</file>
-
-<file path=ppt/slideLayouts/slideLayout2.xml><?xml version="1.0" encoding="utf-8"?>
+<file path=ppt/slideLayouts/slideLayout8.xml><?xml version="1.0" encoding="utf-8"?>
 <p:sldLayout xmlns:a="http://schemas.openxmlformats.org/drawingml/2006/main" xmlns:p="http://schemas.openxmlformats.org/presentationml/2006/main" xmlns:r="http://schemas.openxmlformats.org/officeDocument/2006/relationships" xmlns:p14="http://schemas.microsoft.com/office/powerpoint/2010/main" xmlns:p15="http://schemas.microsoft.com/office/powerpoint/2012/main" xmlns:mc="http://schemas.openxmlformats.org/markup-compatibility/2006" type="blank" preserve="1">
   <p:cSld name="Vergleich">
     <p:bg>
@@ -1688,7 +4663,7 @@
       </p:grpSpPr>
       <p:sp>
         <p:nvSpPr>
-          <p:cNvPr id="8" name="PlaceHolder 1"/>
+          <p:cNvPr id="39" name="PlaceHolder 1"/>
           <p:cNvSpPr>
             <a:spLocks noGrp="1"/>
           </p:cNvSpPr>
@@ -1699,7 +4674,7 @@
         <p:spPr>
           <a:xfrm>
             <a:off x="472320" y="527400"/>
-            <a:ext cx="5910120" cy="1909800"/>
+            <a:ext cx="5909400" cy="1909080"/>
           </a:xfrm>
           <a:prstGeom prst="rect">
             <a:avLst/>
@@ -1747,7 +4722,7 @@
       </p:sp>
       <p:sp>
         <p:nvSpPr>
-          <p:cNvPr id="9" name="PlaceHolder 2"/>
+          <p:cNvPr id="40" name="PlaceHolder 2"/>
           <p:cNvSpPr>
             <a:spLocks noGrp="1"/>
           </p:cNvSpPr>
@@ -1758,7 +4733,7 @@
         <p:spPr>
           <a:xfrm>
             <a:off x="472320" y="2428200"/>
-            <a:ext cx="2896200" cy="1185120"/>
+            <a:ext cx="2895480" cy="1184400"/>
           </a:xfrm>
           <a:prstGeom prst="rect">
             <a:avLst/>
@@ -1809,7 +4784,7 @@
       </p:sp>
       <p:sp>
         <p:nvSpPr>
-          <p:cNvPr id="10" name="PlaceHolder 3"/>
+          <p:cNvPr id="41" name="PlaceHolder 3"/>
           <p:cNvSpPr>
             <a:spLocks noGrp="1"/>
           </p:cNvSpPr>
@@ -1820,7 +4795,7 @@
         <p:spPr>
           <a:xfrm>
             <a:off x="472320" y="3618360"/>
-            <a:ext cx="2896200" cy="5317200"/>
+            <a:ext cx="2895480" cy="5316480"/>
           </a:xfrm>
           <a:prstGeom prst="rect">
             <a:avLst/>
@@ -2008,7 +4983,7 @@
       </p:sp>
       <p:sp>
         <p:nvSpPr>
-          <p:cNvPr id="11" name="PlaceHolder 4"/>
+          <p:cNvPr id="42" name="PlaceHolder 4"/>
           <p:cNvSpPr>
             <a:spLocks noGrp="1"/>
           </p:cNvSpPr>
@@ -2019,7 +4994,7 @@
         <p:spPr>
           <a:xfrm>
             <a:off x="3471840" y="2428200"/>
-            <a:ext cx="2910600" cy="1185120"/>
+            <a:ext cx="2909880" cy="1184400"/>
           </a:xfrm>
           <a:prstGeom prst="rect">
             <a:avLst/>
@@ -2070,7 +5045,7 @@
       </p:sp>
       <p:sp>
         <p:nvSpPr>
-          <p:cNvPr id="12" name="PlaceHolder 5"/>
+          <p:cNvPr id="43" name="PlaceHolder 5"/>
           <p:cNvSpPr>
             <a:spLocks noGrp="1"/>
           </p:cNvSpPr>
@@ -2081,7 +5056,7 @@
         <p:spPr>
           <a:xfrm>
             <a:off x="3471840" y="3618360"/>
-            <a:ext cx="2910600" cy="5317200"/>
+            <a:ext cx="2909880" cy="5316480"/>
           </a:xfrm>
           <a:prstGeom prst="rect">
             <a:avLst/>
@@ -2269,18 +5244,18 @@
       </p:sp>
       <p:sp>
         <p:nvSpPr>
-          <p:cNvPr id="13" name="PlaceHolder 6"/>
+          <p:cNvPr id="44" name="PlaceHolder 6"/>
           <p:cNvSpPr>
             <a:spLocks noGrp="1"/>
           </p:cNvSpPr>
           <p:nvPr>
-            <p:ph type="dt" idx="4"/>
+            <p:ph type="dt" idx="22"/>
           </p:nvPr>
         </p:nvSpPr>
         <p:spPr>
           <a:xfrm>
             <a:off x="471600" y="9181440"/>
-            <a:ext cx="1537920" cy="522360"/>
+            <a:ext cx="1537200" cy="521640"/>
           </a:xfrm>
           <a:prstGeom prst="rect">
             <a:avLst/>
@@ -2351,18 +5326,18 @@
       </p:sp>
       <p:sp>
         <p:nvSpPr>
-          <p:cNvPr id="14" name="PlaceHolder 7"/>
+          <p:cNvPr id="45" name="PlaceHolder 7"/>
           <p:cNvSpPr>
             <a:spLocks noGrp="1"/>
           </p:cNvSpPr>
           <p:nvPr>
-            <p:ph type="ftr" idx="5"/>
+            <p:ph type="ftr" idx="23"/>
           </p:nvPr>
         </p:nvSpPr>
         <p:spPr>
           <a:xfrm>
             <a:off x="2271600" y="9181440"/>
-            <a:ext cx="2309400" cy="522360"/>
+            <a:ext cx="2308680" cy="521640"/>
           </a:xfrm>
           <a:prstGeom prst="rect">
             <a:avLst/>
@@ -2429,18 +5404,18 @@
       </p:sp>
       <p:sp>
         <p:nvSpPr>
-          <p:cNvPr id="15" name="PlaceHolder 8"/>
+          <p:cNvPr id="46" name="PlaceHolder 8"/>
           <p:cNvSpPr>
             <a:spLocks noGrp="1"/>
           </p:cNvSpPr>
           <p:nvPr>
-            <p:ph type="sldNum" idx="6"/>
+            <p:ph type="sldNum" idx="24"/>
           </p:nvPr>
         </p:nvSpPr>
         <p:spPr>
           <a:xfrm>
             <a:off x="4843440" y="9181440"/>
-            <a:ext cx="1537920" cy="522360"/>
+            <a:ext cx="1537200" cy="521640"/>
           </a:xfrm>
           <a:prstGeom prst="rect">
             <a:avLst/>
@@ -2485,7 +5460,7 @@
                 <a:tab algn="l" pos="0"/>
               </a:tabLst>
             </a:pPr>
-            <a:fld id="{FA9E473F-8368-4415-A160-48054DEC582B}" type="slidenum">
+            <a:fld id="{7D73BE63-F4C4-499D-9BD5-C854C22B5A1C}" type="slidenum">
               <a:rPr lang="de-DE" sz="900" b="0" u="none" strike="noStrike">
                 <a:solidFill>
                   <a:schemeClr val="dk1">
@@ -2514,7 +5489,7 @@
 </p:sldLayout>
 </file>
 
-<file path=ppt/slideLayouts/slideLayout3.xml><?xml version="1.0" encoding="utf-8"?>
+<file path=ppt/slideLayouts/slideLayout9.xml><?xml version="1.0" encoding="utf-8"?>
 <p:sldLayout xmlns:a="http://schemas.openxmlformats.org/drawingml/2006/main" xmlns:p="http://schemas.openxmlformats.org/presentationml/2006/main" xmlns:r="http://schemas.openxmlformats.org/officeDocument/2006/relationships" xmlns:p14="http://schemas.microsoft.com/office/powerpoint/2010/main" xmlns:p15="http://schemas.microsoft.com/office/powerpoint/2012/main" xmlns:mc="http://schemas.openxmlformats.org/markup-compatibility/2006" type="titleOnly" preserve="1">
   <p:cSld name="Nur Titel">
     <p:bg>
@@ -2540,7 +5515,7 @@
       </p:grpSpPr>
       <p:sp>
         <p:nvSpPr>
-          <p:cNvPr id="16" name="PlaceHolder 1"/>
+          <p:cNvPr id="47" name="PlaceHolder 1"/>
           <p:cNvSpPr>
             <a:spLocks noGrp="1"/>
           </p:cNvSpPr>
@@ -2551,7 +5526,7 @@
         <p:spPr>
           <a:xfrm>
             <a:off x="471600" y="527400"/>
-            <a:ext cx="5910120" cy="1909800"/>
+            <a:ext cx="5909400" cy="1909080"/>
           </a:xfrm>
           <a:prstGeom prst="rect">
             <a:avLst/>
@@ -2599,2982 +5574,7 @@
       </p:sp>
       <p:sp>
         <p:nvSpPr>
-          <p:cNvPr id="17" name="PlaceHolder 2"/>
-          <p:cNvSpPr>
-            <a:spLocks noGrp="1"/>
-          </p:cNvSpPr>
-          <p:nvPr>
-            <p:ph type="dt" idx="7"/>
-          </p:nvPr>
-        </p:nvSpPr>
-        <p:spPr>
-          <a:xfrm>
-            <a:off x="471600" y="9181440"/>
-            <a:ext cx="1537920" cy="522360"/>
-          </a:xfrm>
-          <a:prstGeom prst="rect">
-            <a:avLst/>
-          </a:prstGeom>
-          <a:noFill/>
-          <a:ln w="0">
-            <a:noFill/>
-          </a:ln>
-        </p:spPr>
-        <p:txBody>
-          <a:bodyPr lIns="91440" rIns="91440" tIns="45720" bIns="45720" anchor="ctr">
-            <a:noAutofit/>
-          </a:bodyPr>
-          <a:lstStyle>
-            <a:lvl1pPr indent="0" defTabSz="457200">
-              <a:lnSpc>
-                <a:spcPct val="100000"/>
-              </a:lnSpc>
-              <a:buNone/>
-              <a:tabLst>
-                <a:tab algn="l" pos="0"/>
-              </a:tabLst>
-              <a:defRPr lang="de-DE" sz="900" b="0" u="none" strike="noStrike">
-                <a:solidFill>
-                  <a:schemeClr val="dk1">
-                    <a:tint val="75000"/>
-                  </a:schemeClr>
-                </a:solidFill>
-                <a:effectLst/>
-                <a:uFillTx/>
-                <a:latin typeface="Calibri"/>
-              </a:defRPr>
-            </a:lvl1pPr>
-          </a:lstStyle>
-          <a:p>
-            <a:pPr indent="0" defTabSz="457200">
-              <a:lnSpc>
-                <a:spcPct val="100000"/>
-              </a:lnSpc>
-              <a:buNone/>
-              <a:tabLst>
-                <a:tab algn="l" pos="0"/>
-              </a:tabLst>
-            </a:pPr>
-            <a:r>
-              <a:rPr lang="de-DE" sz="900" b="0" u="none" strike="noStrike">
-                <a:solidFill>
-                  <a:schemeClr val="dk1">
-                    <a:tint val="75000"/>
-                  </a:schemeClr>
-                </a:solidFill>
-                <a:effectLst/>
-                <a:uFillTx/>
-                <a:latin typeface="Calibri"/>
-              </a:rPr>
-              <a:t>&lt;Datum/Uhrzeit&gt;</a:t>
-            </a:r>
-            <a:endParaRPr lang="de-DE" sz="900" b="0" u="none" strike="noStrike">
-              <a:solidFill>
-                <a:srgbClr val="000000"/>
-              </a:solidFill>
-              <a:effectLst/>
-              <a:uFillTx/>
-              <a:latin typeface="Times New Roman"/>
-            </a:endParaRPr>
-          </a:p>
-        </p:txBody>
-      </p:sp>
-      <p:sp>
-        <p:nvSpPr>
-          <p:cNvPr id="18" name="PlaceHolder 3"/>
-          <p:cNvSpPr>
-            <a:spLocks noGrp="1"/>
-          </p:cNvSpPr>
-          <p:nvPr>
-            <p:ph type="ftr" idx="8"/>
-          </p:nvPr>
-        </p:nvSpPr>
-        <p:spPr>
-          <a:xfrm>
-            <a:off x="2271600" y="9181440"/>
-            <a:ext cx="2309400" cy="522360"/>
-          </a:xfrm>
-          <a:prstGeom prst="rect">
-            <a:avLst/>
-          </a:prstGeom>
-          <a:noFill/>
-          <a:ln w="0">
-            <a:noFill/>
-          </a:ln>
-        </p:spPr>
-        <p:txBody>
-          <a:bodyPr lIns="91440" rIns="91440" tIns="45720" bIns="45720" anchor="ctr">
-            <a:noAutofit/>
-          </a:bodyPr>
-          <a:lstStyle>
-            <a:lvl1pPr indent="0" algn="ctr">
-              <a:lnSpc>
-                <a:spcPct val="100000"/>
-              </a:lnSpc>
-              <a:buNone/>
-              <a:tabLst>
-                <a:tab algn="l" pos="0"/>
-              </a:tabLst>
-              <a:defRPr lang="de-DE" sz="1400" b="0" u="none" strike="noStrike">
-                <a:solidFill>
-                  <a:srgbClr val="000000"/>
-                </a:solidFill>
-                <a:effectLst/>
-                <a:uFillTx/>
-                <a:latin typeface="Times New Roman"/>
-              </a:defRPr>
-            </a:lvl1pPr>
-          </a:lstStyle>
-          <a:p>
-            <a:pPr indent="0" algn="ctr">
-              <a:lnSpc>
-                <a:spcPct val="100000"/>
-              </a:lnSpc>
-              <a:buNone/>
-              <a:tabLst>
-                <a:tab algn="l" pos="0"/>
-              </a:tabLst>
-            </a:pPr>
-            <a:r>
-              <a:rPr lang="de-DE" sz="1400" b="0" u="none" strike="noStrike">
-                <a:solidFill>
-                  <a:srgbClr val="000000"/>
-                </a:solidFill>
-                <a:effectLst/>
-                <a:uFillTx/>
-                <a:latin typeface="Times New Roman"/>
-              </a:rPr>
-              <a:t>&lt;Fußzeile&gt;</a:t>
-            </a:r>
-            <a:endParaRPr lang="de-DE" sz="1400" b="0" u="none" strike="noStrike">
-              <a:solidFill>
-                <a:srgbClr val="000000"/>
-              </a:solidFill>
-              <a:effectLst/>
-              <a:uFillTx/>
-              <a:latin typeface="Times New Roman"/>
-            </a:endParaRPr>
-          </a:p>
-        </p:txBody>
-      </p:sp>
-      <p:sp>
-        <p:nvSpPr>
-          <p:cNvPr id="19" name="PlaceHolder 4"/>
-          <p:cNvSpPr>
-            <a:spLocks noGrp="1"/>
-          </p:cNvSpPr>
-          <p:nvPr>
-            <p:ph type="sldNum" idx="9"/>
-          </p:nvPr>
-        </p:nvSpPr>
-        <p:spPr>
-          <a:xfrm>
-            <a:off x="4843440" y="9181440"/>
-            <a:ext cx="1537920" cy="522360"/>
-          </a:xfrm>
-          <a:prstGeom prst="rect">
-            <a:avLst/>
-          </a:prstGeom>
-          <a:noFill/>
-          <a:ln w="0">
-            <a:noFill/>
-          </a:ln>
-        </p:spPr>
-        <p:txBody>
-          <a:bodyPr lIns="91440" rIns="91440" tIns="45720" bIns="45720" anchor="ctr">
-            <a:noAutofit/>
-          </a:bodyPr>
-          <a:lstStyle>
-            <a:lvl1pPr indent="0" algn="r" defTabSz="457200">
-              <a:lnSpc>
-                <a:spcPct val="100000"/>
-              </a:lnSpc>
-              <a:buNone/>
-              <a:tabLst>
-                <a:tab algn="l" pos="0"/>
-              </a:tabLst>
-              <a:defRPr lang="de-DE" sz="900" b="0" u="none" strike="noStrike">
-                <a:solidFill>
-                  <a:schemeClr val="dk1">
-                    <a:tint val="75000"/>
-                  </a:schemeClr>
-                </a:solidFill>
-                <a:effectLst/>
-                <a:uFillTx/>
-                <a:latin typeface="Calibri"/>
-              </a:defRPr>
-            </a:lvl1pPr>
-          </a:lstStyle>
-          <a:p>
-            <a:pPr indent="0" algn="r" defTabSz="457200">
-              <a:lnSpc>
-                <a:spcPct val="100000"/>
-              </a:lnSpc>
-              <a:buNone/>
-              <a:tabLst>
-                <a:tab algn="l" pos="0"/>
-              </a:tabLst>
-            </a:pPr>
-            <a:fld id="{12DFBC8E-7C08-4D5A-98CF-8EAD8BB693F2}" type="slidenum">
-              <a:rPr lang="de-DE" sz="900" b="0" u="none" strike="noStrike">
-                <a:solidFill>
-                  <a:schemeClr val="dk1">
-                    <a:tint val="75000"/>
-                  </a:schemeClr>
-                </a:solidFill>
-                <a:effectLst/>
-                <a:uFillTx/>
-                <a:latin typeface="Calibri"/>
-              </a:rPr>
-              <a:t>&lt;Foliennummer&gt;</a:t>
-            </a:fld>
-            <a:endParaRPr lang="de-DE" sz="900" b="0" u="none" strike="noStrike">
-              <a:solidFill>
-                <a:srgbClr val="000000"/>
-              </a:solidFill>
-              <a:effectLst/>
-              <a:uFillTx/>
-              <a:latin typeface="Times New Roman"/>
-            </a:endParaRPr>
-          </a:p>
-        </p:txBody>
-      </p:sp>
-    </p:spTree>
-  </p:cSld>
-</p:sldLayout>
-</file>
-
-<file path=ppt/slideLayouts/slideLayout4.xml><?xml version="1.0" encoding="utf-8"?>
-<p:sldLayout xmlns:a="http://schemas.openxmlformats.org/drawingml/2006/main" xmlns:p="http://schemas.openxmlformats.org/presentationml/2006/main" xmlns:r="http://schemas.openxmlformats.org/officeDocument/2006/relationships" xmlns:p14="http://schemas.microsoft.com/office/powerpoint/2010/main" xmlns:p15="http://schemas.microsoft.com/office/powerpoint/2012/main" xmlns:mc="http://schemas.openxmlformats.org/markup-compatibility/2006" type="blank" preserve="1">
-  <p:cSld name="Leer">
-    <p:bg>
-      <p:bgPr>
-        <a:solidFill>
-          <a:srgbClr val="ffffff"/>
-        </a:solidFill>
-      </p:bgPr>
-    </p:bg>
-    <p:spTree>
-      <p:nvGrpSpPr>
-        <p:cNvPr id="1" name=""/>
-        <p:cNvGrpSpPr/>
-        <p:nvPr/>
-      </p:nvGrpSpPr>
-      <p:grpSpPr>
-        <a:xfrm>
-          <a:off x="0" y="0"/>
-          <a:ext cx="0" cy="0"/>
-          <a:chOff x="0" y="0"/>
-          <a:chExt cx="0" cy="0"/>
-        </a:xfrm>
-      </p:grpSpPr>
-      <p:sp>
-        <p:nvSpPr>
-          <p:cNvPr id="20" name="PlaceHolder 1"/>
-          <p:cNvSpPr>
-            <a:spLocks noGrp="1"/>
-          </p:cNvSpPr>
-          <p:nvPr>
-            <p:ph type="dt" idx="10"/>
-          </p:nvPr>
-        </p:nvSpPr>
-        <p:spPr>
-          <a:xfrm>
-            <a:off x="471600" y="9181440"/>
-            <a:ext cx="1537920" cy="522360"/>
-          </a:xfrm>
-          <a:prstGeom prst="rect">
-            <a:avLst/>
-          </a:prstGeom>
-          <a:noFill/>
-          <a:ln w="0">
-            <a:noFill/>
-          </a:ln>
-        </p:spPr>
-        <p:txBody>
-          <a:bodyPr lIns="91440" rIns="91440" tIns="45720" bIns="45720" anchor="ctr">
-            <a:noAutofit/>
-          </a:bodyPr>
-          <a:lstStyle>
-            <a:lvl1pPr indent="0" defTabSz="457200">
-              <a:lnSpc>
-                <a:spcPct val="100000"/>
-              </a:lnSpc>
-              <a:buNone/>
-              <a:tabLst>
-                <a:tab algn="l" pos="0"/>
-              </a:tabLst>
-              <a:defRPr lang="de-DE" sz="900" b="0" u="none" strike="noStrike">
-                <a:solidFill>
-                  <a:schemeClr val="dk1">
-                    <a:tint val="75000"/>
-                  </a:schemeClr>
-                </a:solidFill>
-                <a:effectLst/>
-                <a:uFillTx/>
-                <a:latin typeface="Calibri"/>
-              </a:defRPr>
-            </a:lvl1pPr>
-          </a:lstStyle>
-          <a:p>
-            <a:pPr indent="0" defTabSz="457200">
-              <a:lnSpc>
-                <a:spcPct val="100000"/>
-              </a:lnSpc>
-              <a:buNone/>
-              <a:tabLst>
-                <a:tab algn="l" pos="0"/>
-              </a:tabLst>
-            </a:pPr>
-            <a:r>
-              <a:rPr lang="de-DE" sz="900" b="0" u="none" strike="noStrike">
-                <a:solidFill>
-                  <a:schemeClr val="dk1">
-                    <a:tint val="75000"/>
-                  </a:schemeClr>
-                </a:solidFill>
-                <a:effectLst/>
-                <a:uFillTx/>
-                <a:latin typeface="Calibri"/>
-              </a:rPr>
-              <a:t>&lt;Datum/Uhrzeit&gt;</a:t>
-            </a:r>
-            <a:endParaRPr lang="de-DE" sz="900" b="0" u="none" strike="noStrike">
-              <a:solidFill>
-                <a:srgbClr val="000000"/>
-              </a:solidFill>
-              <a:effectLst/>
-              <a:uFillTx/>
-              <a:latin typeface="Times New Roman"/>
-            </a:endParaRPr>
-          </a:p>
-        </p:txBody>
-      </p:sp>
-      <p:sp>
-        <p:nvSpPr>
-          <p:cNvPr id="21" name="PlaceHolder 2"/>
-          <p:cNvSpPr>
-            <a:spLocks noGrp="1"/>
-          </p:cNvSpPr>
-          <p:nvPr>
-            <p:ph type="ftr" idx="11"/>
-          </p:nvPr>
-        </p:nvSpPr>
-        <p:spPr>
-          <a:xfrm>
-            <a:off x="2271600" y="9181440"/>
-            <a:ext cx="2309400" cy="522360"/>
-          </a:xfrm>
-          <a:prstGeom prst="rect">
-            <a:avLst/>
-          </a:prstGeom>
-          <a:noFill/>
-          <a:ln w="0">
-            <a:noFill/>
-          </a:ln>
-        </p:spPr>
-        <p:txBody>
-          <a:bodyPr lIns="91440" rIns="91440" tIns="45720" bIns="45720" anchor="ctr">
-            <a:noAutofit/>
-          </a:bodyPr>
-          <a:lstStyle>
-            <a:lvl1pPr indent="0" algn="ctr">
-              <a:lnSpc>
-                <a:spcPct val="100000"/>
-              </a:lnSpc>
-              <a:buNone/>
-              <a:tabLst>
-                <a:tab algn="l" pos="0"/>
-              </a:tabLst>
-              <a:defRPr lang="de-DE" sz="1400" b="0" u="none" strike="noStrike">
-                <a:solidFill>
-                  <a:srgbClr val="000000"/>
-                </a:solidFill>
-                <a:effectLst/>
-                <a:uFillTx/>
-                <a:latin typeface="Times New Roman"/>
-              </a:defRPr>
-            </a:lvl1pPr>
-          </a:lstStyle>
-          <a:p>
-            <a:pPr indent="0" algn="ctr">
-              <a:lnSpc>
-                <a:spcPct val="100000"/>
-              </a:lnSpc>
-              <a:buNone/>
-              <a:tabLst>
-                <a:tab algn="l" pos="0"/>
-              </a:tabLst>
-            </a:pPr>
-            <a:r>
-              <a:rPr lang="de-DE" sz="1400" b="0" u="none" strike="noStrike">
-                <a:solidFill>
-                  <a:srgbClr val="000000"/>
-                </a:solidFill>
-                <a:effectLst/>
-                <a:uFillTx/>
-                <a:latin typeface="Times New Roman"/>
-              </a:rPr>
-              <a:t>&lt;Fußzeile&gt;</a:t>
-            </a:r>
-            <a:endParaRPr lang="de-DE" sz="1400" b="0" u="none" strike="noStrike">
-              <a:solidFill>
-                <a:srgbClr val="000000"/>
-              </a:solidFill>
-              <a:effectLst/>
-              <a:uFillTx/>
-              <a:latin typeface="Times New Roman"/>
-            </a:endParaRPr>
-          </a:p>
-        </p:txBody>
-      </p:sp>
-      <p:sp>
-        <p:nvSpPr>
-          <p:cNvPr id="22" name="PlaceHolder 3"/>
-          <p:cNvSpPr>
-            <a:spLocks noGrp="1"/>
-          </p:cNvSpPr>
-          <p:nvPr>
-            <p:ph type="sldNum" idx="12"/>
-          </p:nvPr>
-        </p:nvSpPr>
-        <p:spPr>
-          <a:xfrm>
-            <a:off x="4843440" y="9181440"/>
-            <a:ext cx="1537920" cy="522360"/>
-          </a:xfrm>
-          <a:prstGeom prst="rect">
-            <a:avLst/>
-          </a:prstGeom>
-          <a:noFill/>
-          <a:ln w="0">
-            <a:noFill/>
-          </a:ln>
-        </p:spPr>
-        <p:txBody>
-          <a:bodyPr lIns="91440" rIns="91440" tIns="45720" bIns="45720" anchor="ctr">
-            <a:noAutofit/>
-          </a:bodyPr>
-          <a:lstStyle>
-            <a:lvl1pPr indent="0" algn="r" defTabSz="457200">
-              <a:lnSpc>
-                <a:spcPct val="100000"/>
-              </a:lnSpc>
-              <a:buNone/>
-              <a:tabLst>
-                <a:tab algn="l" pos="0"/>
-              </a:tabLst>
-              <a:defRPr lang="de-DE" sz="900" b="0" u="none" strike="noStrike">
-                <a:solidFill>
-                  <a:schemeClr val="dk1">
-                    <a:tint val="75000"/>
-                  </a:schemeClr>
-                </a:solidFill>
-                <a:effectLst/>
-                <a:uFillTx/>
-                <a:latin typeface="Calibri"/>
-              </a:defRPr>
-            </a:lvl1pPr>
-          </a:lstStyle>
-          <a:p>
-            <a:pPr indent="0" algn="r" defTabSz="457200">
-              <a:lnSpc>
-                <a:spcPct val="100000"/>
-              </a:lnSpc>
-              <a:buNone/>
-              <a:tabLst>
-                <a:tab algn="l" pos="0"/>
-              </a:tabLst>
-            </a:pPr>
-            <a:fld id="{E3CEECCA-C776-47F8-8304-FB9D72CEC527}" type="slidenum">
-              <a:rPr lang="de-DE" sz="900" b="0" u="none" strike="noStrike">
-                <a:solidFill>
-                  <a:schemeClr val="dk1">
-                    <a:tint val="75000"/>
-                  </a:schemeClr>
-                </a:solidFill>
-                <a:effectLst/>
-                <a:uFillTx/>
-                <a:latin typeface="Calibri"/>
-              </a:rPr>
-              <a:t>&lt;Foliennummer&gt;</a:t>
-            </a:fld>
-            <a:endParaRPr lang="de-DE" sz="900" b="0" u="none" strike="noStrike">
-              <a:solidFill>
-                <a:srgbClr val="000000"/>
-              </a:solidFill>
-              <a:effectLst/>
-              <a:uFillTx/>
-              <a:latin typeface="Times New Roman"/>
-            </a:endParaRPr>
-          </a:p>
-        </p:txBody>
-      </p:sp>
-    </p:spTree>
-  </p:cSld>
-</p:sldLayout>
-</file>
-
-<file path=ppt/slideLayouts/slideLayout5.xml><?xml version="1.0" encoding="utf-8"?>
-<p:sldLayout xmlns:a="http://schemas.openxmlformats.org/drawingml/2006/main" xmlns:p="http://schemas.openxmlformats.org/presentationml/2006/main" xmlns:r="http://schemas.openxmlformats.org/officeDocument/2006/relationships" xmlns:p14="http://schemas.microsoft.com/office/powerpoint/2010/main" xmlns:p15="http://schemas.microsoft.com/office/powerpoint/2012/main" xmlns:mc="http://schemas.openxmlformats.org/markup-compatibility/2006" type="blank" preserve="1">
-  <p:cSld name="Inhalt mit Überschrift">
-    <p:bg>
-      <p:bgPr>
-        <a:solidFill>
-          <a:srgbClr val="ffffff"/>
-        </a:solidFill>
-      </p:bgPr>
-    </p:bg>
-    <p:spTree>
-      <p:nvGrpSpPr>
-        <p:cNvPr id="1" name=""/>
-        <p:cNvGrpSpPr/>
-        <p:nvPr/>
-      </p:nvGrpSpPr>
-      <p:grpSpPr>
-        <a:xfrm>
-          <a:off x="0" y="0"/>
-          <a:ext cx="0" cy="0"/>
-          <a:chOff x="0" y="0"/>
-          <a:chExt cx="0" cy="0"/>
-        </a:xfrm>
-      </p:grpSpPr>
-      <p:sp>
-        <p:nvSpPr>
-          <p:cNvPr id="23" name="PlaceHolder 1"/>
-          <p:cNvSpPr>
-            <a:spLocks noGrp="1"/>
-          </p:cNvSpPr>
-          <p:nvPr>
-            <p:ph type="title"/>
-          </p:nvPr>
-        </p:nvSpPr>
-        <p:spPr>
-          <a:xfrm>
-            <a:off x="472320" y="660240"/>
-            <a:ext cx="2206800" cy="2306520"/>
-          </a:xfrm>
-          <a:prstGeom prst="rect">
-            <a:avLst/>
-          </a:prstGeom>
-          <a:noFill/>
-          <a:ln w="0">
-            <a:noFill/>
-          </a:ln>
-        </p:spPr>
-        <p:txBody>
-          <a:bodyPr lIns="91440" rIns="91440" tIns="45720" bIns="45720" anchor="b">
-            <a:noAutofit/>
-          </a:bodyPr>
-          <a:p>
-            <a:pPr indent="0" defTabSz="685800">
-              <a:lnSpc>
-                <a:spcPct val="90000"/>
-              </a:lnSpc>
-              <a:buNone/>
-              <a:tabLst>
-                <a:tab algn="l" pos="0"/>
-              </a:tabLst>
-            </a:pPr>
-            <a:r>
-              <a:rPr lang="de-DE" sz="2400" b="0" u="none" strike="noStrike">
-                <a:solidFill>
-                  <a:schemeClr val="dk1"/>
-                </a:solidFill>
-                <a:effectLst/>
-                <a:uFillTx/>
-                <a:latin typeface="Calibri Light"/>
-              </a:rPr>
-              <a:t>Mastertitelformat bearbeiten</a:t>
-            </a:r>
-            <a:endParaRPr lang="de-DE" sz="2400" b="0" u="none" strike="noStrike">
-              <a:solidFill>
-                <a:srgbClr val="000000"/>
-              </a:solidFill>
-              <a:effectLst/>
-              <a:uFillTx/>
-              <a:latin typeface="Arial"/>
-            </a:endParaRPr>
-          </a:p>
-        </p:txBody>
-      </p:sp>
-      <p:sp>
-        <p:nvSpPr>
-          <p:cNvPr id="24" name="PlaceHolder 2"/>
-          <p:cNvSpPr>
-            <a:spLocks noGrp="1"/>
-          </p:cNvSpPr>
-          <p:nvPr>
-            <p:ph type="body"/>
-          </p:nvPr>
-        </p:nvSpPr>
-        <p:spPr>
-          <a:xfrm>
-            <a:off x="2915640" y="1426320"/>
-            <a:ext cx="3466800" cy="7034760"/>
-          </a:xfrm>
-          <a:prstGeom prst="rect">
-            <a:avLst/>
-          </a:prstGeom>
-          <a:noFill/>
-          <a:ln w="0">
-            <a:noFill/>
-          </a:ln>
-        </p:spPr>
-        <p:txBody>
-          <a:bodyPr lIns="91440" rIns="91440" tIns="45720" bIns="45720" anchor="t">
-            <a:noAutofit/>
-          </a:bodyPr>
-          <a:p>
-            <a:pPr marL="171360" indent="-171360" defTabSz="685800">
-              <a:lnSpc>
-                <a:spcPct val="90000"/>
-              </a:lnSpc>
-              <a:spcBef>
-                <a:spcPts val="751"/>
-              </a:spcBef>
-              <a:buClr>
-                <a:srgbClr val="000000"/>
-              </a:buClr>
-              <a:buFont typeface="Arial"/>
-              <a:buChar char="•"/>
-            </a:pPr>
-            <a:r>
-              <a:rPr lang="de-DE" sz="2400" b="0" u="none" strike="noStrike">
-                <a:solidFill>
-                  <a:schemeClr val="dk1"/>
-                </a:solidFill>
-                <a:effectLst/>
-                <a:uFillTx/>
-                <a:latin typeface="Calibri"/>
-              </a:rPr>
-              <a:t>Mastertextformat bearbeiten</a:t>
-            </a:r>
-            <a:endParaRPr lang="de-DE" sz="2400" b="0" u="none" strike="noStrike">
-              <a:solidFill>
-                <a:srgbClr val="000000"/>
-              </a:solidFill>
-              <a:effectLst/>
-              <a:uFillTx/>
-              <a:latin typeface="Arial"/>
-            </a:endParaRPr>
-          </a:p>
-          <a:p>
-            <a:pPr marL="514440" lvl="1" indent="-171360" defTabSz="685800">
-              <a:lnSpc>
-                <a:spcPct val="90000"/>
-              </a:lnSpc>
-              <a:spcBef>
-                <a:spcPts val="374"/>
-              </a:spcBef>
-              <a:buClr>
-                <a:srgbClr val="000000"/>
-              </a:buClr>
-              <a:buFont typeface="Arial"/>
-              <a:buChar char="•"/>
-            </a:pPr>
-            <a:r>
-              <a:rPr lang="de-DE" sz="2100" b="0" u="none" strike="noStrike">
-                <a:solidFill>
-                  <a:schemeClr val="dk1"/>
-                </a:solidFill>
-                <a:effectLst/>
-                <a:uFillTx/>
-                <a:latin typeface="Calibri"/>
-              </a:rPr>
-              <a:t>Zweite Ebene</a:t>
-            </a:r>
-            <a:endParaRPr lang="de-DE" sz="2100" b="0" u="none" strike="noStrike">
-              <a:solidFill>
-                <a:srgbClr val="000000"/>
-              </a:solidFill>
-              <a:effectLst/>
-              <a:uFillTx/>
-              <a:latin typeface="Arial"/>
-            </a:endParaRPr>
-          </a:p>
-          <a:p>
-            <a:pPr marL="857160" lvl="2" indent="-171360" defTabSz="685800">
-              <a:lnSpc>
-                <a:spcPct val="90000"/>
-              </a:lnSpc>
-              <a:spcBef>
-                <a:spcPts val="374"/>
-              </a:spcBef>
-              <a:buClr>
-                <a:srgbClr val="000000"/>
-              </a:buClr>
-              <a:buFont typeface="Arial"/>
-              <a:buChar char="•"/>
-            </a:pPr>
-            <a:r>
-              <a:rPr lang="de-DE" sz="1800" b="0" u="none" strike="noStrike">
-                <a:solidFill>
-                  <a:schemeClr val="dk1"/>
-                </a:solidFill>
-                <a:effectLst/>
-                <a:uFillTx/>
-                <a:latin typeface="Calibri"/>
-              </a:rPr>
-              <a:t>Dritte Ebene</a:t>
-            </a:r>
-            <a:endParaRPr lang="de-DE" sz="1800" b="0" u="none" strike="noStrike">
-              <a:solidFill>
-                <a:srgbClr val="000000"/>
-              </a:solidFill>
-              <a:effectLst/>
-              <a:uFillTx/>
-              <a:latin typeface="Arial"/>
-            </a:endParaRPr>
-          </a:p>
-          <a:p>
-            <a:pPr marL="1200240" lvl="3" indent="-171360" defTabSz="685800">
-              <a:lnSpc>
-                <a:spcPct val="90000"/>
-              </a:lnSpc>
-              <a:spcBef>
-                <a:spcPts val="374"/>
-              </a:spcBef>
-              <a:buClr>
-                <a:srgbClr val="000000"/>
-              </a:buClr>
-              <a:buFont typeface="Arial"/>
-              <a:buChar char="•"/>
-            </a:pPr>
-            <a:r>
-              <a:rPr lang="de-DE" sz="1500" b="0" u="none" strike="noStrike">
-                <a:solidFill>
-                  <a:schemeClr val="dk1"/>
-                </a:solidFill>
-                <a:effectLst/>
-                <a:uFillTx/>
-                <a:latin typeface="Calibri"/>
-              </a:rPr>
-              <a:t>Vierte Ebene</a:t>
-            </a:r>
-            <a:endParaRPr lang="de-DE" sz="1500" b="0" u="none" strike="noStrike">
-              <a:solidFill>
-                <a:srgbClr val="000000"/>
-              </a:solidFill>
-              <a:effectLst/>
-              <a:uFillTx/>
-              <a:latin typeface="Arial"/>
-            </a:endParaRPr>
-          </a:p>
-          <a:p>
-            <a:pPr marL="1542960" lvl="4" indent="-171360" defTabSz="685800">
-              <a:lnSpc>
-                <a:spcPct val="90000"/>
-              </a:lnSpc>
-              <a:spcBef>
-                <a:spcPts val="374"/>
-              </a:spcBef>
-              <a:buClr>
-                <a:srgbClr val="000000"/>
-              </a:buClr>
-              <a:buFont typeface="Arial"/>
-              <a:buChar char="•"/>
-            </a:pPr>
-            <a:r>
-              <a:rPr lang="de-DE" sz="1500" b="0" u="none" strike="noStrike">
-                <a:solidFill>
-                  <a:schemeClr val="dk1"/>
-                </a:solidFill>
-                <a:effectLst/>
-                <a:uFillTx/>
-                <a:latin typeface="Calibri"/>
-              </a:rPr>
-              <a:t>Fünfte Ebene</a:t>
-            </a:r>
-            <a:endParaRPr lang="de-DE" sz="1500" b="0" u="none" strike="noStrike">
-              <a:solidFill>
-                <a:srgbClr val="000000"/>
-              </a:solidFill>
-              <a:effectLst/>
-              <a:uFillTx/>
-              <a:latin typeface="Arial"/>
-            </a:endParaRPr>
-          </a:p>
-        </p:txBody>
-      </p:sp>
-      <p:sp>
-        <p:nvSpPr>
-          <p:cNvPr id="25" name="PlaceHolder 3"/>
-          <p:cNvSpPr>
-            <a:spLocks noGrp="1"/>
-          </p:cNvSpPr>
-          <p:nvPr>
-            <p:ph type="body"/>
-          </p:nvPr>
-        </p:nvSpPr>
-        <p:spPr>
-          <a:xfrm>
-            <a:off x="472320" y="2971800"/>
-            <a:ext cx="2206800" cy="5500440"/>
-          </a:xfrm>
-          <a:prstGeom prst="rect">
-            <a:avLst/>
-          </a:prstGeom>
-          <a:noFill/>
-          <a:ln w="0">
-            <a:noFill/>
-          </a:ln>
-        </p:spPr>
-        <p:txBody>
-          <a:bodyPr lIns="91440" rIns="91440" tIns="45720" bIns="45720" anchor="t">
-            <a:noAutofit/>
-          </a:bodyPr>
-          <a:p>
-            <a:pPr indent="0" defTabSz="685800">
-              <a:lnSpc>
-                <a:spcPct val="90000"/>
-              </a:lnSpc>
-              <a:spcBef>
-                <a:spcPts val="751"/>
-              </a:spcBef>
-              <a:buNone/>
-              <a:tabLst>
-                <a:tab algn="l" pos="0"/>
-              </a:tabLst>
-            </a:pPr>
-            <a:r>
-              <a:rPr lang="de-DE" sz="1200" b="0" u="none" strike="noStrike">
-                <a:solidFill>
-                  <a:schemeClr val="dk1"/>
-                </a:solidFill>
-                <a:effectLst/>
-                <a:uFillTx/>
-                <a:latin typeface="Calibri"/>
-              </a:rPr>
-              <a:t>Mastertextformat bearbeiten</a:t>
-            </a:r>
-            <a:endParaRPr lang="de-DE" sz="1200" b="0" u="none" strike="noStrike">
-              <a:solidFill>
-                <a:srgbClr val="000000"/>
-              </a:solidFill>
-              <a:effectLst/>
-              <a:uFillTx/>
-              <a:latin typeface="Arial"/>
-            </a:endParaRPr>
-          </a:p>
-        </p:txBody>
-      </p:sp>
-      <p:sp>
-        <p:nvSpPr>
-          <p:cNvPr id="26" name="PlaceHolder 4"/>
-          <p:cNvSpPr>
-            <a:spLocks noGrp="1"/>
-          </p:cNvSpPr>
-          <p:nvPr>
-            <p:ph type="dt" idx="13"/>
-          </p:nvPr>
-        </p:nvSpPr>
-        <p:spPr>
-          <a:xfrm>
-            <a:off x="471600" y="9181440"/>
-            <a:ext cx="1537920" cy="522360"/>
-          </a:xfrm>
-          <a:prstGeom prst="rect">
-            <a:avLst/>
-          </a:prstGeom>
-          <a:noFill/>
-          <a:ln w="0">
-            <a:noFill/>
-          </a:ln>
-        </p:spPr>
-        <p:txBody>
-          <a:bodyPr lIns="91440" rIns="91440" tIns="45720" bIns="45720" anchor="ctr">
-            <a:noAutofit/>
-          </a:bodyPr>
-          <a:lstStyle>
-            <a:lvl1pPr indent="0" defTabSz="457200">
-              <a:lnSpc>
-                <a:spcPct val="100000"/>
-              </a:lnSpc>
-              <a:buNone/>
-              <a:tabLst>
-                <a:tab algn="l" pos="0"/>
-              </a:tabLst>
-              <a:defRPr lang="de-DE" sz="900" b="0" u="none" strike="noStrike">
-                <a:solidFill>
-                  <a:schemeClr val="dk1">
-                    <a:tint val="75000"/>
-                  </a:schemeClr>
-                </a:solidFill>
-                <a:effectLst/>
-                <a:uFillTx/>
-                <a:latin typeface="Calibri"/>
-              </a:defRPr>
-            </a:lvl1pPr>
-          </a:lstStyle>
-          <a:p>
-            <a:pPr indent="0" defTabSz="457200">
-              <a:lnSpc>
-                <a:spcPct val="100000"/>
-              </a:lnSpc>
-              <a:buNone/>
-              <a:tabLst>
-                <a:tab algn="l" pos="0"/>
-              </a:tabLst>
-            </a:pPr>
-            <a:r>
-              <a:rPr lang="de-DE" sz="900" b="0" u="none" strike="noStrike">
-                <a:solidFill>
-                  <a:schemeClr val="dk1">
-                    <a:tint val="75000"/>
-                  </a:schemeClr>
-                </a:solidFill>
-                <a:effectLst/>
-                <a:uFillTx/>
-                <a:latin typeface="Calibri"/>
-              </a:rPr>
-              <a:t>&lt;Datum/Uhrzeit&gt;</a:t>
-            </a:r>
-            <a:endParaRPr lang="de-DE" sz="900" b="0" u="none" strike="noStrike">
-              <a:solidFill>
-                <a:srgbClr val="000000"/>
-              </a:solidFill>
-              <a:effectLst/>
-              <a:uFillTx/>
-              <a:latin typeface="Times New Roman"/>
-            </a:endParaRPr>
-          </a:p>
-        </p:txBody>
-      </p:sp>
-      <p:sp>
-        <p:nvSpPr>
-          <p:cNvPr id="27" name="PlaceHolder 5"/>
-          <p:cNvSpPr>
-            <a:spLocks noGrp="1"/>
-          </p:cNvSpPr>
-          <p:nvPr>
-            <p:ph type="ftr" idx="14"/>
-          </p:nvPr>
-        </p:nvSpPr>
-        <p:spPr>
-          <a:xfrm>
-            <a:off x="2271600" y="9181440"/>
-            <a:ext cx="2309400" cy="522360"/>
-          </a:xfrm>
-          <a:prstGeom prst="rect">
-            <a:avLst/>
-          </a:prstGeom>
-          <a:noFill/>
-          <a:ln w="0">
-            <a:noFill/>
-          </a:ln>
-        </p:spPr>
-        <p:txBody>
-          <a:bodyPr lIns="91440" rIns="91440" tIns="45720" bIns="45720" anchor="ctr">
-            <a:noAutofit/>
-          </a:bodyPr>
-          <a:lstStyle>
-            <a:lvl1pPr indent="0" algn="ctr">
-              <a:lnSpc>
-                <a:spcPct val="100000"/>
-              </a:lnSpc>
-              <a:buNone/>
-              <a:tabLst>
-                <a:tab algn="l" pos="0"/>
-              </a:tabLst>
-              <a:defRPr lang="de-DE" sz="1400" b="0" u="none" strike="noStrike">
-                <a:solidFill>
-                  <a:srgbClr val="000000"/>
-                </a:solidFill>
-                <a:effectLst/>
-                <a:uFillTx/>
-                <a:latin typeface="Times New Roman"/>
-              </a:defRPr>
-            </a:lvl1pPr>
-          </a:lstStyle>
-          <a:p>
-            <a:pPr indent="0" algn="ctr">
-              <a:lnSpc>
-                <a:spcPct val="100000"/>
-              </a:lnSpc>
-              <a:buNone/>
-              <a:tabLst>
-                <a:tab algn="l" pos="0"/>
-              </a:tabLst>
-            </a:pPr>
-            <a:r>
-              <a:rPr lang="de-DE" sz="1400" b="0" u="none" strike="noStrike">
-                <a:solidFill>
-                  <a:srgbClr val="000000"/>
-                </a:solidFill>
-                <a:effectLst/>
-                <a:uFillTx/>
-                <a:latin typeface="Times New Roman"/>
-              </a:rPr>
-              <a:t>&lt;Fußzeile&gt;</a:t>
-            </a:r>
-            <a:endParaRPr lang="de-DE" sz="1400" b="0" u="none" strike="noStrike">
-              <a:solidFill>
-                <a:srgbClr val="000000"/>
-              </a:solidFill>
-              <a:effectLst/>
-              <a:uFillTx/>
-              <a:latin typeface="Times New Roman"/>
-            </a:endParaRPr>
-          </a:p>
-        </p:txBody>
-      </p:sp>
-      <p:sp>
-        <p:nvSpPr>
-          <p:cNvPr id="28" name="PlaceHolder 6"/>
-          <p:cNvSpPr>
-            <a:spLocks noGrp="1"/>
-          </p:cNvSpPr>
-          <p:nvPr>
-            <p:ph type="sldNum" idx="15"/>
-          </p:nvPr>
-        </p:nvSpPr>
-        <p:spPr>
-          <a:xfrm>
-            <a:off x="4843440" y="9181440"/>
-            <a:ext cx="1537920" cy="522360"/>
-          </a:xfrm>
-          <a:prstGeom prst="rect">
-            <a:avLst/>
-          </a:prstGeom>
-          <a:noFill/>
-          <a:ln w="0">
-            <a:noFill/>
-          </a:ln>
-        </p:spPr>
-        <p:txBody>
-          <a:bodyPr lIns="91440" rIns="91440" tIns="45720" bIns="45720" anchor="ctr">
-            <a:noAutofit/>
-          </a:bodyPr>
-          <a:lstStyle>
-            <a:lvl1pPr indent="0" algn="r" defTabSz="457200">
-              <a:lnSpc>
-                <a:spcPct val="100000"/>
-              </a:lnSpc>
-              <a:buNone/>
-              <a:tabLst>
-                <a:tab algn="l" pos="0"/>
-              </a:tabLst>
-              <a:defRPr lang="de-DE" sz="900" b="0" u="none" strike="noStrike">
-                <a:solidFill>
-                  <a:schemeClr val="dk1">
-                    <a:tint val="75000"/>
-                  </a:schemeClr>
-                </a:solidFill>
-                <a:effectLst/>
-                <a:uFillTx/>
-                <a:latin typeface="Calibri"/>
-              </a:defRPr>
-            </a:lvl1pPr>
-          </a:lstStyle>
-          <a:p>
-            <a:pPr indent="0" algn="r" defTabSz="457200">
-              <a:lnSpc>
-                <a:spcPct val="100000"/>
-              </a:lnSpc>
-              <a:buNone/>
-              <a:tabLst>
-                <a:tab algn="l" pos="0"/>
-              </a:tabLst>
-            </a:pPr>
-            <a:fld id="{2B91829D-47BC-4594-8853-1FE0399E2EF9}" type="slidenum">
-              <a:rPr lang="de-DE" sz="900" b="0" u="none" strike="noStrike">
-                <a:solidFill>
-                  <a:schemeClr val="dk1">
-                    <a:tint val="75000"/>
-                  </a:schemeClr>
-                </a:solidFill>
-                <a:effectLst/>
-                <a:uFillTx/>
-                <a:latin typeface="Calibri"/>
-              </a:rPr>
-              <a:t>&lt;Foliennummer&gt;</a:t>
-            </a:fld>
-            <a:endParaRPr lang="de-DE" sz="900" b="0" u="none" strike="noStrike">
-              <a:solidFill>
-                <a:srgbClr val="000000"/>
-              </a:solidFill>
-              <a:effectLst/>
-              <a:uFillTx/>
-              <a:latin typeface="Times New Roman"/>
-            </a:endParaRPr>
-          </a:p>
-        </p:txBody>
-      </p:sp>
-    </p:spTree>
-  </p:cSld>
-</p:sldLayout>
-</file>
-
-<file path=ppt/slideLayouts/slideLayout6.xml><?xml version="1.0" encoding="utf-8"?>
-<p:sldLayout xmlns:a="http://schemas.openxmlformats.org/drawingml/2006/main" xmlns:p="http://schemas.openxmlformats.org/presentationml/2006/main" xmlns:r="http://schemas.openxmlformats.org/officeDocument/2006/relationships" xmlns:p14="http://schemas.microsoft.com/office/powerpoint/2010/main" xmlns:p15="http://schemas.microsoft.com/office/powerpoint/2012/main" xmlns:mc="http://schemas.openxmlformats.org/markup-compatibility/2006" type="blank" preserve="1">
-  <p:cSld name="Bild mit Überschrift">
-    <p:bg>
-      <p:bgPr>
-        <a:solidFill>
-          <a:srgbClr val="ffffff"/>
-        </a:solidFill>
-      </p:bgPr>
-    </p:bg>
-    <p:spTree>
-      <p:nvGrpSpPr>
-        <p:cNvPr id="1" name=""/>
-        <p:cNvGrpSpPr/>
-        <p:nvPr/>
-      </p:nvGrpSpPr>
-      <p:grpSpPr>
-        <a:xfrm>
-          <a:off x="0" y="0"/>
-          <a:ext cx="0" cy="0"/>
-          <a:chOff x="0" y="0"/>
-          <a:chExt cx="0" cy="0"/>
-        </a:xfrm>
-      </p:grpSpPr>
-      <p:sp>
-        <p:nvSpPr>
-          <p:cNvPr id="29" name="PlaceHolder 1"/>
-          <p:cNvSpPr>
-            <a:spLocks noGrp="1"/>
-          </p:cNvSpPr>
-          <p:nvPr>
-            <p:ph type="title"/>
-          </p:nvPr>
-        </p:nvSpPr>
-        <p:spPr>
-          <a:xfrm>
-            <a:off x="472320" y="660240"/>
-            <a:ext cx="2206800" cy="2306520"/>
-          </a:xfrm>
-          <a:prstGeom prst="rect">
-            <a:avLst/>
-          </a:prstGeom>
-          <a:noFill/>
-          <a:ln w="0">
-            <a:noFill/>
-          </a:ln>
-        </p:spPr>
-        <p:txBody>
-          <a:bodyPr lIns="91440" rIns="91440" tIns="45720" bIns="45720" anchor="b">
-            <a:noAutofit/>
-          </a:bodyPr>
-          <a:p>
-            <a:pPr indent="0" defTabSz="685800">
-              <a:lnSpc>
-                <a:spcPct val="90000"/>
-              </a:lnSpc>
-              <a:buNone/>
-              <a:tabLst>
-                <a:tab algn="l" pos="0"/>
-              </a:tabLst>
-            </a:pPr>
-            <a:r>
-              <a:rPr lang="de-DE" sz="2400" b="0" u="none" strike="noStrike">
-                <a:solidFill>
-                  <a:schemeClr val="dk1"/>
-                </a:solidFill>
-                <a:effectLst/>
-                <a:uFillTx/>
-                <a:latin typeface="Calibri Light"/>
-              </a:rPr>
-              <a:t>Mastertitelformat bearbeiten</a:t>
-            </a:r>
-            <a:endParaRPr lang="de-DE" sz="2400" b="0" u="none" strike="noStrike">
-              <a:solidFill>
-                <a:srgbClr val="000000"/>
-              </a:solidFill>
-              <a:effectLst/>
-              <a:uFillTx/>
-              <a:latin typeface="Arial"/>
-            </a:endParaRPr>
-          </a:p>
-        </p:txBody>
-      </p:sp>
-      <p:sp>
-        <p:nvSpPr>
-          <p:cNvPr id="30" name="PlaceHolder 2"/>
-          <p:cNvSpPr>
-            <a:spLocks noGrp="1"/>
-          </p:cNvSpPr>
-          <p:nvPr>
-            <p:ph type="body"/>
-          </p:nvPr>
-        </p:nvSpPr>
-        <p:spPr>
-          <a:xfrm>
-            <a:off x="2915640" y="1426320"/>
-            <a:ext cx="3466800" cy="7034760"/>
-          </a:xfrm>
-          <a:prstGeom prst="rect">
-            <a:avLst/>
-          </a:prstGeom>
-          <a:noFill/>
-          <a:ln w="0">
-            <a:noFill/>
-          </a:ln>
-        </p:spPr>
-        <p:txBody>
-          <a:bodyPr lIns="90000" rIns="90000" tIns="45000" bIns="45000" anchor="t">
-            <a:noAutofit/>
-          </a:bodyPr>
-          <a:p>
-            <a:pPr indent="0" defTabSz="457200">
-              <a:lnSpc>
-                <a:spcPct val="100000"/>
-              </a:lnSpc>
-              <a:buNone/>
-              <a:tabLst>
-                <a:tab algn="l" pos="0"/>
-              </a:tabLst>
-            </a:pPr>
-            <a:r>
-              <a:rPr lang="de-DE" sz="2400" b="0" u="none" strike="noStrike">
-                <a:solidFill>
-                  <a:schemeClr val="dk1"/>
-                </a:solidFill>
-                <a:effectLst/>
-                <a:uFillTx/>
-                <a:latin typeface="Calibri"/>
-              </a:rPr>
-              <a:t>Bild durch Klicken auf Symbol hinzufügen</a:t>
-            </a:r>
-            <a:endParaRPr lang="de-DE" sz="2400" b="0" u="none" strike="noStrike">
-              <a:solidFill>
-                <a:srgbClr val="000000"/>
-              </a:solidFill>
-              <a:effectLst/>
-              <a:uFillTx/>
-              <a:latin typeface="Arial"/>
-            </a:endParaRPr>
-          </a:p>
-        </p:txBody>
-      </p:sp>
-      <p:sp>
-        <p:nvSpPr>
-          <p:cNvPr id="31" name="PlaceHolder 3"/>
-          <p:cNvSpPr>
-            <a:spLocks noGrp="1"/>
-          </p:cNvSpPr>
-          <p:nvPr>
-            <p:ph type="body"/>
-          </p:nvPr>
-        </p:nvSpPr>
-        <p:spPr>
-          <a:xfrm>
-            <a:off x="472320" y="2971800"/>
-            <a:ext cx="2206800" cy="5500440"/>
-          </a:xfrm>
-          <a:prstGeom prst="rect">
-            <a:avLst/>
-          </a:prstGeom>
-          <a:noFill/>
-          <a:ln w="0">
-            <a:noFill/>
-          </a:ln>
-        </p:spPr>
-        <p:txBody>
-          <a:bodyPr lIns="91440" rIns="91440" tIns="45720" bIns="45720" anchor="t">
-            <a:noAutofit/>
-          </a:bodyPr>
-          <a:p>
-            <a:pPr indent="0" defTabSz="685800">
-              <a:lnSpc>
-                <a:spcPct val="90000"/>
-              </a:lnSpc>
-              <a:spcBef>
-                <a:spcPts val="751"/>
-              </a:spcBef>
-              <a:buNone/>
-              <a:tabLst>
-                <a:tab algn="l" pos="0"/>
-              </a:tabLst>
-            </a:pPr>
-            <a:r>
-              <a:rPr lang="de-DE" sz="1200" b="0" u="none" strike="noStrike">
-                <a:solidFill>
-                  <a:schemeClr val="dk1"/>
-                </a:solidFill>
-                <a:effectLst/>
-                <a:uFillTx/>
-                <a:latin typeface="Calibri"/>
-              </a:rPr>
-              <a:t>Mastertextformat bearbeiten</a:t>
-            </a:r>
-            <a:endParaRPr lang="de-DE" sz="1200" b="0" u="none" strike="noStrike">
-              <a:solidFill>
-                <a:srgbClr val="000000"/>
-              </a:solidFill>
-              <a:effectLst/>
-              <a:uFillTx/>
-              <a:latin typeface="Arial"/>
-            </a:endParaRPr>
-          </a:p>
-        </p:txBody>
-      </p:sp>
-      <p:sp>
-        <p:nvSpPr>
-          <p:cNvPr id="32" name="PlaceHolder 4"/>
-          <p:cNvSpPr>
-            <a:spLocks noGrp="1"/>
-          </p:cNvSpPr>
-          <p:nvPr>
-            <p:ph type="dt" idx="16"/>
-          </p:nvPr>
-        </p:nvSpPr>
-        <p:spPr>
-          <a:xfrm>
-            <a:off x="471600" y="9181440"/>
-            <a:ext cx="1537920" cy="522360"/>
-          </a:xfrm>
-          <a:prstGeom prst="rect">
-            <a:avLst/>
-          </a:prstGeom>
-          <a:noFill/>
-          <a:ln w="0">
-            <a:noFill/>
-          </a:ln>
-        </p:spPr>
-        <p:txBody>
-          <a:bodyPr lIns="91440" rIns="91440" tIns="45720" bIns="45720" anchor="ctr">
-            <a:noAutofit/>
-          </a:bodyPr>
-          <a:lstStyle>
-            <a:lvl1pPr indent="0" defTabSz="457200">
-              <a:lnSpc>
-                <a:spcPct val="100000"/>
-              </a:lnSpc>
-              <a:buNone/>
-              <a:tabLst>
-                <a:tab algn="l" pos="0"/>
-              </a:tabLst>
-              <a:defRPr lang="de-DE" sz="900" b="0" u="none" strike="noStrike">
-                <a:solidFill>
-                  <a:schemeClr val="dk1">
-                    <a:tint val="75000"/>
-                  </a:schemeClr>
-                </a:solidFill>
-                <a:effectLst/>
-                <a:uFillTx/>
-                <a:latin typeface="Calibri"/>
-              </a:defRPr>
-            </a:lvl1pPr>
-          </a:lstStyle>
-          <a:p>
-            <a:pPr indent="0" defTabSz="457200">
-              <a:lnSpc>
-                <a:spcPct val="100000"/>
-              </a:lnSpc>
-              <a:buNone/>
-              <a:tabLst>
-                <a:tab algn="l" pos="0"/>
-              </a:tabLst>
-            </a:pPr>
-            <a:r>
-              <a:rPr lang="de-DE" sz="900" b="0" u="none" strike="noStrike">
-                <a:solidFill>
-                  <a:schemeClr val="dk1">
-                    <a:tint val="75000"/>
-                  </a:schemeClr>
-                </a:solidFill>
-                <a:effectLst/>
-                <a:uFillTx/>
-                <a:latin typeface="Calibri"/>
-              </a:rPr>
-              <a:t>&lt;Datum/Uhrzeit&gt;</a:t>
-            </a:r>
-            <a:endParaRPr lang="de-DE" sz="900" b="0" u="none" strike="noStrike">
-              <a:solidFill>
-                <a:srgbClr val="000000"/>
-              </a:solidFill>
-              <a:effectLst/>
-              <a:uFillTx/>
-              <a:latin typeface="Times New Roman"/>
-            </a:endParaRPr>
-          </a:p>
-        </p:txBody>
-      </p:sp>
-      <p:sp>
-        <p:nvSpPr>
-          <p:cNvPr id="33" name="PlaceHolder 5"/>
-          <p:cNvSpPr>
-            <a:spLocks noGrp="1"/>
-          </p:cNvSpPr>
-          <p:nvPr>
-            <p:ph type="ftr" idx="17"/>
-          </p:nvPr>
-        </p:nvSpPr>
-        <p:spPr>
-          <a:xfrm>
-            <a:off x="2271600" y="9181440"/>
-            <a:ext cx="2309400" cy="522360"/>
-          </a:xfrm>
-          <a:prstGeom prst="rect">
-            <a:avLst/>
-          </a:prstGeom>
-          <a:noFill/>
-          <a:ln w="0">
-            <a:noFill/>
-          </a:ln>
-        </p:spPr>
-        <p:txBody>
-          <a:bodyPr lIns="91440" rIns="91440" tIns="45720" bIns="45720" anchor="ctr">
-            <a:noAutofit/>
-          </a:bodyPr>
-          <a:lstStyle>
-            <a:lvl1pPr indent="0" algn="ctr">
-              <a:lnSpc>
-                <a:spcPct val="100000"/>
-              </a:lnSpc>
-              <a:buNone/>
-              <a:tabLst>
-                <a:tab algn="l" pos="0"/>
-              </a:tabLst>
-              <a:defRPr lang="de-DE" sz="1400" b="0" u="none" strike="noStrike">
-                <a:solidFill>
-                  <a:srgbClr val="000000"/>
-                </a:solidFill>
-                <a:effectLst/>
-                <a:uFillTx/>
-                <a:latin typeface="Times New Roman"/>
-              </a:defRPr>
-            </a:lvl1pPr>
-          </a:lstStyle>
-          <a:p>
-            <a:pPr indent="0" algn="ctr">
-              <a:lnSpc>
-                <a:spcPct val="100000"/>
-              </a:lnSpc>
-              <a:buNone/>
-              <a:tabLst>
-                <a:tab algn="l" pos="0"/>
-              </a:tabLst>
-            </a:pPr>
-            <a:r>
-              <a:rPr lang="de-DE" sz="1400" b="0" u="none" strike="noStrike">
-                <a:solidFill>
-                  <a:srgbClr val="000000"/>
-                </a:solidFill>
-                <a:effectLst/>
-                <a:uFillTx/>
-                <a:latin typeface="Times New Roman"/>
-              </a:rPr>
-              <a:t>&lt;Fußzeile&gt;</a:t>
-            </a:r>
-            <a:endParaRPr lang="de-DE" sz="1400" b="0" u="none" strike="noStrike">
-              <a:solidFill>
-                <a:srgbClr val="000000"/>
-              </a:solidFill>
-              <a:effectLst/>
-              <a:uFillTx/>
-              <a:latin typeface="Times New Roman"/>
-            </a:endParaRPr>
-          </a:p>
-        </p:txBody>
-      </p:sp>
-      <p:sp>
-        <p:nvSpPr>
-          <p:cNvPr id="34" name="PlaceHolder 6"/>
-          <p:cNvSpPr>
-            <a:spLocks noGrp="1"/>
-          </p:cNvSpPr>
-          <p:nvPr>
-            <p:ph type="sldNum" idx="18"/>
-          </p:nvPr>
-        </p:nvSpPr>
-        <p:spPr>
-          <a:xfrm>
-            <a:off x="4843440" y="9181440"/>
-            <a:ext cx="1537920" cy="522360"/>
-          </a:xfrm>
-          <a:prstGeom prst="rect">
-            <a:avLst/>
-          </a:prstGeom>
-          <a:noFill/>
-          <a:ln w="0">
-            <a:noFill/>
-          </a:ln>
-        </p:spPr>
-        <p:txBody>
-          <a:bodyPr lIns="91440" rIns="91440" tIns="45720" bIns="45720" anchor="ctr">
-            <a:noAutofit/>
-          </a:bodyPr>
-          <a:lstStyle>
-            <a:lvl1pPr indent="0" algn="r" defTabSz="457200">
-              <a:lnSpc>
-                <a:spcPct val="100000"/>
-              </a:lnSpc>
-              <a:buNone/>
-              <a:tabLst>
-                <a:tab algn="l" pos="0"/>
-              </a:tabLst>
-              <a:defRPr lang="de-DE" sz="900" b="0" u="none" strike="noStrike">
-                <a:solidFill>
-                  <a:schemeClr val="dk1">
-                    <a:tint val="75000"/>
-                  </a:schemeClr>
-                </a:solidFill>
-                <a:effectLst/>
-                <a:uFillTx/>
-                <a:latin typeface="Calibri"/>
-              </a:defRPr>
-            </a:lvl1pPr>
-          </a:lstStyle>
-          <a:p>
-            <a:pPr indent="0" algn="r" defTabSz="457200">
-              <a:lnSpc>
-                <a:spcPct val="100000"/>
-              </a:lnSpc>
-              <a:buNone/>
-              <a:tabLst>
-                <a:tab algn="l" pos="0"/>
-              </a:tabLst>
-            </a:pPr>
-            <a:fld id="{7A2D6E97-2B3C-4A9D-A1D6-0A6E02719867}" type="slidenum">
-              <a:rPr lang="de-DE" sz="900" b="0" u="none" strike="noStrike">
-                <a:solidFill>
-                  <a:schemeClr val="dk1">
-                    <a:tint val="75000"/>
-                  </a:schemeClr>
-                </a:solidFill>
-                <a:effectLst/>
-                <a:uFillTx/>
-                <a:latin typeface="Calibri"/>
-              </a:rPr>
-              <a:t>&lt;Foliennummer&gt;</a:t>
-            </a:fld>
-            <a:endParaRPr lang="de-DE" sz="900" b="0" u="none" strike="noStrike">
-              <a:solidFill>
-                <a:srgbClr val="000000"/>
-              </a:solidFill>
-              <a:effectLst/>
-              <a:uFillTx/>
-              <a:latin typeface="Times New Roman"/>
-            </a:endParaRPr>
-          </a:p>
-        </p:txBody>
-      </p:sp>
-    </p:spTree>
-  </p:cSld>
-</p:sldLayout>
-</file>
-
-<file path=ppt/slideLayouts/slideLayout7.xml><?xml version="1.0" encoding="utf-8"?>
-<p:sldLayout xmlns:a="http://schemas.openxmlformats.org/drawingml/2006/main" xmlns:p="http://schemas.openxmlformats.org/presentationml/2006/main" xmlns:r="http://schemas.openxmlformats.org/officeDocument/2006/relationships" xmlns:p14="http://schemas.microsoft.com/office/powerpoint/2010/main" xmlns:p15="http://schemas.microsoft.com/office/powerpoint/2012/main" xmlns:mc="http://schemas.openxmlformats.org/markup-compatibility/2006" type="title" preserve="1">
-  <p:cSld name="Titelfolie">
-    <p:bg>
-      <p:bgPr>
-        <a:solidFill>
-          <a:srgbClr val="ffffff"/>
-        </a:solidFill>
-      </p:bgPr>
-    </p:bg>
-    <p:spTree>
-      <p:nvGrpSpPr>
-        <p:cNvPr id="1" name=""/>
-        <p:cNvGrpSpPr/>
-        <p:nvPr/>
-      </p:nvGrpSpPr>
-      <p:grpSpPr>
-        <a:xfrm>
-          <a:off x="0" y="0"/>
-          <a:ext cx="0" cy="0"/>
-          <a:chOff x="0" y="0"/>
-          <a:chExt cx="0" cy="0"/>
-        </a:xfrm>
-      </p:grpSpPr>
-      <p:sp>
-        <p:nvSpPr>
-          <p:cNvPr id="35" name="PlaceHolder 1"/>
-          <p:cNvSpPr>
-            <a:spLocks noGrp="1"/>
-          </p:cNvSpPr>
-          <p:nvPr>
-            <p:ph type="title"/>
-          </p:nvPr>
-        </p:nvSpPr>
-        <p:spPr>
-          <a:xfrm>
-            <a:off x="514440" y="1621080"/>
-            <a:ext cx="5824440" cy="3443760"/>
-          </a:xfrm>
-          <a:prstGeom prst="rect">
-            <a:avLst/>
-          </a:prstGeom>
-          <a:noFill/>
-          <a:ln w="0">
-            <a:noFill/>
-          </a:ln>
-        </p:spPr>
-        <p:txBody>
-          <a:bodyPr lIns="91440" rIns="91440" tIns="45720" bIns="45720" anchor="b">
-            <a:noAutofit/>
-          </a:bodyPr>
-          <a:p>
-            <a:pPr indent="0" algn="ctr" defTabSz="685800">
-              <a:lnSpc>
-                <a:spcPct val="90000"/>
-              </a:lnSpc>
-              <a:buNone/>
-              <a:tabLst>
-                <a:tab algn="l" pos="0"/>
-              </a:tabLst>
-            </a:pPr>
-            <a:r>
-              <a:rPr lang="de-DE" sz="4500" b="0" u="none" strike="noStrike">
-                <a:solidFill>
-                  <a:schemeClr val="dk1"/>
-                </a:solidFill>
-                <a:effectLst/>
-                <a:uFillTx/>
-                <a:latin typeface="Calibri Light"/>
-              </a:rPr>
-              <a:t>Mastertitelformat bearbeiten</a:t>
-            </a:r>
-            <a:endParaRPr lang="de-DE" sz="4500" b="0" u="none" strike="noStrike">
-              <a:solidFill>
-                <a:srgbClr val="000000"/>
-              </a:solidFill>
-              <a:effectLst/>
-              <a:uFillTx/>
-              <a:latin typeface="Arial"/>
-            </a:endParaRPr>
-          </a:p>
-        </p:txBody>
-      </p:sp>
-      <p:sp>
-        <p:nvSpPr>
-          <p:cNvPr id="36" name="PlaceHolder 2"/>
-          <p:cNvSpPr>
-            <a:spLocks noGrp="1"/>
-          </p:cNvSpPr>
-          <p:nvPr>
-            <p:ph type="dt" idx="19"/>
-          </p:nvPr>
-        </p:nvSpPr>
-        <p:spPr>
-          <a:xfrm>
-            <a:off x="471600" y="9181440"/>
-            <a:ext cx="1537920" cy="522360"/>
-          </a:xfrm>
-          <a:prstGeom prst="rect">
-            <a:avLst/>
-          </a:prstGeom>
-          <a:noFill/>
-          <a:ln w="0">
-            <a:noFill/>
-          </a:ln>
-        </p:spPr>
-        <p:txBody>
-          <a:bodyPr lIns="91440" rIns="91440" tIns="45720" bIns="45720" anchor="ctr">
-            <a:noAutofit/>
-          </a:bodyPr>
-          <a:lstStyle>
-            <a:lvl1pPr indent="0" defTabSz="457200">
-              <a:lnSpc>
-                <a:spcPct val="100000"/>
-              </a:lnSpc>
-              <a:buNone/>
-              <a:tabLst>
-                <a:tab algn="l" pos="0"/>
-              </a:tabLst>
-              <a:defRPr lang="de-DE" sz="900" b="0" u="none" strike="noStrike">
-                <a:solidFill>
-                  <a:schemeClr val="dk1">
-                    <a:tint val="75000"/>
-                  </a:schemeClr>
-                </a:solidFill>
-                <a:effectLst/>
-                <a:uFillTx/>
-                <a:latin typeface="Calibri"/>
-              </a:defRPr>
-            </a:lvl1pPr>
-          </a:lstStyle>
-          <a:p>
-            <a:pPr indent="0" defTabSz="457200">
-              <a:lnSpc>
-                <a:spcPct val="100000"/>
-              </a:lnSpc>
-              <a:buNone/>
-              <a:tabLst>
-                <a:tab algn="l" pos="0"/>
-              </a:tabLst>
-            </a:pPr>
-            <a:r>
-              <a:rPr lang="de-DE" sz="900" b="0" u="none" strike="noStrike">
-                <a:solidFill>
-                  <a:schemeClr val="dk1">
-                    <a:tint val="75000"/>
-                  </a:schemeClr>
-                </a:solidFill>
-                <a:effectLst/>
-                <a:uFillTx/>
-                <a:latin typeface="Calibri"/>
-              </a:rPr>
-              <a:t>&lt;Datum/Uhrzeit&gt;</a:t>
-            </a:r>
-            <a:endParaRPr lang="de-DE" sz="900" b="0" u="none" strike="noStrike">
-              <a:solidFill>
-                <a:srgbClr val="000000"/>
-              </a:solidFill>
-              <a:effectLst/>
-              <a:uFillTx/>
-              <a:latin typeface="Times New Roman"/>
-            </a:endParaRPr>
-          </a:p>
-        </p:txBody>
-      </p:sp>
-      <p:sp>
-        <p:nvSpPr>
-          <p:cNvPr id="37" name="PlaceHolder 3"/>
-          <p:cNvSpPr>
-            <a:spLocks noGrp="1"/>
-          </p:cNvSpPr>
-          <p:nvPr>
-            <p:ph type="ftr" idx="20"/>
-          </p:nvPr>
-        </p:nvSpPr>
-        <p:spPr>
-          <a:xfrm>
-            <a:off x="2271600" y="9181440"/>
-            <a:ext cx="2309400" cy="522360"/>
-          </a:xfrm>
-          <a:prstGeom prst="rect">
-            <a:avLst/>
-          </a:prstGeom>
-          <a:noFill/>
-          <a:ln w="0">
-            <a:noFill/>
-          </a:ln>
-        </p:spPr>
-        <p:txBody>
-          <a:bodyPr lIns="91440" rIns="91440" tIns="45720" bIns="45720" anchor="ctr">
-            <a:noAutofit/>
-          </a:bodyPr>
-          <a:lstStyle>
-            <a:lvl1pPr indent="0" algn="ctr">
-              <a:lnSpc>
-                <a:spcPct val="100000"/>
-              </a:lnSpc>
-              <a:buNone/>
-              <a:tabLst>
-                <a:tab algn="l" pos="0"/>
-              </a:tabLst>
-              <a:defRPr lang="de-DE" sz="1400" b="0" u="none" strike="noStrike">
-                <a:solidFill>
-                  <a:srgbClr val="000000"/>
-                </a:solidFill>
-                <a:effectLst/>
-                <a:uFillTx/>
-                <a:latin typeface="Times New Roman"/>
-              </a:defRPr>
-            </a:lvl1pPr>
-          </a:lstStyle>
-          <a:p>
-            <a:pPr indent="0" algn="ctr">
-              <a:lnSpc>
-                <a:spcPct val="100000"/>
-              </a:lnSpc>
-              <a:buNone/>
-              <a:tabLst>
-                <a:tab algn="l" pos="0"/>
-              </a:tabLst>
-            </a:pPr>
-            <a:r>
-              <a:rPr lang="de-DE" sz="1400" b="0" u="none" strike="noStrike">
-                <a:solidFill>
-                  <a:srgbClr val="000000"/>
-                </a:solidFill>
-                <a:effectLst/>
-                <a:uFillTx/>
-                <a:latin typeface="Times New Roman"/>
-              </a:rPr>
-              <a:t>&lt;Fußzeile&gt;</a:t>
-            </a:r>
-            <a:endParaRPr lang="de-DE" sz="1400" b="0" u="none" strike="noStrike">
-              <a:solidFill>
-                <a:srgbClr val="000000"/>
-              </a:solidFill>
-              <a:effectLst/>
-              <a:uFillTx/>
-              <a:latin typeface="Times New Roman"/>
-            </a:endParaRPr>
-          </a:p>
-        </p:txBody>
-      </p:sp>
-      <p:sp>
-        <p:nvSpPr>
-          <p:cNvPr id="38" name="PlaceHolder 4"/>
-          <p:cNvSpPr>
-            <a:spLocks noGrp="1"/>
-          </p:cNvSpPr>
-          <p:nvPr>
-            <p:ph type="sldNum" idx="21"/>
-          </p:nvPr>
-        </p:nvSpPr>
-        <p:spPr>
-          <a:xfrm>
-            <a:off x="4843440" y="9181440"/>
-            <a:ext cx="1537920" cy="522360"/>
-          </a:xfrm>
-          <a:prstGeom prst="rect">
-            <a:avLst/>
-          </a:prstGeom>
-          <a:noFill/>
-          <a:ln w="0">
-            <a:noFill/>
-          </a:ln>
-        </p:spPr>
-        <p:txBody>
-          <a:bodyPr lIns="91440" rIns="91440" tIns="45720" bIns="45720" anchor="ctr">
-            <a:noAutofit/>
-          </a:bodyPr>
-          <a:lstStyle>
-            <a:lvl1pPr indent="0" algn="r" defTabSz="457200">
-              <a:lnSpc>
-                <a:spcPct val="100000"/>
-              </a:lnSpc>
-              <a:buNone/>
-              <a:tabLst>
-                <a:tab algn="l" pos="0"/>
-              </a:tabLst>
-              <a:defRPr lang="de-DE" sz="900" b="0" u="none" strike="noStrike">
-                <a:solidFill>
-                  <a:schemeClr val="dk1">
-                    <a:tint val="75000"/>
-                  </a:schemeClr>
-                </a:solidFill>
-                <a:effectLst/>
-                <a:uFillTx/>
-                <a:latin typeface="Calibri"/>
-              </a:defRPr>
-            </a:lvl1pPr>
-          </a:lstStyle>
-          <a:p>
-            <a:pPr indent="0" algn="r" defTabSz="457200">
-              <a:lnSpc>
-                <a:spcPct val="100000"/>
-              </a:lnSpc>
-              <a:buNone/>
-              <a:tabLst>
-                <a:tab algn="l" pos="0"/>
-              </a:tabLst>
-            </a:pPr>
-            <a:fld id="{8611A401-F5EB-46BF-9D09-431DD90934EA}" type="slidenum">
-              <a:rPr lang="de-DE" sz="900" b="0" u="none" strike="noStrike">
-                <a:solidFill>
-                  <a:schemeClr val="dk1">
-                    <a:tint val="75000"/>
-                  </a:schemeClr>
-                </a:solidFill>
-                <a:effectLst/>
-                <a:uFillTx/>
-                <a:latin typeface="Calibri"/>
-              </a:rPr>
-              <a:t>&lt;Foliennummer&gt;</a:t>
-            </a:fld>
-            <a:endParaRPr lang="de-DE" sz="900" b="0" u="none" strike="noStrike">
-              <a:solidFill>
-                <a:srgbClr val="000000"/>
-              </a:solidFill>
-              <a:effectLst/>
-              <a:uFillTx/>
-              <a:latin typeface="Times New Roman"/>
-            </a:endParaRPr>
-          </a:p>
-        </p:txBody>
-      </p:sp>
-      <p:sp>
-        <p:nvSpPr>
-          <p:cNvPr id="39" name="PlaceHolder 5"/>
-          <p:cNvSpPr>
-            <a:spLocks noGrp="1"/>
-          </p:cNvSpPr>
-          <p:nvPr>
-            <p:ph type="body"/>
-          </p:nvPr>
-        </p:nvSpPr>
-        <p:spPr>
-          <a:xfrm>
-            <a:off x="342720" y="2317680"/>
-            <a:ext cx="6167160" cy="5740200"/>
-          </a:xfrm>
-          <a:prstGeom prst="rect">
-            <a:avLst/>
-          </a:prstGeom>
-          <a:noFill/>
-          <a:ln w="0">
-            <a:noFill/>
-          </a:ln>
-        </p:spPr>
-        <p:txBody>
-          <a:bodyPr lIns="0" rIns="0" tIns="0" bIns="0" anchor="t">
-            <a:normAutofit/>
-          </a:bodyPr>
-          <a:p>
-            <a:pPr marL="432000" indent="-324000">
-              <a:lnSpc>
-                <a:spcPct val="90000"/>
-              </a:lnSpc>
-              <a:spcBef>
-                <a:spcPts val="1417"/>
-              </a:spcBef>
-              <a:buClr>
-                <a:srgbClr val="000000"/>
-              </a:buClr>
-              <a:buSzPct val="45000"/>
-              <a:buFont typeface="Wingdings" charset="2"/>
-              <a:buChar char=""/>
-            </a:pPr>
-            <a:r>
-              <a:rPr lang="en-US" sz="2100" b="0" u="none" strike="noStrike">
-                <a:solidFill>
-                  <a:schemeClr val="dk1"/>
-                </a:solidFill>
-                <a:effectLst/>
-                <a:uFillTx/>
-                <a:latin typeface="Calibri"/>
-              </a:rPr>
-              <a:t>Format des Gliederungstextes durch Klicken bearbeiten</a:t>
-            </a:r>
-            <a:endParaRPr lang="de-DE" sz="2100" b="0" u="none" strike="noStrike">
-              <a:solidFill>
-                <a:srgbClr val="000000"/>
-              </a:solidFill>
-              <a:effectLst/>
-              <a:uFillTx/>
-              <a:latin typeface="Arial"/>
-            </a:endParaRPr>
-          </a:p>
-          <a:p>
-            <a:pPr marL="864000" lvl="1" indent="-324000">
-              <a:lnSpc>
-                <a:spcPct val="90000"/>
-              </a:lnSpc>
-              <a:spcBef>
-                <a:spcPts val="1134"/>
-              </a:spcBef>
-              <a:buClr>
-                <a:srgbClr val="000000"/>
-              </a:buClr>
-              <a:buSzPct val="75000"/>
-              <a:buFont typeface="Symbol" charset="2"/>
-              <a:buChar char=""/>
-            </a:pPr>
-            <a:r>
-              <a:rPr lang="en-US" sz="1500" b="0" u="none" strike="noStrike">
-                <a:solidFill>
-                  <a:schemeClr val="dk1"/>
-                </a:solidFill>
-                <a:effectLst/>
-                <a:uFillTx/>
-                <a:latin typeface="Calibri"/>
-              </a:rPr>
-              <a:t>Zweite Gliederungsebene</a:t>
-            </a:r>
-            <a:endParaRPr lang="de-DE" sz="1500" b="0" u="none" strike="noStrike">
-              <a:solidFill>
-                <a:srgbClr val="000000"/>
-              </a:solidFill>
-              <a:effectLst/>
-              <a:uFillTx/>
-              <a:latin typeface="Arial"/>
-            </a:endParaRPr>
-          </a:p>
-          <a:p>
-            <a:pPr marL="1296000" lvl="2" indent="-288000">
-              <a:lnSpc>
-                <a:spcPct val="90000"/>
-              </a:lnSpc>
-              <a:spcBef>
-                <a:spcPts val="850"/>
-              </a:spcBef>
-              <a:buClr>
-                <a:srgbClr val="000000"/>
-              </a:buClr>
-              <a:buSzPct val="45000"/>
-              <a:buFont typeface="Wingdings" charset="2"/>
-              <a:buChar char=""/>
-            </a:pPr>
-            <a:r>
-              <a:rPr lang="en-US" sz="1350" b="0" u="none" strike="noStrike">
-                <a:solidFill>
-                  <a:schemeClr val="dk1"/>
-                </a:solidFill>
-                <a:effectLst/>
-                <a:uFillTx/>
-                <a:latin typeface="Calibri"/>
-              </a:rPr>
-              <a:t>Dritte Gliederungsebene</a:t>
-            </a:r>
-            <a:endParaRPr lang="de-DE" sz="1350" b="0" u="none" strike="noStrike">
-              <a:solidFill>
-                <a:srgbClr val="000000"/>
-              </a:solidFill>
-              <a:effectLst/>
-              <a:uFillTx/>
-              <a:latin typeface="Arial"/>
-            </a:endParaRPr>
-          </a:p>
-          <a:p>
-            <a:pPr marL="1728000" lvl="3" indent="-216000">
-              <a:lnSpc>
-                <a:spcPct val="90000"/>
-              </a:lnSpc>
-              <a:spcBef>
-                <a:spcPts val="567"/>
-              </a:spcBef>
-              <a:buClr>
-                <a:srgbClr val="000000"/>
-              </a:buClr>
-              <a:buSzPct val="75000"/>
-              <a:buFont typeface="Symbol" charset="2"/>
-              <a:buChar char=""/>
-            </a:pPr>
-            <a:r>
-              <a:rPr lang="en-US" sz="1350" b="0" u="none" strike="noStrike">
-                <a:solidFill>
-                  <a:schemeClr val="dk1"/>
-                </a:solidFill>
-                <a:effectLst/>
-                <a:uFillTx/>
-                <a:latin typeface="Calibri"/>
-              </a:rPr>
-              <a:t>Vierte Gliederungsebene</a:t>
-            </a:r>
-            <a:endParaRPr lang="de-DE" sz="1350" b="0" u="none" strike="noStrike">
-              <a:solidFill>
-                <a:srgbClr val="000000"/>
-              </a:solidFill>
-              <a:effectLst/>
-              <a:uFillTx/>
-              <a:latin typeface="Arial"/>
-            </a:endParaRPr>
-          </a:p>
-          <a:p>
-            <a:pPr marL="2160000" lvl="4" indent="-216000">
-              <a:lnSpc>
-                <a:spcPct val="90000"/>
-              </a:lnSpc>
-              <a:spcBef>
-                <a:spcPts val="283"/>
-              </a:spcBef>
-              <a:buClr>
-                <a:srgbClr val="000000"/>
-              </a:buClr>
-              <a:buSzPct val="45000"/>
-              <a:buFont typeface="Wingdings" charset="2"/>
-              <a:buChar char=""/>
-            </a:pPr>
-            <a:r>
-              <a:rPr lang="en-US" sz="2000" b="0" u="none" strike="noStrike">
-                <a:solidFill>
-                  <a:schemeClr val="dk1"/>
-                </a:solidFill>
-                <a:effectLst/>
-                <a:uFillTx/>
-                <a:latin typeface="Calibri"/>
-              </a:rPr>
-              <a:t>Fünfte Gliederungsebene</a:t>
-            </a:r>
-            <a:endParaRPr lang="de-DE" sz="2000" b="0" u="none" strike="noStrike">
-              <a:solidFill>
-                <a:srgbClr val="000000"/>
-              </a:solidFill>
-              <a:effectLst/>
-              <a:uFillTx/>
-              <a:latin typeface="Arial"/>
-            </a:endParaRPr>
-          </a:p>
-          <a:p>
-            <a:pPr marL="2592000" lvl="5" indent="-216000">
-              <a:lnSpc>
-                <a:spcPct val="90000"/>
-              </a:lnSpc>
-              <a:spcBef>
-                <a:spcPts val="283"/>
-              </a:spcBef>
-              <a:buClr>
-                <a:srgbClr val="000000"/>
-              </a:buClr>
-              <a:buSzPct val="45000"/>
-              <a:buFont typeface="Wingdings" charset="2"/>
-              <a:buChar char=""/>
-            </a:pPr>
-            <a:r>
-              <a:rPr lang="en-US" sz="2000" b="0" u="none" strike="noStrike">
-                <a:solidFill>
-                  <a:schemeClr val="dk1"/>
-                </a:solidFill>
-                <a:effectLst/>
-                <a:uFillTx/>
-                <a:latin typeface="Calibri"/>
-              </a:rPr>
-              <a:t>Sechste Gliederungsebene</a:t>
-            </a:r>
-            <a:endParaRPr lang="de-DE" sz="2000" b="0" u="none" strike="noStrike">
-              <a:solidFill>
-                <a:srgbClr val="000000"/>
-              </a:solidFill>
-              <a:effectLst/>
-              <a:uFillTx/>
-              <a:latin typeface="Arial"/>
-            </a:endParaRPr>
-          </a:p>
-          <a:p>
-            <a:pPr marL="3024000" lvl="6" indent="-216000">
-              <a:lnSpc>
-                <a:spcPct val="90000"/>
-              </a:lnSpc>
-              <a:spcBef>
-                <a:spcPts val="283"/>
-              </a:spcBef>
-              <a:buClr>
-                <a:srgbClr val="000000"/>
-              </a:buClr>
-              <a:buSzPct val="45000"/>
-              <a:buFont typeface="Wingdings" charset="2"/>
-              <a:buChar char=""/>
-            </a:pPr>
-            <a:r>
-              <a:rPr lang="en-US" sz="2000" b="0" u="none" strike="noStrike">
-                <a:solidFill>
-                  <a:schemeClr val="dk1"/>
-                </a:solidFill>
-                <a:effectLst/>
-                <a:uFillTx/>
-                <a:latin typeface="Calibri"/>
-              </a:rPr>
-              <a:t>Siebte Gliederungsebene</a:t>
-            </a:r>
-            <a:endParaRPr lang="de-DE" sz="2000" b="0" u="none" strike="noStrike">
-              <a:solidFill>
-                <a:srgbClr val="000000"/>
-              </a:solidFill>
-              <a:effectLst/>
-              <a:uFillTx/>
-              <a:latin typeface="Arial"/>
-            </a:endParaRPr>
-          </a:p>
-        </p:txBody>
-      </p:sp>
-    </p:spTree>
-  </p:cSld>
-</p:sldLayout>
-</file>
-
-<file path=ppt/slideLayouts/slideLayout8.xml><?xml version="1.0" encoding="utf-8"?>
-<p:sldLayout xmlns:a="http://schemas.openxmlformats.org/drawingml/2006/main" xmlns:p="http://schemas.openxmlformats.org/presentationml/2006/main" xmlns:r="http://schemas.openxmlformats.org/officeDocument/2006/relationships" xmlns:p14="http://schemas.microsoft.com/office/powerpoint/2010/main" xmlns:p15="http://schemas.microsoft.com/office/powerpoint/2012/main" xmlns:mc="http://schemas.openxmlformats.org/markup-compatibility/2006" type="vertTx" preserve="1">
-  <p:cSld name="Titel und vertikaler Text">
-    <p:bg>
-      <p:bgPr>
-        <a:solidFill>
-          <a:srgbClr val="ffffff"/>
-        </a:solidFill>
-      </p:bgPr>
-    </p:bg>
-    <p:spTree>
-      <p:nvGrpSpPr>
-        <p:cNvPr id="1" name=""/>
-        <p:cNvGrpSpPr/>
-        <p:nvPr/>
-      </p:nvGrpSpPr>
-      <p:grpSpPr>
-        <a:xfrm>
-          <a:off x="0" y="0"/>
-          <a:ext cx="0" cy="0"/>
-          <a:chOff x="0" y="0"/>
-          <a:chExt cx="0" cy="0"/>
-        </a:xfrm>
-      </p:grpSpPr>
-      <p:sp>
-        <p:nvSpPr>
-          <p:cNvPr id="40" name="PlaceHolder 1"/>
-          <p:cNvSpPr>
-            <a:spLocks noGrp="1"/>
-          </p:cNvSpPr>
-          <p:nvPr>
-            <p:ph type="title"/>
-          </p:nvPr>
-        </p:nvSpPr>
-        <p:spPr>
-          <a:xfrm>
-            <a:off x="471600" y="527400"/>
-            <a:ext cx="5910120" cy="1909800"/>
-          </a:xfrm>
-          <a:prstGeom prst="rect">
-            <a:avLst/>
-          </a:prstGeom>
-          <a:noFill/>
-          <a:ln w="0">
-            <a:noFill/>
-          </a:ln>
-        </p:spPr>
-        <p:txBody>
-          <a:bodyPr lIns="91440" rIns="91440" tIns="45720" bIns="45720" anchor="ctr">
-            <a:noAutofit/>
-          </a:bodyPr>
-          <a:p>
-            <a:pPr indent="0" defTabSz="685800">
-              <a:lnSpc>
-                <a:spcPct val="90000"/>
-              </a:lnSpc>
-              <a:buNone/>
-              <a:tabLst>
-                <a:tab algn="l" pos="0"/>
-              </a:tabLst>
-            </a:pPr>
-            <a:r>
-              <a:rPr lang="de-DE" sz="3300" b="0" u="none" strike="noStrike">
-                <a:solidFill>
-                  <a:schemeClr val="dk1"/>
-                </a:solidFill>
-                <a:effectLst/>
-                <a:uFillTx/>
-                <a:latin typeface="Calibri Light"/>
-              </a:rPr>
-              <a:t>Mastertitelformat bearbeiten</a:t>
-            </a:r>
-            <a:endParaRPr lang="de-DE" sz="3300" b="0" u="none" strike="noStrike">
-              <a:solidFill>
-                <a:srgbClr val="000000"/>
-              </a:solidFill>
-              <a:effectLst/>
-              <a:uFillTx/>
-              <a:latin typeface="Arial"/>
-            </a:endParaRPr>
-          </a:p>
-        </p:txBody>
-      </p:sp>
-      <p:sp>
-        <p:nvSpPr>
-          <p:cNvPr id="41" name="PlaceHolder 2"/>
-          <p:cNvSpPr>
-            <a:spLocks noGrp="1"/>
-          </p:cNvSpPr>
-          <p:nvPr>
-            <p:ph type="body"/>
-          </p:nvPr>
-        </p:nvSpPr>
-        <p:spPr>
-          <a:xfrm>
-            <a:off x="471600" y="2637000"/>
-            <a:ext cx="5910120" cy="6280200"/>
-          </a:xfrm>
-          <a:prstGeom prst="rect">
-            <a:avLst/>
-          </a:prstGeom>
-          <a:noFill/>
-          <a:ln w="0">
-            <a:noFill/>
-          </a:ln>
-        </p:spPr>
-        <p:txBody>
-          <a:bodyPr lIns="91440" rIns="91440" tIns="45720" bIns="45720" anchor="t" vert="eaVert">
-            <a:noAutofit/>
-          </a:bodyPr>
-          <a:p>
-            <a:pPr marL="171360" indent="-171360" defTabSz="685800">
-              <a:lnSpc>
-                <a:spcPct val="90000"/>
-              </a:lnSpc>
-              <a:spcBef>
-                <a:spcPts val="751"/>
-              </a:spcBef>
-              <a:buClr>
-                <a:srgbClr val="000000"/>
-              </a:buClr>
-              <a:buFont typeface="Arial"/>
-              <a:buChar char="•"/>
-            </a:pPr>
-            <a:r>
-              <a:rPr lang="de-DE" sz="2100" b="0" u="none" strike="noStrike">
-                <a:solidFill>
-                  <a:schemeClr val="dk1"/>
-                </a:solidFill>
-                <a:effectLst/>
-                <a:uFillTx/>
-                <a:latin typeface="Calibri"/>
-              </a:rPr>
-              <a:t>Mastertextformat bearbeiten</a:t>
-            </a:r>
-            <a:endParaRPr lang="de-DE" sz="2100" b="0" u="none" strike="noStrike">
-              <a:solidFill>
-                <a:srgbClr val="000000"/>
-              </a:solidFill>
-              <a:effectLst/>
-              <a:uFillTx/>
-              <a:latin typeface="Arial"/>
-            </a:endParaRPr>
-          </a:p>
-          <a:p>
-            <a:pPr marL="514440" lvl="1" indent="-171360" defTabSz="685800">
-              <a:lnSpc>
-                <a:spcPct val="90000"/>
-              </a:lnSpc>
-              <a:spcBef>
-                <a:spcPts val="374"/>
-              </a:spcBef>
-              <a:buClr>
-                <a:srgbClr val="000000"/>
-              </a:buClr>
-              <a:buFont typeface="Arial"/>
-              <a:buChar char="•"/>
-            </a:pPr>
-            <a:r>
-              <a:rPr lang="de-DE" sz="1800" b="0" u="none" strike="noStrike">
-                <a:solidFill>
-                  <a:schemeClr val="dk1"/>
-                </a:solidFill>
-                <a:effectLst/>
-                <a:uFillTx/>
-                <a:latin typeface="Calibri"/>
-              </a:rPr>
-              <a:t>Zweite Ebene</a:t>
-            </a:r>
-            <a:endParaRPr lang="de-DE" sz="1800" b="0" u="none" strike="noStrike">
-              <a:solidFill>
-                <a:srgbClr val="000000"/>
-              </a:solidFill>
-              <a:effectLst/>
-              <a:uFillTx/>
-              <a:latin typeface="Arial"/>
-            </a:endParaRPr>
-          </a:p>
-          <a:p>
-            <a:pPr marL="857160" lvl="2" indent="-171360" defTabSz="685800">
-              <a:lnSpc>
-                <a:spcPct val="90000"/>
-              </a:lnSpc>
-              <a:spcBef>
-                <a:spcPts val="374"/>
-              </a:spcBef>
-              <a:buClr>
-                <a:srgbClr val="000000"/>
-              </a:buClr>
-              <a:buFont typeface="Arial"/>
-              <a:buChar char="•"/>
-            </a:pPr>
-            <a:r>
-              <a:rPr lang="de-DE" sz="1500" b="0" u="none" strike="noStrike">
-                <a:solidFill>
-                  <a:schemeClr val="dk1"/>
-                </a:solidFill>
-                <a:effectLst/>
-                <a:uFillTx/>
-                <a:latin typeface="Calibri"/>
-              </a:rPr>
-              <a:t>Dritte Ebene</a:t>
-            </a:r>
-            <a:endParaRPr lang="de-DE" sz="1500" b="0" u="none" strike="noStrike">
-              <a:solidFill>
-                <a:srgbClr val="000000"/>
-              </a:solidFill>
-              <a:effectLst/>
-              <a:uFillTx/>
-              <a:latin typeface="Arial"/>
-            </a:endParaRPr>
-          </a:p>
-          <a:p>
-            <a:pPr marL="1200240" lvl="3" indent="-171360" defTabSz="685800">
-              <a:lnSpc>
-                <a:spcPct val="90000"/>
-              </a:lnSpc>
-              <a:spcBef>
-                <a:spcPts val="374"/>
-              </a:spcBef>
-              <a:buClr>
-                <a:srgbClr val="000000"/>
-              </a:buClr>
-              <a:buFont typeface="Arial"/>
-              <a:buChar char="•"/>
-            </a:pPr>
-            <a:r>
-              <a:rPr lang="de-DE" sz="1350" b="0" u="none" strike="noStrike">
-                <a:solidFill>
-                  <a:schemeClr val="dk1"/>
-                </a:solidFill>
-                <a:effectLst/>
-                <a:uFillTx/>
-                <a:latin typeface="Calibri"/>
-              </a:rPr>
-              <a:t>Vierte Ebene</a:t>
-            </a:r>
-            <a:endParaRPr lang="de-DE" sz="1350" b="0" u="none" strike="noStrike">
-              <a:solidFill>
-                <a:srgbClr val="000000"/>
-              </a:solidFill>
-              <a:effectLst/>
-              <a:uFillTx/>
-              <a:latin typeface="Arial"/>
-            </a:endParaRPr>
-          </a:p>
-          <a:p>
-            <a:pPr marL="1542960" lvl="4" indent="-171360" defTabSz="685800">
-              <a:lnSpc>
-                <a:spcPct val="90000"/>
-              </a:lnSpc>
-              <a:spcBef>
-                <a:spcPts val="374"/>
-              </a:spcBef>
-              <a:buClr>
-                <a:srgbClr val="000000"/>
-              </a:buClr>
-              <a:buFont typeface="Arial"/>
-              <a:buChar char="•"/>
-            </a:pPr>
-            <a:r>
-              <a:rPr lang="de-DE" sz="1350" b="0" u="none" strike="noStrike">
-                <a:solidFill>
-                  <a:schemeClr val="dk1"/>
-                </a:solidFill>
-                <a:effectLst/>
-                <a:uFillTx/>
-                <a:latin typeface="Calibri"/>
-              </a:rPr>
-              <a:t>Fünfte Ebene</a:t>
-            </a:r>
-            <a:endParaRPr lang="de-DE" sz="1350" b="0" u="none" strike="noStrike">
-              <a:solidFill>
-                <a:srgbClr val="000000"/>
-              </a:solidFill>
-              <a:effectLst/>
-              <a:uFillTx/>
-              <a:latin typeface="Arial"/>
-            </a:endParaRPr>
-          </a:p>
-        </p:txBody>
-      </p:sp>
-      <p:sp>
-        <p:nvSpPr>
-          <p:cNvPr id="42" name="PlaceHolder 3"/>
-          <p:cNvSpPr>
-            <a:spLocks noGrp="1"/>
-          </p:cNvSpPr>
-          <p:nvPr>
-            <p:ph type="dt" idx="22"/>
-          </p:nvPr>
-        </p:nvSpPr>
-        <p:spPr>
-          <a:xfrm>
-            <a:off x="471600" y="9181440"/>
-            <a:ext cx="1537920" cy="522360"/>
-          </a:xfrm>
-          <a:prstGeom prst="rect">
-            <a:avLst/>
-          </a:prstGeom>
-          <a:noFill/>
-          <a:ln w="0">
-            <a:noFill/>
-          </a:ln>
-        </p:spPr>
-        <p:txBody>
-          <a:bodyPr lIns="91440" rIns="91440" tIns="45720" bIns="45720" anchor="ctr">
-            <a:noAutofit/>
-          </a:bodyPr>
-          <a:lstStyle>
-            <a:lvl1pPr indent="0" defTabSz="457200">
-              <a:lnSpc>
-                <a:spcPct val="100000"/>
-              </a:lnSpc>
-              <a:buNone/>
-              <a:tabLst>
-                <a:tab algn="l" pos="0"/>
-              </a:tabLst>
-              <a:defRPr lang="de-DE" sz="900" b="0" u="none" strike="noStrike">
-                <a:solidFill>
-                  <a:schemeClr val="dk1">
-                    <a:tint val="75000"/>
-                  </a:schemeClr>
-                </a:solidFill>
-                <a:effectLst/>
-                <a:uFillTx/>
-                <a:latin typeface="Calibri"/>
-              </a:defRPr>
-            </a:lvl1pPr>
-          </a:lstStyle>
-          <a:p>
-            <a:pPr indent="0" defTabSz="457200">
-              <a:lnSpc>
-                <a:spcPct val="100000"/>
-              </a:lnSpc>
-              <a:buNone/>
-              <a:tabLst>
-                <a:tab algn="l" pos="0"/>
-              </a:tabLst>
-            </a:pPr>
-            <a:r>
-              <a:rPr lang="de-DE" sz="900" b="0" u="none" strike="noStrike">
-                <a:solidFill>
-                  <a:schemeClr val="dk1">
-                    <a:tint val="75000"/>
-                  </a:schemeClr>
-                </a:solidFill>
-                <a:effectLst/>
-                <a:uFillTx/>
-                <a:latin typeface="Calibri"/>
-              </a:rPr>
-              <a:t>&lt;Datum/Uhrzeit&gt;</a:t>
-            </a:r>
-            <a:endParaRPr lang="de-DE" sz="900" b="0" u="none" strike="noStrike">
-              <a:solidFill>
-                <a:srgbClr val="000000"/>
-              </a:solidFill>
-              <a:effectLst/>
-              <a:uFillTx/>
-              <a:latin typeface="Times New Roman"/>
-            </a:endParaRPr>
-          </a:p>
-        </p:txBody>
-      </p:sp>
-      <p:sp>
-        <p:nvSpPr>
-          <p:cNvPr id="43" name="PlaceHolder 4"/>
-          <p:cNvSpPr>
-            <a:spLocks noGrp="1"/>
-          </p:cNvSpPr>
-          <p:nvPr>
-            <p:ph type="ftr" idx="23"/>
-          </p:nvPr>
-        </p:nvSpPr>
-        <p:spPr>
-          <a:xfrm>
-            <a:off x="2271600" y="9181440"/>
-            <a:ext cx="2309400" cy="522360"/>
-          </a:xfrm>
-          <a:prstGeom prst="rect">
-            <a:avLst/>
-          </a:prstGeom>
-          <a:noFill/>
-          <a:ln w="0">
-            <a:noFill/>
-          </a:ln>
-        </p:spPr>
-        <p:txBody>
-          <a:bodyPr lIns="91440" rIns="91440" tIns="45720" bIns="45720" anchor="ctr">
-            <a:noAutofit/>
-          </a:bodyPr>
-          <a:lstStyle>
-            <a:lvl1pPr indent="0" algn="ctr">
-              <a:lnSpc>
-                <a:spcPct val="100000"/>
-              </a:lnSpc>
-              <a:buNone/>
-              <a:tabLst>
-                <a:tab algn="l" pos="0"/>
-              </a:tabLst>
-              <a:defRPr lang="de-DE" sz="1400" b="0" u="none" strike="noStrike">
-                <a:solidFill>
-                  <a:srgbClr val="000000"/>
-                </a:solidFill>
-                <a:effectLst/>
-                <a:uFillTx/>
-                <a:latin typeface="Times New Roman"/>
-              </a:defRPr>
-            </a:lvl1pPr>
-          </a:lstStyle>
-          <a:p>
-            <a:pPr indent="0" algn="ctr">
-              <a:lnSpc>
-                <a:spcPct val="100000"/>
-              </a:lnSpc>
-              <a:buNone/>
-              <a:tabLst>
-                <a:tab algn="l" pos="0"/>
-              </a:tabLst>
-            </a:pPr>
-            <a:r>
-              <a:rPr lang="de-DE" sz="1400" b="0" u="none" strike="noStrike">
-                <a:solidFill>
-                  <a:srgbClr val="000000"/>
-                </a:solidFill>
-                <a:effectLst/>
-                <a:uFillTx/>
-                <a:latin typeface="Times New Roman"/>
-              </a:rPr>
-              <a:t>&lt;Fußzeile&gt;</a:t>
-            </a:r>
-            <a:endParaRPr lang="de-DE" sz="1400" b="0" u="none" strike="noStrike">
-              <a:solidFill>
-                <a:srgbClr val="000000"/>
-              </a:solidFill>
-              <a:effectLst/>
-              <a:uFillTx/>
-              <a:latin typeface="Times New Roman"/>
-            </a:endParaRPr>
-          </a:p>
-        </p:txBody>
-      </p:sp>
-      <p:sp>
-        <p:nvSpPr>
-          <p:cNvPr id="44" name="PlaceHolder 5"/>
-          <p:cNvSpPr>
-            <a:spLocks noGrp="1"/>
-          </p:cNvSpPr>
-          <p:nvPr>
-            <p:ph type="sldNum" idx="24"/>
-          </p:nvPr>
-        </p:nvSpPr>
-        <p:spPr>
-          <a:xfrm>
-            <a:off x="4843440" y="9181440"/>
-            <a:ext cx="1537920" cy="522360"/>
-          </a:xfrm>
-          <a:prstGeom prst="rect">
-            <a:avLst/>
-          </a:prstGeom>
-          <a:noFill/>
-          <a:ln w="0">
-            <a:noFill/>
-          </a:ln>
-        </p:spPr>
-        <p:txBody>
-          <a:bodyPr lIns="91440" rIns="91440" tIns="45720" bIns="45720" anchor="ctr">
-            <a:noAutofit/>
-          </a:bodyPr>
-          <a:lstStyle>
-            <a:lvl1pPr indent="0" algn="r" defTabSz="457200">
-              <a:lnSpc>
-                <a:spcPct val="100000"/>
-              </a:lnSpc>
-              <a:buNone/>
-              <a:tabLst>
-                <a:tab algn="l" pos="0"/>
-              </a:tabLst>
-              <a:defRPr lang="de-DE" sz="900" b="0" u="none" strike="noStrike">
-                <a:solidFill>
-                  <a:schemeClr val="dk1">
-                    <a:tint val="75000"/>
-                  </a:schemeClr>
-                </a:solidFill>
-                <a:effectLst/>
-                <a:uFillTx/>
-                <a:latin typeface="Calibri"/>
-              </a:defRPr>
-            </a:lvl1pPr>
-          </a:lstStyle>
-          <a:p>
-            <a:pPr indent="0" algn="r" defTabSz="457200">
-              <a:lnSpc>
-                <a:spcPct val="100000"/>
-              </a:lnSpc>
-              <a:buNone/>
-              <a:tabLst>
-                <a:tab algn="l" pos="0"/>
-              </a:tabLst>
-            </a:pPr>
-            <a:fld id="{37CED88C-BD9E-436E-A472-697681CF71EC}" type="slidenum">
-              <a:rPr lang="de-DE" sz="900" b="0" u="none" strike="noStrike">
-                <a:solidFill>
-                  <a:schemeClr val="dk1">
-                    <a:tint val="75000"/>
-                  </a:schemeClr>
-                </a:solidFill>
-                <a:effectLst/>
-                <a:uFillTx/>
-                <a:latin typeface="Calibri"/>
-              </a:rPr>
-              <a:t>&lt;Foliennummer&gt;</a:t>
-            </a:fld>
-            <a:endParaRPr lang="de-DE" sz="900" b="0" u="none" strike="noStrike">
-              <a:solidFill>
-                <a:srgbClr val="000000"/>
-              </a:solidFill>
-              <a:effectLst/>
-              <a:uFillTx/>
-              <a:latin typeface="Times New Roman"/>
-            </a:endParaRPr>
-          </a:p>
-        </p:txBody>
-      </p:sp>
-    </p:spTree>
-  </p:cSld>
-</p:sldLayout>
-</file>
-
-<file path=ppt/slideLayouts/slideLayout9.xml><?xml version="1.0" encoding="utf-8"?>
-<p:sldLayout xmlns:a="http://schemas.openxmlformats.org/drawingml/2006/main" xmlns:p="http://schemas.openxmlformats.org/presentationml/2006/main" xmlns:r="http://schemas.openxmlformats.org/officeDocument/2006/relationships" xmlns:p14="http://schemas.microsoft.com/office/powerpoint/2010/main" xmlns:p15="http://schemas.microsoft.com/office/powerpoint/2012/main" xmlns:mc="http://schemas.openxmlformats.org/markup-compatibility/2006" type="vertTitleAndTx" preserve="1">
-  <p:cSld name="Vertikaler Titel und Text">
-    <p:bg>
-      <p:bgPr>
-        <a:solidFill>
-          <a:srgbClr val="ffffff"/>
-        </a:solidFill>
-      </p:bgPr>
-    </p:bg>
-    <p:spTree>
-      <p:nvGrpSpPr>
-        <p:cNvPr id="1" name=""/>
-        <p:cNvGrpSpPr/>
-        <p:nvPr/>
-      </p:nvGrpSpPr>
-      <p:grpSpPr>
-        <a:xfrm>
-          <a:off x="0" y="0"/>
-          <a:ext cx="0" cy="0"/>
-          <a:chOff x="0" y="0"/>
-          <a:chExt cx="0" cy="0"/>
-        </a:xfrm>
-      </p:grpSpPr>
-      <p:sp>
-        <p:nvSpPr>
-          <p:cNvPr id="45" name="PlaceHolder 1"/>
-          <p:cNvSpPr>
-            <a:spLocks noGrp="1"/>
-          </p:cNvSpPr>
-          <p:nvPr>
-            <p:ph type="title"/>
-          </p:nvPr>
-        </p:nvSpPr>
-        <p:spPr>
-          <a:xfrm>
-            <a:off x="4907880" y="527400"/>
-            <a:ext cx="1473840" cy="8389800"/>
-          </a:xfrm>
-          <a:prstGeom prst="rect">
-            <a:avLst/>
-          </a:prstGeom>
-          <a:noFill/>
-          <a:ln w="0">
-            <a:noFill/>
-          </a:ln>
-        </p:spPr>
-        <p:txBody>
-          <a:bodyPr lIns="91440" rIns="91440" tIns="45720" bIns="45720" anchor="ctr" vert="eaVert">
-            <a:noAutofit/>
-          </a:bodyPr>
-          <a:p>
-            <a:pPr indent="0" defTabSz="685800">
-              <a:lnSpc>
-                <a:spcPct val="90000"/>
-              </a:lnSpc>
-              <a:buNone/>
-              <a:tabLst>
-                <a:tab algn="l" pos="0"/>
-              </a:tabLst>
-            </a:pPr>
-            <a:r>
-              <a:rPr lang="de-DE" sz="3300" b="0" u="none" strike="noStrike">
-                <a:solidFill>
-                  <a:schemeClr val="dk1"/>
-                </a:solidFill>
-                <a:effectLst/>
-                <a:uFillTx/>
-                <a:latin typeface="Calibri Light"/>
-              </a:rPr>
-              <a:t>Mastertitelformat bearbeiten</a:t>
-            </a:r>
-            <a:endParaRPr lang="de-DE" sz="3300" b="0" u="none" strike="noStrike">
-              <a:solidFill>
-                <a:srgbClr val="000000"/>
-              </a:solidFill>
-              <a:effectLst/>
-              <a:uFillTx/>
-              <a:latin typeface="Arial"/>
-            </a:endParaRPr>
-          </a:p>
-        </p:txBody>
-      </p:sp>
-      <p:sp>
-        <p:nvSpPr>
-          <p:cNvPr id="46" name="PlaceHolder 2"/>
-          <p:cNvSpPr>
-            <a:spLocks noGrp="1"/>
-          </p:cNvSpPr>
-          <p:nvPr>
-            <p:ph type="body"/>
-          </p:nvPr>
-        </p:nvSpPr>
-        <p:spPr>
-          <a:xfrm>
-            <a:off x="471600" y="527400"/>
-            <a:ext cx="4345560" cy="8389800"/>
-          </a:xfrm>
-          <a:prstGeom prst="rect">
-            <a:avLst/>
-          </a:prstGeom>
-          <a:noFill/>
-          <a:ln w="0">
-            <a:noFill/>
-          </a:ln>
-        </p:spPr>
-        <p:txBody>
-          <a:bodyPr lIns="91440" rIns="91440" tIns="45720" bIns="45720" anchor="t" vert="eaVert">
-            <a:noAutofit/>
-          </a:bodyPr>
-          <a:p>
-            <a:pPr marL="171360" indent="-171360" defTabSz="685800">
-              <a:lnSpc>
-                <a:spcPct val="90000"/>
-              </a:lnSpc>
-              <a:spcBef>
-                <a:spcPts val="751"/>
-              </a:spcBef>
-              <a:buClr>
-                <a:srgbClr val="000000"/>
-              </a:buClr>
-              <a:buFont typeface="Arial"/>
-              <a:buChar char="•"/>
-            </a:pPr>
-            <a:r>
-              <a:rPr lang="de-DE" sz="2100" b="0" u="none" strike="noStrike">
-                <a:solidFill>
-                  <a:schemeClr val="dk1"/>
-                </a:solidFill>
-                <a:effectLst/>
-                <a:uFillTx/>
-                <a:latin typeface="Calibri"/>
-              </a:rPr>
-              <a:t>Mastertextformat bearbeiten</a:t>
-            </a:r>
-            <a:endParaRPr lang="de-DE" sz="2100" b="0" u="none" strike="noStrike">
-              <a:solidFill>
-                <a:srgbClr val="000000"/>
-              </a:solidFill>
-              <a:effectLst/>
-              <a:uFillTx/>
-              <a:latin typeface="Arial"/>
-            </a:endParaRPr>
-          </a:p>
-          <a:p>
-            <a:pPr marL="514440" lvl="1" indent="-171360" defTabSz="685800">
-              <a:lnSpc>
-                <a:spcPct val="90000"/>
-              </a:lnSpc>
-              <a:spcBef>
-                <a:spcPts val="374"/>
-              </a:spcBef>
-              <a:buClr>
-                <a:srgbClr val="000000"/>
-              </a:buClr>
-              <a:buFont typeface="Arial"/>
-              <a:buChar char="•"/>
-            </a:pPr>
-            <a:r>
-              <a:rPr lang="de-DE" sz="1800" b="0" u="none" strike="noStrike">
-                <a:solidFill>
-                  <a:schemeClr val="dk1"/>
-                </a:solidFill>
-                <a:effectLst/>
-                <a:uFillTx/>
-                <a:latin typeface="Calibri"/>
-              </a:rPr>
-              <a:t>Zweite Ebene</a:t>
-            </a:r>
-            <a:endParaRPr lang="de-DE" sz="1800" b="0" u="none" strike="noStrike">
-              <a:solidFill>
-                <a:srgbClr val="000000"/>
-              </a:solidFill>
-              <a:effectLst/>
-              <a:uFillTx/>
-              <a:latin typeface="Arial"/>
-            </a:endParaRPr>
-          </a:p>
-          <a:p>
-            <a:pPr marL="857160" lvl="2" indent="-171360" defTabSz="685800">
-              <a:lnSpc>
-                <a:spcPct val="90000"/>
-              </a:lnSpc>
-              <a:spcBef>
-                <a:spcPts val="374"/>
-              </a:spcBef>
-              <a:buClr>
-                <a:srgbClr val="000000"/>
-              </a:buClr>
-              <a:buFont typeface="Arial"/>
-              <a:buChar char="•"/>
-            </a:pPr>
-            <a:r>
-              <a:rPr lang="de-DE" sz="1500" b="0" u="none" strike="noStrike">
-                <a:solidFill>
-                  <a:schemeClr val="dk1"/>
-                </a:solidFill>
-                <a:effectLst/>
-                <a:uFillTx/>
-                <a:latin typeface="Calibri"/>
-              </a:rPr>
-              <a:t>Dritte Ebene</a:t>
-            </a:r>
-            <a:endParaRPr lang="de-DE" sz="1500" b="0" u="none" strike="noStrike">
-              <a:solidFill>
-                <a:srgbClr val="000000"/>
-              </a:solidFill>
-              <a:effectLst/>
-              <a:uFillTx/>
-              <a:latin typeface="Arial"/>
-            </a:endParaRPr>
-          </a:p>
-          <a:p>
-            <a:pPr marL="1200240" lvl="3" indent="-171360" defTabSz="685800">
-              <a:lnSpc>
-                <a:spcPct val="90000"/>
-              </a:lnSpc>
-              <a:spcBef>
-                <a:spcPts val="374"/>
-              </a:spcBef>
-              <a:buClr>
-                <a:srgbClr val="000000"/>
-              </a:buClr>
-              <a:buFont typeface="Arial"/>
-              <a:buChar char="•"/>
-            </a:pPr>
-            <a:r>
-              <a:rPr lang="de-DE" sz="1350" b="0" u="none" strike="noStrike">
-                <a:solidFill>
-                  <a:schemeClr val="dk1"/>
-                </a:solidFill>
-                <a:effectLst/>
-                <a:uFillTx/>
-                <a:latin typeface="Calibri"/>
-              </a:rPr>
-              <a:t>Vierte Ebene</a:t>
-            </a:r>
-            <a:endParaRPr lang="de-DE" sz="1350" b="0" u="none" strike="noStrike">
-              <a:solidFill>
-                <a:srgbClr val="000000"/>
-              </a:solidFill>
-              <a:effectLst/>
-              <a:uFillTx/>
-              <a:latin typeface="Arial"/>
-            </a:endParaRPr>
-          </a:p>
-          <a:p>
-            <a:pPr marL="1542960" lvl="4" indent="-171360" defTabSz="685800">
-              <a:lnSpc>
-                <a:spcPct val="90000"/>
-              </a:lnSpc>
-              <a:spcBef>
-                <a:spcPts val="374"/>
-              </a:spcBef>
-              <a:buClr>
-                <a:srgbClr val="000000"/>
-              </a:buClr>
-              <a:buFont typeface="Arial"/>
-              <a:buChar char="•"/>
-            </a:pPr>
-            <a:r>
-              <a:rPr lang="de-DE" sz="1350" b="0" u="none" strike="noStrike">
-                <a:solidFill>
-                  <a:schemeClr val="dk1"/>
-                </a:solidFill>
-                <a:effectLst/>
-                <a:uFillTx/>
-                <a:latin typeface="Calibri"/>
-              </a:rPr>
-              <a:t>Fünfte Ebene</a:t>
-            </a:r>
-            <a:endParaRPr lang="de-DE" sz="1350" b="0" u="none" strike="noStrike">
-              <a:solidFill>
-                <a:srgbClr val="000000"/>
-              </a:solidFill>
-              <a:effectLst/>
-              <a:uFillTx/>
-              <a:latin typeface="Arial"/>
-            </a:endParaRPr>
-          </a:p>
-        </p:txBody>
-      </p:sp>
-      <p:sp>
-        <p:nvSpPr>
-          <p:cNvPr id="47" name="PlaceHolder 3"/>
+          <p:cNvPr id="48" name="PlaceHolder 2"/>
           <p:cNvSpPr>
             <a:spLocks noGrp="1"/>
           </p:cNvSpPr>
@@ -5585,7 +5585,7 @@
         <p:spPr>
           <a:xfrm>
             <a:off x="471600" y="9181440"/>
-            <a:ext cx="1537920" cy="522360"/>
+            <a:ext cx="1537200" cy="521640"/>
           </a:xfrm>
           <a:prstGeom prst="rect">
             <a:avLst/>
@@ -5656,7 +5656,7 @@
       </p:sp>
       <p:sp>
         <p:nvSpPr>
-          <p:cNvPr id="48" name="PlaceHolder 4"/>
+          <p:cNvPr id="49" name="PlaceHolder 3"/>
           <p:cNvSpPr>
             <a:spLocks noGrp="1"/>
           </p:cNvSpPr>
@@ -5667,7 +5667,7 @@
         <p:spPr>
           <a:xfrm>
             <a:off x="2271600" y="9181440"/>
-            <a:ext cx="2309400" cy="522360"/>
+            <a:ext cx="2308680" cy="521640"/>
           </a:xfrm>
           <a:prstGeom prst="rect">
             <a:avLst/>
@@ -5734,7 +5734,7 @@
       </p:sp>
       <p:sp>
         <p:nvSpPr>
-          <p:cNvPr id="49" name="PlaceHolder 5"/>
+          <p:cNvPr id="50" name="PlaceHolder 4"/>
           <p:cNvSpPr>
             <a:spLocks noGrp="1"/>
           </p:cNvSpPr>
@@ -5745,7 +5745,7 @@
         <p:spPr>
           <a:xfrm>
             <a:off x="4843440" y="9181440"/>
-            <a:ext cx="1537920" cy="522360"/>
+            <a:ext cx="1537200" cy="521640"/>
           </a:xfrm>
           <a:prstGeom prst="rect">
             <a:avLst/>
@@ -5790,7 +5790,7 @@
                 <a:tab algn="l" pos="0"/>
               </a:tabLst>
             </a:pPr>
-            <a:fld id="{9C9F8442-03BA-431D-A90A-74099F4C5C84}" type="slidenum">
+            <a:fld id="{83FD3373-298D-4943-8646-3A39D018292B}" type="slidenum">
               <a:rPr lang="de-DE" sz="900" b="0" u="none" strike="noStrike">
                 <a:solidFill>
                   <a:schemeClr val="dk1">
@@ -5881,7 +5881,7 @@
         <p:spPr>
           <a:xfrm>
             <a:off x="2269080" y="153360"/>
-            <a:ext cx="3411360" cy="730080"/>
+            <a:ext cx="3410640" cy="730080"/>
           </a:xfrm>
           <a:prstGeom prst="rect">
             <a:avLst/>
@@ -5966,7 +5966,7 @@
         <p:spPr>
           <a:xfrm>
             <a:off x="2251440" y="1010880"/>
-            <a:ext cx="4185360" cy="1004040"/>
+            <a:ext cx="4184640" cy="1004040"/>
           </a:xfrm>
           <a:prstGeom prst="rect">
             <a:avLst/>
@@ -6294,7 +6294,7 @@
         <p:spPr>
           <a:xfrm>
             <a:off x="355320" y="2082600"/>
-            <a:ext cx="5961600" cy="5040"/>
+            <a:ext cx="5962320" cy="5760"/>
           </a:xfrm>
           <a:prstGeom prst="straightConnector1">
             <a:avLst/>
@@ -6314,8 +6314,8 @@
         </p:nvSpPr>
         <p:spPr>
           <a:xfrm>
-            <a:off x="401400" y="2165040"/>
-            <a:ext cx="1137960" cy="303120"/>
+            <a:off x="401400" y="2129040"/>
+            <a:ext cx="1137240" cy="303120"/>
           </a:xfrm>
           <a:prstGeom prst="rect">
             <a:avLst/>
@@ -6372,8 +6372,8 @@
         </p:nvSpPr>
         <p:spPr>
           <a:xfrm>
-            <a:off x="540000" y="2457000"/>
-            <a:ext cx="5939640" cy="272520"/>
+            <a:off x="540000" y="2421000"/>
+            <a:ext cx="5759640" cy="273240"/>
           </a:xfrm>
           <a:prstGeom prst="rect">
             <a:avLst/>
@@ -6437,7 +6437,7 @@
         <p:spPr>
           <a:xfrm>
             <a:off x="2895480" y="3520440"/>
-            <a:ext cx="1671480" cy="303120"/>
+            <a:ext cx="1670760" cy="303120"/>
           </a:xfrm>
           <a:prstGeom prst="rect">
             <a:avLst/>
@@ -6495,7 +6495,7 @@
         <p:spPr>
           <a:xfrm>
             <a:off x="1285200" y="3860640"/>
-            <a:ext cx="5326200" cy="5976720"/>
+            <a:ext cx="5325480" cy="5976720"/>
           </a:xfrm>
           <a:prstGeom prst="rect">
             <a:avLst/>
@@ -7138,7 +7138,7 @@
         <p:spPr>
           <a:xfrm>
             <a:off x="291960" y="126720"/>
-            <a:ext cx="6012000" cy="5040"/>
+            <a:ext cx="6012720" cy="5760"/>
           </a:xfrm>
           <a:prstGeom prst="straightConnector1">
             <a:avLst/>
@@ -7159,7 +7159,7 @@
         <p:spPr>
           <a:xfrm>
             <a:off x="3208320" y="9675000"/>
-            <a:ext cx="959760" cy="227160"/>
+            <a:ext cx="959040" cy="227160"/>
           </a:xfrm>
           <a:prstGeom prst="rect">
             <a:avLst/>
@@ -7216,13 +7216,13 @@
         </p:nvPicPr>
         <p:blipFill>
           <a:blip r:embed="rId3"/>
-          <a:srcRect l="17036" t="10276" r="8874" b="25709"/>
+          <a:srcRect l="17031" t="10276" r="8874" b="25702"/>
           <a:stretch/>
         </p:blipFill>
         <p:spPr>
           <a:xfrm>
             <a:off x="495360" y="213480"/>
-            <a:ext cx="1557000" cy="1794960"/>
+            <a:ext cx="1556280" cy="1794240"/>
           </a:xfrm>
           <a:prstGeom prst="rect">
             <a:avLst/>
@@ -7242,7 +7242,7 @@
         <p:spPr>
           <a:xfrm>
             <a:off x="0" y="5254200"/>
-            <a:ext cx="1341000" cy="641160"/>
+            <a:ext cx="1340280" cy="640440"/>
           </a:xfrm>
           <a:prstGeom prst="rect">
             <a:avLst/>
@@ -7300,7 +7300,7 @@
         <p:spPr>
           <a:xfrm>
             <a:off x="1281240" y="3974760"/>
-            <a:ext cx="6480" cy="5656680"/>
+            <a:ext cx="7200" cy="5657400"/>
           </a:xfrm>
           <a:prstGeom prst="straightConnector1">
             <a:avLst/>
@@ -7321,7 +7321,7 @@
         <p:spPr>
           <a:xfrm>
             <a:off x="0" y="7233120"/>
-            <a:ext cx="1341000" cy="641160"/>
+            <a:ext cx="1340280" cy="640440"/>
           </a:xfrm>
           <a:prstGeom prst="rect">
             <a:avLst/>
@@ -7379,7 +7379,7 @@
         <p:spPr>
           <a:xfrm>
             <a:off x="0" y="8687520"/>
-            <a:ext cx="1341000" cy="638280"/>
+            <a:ext cx="1340280" cy="638280"/>
           </a:xfrm>
           <a:prstGeom prst="rect">
             <a:avLst/>
@@ -7437,7 +7437,7 @@
         <p:spPr>
           <a:xfrm>
             <a:off x="2520" y="3897000"/>
-            <a:ext cx="1341000" cy="272520"/>
+            <a:ext cx="1340280" cy="272520"/>
           </a:xfrm>
           <a:prstGeom prst="rect">
             <a:avLst/>
@@ -7525,7 +7525,7 @@
         <p:spPr>
           <a:xfrm>
             <a:off x="3149640" y="88920"/>
-            <a:ext cx="1348920" cy="303120"/>
+            <a:ext cx="1348200" cy="303120"/>
           </a:xfrm>
           <a:prstGeom prst="rect">
             <a:avLst/>
@@ -7583,7 +7583,7 @@
         <p:spPr>
           <a:xfrm>
             <a:off x="1346040" y="445680"/>
-            <a:ext cx="5310000" cy="3658680"/>
+            <a:ext cx="5309280" cy="3659400"/>
           </a:xfrm>
           <a:prstGeom prst="rect">
             <a:avLst/>
@@ -7986,7 +7986,7 @@
         <p:spPr>
           <a:xfrm>
             <a:off x="2768760" y="4718160"/>
-            <a:ext cx="2103120" cy="303120"/>
+            <a:ext cx="2102400" cy="303120"/>
           </a:xfrm>
           <a:prstGeom prst="rect">
             <a:avLst/>
@@ -8044,7 +8044,7 @@
         <p:spPr>
           <a:xfrm>
             <a:off x="1346040" y="5037840"/>
-            <a:ext cx="5506920" cy="272520"/>
+            <a:ext cx="5506200" cy="272520"/>
           </a:xfrm>
           <a:prstGeom prst="rect">
             <a:avLst/>
@@ -8102,7 +8102,7 @@
         <p:spPr>
           <a:xfrm>
             <a:off x="1346040" y="5676840"/>
-            <a:ext cx="5608440" cy="825840"/>
+            <a:ext cx="5607720" cy="825120"/>
           </a:xfrm>
           <a:prstGeom prst="rect">
             <a:avLst/>
@@ -8219,7 +8219,7 @@
         <p:spPr>
           <a:xfrm>
             <a:off x="3208320" y="9675000"/>
-            <a:ext cx="959760" cy="227160"/>
+            <a:ext cx="959040" cy="227160"/>
           </a:xfrm>
           <a:prstGeom prst="rect">
             <a:avLst/>
@@ -8277,7 +8277,7 @@
         <p:spPr>
           <a:xfrm>
             <a:off x="3174840" y="6566040"/>
-            <a:ext cx="1303200" cy="303120"/>
+            <a:ext cx="1302480" cy="303120"/>
           </a:xfrm>
           <a:prstGeom prst="rect">
             <a:avLst/>
@@ -8335,7 +8335,7 @@
         <p:spPr>
           <a:xfrm>
             <a:off x="657360" y="6971040"/>
-            <a:ext cx="5786280" cy="1379880"/>
+            <a:ext cx="5785560" cy="1369800"/>
           </a:xfrm>
           <a:prstGeom prst="rect">
             <a:avLst/>
@@ -8497,7 +8497,7 @@
                 <a:latin typeface="Tahoma"/>
                 <a:ea typeface="Tahoma"/>
               </a:rPr>
-              <a:t>C++</a:t>
+              <a:t>Opencode</a:t>
             </a:r>
             <a:endParaRPr lang="de-DE" sz="1200" b="0" u="none" strike="noStrike">
               <a:solidFill>
@@ -8783,7 +8783,7 @@
         <p:spPr>
           <a:xfrm>
             <a:off x="601200" y="8528400"/>
-            <a:ext cx="2127600" cy="1004040"/>
+            <a:ext cx="2126880" cy="1004040"/>
           </a:xfrm>
           <a:prstGeom prst="rect">
             <a:avLst/>
@@ -8940,7 +8940,7 @@
         <p:spPr>
           <a:xfrm>
             <a:off x="3491280" y="8546760"/>
-            <a:ext cx="2447640" cy="1010520"/>
+            <a:ext cx="2446920" cy="1009800"/>
           </a:xfrm>
           <a:prstGeom prst="rect">
             <a:avLst/>
@@ -9097,7 +9097,7 @@
         <p:spPr>
           <a:xfrm>
             <a:off x="1658160" y="7450920"/>
-            <a:ext cx="91800" cy="90720"/>
+            <a:ext cx="91080" cy="90000"/>
           </a:xfrm>
           <a:prstGeom prst="ellipse">
             <a:avLst/>
@@ -9155,7 +9155,7 @@
         <p:spPr>
           <a:xfrm>
             <a:off x="1803960" y="7446600"/>
-            <a:ext cx="91800" cy="90720"/>
+            <a:ext cx="91080" cy="90000"/>
           </a:xfrm>
           <a:prstGeom prst="ellipse">
             <a:avLst/>
@@ -9213,7 +9213,7 @@
         <p:spPr>
           <a:xfrm>
             <a:off x="1940400" y="7446600"/>
-            <a:ext cx="91800" cy="90720"/>
+            <a:ext cx="91080" cy="90000"/>
           </a:xfrm>
           <a:prstGeom prst="ellipse">
             <a:avLst/>
@@ -9271,7 +9271,7 @@
         <p:spPr>
           <a:xfrm>
             <a:off x="2076840" y="7446600"/>
-            <a:ext cx="91800" cy="90720"/>
+            <a:ext cx="91080" cy="90000"/>
           </a:xfrm>
           <a:prstGeom prst="ellipse">
             <a:avLst/>
@@ -9329,7 +9329,7 @@
         <p:spPr>
           <a:xfrm>
             <a:off x="2213280" y="7446600"/>
-            <a:ext cx="91800" cy="90720"/>
+            <a:ext cx="91080" cy="90000"/>
           </a:xfrm>
           <a:prstGeom prst="ellipse">
             <a:avLst/>
@@ -9387,7 +9387,7 @@
         <p:spPr>
           <a:xfrm>
             <a:off x="1663920" y="8152200"/>
-            <a:ext cx="91800" cy="90720"/>
+            <a:ext cx="91080" cy="90000"/>
           </a:xfrm>
           <a:prstGeom prst="ellipse">
             <a:avLst/>
@@ -9445,7 +9445,7 @@
         <p:spPr>
           <a:xfrm>
             <a:off x="1809360" y="8147880"/>
-            <a:ext cx="91800" cy="90720"/>
+            <a:ext cx="91080" cy="90000"/>
           </a:xfrm>
           <a:prstGeom prst="ellipse">
             <a:avLst/>
@@ -9503,7 +9503,7 @@
         <p:spPr>
           <a:xfrm>
             <a:off x="1945800" y="8147880"/>
-            <a:ext cx="91800" cy="90720"/>
+            <a:ext cx="91080" cy="90000"/>
           </a:xfrm>
           <a:prstGeom prst="ellipse">
             <a:avLst/>
@@ -9561,7 +9561,7 @@
         <p:spPr>
           <a:xfrm>
             <a:off x="2082240" y="8147880"/>
-            <a:ext cx="91800" cy="90720"/>
+            <a:ext cx="91080" cy="90000"/>
           </a:xfrm>
           <a:prstGeom prst="ellipse">
             <a:avLst/>
@@ -9617,7 +9617,7 @@
         <p:spPr>
           <a:xfrm>
             <a:off x="2218680" y="8147880"/>
-            <a:ext cx="91800" cy="90720"/>
+            <a:ext cx="91080" cy="90000"/>
           </a:xfrm>
           <a:prstGeom prst="ellipse">
             <a:avLst/>
@@ -9673,7 +9673,7 @@
         <p:spPr>
           <a:xfrm>
             <a:off x="3279600" y="8180280"/>
-            <a:ext cx="91800" cy="90720"/>
+            <a:ext cx="91080" cy="90000"/>
           </a:xfrm>
           <a:prstGeom prst="ellipse">
             <a:avLst/>
@@ -9731,7 +9731,7 @@
         <p:spPr>
           <a:xfrm>
             <a:off x="3425040" y="8175600"/>
-            <a:ext cx="91800" cy="90720"/>
+            <a:ext cx="91080" cy="90000"/>
           </a:xfrm>
           <a:prstGeom prst="ellipse">
             <a:avLst/>
@@ -9789,7 +9789,7 @@
         <p:spPr>
           <a:xfrm>
             <a:off x="3561480" y="8175600"/>
-            <a:ext cx="91800" cy="90720"/>
+            <a:ext cx="91080" cy="90000"/>
           </a:xfrm>
           <a:prstGeom prst="ellipse">
             <a:avLst/>
@@ -9847,7 +9847,7 @@
         <p:spPr>
           <a:xfrm>
             <a:off x="3697920" y="8175600"/>
-            <a:ext cx="91800" cy="90720"/>
+            <a:ext cx="91080" cy="90000"/>
           </a:xfrm>
           <a:prstGeom prst="ellipse">
             <a:avLst/>
@@ -9903,7 +9903,7 @@
         <p:spPr>
           <a:xfrm>
             <a:off x="3834360" y="8175600"/>
-            <a:ext cx="91800" cy="90720"/>
+            <a:ext cx="91080" cy="90000"/>
           </a:xfrm>
           <a:prstGeom prst="ellipse">
             <a:avLst/>
@@ -9959,7 +9959,7 @@
         <p:spPr>
           <a:xfrm>
             <a:off x="1658160" y="7793280"/>
-            <a:ext cx="91800" cy="90720"/>
+            <a:ext cx="91080" cy="90000"/>
           </a:xfrm>
           <a:prstGeom prst="ellipse">
             <a:avLst/>
@@ -10017,7 +10017,7 @@
         <p:spPr>
           <a:xfrm>
             <a:off x="1803960" y="7788600"/>
-            <a:ext cx="91800" cy="90720"/>
+            <a:ext cx="91080" cy="90000"/>
           </a:xfrm>
           <a:prstGeom prst="ellipse">
             <a:avLst/>
@@ -10075,7 +10075,7 @@
         <p:spPr>
           <a:xfrm>
             <a:off x="1940400" y="7788600"/>
-            <a:ext cx="91800" cy="90720"/>
+            <a:ext cx="91080" cy="90000"/>
           </a:xfrm>
           <a:prstGeom prst="ellipse">
             <a:avLst/>
@@ -10133,7 +10133,7 @@
         <p:spPr>
           <a:xfrm>
             <a:off x="2076840" y="7788600"/>
-            <a:ext cx="91800" cy="90720"/>
+            <a:ext cx="91080" cy="90000"/>
           </a:xfrm>
           <a:prstGeom prst="ellipse">
             <a:avLst/>
@@ -10191,7 +10191,7 @@
         <p:spPr>
           <a:xfrm>
             <a:off x="2213280" y="7788600"/>
-            <a:ext cx="91800" cy="90720"/>
+            <a:ext cx="91080" cy="90000"/>
           </a:xfrm>
           <a:prstGeom prst="ellipse">
             <a:avLst/>
@@ -10247,7 +10247,7 @@
         <p:spPr>
           <a:xfrm>
             <a:off x="3268080" y="7821360"/>
-            <a:ext cx="91800" cy="90720"/>
+            <a:ext cx="91080" cy="90000"/>
           </a:xfrm>
           <a:prstGeom prst="ellipse">
             <a:avLst/>
@@ -10305,7 +10305,7 @@
         <p:spPr>
           <a:xfrm>
             <a:off x="3413880" y="7816680"/>
-            <a:ext cx="91800" cy="90720"/>
+            <a:ext cx="91080" cy="90000"/>
           </a:xfrm>
           <a:prstGeom prst="ellipse">
             <a:avLst/>
@@ -10363,7 +10363,7 @@
         <p:spPr>
           <a:xfrm>
             <a:off x="3550320" y="7816680"/>
-            <a:ext cx="91800" cy="90720"/>
+            <a:ext cx="91080" cy="90000"/>
           </a:xfrm>
           <a:prstGeom prst="ellipse">
             <a:avLst/>
@@ -10421,7 +10421,7 @@
         <p:spPr>
           <a:xfrm>
             <a:off x="3686760" y="7816680"/>
-            <a:ext cx="91800" cy="90720"/>
+            <a:ext cx="91080" cy="90000"/>
           </a:xfrm>
           <a:prstGeom prst="ellipse">
             <a:avLst/>
@@ -10479,7 +10479,7 @@
         <p:spPr>
           <a:xfrm>
             <a:off x="3823200" y="7816680"/>
-            <a:ext cx="91800" cy="90720"/>
+            <a:ext cx="91080" cy="90000"/>
           </a:xfrm>
           <a:prstGeom prst="ellipse">
             <a:avLst/>
@@ -10535,7 +10535,7 @@
         <p:spPr>
           <a:xfrm>
             <a:off x="3279600" y="7450920"/>
-            <a:ext cx="91800" cy="90720"/>
+            <a:ext cx="91080" cy="90000"/>
           </a:xfrm>
           <a:prstGeom prst="ellipse">
             <a:avLst/>
@@ -10593,7 +10593,7 @@
         <p:spPr>
           <a:xfrm>
             <a:off x="3425040" y="7446600"/>
-            <a:ext cx="91800" cy="90720"/>
+            <a:ext cx="91080" cy="90000"/>
           </a:xfrm>
           <a:prstGeom prst="ellipse">
             <a:avLst/>
@@ -10651,7 +10651,7 @@
         <p:spPr>
           <a:xfrm>
             <a:off x="3561480" y="7446600"/>
-            <a:ext cx="91800" cy="90720"/>
+            <a:ext cx="91080" cy="90000"/>
           </a:xfrm>
           <a:prstGeom prst="ellipse">
             <a:avLst/>
@@ -10709,7 +10709,7 @@
         <p:spPr>
           <a:xfrm>
             <a:off x="3697920" y="7446600"/>
-            <a:ext cx="91800" cy="90720"/>
+            <a:ext cx="91080" cy="90000"/>
           </a:xfrm>
           <a:prstGeom prst="ellipse">
             <a:avLst/>
@@ -10767,7 +10767,7 @@
         <p:spPr>
           <a:xfrm>
             <a:off x="3834360" y="7446600"/>
-            <a:ext cx="91800" cy="90720"/>
+            <a:ext cx="91080" cy="90000"/>
           </a:xfrm>
           <a:prstGeom prst="ellipse">
             <a:avLst/>
@@ -10823,7 +10823,7 @@
         <p:spPr>
           <a:xfrm>
             <a:off x="5243040" y="7450200"/>
-            <a:ext cx="91800" cy="90720"/>
+            <a:ext cx="91080" cy="90000"/>
           </a:xfrm>
           <a:prstGeom prst="ellipse">
             <a:avLst/>
@@ -10881,7 +10881,7 @@
         <p:spPr>
           <a:xfrm>
             <a:off x="5388480" y="7445520"/>
-            <a:ext cx="91800" cy="90720"/>
+            <a:ext cx="91080" cy="90000"/>
           </a:xfrm>
           <a:prstGeom prst="ellipse">
             <a:avLst/>
@@ -10939,7 +10939,7 @@
         <p:spPr>
           <a:xfrm>
             <a:off x="5524920" y="7445520"/>
-            <a:ext cx="91800" cy="90720"/>
+            <a:ext cx="91080" cy="90000"/>
           </a:xfrm>
           <a:prstGeom prst="ellipse">
             <a:avLst/>
@@ -10997,7 +10997,7 @@
         <p:spPr>
           <a:xfrm>
             <a:off x="5661360" y="7445520"/>
-            <a:ext cx="91800" cy="90720"/>
+            <a:ext cx="91080" cy="90000"/>
           </a:xfrm>
           <a:prstGeom prst="ellipse">
             <a:avLst/>
@@ -11053,7 +11053,7 @@
         <p:spPr>
           <a:xfrm>
             <a:off x="5797800" y="7445520"/>
-            <a:ext cx="91800" cy="90720"/>
+            <a:ext cx="91080" cy="90000"/>
           </a:xfrm>
           <a:prstGeom prst="ellipse">
             <a:avLst/>
@@ -11109,7 +11109,7 @@
         <p:spPr>
           <a:xfrm>
             <a:off x="5243040" y="7793280"/>
-            <a:ext cx="91800" cy="90720"/>
+            <a:ext cx="91080" cy="90000"/>
           </a:xfrm>
           <a:prstGeom prst="ellipse">
             <a:avLst/>
@@ -11167,7 +11167,7 @@
         <p:spPr>
           <a:xfrm>
             <a:off x="5388480" y="7788600"/>
-            <a:ext cx="91800" cy="90720"/>
+            <a:ext cx="91080" cy="90000"/>
           </a:xfrm>
           <a:prstGeom prst="ellipse">
             <a:avLst/>
@@ -11225,7 +11225,7 @@
         <p:spPr>
           <a:xfrm>
             <a:off x="5524920" y="7788600"/>
-            <a:ext cx="91800" cy="90720"/>
+            <a:ext cx="91080" cy="90000"/>
           </a:xfrm>
           <a:prstGeom prst="ellipse">
             <a:avLst/>
@@ -11283,7 +11283,7 @@
         <p:spPr>
           <a:xfrm>
             <a:off x="5661360" y="7788600"/>
-            <a:ext cx="91800" cy="90720"/>
+            <a:ext cx="91080" cy="90000"/>
           </a:xfrm>
           <a:prstGeom prst="ellipse">
             <a:avLst/>
@@ -11341,7 +11341,7 @@
         <p:spPr>
           <a:xfrm>
             <a:off x="5797800" y="7788600"/>
-            <a:ext cx="91800" cy="90720"/>
+            <a:ext cx="91080" cy="90000"/>
           </a:xfrm>
           <a:prstGeom prst="ellipse">
             <a:avLst/>
@@ -11397,7 +11397,7 @@
         <p:spPr>
           <a:xfrm>
             <a:off x="5246280" y="8147520"/>
-            <a:ext cx="91800" cy="90720"/>
+            <a:ext cx="91080" cy="90000"/>
           </a:xfrm>
           <a:prstGeom prst="ellipse">
             <a:avLst/>
@@ -11455,7 +11455,7 @@
         <p:spPr>
           <a:xfrm>
             <a:off x="5392080" y="8143200"/>
-            <a:ext cx="91800" cy="90720"/>
+            <a:ext cx="91080" cy="90000"/>
           </a:xfrm>
           <a:prstGeom prst="ellipse">
             <a:avLst/>
@@ -11513,7 +11513,7 @@
         <p:spPr>
           <a:xfrm>
             <a:off x="5528520" y="8143200"/>
-            <a:ext cx="91800" cy="90720"/>
+            <a:ext cx="91080" cy="90000"/>
           </a:xfrm>
           <a:prstGeom prst="ellipse">
             <a:avLst/>
@@ -11571,7 +11571,7 @@
         <p:spPr>
           <a:xfrm>
             <a:off x="5664960" y="8143200"/>
-            <a:ext cx="91800" cy="90720"/>
+            <a:ext cx="91080" cy="90000"/>
           </a:xfrm>
           <a:prstGeom prst="ellipse">
             <a:avLst/>
@@ -11629,7 +11629,7 @@
         <p:spPr>
           <a:xfrm>
             <a:off x="5801400" y="8143200"/>
-            <a:ext cx="91800" cy="90720"/>
+            <a:ext cx="91080" cy="90000"/>
           </a:xfrm>
           <a:prstGeom prst="ellipse">
             <a:avLst/>
@@ -11685,7 +11685,7 @@
         <p:spPr>
           <a:xfrm>
             <a:off x="0" y="1242720"/>
-            <a:ext cx="1341000" cy="641160"/>
+            <a:ext cx="1340280" cy="640440"/>
           </a:xfrm>
           <a:prstGeom prst="rect">
             <a:avLst/>
@@ -11743,7 +11743,7 @@
         <p:spPr>
           <a:xfrm>
             <a:off x="1282680" y="444240"/>
-            <a:ext cx="5040" cy="5897880"/>
+            <a:ext cx="5760" cy="5898600"/>
           </a:xfrm>
           <a:prstGeom prst="straightConnector1">
             <a:avLst/>
@@ -11764,7 +11764,7 @@
         <p:spPr>
           <a:xfrm>
             <a:off x="0" y="3353040"/>
-            <a:ext cx="1341000" cy="641160"/>
+            <a:ext cx="1340280" cy="640440"/>
           </a:xfrm>
           <a:prstGeom prst="rect">
             <a:avLst/>
@@ -11822,7 +11822,7 @@
         <p:spPr>
           <a:xfrm>
             <a:off x="0" y="4940280"/>
-            <a:ext cx="1341000" cy="641160"/>
+            <a:ext cx="1340280" cy="640440"/>
           </a:xfrm>
           <a:prstGeom prst="rect">
             <a:avLst/>
@@ -11880,7 +11880,7 @@
         <p:spPr>
           <a:xfrm>
             <a:off x="0" y="5664240"/>
-            <a:ext cx="1341000" cy="641160"/>
+            <a:ext cx="1340280" cy="640440"/>
           </a:xfrm>
           <a:prstGeom prst="rect">
             <a:avLst/>
@@ -11965,7 +11965,7 @@
         <p:spPr>
           <a:xfrm>
             <a:off x="360" y="444960"/>
-            <a:ext cx="1341000" cy="455400"/>
+            <a:ext cx="1340280" cy="455400"/>
           </a:xfrm>
           <a:prstGeom prst="rect">
             <a:avLst/>
@@ -12010,6 +12010,64 @@
               <a:effectLst/>
               <a:uFillTx/>
               <a:latin typeface="Arial"/>
+            </a:endParaRPr>
+          </a:p>
+        </p:txBody>
+      </p:sp>
+      <p:sp>
+        <p:nvSpPr>
+          <p:cNvPr id="136" name="Ellipse 3"/>
+          <p:cNvSpPr/>
+          <p:nvPr/>
+        </p:nvSpPr>
+        <p:spPr>
+          <a:xfrm>
+            <a:off x="5668920" y="7445880"/>
+            <a:ext cx="91080" cy="90000"/>
+          </a:xfrm>
+          <a:prstGeom prst="ellipse">
+            <a:avLst/>
+          </a:prstGeom>
+          <a:solidFill>
+            <a:srgbClr val="002060"/>
+          </a:solidFill>
+          <a:ln>
+            <a:solidFill>
+              <a:srgbClr val="1d3155"/>
+            </a:solidFill>
+          </a:ln>
+        </p:spPr>
+        <p:style>
+          <a:lnRef idx="2">
+            <a:schemeClr val="accent1">
+              <a:shade val="15000"/>
+            </a:schemeClr>
+          </a:lnRef>
+          <a:fillRef idx="1">
+            <a:schemeClr val="accent1"/>
+          </a:fillRef>
+          <a:effectRef idx="0">
+            <a:schemeClr val="accent1"/>
+          </a:effectRef>
+          <a:fontRef idx="minor"/>
+        </p:style>
+        <p:txBody>
+          <a:bodyPr lIns="90000" rIns="90000" tIns="23040" bIns="23040" anchor="ctr">
+            <a:noAutofit/>
+          </a:bodyPr>
+          <a:p>
+            <a:pPr>
+              <a:lnSpc>
+                <a:spcPct val="100000"/>
+              </a:lnSpc>
+            </a:pPr>
+            <a:endParaRPr lang="de-DE" sz="1800" b="0" u="none" strike="noStrike">
+              <a:solidFill>
+                <a:schemeClr val="lt1"/>
+              </a:solidFill>
+              <a:effectLst/>
+              <a:uFillTx/>
+              <a:latin typeface="Calibri"/>
             </a:endParaRPr>
           </a:p>
         </p:txBody>
